--- a/infographie/presentation_infographique.pptx
+++ b/infographie/presentation_infographique.pptx
@@ -3171,7 +3171,7 @@
     <p:bg>
       <p:bgPr>
         <a:solidFill>
-          <a:srgbClr val="16213D"/>
+          <a:srgbClr val="101038"/>
         </a:solidFill>
       </p:bgPr>
     </p:bg>
@@ -3204,7 +3204,7 @@
             <a:avLst/>
           </a:prstGeom>
           <a:solidFill>
-            <a:srgbClr val="24365E"/>
+            <a:srgbClr val="23236B"/>
           </a:solidFill>
           <a:ln/>
         </p:spPr>
@@ -3224,14 +3224,120 @@
             <a:avLst/>
           </a:prstGeom>
           <a:solidFill>
-            <a:srgbClr val="24365E"/>
+            <a:srgbClr val="23236B"/>
           </a:solidFill>
           <a:ln/>
         </p:spPr>
       </p:sp>
       <p:sp>
         <p:nvSpPr>
-          <p:cNvPr id="4" name="Text 2"/>
+          <p:cNvPr id="4" name="Shape 2"/>
+          <p:cNvSpPr/>
+          <p:nvPr/>
+        </p:nvSpPr>
+        <p:spPr>
+          <a:xfrm>
+            <a:off x="566928" y="411480"/>
+            <a:ext cx="1234440" cy="1234440"/>
+          </a:xfrm>
+          <a:prstGeom prst="roundRect">
+            <a:avLst>
+              <a:gd name="adj" fmla="val 7407"/>
+            </a:avLst>
+          </a:prstGeom>
+          <a:solidFill>
+            <a:srgbClr val="FFFFFF"/>
+          </a:solidFill>
+          <a:ln/>
+          <a:effectLst>
+            <a:outerShdw sx="100000" sy="100000" kx="0" ky="0" algn="bl" rotWithShape="0" blurRad="127000" dist="25400" dir="5400000">
+              <a:srgbClr val="13134F">
+                <a:alpha val="22000"/>
+              </a:srgbClr>
+            </a:outerShdw>
+          </a:effectLst>
+        </p:spPr>
+      </p:sp>
+      <p:pic>
+        <p:nvPicPr>
+          <p:cNvPr id="5" name="Image 0" descr="logos/logo_ensae_new.png">    </p:cNvPr>
+          <p:cNvPicPr>
+            <a:picLocks noChangeAspect="1"/>
+          </p:cNvPicPr>
+          <p:nvPr/>
+        </p:nvPicPr>
+        <p:blipFill>
+          <a:blip r:embed="rId1"/>
+          <a:stretch>
+            <a:fillRect/>
+          </a:stretch>
+        </p:blipFill>
+        <p:spPr>
+          <a:xfrm>
+            <a:off x="685800" y="530352"/>
+            <a:ext cx="996696" cy="996696"/>
+          </a:xfrm>
+          <a:prstGeom prst="rect">
+            <a:avLst/>
+          </a:prstGeom>
+        </p:spPr>
+      </p:pic>
+      <p:sp>
+        <p:nvSpPr>
+          <p:cNvPr id="6" name="Shape 3"/>
+          <p:cNvSpPr/>
+          <p:nvPr/>
+        </p:nvSpPr>
+        <p:spPr>
+          <a:xfrm>
+            <a:off x="10387584" y="411480"/>
+            <a:ext cx="1234440" cy="1234440"/>
+          </a:xfrm>
+          <a:prstGeom prst="roundRect">
+            <a:avLst>
+              <a:gd name="adj" fmla="val 7407"/>
+            </a:avLst>
+          </a:prstGeom>
+          <a:solidFill>
+            <a:srgbClr val="FFFFFF"/>
+          </a:solidFill>
+          <a:ln/>
+          <a:effectLst>
+            <a:outerShdw sx="100000" sy="100000" kx="0" ky="0" algn="bl" rotWithShape="0" blurRad="127000" dist="25400" dir="5400000">
+              <a:srgbClr val="13134F">
+                <a:alpha val="22000"/>
+              </a:srgbClr>
+            </a:outerShdw>
+          </a:effectLst>
+        </p:spPr>
+      </p:sp>
+      <p:pic>
+        <p:nvPicPr>
+          <p:cNvPr id="7" name="Image 1" descr="logos/logo_ansd.jpg">    </p:cNvPr>
+          <p:cNvPicPr>
+            <a:picLocks noChangeAspect="1"/>
+          </p:cNvPicPr>
+          <p:nvPr/>
+        </p:nvPicPr>
+        <p:blipFill>
+          <a:blip r:embed="rId2"/>
+          <a:stretch>
+            <a:fillRect/>
+          </a:stretch>
+        </p:blipFill>
+        <p:spPr>
+          <a:xfrm>
+            <a:off x="10506456" y="612648"/>
+            <a:ext cx="996696" cy="832104"/>
+          </a:xfrm>
+          <a:prstGeom prst="rect">
+            <a:avLst/>
+          </a:prstGeom>
+        </p:spPr>
+      </p:pic>
+      <p:sp>
+        <p:nvSpPr>
+          <p:cNvPr id="8" name="Text 4"/>
           <p:cNvSpPr/>
           <p:nvPr/>
         </p:nvSpPr>
@@ -3270,7 +3376,7 @@
       </p:sp>
       <p:sp>
         <p:nvSpPr>
-          <p:cNvPr id="5" name="Text 3"/>
+          <p:cNvPr id="9" name="Text 5"/>
           <p:cNvSpPr/>
           <p:nvPr/>
         </p:nvSpPr>
@@ -3295,7 +3401,7 @@
             <a:r>
               <a:rPr lang="en-US" sz="1250" dirty="0">
                 <a:solidFill>
-                  <a:srgbClr val="AFC0DA"/>
+                  <a:srgbClr val="B7B7DB"/>
                 </a:solidFill>
                 <a:latin typeface="Calibri" pitchFamily="34" charset="0"/>
                 <a:ea typeface="Calibri" pitchFamily="34" charset="-122"/>
@@ -3309,7 +3415,7 @@
       </p:sp>
       <p:sp>
         <p:nvSpPr>
-          <p:cNvPr id="6" name="Text 4"/>
+          <p:cNvPr id="10" name="Text 6"/>
           <p:cNvSpPr/>
           <p:nvPr/>
         </p:nvSpPr>
@@ -3371,7 +3477,7 @@
       </p:sp>
       <p:sp>
         <p:nvSpPr>
-          <p:cNvPr id="7" name="Text 5"/>
+          <p:cNvPr id="11" name="Text 7"/>
           <p:cNvSpPr/>
           <p:nvPr/>
         </p:nvSpPr>
@@ -3410,7 +3516,7 @@
       </p:sp>
       <p:sp>
         <p:nvSpPr>
-          <p:cNvPr id="8" name="Text 6"/>
+          <p:cNvPr id="12" name="Text 8"/>
           <p:cNvSpPr/>
           <p:nvPr/>
         </p:nvSpPr>
@@ -3449,7 +3555,7 @@
       </p:sp>
       <p:sp>
         <p:nvSpPr>
-          <p:cNvPr id="9" name="Text 7"/>
+          <p:cNvPr id="13" name="Text 9"/>
           <p:cNvSpPr/>
           <p:nvPr/>
         </p:nvSpPr>
@@ -3488,7 +3594,7 @@
       </p:sp>
       <p:sp>
         <p:nvSpPr>
-          <p:cNvPr id="10" name="Text 8"/>
+          <p:cNvPr id="14" name="Text 10"/>
           <p:cNvSpPr/>
           <p:nvPr/>
         </p:nvSpPr>
@@ -3516,7 +3622,7 @@
             <a:r>
               <a:rPr lang="en-US" sz="1050" dirty="0">
                 <a:solidFill>
-                  <a:srgbClr val="AFC0DA"/>
+                  <a:srgbClr val="B7B7DB"/>
                 </a:solidFill>
                 <a:latin typeface="Calibri" pitchFamily="34" charset="0"/>
                 <a:ea typeface="Calibri" pitchFamily="34" charset="-122"/>
@@ -3530,7 +3636,7 @@
       </p:sp>
       <p:sp>
         <p:nvSpPr>
-          <p:cNvPr id="11" name="Text 9"/>
+          <p:cNvPr id="15" name="Text 11"/>
           <p:cNvSpPr/>
           <p:nvPr/>
         </p:nvSpPr>
@@ -3569,7 +3675,7 @@
       </p:sp>
       <p:sp>
         <p:nvSpPr>
-          <p:cNvPr id="12" name="Text 10"/>
+          <p:cNvPr id="16" name="Text 12"/>
           <p:cNvSpPr/>
           <p:nvPr/>
         </p:nvSpPr>
@@ -3608,7 +3714,7 @@
       </p:sp>
       <p:sp>
         <p:nvSpPr>
-          <p:cNvPr id="13" name="Text 11"/>
+          <p:cNvPr id="17" name="Text 13"/>
           <p:cNvSpPr/>
           <p:nvPr/>
         </p:nvSpPr>
@@ -3636,7 +3742,7 @@
             <a:r>
               <a:rPr lang="en-US" sz="1050" dirty="0">
                 <a:solidFill>
-                  <a:srgbClr val="AFC0DA"/>
+                  <a:srgbClr val="B7B7DB"/>
                 </a:solidFill>
                 <a:latin typeface="Calibri" pitchFamily="34" charset="0"/>
                 <a:ea typeface="Calibri" pitchFamily="34" charset="-122"/>
@@ -3650,7 +3756,7 @@
       </p:sp>
       <p:sp>
         <p:nvSpPr>
-          <p:cNvPr id="14" name="Text 12"/>
+          <p:cNvPr id="18" name="Text 14"/>
           <p:cNvSpPr/>
           <p:nvPr/>
         </p:nvSpPr>
@@ -3701,7 +3807,7 @@
     <p:bg>
       <p:bgPr>
         <a:solidFill>
-          <a:srgbClr val="FBFAF8"/>
+          <a:srgbClr val="FFFFFF"/>
         </a:solidFill>
       </p:bgPr>
     </p:bg>
@@ -3746,7 +3852,7 @@
             <a:r>
               <a:rPr lang="en-US" sz="2700" b="1" dirty="0">
                 <a:solidFill>
-                  <a:srgbClr val="1E2B4A"/>
+                  <a:srgbClr val="191970"/>
                 </a:solidFill>
                 <a:latin typeface="Calibri" pitchFamily="34" charset="0"/>
                 <a:ea typeface="Calibri" pitchFamily="34" charset="-122"/>
@@ -3817,13 +3923,13 @@
             </a:avLst>
           </a:prstGeom>
           <a:solidFill>
-            <a:srgbClr val="FFFFFF"/>
+            <a:srgbClr val="F4F5FA"/>
           </a:solidFill>
           <a:ln/>
           <a:effectLst>
             <a:outerShdw sx="100000" sy="100000" kx="0" ky="0" algn="bl" rotWithShape="0" blurRad="127000" dist="25400" dir="5400000">
-              <a:srgbClr val="1E2B4A">
-                <a:alpha val="13000"/>
+              <a:srgbClr val="13134F">
+                <a:alpha val="10000"/>
               </a:srgbClr>
             </a:outerShdw>
           </a:effectLst>
@@ -3844,7 +3950,7 @@
             <a:avLst/>
           </a:prstGeom>
           <a:solidFill>
-            <a:srgbClr val="41639E"/>
+            <a:srgbClr val="4444AD"/>
           </a:solidFill>
           <a:ln w="31750">
             <a:solidFill>
@@ -3854,7 +3960,7 @@
           </a:ln>
           <a:effectLst>
             <a:outerShdw sx="100000" sy="100000" kx="0" ky="0" algn="bl" rotWithShape="0" blurRad="127000" dist="25400" dir="5400000">
-              <a:srgbClr val="1E2B4A">
+              <a:srgbClr val="13134F">
                 <a:alpha val="18000"/>
               </a:srgbClr>
             </a:outerShdw>
@@ -3944,13 +4050,13 @@
             </a:avLst>
           </a:prstGeom>
           <a:solidFill>
-            <a:srgbClr val="FFFFFF"/>
+            <a:srgbClr val="F4F5FA"/>
           </a:solidFill>
           <a:ln/>
           <a:effectLst>
             <a:outerShdw sx="100000" sy="100000" kx="0" ky="0" algn="bl" rotWithShape="0" blurRad="127000" dist="25400" dir="5400000">
-              <a:srgbClr val="1E2B4A">
-                <a:alpha val="13000"/>
+              <a:srgbClr val="13134F">
+                <a:alpha val="10000"/>
               </a:srgbClr>
             </a:outerShdw>
           </a:effectLst>
@@ -3971,7 +4077,7 @@
             <a:avLst/>
           </a:prstGeom>
           <a:solidFill>
-            <a:srgbClr val="3E8C9A"/>
+            <a:srgbClr val="2A2A80"/>
           </a:solidFill>
           <a:ln w="31750">
             <a:solidFill>
@@ -3981,7 +4087,7 @@
           </a:ln>
           <a:effectLst>
             <a:outerShdw sx="100000" sy="100000" kx="0" ky="0" algn="bl" rotWithShape="0" blurRad="127000" dist="25400" dir="5400000">
-              <a:srgbClr val="1E2B4A">
+              <a:srgbClr val="13134F">
                 <a:alpha val="18000"/>
               </a:srgbClr>
             </a:outerShdw>
@@ -4071,13 +4177,13 @@
             </a:avLst>
           </a:prstGeom>
           <a:solidFill>
-            <a:srgbClr val="FFFFFF"/>
+            <a:srgbClr val="F4F5FA"/>
           </a:solidFill>
           <a:ln/>
           <a:effectLst>
             <a:outerShdw sx="100000" sy="100000" kx="0" ky="0" algn="bl" rotWithShape="0" blurRad="127000" dist="25400" dir="5400000">
-              <a:srgbClr val="1E2B4A">
-                <a:alpha val="13000"/>
+              <a:srgbClr val="13134F">
+                <a:alpha val="10000"/>
               </a:srgbClr>
             </a:outerShdw>
           </a:effectLst>
@@ -4098,7 +4204,7 @@
             <a:avLst/>
           </a:prstGeom>
           <a:solidFill>
-            <a:srgbClr val="41639E"/>
+            <a:srgbClr val="4444AD"/>
           </a:solidFill>
           <a:ln w="31750">
             <a:solidFill>
@@ -4108,7 +4214,7 @@
           </a:ln>
           <a:effectLst>
             <a:outerShdw sx="100000" sy="100000" kx="0" ky="0" algn="bl" rotWithShape="0" blurRad="127000" dist="25400" dir="5400000">
-              <a:srgbClr val="1E2B4A">
+              <a:srgbClr val="13134F">
                 <a:alpha val="18000"/>
               </a:srgbClr>
             </a:outerShdw>
@@ -4198,13 +4304,13 @@
             </a:avLst>
           </a:prstGeom>
           <a:solidFill>
-            <a:srgbClr val="FFFFFF"/>
+            <a:srgbClr val="F4F5FA"/>
           </a:solidFill>
           <a:ln/>
           <a:effectLst>
             <a:outerShdw sx="100000" sy="100000" kx="0" ky="0" algn="bl" rotWithShape="0" blurRad="127000" dist="25400" dir="5400000">
-              <a:srgbClr val="1E2B4A">
-                <a:alpha val="13000"/>
+              <a:srgbClr val="13134F">
+                <a:alpha val="10000"/>
               </a:srgbClr>
             </a:outerShdw>
           </a:effectLst>
@@ -4235,7 +4341,7 @@
           </a:ln>
           <a:effectLst>
             <a:outerShdw sx="100000" sy="100000" kx="0" ky="0" algn="bl" rotWithShape="0" blurRad="127000" dist="25400" dir="5400000">
-              <a:srgbClr val="1E2B4A">
+              <a:srgbClr val="13134F">
                 <a:alpha val="18000"/>
               </a:srgbClr>
             </a:outerShdw>
@@ -4325,13 +4431,13 @@
             </a:avLst>
           </a:prstGeom>
           <a:solidFill>
-            <a:srgbClr val="FFFFFF"/>
+            <a:srgbClr val="F4F5FA"/>
           </a:solidFill>
           <a:ln/>
           <a:effectLst>
             <a:outerShdw sx="100000" sy="100000" kx="0" ky="0" algn="bl" rotWithShape="0" blurRad="127000" dist="25400" dir="5400000">
-              <a:srgbClr val="1E2B4A">
-                <a:alpha val="13000"/>
+              <a:srgbClr val="13134F">
+                <a:alpha val="10000"/>
               </a:srgbClr>
             </a:outerShdw>
           </a:effectLst>
@@ -4352,7 +4458,7 @@
             <a:avLst/>
           </a:prstGeom>
           <a:solidFill>
-            <a:srgbClr val="C98A24"/>
+            <a:srgbClr val="6E6ECB"/>
           </a:solidFill>
           <a:ln w="31750">
             <a:solidFill>
@@ -4362,7 +4468,7 @@
           </a:ln>
           <a:effectLst>
             <a:outerShdw sx="100000" sy="100000" kx="0" ky="0" algn="bl" rotWithShape="0" blurRad="127000" dist="25400" dir="5400000">
-              <a:srgbClr val="1E2B4A">
+              <a:srgbClr val="13134F">
                 <a:alpha val="18000"/>
               </a:srgbClr>
             </a:outerShdw>
@@ -4452,13 +4558,13 @@
             </a:avLst>
           </a:prstGeom>
           <a:solidFill>
-            <a:srgbClr val="FFFFFF"/>
+            <a:srgbClr val="F4F5FA"/>
           </a:solidFill>
           <a:ln/>
           <a:effectLst>
             <a:outerShdw sx="100000" sy="100000" kx="0" ky="0" algn="bl" rotWithShape="0" blurRad="127000" dist="25400" dir="5400000">
-              <a:srgbClr val="1E2B4A">
-                <a:alpha val="13000"/>
+              <a:srgbClr val="13134F">
+                <a:alpha val="10000"/>
               </a:srgbClr>
             </a:outerShdw>
           </a:effectLst>
@@ -4479,7 +4585,7 @@
             <a:avLst/>
           </a:prstGeom>
           <a:solidFill>
-            <a:srgbClr val="3E8C9A"/>
+            <a:srgbClr val="2A2A80"/>
           </a:solidFill>
           <a:ln w="31750">
             <a:solidFill>
@@ -4489,7 +4595,7 @@
           </a:ln>
           <a:effectLst>
             <a:outerShdw sx="100000" sy="100000" kx="0" ky="0" algn="bl" rotWithShape="0" blurRad="127000" dist="25400" dir="5400000">
-              <a:srgbClr val="1E2B4A">
+              <a:srgbClr val="13134F">
                 <a:alpha val="18000"/>
               </a:srgbClr>
             </a:outerShdw>
@@ -4579,13 +4685,13 @@
             </a:avLst>
           </a:prstGeom>
           <a:solidFill>
-            <a:srgbClr val="FFFFFF"/>
+            <a:srgbClr val="F4F5FA"/>
           </a:solidFill>
           <a:ln/>
           <a:effectLst>
             <a:outerShdw sx="100000" sy="100000" kx="0" ky="0" algn="bl" rotWithShape="0" blurRad="127000" dist="25400" dir="5400000">
-              <a:srgbClr val="1E2B4A">
-                <a:alpha val="13000"/>
+              <a:srgbClr val="13134F">
+                <a:alpha val="10000"/>
               </a:srgbClr>
             </a:outerShdw>
           </a:effectLst>
@@ -4606,7 +4712,7 @@
             <a:avLst/>
           </a:prstGeom>
           <a:solidFill>
-            <a:srgbClr val="41639E"/>
+            <a:srgbClr val="4444AD"/>
           </a:solidFill>
           <a:ln w="31750">
             <a:solidFill>
@@ -4616,7 +4722,7 @@
           </a:ln>
           <a:effectLst>
             <a:outerShdw sx="100000" sy="100000" kx="0" ky="0" algn="bl" rotWithShape="0" blurRad="127000" dist="25400" dir="5400000">
-              <a:srgbClr val="1E2B4A">
+              <a:srgbClr val="13134F">
                 <a:alpha val="18000"/>
               </a:srgbClr>
             </a:outerShdw>
@@ -4706,13 +4812,13 @@
             </a:avLst>
           </a:prstGeom>
           <a:solidFill>
-            <a:srgbClr val="FFFFFF"/>
+            <a:srgbClr val="F4F5FA"/>
           </a:solidFill>
           <a:ln/>
           <a:effectLst>
             <a:outerShdw sx="100000" sy="100000" kx="0" ky="0" algn="bl" rotWithShape="0" blurRad="127000" dist="25400" dir="5400000">
-              <a:srgbClr val="1E2B4A">
-                <a:alpha val="13000"/>
+              <a:srgbClr val="13134F">
+                <a:alpha val="10000"/>
               </a:srgbClr>
             </a:outerShdw>
           </a:effectLst>
@@ -4836,13 +4942,13 @@
             </a:avLst>
           </a:prstGeom>
           <a:solidFill>
-            <a:srgbClr val="FFFFFF"/>
+            <a:srgbClr val="F4F5FA"/>
           </a:solidFill>
           <a:ln/>
           <a:effectLst>
             <a:outerShdw sx="100000" sy="100000" kx="0" ky="0" algn="bl" rotWithShape="0" blurRad="127000" dist="25400" dir="5400000">
-              <a:srgbClr val="1E2B4A">
-                <a:alpha val="13000"/>
+              <a:srgbClr val="13134F">
+                <a:alpha val="10000"/>
               </a:srgbClr>
             </a:outerShdw>
           </a:effectLst>
@@ -5210,8 +5316,8 @@
         </p:nvSpPr>
         <p:spPr>
           <a:xfrm>
-            <a:off x="10972800" y="6455664"/>
-            <a:ext cx="685800" cy="237744"/>
+            <a:off x="10881360" y="6455664"/>
+            <a:ext cx="365760" cy="237744"/>
           </a:xfrm>
           <a:prstGeom prst="rect">
             <a:avLst/>
@@ -5241,6 +5347,30 @@
           </a:p>
         </p:txBody>
       </p:sp>
+      <p:pic>
+        <p:nvPicPr>
+          <p:cNvPr id="46" name="Image 7" descr="logos/logo_ensae_new.png">    </p:cNvPr>
+          <p:cNvPicPr>
+            <a:picLocks noChangeAspect="1"/>
+          </p:cNvPicPr>
+          <p:nvPr/>
+        </p:nvPicPr>
+        <p:blipFill>
+          <a:blip r:embed="rId8"/>
+          <a:stretch>
+            <a:fillRect/>
+          </a:stretch>
+        </p:blipFill>
+        <p:spPr>
+          <a:xfrm>
+            <a:off x="11384280" y="6355080"/>
+            <a:ext cx="384048" cy="384048"/>
+          </a:xfrm>
+          <a:prstGeom prst="rect">
+            <a:avLst/>
+          </a:prstGeom>
+        </p:spPr>
+      </p:pic>
     </p:spTree>
   </p:cSld>
   <p:clrMapOvr>
@@ -5255,7 +5385,7 @@
     <p:bg>
       <p:bgPr>
         <a:solidFill>
-          <a:srgbClr val="FBFAF8"/>
+          <a:srgbClr val="FFFFFF"/>
         </a:solidFill>
       </p:bgPr>
     </p:bg>
@@ -5300,7 +5430,7 @@
             <a:r>
               <a:rPr lang="en-US" sz="2700" b="1" dirty="0">
                 <a:solidFill>
-                  <a:srgbClr val="1E2B4A"/>
+                  <a:srgbClr val="191970"/>
                 </a:solidFill>
                 <a:latin typeface="Calibri" pitchFamily="34" charset="0"/>
                 <a:ea typeface="Calibri" pitchFamily="34" charset="-122"/>
@@ -5371,13 +5501,13 @@
             </a:avLst>
           </a:prstGeom>
           <a:solidFill>
-            <a:srgbClr val="FFFFFF"/>
+            <a:srgbClr val="F4F5FA"/>
           </a:solidFill>
           <a:ln/>
           <a:effectLst>
             <a:outerShdw sx="100000" sy="100000" kx="0" ky="0" algn="bl" rotWithShape="0" blurRad="127000" dist="25400" dir="5400000">
-              <a:srgbClr val="1E2B4A">
-                <a:alpha val="13000"/>
+              <a:srgbClr val="13134F">
+                <a:alpha val="10000"/>
               </a:srgbClr>
             </a:outerShdw>
           </a:effectLst>
@@ -5410,7 +5540,7 @@
             <a:r>
               <a:rPr lang="en-US" sz="3200" b="1" dirty="0">
                 <a:solidFill>
-                  <a:srgbClr val="41639E"/>
+                  <a:srgbClr val="4444AD"/>
                 </a:solidFill>
                 <a:latin typeface="Calibri" pitchFamily="34" charset="0"/>
                 <a:ea typeface="Calibri" pitchFamily="34" charset="-122"/>
@@ -5501,13 +5631,13 @@
             </a:avLst>
           </a:prstGeom>
           <a:solidFill>
-            <a:srgbClr val="FFFFFF"/>
+            <a:srgbClr val="F4F5FA"/>
           </a:solidFill>
           <a:ln/>
           <a:effectLst>
             <a:outerShdw sx="100000" sy="100000" kx="0" ky="0" algn="bl" rotWithShape="0" blurRad="127000" dist="25400" dir="5400000">
-              <a:srgbClr val="1E2B4A">
-                <a:alpha val="13000"/>
+              <a:srgbClr val="13134F">
+                <a:alpha val="10000"/>
               </a:srgbClr>
             </a:outerShdw>
           </a:effectLst>
@@ -5540,7 +5670,7 @@
             <a:r>
               <a:rPr lang="en-US" sz="3200" b="1" dirty="0">
                 <a:solidFill>
-                  <a:srgbClr val="41639E"/>
+                  <a:srgbClr val="4444AD"/>
                 </a:solidFill>
                 <a:latin typeface="Calibri" pitchFamily="34" charset="0"/>
                 <a:ea typeface="Calibri" pitchFamily="34" charset="-122"/>
@@ -5631,13 +5761,13 @@
             </a:avLst>
           </a:prstGeom>
           <a:solidFill>
-            <a:srgbClr val="FFFFFF"/>
+            <a:srgbClr val="F4F5FA"/>
           </a:solidFill>
           <a:ln/>
           <a:effectLst>
             <a:outerShdw sx="100000" sy="100000" kx="0" ky="0" algn="bl" rotWithShape="0" blurRad="127000" dist="25400" dir="5400000">
-              <a:srgbClr val="1E2B4A">
-                <a:alpha val="13000"/>
+              <a:srgbClr val="13134F">
+                <a:alpha val="10000"/>
               </a:srgbClr>
             </a:outerShdw>
           </a:effectLst>
@@ -5761,13 +5891,13 @@
             </a:avLst>
           </a:prstGeom>
           <a:solidFill>
-            <a:srgbClr val="FFFFFF"/>
+            <a:srgbClr val="F4F5FA"/>
           </a:solidFill>
           <a:ln/>
           <a:effectLst>
             <a:outerShdw sx="100000" sy="100000" kx="0" ky="0" algn="bl" rotWithShape="0" blurRad="127000" dist="25400" dir="5400000">
-              <a:srgbClr val="1E2B4A">
-                <a:alpha val="13000"/>
+              <a:srgbClr val="13134F">
+                <a:alpha val="10000"/>
               </a:srgbClr>
             </a:outerShdw>
           </a:effectLst>
@@ -5891,13 +6021,13 @@
             </a:avLst>
           </a:prstGeom>
           <a:solidFill>
-            <a:srgbClr val="FFFFFF"/>
+            <a:srgbClr val="F4F5FA"/>
           </a:solidFill>
           <a:ln/>
           <a:effectLst>
             <a:outerShdw sx="100000" sy="100000" kx="0" ky="0" algn="bl" rotWithShape="0" blurRad="127000" dist="25400" dir="5400000">
-              <a:srgbClr val="1E2B4A">
-                <a:alpha val="13000"/>
+              <a:srgbClr val="13134F">
+                <a:alpha val="10000"/>
               </a:srgbClr>
             </a:outerShdw>
           </a:effectLst>
@@ -5918,7 +6048,7 @@
             <a:avLst/>
           </a:prstGeom>
           <a:solidFill>
-            <a:srgbClr val="3E8C9A"/>
+            <a:srgbClr val="2A2A80"/>
           </a:solidFill>
           <a:ln w="31750">
             <a:solidFill>
@@ -5928,7 +6058,7 @@
           </a:ln>
           <a:effectLst>
             <a:outerShdw sx="100000" sy="100000" kx="0" ky="0" algn="bl" rotWithShape="0" blurRad="127000" dist="25400" dir="5400000">
-              <a:srgbClr val="1E2B4A">
+              <a:srgbClr val="13134F">
                 <a:alpha val="18000"/>
               </a:srgbClr>
             </a:outerShdw>
@@ -6057,13 +6187,13 @@
             </a:avLst>
           </a:prstGeom>
           <a:solidFill>
-            <a:srgbClr val="FFFFFF"/>
+            <a:srgbClr val="F4F5FA"/>
           </a:solidFill>
           <a:ln/>
           <a:effectLst>
             <a:outerShdw sx="100000" sy="100000" kx="0" ky="0" algn="bl" rotWithShape="0" blurRad="127000" dist="25400" dir="5400000">
-              <a:srgbClr val="1E2B4A">
-                <a:alpha val="13000"/>
+              <a:srgbClr val="13134F">
+                <a:alpha val="10000"/>
               </a:srgbClr>
             </a:outerShdw>
           </a:effectLst>
@@ -6084,7 +6214,7 @@
             <a:avLst/>
           </a:prstGeom>
           <a:solidFill>
-            <a:srgbClr val="C98A24"/>
+            <a:srgbClr val="6E6ECB"/>
           </a:solidFill>
           <a:ln w="31750">
             <a:solidFill>
@@ -6094,7 +6224,7 @@
           </a:ln>
           <a:effectLst>
             <a:outerShdw sx="100000" sy="100000" kx="0" ky="0" algn="bl" rotWithShape="0" blurRad="127000" dist="25400" dir="5400000">
-              <a:srgbClr val="1E2B4A">
+              <a:srgbClr val="13134F">
                 <a:alpha val="18000"/>
               </a:srgbClr>
             </a:outerShdw>
@@ -6220,7 +6350,7 @@
             </a:avLst>
           </a:prstGeom>
           <a:solidFill>
-            <a:srgbClr val="C98A24"/>
+            <a:srgbClr val="6E6ECB"/>
           </a:solidFill>
           <a:ln/>
         </p:spPr>
@@ -6320,7 +6450,7 @@
             </a:avLst>
           </a:prstGeom>
           <a:solidFill>
-            <a:srgbClr val="E8EBF0"/>
+            <a:srgbClr val="E2E3EC"/>
           </a:solidFill>
           <a:ln/>
         </p:spPr>
@@ -6420,7 +6550,7 @@
             </a:avLst>
           </a:prstGeom>
           <a:solidFill>
-            <a:srgbClr val="E8EBF0"/>
+            <a:srgbClr val="E2E3EC"/>
           </a:solidFill>
           <a:ln/>
         </p:spPr>
@@ -6520,7 +6650,7 @@
             </a:avLst>
           </a:prstGeom>
           <a:solidFill>
-            <a:srgbClr val="E8EBF0"/>
+            <a:srgbClr val="E2E3EC"/>
           </a:solidFill>
           <a:ln/>
         </p:spPr>
@@ -6611,8 +6741,8 @@
         </p:nvSpPr>
         <p:spPr>
           <a:xfrm>
-            <a:off x="10972800" y="6455664"/>
-            <a:ext cx="685800" cy="237744"/>
+            <a:off x="10881360" y="6455664"/>
+            <a:ext cx="365760" cy="237744"/>
           </a:xfrm>
           <a:prstGeom prst="rect">
             <a:avLst/>
@@ -6642,6 +6772,30 @@
           </a:p>
         </p:txBody>
       </p:sp>
+      <p:pic>
+        <p:nvPicPr>
+          <p:cNvPr id="39" name="Image 2" descr="logos/logo_ensae_new.png">    </p:cNvPr>
+          <p:cNvPicPr>
+            <a:picLocks noChangeAspect="1"/>
+          </p:cNvPicPr>
+          <p:nvPr/>
+        </p:nvPicPr>
+        <p:blipFill>
+          <a:blip r:embed="rId3"/>
+          <a:stretch>
+            <a:fillRect/>
+          </a:stretch>
+        </p:blipFill>
+        <p:spPr>
+          <a:xfrm>
+            <a:off x="11384280" y="6355080"/>
+            <a:ext cx="384048" cy="384048"/>
+          </a:xfrm>
+          <a:prstGeom prst="rect">
+            <a:avLst/>
+          </a:prstGeom>
+        </p:spPr>
+      </p:pic>
     </p:spTree>
   </p:cSld>
   <p:clrMapOvr>
@@ -6656,7 +6810,7 @@
     <p:bg>
       <p:bgPr>
         <a:solidFill>
-          <a:srgbClr val="FBFAF8"/>
+          <a:srgbClr val="FFFFFF"/>
         </a:solidFill>
       </p:bgPr>
     </p:bg>
@@ -6701,7 +6855,7 @@
             <a:r>
               <a:rPr lang="en-US" sz="2700" b="1" dirty="0">
                 <a:solidFill>
-                  <a:srgbClr val="1E2B4A"/>
+                  <a:srgbClr val="191970"/>
                 </a:solidFill>
                 <a:latin typeface="Calibri" pitchFamily="34" charset="0"/>
                 <a:ea typeface="Calibri" pitchFamily="34" charset="-122"/>
@@ -6772,13 +6926,13 @@
             </a:avLst>
           </a:prstGeom>
           <a:solidFill>
-            <a:srgbClr val="FFFFFF"/>
+            <a:srgbClr val="F4F5FA"/>
           </a:solidFill>
           <a:ln/>
           <a:effectLst>
             <a:outerShdw sx="100000" sy="100000" kx="0" ky="0" algn="bl" rotWithShape="0" blurRad="127000" dist="25400" dir="5400000">
-              <a:srgbClr val="1E2B4A">
-                <a:alpha val="13000"/>
+              <a:srgbClr val="13134F">
+                <a:alpha val="10000"/>
               </a:srgbClr>
             </a:outerShdw>
           </a:effectLst>
@@ -6799,7 +6953,7 @@
             <a:avLst/>
           </a:prstGeom>
           <a:solidFill>
-            <a:srgbClr val="41639E"/>
+            <a:srgbClr val="4444AD"/>
           </a:solidFill>
           <a:ln w="31750">
             <a:solidFill>
@@ -6809,7 +6963,7 @@
           </a:ln>
           <a:effectLst>
             <a:outerShdw sx="100000" sy="100000" kx="0" ky="0" algn="bl" rotWithShape="0" blurRad="127000" dist="25400" dir="5400000">
-              <a:srgbClr val="1E2B4A">
+              <a:srgbClr val="13134F">
                 <a:alpha val="18000"/>
               </a:srgbClr>
             </a:outerShdw>
@@ -6867,7 +7021,7 @@
             <a:r>
               <a:rPr lang="en-US" sz="3400" b="1" dirty="0">
                 <a:solidFill>
-                  <a:srgbClr val="E8EBF0"/>
+                  <a:srgbClr val="E2E3EC"/>
                 </a:solidFill>
                 <a:latin typeface="Calibri" pitchFamily="34" charset="0"/>
                 <a:ea typeface="Calibri" pitchFamily="34" charset="-122"/>
@@ -6977,13 +7131,13 @@
             </a:avLst>
           </a:prstGeom>
           <a:solidFill>
-            <a:srgbClr val="FFFFFF"/>
+            <a:srgbClr val="F4F5FA"/>
           </a:solidFill>
           <a:ln/>
           <a:effectLst>
             <a:outerShdw sx="100000" sy="100000" kx="0" ky="0" algn="bl" rotWithShape="0" blurRad="127000" dist="25400" dir="5400000">
-              <a:srgbClr val="1E2B4A">
-                <a:alpha val="13000"/>
+              <a:srgbClr val="13134F">
+                <a:alpha val="10000"/>
               </a:srgbClr>
             </a:outerShdw>
           </a:effectLst>
@@ -7004,7 +7158,7 @@
             <a:avLst/>
           </a:prstGeom>
           <a:solidFill>
-            <a:srgbClr val="3E8C9A"/>
+            <a:srgbClr val="2A2A80"/>
           </a:solidFill>
           <a:ln w="31750">
             <a:solidFill>
@@ -7014,7 +7168,7 @@
           </a:ln>
           <a:effectLst>
             <a:outerShdw sx="100000" sy="100000" kx="0" ky="0" algn="bl" rotWithShape="0" blurRad="127000" dist="25400" dir="5400000">
-              <a:srgbClr val="1E2B4A">
+              <a:srgbClr val="13134F">
                 <a:alpha val="18000"/>
               </a:srgbClr>
             </a:outerShdw>
@@ -7072,7 +7226,7 @@
             <a:r>
               <a:rPr lang="en-US" sz="3400" b="1" dirty="0">
                 <a:solidFill>
-                  <a:srgbClr val="E8EBF0"/>
+                  <a:srgbClr val="E2E3EC"/>
                 </a:solidFill>
                 <a:latin typeface="Calibri" pitchFamily="34" charset="0"/>
                 <a:ea typeface="Calibri" pitchFamily="34" charset="-122"/>
@@ -7182,13 +7336,13 @@
             </a:avLst>
           </a:prstGeom>
           <a:solidFill>
-            <a:srgbClr val="FFFFFF"/>
+            <a:srgbClr val="F4F5FA"/>
           </a:solidFill>
           <a:ln/>
           <a:effectLst>
             <a:outerShdw sx="100000" sy="100000" kx="0" ky="0" algn="bl" rotWithShape="0" blurRad="127000" dist="25400" dir="5400000">
-              <a:srgbClr val="1E2B4A">
-                <a:alpha val="13000"/>
+              <a:srgbClr val="13134F">
+                <a:alpha val="10000"/>
               </a:srgbClr>
             </a:outerShdw>
           </a:effectLst>
@@ -7219,7 +7373,7 @@
           </a:ln>
           <a:effectLst>
             <a:outerShdw sx="100000" sy="100000" kx="0" ky="0" algn="bl" rotWithShape="0" blurRad="127000" dist="25400" dir="5400000">
-              <a:srgbClr val="1E2B4A">
+              <a:srgbClr val="13134F">
                 <a:alpha val="18000"/>
               </a:srgbClr>
             </a:outerShdw>
@@ -7277,7 +7431,7 @@
             <a:r>
               <a:rPr lang="en-US" sz="3400" b="1" dirty="0">
                 <a:solidFill>
-                  <a:srgbClr val="E8EBF0"/>
+                  <a:srgbClr val="E2E3EC"/>
                 </a:solidFill>
                 <a:latin typeface="Calibri" pitchFamily="34" charset="0"/>
                 <a:ea typeface="Calibri" pitchFamily="34" charset="-122"/>
@@ -7387,13 +7541,13 @@
             </a:avLst>
           </a:prstGeom>
           <a:solidFill>
-            <a:srgbClr val="1E2B4A"/>
+            <a:srgbClr val="191970"/>
           </a:solidFill>
           <a:ln/>
           <a:effectLst>
             <a:outerShdw sx="100000" sy="100000" kx="0" ky="0" algn="bl" rotWithShape="0" blurRad="127000" dist="25400" dir="5400000">
-              <a:srgbClr val="1E2B4A">
-                <a:alpha val="13000"/>
+              <a:srgbClr val="13134F">
+                <a:alpha val="10000"/>
               </a:srgbClr>
             </a:outerShdw>
           </a:effectLst>
@@ -7449,8 +7603,8 @@
         </p:nvSpPr>
         <p:spPr>
           <a:xfrm>
-            <a:off x="10972800" y="6455664"/>
-            <a:ext cx="685800" cy="237744"/>
+            <a:off x="10881360" y="6455664"/>
+            <a:ext cx="365760" cy="237744"/>
           </a:xfrm>
           <a:prstGeom prst="rect">
             <a:avLst/>
@@ -7480,6 +7634,30 @@
           </a:p>
         </p:txBody>
       </p:sp>
+      <p:pic>
+        <p:nvPicPr>
+          <p:cNvPr id="25" name="Image 3" descr="logos/logo_ensae_new.png">    </p:cNvPr>
+          <p:cNvPicPr>
+            <a:picLocks noChangeAspect="1"/>
+          </p:cNvPicPr>
+          <p:nvPr/>
+        </p:nvPicPr>
+        <p:blipFill>
+          <a:blip r:embed="rId4"/>
+          <a:stretch>
+            <a:fillRect/>
+          </a:stretch>
+        </p:blipFill>
+        <p:spPr>
+          <a:xfrm>
+            <a:off x="11384280" y="6355080"/>
+            <a:ext cx="384048" cy="384048"/>
+          </a:xfrm>
+          <a:prstGeom prst="rect">
+            <a:avLst/>
+          </a:prstGeom>
+        </p:spPr>
+      </p:pic>
     </p:spTree>
   </p:cSld>
   <p:clrMapOvr>
@@ -7494,7 +7672,7 @@
     <p:bg>
       <p:bgPr>
         <a:solidFill>
-          <a:srgbClr val="16213D"/>
+          <a:srgbClr val="101038"/>
         </a:solidFill>
       </p:bgPr>
     </p:bg>
@@ -7527,7 +7705,7 @@
             <a:avLst/>
           </a:prstGeom>
           <a:solidFill>
-            <a:srgbClr val="24365E"/>
+            <a:srgbClr val="23236B"/>
           </a:solidFill>
           <a:ln/>
         </p:spPr>
@@ -7547,7 +7725,7 @@
             <a:avLst/>
           </a:prstGeom>
           <a:solidFill>
-            <a:srgbClr val="24365E"/>
+            <a:srgbClr val="23236B"/>
           </a:solidFill>
           <a:ln/>
         </p:spPr>
@@ -7660,7 +7838,7 @@
             <a:r>
               <a:rPr lang="en-US" sz="1400" dirty="0">
                 <a:solidFill>
-                  <a:srgbClr val="AFC0DA"/>
+                  <a:srgbClr val="B7B7DB"/>
                 </a:solidFill>
                 <a:latin typeface="Calibri" pitchFamily="34" charset="0"/>
                 <a:ea typeface="Calibri" pitchFamily="34" charset="-122"/>
@@ -7686,7 +7864,7 @@
     <p:bg>
       <p:bgPr>
         <a:solidFill>
-          <a:srgbClr val="FBFAF8"/>
+          <a:srgbClr val="FFFFFF"/>
         </a:solidFill>
       </p:bgPr>
     </p:bg>
@@ -7731,7 +7909,7 @@
             <a:r>
               <a:rPr lang="en-US" sz="2700" b="1" dirty="0">
                 <a:solidFill>
-                  <a:srgbClr val="1E2B4A"/>
+                  <a:srgbClr val="191970"/>
                 </a:solidFill>
                 <a:latin typeface="Calibri" pitchFamily="34" charset="0"/>
                 <a:ea typeface="Calibri" pitchFamily="34" charset="-122"/>
@@ -7802,13 +7980,13 @@
             </a:avLst>
           </a:prstGeom>
           <a:solidFill>
-            <a:srgbClr val="FFFFFF"/>
+            <a:srgbClr val="F4F5FA"/>
           </a:solidFill>
           <a:ln/>
           <a:effectLst>
             <a:outerShdw sx="100000" sy="100000" kx="0" ky="0" algn="bl" rotWithShape="0" blurRad="127000" dist="25400" dir="5400000">
-              <a:srgbClr val="1E2B4A">
-                <a:alpha val="13000"/>
+              <a:srgbClr val="13134F">
+                <a:alpha val="10000"/>
               </a:srgbClr>
             </a:outerShdw>
           </a:effectLst>
@@ -8013,7 +8191,7 @@
             <a:avLst/>
           </a:prstGeom>
           <a:solidFill>
-            <a:srgbClr val="E8EBF0"/>
+            <a:srgbClr val="E2E3EC"/>
           </a:solidFill>
           <a:ln/>
         </p:spPr>
@@ -8084,7 +8262,7 @@
             <a:r>
               <a:rPr lang="en-US" sz="1500" b="1" dirty="0">
                 <a:solidFill>
-                  <a:srgbClr val="1E2B4A"/>
+                  <a:srgbClr val="191970"/>
                 </a:solidFill>
                 <a:latin typeface="Calibri" pitchFamily="34" charset="0"/>
                 <a:ea typeface="Calibri" pitchFamily="34" charset="-122"/>
@@ -8123,7 +8301,7 @@
             <a:r>
               <a:rPr lang="en-US" sz="1500" b="1" dirty="0">
                 <a:solidFill>
-                  <a:srgbClr val="1E2B4A"/>
+                  <a:srgbClr val="191970"/>
                 </a:solidFill>
                 <a:latin typeface="Calibri" pitchFamily="34" charset="0"/>
                 <a:ea typeface="Calibri" pitchFamily="34" charset="-122"/>
@@ -8189,7 +8367,7 @@
             <a:avLst/>
           </a:prstGeom>
           <a:solidFill>
-            <a:srgbClr val="E8EBF0"/>
+            <a:srgbClr val="E2E3EC"/>
           </a:solidFill>
           <a:ln/>
         </p:spPr>
@@ -8260,7 +8438,7 @@
             <a:r>
               <a:rPr lang="en-US" sz="1500" b="1" dirty="0">
                 <a:solidFill>
-                  <a:srgbClr val="1E2B4A"/>
+                  <a:srgbClr val="191970"/>
                 </a:solidFill>
                 <a:latin typeface="Calibri" pitchFamily="34" charset="0"/>
                 <a:ea typeface="Calibri" pitchFamily="34" charset="-122"/>
@@ -8299,7 +8477,7 @@
             <a:r>
               <a:rPr lang="en-US" sz="1500" b="1" dirty="0">
                 <a:solidFill>
-                  <a:srgbClr val="1E2B4A"/>
+                  <a:srgbClr val="191970"/>
                 </a:solidFill>
                 <a:latin typeface="Calibri" pitchFamily="34" charset="0"/>
                 <a:ea typeface="Calibri" pitchFamily="34" charset="-122"/>
@@ -8365,7 +8543,7 @@
             <a:avLst/>
           </a:prstGeom>
           <a:solidFill>
-            <a:srgbClr val="E8EBF0"/>
+            <a:srgbClr val="E2E3EC"/>
           </a:solidFill>
           <a:ln/>
         </p:spPr>
@@ -8436,7 +8614,7 @@
             <a:r>
               <a:rPr lang="en-US" sz="1500" b="1" dirty="0">
                 <a:solidFill>
-                  <a:srgbClr val="1E2B4A"/>
+                  <a:srgbClr val="191970"/>
                 </a:solidFill>
                 <a:latin typeface="Calibri" pitchFamily="34" charset="0"/>
                 <a:ea typeface="Calibri" pitchFamily="34" charset="-122"/>
@@ -8475,7 +8653,7 @@
             <a:r>
               <a:rPr lang="en-US" sz="1500" b="1" dirty="0">
                 <a:solidFill>
-                  <a:srgbClr val="1E2B4A"/>
+                  <a:srgbClr val="191970"/>
                 </a:solidFill>
                 <a:latin typeface="Calibri" pitchFamily="34" charset="0"/>
                 <a:ea typeface="Calibri" pitchFamily="34" charset="-122"/>
@@ -8585,13 +8763,13 @@
             </a:avLst>
           </a:prstGeom>
           <a:solidFill>
-            <a:srgbClr val="FFFFFF"/>
+            <a:srgbClr val="F4F5FA"/>
           </a:solidFill>
           <a:ln/>
           <a:effectLst>
             <a:outerShdw sx="100000" sy="100000" kx="0" ky="0" algn="bl" rotWithShape="0" blurRad="127000" dist="25400" dir="5400000">
-              <a:srgbClr val="1E2B4A">
-                <a:alpha val="13000"/>
+              <a:srgbClr val="13134F">
+                <a:alpha val="10000"/>
               </a:srgbClr>
             </a:outerShdw>
           </a:effectLst>
@@ -8731,7 +8909,7 @@
             </a:avLst>
           </a:prstGeom>
           <a:solidFill>
-            <a:srgbClr val="41639E"/>
+            <a:srgbClr val="4444AD"/>
           </a:solidFill>
           <a:ln/>
         </p:spPr>
@@ -8831,7 +9009,7 @@
             </a:avLst>
           </a:prstGeom>
           <a:solidFill>
-            <a:srgbClr val="41639E"/>
+            <a:srgbClr val="4444AD"/>
           </a:solidFill>
           <a:ln/>
         </p:spPr>
@@ -9203,8 +9381,8 @@
         </p:nvSpPr>
         <p:spPr>
           <a:xfrm>
-            <a:off x="10972800" y="6455664"/>
-            <a:ext cx="685800" cy="237744"/>
+            <a:off x="10881360" y="6455664"/>
+            <a:ext cx="365760" cy="237744"/>
           </a:xfrm>
           <a:prstGeom prst="rect">
             <a:avLst/>
@@ -9234,6 +9412,30 @@
           </a:p>
         </p:txBody>
       </p:sp>
+      <p:pic>
+        <p:nvPicPr>
+          <p:cNvPr id="45" name="Image 0" descr="logos/logo_ensae_new.png">    </p:cNvPr>
+          <p:cNvPicPr>
+            <a:picLocks noChangeAspect="1"/>
+          </p:cNvPicPr>
+          <p:nvPr/>
+        </p:nvPicPr>
+        <p:blipFill>
+          <a:blip r:embed="rId1"/>
+          <a:stretch>
+            <a:fillRect/>
+          </a:stretch>
+        </p:blipFill>
+        <p:spPr>
+          <a:xfrm>
+            <a:off x="11384280" y="6355080"/>
+            <a:ext cx="384048" cy="384048"/>
+          </a:xfrm>
+          <a:prstGeom prst="rect">
+            <a:avLst/>
+          </a:prstGeom>
+        </p:spPr>
+      </p:pic>
     </p:spTree>
   </p:cSld>
   <p:clrMapOvr>
@@ -9248,7 +9450,7 @@
     <p:bg>
       <p:bgPr>
         <a:solidFill>
-          <a:srgbClr val="FBFAF8"/>
+          <a:srgbClr val="FFFFFF"/>
         </a:solidFill>
       </p:bgPr>
     </p:bg>
@@ -9293,7 +9495,7 @@
             <a:r>
               <a:rPr lang="en-US" sz="2700" b="1" dirty="0">
                 <a:solidFill>
-                  <a:srgbClr val="1E2B4A"/>
+                  <a:srgbClr val="191970"/>
                 </a:solidFill>
                 <a:latin typeface="Calibri" pitchFamily="34" charset="0"/>
                 <a:ea typeface="Calibri" pitchFamily="34" charset="-122"/>
@@ -9364,13 +9566,13 @@
             </a:avLst>
           </a:prstGeom>
           <a:solidFill>
-            <a:srgbClr val="FFFFFF"/>
+            <a:srgbClr val="F4F5FA"/>
           </a:solidFill>
           <a:ln/>
           <a:effectLst>
             <a:outerShdw sx="100000" sy="100000" kx="0" ky="0" algn="bl" rotWithShape="0" blurRad="127000" dist="25400" dir="5400000">
-              <a:srgbClr val="1E2B4A">
-                <a:alpha val="13000"/>
+              <a:srgbClr val="13134F">
+                <a:alpha val="10000"/>
               </a:srgbClr>
             </a:outerShdw>
           </a:effectLst>
@@ -9494,13 +9696,13 @@
             </a:avLst>
           </a:prstGeom>
           <a:solidFill>
-            <a:srgbClr val="FFFFFF"/>
+            <a:srgbClr val="F4F5FA"/>
           </a:solidFill>
           <a:ln/>
           <a:effectLst>
             <a:outerShdw sx="100000" sy="100000" kx="0" ky="0" algn="bl" rotWithShape="0" blurRad="127000" dist="25400" dir="5400000">
-              <a:srgbClr val="1E2B4A">
-                <a:alpha val="13000"/>
+              <a:srgbClr val="13134F">
+                <a:alpha val="10000"/>
               </a:srgbClr>
             </a:outerShdw>
           </a:effectLst>
@@ -9533,7 +9735,7 @@
             <a:r>
               <a:rPr lang="en-US" sz="3000" b="1" dirty="0">
                 <a:solidFill>
-                  <a:srgbClr val="3E8C9A"/>
+                  <a:srgbClr val="2A2A80"/>
                 </a:solidFill>
                 <a:latin typeface="Calibri" pitchFamily="34" charset="0"/>
                 <a:ea typeface="Calibri" pitchFamily="34" charset="-122"/>
@@ -9624,13 +9826,13 @@
             </a:avLst>
           </a:prstGeom>
           <a:solidFill>
-            <a:srgbClr val="FFFFFF"/>
+            <a:srgbClr val="F4F5FA"/>
           </a:solidFill>
           <a:ln/>
           <a:effectLst>
             <a:outerShdw sx="100000" sy="100000" kx="0" ky="0" algn="bl" rotWithShape="0" blurRad="127000" dist="25400" dir="5400000">
-              <a:srgbClr val="1E2B4A">
-                <a:alpha val="13000"/>
+              <a:srgbClr val="13134F">
+                <a:alpha val="10000"/>
               </a:srgbClr>
             </a:outerShdw>
           </a:effectLst>
@@ -9663,7 +9865,7 @@
             <a:r>
               <a:rPr lang="en-US" sz="3000" b="1" dirty="0">
                 <a:solidFill>
-                  <a:srgbClr val="41639E"/>
+                  <a:srgbClr val="4444AD"/>
                 </a:solidFill>
                 <a:latin typeface="Calibri" pitchFamily="34" charset="0"/>
                 <a:ea typeface="Calibri" pitchFamily="34" charset="-122"/>
@@ -9754,13 +9956,13 @@
             </a:avLst>
           </a:prstGeom>
           <a:solidFill>
-            <a:srgbClr val="FFFFFF"/>
+            <a:srgbClr val="F4F5FA"/>
           </a:solidFill>
           <a:ln/>
           <a:effectLst>
             <a:outerShdw sx="100000" sy="100000" kx="0" ky="0" algn="bl" rotWithShape="0" blurRad="127000" dist="25400" dir="5400000">
-              <a:srgbClr val="1E2B4A">
-                <a:alpha val="13000"/>
+              <a:srgbClr val="13134F">
+                <a:alpha val="10000"/>
               </a:srgbClr>
             </a:outerShdw>
           </a:effectLst>
@@ -9793,7 +9995,7 @@
             <a:r>
               <a:rPr lang="en-US" sz="3000" b="1" dirty="0">
                 <a:solidFill>
-                  <a:srgbClr val="41639E"/>
+                  <a:srgbClr val="4444AD"/>
                 </a:solidFill>
                 <a:latin typeface="Calibri" pitchFamily="34" charset="0"/>
                 <a:ea typeface="Calibri" pitchFamily="34" charset="-122"/>
@@ -9884,13 +10086,13 @@
             </a:avLst>
           </a:prstGeom>
           <a:solidFill>
-            <a:srgbClr val="FFFFFF"/>
+            <a:srgbClr val="F4F5FA"/>
           </a:solidFill>
           <a:ln/>
           <a:effectLst>
             <a:outerShdw sx="100000" sy="100000" kx="0" ky="0" algn="bl" rotWithShape="0" blurRad="127000" dist="25400" dir="5400000">
-              <a:srgbClr val="1E2B4A">
-                <a:alpha val="13000"/>
+              <a:srgbClr val="13134F">
+                <a:alpha val="10000"/>
               </a:srgbClr>
             </a:outerShdw>
           </a:effectLst>
@@ -9991,7 +10193,7 @@
             </a:avLst>
           </a:prstGeom>
           <a:solidFill>
-            <a:srgbClr val="E8EBF0"/>
+            <a:srgbClr val="E2E3EC"/>
           </a:solidFill>
           <a:ln/>
         </p:spPr>
@@ -10013,7 +10215,7 @@
             </a:avLst>
           </a:prstGeom>
           <a:solidFill>
-            <a:srgbClr val="3E8C9A"/>
+            <a:srgbClr val="2A2A80"/>
           </a:solidFill>
           <a:ln/>
         </p:spPr>
@@ -10113,7 +10315,7 @@
             </a:avLst>
           </a:prstGeom>
           <a:solidFill>
-            <a:srgbClr val="E8EBF0"/>
+            <a:srgbClr val="E2E3EC"/>
           </a:solidFill>
           <a:ln/>
         </p:spPr>
@@ -10135,7 +10337,7 @@
             </a:avLst>
           </a:prstGeom>
           <a:solidFill>
-            <a:srgbClr val="3E8C9A"/>
+            <a:srgbClr val="2A2A80"/>
           </a:solidFill>
           <a:ln/>
         </p:spPr>
@@ -10235,7 +10437,7 @@
             </a:avLst>
           </a:prstGeom>
           <a:solidFill>
-            <a:srgbClr val="E8EBF0"/>
+            <a:srgbClr val="E2E3EC"/>
           </a:solidFill>
           <a:ln/>
         </p:spPr>
@@ -10257,7 +10459,7 @@
             </a:avLst>
           </a:prstGeom>
           <a:solidFill>
-            <a:srgbClr val="3E8C9A"/>
+            <a:srgbClr val="2A2A80"/>
           </a:solidFill>
           <a:ln/>
         </p:spPr>
@@ -10357,7 +10559,7 @@
             </a:avLst>
           </a:prstGeom>
           <a:solidFill>
-            <a:srgbClr val="E8EBF0"/>
+            <a:srgbClr val="E2E3EC"/>
           </a:solidFill>
           <a:ln/>
         </p:spPr>
@@ -10379,7 +10581,7 @@
             </a:avLst>
           </a:prstGeom>
           <a:solidFill>
-            <a:srgbClr val="3E8C9A"/>
+            <a:srgbClr val="2A2A80"/>
           </a:solidFill>
           <a:ln/>
         </p:spPr>
@@ -10479,7 +10681,7 @@
             </a:avLst>
           </a:prstGeom>
           <a:solidFill>
-            <a:srgbClr val="E8EBF0"/>
+            <a:srgbClr val="E2E3EC"/>
           </a:solidFill>
           <a:ln/>
         </p:spPr>
@@ -10501,7 +10703,7 @@
             </a:avLst>
           </a:prstGeom>
           <a:solidFill>
-            <a:srgbClr val="3E8C9A"/>
+            <a:srgbClr val="2A2A80"/>
           </a:solidFill>
           <a:ln/>
         </p:spPr>
@@ -10601,7 +10803,7 @@
             </a:avLst>
           </a:prstGeom>
           <a:solidFill>
-            <a:srgbClr val="E8EBF0"/>
+            <a:srgbClr val="E2E3EC"/>
           </a:solidFill>
           <a:ln/>
         </p:spPr>
@@ -10623,7 +10825,7 @@
             </a:avLst>
           </a:prstGeom>
           <a:solidFill>
-            <a:srgbClr val="3E8C9A"/>
+            <a:srgbClr val="2A2A80"/>
           </a:solidFill>
           <a:ln/>
         </p:spPr>
@@ -10714,8 +10916,8 @@
         </p:nvSpPr>
         <p:spPr>
           <a:xfrm>
-            <a:off x="10972800" y="6455664"/>
-            <a:ext cx="685800" cy="237744"/>
+            <a:off x="10881360" y="6455664"/>
+            <a:ext cx="365760" cy="237744"/>
           </a:xfrm>
           <a:prstGeom prst="rect">
             <a:avLst/>
@@ -10745,6 +10947,30 @@
           </a:p>
         </p:txBody>
       </p:sp>
+      <p:pic>
+        <p:nvPicPr>
+          <p:cNvPr id="44" name="Image 0" descr="logos/logo_ensae_new.png">    </p:cNvPr>
+          <p:cNvPicPr>
+            <a:picLocks noChangeAspect="1"/>
+          </p:cNvPicPr>
+          <p:nvPr/>
+        </p:nvPicPr>
+        <p:blipFill>
+          <a:blip r:embed="rId1"/>
+          <a:stretch>
+            <a:fillRect/>
+          </a:stretch>
+        </p:blipFill>
+        <p:spPr>
+          <a:xfrm>
+            <a:off x="11384280" y="6355080"/>
+            <a:ext cx="384048" cy="384048"/>
+          </a:xfrm>
+          <a:prstGeom prst="rect">
+            <a:avLst/>
+          </a:prstGeom>
+        </p:spPr>
+      </p:pic>
     </p:spTree>
   </p:cSld>
   <p:clrMapOvr>
@@ -10759,7 +10985,7 @@
     <p:bg>
       <p:bgPr>
         <a:solidFill>
-          <a:srgbClr val="FBFAF8"/>
+          <a:srgbClr val="FFFFFF"/>
         </a:solidFill>
       </p:bgPr>
     </p:bg>
@@ -10804,7 +11030,7 @@
             <a:r>
               <a:rPr lang="en-US" sz="2700" b="1" dirty="0">
                 <a:solidFill>
-                  <a:srgbClr val="1E2B4A"/>
+                  <a:srgbClr val="191970"/>
                 </a:solidFill>
                 <a:latin typeface="Calibri" pitchFamily="34" charset="0"/>
                 <a:ea typeface="Calibri" pitchFamily="34" charset="-122"/>
@@ -10833,13 +11059,13 @@
             </a:avLst>
           </a:prstGeom>
           <a:solidFill>
-            <a:srgbClr val="1E2B4A"/>
+            <a:srgbClr val="191970"/>
           </a:solidFill>
           <a:ln/>
           <a:effectLst>
             <a:outerShdw sx="100000" sy="100000" kx="0" ky="0" algn="bl" rotWithShape="0" blurRad="127000" dist="25400" dir="5400000">
-              <a:srgbClr val="1E2B4A">
-                <a:alpha val="13000"/>
+              <a:srgbClr val="13134F">
+                <a:alpha val="10000"/>
               </a:srgbClr>
             </a:outerShdw>
           </a:effectLst>
@@ -11021,13 +11247,13 @@
             </a:avLst>
           </a:prstGeom>
           <a:solidFill>
-            <a:srgbClr val="FFFFFF"/>
+            <a:srgbClr val="F4F5FA"/>
           </a:solidFill>
           <a:ln/>
           <a:effectLst>
             <a:outerShdw sx="100000" sy="100000" kx="0" ky="0" algn="bl" rotWithShape="0" blurRad="127000" dist="25400" dir="5400000">
-              <a:srgbClr val="1E2B4A">
-                <a:alpha val="13000"/>
+              <a:srgbClr val="13134F">
+                <a:alpha val="10000"/>
               </a:srgbClr>
             </a:outerShdw>
           </a:effectLst>
@@ -11192,7 +11418,7 @@
             </a:avLst>
           </a:prstGeom>
           <a:solidFill>
-            <a:srgbClr val="41639E"/>
+            <a:srgbClr val="4444AD"/>
           </a:solidFill>
           <a:ln/>
         </p:spPr>
@@ -11374,13 +11600,13 @@
             </a:avLst>
           </a:prstGeom>
           <a:solidFill>
-            <a:srgbClr val="FFFFFF"/>
+            <a:srgbClr val="F4F5FA"/>
           </a:solidFill>
           <a:ln/>
           <a:effectLst>
             <a:outerShdw sx="100000" sy="100000" kx="0" ky="0" algn="bl" rotWithShape="0" blurRad="127000" dist="25400" dir="5400000">
-              <a:srgbClr val="1E2B4A">
-                <a:alpha val="13000"/>
+              <a:srgbClr val="13134F">
+                <a:alpha val="10000"/>
               </a:srgbClr>
             </a:outerShdw>
           </a:effectLst>
@@ -11494,7 +11720,7 @@
             <a:r>
               <a:rPr lang="en-US" sz="1500" b="1" dirty="0">
                 <a:solidFill>
-                  <a:srgbClr val="1E2B4A"/>
+                  <a:srgbClr val="191970"/>
                 </a:solidFill>
                 <a:latin typeface="Calibri" pitchFamily="34" charset="0"/>
                 <a:ea typeface="Calibri" pitchFamily="34" charset="-122"/>
@@ -11521,7 +11747,7 @@
             <a:avLst/>
           </a:prstGeom>
           <a:solidFill>
-            <a:srgbClr val="E8EBF0"/>
+            <a:srgbClr val="E2E3EC"/>
           </a:solidFill>
           <a:ln/>
         </p:spPr>
@@ -11595,7 +11821,7 @@
             <a:r>
               <a:rPr lang="en-US" sz="1500" b="1" dirty="0">
                 <a:solidFill>
-                  <a:srgbClr val="1E2B4A"/>
+                  <a:srgbClr val="191970"/>
                 </a:solidFill>
                 <a:latin typeface="Calibri" pitchFamily="34" charset="0"/>
                 <a:ea typeface="Calibri" pitchFamily="34" charset="-122"/>
@@ -11622,7 +11848,7 @@
             <a:avLst/>
           </a:prstGeom>
           <a:solidFill>
-            <a:srgbClr val="E8EBF0"/>
+            <a:srgbClr val="E2E3EC"/>
           </a:solidFill>
           <a:ln/>
         </p:spPr>
@@ -11696,7 +11922,7 @@
             <a:r>
               <a:rPr lang="en-US" sz="1500" b="1" dirty="0">
                 <a:solidFill>
-                  <a:srgbClr val="1E2B4A"/>
+                  <a:srgbClr val="191970"/>
                 </a:solidFill>
                 <a:latin typeface="Calibri" pitchFamily="34" charset="0"/>
                 <a:ea typeface="Calibri" pitchFamily="34" charset="-122"/>
@@ -11723,7 +11949,7 @@
             <a:avLst/>
           </a:prstGeom>
           <a:solidFill>
-            <a:srgbClr val="E8EBF0"/>
+            <a:srgbClr val="E2E3EC"/>
           </a:solidFill>
           <a:ln/>
         </p:spPr>
@@ -11824,7 +12050,7 @@
             <a:avLst/>
           </a:prstGeom>
           <a:solidFill>
-            <a:srgbClr val="E8EBF0"/>
+            <a:srgbClr val="E2E3EC"/>
           </a:solidFill>
           <a:ln/>
         </p:spPr>
@@ -11918,8 +12144,8 @@
         </p:nvSpPr>
         <p:spPr>
           <a:xfrm>
-            <a:off x="10972800" y="6455664"/>
-            <a:ext cx="685800" cy="237744"/>
+            <a:off x="10881360" y="6455664"/>
+            <a:ext cx="365760" cy="237744"/>
           </a:xfrm>
           <a:prstGeom prst="rect">
             <a:avLst/>
@@ -11949,6 +12175,30 @@
           </a:p>
         </p:txBody>
       </p:sp>
+      <p:pic>
+        <p:nvPicPr>
+          <p:cNvPr id="35" name="Image 0" descr="logos/logo_ensae_new.png">    </p:cNvPr>
+          <p:cNvPicPr>
+            <a:picLocks noChangeAspect="1"/>
+          </p:cNvPicPr>
+          <p:nvPr/>
+        </p:nvPicPr>
+        <p:blipFill>
+          <a:blip r:embed="rId1"/>
+          <a:stretch>
+            <a:fillRect/>
+          </a:stretch>
+        </p:blipFill>
+        <p:spPr>
+          <a:xfrm>
+            <a:off x="11384280" y="6355080"/>
+            <a:ext cx="384048" cy="384048"/>
+          </a:xfrm>
+          <a:prstGeom prst="rect">
+            <a:avLst/>
+          </a:prstGeom>
+        </p:spPr>
+      </p:pic>
     </p:spTree>
   </p:cSld>
   <p:clrMapOvr>
@@ -11963,7 +12213,7 @@
     <p:bg>
       <p:bgPr>
         <a:solidFill>
-          <a:srgbClr val="FBFAF8"/>
+          <a:srgbClr val="FFFFFF"/>
         </a:solidFill>
       </p:bgPr>
     </p:bg>
@@ -12008,7 +12258,7 @@
             <a:r>
               <a:rPr lang="en-US" sz="2700" b="1" dirty="0">
                 <a:solidFill>
-                  <a:srgbClr val="1E2B4A"/>
+                  <a:srgbClr val="191970"/>
                 </a:solidFill>
                 <a:latin typeface="Calibri" pitchFamily="34" charset="0"/>
                 <a:ea typeface="Calibri" pitchFamily="34" charset="-122"/>
@@ -12079,13 +12329,13 @@
             </a:avLst>
           </a:prstGeom>
           <a:solidFill>
-            <a:srgbClr val="FFFFFF"/>
+            <a:srgbClr val="F4F5FA"/>
           </a:solidFill>
           <a:ln/>
           <a:effectLst>
             <a:outerShdw sx="100000" sy="100000" kx="0" ky="0" algn="bl" rotWithShape="0" blurRad="127000" dist="25400" dir="5400000">
-              <a:srgbClr val="1E2B4A">
-                <a:alpha val="13000"/>
+              <a:srgbClr val="13134F">
+                <a:alpha val="10000"/>
               </a:srgbClr>
             </a:outerShdw>
           </a:effectLst>
@@ -12325,7 +12575,7 @@
             </a:avLst>
           </a:prstGeom>
           <a:solidFill>
-            <a:srgbClr val="E8EBF0"/>
+            <a:srgbClr val="E2E3EC"/>
           </a:solidFill>
           <a:ln/>
         </p:spPr>
@@ -12425,7 +12675,7 @@
             </a:avLst>
           </a:prstGeom>
           <a:solidFill>
-            <a:srgbClr val="E8EBF0"/>
+            <a:srgbClr val="E2E3EC"/>
           </a:solidFill>
           <a:ln/>
         </p:spPr>
@@ -12525,7 +12775,7 @@
             </a:avLst>
           </a:prstGeom>
           <a:solidFill>
-            <a:srgbClr val="E8EBF0"/>
+            <a:srgbClr val="E2E3EC"/>
           </a:solidFill>
           <a:ln/>
         </p:spPr>
@@ -12625,7 +12875,7 @@
             </a:avLst>
           </a:prstGeom>
           <a:solidFill>
-            <a:srgbClr val="E8EBF0"/>
+            <a:srgbClr val="E2E3EC"/>
           </a:solidFill>
           <a:ln/>
         </p:spPr>
@@ -12725,7 +12975,7 @@
             </a:avLst>
           </a:prstGeom>
           <a:solidFill>
-            <a:srgbClr val="E8EBF0"/>
+            <a:srgbClr val="E2E3EC"/>
           </a:solidFill>
           <a:ln/>
         </p:spPr>
@@ -12825,7 +13075,7 @@
             </a:avLst>
           </a:prstGeom>
           <a:solidFill>
-            <a:srgbClr val="E8EBF0"/>
+            <a:srgbClr val="E2E3EC"/>
           </a:solidFill>
           <a:ln/>
         </p:spPr>
@@ -12891,8 +13141,8 @@
           <a:ln/>
           <a:effectLst>
             <a:outerShdw sx="100000" sy="100000" kx="0" ky="0" algn="bl" rotWithShape="0" blurRad="127000" dist="25400" dir="5400000">
-              <a:srgbClr val="1E2B4A">
-                <a:alpha val="13000"/>
+              <a:srgbClr val="13134F">
+                <a:alpha val="10000"/>
               </a:srgbClr>
             </a:outerShdw>
           </a:effectLst>
@@ -12923,7 +13173,7 @@
           </a:ln>
           <a:effectLst>
             <a:outerShdw sx="100000" sy="100000" kx="0" ky="0" algn="bl" rotWithShape="0" blurRad="127000" dist="25400" dir="5400000">
-              <a:srgbClr val="1E2B4A">
+              <a:srgbClr val="13134F">
                 <a:alpha val="18000"/>
               </a:srgbClr>
             </a:outerShdw>
@@ -13055,13 +13305,13 @@
             </a:avLst>
           </a:prstGeom>
           <a:solidFill>
-            <a:srgbClr val="FFFFFF"/>
+            <a:srgbClr val="F4F5FA"/>
           </a:solidFill>
           <a:ln/>
           <a:effectLst>
             <a:outerShdw sx="100000" sy="100000" kx="0" ky="0" algn="bl" rotWithShape="0" blurRad="127000" dist="25400" dir="5400000">
-              <a:srgbClr val="1E2B4A">
-                <a:alpha val="13000"/>
+              <a:srgbClr val="13134F">
+                <a:alpha val="10000"/>
               </a:srgbClr>
             </a:outerShdw>
           </a:effectLst>
@@ -13367,7 +13617,7 @@
             <a:r>
               <a:rPr lang="en-US" sz="100" dirty="0">
                 <a:solidFill>
-                  <a:srgbClr val="FBFAF8"/>
+                  <a:srgbClr val="FFFFFF"/>
                 </a:solidFill>
                 <a:latin typeface="Calibri" pitchFamily="34" charset="0"/>
                 <a:ea typeface="Calibri" pitchFamily="34" charset="-122"/>
@@ -13426,8 +13676,8 @@
         </p:nvSpPr>
         <p:spPr>
           <a:xfrm>
-            <a:off x="10972800" y="6455664"/>
-            <a:ext cx="685800" cy="237744"/>
+            <a:off x="10881360" y="6455664"/>
+            <a:ext cx="365760" cy="237744"/>
           </a:xfrm>
           <a:prstGeom prst="rect">
             <a:avLst/>
@@ -13457,6 +13707,30 @@
           </a:p>
         </p:txBody>
       </p:sp>
+      <p:pic>
+        <p:nvPicPr>
+          <p:cNvPr id="44" name="Image 1" descr="logos/logo_ensae_new.png">    </p:cNvPr>
+          <p:cNvPicPr>
+            <a:picLocks noChangeAspect="1"/>
+          </p:cNvPicPr>
+          <p:nvPr/>
+        </p:nvPicPr>
+        <p:blipFill>
+          <a:blip r:embed="rId2"/>
+          <a:stretch>
+            <a:fillRect/>
+          </a:stretch>
+        </p:blipFill>
+        <p:spPr>
+          <a:xfrm>
+            <a:off x="11384280" y="6355080"/>
+            <a:ext cx="384048" cy="384048"/>
+          </a:xfrm>
+          <a:prstGeom prst="rect">
+            <a:avLst/>
+          </a:prstGeom>
+        </p:spPr>
+      </p:pic>
     </p:spTree>
   </p:cSld>
   <p:clrMapOvr>
@@ -13471,7 +13745,7 @@
     <p:bg>
       <p:bgPr>
         <a:solidFill>
-          <a:srgbClr val="FBFAF8"/>
+          <a:srgbClr val="FFFFFF"/>
         </a:solidFill>
       </p:bgPr>
     </p:bg>
@@ -13516,7 +13790,7 @@
             <a:r>
               <a:rPr lang="en-US" sz="2700" b="1" dirty="0">
                 <a:solidFill>
-                  <a:srgbClr val="1E2B4A"/>
+                  <a:srgbClr val="191970"/>
                 </a:solidFill>
                 <a:latin typeface="Calibri" pitchFamily="34" charset="0"/>
                 <a:ea typeface="Calibri" pitchFamily="34" charset="-122"/>
@@ -13587,13 +13861,13 @@
             </a:avLst>
           </a:prstGeom>
           <a:solidFill>
-            <a:srgbClr val="FFFFFF"/>
+            <a:srgbClr val="F4F5FA"/>
           </a:solidFill>
           <a:ln/>
           <a:effectLst>
             <a:outerShdw sx="100000" sy="100000" kx="0" ky="0" algn="bl" rotWithShape="0" blurRad="127000" dist="25400" dir="5400000">
-              <a:srgbClr val="1E2B4A">
-                <a:alpha val="13000"/>
+              <a:srgbClr val="13134F">
+                <a:alpha val="10000"/>
               </a:srgbClr>
             </a:outerShdw>
           </a:effectLst>
@@ -14089,7 +14363,7 @@
             </a:avLst>
           </a:prstGeom>
           <a:solidFill>
-            <a:srgbClr val="E8EBF0"/>
+            <a:srgbClr val="E2E3EC"/>
           </a:solidFill>
           <a:ln/>
         </p:spPr>
@@ -14228,7 +14502,7 @@
             </a:avLst>
           </a:prstGeom>
           <a:solidFill>
-            <a:srgbClr val="E8EBF0"/>
+            <a:srgbClr val="E2E3EC"/>
           </a:solidFill>
           <a:ln/>
         </p:spPr>
@@ -14367,7 +14641,7 @@
             </a:avLst>
           </a:prstGeom>
           <a:solidFill>
-            <a:srgbClr val="E8EBF0"/>
+            <a:srgbClr val="E2E3EC"/>
           </a:solidFill>
           <a:ln/>
         </p:spPr>
@@ -14448,13 +14722,13 @@
             </a:avLst>
           </a:prstGeom>
           <a:solidFill>
-            <a:srgbClr val="1E2B4A"/>
+            <a:srgbClr val="191970"/>
           </a:solidFill>
           <a:ln/>
           <a:effectLst>
             <a:outerShdw sx="100000" sy="100000" kx="0" ky="0" algn="bl" rotWithShape="0" blurRad="127000" dist="25400" dir="5400000">
-              <a:srgbClr val="1E2B4A">
-                <a:alpha val="13000"/>
+              <a:srgbClr val="13134F">
+                <a:alpha val="10000"/>
               </a:srgbClr>
             </a:outerShdw>
           </a:effectLst>
@@ -14597,13 +14871,13 @@
             </a:avLst>
           </a:prstGeom>
           <a:solidFill>
-            <a:srgbClr val="FFFFFF"/>
+            <a:srgbClr val="F4F5FA"/>
           </a:solidFill>
           <a:ln/>
           <a:effectLst>
             <a:outerShdw sx="100000" sy="100000" kx="0" ky="0" algn="bl" rotWithShape="0" blurRad="127000" dist="25400" dir="5400000">
-              <a:srgbClr val="1E2B4A">
-                <a:alpha val="13000"/>
+              <a:srgbClr val="13134F">
+                <a:alpha val="10000"/>
               </a:srgbClr>
             </a:outerShdw>
           </a:effectLst>
@@ -14737,8 +15011,8 @@
         </p:nvSpPr>
         <p:spPr>
           <a:xfrm>
-            <a:off x="10972800" y="6455664"/>
-            <a:ext cx="685800" cy="237744"/>
+            <a:off x="10881360" y="6455664"/>
+            <a:ext cx="365760" cy="237744"/>
           </a:xfrm>
           <a:prstGeom prst="rect">
             <a:avLst/>
@@ -14768,6 +15042,30 @@
           </a:p>
         </p:txBody>
       </p:sp>
+      <p:pic>
+        <p:nvPicPr>
+          <p:cNvPr id="38" name="Image 0" descr="logos/logo_ensae_new.png">    </p:cNvPr>
+          <p:cNvPicPr>
+            <a:picLocks noChangeAspect="1"/>
+          </p:cNvPicPr>
+          <p:nvPr/>
+        </p:nvPicPr>
+        <p:blipFill>
+          <a:blip r:embed="rId1"/>
+          <a:stretch>
+            <a:fillRect/>
+          </a:stretch>
+        </p:blipFill>
+        <p:spPr>
+          <a:xfrm>
+            <a:off x="11384280" y="6355080"/>
+            <a:ext cx="384048" cy="384048"/>
+          </a:xfrm>
+          <a:prstGeom prst="rect">
+            <a:avLst/>
+          </a:prstGeom>
+        </p:spPr>
+      </p:pic>
     </p:spTree>
   </p:cSld>
   <p:clrMapOvr>
@@ -14782,7 +15080,7 @@
     <p:bg>
       <p:bgPr>
         <a:solidFill>
-          <a:srgbClr val="16213D"/>
+          <a:srgbClr val="101038"/>
         </a:solidFill>
       </p:bgPr>
     </p:bg>
@@ -14815,7 +15113,7 @@
             <a:avLst/>
           </a:prstGeom>
           <a:solidFill>
-            <a:srgbClr val="24365E"/>
+            <a:srgbClr val="23236B"/>
           </a:solidFill>
           <a:ln/>
         </p:spPr>
@@ -14835,7 +15133,7 @@
             <a:avLst/>
           </a:prstGeom>
           <a:solidFill>
-            <a:srgbClr val="24365E"/>
+            <a:srgbClr val="23236B"/>
           </a:solidFill>
           <a:ln/>
         </p:spPr>
@@ -14948,7 +15246,7 @@
             <a:r>
               <a:rPr lang="en-US" sz="1400" dirty="0">
                 <a:solidFill>
-                  <a:srgbClr val="AFC0DA"/>
+                  <a:srgbClr val="B7B7DB"/>
                 </a:solidFill>
                 <a:latin typeface="Calibri" pitchFamily="34" charset="0"/>
                 <a:ea typeface="Calibri" pitchFamily="34" charset="-122"/>
@@ -14974,7 +15272,7 @@
     <p:bg>
       <p:bgPr>
         <a:solidFill>
-          <a:srgbClr val="FBFAF8"/>
+          <a:srgbClr val="FFFFFF"/>
         </a:solidFill>
       </p:bgPr>
     </p:bg>
@@ -15019,7 +15317,7 @@
             <a:r>
               <a:rPr lang="en-US" sz="2700" b="1" dirty="0">
                 <a:solidFill>
-                  <a:srgbClr val="1E2B4A"/>
+                  <a:srgbClr val="191970"/>
                 </a:solidFill>
                 <a:latin typeface="Calibri" pitchFamily="34" charset="0"/>
                 <a:ea typeface="Calibri" pitchFamily="34" charset="-122"/>
@@ -15048,13 +15346,13 @@
             </a:avLst>
           </a:prstGeom>
           <a:solidFill>
-            <a:srgbClr val="FFFFFF"/>
+            <a:srgbClr val="F4F5FA"/>
           </a:solidFill>
           <a:ln/>
           <a:effectLst>
             <a:outerShdw sx="100000" sy="100000" kx="0" ky="0" algn="bl" rotWithShape="0" blurRad="127000" dist="25400" dir="5400000">
-              <a:srgbClr val="1E2B4A">
-                <a:alpha val="13000"/>
+              <a:srgbClr val="13134F">
+                <a:alpha val="10000"/>
               </a:srgbClr>
             </a:outerShdw>
           </a:effectLst>
@@ -15075,7 +15373,7 @@
             <a:avLst/>
           </a:prstGeom>
           <a:solidFill>
-            <a:srgbClr val="41639E"/>
+            <a:srgbClr val="4444AD"/>
           </a:solidFill>
           <a:ln w="31750">
             <a:solidFill>
@@ -15085,7 +15383,7 @@
           </a:ln>
           <a:effectLst>
             <a:outerShdw sx="100000" sy="100000" kx="0" ky="0" algn="bl" rotWithShape="0" blurRad="127000" dist="25400" dir="5400000">
-              <a:srgbClr val="1E2B4A">
+              <a:srgbClr val="13134F">
                 <a:alpha val="18000"/>
               </a:srgbClr>
             </a:outerShdw>
@@ -15143,7 +15441,7 @@
             <a:r>
               <a:rPr lang="en-US" sz="3000" b="1" dirty="0">
                 <a:solidFill>
-                  <a:srgbClr val="E8EBF0"/>
+                  <a:srgbClr val="E2E3EC"/>
                 </a:solidFill>
                 <a:latin typeface="Calibri" pitchFamily="34" charset="0"/>
                 <a:ea typeface="Calibri" pitchFamily="34" charset="-122"/>
@@ -15250,13 +15548,13 @@
             </a:avLst>
           </a:prstGeom>
           <a:solidFill>
-            <a:srgbClr val="FFFFFF"/>
+            <a:srgbClr val="F4F5FA"/>
           </a:solidFill>
           <a:ln/>
           <a:effectLst>
             <a:outerShdw sx="100000" sy="100000" kx="0" ky="0" algn="bl" rotWithShape="0" blurRad="127000" dist="25400" dir="5400000">
-              <a:srgbClr val="1E2B4A">
-                <a:alpha val="13000"/>
+              <a:srgbClr val="13134F">
+                <a:alpha val="10000"/>
               </a:srgbClr>
             </a:outerShdw>
           </a:effectLst>
@@ -15287,7 +15585,7 @@
           </a:ln>
           <a:effectLst>
             <a:outerShdw sx="100000" sy="100000" kx="0" ky="0" algn="bl" rotWithShape="0" blurRad="127000" dist="25400" dir="5400000">
-              <a:srgbClr val="1E2B4A">
+              <a:srgbClr val="13134F">
                 <a:alpha val="18000"/>
               </a:srgbClr>
             </a:outerShdw>
@@ -15345,7 +15643,7 @@
             <a:r>
               <a:rPr lang="en-US" sz="3000" b="1" dirty="0">
                 <a:solidFill>
-                  <a:srgbClr val="E8EBF0"/>
+                  <a:srgbClr val="E2E3EC"/>
                 </a:solidFill>
                 <a:latin typeface="Calibri" pitchFamily="34" charset="0"/>
                 <a:ea typeface="Calibri" pitchFamily="34" charset="-122"/>
@@ -15452,13 +15750,13 @@
             </a:avLst>
           </a:prstGeom>
           <a:solidFill>
-            <a:srgbClr val="FFFFFF"/>
+            <a:srgbClr val="F4F5FA"/>
           </a:solidFill>
           <a:ln/>
           <a:effectLst>
             <a:outerShdw sx="100000" sy="100000" kx="0" ky="0" algn="bl" rotWithShape="0" blurRad="127000" dist="25400" dir="5400000">
-              <a:srgbClr val="1E2B4A">
-                <a:alpha val="13000"/>
+              <a:srgbClr val="13134F">
+                <a:alpha val="10000"/>
               </a:srgbClr>
             </a:outerShdw>
           </a:effectLst>
@@ -15479,7 +15777,7 @@
             <a:avLst/>
           </a:prstGeom>
           <a:solidFill>
-            <a:srgbClr val="3E8C9A"/>
+            <a:srgbClr val="2A2A80"/>
           </a:solidFill>
           <a:ln w="31750">
             <a:solidFill>
@@ -15489,7 +15787,7 @@
           </a:ln>
           <a:effectLst>
             <a:outerShdw sx="100000" sy="100000" kx="0" ky="0" algn="bl" rotWithShape="0" blurRad="127000" dist="25400" dir="5400000">
-              <a:srgbClr val="1E2B4A">
+              <a:srgbClr val="13134F">
                 <a:alpha val="18000"/>
               </a:srgbClr>
             </a:outerShdw>
@@ -15547,7 +15845,7 @@
             <a:r>
               <a:rPr lang="en-US" sz="3000" b="1" dirty="0">
                 <a:solidFill>
-                  <a:srgbClr val="E8EBF0"/>
+                  <a:srgbClr val="E2E3EC"/>
                 </a:solidFill>
                 <a:latin typeface="Calibri" pitchFamily="34" charset="0"/>
                 <a:ea typeface="Calibri" pitchFamily="34" charset="-122"/>
@@ -15654,13 +15952,13 @@
             </a:avLst>
           </a:prstGeom>
           <a:solidFill>
-            <a:srgbClr val="FFFFFF"/>
+            <a:srgbClr val="F4F5FA"/>
           </a:solidFill>
           <a:ln/>
           <a:effectLst>
             <a:outerShdw sx="100000" sy="100000" kx="0" ky="0" algn="bl" rotWithShape="0" blurRad="127000" dist="25400" dir="5400000">
-              <a:srgbClr val="1E2B4A">
-                <a:alpha val="13000"/>
+              <a:srgbClr val="13134F">
+                <a:alpha val="10000"/>
               </a:srgbClr>
             </a:outerShdw>
           </a:effectLst>
@@ -15681,7 +15979,7 @@
             <a:avLst/>
           </a:prstGeom>
           <a:solidFill>
-            <a:srgbClr val="C98A24"/>
+            <a:srgbClr val="6E6ECB"/>
           </a:solidFill>
           <a:ln w="31750">
             <a:solidFill>
@@ -15691,7 +15989,7 @@
           </a:ln>
           <a:effectLst>
             <a:outerShdw sx="100000" sy="100000" kx="0" ky="0" algn="bl" rotWithShape="0" blurRad="127000" dist="25400" dir="5400000">
-              <a:srgbClr val="1E2B4A">
+              <a:srgbClr val="13134F">
                 <a:alpha val="18000"/>
               </a:srgbClr>
             </a:outerShdw>
@@ -15749,7 +16047,7 @@
             <a:r>
               <a:rPr lang="en-US" sz="3000" b="1" dirty="0">
                 <a:solidFill>
-                  <a:srgbClr val="E8EBF0"/>
+                  <a:srgbClr val="E2E3EC"/>
                 </a:solidFill>
                 <a:latin typeface="Calibri" pitchFamily="34" charset="0"/>
                 <a:ea typeface="Calibri" pitchFamily="34" charset="-122"/>
@@ -15856,13 +16154,13 @@
             </a:avLst>
           </a:prstGeom>
           <a:solidFill>
-            <a:srgbClr val="FFFFFF"/>
+            <a:srgbClr val="F4F5FA"/>
           </a:solidFill>
           <a:ln/>
           <a:effectLst>
             <a:outerShdw sx="100000" sy="100000" kx="0" ky="0" algn="bl" rotWithShape="0" blurRad="127000" dist="25400" dir="5400000">
-              <a:srgbClr val="1E2B4A">
-                <a:alpha val="13000"/>
+              <a:srgbClr val="13134F">
+                <a:alpha val="10000"/>
               </a:srgbClr>
             </a:outerShdw>
           </a:effectLst>
@@ -15883,7 +16181,7 @@
             <a:avLst/>
           </a:prstGeom>
           <a:solidFill>
-            <a:srgbClr val="41639E"/>
+            <a:srgbClr val="4444AD"/>
           </a:solidFill>
           <a:ln w="31750">
             <a:solidFill>
@@ -15893,7 +16191,7 @@
           </a:ln>
           <a:effectLst>
             <a:outerShdw sx="100000" sy="100000" kx="0" ky="0" algn="bl" rotWithShape="0" blurRad="127000" dist="25400" dir="5400000">
-              <a:srgbClr val="1E2B4A">
+              <a:srgbClr val="13134F">
                 <a:alpha val="18000"/>
               </a:srgbClr>
             </a:outerShdw>
@@ -15951,7 +16249,7 @@
             <a:r>
               <a:rPr lang="en-US" sz="3000" b="1" dirty="0">
                 <a:solidFill>
-                  <a:srgbClr val="E8EBF0"/>
+                  <a:srgbClr val="E2E3EC"/>
                 </a:solidFill>
                 <a:latin typeface="Calibri" pitchFamily="34" charset="0"/>
                 <a:ea typeface="Calibri" pitchFamily="34" charset="-122"/>
@@ -16058,13 +16356,13 @@
             </a:avLst>
           </a:prstGeom>
           <a:solidFill>
-            <a:srgbClr val="FFFFFF"/>
+            <a:srgbClr val="F4F5FA"/>
           </a:solidFill>
           <a:ln/>
           <a:effectLst>
             <a:outerShdw sx="100000" sy="100000" kx="0" ky="0" algn="bl" rotWithShape="0" blurRad="127000" dist="25400" dir="5400000">
-              <a:srgbClr val="1E2B4A">
-                <a:alpha val="13000"/>
+              <a:srgbClr val="13134F">
+                <a:alpha val="10000"/>
               </a:srgbClr>
             </a:outerShdw>
           </a:effectLst>
@@ -16095,7 +16393,7 @@
           </a:ln>
           <a:effectLst>
             <a:outerShdw sx="100000" sy="100000" kx="0" ky="0" algn="bl" rotWithShape="0" blurRad="127000" dist="25400" dir="5400000">
-              <a:srgbClr val="1E2B4A">
+              <a:srgbClr val="13134F">
                 <a:alpha val="18000"/>
               </a:srgbClr>
             </a:outerShdw>
@@ -16153,7 +16451,7 @@
             <a:r>
               <a:rPr lang="en-US" sz="3000" b="1" dirty="0">
                 <a:solidFill>
-                  <a:srgbClr val="E8EBF0"/>
+                  <a:srgbClr val="E2E3EC"/>
                 </a:solidFill>
                 <a:latin typeface="Calibri" pitchFamily="34" charset="0"/>
                 <a:ea typeface="Calibri" pitchFamily="34" charset="-122"/>
@@ -16251,8 +16549,8 @@
         </p:nvSpPr>
         <p:spPr>
           <a:xfrm>
-            <a:off x="10972800" y="6455664"/>
-            <a:ext cx="685800" cy="237744"/>
+            <a:off x="10881360" y="6455664"/>
+            <a:ext cx="365760" cy="237744"/>
           </a:xfrm>
           <a:prstGeom prst="rect">
             <a:avLst/>
@@ -16282,6 +16580,30 @@
           </a:p>
         </p:txBody>
       </p:sp>
+      <p:pic>
+        <p:nvPicPr>
+          <p:cNvPr id="40" name="Image 6" descr="logos/logo_ensae_new.png">    </p:cNvPr>
+          <p:cNvPicPr>
+            <a:picLocks noChangeAspect="1"/>
+          </p:cNvPicPr>
+          <p:nvPr/>
+        </p:nvPicPr>
+        <p:blipFill>
+          <a:blip r:embed="rId7"/>
+          <a:stretch>
+            <a:fillRect/>
+          </a:stretch>
+        </p:blipFill>
+        <p:spPr>
+          <a:xfrm>
+            <a:off x="11384280" y="6355080"/>
+            <a:ext cx="384048" cy="384048"/>
+          </a:xfrm>
+          <a:prstGeom prst="rect">
+            <a:avLst/>
+          </a:prstGeom>
+        </p:spPr>
+      </p:pic>
     </p:spTree>
   </p:cSld>
   <p:clrMapOvr>
@@ -16296,7 +16618,7 @@
     <p:bg>
       <p:bgPr>
         <a:solidFill>
-          <a:srgbClr val="FBFAF8"/>
+          <a:srgbClr val="FFFFFF"/>
         </a:solidFill>
       </p:bgPr>
     </p:bg>
@@ -16341,7 +16663,7 @@
             <a:r>
               <a:rPr lang="en-US" sz="2700" b="1" dirty="0">
                 <a:solidFill>
-                  <a:srgbClr val="1E2B4A"/>
+                  <a:srgbClr val="191970"/>
                 </a:solidFill>
                 <a:latin typeface="Calibri" pitchFamily="34" charset="0"/>
                 <a:ea typeface="Calibri" pitchFamily="34" charset="-122"/>
@@ -16370,13 +16692,13 @@
             </a:avLst>
           </a:prstGeom>
           <a:solidFill>
-            <a:srgbClr val="FFFFFF"/>
+            <a:srgbClr val="F4F5FA"/>
           </a:solidFill>
           <a:ln/>
           <a:effectLst>
             <a:outerShdw sx="100000" sy="100000" kx="0" ky="0" algn="bl" rotWithShape="0" blurRad="127000" dist="25400" dir="5400000">
-              <a:srgbClr val="1E2B4A">
-                <a:alpha val="13000"/>
+              <a:srgbClr val="13134F">
+                <a:alpha val="10000"/>
               </a:srgbClr>
             </a:outerShdw>
           </a:effectLst>
@@ -16397,7 +16719,7 @@
             <a:avLst/>
           </a:prstGeom>
           <a:solidFill>
-            <a:srgbClr val="41639E"/>
+            <a:srgbClr val="4444AD"/>
           </a:solidFill>
           <a:ln w="31750">
             <a:solidFill>
@@ -16407,7 +16729,7 @@
           </a:ln>
           <a:effectLst>
             <a:outerShdw sx="100000" sy="100000" kx="0" ky="0" algn="bl" rotWithShape="0" blurRad="127000" dist="25400" dir="5400000">
-              <a:srgbClr val="1E2B4A">
+              <a:srgbClr val="13134F">
                 <a:alpha val="18000"/>
               </a:srgbClr>
             </a:outerShdw>
@@ -16504,7 +16826,7 @@
             <a:r>
               <a:rPr lang="en-US" sz="1100" b="1" dirty="0">
                 <a:solidFill>
-                  <a:srgbClr val="41639E"/>
+                  <a:srgbClr val="4444AD"/>
                 </a:solidFill>
                 <a:latin typeface="Calibri" pitchFamily="34" charset="0"/>
                 <a:ea typeface="Calibri" pitchFamily="34" charset="-122"/>
@@ -16575,13 +16897,13 @@
             </a:avLst>
           </a:prstGeom>
           <a:solidFill>
-            <a:srgbClr val="FFFFFF"/>
+            <a:srgbClr val="F4F5FA"/>
           </a:solidFill>
           <a:ln/>
           <a:effectLst>
             <a:outerShdw sx="100000" sy="100000" kx="0" ky="0" algn="bl" rotWithShape="0" blurRad="127000" dist="25400" dir="5400000">
-              <a:srgbClr val="1E2B4A">
-                <a:alpha val="13000"/>
+              <a:srgbClr val="13134F">
+                <a:alpha val="10000"/>
               </a:srgbClr>
             </a:outerShdw>
           </a:effectLst>
@@ -16602,7 +16924,7 @@
             <a:avLst/>
           </a:prstGeom>
           <a:solidFill>
-            <a:srgbClr val="3E8C9A"/>
+            <a:srgbClr val="2A2A80"/>
           </a:solidFill>
           <a:ln w="31750">
             <a:solidFill>
@@ -16612,7 +16934,7 @@
           </a:ln>
           <a:effectLst>
             <a:outerShdw sx="100000" sy="100000" kx="0" ky="0" algn="bl" rotWithShape="0" blurRad="127000" dist="25400" dir="5400000">
-              <a:srgbClr val="1E2B4A">
+              <a:srgbClr val="13134F">
                 <a:alpha val="18000"/>
               </a:srgbClr>
             </a:outerShdw>
@@ -16709,7 +17031,7 @@
             <a:r>
               <a:rPr lang="en-US" sz="1100" b="1" dirty="0">
                 <a:solidFill>
-                  <a:srgbClr val="3E8C9A"/>
+                  <a:srgbClr val="2A2A80"/>
                 </a:solidFill>
                 <a:latin typeface="Calibri" pitchFamily="34" charset="0"/>
                 <a:ea typeface="Calibri" pitchFamily="34" charset="-122"/>
@@ -16780,13 +17102,13 @@
             </a:avLst>
           </a:prstGeom>
           <a:solidFill>
-            <a:srgbClr val="FFFFFF"/>
+            <a:srgbClr val="F4F5FA"/>
           </a:solidFill>
           <a:ln/>
           <a:effectLst>
             <a:outerShdw sx="100000" sy="100000" kx="0" ky="0" algn="bl" rotWithShape="0" blurRad="127000" dist="25400" dir="5400000">
-              <a:srgbClr val="1E2B4A">
-                <a:alpha val="13000"/>
+              <a:srgbClr val="13134F">
+                <a:alpha val="10000"/>
               </a:srgbClr>
             </a:outerShdw>
           </a:effectLst>
@@ -16807,7 +17129,7 @@
             <a:avLst/>
           </a:prstGeom>
           <a:solidFill>
-            <a:srgbClr val="C98A24"/>
+            <a:srgbClr val="6E6ECB"/>
           </a:solidFill>
           <a:ln w="31750">
             <a:solidFill>
@@ -16817,7 +17139,7 @@
           </a:ln>
           <a:effectLst>
             <a:outerShdw sx="100000" sy="100000" kx="0" ky="0" algn="bl" rotWithShape="0" blurRad="127000" dist="25400" dir="5400000">
-              <a:srgbClr val="1E2B4A">
+              <a:srgbClr val="13134F">
                 <a:alpha val="18000"/>
               </a:srgbClr>
             </a:outerShdw>
@@ -16914,7 +17236,7 @@
             <a:r>
               <a:rPr lang="en-US" sz="1100" b="1" dirty="0">
                 <a:solidFill>
-                  <a:srgbClr val="C98A24"/>
+                  <a:srgbClr val="6E6ECB"/>
                 </a:solidFill>
                 <a:latin typeface="Calibri" pitchFamily="34" charset="0"/>
                 <a:ea typeface="Calibri" pitchFamily="34" charset="-122"/>
@@ -16985,13 +17307,13 @@
             </a:avLst>
           </a:prstGeom>
           <a:solidFill>
-            <a:srgbClr val="FFFFFF"/>
+            <a:srgbClr val="F4F5FA"/>
           </a:solidFill>
           <a:ln/>
           <a:effectLst>
             <a:outerShdw sx="100000" sy="100000" kx="0" ky="0" algn="bl" rotWithShape="0" blurRad="127000" dist="25400" dir="5400000">
-              <a:srgbClr val="1E2B4A">
-                <a:alpha val="13000"/>
+              <a:srgbClr val="13134F">
+                <a:alpha val="10000"/>
               </a:srgbClr>
             </a:outerShdw>
           </a:effectLst>
@@ -17022,7 +17344,7 @@
           </a:ln>
           <a:effectLst>
             <a:outerShdw sx="100000" sy="100000" kx="0" ky="0" algn="bl" rotWithShape="0" blurRad="127000" dist="25400" dir="5400000">
-              <a:srgbClr val="1E2B4A">
+              <a:srgbClr val="13134F">
                 <a:alpha val="18000"/>
               </a:srgbClr>
             </a:outerShdw>
@@ -17190,13 +17512,13 @@
             </a:avLst>
           </a:prstGeom>
           <a:solidFill>
-            <a:srgbClr val="FBFAF8"/>
+            <a:srgbClr val="FFFFFF"/>
           </a:solidFill>
           <a:ln/>
           <a:effectLst>
             <a:outerShdw sx="100000" sy="100000" kx="0" ky="0" algn="bl" rotWithShape="0" blurRad="127000" dist="25400" dir="5400000">
-              <a:srgbClr val="1E2B4A">
-                <a:alpha val="13000"/>
+              <a:srgbClr val="13134F">
+                <a:alpha val="10000"/>
               </a:srgbClr>
             </a:outerShdw>
           </a:effectLst>
@@ -17249,8 +17571,8 @@
         </p:nvSpPr>
         <p:spPr>
           <a:xfrm>
-            <a:off x="10972800" y="6455664"/>
-            <a:ext cx="685800" cy="237744"/>
+            <a:off x="10881360" y="6455664"/>
+            <a:ext cx="365760" cy="237744"/>
           </a:xfrm>
           <a:prstGeom prst="rect">
             <a:avLst/>
@@ -17280,6 +17602,30 @@
           </a:p>
         </p:txBody>
       </p:sp>
+      <p:pic>
+        <p:nvPicPr>
+          <p:cNvPr id="30" name="Image 4" descr="logos/logo_ensae_new.png">    </p:cNvPr>
+          <p:cNvPicPr>
+            <a:picLocks noChangeAspect="1"/>
+          </p:cNvPicPr>
+          <p:nvPr/>
+        </p:nvPicPr>
+        <p:blipFill>
+          <a:blip r:embed="rId5"/>
+          <a:stretch>
+            <a:fillRect/>
+          </a:stretch>
+        </p:blipFill>
+        <p:spPr>
+          <a:xfrm>
+            <a:off x="11384280" y="6355080"/>
+            <a:ext cx="384048" cy="384048"/>
+          </a:xfrm>
+          <a:prstGeom prst="rect">
+            <a:avLst/>
+          </a:prstGeom>
+        </p:spPr>
+      </p:pic>
     </p:spTree>
   </p:cSld>
   <p:clrMapOvr>
@@ -17294,7 +17640,7 @@
     <p:bg>
       <p:bgPr>
         <a:solidFill>
-          <a:srgbClr val="FBFAF8"/>
+          <a:srgbClr val="FFFFFF"/>
         </a:solidFill>
       </p:bgPr>
     </p:bg>
@@ -17339,7 +17685,7 @@
             <a:r>
               <a:rPr lang="en-US" sz="2700" b="1" dirty="0">
                 <a:solidFill>
-                  <a:srgbClr val="1E2B4A"/>
+                  <a:srgbClr val="191970"/>
                 </a:solidFill>
                 <a:latin typeface="Calibri" pitchFamily="34" charset="0"/>
                 <a:ea typeface="Calibri" pitchFamily="34" charset="-122"/>
@@ -17368,13 +17714,13 @@
             </a:avLst>
           </a:prstGeom>
           <a:solidFill>
-            <a:srgbClr val="FFFFFF"/>
+            <a:srgbClr val="F4F5FA"/>
           </a:solidFill>
           <a:ln/>
           <a:effectLst>
             <a:outerShdw sx="100000" sy="100000" kx="0" ky="0" algn="bl" rotWithShape="0" blurRad="127000" dist="25400" dir="5400000">
-              <a:srgbClr val="1E2B4A">
-                <a:alpha val="13000"/>
+              <a:srgbClr val="13134F">
+                <a:alpha val="10000"/>
               </a:srgbClr>
             </a:outerShdw>
           </a:effectLst>
@@ -17559,13 +17905,13 @@
             </a:avLst>
           </a:prstGeom>
           <a:solidFill>
-            <a:srgbClr val="FFFFFF"/>
+            <a:srgbClr val="F4F5FA"/>
           </a:solidFill>
           <a:ln/>
           <a:effectLst>
             <a:outerShdw sx="100000" sy="100000" kx="0" ky="0" algn="bl" rotWithShape="0" blurRad="127000" dist="25400" dir="5400000">
-              <a:srgbClr val="1E2B4A">
-                <a:alpha val="13000"/>
+              <a:srgbClr val="13134F">
+                <a:alpha val="10000"/>
               </a:srgbClr>
             </a:outerShdw>
           </a:effectLst>
@@ -17598,7 +17944,7 @@
             <a:r>
               <a:rPr lang="en-US" sz="2600" b="1" dirty="0">
                 <a:solidFill>
-                  <a:srgbClr val="3E8C9A"/>
+                  <a:srgbClr val="2A2A80"/>
                 </a:solidFill>
                 <a:latin typeface="Calibri" pitchFamily="34" charset="0"/>
                 <a:ea typeface="Calibri" pitchFamily="34" charset="-122"/>
@@ -17721,7 +18067,7 @@
             <a:r>
               <a:rPr lang="en-US" sz="1350" b="1" dirty="0">
                 <a:solidFill>
-                  <a:srgbClr val="3E8C9A"/>
+                  <a:srgbClr val="2A2A80"/>
                 </a:solidFill>
                 <a:latin typeface="Calibri" pitchFamily="34" charset="0"/>
                 <a:ea typeface="Calibri" pitchFamily="34" charset="-122"/>
@@ -17758,7 +18104,7 @@
           </a:ln>
           <a:effectLst>
             <a:outerShdw sx="100000" sy="100000" kx="0" ky="0" algn="bl" rotWithShape="0" blurRad="127000" dist="25400" dir="5400000">
-              <a:srgbClr val="1E2B4A">
+              <a:srgbClr val="13134F">
                 <a:alpha val="18000"/>
               </a:srgbClr>
             </a:outerShdw>
@@ -17804,7 +18150,7 @@
             <a:avLst/>
           </a:prstGeom>
           <a:solidFill>
-            <a:srgbClr val="3E8C9A"/>
+            <a:srgbClr val="2A2A80"/>
           </a:solidFill>
           <a:ln w="31750">
             <a:solidFill>
@@ -17814,7 +18160,7 @@
           </a:ln>
           <a:effectLst>
             <a:outerShdw sx="100000" sy="100000" kx="0" ky="0" algn="bl" rotWithShape="0" blurRad="127000" dist="25400" dir="5400000">
-              <a:srgbClr val="1E2B4A">
+              <a:srgbClr val="13134F">
                 <a:alpha val="18000"/>
               </a:srgbClr>
             </a:outerShdw>
@@ -17853,8 +18199,8 @@
         </p:nvSpPr>
         <p:spPr>
           <a:xfrm>
-            <a:off x="10972800" y="6455664"/>
-            <a:ext cx="685800" cy="237744"/>
+            <a:off x="10881360" y="6455664"/>
+            <a:ext cx="365760" cy="237744"/>
           </a:xfrm>
           <a:prstGeom prst="rect">
             <a:avLst/>
@@ -17884,6 +18230,30 @@
           </a:p>
         </p:txBody>
       </p:sp>
+      <p:pic>
+        <p:nvPicPr>
+          <p:cNvPr id="18" name="Image 2" descr="logos/logo_ensae_new.png">    </p:cNvPr>
+          <p:cNvPicPr>
+            <a:picLocks noChangeAspect="1"/>
+          </p:cNvPicPr>
+          <p:nvPr/>
+        </p:nvPicPr>
+        <p:blipFill>
+          <a:blip r:embed="rId3"/>
+          <a:stretch>
+            <a:fillRect/>
+          </a:stretch>
+        </p:blipFill>
+        <p:spPr>
+          <a:xfrm>
+            <a:off x="11384280" y="6355080"/>
+            <a:ext cx="384048" cy="384048"/>
+          </a:xfrm>
+          <a:prstGeom prst="rect">
+            <a:avLst/>
+          </a:prstGeom>
+        </p:spPr>
+      </p:pic>
     </p:spTree>
   </p:cSld>
   <p:clrMapOvr>
@@ -17898,7 +18268,7 @@
     <p:bg>
       <p:bgPr>
         <a:solidFill>
-          <a:srgbClr val="FBFAF8"/>
+          <a:srgbClr val="FFFFFF"/>
         </a:solidFill>
       </p:bgPr>
     </p:bg>
@@ -17943,7 +18313,7 @@
             <a:r>
               <a:rPr lang="en-US" sz="2700" b="1" dirty="0">
                 <a:solidFill>
-                  <a:srgbClr val="1E2B4A"/>
+                  <a:srgbClr val="191970"/>
                 </a:solidFill>
                 <a:latin typeface="Calibri" pitchFamily="34" charset="0"/>
                 <a:ea typeface="Calibri" pitchFamily="34" charset="-122"/>
@@ -18014,13 +18384,13 @@
             </a:avLst>
           </a:prstGeom>
           <a:solidFill>
-            <a:srgbClr val="FFFFFF"/>
+            <a:srgbClr val="F4F5FA"/>
           </a:solidFill>
           <a:ln/>
           <a:effectLst>
             <a:outerShdw sx="100000" sy="100000" kx="0" ky="0" algn="bl" rotWithShape="0" blurRad="127000" dist="25400" dir="5400000">
-              <a:srgbClr val="1E2B4A">
-                <a:alpha val="13000"/>
+              <a:srgbClr val="13134F">
+                <a:alpha val="10000"/>
               </a:srgbClr>
             </a:outerShdw>
           </a:effectLst>
@@ -18041,7 +18411,7 @@
             <a:avLst/>
           </a:prstGeom>
           <a:solidFill>
-            <a:srgbClr val="C98A24"/>
+            <a:srgbClr val="6E6ECB"/>
           </a:solidFill>
           <a:ln w="31750">
             <a:solidFill>
@@ -18051,7 +18421,7 @@
           </a:ln>
           <a:effectLst>
             <a:outerShdw sx="100000" sy="100000" kx="0" ky="0" algn="bl" rotWithShape="0" blurRad="127000" dist="25400" dir="5400000">
-              <a:srgbClr val="1E2B4A">
+              <a:srgbClr val="13134F">
                 <a:alpha val="18000"/>
               </a:srgbClr>
             </a:outerShdw>
@@ -18183,13 +18553,13 @@
             </a:avLst>
           </a:prstGeom>
           <a:solidFill>
-            <a:srgbClr val="FFFFFF"/>
+            <a:srgbClr val="F4F5FA"/>
           </a:solidFill>
           <a:ln/>
           <a:effectLst>
             <a:outerShdw sx="100000" sy="100000" kx="0" ky="0" algn="bl" rotWithShape="0" blurRad="127000" dist="25400" dir="5400000">
-              <a:srgbClr val="1E2B4A">
-                <a:alpha val="13000"/>
+              <a:srgbClr val="13134F">
+                <a:alpha val="10000"/>
               </a:srgbClr>
             </a:outerShdw>
           </a:effectLst>
@@ -18210,7 +18580,7 @@
             <a:avLst/>
           </a:prstGeom>
           <a:solidFill>
-            <a:srgbClr val="41639E"/>
+            <a:srgbClr val="4444AD"/>
           </a:solidFill>
           <a:ln w="31750">
             <a:solidFill>
@@ -18220,7 +18590,7 @@
           </a:ln>
           <a:effectLst>
             <a:outerShdw sx="100000" sy="100000" kx="0" ky="0" algn="bl" rotWithShape="0" blurRad="127000" dist="25400" dir="5400000">
-              <a:srgbClr val="1E2B4A">
+              <a:srgbClr val="13134F">
                 <a:alpha val="18000"/>
               </a:srgbClr>
             </a:outerShdw>
@@ -18352,13 +18722,13 @@
             </a:avLst>
           </a:prstGeom>
           <a:solidFill>
-            <a:srgbClr val="FFFFFF"/>
+            <a:srgbClr val="F4F5FA"/>
           </a:solidFill>
           <a:ln/>
           <a:effectLst>
             <a:outerShdw sx="100000" sy="100000" kx="0" ky="0" algn="bl" rotWithShape="0" blurRad="127000" dist="25400" dir="5400000">
-              <a:srgbClr val="1E2B4A">
-                <a:alpha val="13000"/>
+              <a:srgbClr val="13134F">
+                <a:alpha val="10000"/>
               </a:srgbClr>
             </a:outerShdw>
           </a:effectLst>
@@ -18379,7 +18749,7 @@
             <a:avLst/>
           </a:prstGeom>
           <a:solidFill>
-            <a:srgbClr val="3E8C9A"/>
+            <a:srgbClr val="2A2A80"/>
           </a:solidFill>
           <a:ln w="31750">
             <a:solidFill>
@@ -18389,7 +18759,7 @@
           </a:ln>
           <a:effectLst>
             <a:outerShdw sx="100000" sy="100000" kx="0" ky="0" algn="bl" rotWithShape="0" blurRad="127000" dist="25400" dir="5400000">
-              <a:srgbClr val="1E2B4A">
+              <a:srgbClr val="13134F">
                 <a:alpha val="18000"/>
               </a:srgbClr>
             </a:outerShdw>
@@ -18512,8 +18882,8 @@
         </p:nvSpPr>
         <p:spPr>
           <a:xfrm>
-            <a:off x="10972800" y="6455664"/>
-            <a:ext cx="685800" cy="237744"/>
+            <a:off x="10881360" y="6455664"/>
+            <a:ext cx="365760" cy="237744"/>
           </a:xfrm>
           <a:prstGeom prst="rect">
             <a:avLst/>
@@ -18543,6 +18913,30 @@
           </a:p>
         </p:txBody>
       </p:sp>
+      <p:pic>
+        <p:nvPicPr>
+          <p:cNvPr id="20" name="Image 3" descr="logos/logo_ensae_new.png">    </p:cNvPr>
+          <p:cNvPicPr>
+            <a:picLocks noChangeAspect="1"/>
+          </p:cNvPicPr>
+          <p:nvPr/>
+        </p:nvPicPr>
+        <p:blipFill>
+          <a:blip r:embed="rId4"/>
+          <a:stretch>
+            <a:fillRect/>
+          </a:stretch>
+        </p:blipFill>
+        <p:spPr>
+          <a:xfrm>
+            <a:off x="11384280" y="6355080"/>
+            <a:ext cx="384048" cy="384048"/>
+          </a:xfrm>
+          <a:prstGeom prst="rect">
+            <a:avLst/>
+          </a:prstGeom>
+        </p:spPr>
+      </p:pic>
     </p:spTree>
   </p:cSld>
   <p:clrMapOvr>
@@ -18557,7 +18951,7 @@
     <p:bg>
       <p:bgPr>
         <a:solidFill>
-          <a:srgbClr val="FBFAF8"/>
+          <a:srgbClr val="FFFFFF"/>
         </a:solidFill>
       </p:bgPr>
     </p:bg>
@@ -18602,7 +18996,7 @@
             <a:r>
               <a:rPr lang="en-US" sz="2700" b="1" dirty="0">
                 <a:solidFill>
-                  <a:srgbClr val="1E2B4A"/>
+                  <a:srgbClr val="191970"/>
                 </a:solidFill>
                 <a:latin typeface="Calibri" pitchFamily="34" charset="0"/>
                 <a:ea typeface="Calibri" pitchFamily="34" charset="-122"/>
@@ -18631,13 +19025,13 @@
             </a:avLst>
           </a:prstGeom>
           <a:solidFill>
-            <a:srgbClr val="FFFFFF"/>
+            <a:srgbClr val="F4F5FA"/>
           </a:solidFill>
           <a:ln/>
           <a:effectLst>
             <a:outerShdw sx="100000" sy="100000" kx="0" ky="0" algn="bl" rotWithShape="0" blurRad="127000" dist="25400" dir="5400000">
-              <a:srgbClr val="1E2B4A">
-                <a:alpha val="13000"/>
+              <a:srgbClr val="13134F">
+                <a:alpha val="10000"/>
               </a:srgbClr>
             </a:outerShdw>
           </a:effectLst>
@@ -18668,7 +19062,7 @@
           </a:ln>
           <a:effectLst>
             <a:outerShdw sx="100000" sy="100000" kx="0" ky="0" algn="bl" rotWithShape="0" blurRad="127000" dist="25400" dir="5400000">
-              <a:srgbClr val="1E2B4A">
+              <a:srgbClr val="13134F">
                 <a:alpha val="18000"/>
               </a:srgbClr>
             </a:outerShdw>
@@ -18917,13 +19311,13 @@
             </a:avLst>
           </a:prstGeom>
           <a:solidFill>
-            <a:srgbClr val="FFFFFF"/>
+            <a:srgbClr val="F4F5FA"/>
           </a:solidFill>
           <a:ln/>
           <a:effectLst>
             <a:outerShdw sx="100000" sy="100000" kx="0" ky="0" algn="bl" rotWithShape="0" blurRad="127000" dist="25400" dir="5400000">
-              <a:srgbClr val="1E2B4A">
-                <a:alpha val="13000"/>
+              <a:srgbClr val="13134F">
+                <a:alpha val="10000"/>
               </a:srgbClr>
             </a:outerShdw>
           </a:effectLst>
@@ -18944,7 +19338,7 @@
             <a:avLst/>
           </a:prstGeom>
           <a:solidFill>
-            <a:srgbClr val="3E8C9A"/>
+            <a:srgbClr val="2A2A80"/>
           </a:solidFill>
           <a:ln w="31750">
             <a:solidFill>
@@ -18954,7 +19348,7 @@
           </a:ln>
           <a:effectLst>
             <a:outerShdw sx="100000" sy="100000" kx="0" ky="0" algn="bl" rotWithShape="0" blurRad="127000" dist="25400" dir="5400000">
-              <a:srgbClr val="1E2B4A">
+              <a:srgbClr val="13134F">
                 <a:alpha val="18000"/>
               </a:srgbClr>
             </a:outerShdw>
@@ -19039,7 +19433,7 @@
             <a:avLst/>
           </a:prstGeom>
           <a:solidFill>
-            <a:srgbClr val="3E8C9A"/>
+            <a:srgbClr val="2A2A80"/>
           </a:solidFill>
           <a:ln/>
         </p:spPr>
@@ -19140,7 +19534,7 @@
             <a:avLst/>
           </a:prstGeom>
           <a:solidFill>
-            <a:srgbClr val="3E8C9A"/>
+            <a:srgbClr val="2A2A80"/>
           </a:solidFill>
           <a:ln/>
         </p:spPr>
@@ -19241,7 +19635,7 @@
             <a:avLst/>
           </a:prstGeom>
           <a:solidFill>
-            <a:srgbClr val="3E8C9A"/>
+            <a:srgbClr val="2A2A80"/>
           </a:solidFill>
           <a:ln/>
         </p:spPr>
@@ -19335,8 +19729,8 @@
         </p:nvSpPr>
         <p:spPr>
           <a:xfrm>
-            <a:off x="10972800" y="6455664"/>
-            <a:ext cx="685800" cy="237744"/>
+            <a:off x="10881360" y="6455664"/>
+            <a:ext cx="365760" cy="237744"/>
           </a:xfrm>
           <a:prstGeom prst="rect">
             <a:avLst/>
@@ -19366,6 +19760,30 @@
           </a:p>
         </p:txBody>
       </p:sp>
+      <p:pic>
+        <p:nvPicPr>
+          <p:cNvPr id="25" name="Image 2" descr="logos/logo_ensae_new.png">    </p:cNvPr>
+          <p:cNvPicPr>
+            <a:picLocks noChangeAspect="1"/>
+          </p:cNvPicPr>
+          <p:nvPr/>
+        </p:nvPicPr>
+        <p:blipFill>
+          <a:blip r:embed="rId3"/>
+          <a:stretch>
+            <a:fillRect/>
+          </a:stretch>
+        </p:blipFill>
+        <p:spPr>
+          <a:xfrm>
+            <a:off x="11384280" y="6355080"/>
+            <a:ext cx="384048" cy="384048"/>
+          </a:xfrm>
+          <a:prstGeom prst="rect">
+            <a:avLst/>
+          </a:prstGeom>
+        </p:spPr>
+      </p:pic>
     </p:spTree>
   </p:cSld>
   <p:clrMapOvr>
@@ -19380,7 +19798,7 @@
     <p:bg>
       <p:bgPr>
         <a:solidFill>
-          <a:srgbClr val="16213D"/>
+          <a:srgbClr val="101038"/>
         </a:solidFill>
       </p:bgPr>
     </p:bg>
@@ -19413,7 +19831,7 @@
             <a:avLst/>
           </a:prstGeom>
           <a:solidFill>
-            <a:srgbClr val="24365E"/>
+            <a:srgbClr val="23236B"/>
           </a:solidFill>
           <a:ln/>
         </p:spPr>
@@ -19433,7 +19851,7 @@
             <a:avLst/>
           </a:prstGeom>
           <a:solidFill>
-            <a:srgbClr val="24365E"/>
+            <a:srgbClr val="23236B"/>
           </a:solidFill>
           <a:ln/>
         </p:spPr>
@@ -19546,7 +19964,7 @@
             <a:r>
               <a:rPr lang="en-US" sz="1400" dirty="0">
                 <a:solidFill>
-                  <a:srgbClr val="AFC0DA"/>
+                  <a:srgbClr val="B7B7DB"/>
                 </a:solidFill>
                 <a:latin typeface="Calibri" pitchFamily="34" charset="0"/>
                 <a:ea typeface="Calibri" pitchFamily="34" charset="-122"/>
@@ -19572,7 +19990,7 @@
     <p:bg>
       <p:bgPr>
         <a:solidFill>
-          <a:srgbClr val="FBFAF8"/>
+          <a:srgbClr val="FFFFFF"/>
         </a:solidFill>
       </p:bgPr>
     </p:bg>
@@ -19617,7 +20035,7 @@
             <a:r>
               <a:rPr lang="en-US" sz="2700" b="1" dirty="0">
                 <a:solidFill>
-                  <a:srgbClr val="1E2B4A"/>
+                  <a:srgbClr val="191970"/>
                 </a:solidFill>
                 <a:latin typeface="Calibri" pitchFamily="34" charset="0"/>
                 <a:ea typeface="Calibri" pitchFamily="34" charset="-122"/>
@@ -19646,13 +20064,13 @@
             </a:avLst>
           </a:prstGeom>
           <a:solidFill>
-            <a:srgbClr val="1E2B4A"/>
+            <a:srgbClr val="191970"/>
           </a:solidFill>
           <a:ln/>
           <a:effectLst>
             <a:outerShdw sx="100000" sy="100000" kx="0" ky="0" algn="bl" rotWithShape="0" blurRad="127000" dist="25400" dir="5400000">
-              <a:srgbClr val="1E2B4A">
-                <a:alpha val="13000"/>
+              <a:srgbClr val="13134F">
+                <a:alpha val="10000"/>
               </a:srgbClr>
             </a:outerShdw>
           </a:effectLst>
@@ -19717,13 +20135,13 @@
             </a:avLst>
           </a:prstGeom>
           <a:solidFill>
-            <a:srgbClr val="FFFFFF"/>
+            <a:srgbClr val="F4F5FA"/>
           </a:solidFill>
           <a:ln/>
           <a:effectLst>
             <a:outerShdw sx="100000" sy="100000" kx="0" ky="0" algn="bl" rotWithShape="0" blurRad="127000" dist="25400" dir="5400000">
-              <a:srgbClr val="1E2B4A">
-                <a:alpha val="13000"/>
+              <a:srgbClr val="13134F">
+                <a:alpha val="10000"/>
               </a:srgbClr>
             </a:outerShdw>
           </a:effectLst>
@@ -19866,13 +20284,13 @@
             </a:avLst>
           </a:prstGeom>
           <a:solidFill>
-            <a:srgbClr val="FFFFFF"/>
+            <a:srgbClr val="F4F5FA"/>
           </a:solidFill>
           <a:ln/>
           <a:effectLst>
             <a:outerShdw sx="100000" sy="100000" kx="0" ky="0" algn="bl" rotWithShape="0" blurRad="127000" dist="25400" dir="5400000">
-              <a:srgbClr val="1E2B4A">
-                <a:alpha val="13000"/>
+              <a:srgbClr val="13134F">
+                <a:alpha val="10000"/>
               </a:srgbClr>
             </a:outerShdw>
           </a:effectLst>
@@ -19905,7 +20323,7 @@
             <a:r>
               <a:rPr lang="en-US" sz="3600" b="1" dirty="0">
                 <a:solidFill>
-                  <a:srgbClr val="41639E"/>
+                  <a:srgbClr val="4444AD"/>
                 </a:solidFill>
                 <a:latin typeface="Calibri" pitchFamily="34" charset="0"/>
                 <a:ea typeface="Calibri" pitchFamily="34" charset="-122"/>
@@ -20015,13 +20433,13 @@
             </a:avLst>
           </a:prstGeom>
           <a:solidFill>
-            <a:srgbClr val="FFFFFF"/>
+            <a:srgbClr val="F4F5FA"/>
           </a:solidFill>
           <a:ln/>
           <a:effectLst>
             <a:outerShdw sx="100000" sy="100000" kx="0" ky="0" algn="bl" rotWithShape="0" blurRad="127000" dist="25400" dir="5400000">
-              <a:srgbClr val="1E2B4A">
-                <a:alpha val="13000"/>
+              <a:srgbClr val="13134F">
+                <a:alpha val="10000"/>
               </a:srgbClr>
             </a:outerShdw>
           </a:effectLst>
@@ -20054,7 +20472,7 @@
             <a:r>
               <a:rPr lang="en-US" sz="3600" b="1" dirty="0">
                 <a:solidFill>
-                  <a:srgbClr val="3E8C9A"/>
+                  <a:srgbClr val="2A2A80"/>
                 </a:solidFill>
                 <a:latin typeface="Calibri" pitchFamily="34" charset="0"/>
                 <a:ea typeface="Calibri" pitchFamily="34" charset="-122"/>
@@ -20164,13 +20582,13 @@
             </a:avLst>
           </a:prstGeom>
           <a:solidFill>
-            <a:srgbClr val="FFFFFF"/>
+            <a:srgbClr val="F4F5FA"/>
           </a:solidFill>
           <a:ln/>
           <a:effectLst>
             <a:outerShdw sx="100000" sy="100000" kx="0" ky="0" algn="bl" rotWithShape="0" blurRad="127000" dist="25400" dir="5400000">
-              <a:srgbClr val="1E2B4A">
-                <a:alpha val="13000"/>
+              <a:srgbClr val="13134F">
+                <a:alpha val="10000"/>
               </a:srgbClr>
             </a:outerShdw>
           </a:effectLst>
@@ -20203,7 +20621,7 @@
             <a:r>
               <a:rPr lang="en-US" sz="3600" b="1" dirty="0">
                 <a:solidFill>
-                  <a:srgbClr val="C98A24"/>
+                  <a:srgbClr val="6E6ECB"/>
                 </a:solidFill>
                 <a:latin typeface="Calibri" pitchFamily="34" charset="0"/>
                 <a:ea typeface="Calibri" pitchFamily="34" charset="-122"/>
@@ -20304,8 +20722,8 @@
         </p:nvSpPr>
         <p:spPr>
           <a:xfrm>
-            <a:off x="10972800" y="6455664"/>
-            <a:ext cx="685800" cy="237744"/>
+            <a:off x="10881360" y="6455664"/>
+            <a:ext cx="365760" cy="237744"/>
           </a:xfrm>
           <a:prstGeom prst="rect">
             <a:avLst/>
@@ -20335,6 +20753,30 @@
           </a:p>
         </p:txBody>
       </p:sp>
+      <p:pic>
+        <p:nvPicPr>
+          <p:cNvPr id="22" name="Image 0" descr="logos/logo_ensae_new.png">    </p:cNvPr>
+          <p:cNvPicPr>
+            <a:picLocks noChangeAspect="1"/>
+          </p:cNvPicPr>
+          <p:nvPr/>
+        </p:nvPicPr>
+        <p:blipFill>
+          <a:blip r:embed="rId1"/>
+          <a:stretch>
+            <a:fillRect/>
+          </a:stretch>
+        </p:blipFill>
+        <p:spPr>
+          <a:xfrm>
+            <a:off x="11384280" y="6355080"/>
+            <a:ext cx="384048" cy="384048"/>
+          </a:xfrm>
+          <a:prstGeom prst="rect">
+            <a:avLst/>
+          </a:prstGeom>
+        </p:spPr>
+      </p:pic>
     </p:spTree>
   </p:cSld>
   <p:clrMapOvr>
@@ -20349,7 +20791,7 @@
     <p:bg>
       <p:bgPr>
         <a:solidFill>
-          <a:srgbClr val="FBFAF8"/>
+          <a:srgbClr val="FFFFFF"/>
         </a:solidFill>
       </p:bgPr>
     </p:bg>
@@ -20394,7 +20836,7 @@
             <a:r>
               <a:rPr lang="en-US" sz="2700" b="1" dirty="0">
                 <a:solidFill>
-                  <a:srgbClr val="1E2B4A"/>
+                  <a:srgbClr val="191970"/>
                 </a:solidFill>
                 <a:latin typeface="Calibri" pitchFamily="34" charset="0"/>
                 <a:ea typeface="Calibri" pitchFamily="34" charset="-122"/>
@@ -20465,13 +20907,13 @@
             </a:avLst>
           </a:prstGeom>
           <a:solidFill>
-            <a:srgbClr val="FFFFFF"/>
+            <a:srgbClr val="F4F5FA"/>
           </a:solidFill>
           <a:ln/>
           <a:effectLst>
             <a:outerShdw sx="100000" sy="100000" kx="0" ky="0" algn="bl" rotWithShape="0" blurRad="127000" dist="25400" dir="5400000">
-              <a:srgbClr val="1E2B4A">
-                <a:alpha val="13000"/>
+              <a:srgbClr val="13134F">
+                <a:alpha val="10000"/>
               </a:srgbClr>
             </a:outerShdw>
           </a:effectLst>
@@ -20492,7 +20934,7 @@
             <a:avLst/>
           </a:prstGeom>
           <a:solidFill>
-            <a:srgbClr val="C98A24"/>
+            <a:srgbClr val="6E6ECB"/>
           </a:solidFill>
           <a:ln w="31750">
             <a:solidFill>
@@ -20502,7 +20944,7 @@
           </a:ln>
           <a:effectLst>
             <a:outerShdw sx="100000" sy="100000" kx="0" ky="0" algn="bl" rotWithShape="0" blurRad="127000" dist="25400" dir="5400000">
-              <a:srgbClr val="1E2B4A">
+              <a:srgbClr val="13134F">
                 <a:alpha val="18000"/>
               </a:srgbClr>
             </a:outerShdw>
@@ -20634,13 +21076,13 @@
             </a:avLst>
           </a:prstGeom>
           <a:solidFill>
-            <a:srgbClr val="FFFFFF"/>
+            <a:srgbClr val="F4F5FA"/>
           </a:solidFill>
           <a:ln/>
           <a:effectLst>
             <a:outerShdw sx="100000" sy="100000" kx="0" ky="0" algn="bl" rotWithShape="0" blurRad="127000" dist="25400" dir="5400000">
-              <a:srgbClr val="1E2B4A">
-                <a:alpha val="13000"/>
+              <a:srgbClr val="13134F">
+                <a:alpha val="10000"/>
               </a:srgbClr>
             </a:outerShdw>
           </a:effectLst>
@@ -20661,7 +21103,7 @@
             <a:avLst/>
           </a:prstGeom>
           <a:solidFill>
-            <a:srgbClr val="41639E"/>
+            <a:srgbClr val="4444AD"/>
           </a:solidFill>
           <a:ln w="31750">
             <a:solidFill>
@@ -20671,7 +21113,7 @@
           </a:ln>
           <a:effectLst>
             <a:outerShdw sx="100000" sy="100000" kx="0" ky="0" algn="bl" rotWithShape="0" blurRad="127000" dist="25400" dir="5400000">
-              <a:srgbClr val="1E2B4A">
+              <a:srgbClr val="13134F">
                 <a:alpha val="18000"/>
               </a:srgbClr>
             </a:outerShdw>
@@ -20803,13 +21245,13 @@
             </a:avLst>
           </a:prstGeom>
           <a:solidFill>
-            <a:srgbClr val="FFFFFF"/>
+            <a:srgbClr val="F4F5FA"/>
           </a:solidFill>
           <a:ln/>
           <a:effectLst>
             <a:outerShdw sx="100000" sy="100000" kx="0" ky="0" algn="bl" rotWithShape="0" blurRad="127000" dist="25400" dir="5400000">
-              <a:srgbClr val="1E2B4A">
-                <a:alpha val="13000"/>
+              <a:srgbClr val="13134F">
+                <a:alpha val="10000"/>
               </a:srgbClr>
             </a:outerShdw>
           </a:effectLst>
@@ -20830,7 +21272,7 @@
             <a:avLst/>
           </a:prstGeom>
           <a:solidFill>
-            <a:srgbClr val="3E8C9A"/>
+            <a:srgbClr val="2A2A80"/>
           </a:solidFill>
           <a:ln w="31750">
             <a:solidFill>
@@ -20840,7 +21282,7 @@
           </a:ln>
           <a:effectLst>
             <a:outerShdw sx="100000" sy="100000" kx="0" ky="0" algn="bl" rotWithShape="0" blurRad="127000" dist="25400" dir="5400000">
-              <a:srgbClr val="1E2B4A">
+              <a:srgbClr val="13134F">
                 <a:alpha val="18000"/>
               </a:srgbClr>
             </a:outerShdw>
@@ -20963,8 +21405,8 @@
         </p:nvSpPr>
         <p:spPr>
           <a:xfrm>
-            <a:off x="10972800" y="6455664"/>
-            <a:ext cx="685800" cy="237744"/>
+            <a:off x="10881360" y="6455664"/>
+            <a:ext cx="365760" cy="237744"/>
           </a:xfrm>
           <a:prstGeom prst="rect">
             <a:avLst/>
@@ -20994,6 +21436,30 @@
           </a:p>
         </p:txBody>
       </p:sp>
+      <p:pic>
+        <p:nvPicPr>
+          <p:cNvPr id="20" name="Image 3" descr="logos/logo_ensae_new.png">    </p:cNvPr>
+          <p:cNvPicPr>
+            <a:picLocks noChangeAspect="1"/>
+          </p:cNvPicPr>
+          <p:nvPr/>
+        </p:nvPicPr>
+        <p:blipFill>
+          <a:blip r:embed="rId4"/>
+          <a:stretch>
+            <a:fillRect/>
+          </a:stretch>
+        </p:blipFill>
+        <p:spPr>
+          <a:xfrm>
+            <a:off x="11384280" y="6355080"/>
+            <a:ext cx="384048" cy="384048"/>
+          </a:xfrm>
+          <a:prstGeom prst="rect">
+            <a:avLst/>
+          </a:prstGeom>
+        </p:spPr>
+      </p:pic>
     </p:spTree>
   </p:cSld>
   <p:clrMapOvr>
@@ -21008,7 +21474,7 @@
     <p:bg>
       <p:bgPr>
         <a:solidFill>
-          <a:srgbClr val="16213D"/>
+          <a:srgbClr val="101038"/>
         </a:solidFill>
       </p:bgPr>
     </p:bg>
@@ -21041,7 +21507,7 @@
             <a:avLst/>
           </a:prstGeom>
           <a:solidFill>
-            <a:srgbClr val="24365E"/>
+            <a:srgbClr val="23236B"/>
           </a:solidFill>
           <a:ln/>
         </p:spPr>
@@ -21061,7 +21527,7 @@
             <a:avLst/>
           </a:prstGeom>
           <a:solidFill>
-            <a:srgbClr val="24365E"/>
+            <a:srgbClr val="23236B"/>
           </a:solidFill>
           <a:ln/>
         </p:spPr>
@@ -21197,7 +21663,7 @@
     <p:bg>
       <p:bgPr>
         <a:solidFill>
-          <a:srgbClr val="16213D"/>
+          <a:srgbClr val="101038"/>
         </a:solidFill>
       </p:bgPr>
     </p:bg>
@@ -21230,7 +21696,7 @@
             <a:avLst/>
           </a:prstGeom>
           <a:solidFill>
-            <a:srgbClr val="24365E"/>
+            <a:srgbClr val="23236B"/>
           </a:solidFill>
           <a:ln/>
         </p:spPr>
@@ -21250,7 +21716,7 @@
             <a:avLst/>
           </a:prstGeom>
           <a:solidFill>
-            <a:srgbClr val="24365E"/>
+            <a:srgbClr val="23236B"/>
           </a:solidFill>
           <a:ln/>
         </p:spPr>
@@ -21363,7 +21829,7 @@
             <a:r>
               <a:rPr lang="en-US" sz="1400" dirty="0">
                 <a:solidFill>
-                  <a:srgbClr val="AFC0DA"/>
+                  <a:srgbClr val="B7B7DB"/>
                 </a:solidFill>
                 <a:latin typeface="Calibri" pitchFamily="34" charset="0"/>
                 <a:ea typeface="Calibri" pitchFamily="34" charset="-122"/>
@@ -21389,7 +21855,7 @@
     <p:bg>
       <p:bgPr>
         <a:solidFill>
-          <a:srgbClr val="FBFAF8"/>
+          <a:srgbClr val="FFFFFF"/>
         </a:solidFill>
       </p:bgPr>
     </p:bg>
@@ -21434,7 +21900,7 @@
             <a:r>
               <a:rPr lang="en-US" sz="2700" b="1" dirty="0">
                 <a:solidFill>
-                  <a:srgbClr val="1E2B4A"/>
+                  <a:srgbClr val="191970"/>
                 </a:solidFill>
                 <a:latin typeface="Calibri" pitchFamily="34" charset="0"/>
                 <a:ea typeface="Calibri" pitchFamily="34" charset="-122"/>
@@ -21463,13 +21929,13 @@
             </a:avLst>
           </a:prstGeom>
           <a:solidFill>
-            <a:srgbClr val="FFFFFF"/>
+            <a:srgbClr val="F4F5FA"/>
           </a:solidFill>
           <a:ln/>
           <a:effectLst>
             <a:outerShdw sx="100000" sy="100000" kx="0" ky="0" algn="bl" rotWithShape="0" blurRad="127000" dist="25400" dir="5400000">
-              <a:srgbClr val="1E2B4A">
-                <a:alpha val="13000"/>
+              <a:srgbClr val="13134F">
+                <a:alpha val="10000"/>
               </a:srgbClr>
             </a:outerShdw>
           </a:effectLst>
@@ -21490,7 +21956,7 @@
             <a:avLst/>
           </a:prstGeom>
           <a:solidFill>
-            <a:srgbClr val="41639E"/>
+            <a:srgbClr val="4444AD"/>
           </a:solidFill>
           <a:ln w="31750">
             <a:solidFill>
@@ -21500,7 +21966,7 @@
           </a:ln>
           <a:effectLst>
             <a:outerShdw sx="100000" sy="100000" kx="0" ky="0" algn="bl" rotWithShape="0" blurRad="127000" dist="25400" dir="5400000">
-              <a:srgbClr val="1E2B4A">
+              <a:srgbClr val="13134F">
                 <a:alpha val="18000"/>
               </a:srgbClr>
             </a:outerShdw>
@@ -21600,7 +22066,7 @@
             <a:r>
               <a:rPr lang="en-US" sz="3400" b="1" dirty="0">
                 <a:solidFill>
-                  <a:srgbClr val="41639E"/>
+                  <a:srgbClr val="4444AD"/>
                 </a:solidFill>
                 <a:latin typeface="Calibri" pitchFamily="34" charset="0"/>
                 <a:ea typeface="Calibri" pitchFamily="34" charset="-122"/>
@@ -21701,7 +22167,7 @@
             <a:r>
               <a:rPr lang="en-US" sz="3400" b="1" dirty="0">
                 <a:solidFill>
-                  <a:srgbClr val="41639E"/>
+                  <a:srgbClr val="4444AD"/>
                 </a:solidFill>
                 <a:latin typeface="Calibri" pitchFamily="34" charset="0"/>
                 <a:ea typeface="Calibri" pitchFamily="34" charset="-122"/>
@@ -21873,13 +22339,13 @@
             </a:avLst>
           </a:prstGeom>
           <a:solidFill>
-            <a:srgbClr val="FFFFFF"/>
+            <a:srgbClr val="F4F5FA"/>
           </a:solidFill>
           <a:ln/>
           <a:effectLst>
             <a:outerShdw sx="100000" sy="100000" kx="0" ky="0" algn="bl" rotWithShape="0" blurRad="127000" dist="25400" dir="5400000">
-              <a:srgbClr val="1E2B4A">
-                <a:alpha val="13000"/>
+              <a:srgbClr val="13134F">
+                <a:alpha val="10000"/>
               </a:srgbClr>
             </a:outerShdw>
           </a:effectLst>
@@ -21910,7 +22376,7 @@
           </a:ln>
           <a:effectLst>
             <a:outerShdw sx="100000" sy="100000" kx="0" ky="0" algn="bl" rotWithShape="0" blurRad="127000" dist="25400" dir="5400000">
-              <a:srgbClr val="1E2B4A">
+              <a:srgbClr val="13134F">
                 <a:alpha val="18000"/>
               </a:srgbClr>
             </a:outerShdw>
@@ -22274,8 +22740,8 @@
         </p:nvSpPr>
         <p:spPr>
           <a:xfrm>
-            <a:off x="10972800" y="6455664"/>
-            <a:ext cx="685800" cy="237744"/>
+            <a:off x="10881360" y="6455664"/>
+            <a:ext cx="365760" cy="237744"/>
           </a:xfrm>
           <a:prstGeom prst="rect">
             <a:avLst/>
@@ -22305,6 +22771,30 @@
           </a:p>
         </p:txBody>
       </p:sp>
+      <p:pic>
+        <p:nvPicPr>
+          <p:cNvPr id="24" name="Image 2" descr="logos/logo_ensae_new.png">    </p:cNvPr>
+          <p:cNvPicPr>
+            <a:picLocks noChangeAspect="1"/>
+          </p:cNvPicPr>
+          <p:nvPr/>
+        </p:nvPicPr>
+        <p:blipFill>
+          <a:blip r:embed="rId3"/>
+          <a:stretch>
+            <a:fillRect/>
+          </a:stretch>
+        </p:blipFill>
+        <p:spPr>
+          <a:xfrm>
+            <a:off x="11384280" y="6355080"/>
+            <a:ext cx="384048" cy="384048"/>
+          </a:xfrm>
+          <a:prstGeom prst="rect">
+            <a:avLst/>
+          </a:prstGeom>
+        </p:spPr>
+      </p:pic>
     </p:spTree>
   </p:cSld>
   <p:clrMapOvr>
@@ -22319,7 +22809,7 @@
     <p:bg>
       <p:bgPr>
         <a:solidFill>
-          <a:srgbClr val="FBFAF8"/>
+          <a:srgbClr val="FFFFFF"/>
         </a:solidFill>
       </p:bgPr>
     </p:bg>
@@ -22364,7 +22854,7 @@
             <a:r>
               <a:rPr lang="en-US" sz="2700" b="1" dirty="0">
                 <a:solidFill>
-                  <a:srgbClr val="1E2B4A"/>
+                  <a:srgbClr val="191970"/>
                 </a:solidFill>
                 <a:latin typeface="Calibri" pitchFamily="34" charset="0"/>
                 <a:ea typeface="Calibri" pitchFamily="34" charset="-122"/>
@@ -22393,13 +22883,13 @@
             </a:avLst>
           </a:prstGeom>
           <a:solidFill>
-            <a:srgbClr val="1E2B4A"/>
+            <a:srgbClr val="191970"/>
           </a:solidFill>
           <a:ln/>
           <a:effectLst>
             <a:outerShdw sx="100000" sy="100000" kx="0" ky="0" algn="bl" rotWithShape="0" blurRad="127000" dist="25400" dir="5400000">
-              <a:srgbClr val="1E2B4A">
-                <a:alpha val="13000"/>
+              <a:srgbClr val="13134F">
+                <a:alpha val="10000"/>
               </a:srgbClr>
             </a:outerShdw>
           </a:effectLst>
@@ -22484,13 +22974,13 @@
             </a:avLst>
           </a:prstGeom>
           <a:solidFill>
-            <a:srgbClr val="FFFFFF"/>
+            <a:srgbClr val="F4F5FA"/>
           </a:solidFill>
           <a:ln/>
           <a:effectLst>
             <a:outerShdw sx="100000" sy="100000" kx="0" ky="0" algn="bl" rotWithShape="0" blurRad="127000" dist="25400" dir="5400000">
-              <a:srgbClr val="1E2B4A">
-                <a:alpha val="13000"/>
+              <a:srgbClr val="13134F">
+                <a:alpha val="10000"/>
               </a:srgbClr>
             </a:outerShdw>
           </a:effectLst>
@@ -22597,13 +23087,13 @@
             </a:avLst>
           </a:prstGeom>
           <a:solidFill>
-            <a:srgbClr val="FFFFFF"/>
+            <a:srgbClr val="F4F5FA"/>
           </a:solidFill>
           <a:ln/>
           <a:effectLst>
             <a:outerShdw sx="100000" sy="100000" kx="0" ky="0" algn="bl" rotWithShape="0" blurRad="127000" dist="25400" dir="5400000">
-              <a:srgbClr val="1E2B4A">
-                <a:alpha val="13000"/>
+              <a:srgbClr val="13134F">
+                <a:alpha val="10000"/>
               </a:srgbClr>
             </a:outerShdw>
           </a:effectLst>
@@ -22710,13 +23200,13 @@
             </a:avLst>
           </a:prstGeom>
           <a:solidFill>
-            <a:srgbClr val="FFFFFF"/>
+            <a:srgbClr val="F4F5FA"/>
           </a:solidFill>
           <a:ln/>
           <a:effectLst>
             <a:outerShdw sx="100000" sy="100000" kx="0" ky="0" algn="bl" rotWithShape="0" blurRad="127000" dist="25400" dir="5400000">
-              <a:srgbClr val="1E2B4A">
-                <a:alpha val="13000"/>
+              <a:srgbClr val="13134F">
+                <a:alpha val="10000"/>
               </a:srgbClr>
             </a:outerShdw>
           </a:effectLst>
@@ -22831,7 +23321,7 @@
           </a:ln>
           <a:effectLst>
             <a:outerShdw sx="100000" sy="100000" kx="0" ky="0" algn="bl" rotWithShape="0" blurRad="127000" dist="25400" dir="5400000">
-              <a:srgbClr val="1E2B4A">
+              <a:srgbClr val="13134F">
                 <a:alpha val="18000"/>
               </a:srgbClr>
             </a:outerShdw>
@@ -22877,7 +23367,7 @@
             <a:avLst/>
           </a:prstGeom>
           <a:solidFill>
-            <a:srgbClr val="C98A24"/>
+            <a:srgbClr val="6E6ECB"/>
           </a:solidFill>
           <a:ln w="31750">
             <a:solidFill>
@@ -22887,7 +23377,7 @@
           </a:ln>
           <a:effectLst>
             <a:outerShdw sx="100000" sy="100000" kx="0" ky="0" algn="bl" rotWithShape="0" blurRad="127000" dist="25400" dir="5400000">
-              <a:srgbClr val="1E2B4A">
+              <a:srgbClr val="13134F">
                 <a:alpha val="18000"/>
               </a:srgbClr>
             </a:outerShdw>
@@ -22933,7 +23423,7 @@
             <a:avLst/>
           </a:prstGeom>
           <a:solidFill>
-            <a:srgbClr val="3E8C9A"/>
+            <a:srgbClr val="2A2A80"/>
           </a:solidFill>
           <a:ln w="31750">
             <a:solidFill>
@@ -22943,7 +23433,7 @@
           </a:ln>
           <a:effectLst>
             <a:outerShdw sx="100000" sy="100000" kx="0" ky="0" algn="bl" rotWithShape="0" blurRad="127000" dist="25400" dir="5400000">
-              <a:srgbClr val="1E2B4A">
+              <a:srgbClr val="13134F">
                 <a:alpha val="18000"/>
               </a:srgbClr>
             </a:outerShdw>
@@ -22982,8 +23472,8 @@
         </p:nvSpPr>
         <p:spPr>
           <a:xfrm>
-            <a:off x="10972800" y="6455664"/>
-            <a:ext cx="685800" cy="237744"/>
+            <a:off x="10881360" y="6455664"/>
+            <a:ext cx="365760" cy="237744"/>
           </a:xfrm>
           <a:prstGeom prst="rect">
             <a:avLst/>
@@ -23013,6 +23503,30 @@
           </a:p>
         </p:txBody>
       </p:sp>
+      <p:pic>
+        <p:nvPicPr>
+          <p:cNvPr id="21" name="Image 3" descr="logos/logo_ensae_new.png">    </p:cNvPr>
+          <p:cNvPicPr>
+            <a:picLocks noChangeAspect="1"/>
+          </p:cNvPicPr>
+          <p:nvPr/>
+        </p:nvPicPr>
+        <p:blipFill>
+          <a:blip r:embed="rId4"/>
+          <a:stretch>
+            <a:fillRect/>
+          </a:stretch>
+        </p:blipFill>
+        <p:spPr>
+          <a:xfrm>
+            <a:off x="11384280" y="6355080"/>
+            <a:ext cx="384048" cy="384048"/>
+          </a:xfrm>
+          <a:prstGeom prst="rect">
+            <a:avLst/>
+          </a:prstGeom>
+        </p:spPr>
+      </p:pic>
     </p:spTree>
   </p:cSld>
   <p:clrMapOvr>
@@ -23027,7 +23541,7 @@
     <p:bg>
       <p:bgPr>
         <a:solidFill>
-          <a:srgbClr val="FBFAF8"/>
+          <a:srgbClr val="FFFFFF"/>
         </a:solidFill>
       </p:bgPr>
     </p:bg>
@@ -23072,7 +23586,7 @@
             <a:r>
               <a:rPr lang="en-US" sz="2700" b="1" dirty="0">
                 <a:solidFill>
-                  <a:srgbClr val="1E2B4A"/>
+                  <a:srgbClr val="191970"/>
                 </a:solidFill>
                 <a:latin typeface="Calibri" pitchFamily="34" charset="0"/>
                 <a:ea typeface="Calibri" pitchFamily="34" charset="-122"/>
@@ -23101,13 +23615,13 @@
             </a:avLst>
           </a:prstGeom>
           <a:solidFill>
-            <a:srgbClr val="FFFFFF"/>
+            <a:srgbClr val="F4F5FA"/>
           </a:solidFill>
           <a:ln/>
           <a:effectLst>
             <a:outerShdw sx="100000" sy="100000" kx="0" ky="0" algn="bl" rotWithShape="0" blurRad="127000" dist="25400" dir="5400000">
-              <a:srgbClr val="1E2B4A">
-                <a:alpha val="13000"/>
+              <a:srgbClr val="13134F">
+                <a:alpha val="10000"/>
               </a:srgbClr>
             </a:outerShdw>
           </a:effectLst>
@@ -23128,7 +23642,7 @@
             <a:avLst/>
           </a:prstGeom>
           <a:solidFill>
-            <a:srgbClr val="41639E"/>
+            <a:srgbClr val="4444AD"/>
           </a:solidFill>
           <a:ln w="31750">
             <a:solidFill>
@@ -23138,7 +23652,7 @@
           </a:ln>
           <a:effectLst>
             <a:outerShdw sx="100000" sy="100000" kx="0" ky="0" algn="bl" rotWithShape="0" blurRad="127000" dist="25400" dir="5400000">
-              <a:srgbClr val="1E2B4A">
+              <a:srgbClr val="13134F">
                 <a:alpha val="18000"/>
               </a:srgbClr>
             </a:outerShdw>
@@ -23265,7 +23779,7 @@
             <a:avLst/>
           </a:prstGeom>
           <a:solidFill>
-            <a:srgbClr val="41639E"/>
+            <a:srgbClr val="4444AD"/>
           </a:solidFill>
           <a:ln/>
         </p:spPr>
@@ -23366,7 +23880,7 @@
             <a:avLst/>
           </a:prstGeom>
           <a:solidFill>
-            <a:srgbClr val="41639E"/>
+            <a:srgbClr val="4444AD"/>
           </a:solidFill>
           <a:ln/>
         </p:spPr>
@@ -23469,13 +23983,13 @@
             </a:avLst>
           </a:prstGeom>
           <a:solidFill>
-            <a:srgbClr val="FFFFFF"/>
+            <a:srgbClr val="F4F5FA"/>
           </a:solidFill>
           <a:ln/>
           <a:effectLst>
             <a:outerShdw sx="100000" sy="100000" kx="0" ky="0" algn="bl" rotWithShape="0" blurRad="127000" dist="25400" dir="5400000">
-              <a:srgbClr val="1E2B4A">
-                <a:alpha val="13000"/>
+              <a:srgbClr val="13134F">
+                <a:alpha val="10000"/>
               </a:srgbClr>
             </a:outerShdw>
           </a:effectLst>
@@ -23506,7 +24020,7 @@
           </a:ln>
           <a:effectLst>
             <a:outerShdw sx="100000" sy="100000" kx="0" ky="0" algn="bl" rotWithShape="0" blurRad="127000" dist="25400" dir="5400000">
-              <a:srgbClr val="1E2B4A">
+              <a:srgbClr val="13134F">
                 <a:alpha val="18000"/>
               </a:srgbClr>
             </a:outerShdw>
@@ -23593,13 +24107,13 @@
             </a:avLst>
           </a:prstGeom>
           <a:solidFill>
-            <a:srgbClr val="FBFAF8"/>
+            <a:srgbClr val="E7E7F3"/>
           </a:solidFill>
           <a:ln/>
           <a:effectLst>
             <a:outerShdw sx="100000" sy="100000" kx="0" ky="0" algn="bl" rotWithShape="0" blurRad="127000" dist="25400" dir="5400000">
-              <a:srgbClr val="1E2B4A">
-                <a:alpha val="13000"/>
+              <a:srgbClr val="13134F">
+                <a:alpha val="10000"/>
               </a:srgbClr>
             </a:outerShdw>
           </a:effectLst>
@@ -23703,13 +24217,13 @@
             </a:avLst>
           </a:prstGeom>
           <a:solidFill>
-            <a:srgbClr val="FBFAF8"/>
+            <a:srgbClr val="E7E7F3"/>
           </a:solidFill>
           <a:ln/>
           <a:effectLst>
             <a:outerShdw sx="100000" sy="100000" kx="0" ky="0" algn="bl" rotWithShape="0" blurRad="127000" dist="25400" dir="5400000">
-              <a:srgbClr val="1E2B4A">
-                <a:alpha val="13000"/>
+              <a:srgbClr val="13134F">
+                <a:alpha val="10000"/>
               </a:srgbClr>
             </a:outerShdw>
           </a:effectLst>
@@ -23804,8 +24318,8 @@
         </p:nvSpPr>
         <p:spPr>
           <a:xfrm>
-            <a:off x="10972800" y="6455664"/>
-            <a:ext cx="685800" cy="237744"/>
+            <a:off x="10881360" y="6455664"/>
+            <a:ext cx="365760" cy="237744"/>
           </a:xfrm>
           <a:prstGeom prst="rect">
             <a:avLst/>
@@ -23835,6 +24349,30 @@
           </a:p>
         </p:txBody>
       </p:sp>
+      <p:pic>
+        <p:nvPicPr>
+          <p:cNvPr id="25" name="Image 2" descr="logos/logo_ensae_new.png">    </p:cNvPr>
+          <p:cNvPicPr>
+            <a:picLocks noChangeAspect="1"/>
+          </p:cNvPicPr>
+          <p:nvPr/>
+        </p:nvPicPr>
+        <p:blipFill>
+          <a:blip r:embed="rId3"/>
+          <a:stretch>
+            <a:fillRect/>
+          </a:stretch>
+        </p:blipFill>
+        <p:spPr>
+          <a:xfrm>
+            <a:off x="11384280" y="6355080"/>
+            <a:ext cx="384048" cy="384048"/>
+          </a:xfrm>
+          <a:prstGeom prst="rect">
+            <a:avLst/>
+          </a:prstGeom>
+        </p:spPr>
+      </p:pic>
     </p:spTree>
   </p:cSld>
   <p:clrMapOvr>
@@ -23849,7 +24387,7 @@
     <p:bg>
       <p:bgPr>
         <a:solidFill>
-          <a:srgbClr val="16213D"/>
+          <a:srgbClr val="101038"/>
         </a:solidFill>
       </p:bgPr>
     </p:bg>
@@ -23882,7 +24420,7 @@
             <a:avLst/>
           </a:prstGeom>
           <a:solidFill>
-            <a:srgbClr val="24365E"/>
+            <a:srgbClr val="23236B"/>
           </a:solidFill>
           <a:ln/>
         </p:spPr>
@@ -23902,7 +24440,7 @@
             <a:avLst/>
           </a:prstGeom>
           <a:solidFill>
-            <a:srgbClr val="24365E"/>
+            <a:srgbClr val="23236B"/>
           </a:solidFill>
           <a:ln/>
         </p:spPr>
@@ -24015,7 +24553,7 @@
             <a:r>
               <a:rPr lang="en-US" sz="1400" dirty="0">
                 <a:solidFill>
-                  <a:srgbClr val="AFC0DA"/>
+                  <a:srgbClr val="B7B7DB"/>
                 </a:solidFill>
                 <a:latin typeface="Calibri" pitchFamily="34" charset="0"/>
                 <a:ea typeface="Calibri" pitchFamily="34" charset="-122"/>
@@ -24041,7 +24579,7 @@
     <p:bg>
       <p:bgPr>
         <a:solidFill>
-          <a:srgbClr val="FBFAF8"/>
+          <a:srgbClr val="FFFFFF"/>
         </a:solidFill>
       </p:bgPr>
     </p:bg>
@@ -24086,7 +24624,7 @@
             <a:r>
               <a:rPr lang="en-US" sz="2700" b="1" dirty="0">
                 <a:solidFill>
-                  <a:srgbClr val="1E2B4A"/>
+                  <a:srgbClr val="191970"/>
                 </a:solidFill>
                 <a:latin typeface="Calibri" pitchFamily="34" charset="0"/>
                 <a:ea typeface="Calibri" pitchFamily="34" charset="-122"/>
@@ -24115,13 +24653,13 @@
             </a:avLst>
           </a:prstGeom>
           <a:solidFill>
-            <a:srgbClr val="FFFFFF"/>
+            <a:srgbClr val="F4F5FA"/>
           </a:solidFill>
           <a:ln/>
           <a:effectLst>
             <a:outerShdw sx="100000" sy="100000" kx="0" ky="0" algn="bl" rotWithShape="0" blurRad="127000" dist="25400" dir="5400000">
-              <a:srgbClr val="1E2B4A">
-                <a:alpha val="13000"/>
+              <a:srgbClr val="13134F">
+                <a:alpha val="10000"/>
               </a:srgbClr>
             </a:outerShdw>
           </a:effectLst>
@@ -24181,7 +24719,7 @@
             <a:avLst/>
           </a:prstGeom>
           <a:solidFill>
-            <a:srgbClr val="41639E"/>
+            <a:srgbClr val="4444AD"/>
           </a:solidFill>
           <a:ln/>
         </p:spPr>
@@ -24321,7 +24859,7 @@
             <a:avLst/>
           </a:prstGeom>
           <a:solidFill>
-            <a:srgbClr val="41639E"/>
+            <a:srgbClr val="4444AD"/>
           </a:solidFill>
           <a:ln/>
         </p:spPr>
@@ -24461,7 +24999,7 @@
             <a:avLst/>
           </a:prstGeom>
           <a:solidFill>
-            <a:srgbClr val="41639E"/>
+            <a:srgbClr val="4444AD"/>
           </a:solidFill>
           <a:ln/>
         </p:spPr>
@@ -24603,13 +25141,13 @@
             </a:avLst>
           </a:prstGeom>
           <a:solidFill>
-            <a:srgbClr val="FFFFFF"/>
+            <a:srgbClr val="F4F5FA"/>
           </a:solidFill>
           <a:ln/>
           <a:effectLst>
             <a:outerShdw sx="100000" sy="100000" kx="0" ky="0" algn="bl" rotWithShape="0" blurRad="127000" dist="25400" dir="5400000">
-              <a:srgbClr val="1E2B4A">
-                <a:alpha val="13000"/>
+              <a:srgbClr val="13134F">
+                <a:alpha val="10000"/>
               </a:srgbClr>
             </a:outerShdw>
           </a:effectLst>
@@ -25029,7 +25567,7 @@
             <a:avLst/>
           </a:prstGeom>
           <a:solidFill>
-            <a:srgbClr val="41639E"/>
+            <a:srgbClr val="4444AD"/>
           </a:solidFill>
           <a:ln w="31750">
             <a:solidFill>
@@ -25039,7 +25577,7 @@
           </a:ln>
           <a:effectLst>
             <a:outerShdw sx="100000" sy="100000" kx="0" ky="0" algn="bl" rotWithShape="0" blurRad="127000" dist="25400" dir="5400000">
-              <a:srgbClr val="1E2B4A">
+              <a:srgbClr val="13134F">
                 <a:alpha val="18000"/>
               </a:srgbClr>
             </a:outerShdw>
@@ -25085,7 +25623,7 @@
             <a:avLst/>
           </a:prstGeom>
           <a:solidFill>
-            <a:srgbClr val="C98A24"/>
+            <a:srgbClr val="6E6ECB"/>
           </a:solidFill>
           <a:ln w="31750">
             <a:solidFill>
@@ -25095,7 +25633,7 @@
           </a:ln>
           <a:effectLst>
             <a:outerShdw sx="100000" sy="100000" kx="0" ky="0" algn="bl" rotWithShape="0" blurRad="127000" dist="25400" dir="5400000">
-              <a:srgbClr val="1E2B4A">
+              <a:srgbClr val="13134F">
                 <a:alpha val="18000"/>
               </a:srgbClr>
             </a:outerShdw>
@@ -25151,7 +25689,7 @@
           </a:ln>
           <a:effectLst>
             <a:outerShdw sx="100000" sy="100000" kx="0" ky="0" algn="bl" rotWithShape="0" blurRad="127000" dist="25400" dir="5400000">
-              <a:srgbClr val="1E2B4A">
+              <a:srgbClr val="13134F">
                 <a:alpha val="18000"/>
               </a:srgbClr>
             </a:outerShdw>
@@ -25190,8 +25728,8 @@
         </p:nvSpPr>
         <p:spPr>
           <a:xfrm>
-            <a:off x="10972800" y="6455664"/>
-            <a:ext cx="685800" cy="237744"/>
+            <a:off x="10881360" y="6455664"/>
+            <a:ext cx="365760" cy="237744"/>
           </a:xfrm>
           <a:prstGeom prst="rect">
             <a:avLst/>
@@ -25221,6 +25759,30 @@
           </a:p>
         </p:txBody>
       </p:sp>
+      <p:pic>
+        <p:nvPicPr>
+          <p:cNvPr id="35" name="Image 3" descr="logos/logo_ensae_new.png">    </p:cNvPr>
+          <p:cNvPicPr>
+            <a:picLocks noChangeAspect="1"/>
+          </p:cNvPicPr>
+          <p:nvPr/>
+        </p:nvPicPr>
+        <p:blipFill>
+          <a:blip r:embed="rId4"/>
+          <a:stretch>
+            <a:fillRect/>
+          </a:stretch>
+        </p:blipFill>
+        <p:spPr>
+          <a:xfrm>
+            <a:off x="11384280" y="6355080"/>
+            <a:ext cx="384048" cy="384048"/>
+          </a:xfrm>
+          <a:prstGeom prst="rect">
+            <a:avLst/>
+          </a:prstGeom>
+        </p:spPr>
+      </p:pic>
     </p:spTree>
   </p:cSld>
   <p:clrMapOvr>
@@ -25235,7 +25797,7 @@
     <p:bg>
       <p:bgPr>
         <a:solidFill>
-          <a:srgbClr val="16213D"/>
+          <a:srgbClr val="101038"/>
         </a:solidFill>
       </p:bgPr>
     </p:bg>
@@ -25268,7 +25830,7 @@
             <a:avLst/>
           </a:prstGeom>
           <a:solidFill>
-            <a:srgbClr val="24365E"/>
+            <a:srgbClr val="23236B"/>
           </a:solidFill>
           <a:ln/>
         </p:spPr>
@@ -25288,7 +25850,7 @@
             <a:avLst/>
           </a:prstGeom>
           <a:solidFill>
-            <a:srgbClr val="24365E"/>
+            <a:srgbClr val="23236B"/>
           </a:solidFill>
           <a:ln/>
         </p:spPr>
@@ -25401,7 +25963,7 @@
             <a:r>
               <a:rPr lang="en-US" sz="1400" dirty="0">
                 <a:solidFill>
-                  <a:srgbClr val="AFC0DA"/>
+                  <a:srgbClr val="B7B7DB"/>
                 </a:solidFill>
                 <a:latin typeface="Calibri" pitchFamily="34" charset="0"/>
                 <a:ea typeface="Calibri" pitchFamily="34" charset="-122"/>

--- a/infographie/presentation_infographique.pptx
+++ b/infographie/presentation_infographique.pptx
@@ -3171,7 +3171,7 @@
     <p:bg>
       <p:bgPr>
         <a:solidFill>
-          <a:srgbClr val="101038"/>
+          <a:srgbClr val="16213D"/>
         </a:solidFill>
       </p:bgPr>
     </p:bg>
@@ -3204,7 +3204,7 @@
             <a:avLst/>
           </a:prstGeom>
           <a:solidFill>
-            <a:srgbClr val="23236B"/>
+            <a:srgbClr val="24365E"/>
           </a:solidFill>
           <a:ln/>
         </p:spPr>
@@ -3224,7 +3224,7 @@
             <a:avLst/>
           </a:prstGeom>
           <a:solidFill>
-            <a:srgbClr val="23236B"/>
+            <a:srgbClr val="24365E"/>
           </a:solidFill>
           <a:ln/>
         </p:spPr>
@@ -3251,7 +3251,7 @@
           <a:ln/>
           <a:effectLst>
             <a:outerShdw sx="100000" sy="100000" kx="0" ky="0" algn="bl" rotWithShape="0" blurRad="127000" dist="25400" dir="5400000">
-              <a:srgbClr val="13134F">
+              <a:srgbClr val="1E2B4A">
                 <a:alpha val="22000"/>
               </a:srgbClr>
             </a:outerShdw>
@@ -3304,7 +3304,7 @@
           <a:ln/>
           <a:effectLst>
             <a:outerShdw sx="100000" sy="100000" kx="0" ky="0" algn="bl" rotWithShape="0" blurRad="127000" dist="25400" dir="5400000">
-              <a:srgbClr val="13134F">
+              <a:srgbClr val="1E2B4A">
                 <a:alpha val="22000"/>
               </a:srgbClr>
             </a:outerShdw>
@@ -3401,7 +3401,7 @@
             <a:r>
               <a:rPr lang="en-US" sz="1250" dirty="0">
                 <a:solidFill>
-                  <a:srgbClr val="B7B7DB"/>
+                  <a:srgbClr val="AFC0DA"/>
                 </a:solidFill>
                 <a:latin typeface="Calibri" pitchFamily="34" charset="0"/>
                 <a:ea typeface="Calibri" pitchFamily="34" charset="-122"/>
@@ -3622,7 +3622,7 @@
             <a:r>
               <a:rPr lang="en-US" sz="1050" dirty="0">
                 <a:solidFill>
-                  <a:srgbClr val="B7B7DB"/>
+                  <a:srgbClr val="AFC0DA"/>
                 </a:solidFill>
                 <a:latin typeface="Calibri" pitchFamily="34" charset="0"/>
                 <a:ea typeface="Calibri" pitchFamily="34" charset="-122"/>
@@ -3742,7 +3742,7 @@
             <a:r>
               <a:rPr lang="en-US" sz="1050" dirty="0">
                 <a:solidFill>
-                  <a:srgbClr val="B7B7DB"/>
+                  <a:srgbClr val="AFC0DA"/>
                 </a:solidFill>
                 <a:latin typeface="Calibri" pitchFamily="34" charset="0"/>
                 <a:ea typeface="Calibri" pitchFamily="34" charset="-122"/>
@@ -3852,7 +3852,7 @@
             <a:r>
               <a:rPr lang="en-US" sz="2700" b="1" dirty="0">
                 <a:solidFill>
-                  <a:srgbClr val="191970"/>
+                  <a:srgbClr val="1E2B4A"/>
                 </a:solidFill>
                 <a:latin typeface="Calibri" pitchFamily="34" charset="0"/>
                 <a:ea typeface="Calibri" pitchFamily="34" charset="-122"/>
@@ -3928,7 +3928,7 @@
           <a:ln/>
           <a:effectLst>
             <a:outerShdw sx="100000" sy="100000" kx="0" ky="0" algn="bl" rotWithShape="0" blurRad="127000" dist="25400" dir="5400000">
-              <a:srgbClr val="13134F">
+              <a:srgbClr val="1E2B4A">
                 <a:alpha val="10000"/>
               </a:srgbClr>
             </a:outerShdw>
@@ -3950,7 +3950,7 @@
             <a:avLst/>
           </a:prstGeom>
           <a:solidFill>
-            <a:srgbClr val="4444AD"/>
+            <a:srgbClr val="41639E"/>
           </a:solidFill>
           <a:ln w="31750">
             <a:solidFill>
@@ -3960,7 +3960,7 @@
           </a:ln>
           <a:effectLst>
             <a:outerShdw sx="100000" sy="100000" kx="0" ky="0" algn="bl" rotWithShape="0" blurRad="127000" dist="25400" dir="5400000">
-              <a:srgbClr val="13134F">
+              <a:srgbClr val="1E2B4A">
                 <a:alpha val="18000"/>
               </a:srgbClr>
             </a:outerShdw>
@@ -4055,7 +4055,7 @@
           <a:ln/>
           <a:effectLst>
             <a:outerShdw sx="100000" sy="100000" kx="0" ky="0" algn="bl" rotWithShape="0" blurRad="127000" dist="25400" dir="5400000">
-              <a:srgbClr val="13134F">
+              <a:srgbClr val="1E2B4A">
                 <a:alpha val="10000"/>
               </a:srgbClr>
             </a:outerShdw>
@@ -4077,7 +4077,7 @@
             <a:avLst/>
           </a:prstGeom>
           <a:solidFill>
-            <a:srgbClr val="2A2A80"/>
+            <a:srgbClr val="3E8C9A"/>
           </a:solidFill>
           <a:ln w="31750">
             <a:solidFill>
@@ -4087,7 +4087,7 @@
           </a:ln>
           <a:effectLst>
             <a:outerShdw sx="100000" sy="100000" kx="0" ky="0" algn="bl" rotWithShape="0" blurRad="127000" dist="25400" dir="5400000">
-              <a:srgbClr val="13134F">
+              <a:srgbClr val="1E2B4A">
                 <a:alpha val="18000"/>
               </a:srgbClr>
             </a:outerShdw>
@@ -4182,7 +4182,7 @@
           <a:ln/>
           <a:effectLst>
             <a:outerShdw sx="100000" sy="100000" kx="0" ky="0" algn="bl" rotWithShape="0" blurRad="127000" dist="25400" dir="5400000">
-              <a:srgbClr val="13134F">
+              <a:srgbClr val="1E2B4A">
                 <a:alpha val="10000"/>
               </a:srgbClr>
             </a:outerShdw>
@@ -4204,7 +4204,7 @@
             <a:avLst/>
           </a:prstGeom>
           <a:solidFill>
-            <a:srgbClr val="4444AD"/>
+            <a:srgbClr val="41639E"/>
           </a:solidFill>
           <a:ln w="31750">
             <a:solidFill>
@@ -4214,7 +4214,7 @@
           </a:ln>
           <a:effectLst>
             <a:outerShdw sx="100000" sy="100000" kx="0" ky="0" algn="bl" rotWithShape="0" blurRad="127000" dist="25400" dir="5400000">
-              <a:srgbClr val="13134F">
+              <a:srgbClr val="1E2B4A">
                 <a:alpha val="18000"/>
               </a:srgbClr>
             </a:outerShdw>
@@ -4309,7 +4309,7 @@
           <a:ln/>
           <a:effectLst>
             <a:outerShdw sx="100000" sy="100000" kx="0" ky="0" algn="bl" rotWithShape="0" blurRad="127000" dist="25400" dir="5400000">
-              <a:srgbClr val="13134F">
+              <a:srgbClr val="1E2B4A">
                 <a:alpha val="10000"/>
               </a:srgbClr>
             </a:outerShdw>
@@ -4341,7 +4341,7 @@
           </a:ln>
           <a:effectLst>
             <a:outerShdw sx="100000" sy="100000" kx="0" ky="0" algn="bl" rotWithShape="0" blurRad="127000" dist="25400" dir="5400000">
-              <a:srgbClr val="13134F">
+              <a:srgbClr val="1E2B4A">
                 <a:alpha val="18000"/>
               </a:srgbClr>
             </a:outerShdw>
@@ -4436,7 +4436,7 @@
           <a:ln/>
           <a:effectLst>
             <a:outerShdw sx="100000" sy="100000" kx="0" ky="0" algn="bl" rotWithShape="0" blurRad="127000" dist="25400" dir="5400000">
-              <a:srgbClr val="13134F">
+              <a:srgbClr val="1E2B4A">
                 <a:alpha val="10000"/>
               </a:srgbClr>
             </a:outerShdw>
@@ -4458,7 +4458,7 @@
             <a:avLst/>
           </a:prstGeom>
           <a:solidFill>
-            <a:srgbClr val="6E6ECB"/>
+            <a:srgbClr val="C98A24"/>
           </a:solidFill>
           <a:ln w="31750">
             <a:solidFill>
@@ -4468,7 +4468,7 @@
           </a:ln>
           <a:effectLst>
             <a:outerShdw sx="100000" sy="100000" kx="0" ky="0" algn="bl" rotWithShape="0" blurRad="127000" dist="25400" dir="5400000">
-              <a:srgbClr val="13134F">
+              <a:srgbClr val="1E2B4A">
                 <a:alpha val="18000"/>
               </a:srgbClr>
             </a:outerShdw>
@@ -4563,7 +4563,7 @@
           <a:ln/>
           <a:effectLst>
             <a:outerShdw sx="100000" sy="100000" kx="0" ky="0" algn="bl" rotWithShape="0" blurRad="127000" dist="25400" dir="5400000">
-              <a:srgbClr val="13134F">
+              <a:srgbClr val="1E2B4A">
                 <a:alpha val="10000"/>
               </a:srgbClr>
             </a:outerShdw>
@@ -4585,7 +4585,7 @@
             <a:avLst/>
           </a:prstGeom>
           <a:solidFill>
-            <a:srgbClr val="2A2A80"/>
+            <a:srgbClr val="3E8C9A"/>
           </a:solidFill>
           <a:ln w="31750">
             <a:solidFill>
@@ -4595,7 +4595,7 @@
           </a:ln>
           <a:effectLst>
             <a:outerShdw sx="100000" sy="100000" kx="0" ky="0" algn="bl" rotWithShape="0" blurRad="127000" dist="25400" dir="5400000">
-              <a:srgbClr val="13134F">
+              <a:srgbClr val="1E2B4A">
                 <a:alpha val="18000"/>
               </a:srgbClr>
             </a:outerShdw>
@@ -4690,7 +4690,7 @@
           <a:ln/>
           <a:effectLst>
             <a:outerShdw sx="100000" sy="100000" kx="0" ky="0" algn="bl" rotWithShape="0" blurRad="127000" dist="25400" dir="5400000">
-              <a:srgbClr val="13134F">
+              <a:srgbClr val="1E2B4A">
                 <a:alpha val="10000"/>
               </a:srgbClr>
             </a:outerShdw>
@@ -4712,7 +4712,7 @@
             <a:avLst/>
           </a:prstGeom>
           <a:solidFill>
-            <a:srgbClr val="4444AD"/>
+            <a:srgbClr val="41639E"/>
           </a:solidFill>
           <a:ln w="31750">
             <a:solidFill>
@@ -4722,7 +4722,7 @@
           </a:ln>
           <a:effectLst>
             <a:outerShdw sx="100000" sy="100000" kx="0" ky="0" algn="bl" rotWithShape="0" blurRad="127000" dist="25400" dir="5400000">
-              <a:srgbClr val="13134F">
+              <a:srgbClr val="1E2B4A">
                 <a:alpha val="18000"/>
               </a:srgbClr>
             </a:outerShdw>
@@ -4817,7 +4817,7 @@
           <a:ln/>
           <a:effectLst>
             <a:outerShdw sx="100000" sy="100000" kx="0" ky="0" algn="bl" rotWithShape="0" blurRad="127000" dist="25400" dir="5400000">
-              <a:srgbClr val="13134F">
+              <a:srgbClr val="1E2B4A">
                 <a:alpha val="10000"/>
               </a:srgbClr>
             </a:outerShdw>
@@ -4947,7 +4947,7 @@
           <a:ln/>
           <a:effectLst>
             <a:outerShdw sx="100000" sy="100000" kx="0" ky="0" algn="bl" rotWithShape="0" blurRad="127000" dist="25400" dir="5400000">
-              <a:srgbClr val="13134F">
+              <a:srgbClr val="1E2B4A">
                 <a:alpha val="10000"/>
               </a:srgbClr>
             </a:outerShdw>
@@ -5430,7 +5430,7 @@
             <a:r>
               <a:rPr lang="en-US" sz="2700" b="1" dirty="0">
                 <a:solidFill>
-                  <a:srgbClr val="191970"/>
+                  <a:srgbClr val="1E2B4A"/>
                 </a:solidFill>
                 <a:latin typeface="Calibri" pitchFamily="34" charset="0"/>
                 <a:ea typeface="Calibri" pitchFamily="34" charset="-122"/>
@@ -5506,7 +5506,7 @@
           <a:ln/>
           <a:effectLst>
             <a:outerShdw sx="100000" sy="100000" kx="0" ky="0" algn="bl" rotWithShape="0" blurRad="127000" dist="25400" dir="5400000">
-              <a:srgbClr val="13134F">
+              <a:srgbClr val="1E2B4A">
                 <a:alpha val="10000"/>
               </a:srgbClr>
             </a:outerShdw>
@@ -5540,7 +5540,7 @@
             <a:r>
               <a:rPr lang="en-US" sz="3200" b="1" dirty="0">
                 <a:solidFill>
-                  <a:srgbClr val="4444AD"/>
+                  <a:srgbClr val="41639E"/>
                 </a:solidFill>
                 <a:latin typeface="Calibri" pitchFamily="34" charset="0"/>
                 <a:ea typeface="Calibri" pitchFamily="34" charset="-122"/>
@@ -5636,7 +5636,7 @@
           <a:ln/>
           <a:effectLst>
             <a:outerShdw sx="100000" sy="100000" kx="0" ky="0" algn="bl" rotWithShape="0" blurRad="127000" dist="25400" dir="5400000">
-              <a:srgbClr val="13134F">
+              <a:srgbClr val="1E2B4A">
                 <a:alpha val="10000"/>
               </a:srgbClr>
             </a:outerShdw>
@@ -5670,7 +5670,7 @@
             <a:r>
               <a:rPr lang="en-US" sz="3200" b="1" dirty="0">
                 <a:solidFill>
-                  <a:srgbClr val="4444AD"/>
+                  <a:srgbClr val="41639E"/>
                 </a:solidFill>
                 <a:latin typeface="Calibri" pitchFamily="34" charset="0"/>
                 <a:ea typeface="Calibri" pitchFamily="34" charset="-122"/>
@@ -5766,7 +5766,7 @@
           <a:ln/>
           <a:effectLst>
             <a:outerShdw sx="100000" sy="100000" kx="0" ky="0" algn="bl" rotWithShape="0" blurRad="127000" dist="25400" dir="5400000">
-              <a:srgbClr val="13134F">
+              <a:srgbClr val="1E2B4A">
                 <a:alpha val="10000"/>
               </a:srgbClr>
             </a:outerShdw>
@@ -5896,7 +5896,7 @@
           <a:ln/>
           <a:effectLst>
             <a:outerShdw sx="100000" sy="100000" kx="0" ky="0" algn="bl" rotWithShape="0" blurRad="127000" dist="25400" dir="5400000">
-              <a:srgbClr val="13134F">
+              <a:srgbClr val="1E2B4A">
                 <a:alpha val="10000"/>
               </a:srgbClr>
             </a:outerShdw>
@@ -6026,7 +6026,7 @@
           <a:ln/>
           <a:effectLst>
             <a:outerShdw sx="100000" sy="100000" kx="0" ky="0" algn="bl" rotWithShape="0" blurRad="127000" dist="25400" dir="5400000">
-              <a:srgbClr val="13134F">
+              <a:srgbClr val="1E2B4A">
                 <a:alpha val="10000"/>
               </a:srgbClr>
             </a:outerShdw>
@@ -6048,7 +6048,7 @@
             <a:avLst/>
           </a:prstGeom>
           <a:solidFill>
-            <a:srgbClr val="2A2A80"/>
+            <a:srgbClr val="3E8C9A"/>
           </a:solidFill>
           <a:ln w="31750">
             <a:solidFill>
@@ -6058,7 +6058,7 @@
           </a:ln>
           <a:effectLst>
             <a:outerShdw sx="100000" sy="100000" kx="0" ky="0" algn="bl" rotWithShape="0" blurRad="127000" dist="25400" dir="5400000">
-              <a:srgbClr val="13134F">
+              <a:srgbClr val="1E2B4A">
                 <a:alpha val="18000"/>
               </a:srgbClr>
             </a:outerShdw>
@@ -6192,7 +6192,7 @@
           <a:ln/>
           <a:effectLst>
             <a:outerShdw sx="100000" sy="100000" kx="0" ky="0" algn="bl" rotWithShape="0" blurRad="127000" dist="25400" dir="5400000">
-              <a:srgbClr val="13134F">
+              <a:srgbClr val="1E2B4A">
                 <a:alpha val="10000"/>
               </a:srgbClr>
             </a:outerShdw>
@@ -6214,7 +6214,7 @@
             <a:avLst/>
           </a:prstGeom>
           <a:solidFill>
-            <a:srgbClr val="6E6ECB"/>
+            <a:srgbClr val="C98A24"/>
           </a:solidFill>
           <a:ln w="31750">
             <a:solidFill>
@@ -6224,7 +6224,7 @@
           </a:ln>
           <a:effectLst>
             <a:outerShdw sx="100000" sy="100000" kx="0" ky="0" algn="bl" rotWithShape="0" blurRad="127000" dist="25400" dir="5400000">
-              <a:srgbClr val="13134F">
+              <a:srgbClr val="1E2B4A">
                 <a:alpha val="18000"/>
               </a:srgbClr>
             </a:outerShdw>
@@ -6350,7 +6350,7 @@
             </a:avLst>
           </a:prstGeom>
           <a:solidFill>
-            <a:srgbClr val="6E6ECB"/>
+            <a:srgbClr val="C98A24"/>
           </a:solidFill>
           <a:ln/>
         </p:spPr>
@@ -6450,7 +6450,7 @@
             </a:avLst>
           </a:prstGeom>
           <a:solidFill>
-            <a:srgbClr val="E2E3EC"/>
+            <a:srgbClr val="E3E7EE"/>
           </a:solidFill>
           <a:ln/>
         </p:spPr>
@@ -6550,7 +6550,7 @@
             </a:avLst>
           </a:prstGeom>
           <a:solidFill>
-            <a:srgbClr val="E2E3EC"/>
+            <a:srgbClr val="E3E7EE"/>
           </a:solidFill>
           <a:ln/>
         </p:spPr>
@@ -6650,7 +6650,7 @@
             </a:avLst>
           </a:prstGeom>
           <a:solidFill>
-            <a:srgbClr val="E2E3EC"/>
+            <a:srgbClr val="E3E7EE"/>
           </a:solidFill>
           <a:ln/>
         </p:spPr>
@@ -6855,7 +6855,7 @@
             <a:r>
               <a:rPr lang="en-US" sz="2700" b="1" dirty="0">
                 <a:solidFill>
-                  <a:srgbClr val="191970"/>
+                  <a:srgbClr val="1E2B4A"/>
                 </a:solidFill>
                 <a:latin typeface="Calibri" pitchFamily="34" charset="0"/>
                 <a:ea typeface="Calibri" pitchFamily="34" charset="-122"/>
@@ -6931,7 +6931,7 @@
           <a:ln/>
           <a:effectLst>
             <a:outerShdw sx="100000" sy="100000" kx="0" ky="0" algn="bl" rotWithShape="0" blurRad="127000" dist="25400" dir="5400000">
-              <a:srgbClr val="13134F">
+              <a:srgbClr val="1E2B4A">
                 <a:alpha val="10000"/>
               </a:srgbClr>
             </a:outerShdw>
@@ -6953,7 +6953,7 @@
             <a:avLst/>
           </a:prstGeom>
           <a:solidFill>
-            <a:srgbClr val="4444AD"/>
+            <a:srgbClr val="41639E"/>
           </a:solidFill>
           <a:ln w="31750">
             <a:solidFill>
@@ -6963,7 +6963,7 @@
           </a:ln>
           <a:effectLst>
             <a:outerShdw sx="100000" sy="100000" kx="0" ky="0" algn="bl" rotWithShape="0" blurRad="127000" dist="25400" dir="5400000">
-              <a:srgbClr val="13134F">
+              <a:srgbClr val="1E2B4A">
                 <a:alpha val="18000"/>
               </a:srgbClr>
             </a:outerShdw>
@@ -7021,7 +7021,7 @@
             <a:r>
               <a:rPr lang="en-US" sz="3400" b="1" dirty="0">
                 <a:solidFill>
-                  <a:srgbClr val="E2E3EC"/>
+                  <a:srgbClr val="E3E7EE"/>
                 </a:solidFill>
                 <a:latin typeface="Calibri" pitchFamily="34" charset="0"/>
                 <a:ea typeface="Calibri" pitchFamily="34" charset="-122"/>
@@ -7136,7 +7136,7 @@
           <a:ln/>
           <a:effectLst>
             <a:outerShdw sx="100000" sy="100000" kx="0" ky="0" algn="bl" rotWithShape="0" blurRad="127000" dist="25400" dir="5400000">
-              <a:srgbClr val="13134F">
+              <a:srgbClr val="1E2B4A">
                 <a:alpha val="10000"/>
               </a:srgbClr>
             </a:outerShdw>
@@ -7158,7 +7158,7 @@
             <a:avLst/>
           </a:prstGeom>
           <a:solidFill>
-            <a:srgbClr val="2A2A80"/>
+            <a:srgbClr val="3E8C9A"/>
           </a:solidFill>
           <a:ln w="31750">
             <a:solidFill>
@@ -7168,7 +7168,7 @@
           </a:ln>
           <a:effectLst>
             <a:outerShdw sx="100000" sy="100000" kx="0" ky="0" algn="bl" rotWithShape="0" blurRad="127000" dist="25400" dir="5400000">
-              <a:srgbClr val="13134F">
+              <a:srgbClr val="1E2B4A">
                 <a:alpha val="18000"/>
               </a:srgbClr>
             </a:outerShdw>
@@ -7226,7 +7226,7 @@
             <a:r>
               <a:rPr lang="en-US" sz="3400" b="1" dirty="0">
                 <a:solidFill>
-                  <a:srgbClr val="E2E3EC"/>
+                  <a:srgbClr val="E3E7EE"/>
                 </a:solidFill>
                 <a:latin typeface="Calibri" pitchFamily="34" charset="0"/>
                 <a:ea typeface="Calibri" pitchFamily="34" charset="-122"/>
@@ -7341,7 +7341,7 @@
           <a:ln/>
           <a:effectLst>
             <a:outerShdw sx="100000" sy="100000" kx="0" ky="0" algn="bl" rotWithShape="0" blurRad="127000" dist="25400" dir="5400000">
-              <a:srgbClr val="13134F">
+              <a:srgbClr val="1E2B4A">
                 <a:alpha val="10000"/>
               </a:srgbClr>
             </a:outerShdw>
@@ -7373,7 +7373,7 @@
           </a:ln>
           <a:effectLst>
             <a:outerShdw sx="100000" sy="100000" kx="0" ky="0" algn="bl" rotWithShape="0" blurRad="127000" dist="25400" dir="5400000">
-              <a:srgbClr val="13134F">
+              <a:srgbClr val="1E2B4A">
                 <a:alpha val="18000"/>
               </a:srgbClr>
             </a:outerShdw>
@@ -7431,7 +7431,7 @@
             <a:r>
               <a:rPr lang="en-US" sz="3400" b="1" dirty="0">
                 <a:solidFill>
-                  <a:srgbClr val="E2E3EC"/>
+                  <a:srgbClr val="E3E7EE"/>
                 </a:solidFill>
                 <a:latin typeface="Calibri" pitchFamily="34" charset="0"/>
                 <a:ea typeface="Calibri" pitchFamily="34" charset="-122"/>
@@ -7541,12 +7541,12 @@
             </a:avLst>
           </a:prstGeom>
           <a:solidFill>
-            <a:srgbClr val="191970"/>
+            <a:srgbClr val="1E2B4A"/>
           </a:solidFill>
           <a:ln/>
           <a:effectLst>
             <a:outerShdw sx="100000" sy="100000" kx="0" ky="0" algn="bl" rotWithShape="0" blurRad="127000" dist="25400" dir="5400000">
-              <a:srgbClr val="13134F">
+              <a:srgbClr val="1E2B4A">
                 <a:alpha val="10000"/>
               </a:srgbClr>
             </a:outerShdw>
@@ -7672,7 +7672,7 @@
     <p:bg>
       <p:bgPr>
         <a:solidFill>
-          <a:srgbClr val="101038"/>
+          <a:srgbClr val="16213D"/>
         </a:solidFill>
       </p:bgPr>
     </p:bg>
@@ -7705,7 +7705,7 @@
             <a:avLst/>
           </a:prstGeom>
           <a:solidFill>
-            <a:srgbClr val="23236B"/>
+            <a:srgbClr val="24365E"/>
           </a:solidFill>
           <a:ln/>
         </p:spPr>
@@ -7725,7 +7725,7 @@
             <a:avLst/>
           </a:prstGeom>
           <a:solidFill>
-            <a:srgbClr val="23236B"/>
+            <a:srgbClr val="24365E"/>
           </a:solidFill>
           <a:ln/>
         </p:spPr>
@@ -7838,7 +7838,7 @@
             <a:r>
               <a:rPr lang="en-US" sz="1400" dirty="0">
                 <a:solidFill>
-                  <a:srgbClr val="B7B7DB"/>
+                  <a:srgbClr val="AFC0DA"/>
                 </a:solidFill>
                 <a:latin typeface="Calibri" pitchFamily="34" charset="0"/>
                 <a:ea typeface="Calibri" pitchFamily="34" charset="-122"/>
@@ -7909,7 +7909,7 @@
             <a:r>
               <a:rPr lang="en-US" sz="2700" b="1" dirty="0">
                 <a:solidFill>
-                  <a:srgbClr val="191970"/>
+                  <a:srgbClr val="1E2B4A"/>
                 </a:solidFill>
                 <a:latin typeface="Calibri" pitchFamily="34" charset="0"/>
                 <a:ea typeface="Calibri" pitchFamily="34" charset="-122"/>
@@ -7985,7 +7985,7 @@
           <a:ln/>
           <a:effectLst>
             <a:outerShdw sx="100000" sy="100000" kx="0" ky="0" algn="bl" rotWithShape="0" blurRad="127000" dist="25400" dir="5400000">
-              <a:srgbClr val="13134F">
+              <a:srgbClr val="1E2B4A">
                 <a:alpha val="10000"/>
               </a:srgbClr>
             </a:outerShdw>
@@ -8191,7 +8191,7 @@
             <a:avLst/>
           </a:prstGeom>
           <a:solidFill>
-            <a:srgbClr val="E2E3EC"/>
+            <a:srgbClr val="E3E7EE"/>
           </a:solidFill>
           <a:ln/>
         </p:spPr>
@@ -8262,7 +8262,7 @@
             <a:r>
               <a:rPr lang="en-US" sz="1500" b="1" dirty="0">
                 <a:solidFill>
-                  <a:srgbClr val="191970"/>
+                  <a:srgbClr val="1E2B4A"/>
                 </a:solidFill>
                 <a:latin typeface="Calibri" pitchFamily="34" charset="0"/>
                 <a:ea typeface="Calibri" pitchFamily="34" charset="-122"/>
@@ -8301,7 +8301,7 @@
             <a:r>
               <a:rPr lang="en-US" sz="1500" b="1" dirty="0">
                 <a:solidFill>
-                  <a:srgbClr val="191970"/>
+                  <a:srgbClr val="1E2B4A"/>
                 </a:solidFill>
                 <a:latin typeface="Calibri" pitchFamily="34" charset="0"/>
                 <a:ea typeface="Calibri" pitchFamily="34" charset="-122"/>
@@ -8367,7 +8367,7 @@
             <a:avLst/>
           </a:prstGeom>
           <a:solidFill>
-            <a:srgbClr val="E2E3EC"/>
+            <a:srgbClr val="E3E7EE"/>
           </a:solidFill>
           <a:ln/>
         </p:spPr>
@@ -8438,7 +8438,7 @@
             <a:r>
               <a:rPr lang="en-US" sz="1500" b="1" dirty="0">
                 <a:solidFill>
-                  <a:srgbClr val="191970"/>
+                  <a:srgbClr val="1E2B4A"/>
                 </a:solidFill>
                 <a:latin typeface="Calibri" pitchFamily="34" charset="0"/>
                 <a:ea typeface="Calibri" pitchFamily="34" charset="-122"/>
@@ -8477,7 +8477,7 @@
             <a:r>
               <a:rPr lang="en-US" sz="1500" b="1" dirty="0">
                 <a:solidFill>
-                  <a:srgbClr val="191970"/>
+                  <a:srgbClr val="1E2B4A"/>
                 </a:solidFill>
                 <a:latin typeface="Calibri" pitchFamily="34" charset="0"/>
                 <a:ea typeface="Calibri" pitchFamily="34" charset="-122"/>
@@ -8543,7 +8543,7 @@
             <a:avLst/>
           </a:prstGeom>
           <a:solidFill>
-            <a:srgbClr val="E2E3EC"/>
+            <a:srgbClr val="E3E7EE"/>
           </a:solidFill>
           <a:ln/>
         </p:spPr>
@@ -8614,7 +8614,7 @@
             <a:r>
               <a:rPr lang="en-US" sz="1500" b="1" dirty="0">
                 <a:solidFill>
-                  <a:srgbClr val="191970"/>
+                  <a:srgbClr val="1E2B4A"/>
                 </a:solidFill>
                 <a:latin typeface="Calibri" pitchFamily="34" charset="0"/>
                 <a:ea typeface="Calibri" pitchFamily="34" charset="-122"/>
@@ -8653,7 +8653,7 @@
             <a:r>
               <a:rPr lang="en-US" sz="1500" b="1" dirty="0">
                 <a:solidFill>
-                  <a:srgbClr val="191970"/>
+                  <a:srgbClr val="1E2B4A"/>
                 </a:solidFill>
                 <a:latin typeface="Calibri" pitchFamily="34" charset="0"/>
                 <a:ea typeface="Calibri" pitchFamily="34" charset="-122"/>
@@ -8768,7 +8768,7 @@
           <a:ln/>
           <a:effectLst>
             <a:outerShdw sx="100000" sy="100000" kx="0" ky="0" algn="bl" rotWithShape="0" blurRad="127000" dist="25400" dir="5400000">
-              <a:srgbClr val="13134F">
+              <a:srgbClr val="1E2B4A">
                 <a:alpha val="10000"/>
               </a:srgbClr>
             </a:outerShdw>
@@ -8909,7 +8909,7 @@
             </a:avLst>
           </a:prstGeom>
           <a:solidFill>
-            <a:srgbClr val="4444AD"/>
+            <a:srgbClr val="41639E"/>
           </a:solidFill>
           <a:ln/>
         </p:spPr>
@@ -9009,7 +9009,7 @@
             </a:avLst>
           </a:prstGeom>
           <a:solidFill>
-            <a:srgbClr val="4444AD"/>
+            <a:srgbClr val="41639E"/>
           </a:solidFill>
           <a:ln/>
         </p:spPr>
@@ -9495,7 +9495,7 @@
             <a:r>
               <a:rPr lang="en-US" sz="2700" b="1" dirty="0">
                 <a:solidFill>
-                  <a:srgbClr val="191970"/>
+                  <a:srgbClr val="1E2B4A"/>
                 </a:solidFill>
                 <a:latin typeface="Calibri" pitchFamily="34" charset="0"/>
                 <a:ea typeface="Calibri" pitchFamily="34" charset="-122"/>
@@ -9571,7 +9571,7 @@
           <a:ln/>
           <a:effectLst>
             <a:outerShdw sx="100000" sy="100000" kx="0" ky="0" algn="bl" rotWithShape="0" blurRad="127000" dist="25400" dir="5400000">
-              <a:srgbClr val="13134F">
+              <a:srgbClr val="1E2B4A">
                 <a:alpha val="10000"/>
               </a:srgbClr>
             </a:outerShdw>
@@ -9701,7 +9701,7 @@
           <a:ln/>
           <a:effectLst>
             <a:outerShdw sx="100000" sy="100000" kx="0" ky="0" algn="bl" rotWithShape="0" blurRad="127000" dist="25400" dir="5400000">
-              <a:srgbClr val="13134F">
+              <a:srgbClr val="1E2B4A">
                 <a:alpha val="10000"/>
               </a:srgbClr>
             </a:outerShdw>
@@ -9735,7 +9735,7 @@
             <a:r>
               <a:rPr lang="en-US" sz="3000" b="1" dirty="0">
                 <a:solidFill>
-                  <a:srgbClr val="2A2A80"/>
+                  <a:srgbClr val="3E8C9A"/>
                 </a:solidFill>
                 <a:latin typeface="Calibri" pitchFamily="34" charset="0"/>
                 <a:ea typeface="Calibri" pitchFamily="34" charset="-122"/>
@@ -9831,7 +9831,7 @@
           <a:ln/>
           <a:effectLst>
             <a:outerShdw sx="100000" sy="100000" kx="0" ky="0" algn="bl" rotWithShape="0" blurRad="127000" dist="25400" dir="5400000">
-              <a:srgbClr val="13134F">
+              <a:srgbClr val="1E2B4A">
                 <a:alpha val="10000"/>
               </a:srgbClr>
             </a:outerShdw>
@@ -9865,7 +9865,7 @@
             <a:r>
               <a:rPr lang="en-US" sz="3000" b="1" dirty="0">
                 <a:solidFill>
-                  <a:srgbClr val="4444AD"/>
+                  <a:srgbClr val="41639E"/>
                 </a:solidFill>
                 <a:latin typeface="Calibri" pitchFamily="34" charset="0"/>
                 <a:ea typeface="Calibri" pitchFamily="34" charset="-122"/>
@@ -9961,7 +9961,7 @@
           <a:ln/>
           <a:effectLst>
             <a:outerShdw sx="100000" sy="100000" kx="0" ky="0" algn="bl" rotWithShape="0" blurRad="127000" dist="25400" dir="5400000">
-              <a:srgbClr val="13134F">
+              <a:srgbClr val="1E2B4A">
                 <a:alpha val="10000"/>
               </a:srgbClr>
             </a:outerShdw>
@@ -9995,7 +9995,7 @@
             <a:r>
               <a:rPr lang="en-US" sz="3000" b="1" dirty="0">
                 <a:solidFill>
-                  <a:srgbClr val="4444AD"/>
+                  <a:srgbClr val="41639E"/>
                 </a:solidFill>
                 <a:latin typeface="Calibri" pitchFamily="34" charset="0"/>
                 <a:ea typeface="Calibri" pitchFamily="34" charset="-122"/>
@@ -10091,7 +10091,7 @@
           <a:ln/>
           <a:effectLst>
             <a:outerShdw sx="100000" sy="100000" kx="0" ky="0" algn="bl" rotWithShape="0" blurRad="127000" dist="25400" dir="5400000">
-              <a:srgbClr val="13134F">
+              <a:srgbClr val="1E2B4A">
                 <a:alpha val="10000"/>
               </a:srgbClr>
             </a:outerShdw>
@@ -10193,7 +10193,7 @@
             </a:avLst>
           </a:prstGeom>
           <a:solidFill>
-            <a:srgbClr val="E2E3EC"/>
+            <a:srgbClr val="E3E7EE"/>
           </a:solidFill>
           <a:ln/>
         </p:spPr>
@@ -10215,7 +10215,7 @@
             </a:avLst>
           </a:prstGeom>
           <a:solidFill>
-            <a:srgbClr val="2A2A80"/>
+            <a:srgbClr val="3E8C9A"/>
           </a:solidFill>
           <a:ln/>
         </p:spPr>
@@ -10315,7 +10315,7 @@
             </a:avLst>
           </a:prstGeom>
           <a:solidFill>
-            <a:srgbClr val="E2E3EC"/>
+            <a:srgbClr val="E3E7EE"/>
           </a:solidFill>
           <a:ln/>
         </p:spPr>
@@ -10337,7 +10337,7 @@
             </a:avLst>
           </a:prstGeom>
           <a:solidFill>
-            <a:srgbClr val="2A2A80"/>
+            <a:srgbClr val="3E8C9A"/>
           </a:solidFill>
           <a:ln/>
         </p:spPr>
@@ -10437,7 +10437,7 @@
             </a:avLst>
           </a:prstGeom>
           <a:solidFill>
-            <a:srgbClr val="E2E3EC"/>
+            <a:srgbClr val="E3E7EE"/>
           </a:solidFill>
           <a:ln/>
         </p:spPr>
@@ -10459,7 +10459,7 @@
             </a:avLst>
           </a:prstGeom>
           <a:solidFill>
-            <a:srgbClr val="2A2A80"/>
+            <a:srgbClr val="3E8C9A"/>
           </a:solidFill>
           <a:ln/>
         </p:spPr>
@@ -10559,7 +10559,7 @@
             </a:avLst>
           </a:prstGeom>
           <a:solidFill>
-            <a:srgbClr val="E2E3EC"/>
+            <a:srgbClr val="E3E7EE"/>
           </a:solidFill>
           <a:ln/>
         </p:spPr>
@@ -10581,7 +10581,7 @@
             </a:avLst>
           </a:prstGeom>
           <a:solidFill>
-            <a:srgbClr val="2A2A80"/>
+            <a:srgbClr val="3E8C9A"/>
           </a:solidFill>
           <a:ln/>
         </p:spPr>
@@ -10681,7 +10681,7 @@
             </a:avLst>
           </a:prstGeom>
           <a:solidFill>
-            <a:srgbClr val="E2E3EC"/>
+            <a:srgbClr val="E3E7EE"/>
           </a:solidFill>
           <a:ln/>
         </p:spPr>
@@ -10703,7 +10703,7 @@
             </a:avLst>
           </a:prstGeom>
           <a:solidFill>
-            <a:srgbClr val="2A2A80"/>
+            <a:srgbClr val="3E8C9A"/>
           </a:solidFill>
           <a:ln/>
         </p:spPr>
@@ -10803,7 +10803,7 @@
             </a:avLst>
           </a:prstGeom>
           <a:solidFill>
-            <a:srgbClr val="E2E3EC"/>
+            <a:srgbClr val="E3E7EE"/>
           </a:solidFill>
           <a:ln/>
         </p:spPr>
@@ -10825,7 +10825,7 @@
             </a:avLst>
           </a:prstGeom>
           <a:solidFill>
-            <a:srgbClr val="2A2A80"/>
+            <a:srgbClr val="3E8C9A"/>
           </a:solidFill>
           <a:ln/>
         </p:spPr>
@@ -11030,7 +11030,7 @@
             <a:r>
               <a:rPr lang="en-US" sz="2700" b="1" dirty="0">
                 <a:solidFill>
-                  <a:srgbClr val="191970"/>
+                  <a:srgbClr val="1E2B4A"/>
                 </a:solidFill>
                 <a:latin typeface="Calibri" pitchFamily="34" charset="0"/>
                 <a:ea typeface="Calibri" pitchFamily="34" charset="-122"/>
@@ -11059,12 +11059,12 @@
             </a:avLst>
           </a:prstGeom>
           <a:solidFill>
-            <a:srgbClr val="191970"/>
+            <a:srgbClr val="1E2B4A"/>
           </a:solidFill>
           <a:ln/>
           <a:effectLst>
             <a:outerShdw sx="100000" sy="100000" kx="0" ky="0" algn="bl" rotWithShape="0" blurRad="127000" dist="25400" dir="5400000">
-              <a:srgbClr val="13134F">
+              <a:srgbClr val="1E2B4A">
                 <a:alpha val="10000"/>
               </a:srgbClr>
             </a:outerShdw>
@@ -11252,7 +11252,7 @@
           <a:ln/>
           <a:effectLst>
             <a:outerShdw sx="100000" sy="100000" kx="0" ky="0" algn="bl" rotWithShape="0" blurRad="127000" dist="25400" dir="5400000">
-              <a:srgbClr val="13134F">
+              <a:srgbClr val="1E2B4A">
                 <a:alpha val="10000"/>
               </a:srgbClr>
             </a:outerShdw>
@@ -11418,7 +11418,7 @@
             </a:avLst>
           </a:prstGeom>
           <a:solidFill>
-            <a:srgbClr val="4444AD"/>
+            <a:srgbClr val="41639E"/>
           </a:solidFill>
           <a:ln/>
         </p:spPr>
@@ -11605,7 +11605,7 @@
           <a:ln/>
           <a:effectLst>
             <a:outerShdw sx="100000" sy="100000" kx="0" ky="0" algn="bl" rotWithShape="0" blurRad="127000" dist="25400" dir="5400000">
-              <a:srgbClr val="13134F">
+              <a:srgbClr val="1E2B4A">
                 <a:alpha val="10000"/>
               </a:srgbClr>
             </a:outerShdw>
@@ -11720,7 +11720,7 @@
             <a:r>
               <a:rPr lang="en-US" sz="1500" b="1" dirty="0">
                 <a:solidFill>
-                  <a:srgbClr val="191970"/>
+                  <a:srgbClr val="1E2B4A"/>
                 </a:solidFill>
                 <a:latin typeface="Calibri" pitchFamily="34" charset="0"/>
                 <a:ea typeface="Calibri" pitchFamily="34" charset="-122"/>
@@ -11747,7 +11747,7 @@
             <a:avLst/>
           </a:prstGeom>
           <a:solidFill>
-            <a:srgbClr val="E2E3EC"/>
+            <a:srgbClr val="E3E7EE"/>
           </a:solidFill>
           <a:ln/>
         </p:spPr>
@@ -11821,7 +11821,7 @@
             <a:r>
               <a:rPr lang="en-US" sz="1500" b="1" dirty="0">
                 <a:solidFill>
-                  <a:srgbClr val="191970"/>
+                  <a:srgbClr val="1E2B4A"/>
                 </a:solidFill>
                 <a:latin typeface="Calibri" pitchFamily="34" charset="0"/>
                 <a:ea typeface="Calibri" pitchFamily="34" charset="-122"/>
@@ -11848,7 +11848,7 @@
             <a:avLst/>
           </a:prstGeom>
           <a:solidFill>
-            <a:srgbClr val="E2E3EC"/>
+            <a:srgbClr val="E3E7EE"/>
           </a:solidFill>
           <a:ln/>
         </p:spPr>
@@ -11922,7 +11922,7 @@
             <a:r>
               <a:rPr lang="en-US" sz="1500" b="1" dirty="0">
                 <a:solidFill>
-                  <a:srgbClr val="191970"/>
+                  <a:srgbClr val="1E2B4A"/>
                 </a:solidFill>
                 <a:latin typeface="Calibri" pitchFamily="34" charset="0"/>
                 <a:ea typeface="Calibri" pitchFamily="34" charset="-122"/>
@@ -11949,7 +11949,7 @@
             <a:avLst/>
           </a:prstGeom>
           <a:solidFill>
-            <a:srgbClr val="E2E3EC"/>
+            <a:srgbClr val="E3E7EE"/>
           </a:solidFill>
           <a:ln/>
         </p:spPr>
@@ -12050,7 +12050,7 @@
             <a:avLst/>
           </a:prstGeom>
           <a:solidFill>
-            <a:srgbClr val="E2E3EC"/>
+            <a:srgbClr val="E3E7EE"/>
           </a:solidFill>
           <a:ln/>
         </p:spPr>
@@ -12258,7 +12258,7 @@
             <a:r>
               <a:rPr lang="en-US" sz="2700" b="1" dirty="0">
                 <a:solidFill>
-                  <a:srgbClr val="191970"/>
+                  <a:srgbClr val="1E2B4A"/>
                 </a:solidFill>
                 <a:latin typeface="Calibri" pitchFamily="34" charset="0"/>
                 <a:ea typeface="Calibri" pitchFamily="34" charset="-122"/>
@@ -12334,7 +12334,7 @@
           <a:ln/>
           <a:effectLst>
             <a:outerShdw sx="100000" sy="100000" kx="0" ky="0" algn="bl" rotWithShape="0" blurRad="127000" dist="25400" dir="5400000">
-              <a:srgbClr val="13134F">
+              <a:srgbClr val="1E2B4A">
                 <a:alpha val="10000"/>
               </a:srgbClr>
             </a:outerShdw>
@@ -12575,7 +12575,7 @@
             </a:avLst>
           </a:prstGeom>
           <a:solidFill>
-            <a:srgbClr val="E2E3EC"/>
+            <a:srgbClr val="E3E7EE"/>
           </a:solidFill>
           <a:ln/>
         </p:spPr>
@@ -12675,7 +12675,7 @@
             </a:avLst>
           </a:prstGeom>
           <a:solidFill>
-            <a:srgbClr val="E2E3EC"/>
+            <a:srgbClr val="E3E7EE"/>
           </a:solidFill>
           <a:ln/>
         </p:spPr>
@@ -12775,7 +12775,7 @@
             </a:avLst>
           </a:prstGeom>
           <a:solidFill>
-            <a:srgbClr val="E2E3EC"/>
+            <a:srgbClr val="E3E7EE"/>
           </a:solidFill>
           <a:ln/>
         </p:spPr>
@@ -12875,7 +12875,7 @@
             </a:avLst>
           </a:prstGeom>
           <a:solidFill>
-            <a:srgbClr val="E2E3EC"/>
+            <a:srgbClr val="E3E7EE"/>
           </a:solidFill>
           <a:ln/>
         </p:spPr>
@@ -12975,7 +12975,7 @@
             </a:avLst>
           </a:prstGeom>
           <a:solidFill>
-            <a:srgbClr val="E2E3EC"/>
+            <a:srgbClr val="E3E7EE"/>
           </a:solidFill>
           <a:ln/>
         </p:spPr>
@@ -13075,7 +13075,7 @@
             </a:avLst>
           </a:prstGeom>
           <a:solidFill>
-            <a:srgbClr val="E2E3EC"/>
+            <a:srgbClr val="E3E7EE"/>
           </a:solidFill>
           <a:ln/>
         </p:spPr>
@@ -13141,7 +13141,7 @@
           <a:ln/>
           <a:effectLst>
             <a:outerShdw sx="100000" sy="100000" kx="0" ky="0" algn="bl" rotWithShape="0" blurRad="127000" dist="25400" dir="5400000">
-              <a:srgbClr val="13134F">
+              <a:srgbClr val="1E2B4A">
                 <a:alpha val="10000"/>
               </a:srgbClr>
             </a:outerShdw>
@@ -13173,7 +13173,7 @@
           </a:ln>
           <a:effectLst>
             <a:outerShdw sx="100000" sy="100000" kx="0" ky="0" algn="bl" rotWithShape="0" blurRad="127000" dist="25400" dir="5400000">
-              <a:srgbClr val="13134F">
+              <a:srgbClr val="1E2B4A">
                 <a:alpha val="18000"/>
               </a:srgbClr>
             </a:outerShdw>
@@ -13310,7 +13310,7 @@
           <a:ln/>
           <a:effectLst>
             <a:outerShdw sx="100000" sy="100000" kx="0" ky="0" algn="bl" rotWithShape="0" blurRad="127000" dist="25400" dir="5400000">
-              <a:srgbClr val="13134F">
+              <a:srgbClr val="1E2B4A">
                 <a:alpha val="10000"/>
               </a:srgbClr>
             </a:outerShdw>
@@ -13790,7 +13790,7 @@
             <a:r>
               <a:rPr lang="en-US" sz="2700" b="1" dirty="0">
                 <a:solidFill>
-                  <a:srgbClr val="191970"/>
+                  <a:srgbClr val="1E2B4A"/>
                 </a:solidFill>
                 <a:latin typeface="Calibri" pitchFamily="34" charset="0"/>
                 <a:ea typeface="Calibri" pitchFamily="34" charset="-122"/>
@@ -13866,7 +13866,7 @@
           <a:ln/>
           <a:effectLst>
             <a:outerShdw sx="100000" sy="100000" kx="0" ky="0" algn="bl" rotWithShape="0" blurRad="127000" dist="25400" dir="5400000">
-              <a:srgbClr val="13134F">
+              <a:srgbClr val="1E2B4A">
                 <a:alpha val="10000"/>
               </a:srgbClr>
             </a:outerShdw>
@@ -14363,7 +14363,7 @@
             </a:avLst>
           </a:prstGeom>
           <a:solidFill>
-            <a:srgbClr val="E2E3EC"/>
+            <a:srgbClr val="E3E7EE"/>
           </a:solidFill>
           <a:ln/>
         </p:spPr>
@@ -14502,7 +14502,7 @@
             </a:avLst>
           </a:prstGeom>
           <a:solidFill>
-            <a:srgbClr val="E2E3EC"/>
+            <a:srgbClr val="E3E7EE"/>
           </a:solidFill>
           <a:ln/>
         </p:spPr>
@@ -14641,7 +14641,7 @@
             </a:avLst>
           </a:prstGeom>
           <a:solidFill>
-            <a:srgbClr val="E2E3EC"/>
+            <a:srgbClr val="E3E7EE"/>
           </a:solidFill>
           <a:ln/>
         </p:spPr>
@@ -14722,12 +14722,12 @@
             </a:avLst>
           </a:prstGeom>
           <a:solidFill>
-            <a:srgbClr val="191970"/>
+            <a:srgbClr val="1E2B4A"/>
           </a:solidFill>
           <a:ln/>
           <a:effectLst>
             <a:outerShdw sx="100000" sy="100000" kx="0" ky="0" algn="bl" rotWithShape="0" blurRad="127000" dist="25400" dir="5400000">
-              <a:srgbClr val="13134F">
+              <a:srgbClr val="1E2B4A">
                 <a:alpha val="10000"/>
               </a:srgbClr>
             </a:outerShdw>
@@ -14876,7 +14876,7 @@
           <a:ln/>
           <a:effectLst>
             <a:outerShdw sx="100000" sy="100000" kx="0" ky="0" algn="bl" rotWithShape="0" blurRad="127000" dist="25400" dir="5400000">
-              <a:srgbClr val="13134F">
+              <a:srgbClr val="1E2B4A">
                 <a:alpha val="10000"/>
               </a:srgbClr>
             </a:outerShdw>
@@ -15080,7 +15080,7 @@
     <p:bg>
       <p:bgPr>
         <a:solidFill>
-          <a:srgbClr val="101038"/>
+          <a:srgbClr val="16213D"/>
         </a:solidFill>
       </p:bgPr>
     </p:bg>
@@ -15113,7 +15113,7 @@
             <a:avLst/>
           </a:prstGeom>
           <a:solidFill>
-            <a:srgbClr val="23236B"/>
+            <a:srgbClr val="24365E"/>
           </a:solidFill>
           <a:ln/>
         </p:spPr>
@@ -15133,7 +15133,7 @@
             <a:avLst/>
           </a:prstGeom>
           <a:solidFill>
-            <a:srgbClr val="23236B"/>
+            <a:srgbClr val="24365E"/>
           </a:solidFill>
           <a:ln/>
         </p:spPr>
@@ -15246,7 +15246,7 @@
             <a:r>
               <a:rPr lang="en-US" sz="1400" dirty="0">
                 <a:solidFill>
-                  <a:srgbClr val="B7B7DB"/>
+                  <a:srgbClr val="AFC0DA"/>
                 </a:solidFill>
                 <a:latin typeface="Calibri" pitchFamily="34" charset="0"/>
                 <a:ea typeface="Calibri" pitchFamily="34" charset="-122"/>
@@ -15317,7 +15317,7 @@
             <a:r>
               <a:rPr lang="en-US" sz="2700" b="1" dirty="0">
                 <a:solidFill>
-                  <a:srgbClr val="191970"/>
+                  <a:srgbClr val="1E2B4A"/>
                 </a:solidFill>
                 <a:latin typeface="Calibri" pitchFamily="34" charset="0"/>
                 <a:ea typeface="Calibri" pitchFamily="34" charset="-122"/>
@@ -15351,7 +15351,7 @@
           <a:ln/>
           <a:effectLst>
             <a:outerShdw sx="100000" sy="100000" kx="0" ky="0" algn="bl" rotWithShape="0" blurRad="127000" dist="25400" dir="5400000">
-              <a:srgbClr val="13134F">
+              <a:srgbClr val="1E2B4A">
                 <a:alpha val="10000"/>
               </a:srgbClr>
             </a:outerShdw>
@@ -15373,7 +15373,7 @@
             <a:avLst/>
           </a:prstGeom>
           <a:solidFill>
-            <a:srgbClr val="4444AD"/>
+            <a:srgbClr val="41639E"/>
           </a:solidFill>
           <a:ln w="31750">
             <a:solidFill>
@@ -15383,7 +15383,7 @@
           </a:ln>
           <a:effectLst>
             <a:outerShdw sx="100000" sy="100000" kx="0" ky="0" algn="bl" rotWithShape="0" blurRad="127000" dist="25400" dir="5400000">
-              <a:srgbClr val="13134F">
+              <a:srgbClr val="1E2B4A">
                 <a:alpha val="18000"/>
               </a:srgbClr>
             </a:outerShdw>
@@ -15441,7 +15441,7 @@
             <a:r>
               <a:rPr lang="en-US" sz="3000" b="1" dirty="0">
                 <a:solidFill>
-                  <a:srgbClr val="E2E3EC"/>
+                  <a:srgbClr val="E3E7EE"/>
                 </a:solidFill>
                 <a:latin typeface="Calibri" pitchFamily="34" charset="0"/>
                 <a:ea typeface="Calibri" pitchFamily="34" charset="-122"/>
@@ -15553,7 +15553,7 @@
           <a:ln/>
           <a:effectLst>
             <a:outerShdw sx="100000" sy="100000" kx="0" ky="0" algn="bl" rotWithShape="0" blurRad="127000" dist="25400" dir="5400000">
-              <a:srgbClr val="13134F">
+              <a:srgbClr val="1E2B4A">
                 <a:alpha val="10000"/>
               </a:srgbClr>
             </a:outerShdw>
@@ -15585,7 +15585,7 @@
           </a:ln>
           <a:effectLst>
             <a:outerShdw sx="100000" sy="100000" kx="0" ky="0" algn="bl" rotWithShape="0" blurRad="127000" dist="25400" dir="5400000">
-              <a:srgbClr val="13134F">
+              <a:srgbClr val="1E2B4A">
                 <a:alpha val="18000"/>
               </a:srgbClr>
             </a:outerShdw>
@@ -15643,7 +15643,7 @@
             <a:r>
               <a:rPr lang="en-US" sz="3000" b="1" dirty="0">
                 <a:solidFill>
-                  <a:srgbClr val="E2E3EC"/>
+                  <a:srgbClr val="E3E7EE"/>
                 </a:solidFill>
                 <a:latin typeface="Calibri" pitchFamily="34" charset="0"/>
                 <a:ea typeface="Calibri" pitchFamily="34" charset="-122"/>
@@ -15755,7 +15755,7 @@
           <a:ln/>
           <a:effectLst>
             <a:outerShdw sx="100000" sy="100000" kx="0" ky="0" algn="bl" rotWithShape="0" blurRad="127000" dist="25400" dir="5400000">
-              <a:srgbClr val="13134F">
+              <a:srgbClr val="1E2B4A">
                 <a:alpha val="10000"/>
               </a:srgbClr>
             </a:outerShdw>
@@ -15777,7 +15777,7 @@
             <a:avLst/>
           </a:prstGeom>
           <a:solidFill>
-            <a:srgbClr val="2A2A80"/>
+            <a:srgbClr val="3E8C9A"/>
           </a:solidFill>
           <a:ln w="31750">
             <a:solidFill>
@@ -15787,7 +15787,7 @@
           </a:ln>
           <a:effectLst>
             <a:outerShdw sx="100000" sy="100000" kx="0" ky="0" algn="bl" rotWithShape="0" blurRad="127000" dist="25400" dir="5400000">
-              <a:srgbClr val="13134F">
+              <a:srgbClr val="1E2B4A">
                 <a:alpha val="18000"/>
               </a:srgbClr>
             </a:outerShdw>
@@ -15845,7 +15845,7 @@
             <a:r>
               <a:rPr lang="en-US" sz="3000" b="1" dirty="0">
                 <a:solidFill>
-                  <a:srgbClr val="E2E3EC"/>
+                  <a:srgbClr val="E3E7EE"/>
                 </a:solidFill>
                 <a:latin typeface="Calibri" pitchFamily="34" charset="0"/>
                 <a:ea typeface="Calibri" pitchFamily="34" charset="-122"/>
@@ -15957,7 +15957,7 @@
           <a:ln/>
           <a:effectLst>
             <a:outerShdw sx="100000" sy="100000" kx="0" ky="0" algn="bl" rotWithShape="0" blurRad="127000" dist="25400" dir="5400000">
-              <a:srgbClr val="13134F">
+              <a:srgbClr val="1E2B4A">
                 <a:alpha val="10000"/>
               </a:srgbClr>
             </a:outerShdw>
@@ -15979,7 +15979,7 @@
             <a:avLst/>
           </a:prstGeom>
           <a:solidFill>
-            <a:srgbClr val="6E6ECB"/>
+            <a:srgbClr val="C98A24"/>
           </a:solidFill>
           <a:ln w="31750">
             <a:solidFill>
@@ -15989,7 +15989,7 @@
           </a:ln>
           <a:effectLst>
             <a:outerShdw sx="100000" sy="100000" kx="0" ky="0" algn="bl" rotWithShape="0" blurRad="127000" dist="25400" dir="5400000">
-              <a:srgbClr val="13134F">
+              <a:srgbClr val="1E2B4A">
                 <a:alpha val="18000"/>
               </a:srgbClr>
             </a:outerShdw>
@@ -16047,7 +16047,7 @@
             <a:r>
               <a:rPr lang="en-US" sz="3000" b="1" dirty="0">
                 <a:solidFill>
-                  <a:srgbClr val="E2E3EC"/>
+                  <a:srgbClr val="E3E7EE"/>
                 </a:solidFill>
                 <a:latin typeface="Calibri" pitchFamily="34" charset="0"/>
                 <a:ea typeface="Calibri" pitchFamily="34" charset="-122"/>
@@ -16159,7 +16159,7 @@
           <a:ln/>
           <a:effectLst>
             <a:outerShdw sx="100000" sy="100000" kx="0" ky="0" algn="bl" rotWithShape="0" blurRad="127000" dist="25400" dir="5400000">
-              <a:srgbClr val="13134F">
+              <a:srgbClr val="1E2B4A">
                 <a:alpha val="10000"/>
               </a:srgbClr>
             </a:outerShdw>
@@ -16181,7 +16181,7 @@
             <a:avLst/>
           </a:prstGeom>
           <a:solidFill>
-            <a:srgbClr val="4444AD"/>
+            <a:srgbClr val="41639E"/>
           </a:solidFill>
           <a:ln w="31750">
             <a:solidFill>
@@ -16191,7 +16191,7 @@
           </a:ln>
           <a:effectLst>
             <a:outerShdw sx="100000" sy="100000" kx="0" ky="0" algn="bl" rotWithShape="0" blurRad="127000" dist="25400" dir="5400000">
-              <a:srgbClr val="13134F">
+              <a:srgbClr val="1E2B4A">
                 <a:alpha val="18000"/>
               </a:srgbClr>
             </a:outerShdw>
@@ -16249,7 +16249,7 @@
             <a:r>
               <a:rPr lang="en-US" sz="3000" b="1" dirty="0">
                 <a:solidFill>
-                  <a:srgbClr val="E2E3EC"/>
+                  <a:srgbClr val="E3E7EE"/>
                 </a:solidFill>
                 <a:latin typeface="Calibri" pitchFamily="34" charset="0"/>
                 <a:ea typeface="Calibri" pitchFamily="34" charset="-122"/>
@@ -16361,7 +16361,7 @@
           <a:ln/>
           <a:effectLst>
             <a:outerShdw sx="100000" sy="100000" kx="0" ky="0" algn="bl" rotWithShape="0" blurRad="127000" dist="25400" dir="5400000">
-              <a:srgbClr val="13134F">
+              <a:srgbClr val="1E2B4A">
                 <a:alpha val="10000"/>
               </a:srgbClr>
             </a:outerShdw>
@@ -16393,7 +16393,7 @@
           </a:ln>
           <a:effectLst>
             <a:outerShdw sx="100000" sy="100000" kx="0" ky="0" algn="bl" rotWithShape="0" blurRad="127000" dist="25400" dir="5400000">
-              <a:srgbClr val="13134F">
+              <a:srgbClr val="1E2B4A">
                 <a:alpha val="18000"/>
               </a:srgbClr>
             </a:outerShdw>
@@ -16451,7 +16451,7 @@
             <a:r>
               <a:rPr lang="en-US" sz="3000" b="1" dirty="0">
                 <a:solidFill>
-                  <a:srgbClr val="E2E3EC"/>
+                  <a:srgbClr val="E3E7EE"/>
                 </a:solidFill>
                 <a:latin typeface="Calibri" pitchFamily="34" charset="0"/>
                 <a:ea typeface="Calibri" pitchFamily="34" charset="-122"/>
@@ -16663,7 +16663,7 @@
             <a:r>
               <a:rPr lang="en-US" sz="2700" b="1" dirty="0">
                 <a:solidFill>
-                  <a:srgbClr val="191970"/>
+                  <a:srgbClr val="1E2B4A"/>
                 </a:solidFill>
                 <a:latin typeface="Calibri" pitchFamily="34" charset="0"/>
                 <a:ea typeface="Calibri" pitchFamily="34" charset="-122"/>
@@ -16697,7 +16697,7 @@
           <a:ln/>
           <a:effectLst>
             <a:outerShdw sx="100000" sy="100000" kx="0" ky="0" algn="bl" rotWithShape="0" blurRad="127000" dist="25400" dir="5400000">
-              <a:srgbClr val="13134F">
+              <a:srgbClr val="1E2B4A">
                 <a:alpha val="10000"/>
               </a:srgbClr>
             </a:outerShdw>
@@ -16719,7 +16719,7 @@
             <a:avLst/>
           </a:prstGeom>
           <a:solidFill>
-            <a:srgbClr val="4444AD"/>
+            <a:srgbClr val="41639E"/>
           </a:solidFill>
           <a:ln w="31750">
             <a:solidFill>
@@ -16729,7 +16729,7 @@
           </a:ln>
           <a:effectLst>
             <a:outerShdw sx="100000" sy="100000" kx="0" ky="0" algn="bl" rotWithShape="0" blurRad="127000" dist="25400" dir="5400000">
-              <a:srgbClr val="13134F">
+              <a:srgbClr val="1E2B4A">
                 <a:alpha val="18000"/>
               </a:srgbClr>
             </a:outerShdw>
@@ -16826,7 +16826,7 @@
             <a:r>
               <a:rPr lang="en-US" sz="1100" b="1" dirty="0">
                 <a:solidFill>
-                  <a:srgbClr val="4444AD"/>
+                  <a:srgbClr val="41639E"/>
                 </a:solidFill>
                 <a:latin typeface="Calibri" pitchFamily="34" charset="0"/>
                 <a:ea typeface="Calibri" pitchFamily="34" charset="-122"/>
@@ -16902,7 +16902,7 @@
           <a:ln/>
           <a:effectLst>
             <a:outerShdw sx="100000" sy="100000" kx="0" ky="0" algn="bl" rotWithShape="0" blurRad="127000" dist="25400" dir="5400000">
-              <a:srgbClr val="13134F">
+              <a:srgbClr val="1E2B4A">
                 <a:alpha val="10000"/>
               </a:srgbClr>
             </a:outerShdw>
@@ -16924,7 +16924,7 @@
             <a:avLst/>
           </a:prstGeom>
           <a:solidFill>
-            <a:srgbClr val="2A2A80"/>
+            <a:srgbClr val="3E8C9A"/>
           </a:solidFill>
           <a:ln w="31750">
             <a:solidFill>
@@ -16934,7 +16934,7 @@
           </a:ln>
           <a:effectLst>
             <a:outerShdw sx="100000" sy="100000" kx="0" ky="0" algn="bl" rotWithShape="0" blurRad="127000" dist="25400" dir="5400000">
-              <a:srgbClr val="13134F">
+              <a:srgbClr val="1E2B4A">
                 <a:alpha val="18000"/>
               </a:srgbClr>
             </a:outerShdw>
@@ -17031,7 +17031,7 @@
             <a:r>
               <a:rPr lang="en-US" sz="1100" b="1" dirty="0">
                 <a:solidFill>
-                  <a:srgbClr val="2A2A80"/>
+                  <a:srgbClr val="3E8C9A"/>
                 </a:solidFill>
                 <a:latin typeface="Calibri" pitchFamily="34" charset="0"/>
                 <a:ea typeface="Calibri" pitchFamily="34" charset="-122"/>
@@ -17107,7 +17107,7 @@
           <a:ln/>
           <a:effectLst>
             <a:outerShdw sx="100000" sy="100000" kx="0" ky="0" algn="bl" rotWithShape="0" blurRad="127000" dist="25400" dir="5400000">
-              <a:srgbClr val="13134F">
+              <a:srgbClr val="1E2B4A">
                 <a:alpha val="10000"/>
               </a:srgbClr>
             </a:outerShdw>
@@ -17129,7 +17129,7 @@
             <a:avLst/>
           </a:prstGeom>
           <a:solidFill>
-            <a:srgbClr val="6E6ECB"/>
+            <a:srgbClr val="C98A24"/>
           </a:solidFill>
           <a:ln w="31750">
             <a:solidFill>
@@ -17139,7 +17139,7 @@
           </a:ln>
           <a:effectLst>
             <a:outerShdw sx="100000" sy="100000" kx="0" ky="0" algn="bl" rotWithShape="0" blurRad="127000" dist="25400" dir="5400000">
-              <a:srgbClr val="13134F">
+              <a:srgbClr val="1E2B4A">
                 <a:alpha val="18000"/>
               </a:srgbClr>
             </a:outerShdw>
@@ -17236,7 +17236,7 @@
             <a:r>
               <a:rPr lang="en-US" sz="1100" b="1" dirty="0">
                 <a:solidFill>
-                  <a:srgbClr val="6E6ECB"/>
+                  <a:srgbClr val="C98A24"/>
                 </a:solidFill>
                 <a:latin typeface="Calibri" pitchFamily="34" charset="0"/>
                 <a:ea typeface="Calibri" pitchFamily="34" charset="-122"/>
@@ -17312,7 +17312,7 @@
           <a:ln/>
           <a:effectLst>
             <a:outerShdw sx="100000" sy="100000" kx="0" ky="0" algn="bl" rotWithShape="0" blurRad="127000" dist="25400" dir="5400000">
-              <a:srgbClr val="13134F">
+              <a:srgbClr val="1E2B4A">
                 <a:alpha val="10000"/>
               </a:srgbClr>
             </a:outerShdw>
@@ -17344,7 +17344,7 @@
           </a:ln>
           <a:effectLst>
             <a:outerShdw sx="100000" sy="100000" kx="0" ky="0" algn="bl" rotWithShape="0" blurRad="127000" dist="25400" dir="5400000">
-              <a:srgbClr val="13134F">
+              <a:srgbClr val="1E2B4A">
                 <a:alpha val="18000"/>
               </a:srgbClr>
             </a:outerShdw>
@@ -17517,7 +17517,7 @@
           <a:ln/>
           <a:effectLst>
             <a:outerShdw sx="100000" sy="100000" kx="0" ky="0" algn="bl" rotWithShape="0" blurRad="127000" dist="25400" dir="5400000">
-              <a:srgbClr val="13134F">
+              <a:srgbClr val="1E2B4A">
                 <a:alpha val="10000"/>
               </a:srgbClr>
             </a:outerShdw>
@@ -17685,7 +17685,7 @@
             <a:r>
               <a:rPr lang="en-US" sz="2700" b="1" dirty="0">
                 <a:solidFill>
-                  <a:srgbClr val="191970"/>
+                  <a:srgbClr val="1E2B4A"/>
                 </a:solidFill>
                 <a:latin typeface="Calibri" pitchFamily="34" charset="0"/>
                 <a:ea typeface="Calibri" pitchFamily="34" charset="-122"/>
@@ -17719,7 +17719,7 @@
           <a:ln/>
           <a:effectLst>
             <a:outerShdw sx="100000" sy="100000" kx="0" ky="0" algn="bl" rotWithShape="0" blurRad="127000" dist="25400" dir="5400000">
-              <a:srgbClr val="13134F">
+              <a:srgbClr val="1E2B4A">
                 <a:alpha val="10000"/>
               </a:srgbClr>
             </a:outerShdw>
@@ -17910,7 +17910,7 @@
           <a:ln/>
           <a:effectLst>
             <a:outerShdw sx="100000" sy="100000" kx="0" ky="0" algn="bl" rotWithShape="0" blurRad="127000" dist="25400" dir="5400000">
-              <a:srgbClr val="13134F">
+              <a:srgbClr val="1E2B4A">
                 <a:alpha val="10000"/>
               </a:srgbClr>
             </a:outerShdw>
@@ -17944,7 +17944,7 @@
             <a:r>
               <a:rPr lang="en-US" sz="2600" b="1" dirty="0">
                 <a:solidFill>
-                  <a:srgbClr val="2A2A80"/>
+                  <a:srgbClr val="3E8C9A"/>
                 </a:solidFill>
                 <a:latin typeface="Calibri" pitchFamily="34" charset="0"/>
                 <a:ea typeface="Calibri" pitchFamily="34" charset="-122"/>
@@ -18067,7 +18067,7 @@
             <a:r>
               <a:rPr lang="en-US" sz="1350" b="1" dirty="0">
                 <a:solidFill>
-                  <a:srgbClr val="2A2A80"/>
+                  <a:srgbClr val="3E8C9A"/>
                 </a:solidFill>
                 <a:latin typeface="Calibri" pitchFamily="34" charset="0"/>
                 <a:ea typeface="Calibri" pitchFamily="34" charset="-122"/>
@@ -18104,7 +18104,7 @@
           </a:ln>
           <a:effectLst>
             <a:outerShdw sx="100000" sy="100000" kx="0" ky="0" algn="bl" rotWithShape="0" blurRad="127000" dist="25400" dir="5400000">
-              <a:srgbClr val="13134F">
+              <a:srgbClr val="1E2B4A">
                 <a:alpha val="18000"/>
               </a:srgbClr>
             </a:outerShdw>
@@ -18150,7 +18150,7 @@
             <a:avLst/>
           </a:prstGeom>
           <a:solidFill>
-            <a:srgbClr val="2A2A80"/>
+            <a:srgbClr val="3E8C9A"/>
           </a:solidFill>
           <a:ln w="31750">
             <a:solidFill>
@@ -18160,7 +18160,7 @@
           </a:ln>
           <a:effectLst>
             <a:outerShdw sx="100000" sy="100000" kx="0" ky="0" algn="bl" rotWithShape="0" blurRad="127000" dist="25400" dir="5400000">
-              <a:srgbClr val="13134F">
+              <a:srgbClr val="1E2B4A">
                 <a:alpha val="18000"/>
               </a:srgbClr>
             </a:outerShdw>
@@ -18313,7 +18313,7 @@
             <a:r>
               <a:rPr lang="en-US" sz="2700" b="1" dirty="0">
                 <a:solidFill>
-                  <a:srgbClr val="191970"/>
+                  <a:srgbClr val="1E2B4A"/>
                 </a:solidFill>
                 <a:latin typeface="Calibri" pitchFamily="34" charset="0"/>
                 <a:ea typeface="Calibri" pitchFamily="34" charset="-122"/>
@@ -18389,7 +18389,7 @@
           <a:ln/>
           <a:effectLst>
             <a:outerShdw sx="100000" sy="100000" kx="0" ky="0" algn="bl" rotWithShape="0" blurRad="127000" dist="25400" dir="5400000">
-              <a:srgbClr val="13134F">
+              <a:srgbClr val="1E2B4A">
                 <a:alpha val="10000"/>
               </a:srgbClr>
             </a:outerShdw>
@@ -18411,7 +18411,7 @@
             <a:avLst/>
           </a:prstGeom>
           <a:solidFill>
-            <a:srgbClr val="6E6ECB"/>
+            <a:srgbClr val="C98A24"/>
           </a:solidFill>
           <a:ln w="31750">
             <a:solidFill>
@@ -18421,7 +18421,7 @@
           </a:ln>
           <a:effectLst>
             <a:outerShdw sx="100000" sy="100000" kx="0" ky="0" algn="bl" rotWithShape="0" blurRad="127000" dist="25400" dir="5400000">
-              <a:srgbClr val="13134F">
+              <a:srgbClr val="1E2B4A">
                 <a:alpha val="18000"/>
               </a:srgbClr>
             </a:outerShdw>
@@ -18558,7 +18558,7 @@
           <a:ln/>
           <a:effectLst>
             <a:outerShdw sx="100000" sy="100000" kx="0" ky="0" algn="bl" rotWithShape="0" blurRad="127000" dist="25400" dir="5400000">
-              <a:srgbClr val="13134F">
+              <a:srgbClr val="1E2B4A">
                 <a:alpha val="10000"/>
               </a:srgbClr>
             </a:outerShdw>
@@ -18580,7 +18580,7 @@
             <a:avLst/>
           </a:prstGeom>
           <a:solidFill>
-            <a:srgbClr val="4444AD"/>
+            <a:srgbClr val="41639E"/>
           </a:solidFill>
           <a:ln w="31750">
             <a:solidFill>
@@ -18590,7 +18590,7 @@
           </a:ln>
           <a:effectLst>
             <a:outerShdw sx="100000" sy="100000" kx="0" ky="0" algn="bl" rotWithShape="0" blurRad="127000" dist="25400" dir="5400000">
-              <a:srgbClr val="13134F">
+              <a:srgbClr val="1E2B4A">
                 <a:alpha val="18000"/>
               </a:srgbClr>
             </a:outerShdw>
@@ -18727,7 +18727,7 @@
           <a:ln/>
           <a:effectLst>
             <a:outerShdw sx="100000" sy="100000" kx="0" ky="0" algn="bl" rotWithShape="0" blurRad="127000" dist="25400" dir="5400000">
-              <a:srgbClr val="13134F">
+              <a:srgbClr val="1E2B4A">
                 <a:alpha val="10000"/>
               </a:srgbClr>
             </a:outerShdw>
@@ -18749,7 +18749,7 @@
             <a:avLst/>
           </a:prstGeom>
           <a:solidFill>
-            <a:srgbClr val="2A2A80"/>
+            <a:srgbClr val="3E8C9A"/>
           </a:solidFill>
           <a:ln w="31750">
             <a:solidFill>
@@ -18759,7 +18759,7 @@
           </a:ln>
           <a:effectLst>
             <a:outerShdw sx="100000" sy="100000" kx="0" ky="0" algn="bl" rotWithShape="0" blurRad="127000" dist="25400" dir="5400000">
-              <a:srgbClr val="13134F">
+              <a:srgbClr val="1E2B4A">
                 <a:alpha val="18000"/>
               </a:srgbClr>
             </a:outerShdw>
@@ -18996,7 +18996,7 @@
             <a:r>
               <a:rPr lang="en-US" sz="2700" b="1" dirty="0">
                 <a:solidFill>
-                  <a:srgbClr val="191970"/>
+                  <a:srgbClr val="1E2B4A"/>
                 </a:solidFill>
                 <a:latin typeface="Calibri" pitchFamily="34" charset="0"/>
                 <a:ea typeface="Calibri" pitchFamily="34" charset="-122"/>
@@ -19030,7 +19030,7 @@
           <a:ln/>
           <a:effectLst>
             <a:outerShdw sx="100000" sy="100000" kx="0" ky="0" algn="bl" rotWithShape="0" blurRad="127000" dist="25400" dir="5400000">
-              <a:srgbClr val="13134F">
+              <a:srgbClr val="1E2B4A">
                 <a:alpha val="10000"/>
               </a:srgbClr>
             </a:outerShdw>
@@ -19062,7 +19062,7 @@
           </a:ln>
           <a:effectLst>
             <a:outerShdw sx="100000" sy="100000" kx="0" ky="0" algn="bl" rotWithShape="0" blurRad="127000" dist="25400" dir="5400000">
-              <a:srgbClr val="13134F">
+              <a:srgbClr val="1E2B4A">
                 <a:alpha val="18000"/>
               </a:srgbClr>
             </a:outerShdw>
@@ -19316,7 +19316,7 @@
           <a:ln/>
           <a:effectLst>
             <a:outerShdw sx="100000" sy="100000" kx="0" ky="0" algn="bl" rotWithShape="0" blurRad="127000" dist="25400" dir="5400000">
-              <a:srgbClr val="13134F">
+              <a:srgbClr val="1E2B4A">
                 <a:alpha val="10000"/>
               </a:srgbClr>
             </a:outerShdw>
@@ -19338,7 +19338,7 @@
             <a:avLst/>
           </a:prstGeom>
           <a:solidFill>
-            <a:srgbClr val="2A2A80"/>
+            <a:srgbClr val="3E8C9A"/>
           </a:solidFill>
           <a:ln w="31750">
             <a:solidFill>
@@ -19348,7 +19348,7 @@
           </a:ln>
           <a:effectLst>
             <a:outerShdw sx="100000" sy="100000" kx="0" ky="0" algn="bl" rotWithShape="0" blurRad="127000" dist="25400" dir="5400000">
-              <a:srgbClr val="13134F">
+              <a:srgbClr val="1E2B4A">
                 <a:alpha val="18000"/>
               </a:srgbClr>
             </a:outerShdw>
@@ -19433,7 +19433,7 @@
             <a:avLst/>
           </a:prstGeom>
           <a:solidFill>
-            <a:srgbClr val="2A2A80"/>
+            <a:srgbClr val="3E8C9A"/>
           </a:solidFill>
           <a:ln/>
         </p:spPr>
@@ -19534,7 +19534,7 @@
             <a:avLst/>
           </a:prstGeom>
           <a:solidFill>
-            <a:srgbClr val="2A2A80"/>
+            <a:srgbClr val="3E8C9A"/>
           </a:solidFill>
           <a:ln/>
         </p:spPr>
@@ -19635,7 +19635,7 @@
             <a:avLst/>
           </a:prstGeom>
           <a:solidFill>
-            <a:srgbClr val="2A2A80"/>
+            <a:srgbClr val="3E8C9A"/>
           </a:solidFill>
           <a:ln/>
         </p:spPr>
@@ -19798,7 +19798,7 @@
     <p:bg>
       <p:bgPr>
         <a:solidFill>
-          <a:srgbClr val="101038"/>
+          <a:srgbClr val="16213D"/>
         </a:solidFill>
       </p:bgPr>
     </p:bg>
@@ -19831,7 +19831,7 @@
             <a:avLst/>
           </a:prstGeom>
           <a:solidFill>
-            <a:srgbClr val="23236B"/>
+            <a:srgbClr val="24365E"/>
           </a:solidFill>
           <a:ln/>
         </p:spPr>
@@ -19851,7 +19851,7 @@
             <a:avLst/>
           </a:prstGeom>
           <a:solidFill>
-            <a:srgbClr val="23236B"/>
+            <a:srgbClr val="24365E"/>
           </a:solidFill>
           <a:ln/>
         </p:spPr>
@@ -19964,7 +19964,7 @@
             <a:r>
               <a:rPr lang="en-US" sz="1400" dirty="0">
                 <a:solidFill>
-                  <a:srgbClr val="B7B7DB"/>
+                  <a:srgbClr val="AFC0DA"/>
                 </a:solidFill>
                 <a:latin typeface="Calibri" pitchFamily="34" charset="0"/>
                 <a:ea typeface="Calibri" pitchFamily="34" charset="-122"/>
@@ -20035,7 +20035,7 @@
             <a:r>
               <a:rPr lang="en-US" sz="2700" b="1" dirty="0">
                 <a:solidFill>
-                  <a:srgbClr val="191970"/>
+                  <a:srgbClr val="1E2B4A"/>
                 </a:solidFill>
                 <a:latin typeface="Calibri" pitchFamily="34" charset="0"/>
                 <a:ea typeface="Calibri" pitchFamily="34" charset="-122"/>
@@ -20064,12 +20064,12 @@
             </a:avLst>
           </a:prstGeom>
           <a:solidFill>
-            <a:srgbClr val="191970"/>
+            <a:srgbClr val="1E2B4A"/>
           </a:solidFill>
           <a:ln/>
           <a:effectLst>
             <a:outerShdw sx="100000" sy="100000" kx="0" ky="0" algn="bl" rotWithShape="0" blurRad="127000" dist="25400" dir="5400000">
-              <a:srgbClr val="13134F">
+              <a:srgbClr val="1E2B4A">
                 <a:alpha val="10000"/>
               </a:srgbClr>
             </a:outerShdw>
@@ -20140,7 +20140,7 @@
           <a:ln/>
           <a:effectLst>
             <a:outerShdw sx="100000" sy="100000" kx="0" ky="0" algn="bl" rotWithShape="0" blurRad="127000" dist="25400" dir="5400000">
-              <a:srgbClr val="13134F">
+              <a:srgbClr val="1E2B4A">
                 <a:alpha val="10000"/>
               </a:srgbClr>
             </a:outerShdw>
@@ -20289,7 +20289,7 @@
           <a:ln/>
           <a:effectLst>
             <a:outerShdw sx="100000" sy="100000" kx="0" ky="0" algn="bl" rotWithShape="0" blurRad="127000" dist="25400" dir="5400000">
-              <a:srgbClr val="13134F">
+              <a:srgbClr val="1E2B4A">
                 <a:alpha val="10000"/>
               </a:srgbClr>
             </a:outerShdw>
@@ -20323,7 +20323,7 @@
             <a:r>
               <a:rPr lang="en-US" sz="3600" b="1" dirty="0">
                 <a:solidFill>
-                  <a:srgbClr val="4444AD"/>
+                  <a:srgbClr val="41639E"/>
                 </a:solidFill>
                 <a:latin typeface="Calibri" pitchFamily="34" charset="0"/>
                 <a:ea typeface="Calibri" pitchFamily="34" charset="-122"/>
@@ -20438,7 +20438,7 @@
           <a:ln/>
           <a:effectLst>
             <a:outerShdw sx="100000" sy="100000" kx="0" ky="0" algn="bl" rotWithShape="0" blurRad="127000" dist="25400" dir="5400000">
-              <a:srgbClr val="13134F">
+              <a:srgbClr val="1E2B4A">
                 <a:alpha val="10000"/>
               </a:srgbClr>
             </a:outerShdw>
@@ -20472,7 +20472,7 @@
             <a:r>
               <a:rPr lang="en-US" sz="3600" b="1" dirty="0">
                 <a:solidFill>
-                  <a:srgbClr val="2A2A80"/>
+                  <a:srgbClr val="3E8C9A"/>
                 </a:solidFill>
                 <a:latin typeface="Calibri" pitchFamily="34" charset="0"/>
                 <a:ea typeface="Calibri" pitchFamily="34" charset="-122"/>
@@ -20587,7 +20587,7 @@
           <a:ln/>
           <a:effectLst>
             <a:outerShdw sx="100000" sy="100000" kx="0" ky="0" algn="bl" rotWithShape="0" blurRad="127000" dist="25400" dir="5400000">
-              <a:srgbClr val="13134F">
+              <a:srgbClr val="1E2B4A">
                 <a:alpha val="10000"/>
               </a:srgbClr>
             </a:outerShdw>
@@ -20621,7 +20621,7 @@
             <a:r>
               <a:rPr lang="en-US" sz="3600" b="1" dirty="0">
                 <a:solidFill>
-                  <a:srgbClr val="6E6ECB"/>
+                  <a:srgbClr val="C98A24"/>
                 </a:solidFill>
                 <a:latin typeface="Calibri" pitchFamily="34" charset="0"/>
                 <a:ea typeface="Calibri" pitchFamily="34" charset="-122"/>
@@ -20836,7 +20836,7 @@
             <a:r>
               <a:rPr lang="en-US" sz="2700" b="1" dirty="0">
                 <a:solidFill>
-                  <a:srgbClr val="191970"/>
+                  <a:srgbClr val="1E2B4A"/>
                 </a:solidFill>
                 <a:latin typeface="Calibri" pitchFamily="34" charset="0"/>
                 <a:ea typeface="Calibri" pitchFamily="34" charset="-122"/>
@@ -20912,7 +20912,7 @@
           <a:ln/>
           <a:effectLst>
             <a:outerShdw sx="100000" sy="100000" kx="0" ky="0" algn="bl" rotWithShape="0" blurRad="127000" dist="25400" dir="5400000">
-              <a:srgbClr val="13134F">
+              <a:srgbClr val="1E2B4A">
                 <a:alpha val="10000"/>
               </a:srgbClr>
             </a:outerShdw>
@@ -20934,7 +20934,7 @@
             <a:avLst/>
           </a:prstGeom>
           <a:solidFill>
-            <a:srgbClr val="6E6ECB"/>
+            <a:srgbClr val="C98A24"/>
           </a:solidFill>
           <a:ln w="31750">
             <a:solidFill>
@@ -20944,7 +20944,7 @@
           </a:ln>
           <a:effectLst>
             <a:outerShdw sx="100000" sy="100000" kx="0" ky="0" algn="bl" rotWithShape="0" blurRad="127000" dist="25400" dir="5400000">
-              <a:srgbClr val="13134F">
+              <a:srgbClr val="1E2B4A">
                 <a:alpha val="18000"/>
               </a:srgbClr>
             </a:outerShdw>
@@ -21081,7 +21081,7 @@
           <a:ln/>
           <a:effectLst>
             <a:outerShdw sx="100000" sy="100000" kx="0" ky="0" algn="bl" rotWithShape="0" blurRad="127000" dist="25400" dir="5400000">
-              <a:srgbClr val="13134F">
+              <a:srgbClr val="1E2B4A">
                 <a:alpha val="10000"/>
               </a:srgbClr>
             </a:outerShdw>
@@ -21103,7 +21103,7 @@
             <a:avLst/>
           </a:prstGeom>
           <a:solidFill>
-            <a:srgbClr val="4444AD"/>
+            <a:srgbClr val="41639E"/>
           </a:solidFill>
           <a:ln w="31750">
             <a:solidFill>
@@ -21113,7 +21113,7 @@
           </a:ln>
           <a:effectLst>
             <a:outerShdw sx="100000" sy="100000" kx="0" ky="0" algn="bl" rotWithShape="0" blurRad="127000" dist="25400" dir="5400000">
-              <a:srgbClr val="13134F">
+              <a:srgbClr val="1E2B4A">
                 <a:alpha val="18000"/>
               </a:srgbClr>
             </a:outerShdw>
@@ -21250,7 +21250,7 @@
           <a:ln/>
           <a:effectLst>
             <a:outerShdw sx="100000" sy="100000" kx="0" ky="0" algn="bl" rotWithShape="0" blurRad="127000" dist="25400" dir="5400000">
-              <a:srgbClr val="13134F">
+              <a:srgbClr val="1E2B4A">
                 <a:alpha val="10000"/>
               </a:srgbClr>
             </a:outerShdw>
@@ -21272,7 +21272,7 @@
             <a:avLst/>
           </a:prstGeom>
           <a:solidFill>
-            <a:srgbClr val="2A2A80"/>
+            <a:srgbClr val="3E8C9A"/>
           </a:solidFill>
           <a:ln w="31750">
             <a:solidFill>
@@ -21282,7 +21282,7 @@
           </a:ln>
           <a:effectLst>
             <a:outerShdw sx="100000" sy="100000" kx="0" ky="0" algn="bl" rotWithShape="0" blurRad="127000" dist="25400" dir="5400000">
-              <a:srgbClr val="13134F">
+              <a:srgbClr val="1E2B4A">
                 <a:alpha val="18000"/>
               </a:srgbClr>
             </a:outerShdw>
@@ -21474,7 +21474,7 @@
     <p:bg>
       <p:bgPr>
         <a:solidFill>
-          <a:srgbClr val="101038"/>
+          <a:srgbClr val="16213D"/>
         </a:solidFill>
       </p:bgPr>
     </p:bg>
@@ -21507,7 +21507,7 @@
             <a:avLst/>
           </a:prstGeom>
           <a:solidFill>
-            <a:srgbClr val="23236B"/>
+            <a:srgbClr val="24365E"/>
           </a:solidFill>
           <a:ln/>
         </p:spPr>
@@ -21527,7 +21527,7 @@
             <a:avLst/>
           </a:prstGeom>
           <a:solidFill>
-            <a:srgbClr val="23236B"/>
+            <a:srgbClr val="24365E"/>
           </a:solidFill>
           <a:ln/>
         </p:spPr>
@@ -21663,7 +21663,7 @@
     <p:bg>
       <p:bgPr>
         <a:solidFill>
-          <a:srgbClr val="101038"/>
+          <a:srgbClr val="16213D"/>
         </a:solidFill>
       </p:bgPr>
     </p:bg>
@@ -21696,7 +21696,7 @@
             <a:avLst/>
           </a:prstGeom>
           <a:solidFill>
-            <a:srgbClr val="23236B"/>
+            <a:srgbClr val="24365E"/>
           </a:solidFill>
           <a:ln/>
         </p:spPr>
@@ -21716,7 +21716,7 @@
             <a:avLst/>
           </a:prstGeom>
           <a:solidFill>
-            <a:srgbClr val="23236B"/>
+            <a:srgbClr val="24365E"/>
           </a:solidFill>
           <a:ln/>
         </p:spPr>
@@ -21829,7 +21829,7 @@
             <a:r>
               <a:rPr lang="en-US" sz="1400" dirty="0">
                 <a:solidFill>
-                  <a:srgbClr val="B7B7DB"/>
+                  <a:srgbClr val="AFC0DA"/>
                 </a:solidFill>
                 <a:latin typeface="Calibri" pitchFamily="34" charset="0"/>
                 <a:ea typeface="Calibri" pitchFamily="34" charset="-122"/>
@@ -21900,7 +21900,7 @@
             <a:r>
               <a:rPr lang="en-US" sz="2700" b="1" dirty="0">
                 <a:solidFill>
-                  <a:srgbClr val="191970"/>
+                  <a:srgbClr val="1E2B4A"/>
                 </a:solidFill>
                 <a:latin typeface="Calibri" pitchFamily="34" charset="0"/>
                 <a:ea typeface="Calibri" pitchFamily="34" charset="-122"/>
@@ -21934,7 +21934,7 @@
           <a:ln/>
           <a:effectLst>
             <a:outerShdw sx="100000" sy="100000" kx="0" ky="0" algn="bl" rotWithShape="0" blurRad="127000" dist="25400" dir="5400000">
-              <a:srgbClr val="13134F">
+              <a:srgbClr val="1E2B4A">
                 <a:alpha val="10000"/>
               </a:srgbClr>
             </a:outerShdw>
@@ -21956,7 +21956,7 @@
             <a:avLst/>
           </a:prstGeom>
           <a:solidFill>
-            <a:srgbClr val="4444AD"/>
+            <a:srgbClr val="41639E"/>
           </a:solidFill>
           <a:ln w="31750">
             <a:solidFill>
@@ -21966,7 +21966,7 @@
           </a:ln>
           <a:effectLst>
             <a:outerShdw sx="100000" sy="100000" kx="0" ky="0" algn="bl" rotWithShape="0" blurRad="127000" dist="25400" dir="5400000">
-              <a:srgbClr val="13134F">
+              <a:srgbClr val="1E2B4A">
                 <a:alpha val="18000"/>
               </a:srgbClr>
             </a:outerShdw>
@@ -22066,7 +22066,7 @@
             <a:r>
               <a:rPr lang="en-US" sz="3400" b="1" dirty="0">
                 <a:solidFill>
-                  <a:srgbClr val="4444AD"/>
+                  <a:srgbClr val="41639E"/>
                 </a:solidFill>
                 <a:latin typeface="Calibri" pitchFamily="34" charset="0"/>
                 <a:ea typeface="Calibri" pitchFamily="34" charset="-122"/>
@@ -22167,7 +22167,7 @@
             <a:r>
               <a:rPr lang="en-US" sz="3400" b="1" dirty="0">
                 <a:solidFill>
-                  <a:srgbClr val="4444AD"/>
+                  <a:srgbClr val="41639E"/>
                 </a:solidFill>
                 <a:latin typeface="Calibri" pitchFamily="34" charset="0"/>
                 <a:ea typeface="Calibri" pitchFamily="34" charset="-122"/>
@@ -22344,7 +22344,7 @@
           <a:ln/>
           <a:effectLst>
             <a:outerShdw sx="100000" sy="100000" kx="0" ky="0" algn="bl" rotWithShape="0" blurRad="127000" dist="25400" dir="5400000">
-              <a:srgbClr val="13134F">
+              <a:srgbClr val="1E2B4A">
                 <a:alpha val="10000"/>
               </a:srgbClr>
             </a:outerShdw>
@@ -22376,7 +22376,7 @@
           </a:ln>
           <a:effectLst>
             <a:outerShdw sx="100000" sy="100000" kx="0" ky="0" algn="bl" rotWithShape="0" blurRad="127000" dist="25400" dir="5400000">
-              <a:srgbClr val="13134F">
+              <a:srgbClr val="1E2B4A">
                 <a:alpha val="18000"/>
               </a:srgbClr>
             </a:outerShdw>
@@ -22854,7 +22854,7 @@
             <a:r>
               <a:rPr lang="en-US" sz="2700" b="1" dirty="0">
                 <a:solidFill>
-                  <a:srgbClr val="191970"/>
+                  <a:srgbClr val="1E2B4A"/>
                 </a:solidFill>
                 <a:latin typeface="Calibri" pitchFamily="34" charset="0"/>
                 <a:ea typeface="Calibri" pitchFamily="34" charset="-122"/>
@@ -22883,12 +22883,12 @@
             </a:avLst>
           </a:prstGeom>
           <a:solidFill>
-            <a:srgbClr val="191970"/>
+            <a:srgbClr val="1E2B4A"/>
           </a:solidFill>
           <a:ln/>
           <a:effectLst>
             <a:outerShdw sx="100000" sy="100000" kx="0" ky="0" algn="bl" rotWithShape="0" blurRad="127000" dist="25400" dir="5400000">
-              <a:srgbClr val="13134F">
+              <a:srgbClr val="1E2B4A">
                 <a:alpha val="10000"/>
               </a:srgbClr>
             </a:outerShdw>
@@ -22979,7 +22979,7 @@
           <a:ln/>
           <a:effectLst>
             <a:outerShdw sx="100000" sy="100000" kx="0" ky="0" algn="bl" rotWithShape="0" blurRad="127000" dist="25400" dir="5400000">
-              <a:srgbClr val="13134F">
+              <a:srgbClr val="1E2B4A">
                 <a:alpha val="10000"/>
               </a:srgbClr>
             </a:outerShdw>
@@ -23092,7 +23092,7 @@
           <a:ln/>
           <a:effectLst>
             <a:outerShdw sx="100000" sy="100000" kx="0" ky="0" algn="bl" rotWithShape="0" blurRad="127000" dist="25400" dir="5400000">
-              <a:srgbClr val="13134F">
+              <a:srgbClr val="1E2B4A">
                 <a:alpha val="10000"/>
               </a:srgbClr>
             </a:outerShdw>
@@ -23205,7 +23205,7 @@
           <a:ln/>
           <a:effectLst>
             <a:outerShdw sx="100000" sy="100000" kx="0" ky="0" algn="bl" rotWithShape="0" blurRad="127000" dist="25400" dir="5400000">
-              <a:srgbClr val="13134F">
+              <a:srgbClr val="1E2B4A">
                 <a:alpha val="10000"/>
               </a:srgbClr>
             </a:outerShdw>
@@ -23321,7 +23321,7 @@
           </a:ln>
           <a:effectLst>
             <a:outerShdw sx="100000" sy="100000" kx="0" ky="0" algn="bl" rotWithShape="0" blurRad="127000" dist="25400" dir="5400000">
-              <a:srgbClr val="13134F">
+              <a:srgbClr val="1E2B4A">
                 <a:alpha val="18000"/>
               </a:srgbClr>
             </a:outerShdw>
@@ -23367,7 +23367,7 @@
             <a:avLst/>
           </a:prstGeom>
           <a:solidFill>
-            <a:srgbClr val="6E6ECB"/>
+            <a:srgbClr val="C98A24"/>
           </a:solidFill>
           <a:ln w="31750">
             <a:solidFill>
@@ -23377,7 +23377,7 @@
           </a:ln>
           <a:effectLst>
             <a:outerShdw sx="100000" sy="100000" kx="0" ky="0" algn="bl" rotWithShape="0" blurRad="127000" dist="25400" dir="5400000">
-              <a:srgbClr val="13134F">
+              <a:srgbClr val="1E2B4A">
                 <a:alpha val="18000"/>
               </a:srgbClr>
             </a:outerShdw>
@@ -23423,7 +23423,7 @@
             <a:avLst/>
           </a:prstGeom>
           <a:solidFill>
-            <a:srgbClr val="2A2A80"/>
+            <a:srgbClr val="3E8C9A"/>
           </a:solidFill>
           <a:ln w="31750">
             <a:solidFill>
@@ -23433,7 +23433,7 @@
           </a:ln>
           <a:effectLst>
             <a:outerShdw sx="100000" sy="100000" kx="0" ky="0" algn="bl" rotWithShape="0" blurRad="127000" dist="25400" dir="5400000">
-              <a:srgbClr val="13134F">
+              <a:srgbClr val="1E2B4A">
                 <a:alpha val="18000"/>
               </a:srgbClr>
             </a:outerShdw>
@@ -23586,7 +23586,7 @@
             <a:r>
               <a:rPr lang="en-US" sz="2700" b="1" dirty="0">
                 <a:solidFill>
-                  <a:srgbClr val="191970"/>
+                  <a:srgbClr val="1E2B4A"/>
                 </a:solidFill>
                 <a:latin typeface="Calibri" pitchFamily="34" charset="0"/>
                 <a:ea typeface="Calibri" pitchFamily="34" charset="-122"/>
@@ -23620,7 +23620,7 @@
           <a:ln/>
           <a:effectLst>
             <a:outerShdw sx="100000" sy="100000" kx="0" ky="0" algn="bl" rotWithShape="0" blurRad="127000" dist="25400" dir="5400000">
-              <a:srgbClr val="13134F">
+              <a:srgbClr val="1E2B4A">
                 <a:alpha val="10000"/>
               </a:srgbClr>
             </a:outerShdw>
@@ -23642,7 +23642,7 @@
             <a:avLst/>
           </a:prstGeom>
           <a:solidFill>
-            <a:srgbClr val="4444AD"/>
+            <a:srgbClr val="41639E"/>
           </a:solidFill>
           <a:ln w="31750">
             <a:solidFill>
@@ -23652,7 +23652,7 @@
           </a:ln>
           <a:effectLst>
             <a:outerShdw sx="100000" sy="100000" kx="0" ky="0" algn="bl" rotWithShape="0" blurRad="127000" dist="25400" dir="5400000">
-              <a:srgbClr val="13134F">
+              <a:srgbClr val="1E2B4A">
                 <a:alpha val="18000"/>
               </a:srgbClr>
             </a:outerShdw>
@@ -23779,7 +23779,7 @@
             <a:avLst/>
           </a:prstGeom>
           <a:solidFill>
-            <a:srgbClr val="4444AD"/>
+            <a:srgbClr val="41639E"/>
           </a:solidFill>
           <a:ln/>
         </p:spPr>
@@ -23880,7 +23880,7 @@
             <a:avLst/>
           </a:prstGeom>
           <a:solidFill>
-            <a:srgbClr val="4444AD"/>
+            <a:srgbClr val="41639E"/>
           </a:solidFill>
           <a:ln/>
         </p:spPr>
@@ -23988,7 +23988,7 @@
           <a:ln/>
           <a:effectLst>
             <a:outerShdw sx="100000" sy="100000" kx="0" ky="0" algn="bl" rotWithShape="0" blurRad="127000" dist="25400" dir="5400000">
-              <a:srgbClr val="13134F">
+              <a:srgbClr val="1E2B4A">
                 <a:alpha val="10000"/>
               </a:srgbClr>
             </a:outerShdw>
@@ -24020,7 +24020,7 @@
           </a:ln>
           <a:effectLst>
             <a:outerShdw sx="100000" sy="100000" kx="0" ky="0" algn="bl" rotWithShape="0" blurRad="127000" dist="25400" dir="5400000">
-              <a:srgbClr val="13134F">
+              <a:srgbClr val="1E2B4A">
                 <a:alpha val="18000"/>
               </a:srgbClr>
             </a:outerShdw>
@@ -24107,12 +24107,12 @@
             </a:avLst>
           </a:prstGeom>
           <a:solidFill>
-            <a:srgbClr val="E7E7F3"/>
+            <a:srgbClr val="E5EEF4"/>
           </a:solidFill>
           <a:ln/>
           <a:effectLst>
             <a:outerShdw sx="100000" sy="100000" kx="0" ky="0" algn="bl" rotWithShape="0" blurRad="127000" dist="25400" dir="5400000">
-              <a:srgbClr val="13134F">
+              <a:srgbClr val="1E2B4A">
                 <a:alpha val="10000"/>
               </a:srgbClr>
             </a:outerShdw>
@@ -24217,12 +24217,12 @@
             </a:avLst>
           </a:prstGeom>
           <a:solidFill>
-            <a:srgbClr val="E7E7F3"/>
+            <a:srgbClr val="E5EEF4"/>
           </a:solidFill>
           <a:ln/>
           <a:effectLst>
             <a:outerShdw sx="100000" sy="100000" kx="0" ky="0" algn="bl" rotWithShape="0" blurRad="127000" dist="25400" dir="5400000">
-              <a:srgbClr val="13134F">
+              <a:srgbClr val="1E2B4A">
                 <a:alpha val="10000"/>
               </a:srgbClr>
             </a:outerShdw>
@@ -24387,7 +24387,7 @@
     <p:bg>
       <p:bgPr>
         <a:solidFill>
-          <a:srgbClr val="101038"/>
+          <a:srgbClr val="16213D"/>
         </a:solidFill>
       </p:bgPr>
     </p:bg>
@@ -24420,7 +24420,7 @@
             <a:avLst/>
           </a:prstGeom>
           <a:solidFill>
-            <a:srgbClr val="23236B"/>
+            <a:srgbClr val="24365E"/>
           </a:solidFill>
           <a:ln/>
         </p:spPr>
@@ -24440,7 +24440,7 @@
             <a:avLst/>
           </a:prstGeom>
           <a:solidFill>
-            <a:srgbClr val="23236B"/>
+            <a:srgbClr val="24365E"/>
           </a:solidFill>
           <a:ln/>
         </p:spPr>
@@ -24553,7 +24553,7 @@
             <a:r>
               <a:rPr lang="en-US" sz="1400" dirty="0">
                 <a:solidFill>
-                  <a:srgbClr val="B7B7DB"/>
+                  <a:srgbClr val="AFC0DA"/>
                 </a:solidFill>
                 <a:latin typeface="Calibri" pitchFamily="34" charset="0"/>
                 <a:ea typeface="Calibri" pitchFamily="34" charset="-122"/>
@@ -24624,7 +24624,7 @@
             <a:r>
               <a:rPr lang="en-US" sz="2700" b="1" dirty="0">
                 <a:solidFill>
-                  <a:srgbClr val="191970"/>
+                  <a:srgbClr val="1E2B4A"/>
                 </a:solidFill>
                 <a:latin typeface="Calibri" pitchFamily="34" charset="0"/>
                 <a:ea typeface="Calibri" pitchFamily="34" charset="-122"/>
@@ -24658,7 +24658,7 @@
           <a:ln/>
           <a:effectLst>
             <a:outerShdw sx="100000" sy="100000" kx="0" ky="0" algn="bl" rotWithShape="0" blurRad="127000" dist="25400" dir="5400000">
-              <a:srgbClr val="13134F">
+              <a:srgbClr val="1E2B4A">
                 <a:alpha val="10000"/>
               </a:srgbClr>
             </a:outerShdw>
@@ -24719,7 +24719,7 @@
             <a:avLst/>
           </a:prstGeom>
           <a:solidFill>
-            <a:srgbClr val="4444AD"/>
+            <a:srgbClr val="41639E"/>
           </a:solidFill>
           <a:ln/>
         </p:spPr>
@@ -24859,7 +24859,7 @@
             <a:avLst/>
           </a:prstGeom>
           <a:solidFill>
-            <a:srgbClr val="4444AD"/>
+            <a:srgbClr val="41639E"/>
           </a:solidFill>
           <a:ln/>
         </p:spPr>
@@ -24999,7 +24999,7 @@
             <a:avLst/>
           </a:prstGeom>
           <a:solidFill>
-            <a:srgbClr val="4444AD"/>
+            <a:srgbClr val="41639E"/>
           </a:solidFill>
           <a:ln/>
         </p:spPr>
@@ -25146,7 +25146,7 @@
           <a:ln/>
           <a:effectLst>
             <a:outerShdw sx="100000" sy="100000" kx="0" ky="0" algn="bl" rotWithShape="0" blurRad="127000" dist="25400" dir="5400000">
-              <a:srgbClr val="13134F">
+              <a:srgbClr val="1E2B4A">
                 <a:alpha val="10000"/>
               </a:srgbClr>
             </a:outerShdw>
@@ -25567,7 +25567,7 @@
             <a:avLst/>
           </a:prstGeom>
           <a:solidFill>
-            <a:srgbClr val="4444AD"/>
+            <a:srgbClr val="41639E"/>
           </a:solidFill>
           <a:ln w="31750">
             <a:solidFill>
@@ -25577,7 +25577,7 @@
           </a:ln>
           <a:effectLst>
             <a:outerShdw sx="100000" sy="100000" kx="0" ky="0" algn="bl" rotWithShape="0" blurRad="127000" dist="25400" dir="5400000">
-              <a:srgbClr val="13134F">
+              <a:srgbClr val="1E2B4A">
                 <a:alpha val="18000"/>
               </a:srgbClr>
             </a:outerShdw>
@@ -25623,7 +25623,7 @@
             <a:avLst/>
           </a:prstGeom>
           <a:solidFill>
-            <a:srgbClr val="6E6ECB"/>
+            <a:srgbClr val="C98A24"/>
           </a:solidFill>
           <a:ln w="31750">
             <a:solidFill>
@@ -25633,7 +25633,7 @@
           </a:ln>
           <a:effectLst>
             <a:outerShdw sx="100000" sy="100000" kx="0" ky="0" algn="bl" rotWithShape="0" blurRad="127000" dist="25400" dir="5400000">
-              <a:srgbClr val="13134F">
+              <a:srgbClr val="1E2B4A">
                 <a:alpha val="18000"/>
               </a:srgbClr>
             </a:outerShdw>
@@ -25689,7 +25689,7 @@
           </a:ln>
           <a:effectLst>
             <a:outerShdw sx="100000" sy="100000" kx="0" ky="0" algn="bl" rotWithShape="0" blurRad="127000" dist="25400" dir="5400000">
-              <a:srgbClr val="13134F">
+              <a:srgbClr val="1E2B4A">
                 <a:alpha val="18000"/>
               </a:srgbClr>
             </a:outerShdw>
@@ -25797,7 +25797,7 @@
     <p:bg>
       <p:bgPr>
         <a:solidFill>
-          <a:srgbClr val="101038"/>
+          <a:srgbClr val="16213D"/>
         </a:solidFill>
       </p:bgPr>
     </p:bg>
@@ -25830,7 +25830,7 @@
             <a:avLst/>
           </a:prstGeom>
           <a:solidFill>
-            <a:srgbClr val="23236B"/>
+            <a:srgbClr val="24365E"/>
           </a:solidFill>
           <a:ln/>
         </p:spPr>
@@ -25850,7 +25850,7 @@
             <a:avLst/>
           </a:prstGeom>
           <a:solidFill>
-            <a:srgbClr val="23236B"/>
+            <a:srgbClr val="24365E"/>
           </a:solidFill>
           <a:ln/>
         </p:spPr>
@@ -25963,7 +25963,7 @@
             <a:r>
               <a:rPr lang="en-US" sz="1400" dirty="0">
                 <a:solidFill>
-                  <a:srgbClr val="B7B7DB"/>
+                  <a:srgbClr val="AFC0DA"/>
                 </a:solidFill>
                 <a:latin typeface="Calibri" pitchFamily="34" charset="0"/>
                 <a:ea typeface="Calibri" pitchFamily="34" charset="-122"/>

--- a/infographie/presentation_infographique.pptx
+++ b/infographie/presentation_infographique.pptx
@@ -3950,18 +3950,18 @@
             <a:avLst/>
           </a:prstGeom>
           <a:solidFill>
-            <a:srgbClr val="41639E"/>
+            <a:srgbClr val="E1E6EF"/>
           </a:solidFill>
-          <a:ln w="31750">
+          <a:ln w="15875">
             <a:solidFill>
-              <a:srgbClr val="FFFFFF"/>
+              <a:srgbClr val="BBC7DC"/>
             </a:solidFill>
             <a:prstDash val="solid"/>
           </a:ln>
           <a:effectLst>
             <a:outerShdw sx="100000" sy="100000" kx="0" ky="0" algn="bl" rotWithShape="0" blurRad="127000" dist="25400" dir="5400000">
               <a:srgbClr val="1E2B4A">
-                <a:alpha val="18000"/>
+                <a:alpha val="8000"/>
               </a:srgbClr>
             </a:outerShdw>
           </a:effectLst>
@@ -4077,18 +4077,18 @@
             <a:avLst/>
           </a:prstGeom>
           <a:solidFill>
-            <a:srgbClr val="3E8C9A"/>
+            <a:srgbClr val="E0EDEF"/>
           </a:solidFill>
-          <a:ln w="31750">
+          <a:ln w="15875">
             <a:solidFill>
-              <a:srgbClr val="FFFFFF"/>
+              <a:srgbClr val="BAD6DB"/>
             </a:solidFill>
             <a:prstDash val="solid"/>
           </a:ln>
           <a:effectLst>
             <a:outerShdw sx="100000" sy="100000" kx="0" ky="0" algn="bl" rotWithShape="0" blurRad="127000" dist="25400" dir="5400000">
               <a:srgbClr val="1E2B4A">
-                <a:alpha val="18000"/>
+                <a:alpha val="8000"/>
               </a:srgbClr>
             </a:outerShdw>
           </a:effectLst>
@@ -4204,18 +4204,18 @@
             <a:avLst/>
           </a:prstGeom>
           <a:solidFill>
-            <a:srgbClr val="41639E"/>
+            <a:srgbClr val="E1E6EF"/>
           </a:solidFill>
-          <a:ln w="31750">
+          <a:ln w="15875">
             <a:solidFill>
-              <a:srgbClr val="FFFFFF"/>
+              <a:srgbClr val="BBC7DC"/>
             </a:solidFill>
             <a:prstDash val="solid"/>
           </a:ln>
           <a:effectLst>
             <a:outerShdw sx="100000" sy="100000" kx="0" ky="0" algn="bl" rotWithShape="0" blurRad="127000" dist="25400" dir="5400000">
               <a:srgbClr val="1E2B4A">
-                <a:alpha val="18000"/>
+                <a:alpha val="8000"/>
               </a:srgbClr>
             </a:outerShdw>
           </a:effectLst>
@@ -4331,18 +4331,18 @@
             <a:avLst/>
           </a:prstGeom>
           <a:solidFill>
-            <a:srgbClr val="D96F2B"/>
+            <a:srgbClr val="F9E8DD"/>
           </a:solidFill>
-          <a:ln w="31750">
+          <a:ln w="15875">
             <a:solidFill>
-              <a:srgbClr val="FFFFFF"/>
+              <a:srgbClr val="F1CBB3"/>
             </a:solidFill>
             <a:prstDash val="solid"/>
           </a:ln>
           <a:effectLst>
             <a:outerShdw sx="100000" sy="100000" kx="0" ky="0" algn="bl" rotWithShape="0" blurRad="127000" dist="25400" dir="5400000">
               <a:srgbClr val="1E2B4A">
-                <a:alpha val="18000"/>
+                <a:alpha val="8000"/>
               </a:srgbClr>
             </a:outerShdw>
           </a:effectLst>
@@ -4458,18 +4458,18 @@
             <a:avLst/>
           </a:prstGeom>
           <a:solidFill>
-            <a:srgbClr val="C98A24"/>
+            <a:srgbClr val="F6ECDC"/>
           </a:solidFill>
-          <a:ln w="31750">
+          <a:ln w="15875">
             <a:solidFill>
-              <a:srgbClr val="FFFFFF"/>
+              <a:srgbClr val="ECD5B0"/>
             </a:solidFill>
             <a:prstDash val="solid"/>
           </a:ln>
           <a:effectLst>
             <a:outerShdw sx="100000" sy="100000" kx="0" ky="0" algn="bl" rotWithShape="0" blurRad="127000" dist="25400" dir="5400000">
               <a:srgbClr val="1E2B4A">
-                <a:alpha val="18000"/>
+                <a:alpha val="8000"/>
               </a:srgbClr>
             </a:outerShdw>
           </a:effectLst>
@@ -4585,18 +4585,18 @@
             <a:avLst/>
           </a:prstGeom>
           <a:solidFill>
-            <a:srgbClr val="3E8C9A"/>
+            <a:srgbClr val="E0EDEF"/>
           </a:solidFill>
-          <a:ln w="31750">
+          <a:ln w="15875">
             <a:solidFill>
-              <a:srgbClr val="FFFFFF"/>
+              <a:srgbClr val="BAD6DB"/>
             </a:solidFill>
             <a:prstDash val="solid"/>
           </a:ln>
           <a:effectLst>
             <a:outerShdw sx="100000" sy="100000" kx="0" ky="0" algn="bl" rotWithShape="0" blurRad="127000" dist="25400" dir="5400000">
               <a:srgbClr val="1E2B4A">
-                <a:alpha val="18000"/>
+                <a:alpha val="8000"/>
               </a:srgbClr>
             </a:outerShdw>
           </a:effectLst>
@@ -4712,18 +4712,18 @@
             <a:avLst/>
           </a:prstGeom>
           <a:solidFill>
-            <a:srgbClr val="41639E"/>
+            <a:srgbClr val="E1E6EF"/>
           </a:solidFill>
-          <a:ln w="31750">
+          <a:ln w="15875">
             <a:solidFill>
-              <a:srgbClr val="FFFFFF"/>
+              <a:srgbClr val="BBC7DC"/>
             </a:solidFill>
             <a:prstDash val="solid"/>
           </a:ln>
           <a:effectLst>
             <a:outerShdw sx="100000" sy="100000" kx="0" ky="0" algn="bl" rotWithShape="0" blurRad="127000" dist="25400" dir="5400000">
               <a:srgbClr val="1E2B4A">
-                <a:alpha val="18000"/>
+                <a:alpha val="8000"/>
               </a:srgbClr>
             </a:outerShdw>
           </a:effectLst>
@@ -6048,18 +6048,18 @@
             <a:avLst/>
           </a:prstGeom>
           <a:solidFill>
-            <a:srgbClr val="3E8C9A"/>
+            <a:srgbClr val="E0EDEF"/>
           </a:solidFill>
-          <a:ln w="31750">
+          <a:ln w="15875">
             <a:solidFill>
-              <a:srgbClr val="FFFFFF"/>
+              <a:srgbClr val="BAD6DB"/>
             </a:solidFill>
             <a:prstDash val="solid"/>
           </a:ln>
           <a:effectLst>
             <a:outerShdw sx="100000" sy="100000" kx="0" ky="0" algn="bl" rotWithShape="0" blurRad="127000" dist="25400" dir="5400000">
               <a:srgbClr val="1E2B4A">
-                <a:alpha val="18000"/>
+                <a:alpha val="8000"/>
               </a:srgbClr>
             </a:outerShdw>
           </a:effectLst>
@@ -6214,18 +6214,18 @@
             <a:avLst/>
           </a:prstGeom>
           <a:solidFill>
-            <a:srgbClr val="C98A24"/>
+            <a:srgbClr val="F6ECDC"/>
           </a:solidFill>
-          <a:ln w="31750">
+          <a:ln w="15875">
             <a:solidFill>
-              <a:srgbClr val="FFFFFF"/>
+              <a:srgbClr val="ECD5B0"/>
             </a:solidFill>
             <a:prstDash val="solid"/>
           </a:ln>
           <a:effectLst>
             <a:outerShdw sx="100000" sy="100000" kx="0" ky="0" algn="bl" rotWithShape="0" blurRad="127000" dist="25400" dir="5400000">
               <a:srgbClr val="1E2B4A">
-                <a:alpha val="18000"/>
+                <a:alpha val="8000"/>
               </a:srgbClr>
             </a:outerShdw>
           </a:effectLst>
@@ -6953,18 +6953,18 @@
             <a:avLst/>
           </a:prstGeom>
           <a:solidFill>
-            <a:srgbClr val="41639E"/>
+            <a:srgbClr val="E1E6EF"/>
           </a:solidFill>
-          <a:ln w="31750">
+          <a:ln w="15875">
             <a:solidFill>
-              <a:srgbClr val="FFFFFF"/>
+              <a:srgbClr val="BBC7DC"/>
             </a:solidFill>
             <a:prstDash val="solid"/>
           </a:ln>
           <a:effectLst>
             <a:outerShdw sx="100000" sy="100000" kx="0" ky="0" algn="bl" rotWithShape="0" blurRad="127000" dist="25400" dir="5400000">
               <a:srgbClr val="1E2B4A">
-                <a:alpha val="18000"/>
+                <a:alpha val="8000"/>
               </a:srgbClr>
             </a:outerShdw>
           </a:effectLst>
@@ -7158,18 +7158,18 @@
             <a:avLst/>
           </a:prstGeom>
           <a:solidFill>
-            <a:srgbClr val="3E8C9A"/>
+            <a:srgbClr val="E0EDEF"/>
           </a:solidFill>
-          <a:ln w="31750">
+          <a:ln w="15875">
             <a:solidFill>
-              <a:srgbClr val="FFFFFF"/>
+              <a:srgbClr val="BAD6DB"/>
             </a:solidFill>
             <a:prstDash val="solid"/>
           </a:ln>
           <a:effectLst>
             <a:outerShdw sx="100000" sy="100000" kx="0" ky="0" algn="bl" rotWithShape="0" blurRad="127000" dist="25400" dir="5400000">
               <a:srgbClr val="1E2B4A">
-                <a:alpha val="18000"/>
+                <a:alpha val="8000"/>
               </a:srgbClr>
             </a:outerShdw>
           </a:effectLst>
@@ -7363,18 +7363,18 @@
             <a:avLst/>
           </a:prstGeom>
           <a:solidFill>
-            <a:srgbClr val="D96F2B"/>
+            <a:srgbClr val="F9E8DD"/>
           </a:solidFill>
-          <a:ln w="31750">
+          <a:ln w="15875">
             <a:solidFill>
-              <a:srgbClr val="FFFFFF"/>
+              <a:srgbClr val="F1CBB3"/>
             </a:solidFill>
             <a:prstDash val="solid"/>
           </a:ln>
           <a:effectLst>
             <a:outerShdw sx="100000" sy="100000" kx="0" ky="0" algn="bl" rotWithShape="0" blurRad="127000" dist="25400" dir="5400000">
               <a:srgbClr val="1E2B4A">
-                <a:alpha val="18000"/>
+                <a:alpha val="8000"/>
               </a:srgbClr>
             </a:outerShdw>
           </a:effectLst>
@@ -13163,18 +13163,18 @@
             <a:avLst/>
           </a:prstGeom>
           <a:solidFill>
-            <a:srgbClr val="D96F2B"/>
+            <a:srgbClr val="F9E8DD"/>
           </a:solidFill>
-          <a:ln w="31750">
+          <a:ln w="15875">
             <a:solidFill>
-              <a:srgbClr val="FFFFFF"/>
+              <a:srgbClr val="F1CBB3"/>
             </a:solidFill>
             <a:prstDash val="solid"/>
           </a:ln>
           <a:effectLst>
             <a:outerShdw sx="100000" sy="100000" kx="0" ky="0" algn="bl" rotWithShape="0" blurRad="127000" dist="25400" dir="5400000">
               <a:srgbClr val="1E2B4A">
-                <a:alpha val="18000"/>
+                <a:alpha val="8000"/>
               </a:srgbClr>
             </a:outerShdw>
           </a:effectLst>
@@ -15373,18 +15373,18 @@
             <a:avLst/>
           </a:prstGeom>
           <a:solidFill>
-            <a:srgbClr val="41639E"/>
+            <a:srgbClr val="E1E6EF"/>
           </a:solidFill>
-          <a:ln w="31750">
+          <a:ln w="15875">
             <a:solidFill>
-              <a:srgbClr val="FFFFFF"/>
+              <a:srgbClr val="BBC7DC"/>
             </a:solidFill>
             <a:prstDash val="solid"/>
           </a:ln>
           <a:effectLst>
             <a:outerShdw sx="100000" sy="100000" kx="0" ky="0" algn="bl" rotWithShape="0" blurRad="127000" dist="25400" dir="5400000">
               <a:srgbClr val="1E2B4A">
-                <a:alpha val="18000"/>
+                <a:alpha val="8000"/>
               </a:srgbClr>
             </a:outerShdw>
           </a:effectLst>
@@ -15575,18 +15575,18 @@
             <a:avLst/>
           </a:prstGeom>
           <a:solidFill>
-            <a:srgbClr val="D96F2B"/>
+            <a:srgbClr val="F9E8DD"/>
           </a:solidFill>
-          <a:ln w="31750">
+          <a:ln w="15875">
             <a:solidFill>
-              <a:srgbClr val="FFFFFF"/>
+              <a:srgbClr val="F1CBB3"/>
             </a:solidFill>
             <a:prstDash val="solid"/>
           </a:ln>
           <a:effectLst>
             <a:outerShdw sx="100000" sy="100000" kx="0" ky="0" algn="bl" rotWithShape="0" blurRad="127000" dist="25400" dir="5400000">
               <a:srgbClr val="1E2B4A">
-                <a:alpha val="18000"/>
+                <a:alpha val="8000"/>
               </a:srgbClr>
             </a:outerShdw>
           </a:effectLst>
@@ -15777,18 +15777,18 @@
             <a:avLst/>
           </a:prstGeom>
           <a:solidFill>
-            <a:srgbClr val="3E8C9A"/>
+            <a:srgbClr val="E0EDEF"/>
           </a:solidFill>
-          <a:ln w="31750">
+          <a:ln w="15875">
             <a:solidFill>
-              <a:srgbClr val="FFFFFF"/>
+              <a:srgbClr val="BAD6DB"/>
             </a:solidFill>
             <a:prstDash val="solid"/>
           </a:ln>
           <a:effectLst>
             <a:outerShdw sx="100000" sy="100000" kx="0" ky="0" algn="bl" rotWithShape="0" blurRad="127000" dist="25400" dir="5400000">
               <a:srgbClr val="1E2B4A">
-                <a:alpha val="18000"/>
+                <a:alpha val="8000"/>
               </a:srgbClr>
             </a:outerShdw>
           </a:effectLst>
@@ -15979,18 +15979,18 @@
             <a:avLst/>
           </a:prstGeom>
           <a:solidFill>
-            <a:srgbClr val="C98A24"/>
+            <a:srgbClr val="F6ECDC"/>
           </a:solidFill>
-          <a:ln w="31750">
+          <a:ln w="15875">
             <a:solidFill>
-              <a:srgbClr val="FFFFFF"/>
+              <a:srgbClr val="ECD5B0"/>
             </a:solidFill>
             <a:prstDash val="solid"/>
           </a:ln>
           <a:effectLst>
             <a:outerShdw sx="100000" sy="100000" kx="0" ky="0" algn="bl" rotWithShape="0" blurRad="127000" dist="25400" dir="5400000">
               <a:srgbClr val="1E2B4A">
-                <a:alpha val="18000"/>
+                <a:alpha val="8000"/>
               </a:srgbClr>
             </a:outerShdw>
           </a:effectLst>
@@ -16181,18 +16181,18 @@
             <a:avLst/>
           </a:prstGeom>
           <a:solidFill>
-            <a:srgbClr val="41639E"/>
+            <a:srgbClr val="E1E6EF"/>
           </a:solidFill>
-          <a:ln w="31750">
+          <a:ln w="15875">
             <a:solidFill>
-              <a:srgbClr val="FFFFFF"/>
+              <a:srgbClr val="BBC7DC"/>
             </a:solidFill>
             <a:prstDash val="solid"/>
           </a:ln>
           <a:effectLst>
             <a:outerShdw sx="100000" sy="100000" kx="0" ky="0" algn="bl" rotWithShape="0" blurRad="127000" dist="25400" dir="5400000">
               <a:srgbClr val="1E2B4A">
-                <a:alpha val="18000"/>
+                <a:alpha val="8000"/>
               </a:srgbClr>
             </a:outerShdw>
           </a:effectLst>
@@ -16383,18 +16383,18 @@
             <a:avLst/>
           </a:prstGeom>
           <a:solidFill>
-            <a:srgbClr val="D96F2B"/>
+            <a:srgbClr val="F9E8DD"/>
           </a:solidFill>
-          <a:ln w="31750">
+          <a:ln w="15875">
             <a:solidFill>
-              <a:srgbClr val="FFFFFF"/>
+              <a:srgbClr val="F1CBB3"/>
             </a:solidFill>
             <a:prstDash val="solid"/>
           </a:ln>
           <a:effectLst>
             <a:outerShdw sx="100000" sy="100000" kx="0" ky="0" algn="bl" rotWithShape="0" blurRad="127000" dist="25400" dir="5400000">
               <a:srgbClr val="1E2B4A">
-                <a:alpha val="18000"/>
+                <a:alpha val="8000"/>
               </a:srgbClr>
             </a:outerShdw>
           </a:effectLst>
@@ -16719,18 +16719,18 @@
             <a:avLst/>
           </a:prstGeom>
           <a:solidFill>
-            <a:srgbClr val="41639E"/>
+            <a:srgbClr val="E1E6EF"/>
           </a:solidFill>
-          <a:ln w="31750">
+          <a:ln w="15875">
             <a:solidFill>
-              <a:srgbClr val="FFFFFF"/>
+              <a:srgbClr val="BBC7DC"/>
             </a:solidFill>
             <a:prstDash val="solid"/>
           </a:ln>
           <a:effectLst>
             <a:outerShdw sx="100000" sy="100000" kx="0" ky="0" algn="bl" rotWithShape="0" blurRad="127000" dist="25400" dir="5400000">
               <a:srgbClr val="1E2B4A">
-                <a:alpha val="18000"/>
+                <a:alpha val="8000"/>
               </a:srgbClr>
             </a:outerShdw>
           </a:effectLst>
@@ -16924,18 +16924,18 @@
             <a:avLst/>
           </a:prstGeom>
           <a:solidFill>
-            <a:srgbClr val="3E8C9A"/>
+            <a:srgbClr val="E0EDEF"/>
           </a:solidFill>
-          <a:ln w="31750">
+          <a:ln w="15875">
             <a:solidFill>
-              <a:srgbClr val="FFFFFF"/>
+              <a:srgbClr val="BAD6DB"/>
             </a:solidFill>
             <a:prstDash val="solid"/>
           </a:ln>
           <a:effectLst>
             <a:outerShdw sx="100000" sy="100000" kx="0" ky="0" algn="bl" rotWithShape="0" blurRad="127000" dist="25400" dir="5400000">
               <a:srgbClr val="1E2B4A">
-                <a:alpha val="18000"/>
+                <a:alpha val="8000"/>
               </a:srgbClr>
             </a:outerShdw>
           </a:effectLst>
@@ -17129,18 +17129,18 @@
             <a:avLst/>
           </a:prstGeom>
           <a:solidFill>
-            <a:srgbClr val="C98A24"/>
+            <a:srgbClr val="F6ECDC"/>
           </a:solidFill>
-          <a:ln w="31750">
+          <a:ln w="15875">
             <a:solidFill>
-              <a:srgbClr val="FFFFFF"/>
+              <a:srgbClr val="ECD5B0"/>
             </a:solidFill>
             <a:prstDash val="solid"/>
           </a:ln>
           <a:effectLst>
             <a:outerShdw sx="100000" sy="100000" kx="0" ky="0" algn="bl" rotWithShape="0" blurRad="127000" dist="25400" dir="5400000">
               <a:srgbClr val="1E2B4A">
-                <a:alpha val="18000"/>
+                <a:alpha val="8000"/>
               </a:srgbClr>
             </a:outerShdw>
           </a:effectLst>
@@ -17334,18 +17334,18 @@
             <a:avLst/>
           </a:prstGeom>
           <a:solidFill>
-            <a:srgbClr val="D96F2B"/>
+            <a:srgbClr val="F9E8DD"/>
           </a:solidFill>
-          <a:ln w="31750">
+          <a:ln w="15875">
             <a:solidFill>
-              <a:srgbClr val="FFFFFF"/>
+              <a:srgbClr val="F1CBB3"/>
             </a:solidFill>
             <a:prstDash val="solid"/>
           </a:ln>
           <a:effectLst>
             <a:outerShdw sx="100000" sy="100000" kx="0" ky="0" algn="bl" rotWithShape="0" blurRad="127000" dist="25400" dir="5400000">
               <a:srgbClr val="1E2B4A">
-                <a:alpha val="18000"/>
+                <a:alpha val="8000"/>
               </a:srgbClr>
             </a:outerShdw>
           </a:effectLst>
@@ -18094,18 +18094,18 @@
             <a:avLst/>
           </a:prstGeom>
           <a:solidFill>
-            <a:srgbClr val="D96F2B"/>
+            <a:srgbClr val="F9E8DD"/>
           </a:solidFill>
-          <a:ln w="31750">
+          <a:ln w="15875">
             <a:solidFill>
-              <a:srgbClr val="FFFFFF"/>
+              <a:srgbClr val="F1CBB3"/>
             </a:solidFill>
             <a:prstDash val="solid"/>
           </a:ln>
           <a:effectLst>
             <a:outerShdw sx="100000" sy="100000" kx="0" ky="0" algn="bl" rotWithShape="0" blurRad="127000" dist="25400" dir="5400000">
               <a:srgbClr val="1E2B4A">
-                <a:alpha val="18000"/>
+                <a:alpha val="8000"/>
               </a:srgbClr>
             </a:outerShdw>
           </a:effectLst>
@@ -18150,18 +18150,18 @@
             <a:avLst/>
           </a:prstGeom>
           <a:solidFill>
-            <a:srgbClr val="3E8C9A"/>
+            <a:srgbClr val="E0EDEF"/>
           </a:solidFill>
-          <a:ln w="31750">
+          <a:ln w="15875">
             <a:solidFill>
-              <a:srgbClr val="FFFFFF"/>
+              <a:srgbClr val="BAD6DB"/>
             </a:solidFill>
             <a:prstDash val="solid"/>
           </a:ln>
           <a:effectLst>
             <a:outerShdw sx="100000" sy="100000" kx="0" ky="0" algn="bl" rotWithShape="0" blurRad="127000" dist="25400" dir="5400000">
               <a:srgbClr val="1E2B4A">
-                <a:alpha val="18000"/>
+                <a:alpha val="8000"/>
               </a:srgbClr>
             </a:outerShdw>
           </a:effectLst>
@@ -18411,18 +18411,18 @@
             <a:avLst/>
           </a:prstGeom>
           <a:solidFill>
-            <a:srgbClr val="C98A24"/>
+            <a:srgbClr val="F6ECDC"/>
           </a:solidFill>
-          <a:ln w="31750">
+          <a:ln w="15875">
             <a:solidFill>
-              <a:srgbClr val="FFFFFF"/>
+              <a:srgbClr val="ECD5B0"/>
             </a:solidFill>
             <a:prstDash val="solid"/>
           </a:ln>
           <a:effectLst>
             <a:outerShdw sx="100000" sy="100000" kx="0" ky="0" algn="bl" rotWithShape="0" blurRad="127000" dist="25400" dir="5400000">
               <a:srgbClr val="1E2B4A">
-                <a:alpha val="18000"/>
+                <a:alpha val="8000"/>
               </a:srgbClr>
             </a:outerShdw>
           </a:effectLst>
@@ -18580,18 +18580,18 @@
             <a:avLst/>
           </a:prstGeom>
           <a:solidFill>
-            <a:srgbClr val="41639E"/>
+            <a:srgbClr val="E1E6EF"/>
           </a:solidFill>
-          <a:ln w="31750">
+          <a:ln w="15875">
             <a:solidFill>
-              <a:srgbClr val="FFFFFF"/>
+              <a:srgbClr val="BBC7DC"/>
             </a:solidFill>
             <a:prstDash val="solid"/>
           </a:ln>
           <a:effectLst>
             <a:outerShdw sx="100000" sy="100000" kx="0" ky="0" algn="bl" rotWithShape="0" blurRad="127000" dist="25400" dir="5400000">
               <a:srgbClr val="1E2B4A">
-                <a:alpha val="18000"/>
+                <a:alpha val="8000"/>
               </a:srgbClr>
             </a:outerShdw>
           </a:effectLst>
@@ -18749,18 +18749,18 @@
             <a:avLst/>
           </a:prstGeom>
           <a:solidFill>
-            <a:srgbClr val="3E8C9A"/>
+            <a:srgbClr val="E0EDEF"/>
           </a:solidFill>
-          <a:ln w="31750">
+          <a:ln w="15875">
             <a:solidFill>
-              <a:srgbClr val="FFFFFF"/>
+              <a:srgbClr val="BAD6DB"/>
             </a:solidFill>
             <a:prstDash val="solid"/>
           </a:ln>
           <a:effectLst>
             <a:outerShdw sx="100000" sy="100000" kx="0" ky="0" algn="bl" rotWithShape="0" blurRad="127000" dist="25400" dir="5400000">
               <a:srgbClr val="1E2B4A">
-                <a:alpha val="18000"/>
+                <a:alpha val="8000"/>
               </a:srgbClr>
             </a:outerShdw>
           </a:effectLst>
@@ -19052,18 +19052,18 @@
             <a:avLst/>
           </a:prstGeom>
           <a:solidFill>
-            <a:srgbClr val="D96F2B"/>
+            <a:srgbClr val="F9E8DD"/>
           </a:solidFill>
-          <a:ln w="31750">
+          <a:ln w="15875">
             <a:solidFill>
-              <a:srgbClr val="FFFFFF"/>
+              <a:srgbClr val="F1CBB3"/>
             </a:solidFill>
             <a:prstDash val="solid"/>
           </a:ln>
           <a:effectLst>
             <a:outerShdw sx="100000" sy="100000" kx="0" ky="0" algn="bl" rotWithShape="0" blurRad="127000" dist="25400" dir="5400000">
               <a:srgbClr val="1E2B4A">
-                <a:alpha val="18000"/>
+                <a:alpha val="8000"/>
               </a:srgbClr>
             </a:outerShdw>
           </a:effectLst>
@@ -19338,18 +19338,18 @@
             <a:avLst/>
           </a:prstGeom>
           <a:solidFill>
-            <a:srgbClr val="3E8C9A"/>
+            <a:srgbClr val="E0EDEF"/>
           </a:solidFill>
-          <a:ln w="31750">
+          <a:ln w="15875">
             <a:solidFill>
-              <a:srgbClr val="FFFFFF"/>
+              <a:srgbClr val="BAD6DB"/>
             </a:solidFill>
             <a:prstDash val="solid"/>
           </a:ln>
           <a:effectLst>
             <a:outerShdw sx="100000" sy="100000" kx="0" ky="0" algn="bl" rotWithShape="0" blurRad="127000" dist="25400" dir="5400000">
               <a:srgbClr val="1E2B4A">
-                <a:alpha val="18000"/>
+                <a:alpha val="8000"/>
               </a:srgbClr>
             </a:outerShdw>
           </a:effectLst>
@@ -20934,18 +20934,18 @@
             <a:avLst/>
           </a:prstGeom>
           <a:solidFill>
-            <a:srgbClr val="C98A24"/>
+            <a:srgbClr val="F6ECDC"/>
           </a:solidFill>
-          <a:ln w="31750">
+          <a:ln w="15875">
             <a:solidFill>
-              <a:srgbClr val="FFFFFF"/>
+              <a:srgbClr val="ECD5B0"/>
             </a:solidFill>
             <a:prstDash val="solid"/>
           </a:ln>
           <a:effectLst>
             <a:outerShdw sx="100000" sy="100000" kx="0" ky="0" algn="bl" rotWithShape="0" blurRad="127000" dist="25400" dir="5400000">
               <a:srgbClr val="1E2B4A">
-                <a:alpha val="18000"/>
+                <a:alpha val="8000"/>
               </a:srgbClr>
             </a:outerShdw>
           </a:effectLst>
@@ -21103,18 +21103,18 @@
             <a:avLst/>
           </a:prstGeom>
           <a:solidFill>
-            <a:srgbClr val="41639E"/>
+            <a:srgbClr val="E1E6EF"/>
           </a:solidFill>
-          <a:ln w="31750">
+          <a:ln w="15875">
             <a:solidFill>
-              <a:srgbClr val="FFFFFF"/>
+              <a:srgbClr val="BBC7DC"/>
             </a:solidFill>
             <a:prstDash val="solid"/>
           </a:ln>
           <a:effectLst>
             <a:outerShdw sx="100000" sy="100000" kx="0" ky="0" algn="bl" rotWithShape="0" blurRad="127000" dist="25400" dir="5400000">
               <a:srgbClr val="1E2B4A">
-                <a:alpha val="18000"/>
+                <a:alpha val="8000"/>
               </a:srgbClr>
             </a:outerShdw>
           </a:effectLst>
@@ -21272,18 +21272,18 @@
             <a:avLst/>
           </a:prstGeom>
           <a:solidFill>
-            <a:srgbClr val="3E8C9A"/>
+            <a:srgbClr val="E0EDEF"/>
           </a:solidFill>
-          <a:ln w="31750">
+          <a:ln w="15875">
             <a:solidFill>
-              <a:srgbClr val="FFFFFF"/>
+              <a:srgbClr val="BAD6DB"/>
             </a:solidFill>
             <a:prstDash val="solid"/>
           </a:ln>
           <a:effectLst>
             <a:outerShdw sx="100000" sy="100000" kx="0" ky="0" algn="bl" rotWithShape="0" blurRad="127000" dist="25400" dir="5400000">
               <a:srgbClr val="1E2B4A">
-                <a:alpha val="18000"/>
+                <a:alpha val="8000"/>
               </a:srgbClr>
             </a:outerShdw>
           </a:effectLst>
@@ -21956,18 +21956,18 @@
             <a:avLst/>
           </a:prstGeom>
           <a:solidFill>
-            <a:srgbClr val="41639E"/>
+            <a:srgbClr val="E1E6EF"/>
           </a:solidFill>
-          <a:ln w="31750">
+          <a:ln w="15875">
             <a:solidFill>
-              <a:srgbClr val="FFFFFF"/>
+              <a:srgbClr val="BBC7DC"/>
             </a:solidFill>
             <a:prstDash val="solid"/>
           </a:ln>
           <a:effectLst>
             <a:outerShdw sx="100000" sy="100000" kx="0" ky="0" algn="bl" rotWithShape="0" blurRad="127000" dist="25400" dir="5400000">
               <a:srgbClr val="1E2B4A">
-                <a:alpha val="18000"/>
+                <a:alpha val="8000"/>
               </a:srgbClr>
             </a:outerShdw>
           </a:effectLst>
@@ -22366,18 +22366,18 @@
             <a:avLst/>
           </a:prstGeom>
           <a:solidFill>
-            <a:srgbClr val="D96F2B"/>
+            <a:srgbClr val="F9E8DD"/>
           </a:solidFill>
-          <a:ln w="31750">
+          <a:ln w="15875">
             <a:solidFill>
-              <a:srgbClr val="FFFFFF"/>
+              <a:srgbClr val="F1CBB3"/>
             </a:solidFill>
             <a:prstDash val="solid"/>
           </a:ln>
           <a:effectLst>
             <a:outerShdw sx="100000" sy="100000" kx="0" ky="0" algn="bl" rotWithShape="0" blurRad="127000" dist="25400" dir="5400000">
               <a:srgbClr val="1E2B4A">
-                <a:alpha val="18000"/>
+                <a:alpha val="8000"/>
               </a:srgbClr>
             </a:outerShdw>
           </a:effectLst>
@@ -23311,18 +23311,18 @@
             <a:avLst/>
           </a:prstGeom>
           <a:solidFill>
-            <a:srgbClr val="D96F2B"/>
+            <a:srgbClr val="F9E8DD"/>
           </a:solidFill>
-          <a:ln w="31750">
+          <a:ln w="15875">
             <a:solidFill>
-              <a:srgbClr val="FFFFFF"/>
+              <a:srgbClr val="F1CBB3"/>
             </a:solidFill>
             <a:prstDash val="solid"/>
           </a:ln>
           <a:effectLst>
             <a:outerShdw sx="100000" sy="100000" kx="0" ky="0" algn="bl" rotWithShape="0" blurRad="127000" dist="25400" dir="5400000">
               <a:srgbClr val="1E2B4A">
-                <a:alpha val="18000"/>
+                <a:alpha val="8000"/>
               </a:srgbClr>
             </a:outerShdw>
           </a:effectLst>
@@ -23367,18 +23367,18 @@
             <a:avLst/>
           </a:prstGeom>
           <a:solidFill>
-            <a:srgbClr val="C98A24"/>
+            <a:srgbClr val="F6ECDC"/>
           </a:solidFill>
-          <a:ln w="31750">
+          <a:ln w="15875">
             <a:solidFill>
-              <a:srgbClr val="FFFFFF"/>
+              <a:srgbClr val="ECD5B0"/>
             </a:solidFill>
             <a:prstDash val="solid"/>
           </a:ln>
           <a:effectLst>
             <a:outerShdw sx="100000" sy="100000" kx="0" ky="0" algn="bl" rotWithShape="0" blurRad="127000" dist="25400" dir="5400000">
               <a:srgbClr val="1E2B4A">
-                <a:alpha val="18000"/>
+                <a:alpha val="8000"/>
               </a:srgbClr>
             </a:outerShdw>
           </a:effectLst>
@@ -23423,18 +23423,18 @@
             <a:avLst/>
           </a:prstGeom>
           <a:solidFill>
-            <a:srgbClr val="3E8C9A"/>
+            <a:srgbClr val="E0EDEF"/>
           </a:solidFill>
-          <a:ln w="31750">
+          <a:ln w="15875">
             <a:solidFill>
-              <a:srgbClr val="FFFFFF"/>
+              <a:srgbClr val="BAD6DB"/>
             </a:solidFill>
             <a:prstDash val="solid"/>
           </a:ln>
           <a:effectLst>
             <a:outerShdw sx="100000" sy="100000" kx="0" ky="0" algn="bl" rotWithShape="0" blurRad="127000" dist="25400" dir="5400000">
               <a:srgbClr val="1E2B4A">
-                <a:alpha val="18000"/>
+                <a:alpha val="8000"/>
               </a:srgbClr>
             </a:outerShdw>
           </a:effectLst>
@@ -23642,18 +23642,18 @@
             <a:avLst/>
           </a:prstGeom>
           <a:solidFill>
-            <a:srgbClr val="41639E"/>
+            <a:srgbClr val="E1E6EF"/>
           </a:solidFill>
-          <a:ln w="31750">
+          <a:ln w="15875">
             <a:solidFill>
-              <a:srgbClr val="FFFFFF"/>
+              <a:srgbClr val="BBC7DC"/>
             </a:solidFill>
             <a:prstDash val="solid"/>
           </a:ln>
           <a:effectLst>
             <a:outerShdw sx="100000" sy="100000" kx="0" ky="0" algn="bl" rotWithShape="0" blurRad="127000" dist="25400" dir="5400000">
               <a:srgbClr val="1E2B4A">
-                <a:alpha val="18000"/>
+                <a:alpha val="8000"/>
               </a:srgbClr>
             </a:outerShdw>
           </a:effectLst>
@@ -24010,18 +24010,18 @@
             <a:avLst/>
           </a:prstGeom>
           <a:solidFill>
-            <a:srgbClr val="D96F2B"/>
+            <a:srgbClr val="F9E8DD"/>
           </a:solidFill>
-          <a:ln w="31750">
+          <a:ln w="15875">
             <a:solidFill>
-              <a:srgbClr val="FFFFFF"/>
+              <a:srgbClr val="F1CBB3"/>
             </a:solidFill>
             <a:prstDash val="solid"/>
           </a:ln>
           <a:effectLst>
             <a:outerShdw sx="100000" sy="100000" kx="0" ky="0" algn="bl" rotWithShape="0" blurRad="127000" dist="25400" dir="5400000">
               <a:srgbClr val="1E2B4A">
-                <a:alpha val="18000"/>
+                <a:alpha val="8000"/>
               </a:srgbClr>
             </a:outerShdw>
           </a:effectLst>
@@ -25567,18 +25567,18 @@
             <a:avLst/>
           </a:prstGeom>
           <a:solidFill>
-            <a:srgbClr val="41639E"/>
+            <a:srgbClr val="E1E6EF"/>
           </a:solidFill>
-          <a:ln w="31750">
+          <a:ln w="15875">
             <a:solidFill>
-              <a:srgbClr val="FFFFFF"/>
+              <a:srgbClr val="BBC7DC"/>
             </a:solidFill>
             <a:prstDash val="solid"/>
           </a:ln>
           <a:effectLst>
             <a:outerShdw sx="100000" sy="100000" kx="0" ky="0" algn="bl" rotWithShape="0" blurRad="127000" dist="25400" dir="5400000">
               <a:srgbClr val="1E2B4A">
-                <a:alpha val="18000"/>
+                <a:alpha val="8000"/>
               </a:srgbClr>
             </a:outerShdw>
           </a:effectLst>
@@ -25623,18 +25623,18 @@
             <a:avLst/>
           </a:prstGeom>
           <a:solidFill>
-            <a:srgbClr val="C98A24"/>
+            <a:srgbClr val="F6ECDC"/>
           </a:solidFill>
-          <a:ln w="31750">
+          <a:ln w="15875">
             <a:solidFill>
-              <a:srgbClr val="FFFFFF"/>
+              <a:srgbClr val="ECD5B0"/>
             </a:solidFill>
             <a:prstDash val="solid"/>
           </a:ln>
           <a:effectLst>
             <a:outerShdw sx="100000" sy="100000" kx="0" ky="0" algn="bl" rotWithShape="0" blurRad="127000" dist="25400" dir="5400000">
               <a:srgbClr val="1E2B4A">
-                <a:alpha val="18000"/>
+                <a:alpha val="8000"/>
               </a:srgbClr>
             </a:outerShdw>
           </a:effectLst>
@@ -25679,18 +25679,18 @@
             <a:avLst/>
           </a:prstGeom>
           <a:solidFill>
-            <a:srgbClr val="D96F2B"/>
+            <a:srgbClr val="F9E8DD"/>
           </a:solidFill>
-          <a:ln w="31750">
+          <a:ln w="15875">
             <a:solidFill>
-              <a:srgbClr val="FFFFFF"/>
+              <a:srgbClr val="F1CBB3"/>
             </a:solidFill>
             <a:prstDash val="solid"/>
           </a:ln>
           <a:effectLst>
             <a:outerShdw sx="100000" sy="100000" kx="0" ky="0" algn="bl" rotWithShape="0" blurRad="127000" dist="25400" dir="5400000">
               <a:srgbClr val="1E2B4A">
-                <a:alpha val="18000"/>
+                <a:alpha val="8000"/>
               </a:srgbClr>
             </a:outerShdw>
           </a:effectLst>

--- a/infographie/presentation_infographique.pptx
+++ b/infographie/presentation_infographique.pptx
@@ -5020,7 +5020,7 @@
             <a:r>
               <a:rPr lang="en-US" sz="1250" b="1" dirty="0">
                 <a:solidFill>
-                  <a:srgbClr val="D96F2B"/>
+                  <a:srgbClr val="1D2433"/>
                 </a:solidFill>
                 <a:latin typeface="Calibri" pitchFamily="34" charset="0"/>
                 <a:ea typeface="Calibri" pitchFamily="34" charset="-122"/>
@@ -5098,7 +5098,7 @@
             <a:r>
               <a:rPr lang="en-US" sz="1250" b="1" dirty="0">
                 <a:solidFill>
-                  <a:srgbClr val="D96F2B"/>
+                  <a:srgbClr val="1D2433"/>
                 </a:solidFill>
                 <a:latin typeface="Calibri" pitchFamily="34" charset="0"/>
                 <a:ea typeface="Calibri" pitchFamily="34" charset="-122"/>
@@ -5176,7 +5176,7 @@
             <a:r>
               <a:rPr lang="en-US" sz="1250" b="1" dirty="0">
                 <a:solidFill>
-                  <a:srgbClr val="D96F2B"/>
+                  <a:srgbClr val="1D2433"/>
                 </a:solidFill>
                 <a:latin typeface="Calibri" pitchFamily="34" charset="0"/>
                 <a:ea typeface="Calibri" pitchFamily="34" charset="-122"/>
@@ -5540,7 +5540,7 @@
             <a:r>
               <a:rPr lang="en-US" sz="3200" b="1" dirty="0">
                 <a:solidFill>
-                  <a:srgbClr val="41639E"/>
+                  <a:srgbClr val="1E2B4A"/>
                 </a:solidFill>
                 <a:latin typeface="Calibri" pitchFamily="34" charset="0"/>
                 <a:ea typeface="Calibri" pitchFamily="34" charset="-122"/>
@@ -5670,7 +5670,7 @@
             <a:r>
               <a:rPr lang="en-US" sz="3200" b="1" dirty="0">
                 <a:solidFill>
-                  <a:srgbClr val="41639E"/>
+                  <a:srgbClr val="1E2B4A"/>
                 </a:solidFill>
                 <a:latin typeface="Calibri" pitchFamily="34" charset="0"/>
                 <a:ea typeface="Calibri" pitchFamily="34" charset="-122"/>
@@ -5800,7 +5800,7 @@
             <a:r>
               <a:rPr lang="en-US" sz="3200" b="1" dirty="0">
                 <a:solidFill>
-                  <a:srgbClr val="D96F2B"/>
+                  <a:srgbClr val="1E2B4A"/>
                 </a:solidFill>
                 <a:latin typeface="Calibri" pitchFamily="34" charset="0"/>
                 <a:ea typeface="Calibri" pitchFamily="34" charset="-122"/>
@@ -5930,7 +5930,7 @@
             <a:r>
               <a:rPr lang="en-US" sz="3200" b="1" dirty="0">
                 <a:solidFill>
-                  <a:srgbClr val="D96F2B"/>
+                  <a:srgbClr val="1E2B4A"/>
                 </a:solidFill>
                 <a:latin typeface="Calibri" pitchFamily="34" charset="0"/>
                 <a:ea typeface="Calibri" pitchFamily="34" charset="-122"/>
@@ -9605,7 +9605,7 @@
             <a:r>
               <a:rPr lang="en-US" sz="3000" b="1" dirty="0">
                 <a:solidFill>
-                  <a:srgbClr val="8A93A5"/>
+                  <a:srgbClr val="1E2B4A"/>
                 </a:solidFill>
                 <a:latin typeface="Calibri" pitchFamily="34" charset="0"/>
                 <a:ea typeface="Calibri" pitchFamily="34" charset="-122"/>
@@ -9735,7 +9735,7 @@
             <a:r>
               <a:rPr lang="en-US" sz="3000" b="1" dirty="0">
                 <a:solidFill>
-                  <a:srgbClr val="3E8C9A"/>
+                  <a:srgbClr val="1E2B4A"/>
                 </a:solidFill>
                 <a:latin typeface="Calibri" pitchFamily="34" charset="0"/>
                 <a:ea typeface="Calibri" pitchFamily="34" charset="-122"/>
@@ -9865,7 +9865,7 @@
             <a:r>
               <a:rPr lang="en-US" sz="3000" b="1" dirty="0">
                 <a:solidFill>
-                  <a:srgbClr val="41639E"/>
+                  <a:srgbClr val="1E2B4A"/>
                 </a:solidFill>
                 <a:latin typeface="Calibri" pitchFamily="34" charset="0"/>
                 <a:ea typeface="Calibri" pitchFamily="34" charset="-122"/>
@@ -9995,7 +9995,7 @@
             <a:r>
               <a:rPr lang="en-US" sz="3000" b="1" dirty="0">
                 <a:solidFill>
-                  <a:srgbClr val="41639E"/>
+                  <a:srgbClr val="1E2B4A"/>
                 </a:solidFill>
                 <a:latin typeface="Calibri" pitchFamily="34" charset="0"/>
                 <a:ea typeface="Calibri" pitchFamily="34" charset="-122"/>
@@ -12468,7 +12468,7 @@
             <a:r>
               <a:rPr lang="en-US" sz="1200" b="1" dirty="0">
                 <a:solidFill>
-                  <a:srgbClr val="D96F2B"/>
+                  <a:srgbClr val="1D2433"/>
                 </a:solidFill>
                 <a:latin typeface="Calibri" pitchFamily="34" charset="0"/>
                 <a:ea typeface="Calibri" pitchFamily="34" charset="-122"/>
@@ -12607,7 +12607,7 @@
             <a:r>
               <a:rPr lang="en-US" sz="1200" b="1" dirty="0">
                 <a:solidFill>
-                  <a:srgbClr val="4A5468"/>
+                  <a:srgbClr val="1D2433"/>
                 </a:solidFill>
                 <a:latin typeface="Calibri" pitchFamily="34" charset="0"/>
                 <a:ea typeface="Calibri" pitchFamily="34" charset="-122"/>
@@ -12707,7 +12707,7 @@
             <a:r>
               <a:rPr lang="en-US" sz="1200" b="1" dirty="0">
                 <a:solidFill>
-                  <a:srgbClr val="4A5468"/>
+                  <a:srgbClr val="1D2433"/>
                 </a:solidFill>
                 <a:latin typeface="Calibri" pitchFamily="34" charset="0"/>
                 <a:ea typeface="Calibri" pitchFamily="34" charset="-122"/>
@@ -12807,7 +12807,7 @@
             <a:r>
               <a:rPr lang="en-US" sz="1200" b="1" dirty="0">
                 <a:solidFill>
-                  <a:srgbClr val="4A5468"/>
+                  <a:srgbClr val="1D2433"/>
                 </a:solidFill>
                 <a:latin typeface="Calibri" pitchFamily="34" charset="0"/>
                 <a:ea typeface="Calibri" pitchFamily="34" charset="-122"/>
@@ -12907,7 +12907,7 @@
             <a:r>
               <a:rPr lang="en-US" sz="1200" b="1" dirty="0">
                 <a:solidFill>
-                  <a:srgbClr val="4A5468"/>
+                  <a:srgbClr val="1D2433"/>
                 </a:solidFill>
                 <a:latin typeface="Calibri" pitchFamily="34" charset="0"/>
                 <a:ea typeface="Calibri" pitchFamily="34" charset="-122"/>
@@ -13007,7 +13007,7 @@
             <a:r>
               <a:rPr lang="en-US" sz="1200" b="1" dirty="0">
                 <a:solidFill>
-                  <a:srgbClr val="4A5468"/>
+                  <a:srgbClr val="1D2433"/>
                 </a:solidFill>
                 <a:latin typeface="Calibri" pitchFamily="34" charset="0"/>
                 <a:ea typeface="Calibri" pitchFamily="34" charset="-122"/>
@@ -13107,7 +13107,7 @@
             <a:r>
               <a:rPr lang="en-US" sz="1200" b="1" dirty="0">
                 <a:solidFill>
-                  <a:srgbClr val="4A5468"/>
+                  <a:srgbClr val="1D2433"/>
                 </a:solidFill>
                 <a:latin typeface="Calibri" pitchFamily="34" charset="0"/>
                 <a:ea typeface="Calibri" pitchFamily="34" charset="-122"/>
@@ -13939,7 +13939,7 @@
             <a:r>
               <a:rPr lang="en-US" sz="1300" b="1" dirty="0">
                 <a:solidFill>
-                  <a:srgbClr val="D96F2B"/>
+                  <a:srgbClr val="1D2433"/>
                 </a:solidFill>
                 <a:latin typeface="Calibri" pitchFamily="34" charset="0"/>
                 <a:ea typeface="Calibri" pitchFamily="34" charset="-122"/>
@@ -14039,7 +14039,7 @@
             <a:r>
               <a:rPr lang="en-US" sz="1200" b="1" dirty="0">
                 <a:solidFill>
-                  <a:srgbClr val="D96F2B"/>
+                  <a:srgbClr val="1D2433"/>
                 </a:solidFill>
                 <a:latin typeface="Calibri" pitchFamily="34" charset="0"/>
                 <a:ea typeface="Calibri" pitchFamily="34" charset="-122"/>
@@ -14117,7 +14117,7 @@
             <a:r>
               <a:rPr lang="en-US" sz="1300" b="1" dirty="0">
                 <a:solidFill>
-                  <a:srgbClr val="D96F2B"/>
+                  <a:srgbClr val="1D2433"/>
                 </a:solidFill>
                 <a:latin typeface="Calibri" pitchFamily="34" charset="0"/>
                 <a:ea typeface="Calibri" pitchFamily="34" charset="-122"/>
@@ -14217,7 +14217,7 @@
             <a:r>
               <a:rPr lang="en-US" sz="1200" b="1" dirty="0">
                 <a:solidFill>
-                  <a:srgbClr val="D96F2B"/>
+                  <a:srgbClr val="1D2433"/>
                 </a:solidFill>
                 <a:latin typeface="Calibri" pitchFamily="34" charset="0"/>
                 <a:ea typeface="Calibri" pitchFamily="34" charset="-122"/>
@@ -14295,7 +14295,7 @@
             <a:r>
               <a:rPr lang="en-US" sz="1300" b="1" dirty="0">
                 <a:solidFill>
-                  <a:srgbClr val="4A5468"/>
+                  <a:srgbClr val="1D2433"/>
                 </a:solidFill>
                 <a:latin typeface="Calibri" pitchFamily="34" charset="0"/>
                 <a:ea typeface="Calibri" pitchFamily="34" charset="-122"/>
@@ -14395,7 +14395,7 @@
             <a:r>
               <a:rPr lang="en-US" sz="1200" b="1" dirty="0">
                 <a:solidFill>
-                  <a:srgbClr val="4A5468"/>
+                  <a:srgbClr val="1D2433"/>
                 </a:solidFill>
                 <a:latin typeface="Calibri" pitchFamily="34" charset="0"/>
                 <a:ea typeface="Calibri" pitchFamily="34" charset="-122"/>
@@ -14434,7 +14434,7 @@
             <a:r>
               <a:rPr lang="en-US" sz="1300" b="1" dirty="0">
                 <a:solidFill>
-                  <a:srgbClr val="4A5468"/>
+                  <a:srgbClr val="1D2433"/>
                 </a:solidFill>
                 <a:latin typeface="Calibri" pitchFamily="34" charset="0"/>
                 <a:ea typeface="Calibri" pitchFamily="34" charset="-122"/>
@@ -14534,7 +14534,7 @@
             <a:r>
               <a:rPr lang="en-US" sz="1200" b="1" dirty="0">
                 <a:solidFill>
-                  <a:srgbClr val="4A5468"/>
+                  <a:srgbClr val="1D2433"/>
                 </a:solidFill>
                 <a:latin typeface="Calibri" pitchFamily="34" charset="0"/>
                 <a:ea typeface="Calibri" pitchFamily="34" charset="-122"/>
@@ -14573,7 +14573,7 @@
             <a:r>
               <a:rPr lang="en-US" sz="1300" b="1" dirty="0">
                 <a:solidFill>
-                  <a:srgbClr val="4A5468"/>
+                  <a:srgbClr val="1D2433"/>
                 </a:solidFill>
                 <a:latin typeface="Calibri" pitchFamily="34" charset="0"/>
                 <a:ea typeface="Calibri" pitchFamily="34" charset="-122"/>
@@ -14673,7 +14673,7 @@
             <a:r>
               <a:rPr lang="en-US" sz="1200" b="1" dirty="0">
                 <a:solidFill>
-                  <a:srgbClr val="4A5468"/>
+                  <a:srgbClr val="1D2433"/>
                 </a:solidFill>
                 <a:latin typeface="Calibri" pitchFamily="34" charset="0"/>
                 <a:ea typeface="Calibri" pitchFamily="34" charset="-122"/>
@@ -22066,7 +22066,7 @@
             <a:r>
               <a:rPr lang="en-US" sz="3400" b="1" dirty="0">
                 <a:solidFill>
-                  <a:srgbClr val="41639E"/>
+                  <a:srgbClr val="1E2B4A"/>
                 </a:solidFill>
                 <a:latin typeface="Calibri" pitchFamily="34" charset="0"/>
                 <a:ea typeface="Calibri" pitchFamily="34" charset="-122"/>
@@ -22167,7 +22167,7 @@
             <a:r>
               <a:rPr lang="en-US" sz="3400" b="1" dirty="0">
                 <a:solidFill>
-                  <a:srgbClr val="41639E"/>
+                  <a:srgbClr val="1E2B4A"/>
                 </a:solidFill>
                 <a:latin typeface="Calibri" pitchFamily="34" charset="0"/>
                 <a:ea typeface="Calibri" pitchFamily="34" charset="-122"/>
@@ -22476,7 +22476,7 @@
             <a:r>
               <a:rPr lang="en-US" sz="3400" b="1" dirty="0">
                 <a:solidFill>
-                  <a:srgbClr val="D96F2B"/>
+                  <a:srgbClr val="1E2B4A"/>
                 </a:solidFill>
                 <a:latin typeface="Calibri" pitchFamily="34" charset="0"/>
                 <a:ea typeface="Calibri" pitchFamily="34" charset="-122"/>
@@ -22577,7 +22577,7 @@
             <a:r>
               <a:rPr lang="en-US" sz="3400" b="1" dirty="0">
                 <a:solidFill>
-                  <a:srgbClr val="D96F2B"/>
+                  <a:srgbClr val="1E2B4A"/>
                 </a:solidFill>
                 <a:latin typeface="Calibri" pitchFamily="34" charset="0"/>
                 <a:ea typeface="Calibri" pitchFamily="34" charset="-122"/>

--- a/infographie/presentation_infographique.pptx
+++ b/infographie/presentation_infographique.pptx
@@ -3950,18 +3950,18 @@
             <a:avLst/>
           </a:prstGeom>
           <a:solidFill>
-            <a:srgbClr val="41639E"/>
+            <a:srgbClr val="E1E6EF"/>
           </a:solidFill>
-          <a:ln w="31750">
+          <a:ln w="15875">
             <a:solidFill>
-              <a:srgbClr val="FFFFFF"/>
+              <a:srgbClr val="BBC7DC"/>
             </a:solidFill>
             <a:prstDash val="solid"/>
           </a:ln>
           <a:effectLst>
             <a:outerShdw sx="100000" sy="100000" kx="0" ky="0" algn="bl" rotWithShape="0" blurRad="127000" dist="25400" dir="5400000">
               <a:srgbClr val="1E2B4A">
-                <a:alpha val="18000"/>
+                <a:alpha val="8000"/>
               </a:srgbClr>
             </a:outerShdw>
           </a:effectLst>
@@ -4077,18 +4077,18 @@
             <a:avLst/>
           </a:prstGeom>
           <a:solidFill>
-            <a:srgbClr val="3E8C9A"/>
+            <a:srgbClr val="E0EDEF"/>
           </a:solidFill>
-          <a:ln w="31750">
+          <a:ln w="15875">
             <a:solidFill>
-              <a:srgbClr val="FFFFFF"/>
+              <a:srgbClr val="BAD6DB"/>
             </a:solidFill>
             <a:prstDash val="solid"/>
           </a:ln>
           <a:effectLst>
             <a:outerShdw sx="100000" sy="100000" kx="0" ky="0" algn="bl" rotWithShape="0" blurRad="127000" dist="25400" dir="5400000">
               <a:srgbClr val="1E2B4A">
-                <a:alpha val="18000"/>
+                <a:alpha val="8000"/>
               </a:srgbClr>
             </a:outerShdw>
           </a:effectLst>
@@ -4204,18 +4204,18 @@
             <a:avLst/>
           </a:prstGeom>
           <a:solidFill>
-            <a:srgbClr val="41639E"/>
+            <a:srgbClr val="E1E6EF"/>
           </a:solidFill>
-          <a:ln w="31750">
+          <a:ln w="15875">
             <a:solidFill>
-              <a:srgbClr val="FFFFFF"/>
+              <a:srgbClr val="BBC7DC"/>
             </a:solidFill>
             <a:prstDash val="solid"/>
           </a:ln>
           <a:effectLst>
             <a:outerShdw sx="100000" sy="100000" kx="0" ky="0" algn="bl" rotWithShape="0" blurRad="127000" dist="25400" dir="5400000">
               <a:srgbClr val="1E2B4A">
-                <a:alpha val="18000"/>
+                <a:alpha val="8000"/>
               </a:srgbClr>
             </a:outerShdw>
           </a:effectLst>
@@ -4331,18 +4331,18 @@
             <a:avLst/>
           </a:prstGeom>
           <a:solidFill>
-            <a:srgbClr val="D96F2B"/>
+            <a:srgbClr val="F9E8DD"/>
           </a:solidFill>
-          <a:ln w="31750">
+          <a:ln w="15875">
             <a:solidFill>
-              <a:srgbClr val="FFFFFF"/>
+              <a:srgbClr val="F1CBB3"/>
             </a:solidFill>
             <a:prstDash val="solid"/>
           </a:ln>
           <a:effectLst>
             <a:outerShdw sx="100000" sy="100000" kx="0" ky="0" algn="bl" rotWithShape="0" blurRad="127000" dist="25400" dir="5400000">
               <a:srgbClr val="1E2B4A">
-                <a:alpha val="18000"/>
+                <a:alpha val="8000"/>
               </a:srgbClr>
             </a:outerShdw>
           </a:effectLst>
@@ -4458,18 +4458,18 @@
             <a:avLst/>
           </a:prstGeom>
           <a:solidFill>
-            <a:srgbClr val="C98A24"/>
+            <a:srgbClr val="F6ECDC"/>
           </a:solidFill>
-          <a:ln w="31750">
+          <a:ln w="15875">
             <a:solidFill>
-              <a:srgbClr val="FFFFFF"/>
+              <a:srgbClr val="ECD5B0"/>
             </a:solidFill>
             <a:prstDash val="solid"/>
           </a:ln>
           <a:effectLst>
             <a:outerShdw sx="100000" sy="100000" kx="0" ky="0" algn="bl" rotWithShape="0" blurRad="127000" dist="25400" dir="5400000">
               <a:srgbClr val="1E2B4A">
-                <a:alpha val="18000"/>
+                <a:alpha val="8000"/>
               </a:srgbClr>
             </a:outerShdw>
           </a:effectLst>
@@ -4585,18 +4585,18 @@
             <a:avLst/>
           </a:prstGeom>
           <a:solidFill>
-            <a:srgbClr val="3E8C9A"/>
+            <a:srgbClr val="E0EDEF"/>
           </a:solidFill>
-          <a:ln w="31750">
+          <a:ln w="15875">
             <a:solidFill>
-              <a:srgbClr val="FFFFFF"/>
+              <a:srgbClr val="BAD6DB"/>
             </a:solidFill>
             <a:prstDash val="solid"/>
           </a:ln>
           <a:effectLst>
             <a:outerShdw sx="100000" sy="100000" kx="0" ky="0" algn="bl" rotWithShape="0" blurRad="127000" dist="25400" dir="5400000">
               <a:srgbClr val="1E2B4A">
-                <a:alpha val="18000"/>
+                <a:alpha val="8000"/>
               </a:srgbClr>
             </a:outerShdw>
           </a:effectLst>
@@ -4712,18 +4712,18 @@
             <a:avLst/>
           </a:prstGeom>
           <a:solidFill>
-            <a:srgbClr val="41639E"/>
+            <a:srgbClr val="E1E6EF"/>
           </a:solidFill>
-          <a:ln w="31750">
+          <a:ln w="15875">
             <a:solidFill>
-              <a:srgbClr val="FFFFFF"/>
+              <a:srgbClr val="BBC7DC"/>
             </a:solidFill>
             <a:prstDash val="solid"/>
           </a:ln>
           <a:effectLst>
             <a:outerShdw sx="100000" sy="100000" kx="0" ky="0" algn="bl" rotWithShape="0" blurRad="127000" dist="25400" dir="5400000">
               <a:srgbClr val="1E2B4A">
-                <a:alpha val="18000"/>
+                <a:alpha val="8000"/>
               </a:srgbClr>
             </a:outerShdw>
           </a:effectLst>
@@ -5020,7 +5020,7 @@
             <a:r>
               <a:rPr lang="en-US" sz="1250" b="1" dirty="0">
                 <a:solidFill>
-                  <a:srgbClr val="D96F2B"/>
+                  <a:srgbClr val="1D2433"/>
                 </a:solidFill>
                 <a:latin typeface="Calibri" pitchFamily="34" charset="0"/>
                 <a:ea typeface="Calibri" pitchFamily="34" charset="-122"/>
@@ -5098,7 +5098,7 @@
             <a:r>
               <a:rPr lang="en-US" sz="1250" b="1" dirty="0">
                 <a:solidFill>
-                  <a:srgbClr val="D96F2B"/>
+                  <a:srgbClr val="1D2433"/>
                 </a:solidFill>
                 <a:latin typeface="Calibri" pitchFamily="34" charset="0"/>
                 <a:ea typeface="Calibri" pitchFamily="34" charset="-122"/>
@@ -5176,7 +5176,7 @@
             <a:r>
               <a:rPr lang="en-US" sz="1250" b="1" dirty="0">
                 <a:solidFill>
-                  <a:srgbClr val="D96F2B"/>
+                  <a:srgbClr val="1D2433"/>
                 </a:solidFill>
                 <a:latin typeface="Calibri" pitchFamily="34" charset="0"/>
                 <a:ea typeface="Calibri" pitchFamily="34" charset="-122"/>
@@ -5540,7 +5540,7 @@
             <a:r>
               <a:rPr lang="en-US" sz="3200" b="1" dirty="0">
                 <a:solidFill>
-                  <a:srgbClr val="41639E"/>
+                  <a:srgbClr val="1E2B4A"/>
                 </a:solidFill>
                 <a:latin typeface="Calibri" pitchFamily="34" charset="0"/>
                 <a:ea typeface="Calibri" pitchFamily="34" charset="-122"/>
@@ -5670,7 +5670,7 @@
             <a:r>
               <a:rPr lang="en-US" sz="3200" b="1" dirty="0">
                 <a:solidFill>
-                  <a:srgbClr val="41639E"/>
+                  <a:srgbClr val="1E2B4A"/>
                 </a:solidFill>
                 <a:latin typeface="Calibri" pitchFamily="34" charset="0"/>
                 <a:ea typeface="Calibri" pitchFamily="34" charset="-122"/>
@@ -5800,7 +5800,7 @@
             <a:r>
               <a:rPr lang="en-US" sz="3200" b="1" dirty="0">
                 <a:solidFill>
-                  <a:srgbClr val="D96F2B"/>
+                  <a:srgbClr val="1E2B4A"/>
                 </a:solidFill>
                 <a:latin typeface="Calibri" pitchFamily="34" charset="0"/>
                 <a:ea typeface="Calibri" pitchFamily="34" charset="-122"/>
@@ -5930,7 +5930,7 @@
             <a:r>
               <a:rPr lang="en-US" sz="3200" b="1" dirty="0">
                 <a:solidFill>
-                  <a:srgbClr val="D96F2B"/>
+                  <a:srgbClr val="1E2B4A"/>
                 </a:solidFill>
                 <a:latin typeface="Calibri" pitchFamily="34" charset="0"/>
                 <a:ea typeface="Calibri" pitchFamily="34" charset="-122"/>
@@ -6048,18 +6048,18 @@
             <a:avLst/>
           </a:prstGeom>
           <a:solidFill>
-            <a:srgbClr val="3E8C9A"/>
+            <a:srgbClr val="E0EDEF"/>
           </a:solidFill>
-          <a:ln w="31750">
+          <a:ln w="15875">
             <a:solidFill>
-              <a:srgbClr val="FFFFFF"/>
+              <a:srgbClr val="BAD6DB"/>
             </a:solidFill>
             <a:prstDash val="solid"/>
           </a:ln>
           <a:effectLst>
             <a:outerShdw sx="100000" sy="100000" kx="0" ky="0" algn="bl" rotWithShape="0" blurRad="127000" dist="25400" dir="5400000">
               <a:srgbClr val="1E2B4A">
-                <a:alpha val="18000"/>
+                <a:alpha val="8000"/>
               </a:srgbClr>
             </a:outerShdw>
           </a:effectLst>
@@ -6214,18 +6214,18 @@
             <a:avLst/>
           </a:prstGeom>
           <a:solidFill>
-            <a:srgbClr val="C98A24"/>
+            <a:srgbClr val="F6ECDC"/>
           </a:solidFill>
-          <a:ln w="31750">
+          <a:ln w="15875">
             <a:solidFill>
-              <a:srgbClr val="FFFFFF"/>
+              <a:srgbClr val="ECD5B0"/>
             </a:solidFill>
             <a:prstDash val="solid"/>
           </a:ln>
           <a:effectLst>
             <a:outerShdw sx="100000" sy="100000" kx="0" ky="0" algn="bl" rotWithShape="0" blurRad="127000" dist="25400" dir="5400000">
               <a:srgbClr val="1E2B4A">
-                <a:alpha val="18000"/>
+                <a:alpha val="8000"/>
               </a:srgbClr>
             </a:outerShdw>
           </a:effectLst>
@@ -6953,18 +6953,18 @@
             <a:avLst/>
           </a:prstGeom>
           <a:solidFill>
-            <a:srgbClr val="41639E"/>
+            <a:srgbClr val="E1E6EF"/>
           </a:solidFill>
-          <a:ln w="31750">
+          <a:ln w="15875">
             <a:solidFill>
-              <a:srgbClr val="FFFFFF"/>
+              <a:srgbClr val="BBC7DC"/>
             </a:solidFill>
             <a:prstDash val="solid"/>
           </a:ln>
           <a:effectLst>
             <a:outerShdw sx="100000" sy="100000" kx="0" ky="0" algn="bl" rotWithShape="0" blurRad="127000" dist="25400" dir="5400000">
               <a:srgbClr val="1E2B4A">
-                <a:alpha val="18000"/>
+                <a:alpha val="8000"/>
               </a:srgbClr>
             </a:outerShdw>
           </a:effectLst>
@@ -7158,18 +7158,18 @@
             <a:avLst/>
           </a:prstGeom>
           <a:solidFill>
-            <a:srgbClr val="3E8C9A"/>
+            <a:srgbClr val="E0EDEF"/>
           </a:solidFill>
-          <a:ln w="31750">
+          <a:ln w="15875">
             <a:solidFill>
-              <a:srgbClr val="FFFFFF"/>
+              <a:srgbClr val="BAD6DB"/>
             </a:solidFill>
             <a:prstDash val="solid"/>
           </a:ln>
           <a:effectLst>
             <a:outerShdw sx="100000" sy="100000" kx="0" ky="0" algn="bl" rotWithShape="0" blurRad="127000" dist="25400" dir="5400000">
               <a:srgbClr val="1E2B4A">
-                <a:alpha val="18000"/>
+                <a:alpha val="8000"/>
               </a:srgbClr>
             </a:outerShdw>
           </a:effectLst>
@@ -7363,18 +7363,18 @@
             <a:avLst/>
           </a:prstGeom>
           <a:solidFill>
-            <a:srgbClr val="D96F2B"/>
+            <a:srgbClr val="F9E8DD"/>
           </a:solidFill>
-          <a:ln w="31750">
+          <a:ln w="15875">
             <a:solidFill>
-              <a:srgbClr val="FFFFFF"/>
+              <a:srgbClr val="F1CBB3"/>
             </a:solidFill>
             <a:prstDash val="solid"/>
           </a:ln>
           <a:effectLst>
             <a:outerShdw sx="100000" sy="100000" kx="0" ky="0" algn="bl" rotWithShape="0" blurRad="127000" dist="25400" dir="5400000">
               <a:srgbClr val="1E2B4A">
-                <a:alpha val="18000"/>
+                <a:alpha val="8000"/>
               </a:srgbClr>
             </a:outerShdw>
           </a:effectLst>
@@ -9605,7 +9605,7 @@
             <a:r>
               <a:rPr lang="en-US" sz="3000" b="1" dirty="0">
                 <a:solidFill>
-                  <a:srgbClr val="8A93A5"/>
+                  <a:srgbClr val="1E2B4A"/>
                 </a:solidFill>
                 <a:latin typeface="Calibri" pitchFamily="34" charset="0"/>
                 <a:ea typeface="Calibri" pitchFamily="34" charset="-122"/>
@@ -9735,7 +9735,7 @@
             <a:r>
               <a:rPr lang="en-US" sz="3000" b="1" dirty="0">
                 <a:solidFill>
-                  <a:srgbClr val="3E8C9A"/>
+                  <a:srgbClr val="1E2B4A"/>
                 </a:solidFill>
                 <a:latin typeface="Calibri" pitchFamily="34" charset="0"/>
                 <a:ea typeface="Calibri" pitchFamily="34" charset="-122"/>
@@ -9865,7 +9865,7 @@
             <a:r>
               <a:rPr lang="en-US" sz="3000" b="1" dirty="0">
                 <a:solidFill>
-                  <a:srgbClr val="41639E"/>
+                  <a:srgbClr val="1E2B4A"/>
                 </a:solidFill>
                 <a:latin typeface="Calibri" pitchFamily="34" charset="0"/>
                 <a:ea typeface="Calibri" pitchFamily="34" charset="-122"/>
@@ -9995,7 +9995,7 @@
             <a:r>
               <a:rPr lang="en-US" sz="3000" b="1" dirty="0">
                 <a:solidFill>
-                  <a:srgbClr val="41639E"/>
+                  <a:srgbClr val="1E2B4A"/>
                 </a:solidFill>
                 <a:latin typeface="Calibri" pitchFamily="34" charset="0"/>
                 <a:ea typeface="Calibri" pitchFamily="34" charset="-122"/>
@@ -12468,7 +12468,7 @@
             <a:r>
               <a:rPr lang="en-US" sz="1200" b="1" dirty="0">
                 <a:solidFill>
-                  <a:srgbClr val="D96F2B"/>
+                  <a:srgbClr val="1D2433"/>
                 </a:solidFill>
                 <a:latin typeface="Calibri" pitchFamily="34" charset="0"/>
                 <a:ea typeface="Calibri" pitchFamily="34" charset="-122"/>
@@ -12607,7 +12607,7 @@
             <a:r>
               <a:rPr lang="en-US" sz="1200" b="1" dirty="0">
                 <a:solidFill>
-                  <a:srgbClr val="4A5468"/>
+                  <a:srgbClr val="1D2433"/>
                 </a:solidFill>
                 <a:latin typeface="Calibri" pitchFamily="34" charset="0"/>
                 <a:ea typeface="Calibri" pitchFamily="34" charset="-122"/>
@@ -12707,7 +12707,7 @@
             <a:r>
               <a:rPr lang="en-US" sz="1200" b="1" dirty="0">
                 <a:solidFill>
-                  <a:srgbClr val="4A5468"/>
+                  <a:srgbClr val="1D2433"/>
                 </a:solidFill>
                 <a:latin typeface="Calibri" pitchFamily="34" charset="0"/>
                 <a:ea typeface="Calibri" pitchFamily="34" charset="-122"/>
@@ -12807,7 +12807,7 @@
             <a:r>
               <a:rPr lang="en-US" sz="1200" b="1" dirty="0">
                 <a:solidFill>
-                  <a:srgbClr val="4A5468"/>
+                  <a:srgbClr val="1D2433"/>
                 </a:solidFill>
                 <a:latin typeface="Calibri" pitchFamily="34" charset="0"/>
                 <a:ea typeface="Calibri" pitchFamily="34" charset="-122"/>
@@ -12907,7 +12907,7 @@
             <a:r>
               <a:rPr lang="en-US" sz="1200" b="1" dirty="0">
                 <a:solidFill>
-                  <a:srgbClr val="4A5468"/>
+                  <a:srgbClr val="1D2433"/>
                 </a:solidFill>
                 <a:latin typeface="Calibri" pitchFamily="34" charset="0"/>
                 <a:ea typeface="Calibri" pitchFamily="34" charset="-122"/>
@@ -13007,7 +13007,7 @@
             <a:r>
               <a:rPr lang="en-US" sz="1200" b="1" dirty="0">
                 <a:solidFill>
-                  <a:srgbClr val="4A5468"/>
+                  <a:srgbClr val="1D2433"/>
                 </a:solidFill>
                 <a:latin typeface="Calibri" pitchFamily="34" charset="0"/>
                 <a:ea typeface="Calibri" pitchFamily="34" charset="-122"/>
@@ -13107,7 +13107,7 @@
             <a:r>
               <a:rPr lang="en-US" sz="1200" b="1" dirty="0">
                 <a:solidFill>
-                  <a:srgbClr val="4A5468"/>
+                  <a:srgbClr val="1D2433"/>
                 </a:solidFill>
                 <a:latin typeface="Calibri" pitchFamily="34" charset="0"/>
                 <a:ea typeface="Calibri" pitchFamily="34" charset="-122"/>
@@ -13163,18 +13163,18 @@
             <a:avLst/>
           </a:prstGeom>
           <a:solidFill>
-            <a:srgbClr val="D96F2B"/>
+            <a:srgbClr val="F9E8DD"/>
           </a:solidFill>
-          <a:ln w="31750">
+          <a:ln w="15875">
             <a:solidFill>
-              <a:srgbClr val="FFFFFF"/>
+              <a:srgbClr val="F1CBB3"/>
             </a:solidFill>
             <a:prstDash val="solid"/>
           </a:ln>
           <a:effectLst>
             <a:outerShdw sx="100000" sy="100000" kx="0" ky="0" algn="bl" rotWithShape="0" blurRad="127000" dist="25400" dir="5400000">
               <a:srgbClr val="1E2B4A">
-                <a:alpha val="18000"/>
+                <a:alpha val="8000"/>
               </a:srgbClr>
             </a:outerShdw>
           </a:effectLst>
@@ -13939,7 +13939,7 @@
             <a:r>
               <a:rPr lang="en-US" sz="1300" b="1" dirty="0">
                 <a:solidFill>
-                  <a:srgbClr val="D96F2B"/>
+                  <a:srgbClr val="1D2433"/>
                 </a:solidFill>
                 <a:latin typeface="Calibri" pitchFamily="34" charset="0"/>
                 <a:ea typeface="Calibri" pitchFamily="34" charset="-122"/>
@@ -14039,7 +14039,7 @@
             <a:r>
               <a:rPr lang="en-US" sz="1200" b="1" dirty="0">
                 <a:solidFill>
-                  <a:srgbClr val="D96F2B"/>
+                  <a:srgbClr val="1D2433"/>
                 </a:solidFill>
                 <a:latin typeface="Calibri" pitchFamily="34" charset="0"/>
                 <a:ea typeface="Calibri" pitchFamily="34" charset="-122"/>
@@ -14117,7 +14117,7 @@
             <a:r>
               <a:rPr lang="en-US" sz="1300" b="1" dirty="0">
                 <a:solidFill>
-                  <a:srgbClr val="D96F2B"/>
+                  <a:srgbClr val="1D2433"/>
                 </a:solidFill>
                 <a:latin typeface="Calibri" pitchFamily="34" charset="0"/>
                 <a:ea typeface="Calibri" pitchFamily="34" charset="-122"/>
@@ -14217,7 +14217,7 @@
             <a:r>
               <a:rPr lang="en-US" sz="1200" b="1" dirty="0">
                 <a:solidFill>
-                  <a:srgbClr val="D96F2B"/>
+                  <a:srgbClr val="1D2433"/>
                 </a:solidFill>
                 <a:latin typeface="Calibri" pitchFamily="34" charset="0"/>
                 <a:ea typeface="Calibri" pitchFamily="34" charset="-122"/>
@@ -14295,7 +14295,7 @@
             <a:r>
               <a:rPr lang="en-US" sz="1300" b="1" dirty="0">
                 <a:solidFill>
-                  <a:srgbClr val="4A5468"/>
+                  <a:srgbClr val="1D2433"/>
                 </a:solidFill>
                 <a:latin typeface="Calibri" pitchFamily="34" charset="0"/>
                 <a:ea typeface="Calibri" pitchFamily="34" charset="-122"/>
@@ -14395,7 +14395,7 @@
             <a:r>
               <a:rPr lang="en-US" sz="1200" b="1" dirty="0">
                 <a:solidFill>
-                  <a:srgbClr val="4A5468"/>
+                  <a:srgbClr val="1D2433"/>
                 </a:solidFill>
                 <a:latin typeface="Calibri" pitchFamily="34" charset="0"/>
                 <a:ea typeface="Calibri" pitchFamily="34" charset="-122"/>
@@ -14434,7 +14434,7 @@
             <a:r>
               <a:rPr lang="en-US" sz="1300" b="1" dirty="0">
                 <a:solidFill>
-                  <a:srgbClr val="4A5468"/>
+                  <a:srgbClr val="1D2433"/>
                 </a:solidFill>
                 <a:latin typeface="Calibri" pitchFamily="34" charset="0"/>
                 <a:ea typeface="Calibri" pitchFamily="34" charset="-122"/>
@@ -14534,7 +14534,7 @@
             <a:r>
               <a:rPr lang="en-US" sz="1200" b="1" dirty="0">
                 <a:solidFill>
-                  <a:srgbClr val="4A5468"/>
+                  <a:srgbClr val="1D2433"/>
                 </a:solidFill>
                 <a:latin typeface="Calibri" pitchFamily="34" charset="0"/>
                 <a:ea typeface="Calibri" pitchFamily="34" charset="-122"/>
@@ -14573,7 +14573,7 @@
             <a:r>
               <a:rPr lang="en-US" sz="1300" b="1" dirty="0">
                 <a:solidFill>
-                  <a:srgbClr val="4A5468"/>
+                  <a:srgbClr val="1D2433"/>
                 </a:solidFill>
                 <a:latin typeface="Calibri" pitchFamily="34" charset="0"/>
                 <a:ea typeface="Calibri" pitchFamily="34" charset="-122"/>
@@ -14673,7 +14673,7 @@
             <a:r>
               <a:rPr lang="en-US" sz="1200" b="1" dirty="0">
                 <a:solidFill>
-                  <a:srgbClr val="4A5468"/>
+                  <a:srgbClr val="1D2433"/>
                 </a:solidFill>
                 <a:latin typeface="Calibri" pitchFamily="34" charset="0"/>
                 <a:ea typeface="Calibri" pitchFamily="34" charset="-122"/>
@@ -15373,18 +15373,18 @@
             <a:avLst/>
           </a:prstGeom>
           <a:solidFill>
-            <a:srgbClr val="41639E"/>
+            <a:srgbClr val="E1E6EF"/>
           </a:solidFill>
-          <a:ln w="31750">
+          <a:ln w="15875">
             <a:solidFill>
-              <a:srgbClr val="FFFFFF"/>
+              <a:srgbClr val="BBC7DC"/>
             </a:solidFill>
             <a:prstDash val="solid"/>
           </a:ln>
           <a:effectLst>
             <a:outerShdw sx="100000" sy="100000" kx="0" ky="0" algn="bl" rotWithShape="0" blurRad="127000" dist="25400" dir="5400000">
               <a:srgbClr val="1E2B4A">
-                <a:alpha val="18000"/>
+                <a:alpha val="8000"/>
               </a:srgbClr>
             </a:outerShdw>
           </a:effectLst>
@@ -15575,18 +15575,18 @@
             <a:avLst/>
           </a:prstGeom>
           <a:solidFill>
-            <a:srgbClr val="D96F2B"/>
+            <a:srgbClr val="F9E8DD"/>
           </a:solidFill>
-          <a:ln w="31750">
+          <a:ln w="15875">
             <a:solidFill>
-              <a:srgbClr val="FFFFFF"/>
+              <a:srgbClr val="F1CBB3"/>
             </a:solidFill>
             <a:prstDash val="solid"/>
           </a:ln>
           <a:effectLst>
             <a:outerShdw sx="100000" sy="100000" kx="0" ky="0" algn="bl" rotWithShape="0" blurRad="127000" dist="25400" dir="5400000">
               <a:srgbClr val="1E2B4A">
-                <a:alpha val="18000"/>
+                <a:alpha val="8000"/>
               </a:srgbClr>
             </a:outerShdw>
           </a:effectLst>
@@ -15777,18 +15777,18 @@
             <a:avLst/>
           </a:prstGeom>
           <a:solidFill>
-            <a:srgbClr val="3E8C9A"/>
+            <a:srgbClr val="E0EDEF"/>
           </a:solidFill>
-          <a:ln w="31750">
+          <a:ln w="15875">
             <a:solidFill>
-              <a:srgbClr val="FFFFFF"/>
+              <a:srgbClr val="BAD6DB"/>
             </a:solidFill>
             <a:prstDash val="solid"/>
           </a:ln>
           <a:effectLst>
             <a:outerShdw sx="100000" sy="100000" kx="0" ky="0" algn="bl" rotWithShape="0" blurRad="127000" dist="25400" dir="5400000">
               <a:srgbClr val="1E2B4A">
-                <a:alpha val="18000"/>
+                <a:alpha val="8000"/>
               </a:srgbClr>
             </a:outerShdw>
           </a:effectLst>
@@ -15979,18 +15979,18 @@
             <a:avLst/>
           </a:prstGeom>
           <a:solidFill>
-            <a:srgbClr val="C98A24"/>
+            <a:srgbClr val="F6ECDC"/>
           </a:solidFill>
-          <a:ln w="31750">
+          <a:ln w="15875">
             <a:solidFill>
-              <a:srgbClr val="FFFFFF"/>
+              <a:srgbClr val="ECD5B0"/>
             </a:solidFill>
             <a:prstDash val="solid"/>
           </a:ln>
           <a:effectLst>
             <a:outerShdw sx="100000" sy="100000" kx="0" ky="0" algn="bl" rotWithShape="0" blurRad="127000" dist="25400" dir="5400000">
               <a:srgbClr val="1E2B4A">
-                <a:alpha val="18000"/>
+                <a:alpha val="8000"/>
               </a:srgbClr>
             </a:outerShdw>
           </a:effectLst>
@@ -16181,18 +16181,18 @@
             <a:avLst/>
           </a:prstGeom>
           <a:solidFill>
-            <a:srgbClr val="41639E"/>
+            <a:srgbClr val="E1E6EF"/>
           </a:solidFill>
-          <a:ln w="31750">
+          <a:ln w="15875">
             <a:solidFill>
-              <a:srgbClr val="FFFFFF"/>
+              <a:srgbClr val="BBC7DC"/>
             </a:solidFill>
             <a:prstDash val="solid"/>
           </a:ln>
           <a:effectLst>
             <a:outerShdw sx="100000" sy="100000" kx="0" ky="0" algn="bl" rotWithShape="0" blurRad="127000" dist="25400" dir="5400000">
               <a:srgbClr val="1E2B4A">
-                <a:alpha val="18000"/>
+                <a:alpha val="8000"/>
               </a:srgbClr>
             </a:outerShdw>
           </a:effectLst>
@@ -16383,18 +16383,18 @@
             <a:avLst/>
           </a:prstGeom>
           <a:solidFill>
-            <a:srgbClr val="D96F2B"/>
+            <a:srgbClr val="F9E8DD"/>
           </a:solidFill>
-          <a:ln w="31750">
+          <a:ln w="15875">
             <a:solidFill>
-              <a:srgbClr val="FFFFFF"/>
+              <a:srgbClr val="F1CBB3"/>
             </a:solidFill>
             <a:prstDash val="solid"/>
           </a:ln>
           <a:effectLst>
             <a:outerShdw sx="100000" sy="100000" kx="0" ky="0" algn="bl" rotWithShape="0" blurRad="127000" dist="25400" dir="5400000">
               <a:srgbClr val="1E2B4A">
-                <a:alpha val="18000"/>
+                <a:alpha val="8000"/>
               </a:srgbClr>
             </a:outerShdw>
           </a:effectLst>
@@ -16719,18 +16719,18 @@
             <a:avLst/>
           </a:prstGeom>
           <a:solidFill>
-            <a:srgbClr val="41639E"/>
+            <a:srgbClr val="E1E6EF"/>
           </a:solidFill>
-          <a:ln w="31750">
+          <a:ln w="15875">
             <a:solidFill>
-              <a:srgbClr val="FFFFFF"/>
+              <a:srgbClr val="BBC7DC"/>
             </a:solidFill>
             <a:prstDash val="solid"/>
           </a:ln>
           <a:effectLst>
             <a:outerShdw sx="100000" sy="100000" kx="0" ky="0" algn="bl" rotWithShape="0" blurRad="127000" dist="25400" dir="5400000">
               <a:srgbClr val="1E2B4A">
-                <a:alpha val="18000"/>
+                <a:alpha val="8000"/>
               </a:srgbClr>
             </a:outerShdw>
           </a:effectLst>
@@ -16924,18 +16924,18 @@
             <a:avLst/>
           </a:prstGeom>
           <a:solidFill>
-            <a:srgbClr val="3E8C9A"/>
+            <a:srgbClr val="E0EDEF"/>
           </a:solidFill>
-          <a:ln w="31750">
+          <a:ln w="15875">
             <a:solidFill>
-              <a:srgbClr val="FFFFFF"/>
+              <a:srgbClr val="BAD6DB"/>
             </a:solidFill>
             <a:prstDash val="solid"/>
           </a:ln>
           <a:effectLst>
             <a:outerShdw sx="100000" sy="100000" kx="0" ky="0" algn="bl" rotWithShape="0" blurRad="127000" dist="25400" dir="5400000">
               <a:srgbClr val="1E2B4A">
-                <a:alpha val="18000"/>
+                <a:alpha val="8000"/>
               </a:srgbClr>
             </a:outerShdw>
           </a:effectLst>
@@ -17129,18 +17129,18 @@
             <a:avLst/>
           </a:prstGeom>
           <a:solidFill>
-            <a:srgbClr val="C98A24"/>
+            <a:srgbClr val="F6ECDC"/>
           </a:solidFill>
-          <a:ln w="31750">
+          <a:ln w="15875">
             <a:solidFill>
-              <a:srgbClr val="FFFFFF"/>
+              <a:srgbClr val="ECD5B0"/>
             </a:solidFill>
             <a:prstDash val="solid"/>
           </a:ln>
           <a:effectLst>
             <a:outerShdw sx="100000" sy="100000" kx="0" ky="0" algn="bl" rotWithShape="0" blurRad="127000" dist="25400" dir="5400000">
               <a:srgbClr val="1E2B4A">
-                <a:alpha val="18000"/>
+                <a:alpha val="8000"/>
               </a:srgbClr>
             </a:outerShdw>
           </a:effectLst>
@@ -17334,18 +17334,18 @@
             <a:avLst/>
           </a:prstGeom>
           <a:solidFill>
-            <a:srgbClr val="D96F2B"/>
+            <a:srgbClr val="F9E8DD"/>
           </a:solidFill>
-          <a:ln w="31750">
+          <a:ln w="15875">
             <a:solidFill>
-              <a:srgbClr val="FFFFFF"/>
+              <a:srgbClr val="F1CBB3"/>
             </a:solidFill>
             <a:prstDash val="solid"/>
           </a:ln>
           <a:effectLst>
             <a:outerShdw sx="100000" sy="100000" kx="0" ky="0" algn="bl" rotWithShape="0" blurRad="127000" dist="25400" dir="5400000">
               <a:srgbClr val="1E2B4A">
-                <a:alpha val="18000"/>
+                <a:alpha val="8000"/>
               </a:srgbClr>
             </a:outerShdw>
           </a:effectLst>
@@ -18094,18 +18094,18 @@
             <a:avLst/>
           </a:prstGeom>
           <a:solidFill>
-            <a:srgbClr val="D96F2B"/>
+            <a:srgbClr val="F9E8DD"/>
           </a:solidFill>
-          <a:ln w="31750">
+          <a:ln w="15875">
             <a:solidFill>
-              <a:srgbClr val="FFFFFF"/>
+              <a:srgbClr val="F1CBB3"/>
             </a:solidFill>
             <a:prstDash val="solid"/>
           </a:ln>
           <a:effectLst>
             <a:outerShdw sx="100000" sy="100000" kx="0" ky="0" algn="bl" rotWithShape="0" blurRad="127000" dist="25400" dir="5400000">
               <a:srgbClr val="1E2B4A">
-                <a:alpha val="18000"/>
+                <a:alpha val="8000"/>
               </a:srgbClr>
             </a:outerShdw>
           </a:effectLst>
@@ -18150,18 +18150,18 @@
             <a:avLst/>
           </a:prstGeom>
           <a:solidFill>
-            <a:srgbClr val="3E8C9A"/>
+            <a:srgbClr val="E0EDEF"/>
           </a:solidFill>
-          <a:ln w="31750">
+          <a:ln w="15875">
             <a:solidFill>
-              <a:srgbClr val="FFFFFF"/>
+              <a:srgbClr val="BAD6DB"/>
             </a:solidFill>
             <a:prstDash val="solid"/>
           </a:ln>
           <a:effectLst>
             <a:outerShdw sx="100000" sy="100000" kx="0" ky="0" algn="bl" rotWithShape="0" blurRad="127000" dist="25400" dir="5400000">
               <a:srgbClr val="1E2B4A">
-                <a:alpha val="18000"/>
+                <a:alpha val="8000"/>
               </a:srgbClr>
             </a:outerShdw>
           </a:effectLst>
@@ -18411,18 +18411,18 @@
             <a:avLst/>
           </a:prstGeom>
           <a:solidFill>
-            <a:srgbClr val="C98A24"/>
+            <a:srgbClr val="F6ECDC"/>
           </a:solidFill>
-          <a:ln w="31750">
+          <a:ln w="15875">
             <a:solidFill>
-              <a:srgbClr val="FFFFFF"/>
+              <a:srgbClr val="ECD5B0"/>
             </a:solidFill>
             <a:prstDash val="solid"/>
           </a:ln>
           <a:effectLst>
             <a:outerShdw sx="100000" sy="100000" kx="0" ky="0" algn="bl" rotWithShape="0" blurRad="127000" dist="25400" dir="5400000">
               <a:srgbClr val="1E2B4A">
-                <a:alpha val="18000"/>
+                <a:alpha val="8000"/>
               </a:srgbClr>
             </a:outerShdw>
           </a:effectLst>
@@ -18580,18 +18580,18 @@
             <a:avLst/>
           </a:prstGeom>
           <a:solidFill>
-            <a:srgbClr val="41639E"/>
+            <a:srgbClr val="E1E6EF"/>
           </a:solidFill>
-          <a:ln w="31750">
+          <a:ln w="15875">
             <a:solidFill>
-              <a:srgbClr val="FFFFFF"/>
+              <a:srgbClr val="BBC7DC"/>
             </a:solidFill>
             <a:prstDash val="solid"/>
           </a:ln>
           <a:effectLst>
             <a:outerShdw sx="100000" sy="100000" kx="0" ky="0" algn="bl" rotWithShape="0" blurRad="127000" dist="25400" dir="5400000">
               <a:srgbClr val="1E2B4A">
-                <a:alpha val="18000"/>
+                <a:alpha val="8000"/>
               </a:srgbClr>
             </a:outerShdw>
           </a:effectLst>
@@ -18749,18 +18749,18 @@
             <a:avLst/>
           </a:prstGeom>
           <a:solidFill>
-            <a:srgbClr val="3E8C9A"/>
+            <a:srgbClr val="E0EDEF"/>
           </a:solidFill>
-          <a:ln w="31750">
+          <a:ln w="15875">
             <a:solidFill>
-              <a:srgbClr val="FFFFFF"/>
+              <a:srgbClr val="BAD6DB"/>
             </a:solidFill>
             <a:prstDash val="solid"/>
           </a:ln>
           <a:effectLst>
             <a:outerShdw sx="100000" sy="100000" kx="0" ky="0" algn="bl" rotWithShape="0" blurRad="127000" dist="25400" dir="5400000">
               <a:srgbClr val="1E2B4A">
-                <a:alpha val="18000"/>
+                <a:alpha val="8000"/>
               </a:srgbClr>
             </a:outerShdw>
           </a:effectLst>
@@ -19052,18 +19052,18 @@
             <a:avLst/>
           </a:prstGeom>
           <a:solidFill>
-            <a:srgbClr val="D96F2B"/>
+            <a:srgbClr val="F9E8DD"/>
           </a:solidFill>
-          <a:ln w="31750">
+          <a:ln w="15875">
             <a:solidFill>
-              <a:srgbClr val="FFFFFF"/>
+              <a:srgbClr val="F1CBB3"/>
             </a:solidFill>
             <a:prstDash val="solid"/>
           </a:ln>
           <a:effectLst>
             <a:outerShdw sx="100000" sy="100000" kx="0" ky="0" algn="bl" rotWithShape="0" blurRad="127000" dist="25400" dir="5400000">
               <a:srgbClr val="1E2B4A">
-                <a:alpha val="18000"/>
+                <a:alpha val="8000"/>
               </a:srgbClr>
             </a:outerShdw>
           </a:effectLst>
@@ -19338,18 +19338,18 @@
             <a:avLst/>
           </a:prstGeom>
           <a:solidFill>
-            <a:srgbClr val="3E8C9A"/>
+            <a:srgbClr val="E0EDEF"/>
           </a:solidFill>
-          <a:ln w="31750">
+          <a:ln w="15875">
             <a:solidFill>
-              <a:srgbClr val="FFFFFF"/>
+              <a:srgbClr val="BAD6DB"/>
             </a:solidFill>
             <a:prstDash val="solid"/>
           </a:ln>
           <a:effectLst>
             <a:outerShdw sx="100000" sy="100000" kx="0" ky="0" algn="bl" rotWithShape="0" blurRad="127000" dist="25400" dir="5400000">
               <a:srgbClr val="1E2B4A">
-                <a:alpha val="18000"/>
+                <a:alpha val="8000"/>
               </a:srgbClr>
             </a:outerShdw>
           </a:effectLst>
@@ -20934,18 +20934,18 @@
             <a:avLst/>
           </a:prstGeom>
           <a:solidFill>
-            <a:srgbClr val="C98A24"/>
+            <a:srgbClr val="F6ECDC"/>
           </a:solidFill>
-          <a:ln w="31750">
+          <a:ln w="15875">
             <a:solidFill>
-              <a:srgbClr val="FFFFFF"/>
+              <a:srgbClr val="ECD5B0"/>
             </a:solidFill>
             <a:prstDash val="solid"/>
           </a:ln>
           <a:effectLst>
             <a:outerShdw sx="100000" sy="100000" kx="0" ky="0" algn="bl" rotWithShape="0" blurRad="127000" dist="25400" dir="5400000">
               <a:srgbClr val="1E2B4A">
-                <a:alpha val="18000"/>
+                <a:alpha val="8000"/>
               </a:srgbClr>
             </a:outerShdw>
           </a:effectLst>
@@ -21103,18 +21103,18 @@
             <a:avLst/>
           </a:prstGeom>
           <a:solidFill>
-            <a:srgbClr val="41639E"/>
+            <a:srgbClr val="E1E6EF"/>
           </a:solidFill>
-          <a:ln w="31750">
+          <a:ln w="15875">
             <a:solidFill>
-              <a:srgbClr val="FFFFFF"/>
+              <a:srgbClr val="BBC7DC"/>
             </a:solidFill>
             <a:prstDash val="solid"/>
           </a:ln>
           <a:effectLst>
             <a:outerShdw sx="100000" sy="100000" kx="0" ky="0" algn="bl" rotWithShape="0" blurRad="127000" dist="25400" dir="5400000">
               <a:srgbClr val="1E2B4A">
-                <a:alpha val="18000"/>
+                <a:alpha val="8000"/>
               </a:srgbClr>
             </a:outerShdw>
           </a:effectLst>
@@ -21272,18 +21272,18 @@
             <a:avLst/>
           </a:prstGeom>
           <a:solidFill>
-            <a:srgbClr val="3E8C9A"/>
+            <a:srgbClr val="E0EDEF"/>
           </a:solidFill>
-          <a:ln w="31750">
+          <a:ln w="15875">
             <a:solidFill>
-              <a:srgbClr val="FFFFFF"/>
+              <a:srgbClr val="BAD6DB"/>
             </a:solidFill>
             <a:prstDash val="solid"/>
           </a:ln>
           <a:effectLst>
             <a:outerShdw sx="100000" sy="100000" kx="0" ky="0" algn="bl" rotWithShape="0" blurRad="127000" dist="25400" dir="5400000">
               <a:srgbClr val="1E2B4A">
-                <a:alpha val="18000"/>
+                <a:alpha val="8000"/>
               </a:srgbClr>
             </a:outerShdw>
           </a:effectLst>
@@ -21956,18 +21956,18 @@
             <a:avLst/>
           </a:prstGeom>
           <a:solidFill>
-            <a:srgbClr val="41639E"/>
+            <a:srgbClr val="E1E6EF"/>
           </a:solidFill>
-          <a:ln w="31750">
+          <a:ln w="15875">
             <a:solidFill>
-              <a:srgbClr val="FFFFFF"/>
+              <a:srgbClr val="BBC7DC"/>
             </a:solidFill>
             <a:prstDash val="solid"/>
           </a:ln>
           <a:effectLst>
             <a:outerShdw sx="100000" sy="100000" kx="0" ky="0" algn="bl" rotWithShape="0" blurRad="127000" dist="25400" dir="5400000">
               <a:srgbClr val="1E2B4A">
-                <a:alpha val="18000"/>
+                <a:alpha val="8000"/>
               </a:srgbClr>
             </a:outerShdw>
           </a:effectLst>
@@ -22066,7 +22066,7 @@
             <a:r>
               <a:rPr lang="en-US" sz="3400" b="1" dirty="0">
                 <a:solidFill>
-                  <a:srgbClr val="41639E"/>
+                  <a:srgbClr val="1E2B4A"/>
                 </a:solidFill>
                 <a:latin typeface="Calibri" pitchFamily="34" charset="0"/>
                 <a:ea typeface="Calibri" pitchFamily="34" charset="-122"/>
@@ -22167,7 +22167,7 @@
             <a:r>
               <a:rPr lang="en-US" sz="3400" b="1" dirty="0">
                 <a:solidFill>
-                  <a:srgbClr val="41639E"/>
+                  <a:srgbClr val="1E2B4A"/>
                 </a:solidFill>
                 <a:latin typeface="Calibri" pitchFamily="34" charset="0"/>
                 <a:ea typeface="Calibri" pitchFamily="34" charset="-122"/>
@@ -22366,18 +22366,18 @@
             <a:avLst/>
           </a:prstGeom>
           <a:solidFill>
-            <a:srgbClr val="D96F2B"/>
+            <a:srgbClr val="F9E8DD"/>
           </a:solidFill>
-          <a:ln w="31750">
+          <a:ln w="15875">
             <a:solidFill>
-              <a:srgbClr val="FFFFFF"/>
+              <a:srgbClr val="F1CBB3"/>
             </a:solidFill>
             <a:prstDash val="solid"/>
           </a:ln>
           <a:effectLst>
             <a:outerShdw sx="100000" sy="100000" kx="0" ky="0" algn="bl" rotWithShape="0" blurRad="127000" dist="25400" dir="5400000">
               <a:srgbClr val="1E2B4A">
-                <a:alpha val="18000"/>
+                <a:alpha val="8000"/>
               </a:srgbClr>
             </a:outerShdw>
           </a:effectLst>
@@ -22476,7 +22476,7 @@
             <a:r>
               <a:rPr lang="en-US" sz="3400" b="1" dirty="0">
                 <a:solidFill>
-                  <a:srgbClr val="D96F2B"/>
+                  <a:srgbClr val="1E2B4A"/>
                 </a:solidFill>
                 <a:latin typeface="Calibri" pitchFamily="34" charset="0"/>
                 <a:ea typeface="Calibri" pitchFamily="34" charset="-122"/>
@@ -22577,7 +22577,7 @@
             <a:r>
               <a:rPr lang="en-US" sz="3400" b="1" dirty="0">
                 <a:solidFill>
-                  <a:srgbClr val="D96F2B"/>
+                  <a:srgbClr val="1E2B4A"/>
                 </a:solidFill>
                 <a:latin typeface="Calibri" pitchFamily="34" charset="0"/>
                 <a:ea typeface="Calibri" pitchFamily="34" charset="-122"/>
@@ -23311,18 +23311,18 @@
             <a:avLst/>
           </a:prstGeom>
           <a:solidFill>
-            <a:srgbClr val="D96F2B"/>
+            <a:srgbClr val="F9E8DD"/>
           </a:solidFill>
-          <a:ln w="31750">
+          <a:ln w="15875">
             <a:solidFill>
-              <a:srgbClr val="FFFFFF"/>
+              <a:srgbClr val="F1CBB3"/>
             </a:solidFill>
             <a:prstDash val="solid"/>
           </a:ln>
           <a:effectLst>
             <a:outerShdw sx="100000" sy="100000" kx="0" ky="0" algn="bl" rotWithShape="0" blurRad="127000" dist="25400" dir="5400000">
               <a:srgbClr val="1E2B4A">
-                <a:alpha val="18000"/>
+                <a:alpha val="8000"/>
               </a:srgbClr>
             </a:outerShdw>
           </a:effectLst>
@@ -23367,18 +23367,18 @@
             <a:avLst/>
           </a:prstGeom>
           <a:solidFill>
-            <a:srgbClr val="C98A24"/>
+            <a:srgbClr val="F6ECDC"/>
           </a:solidFill>
-          <a:ln w="31750">
+          <a:ln w="15875">
             <a:solidFill>
-              <a:srgbClr val="FFFFFF"/>
+              <a:srgbClr val="ECD5B0"/>
             </a:solidFill>
             <a:prstDash val="solid"/>
           </a:ln>
           <a:effectLst>
             <a:outerShdw sx="100000" sy="100000" kx="0" ky="0" algn="bl" rotWithShape="0" blurRad="127000" dist="25400" dir="5400000">
               <a:srgbClr val="1E2B4A">
-                <a:alpha val="18000"/>
+                <a:alpha val="8000"/>
               </a:srgbClr>
             </a:outerShdw>
           </a:effectLst>
@@ -23423,18 +23423,18 @@
             <a:avLst/>
           </a:prstGeom>
           <a:solidFill>
-            <a:srgbClr val="3E8C9A"/>
+            <a:srgbClr val="E0EDEF"/>
           </a:solidFill>
-          <a:ln w="31750">
+          <a:ln w="15875">
             <a:solidFill>
-              <a:srgbClr val="FFFFFF"/>
+              <a:srgbClr val="BAD6DB"/>
             </a:solidFill>
             <a:prstDash val="solid"/>
           </a:ln>
           <a:effectLst>
             <a:outerShdw sx="100000" sy="100000" kx="0" ky="0" algn="bl" rotWithShape="0" blurRad="127000" dist="25400" dir="5400000">
               <a:srgbClr val="1E2B4A">
-                <a:alpha val="18000"/>
+                <a:alpha val="8000"/>
               </a:srgbClr>
             </a:outerShdw>
           </a:effectLst>
@@ -23642,18 +23642,18 @@
             <a:avLst/>
           </a:prstGeom>
           <a:solidFill>
-            <a:srgbClr val="41639E"/>
+            <a:srgbClr val="E1E6EF"/>
           </a:solidFill>
-          <a:ln w="31750">
+          <a:ln w="15875">
             <a:solidFill>
-              <a:srgbClr val="FFFFFF"/>
+              <a:srgbClr val="BBC7DC"/>
             </a:solidFill>
             <a:prstDash val="solid"/>
           </a:ln>
           <a:effectLst>
             <a:outerShdw sx="100000" sy="100000" kx="0" ky="0" algn="bl" rotWithShape="0" blurRad="127000" dist="25400" dir="5400000">
               <a:srgbClr val="1E2B4A">
-                <a:alpha val="18000"/>
+                <a:alpha val="8000"/>
               </a:srgbClr>
             </a:outerShdw>
           </a:effectLst>
@@ -24010,18 +24010,18 @@
             <a:avLst/>
           </a:prstGeom>
           <a:solidFill>
-            <a:srgbClr val="D96F2B"/>
+            <a:srgbClr val="F9E8DD"/>
           </a:solidFill>
-          <a:ln w="31750">
+          <a:ln w="15875">
             <a:solidFill>
-              <a:srgbClr val="FFFFFF"/>
+              <a:srgbClr val="F1CBB3"/>
             </a:solidFill>
             <a:prstDash val="solid"/>
           </a:ln>
           <a:effectLst>
             <a:outerShdw sx="100000" sy="100000" kx="0" ky="0" algn="bl" rotWithShape="0" blurRad="127000" dist="25400" dir="5400000">
               <a:srgbClr val="1E2B4A">
-                <a:alpha val="18000"/>
+                <a:alpha val="8000"/>
               </a:srgbClr>
             </a:outerShdw>
           </a:effectLst>
@@ -25567,18 +25567,18 @@
             <a:avLst/>
           </a:prstGeom>
           <a:solidFill>
-            <a:srgbClr val="41639E"/>
+            <a:srgbClr val="E1E6EF"/>
           </a:solidFill>
-          <a:ln w="31750">
+          <a:ln w="15875">
             <a:solidFill>
-              <a:srgbClr val="FFFFFF"/>
+              <a:srgbClr val="BBC7DC"/>
             </a:solidFill>
             <a:prstDash val="solid"/>
           </a:ln>
           <a:effectLst>
             <a:outerShdw sx="100000" sy="100000" kx="0" ky="0" algn="bl" rotWithShape="0" blurRad="127000" dist="25400" dir="5400000">
               <a:srgbClr val="1E2B4A">
-                <a:alpha val="18000"/>
+                <a:alpha val="8000"/>
               </a:srgbClr>
             </a:outerShdw>
           </a:effectLst>
@@ -25623,18 +25623,18 @@
             <a:avLst/>
           </a:prstGeom>
           <a:solidFill>
-            <a:srgbClr val="C98A24"/>
+            <a:srgbClr val="F6ECDC"/>
           </a:solidFill>
-          <a:ln w="31750">
+          <a:ln w="15875">
             <a:solidFill>
-              <a:srgbClr val="FFFFFF"/>
+              <a:srgbClr val="ECD5B0"/>
             </a:solidFill>
             <a:prstDash val="solid"/>
           </a:ln>
           <a:effectLst>
             <a:outerShdw sx="100000" sy="100000" kx="0" ky="0" algn="bl" rotWithShape="0" blurRad="127000" dist="25400" dir="5400000">
               <a:srgbClr val="1E2B4A">
-                <a:alpha val="18000"/>
+                <a:alpha val="8000"/>
               </a:srgbClr>
             </a:outerShdw>
           </a:effectLst>
@@ -25679,18 +25679,18 @@
             <a:avLst/>
           </a:prstGeom>
           <a:solidFill>
-            <a:srgbClr val="D96F2B"/>
+            <a:srgbClr val="F9E8DD"/>
           </a:solidFill>
-          <a:ln w="31750">
+          <a:ln w="15875">
             <a:solidFill>
-              <a:srgbClr val="FFFFFF"/>
+              <a:srgbClr val="F1CBB3"/>
             </a:solidFill>
             <a:prstDash val="solid"/>
           </a:ln>
           <a:effectLst>
             <a:outerShdw sx="100000" sy="100000" kx="0" ky="0" algn="bl" rotWithShape="0" blurRad="127000" dist="25400" dir="5400000">
               <a:srgbClr val="1E2B4A">
-                <a:alpha val="18000"/>
+                <a:alpha val="8000"/>
               </a:srgbClr>
             </a:outerShdw>
           </a:effectLst>

--- a/infographie/presentation_infographique.pptx
+++ b/infographie/presentation_infographique.pptx
@@ -3374,36 +3374,7 @@
       </p:sp>
       <p:sp>
         <p:nvSpPr>
-          <p:cNvPr id="4" name="Shape 2"/>
-          <p:cNvSpPr/>
-          <p:nvPr/>
-        </p:nvSpPr>
-        <p:spPr>
-          <a:xfrm>
-            <a:off x="658368" y="1783080"/>
-            <a:ext cx="5394960" cy="4023360"/>
-          </a:xfrm>
-          <a:prstGeom prst="roundRect">
-            <a:avLst>
-              <a:gd name="adj" fmla="val 1364"/>
-            </a:avLst>
-          </a:prstGeom>
-          <a:solidFill>
-            <a:srgbClr val="F4F5FA"/>
-          </a:solidFill>
-          <a:ln/>
-          <a:effectLst>
-            <a:outerShdw sx="100000" sy="100000" kx="0" ky="0" algn="bl" rotWithShape="0" blurRad="127000" dist="25400" dir="5400000">
-              <a:srgbClr val="1E2B4A">
-                <a:alpha val="10000"/>
-              </a:srgbClr>
-            </a:outerShdw>
-          </a:effectLst>
-        </p:spPr>
-      </p:sp>
-      <p:sp>
-        <p:nvSpPr>
-          <p:cNvPr id="5" name="Text 3"/>
+          <p:cNvPr id="4" name="Text 2"/>
           <p:cNvSpPr/>
           <p:nvPr/>
         </p:nvSpPr>
@@ -3442,7 +3413,7 @@
       </p:sp>
       <p:sp>
         <p:nvSpPr>
-          <p:cNvPr id="6" name="Text 4"/>
+          <p:cNvPr id="5" name="Text 3"/>
           <p:cNvSpPr/>
           <p:nvPr/>
         </p:nvSpPr>
@@ -3470,7 +3441,7 @@
       </p:sp>
       <p:sp>
         <p:nvSpPr>
-          <p:cNvPr id="7" name="Text 5"/>
+          <p:cNvPr id="6" name="Text 4"/>
           <p:cNvSpPr/>
           <p:nvPr/>
         </p:nvSpPr>
@@ -3509,7 +3480,7 @@
       </p:sp>
       <p:sp>
         <p:nvSpPr>
-          <p:cNvPr id="8" name="Text 6"/>
+          <p:cNvPr id="7" name="Text 5"/>
           <p:cNvSpPr/>
           <p:nvPr/>
         </p:nvSpPr>
@@ -3548,7 +3519,7 @@
       </p:sp>
       <p:sp>
         <p:nvSpPr>
-          <p:cNvPr id="9" name="Text 7"/>
+          <p:cNvPr id="8" name="Text 6"/>
           <p:cNvSpPr/>
           <p:nvPr/>
         </p:nvSpPr>
@@ -3587,7 +3558,7 @@
       </p:sp>
       <p:sp>
         <p:nvSpPr>
-          <p:cNvPr id="10" name="Shape 8"/>
+          <p:cNvPr id="9" name="Shape 7"/>
           <p:cNvSpPr/>
           <p:nvPr/>
         </p:nvSpPr>
@@ -3607,7 +3578,7 @@
       </p:sp>
       <p:sp>
         <p:nvSpPr>
-          <p:cNvPr id="11" name="Text 9"/>
+          <p:cNvPr id="10" name="Text 8"/>
           <p:cNvSpPr/>
           <p:nvPr/>
         </p:nvSpPr>
@@ -3646,7 +3617,7 @@
       </p:sp>
       <p:sp>
         <p:nvSpPr>
-          <p:cNvPr id="12" name="Text 10"/>
+          <p:cNvPr id="11" name="Text 9"/>
           <p:cNvSpPr/>
           <p:nvPr/>
         </p:nvSpPr>
@@ -3685,7 +3656,7 @@
       </p:sp>
       <p:sp>
         <p:nvSpPr>
-          <p:cNvPr id="13" name="Text 11"/>
+          <p:cNvPr id="12" name="Text 10"/>
           <p:cNvSpPr/>
           <p:nvPr/>
         </p:nvSpPr>
@@ -3724,7 +3695,7 @@
       </p:sp>
       <p:sp>
         <p:nvSpPr>
-          <p:cNvPr id="14" name="Text 12"/>
+          <p:cNvPr id="13" name="Text 11"/>
           <p:cNvSpPr/>
           <p:nvPr/>
         </p:nvSpPr>
@@ -3763,7 +3734,7 @@
       </p:sp>
       <p:sp>
         <p:nvSpPr>
-          <p:cNvPr id="15" name="Shape 13"/>
+          <p:cNvPr id="14" name="Shape 12"/>
           <p:cNvSpPr/>
           <p:nvPr/>
         </p:nvSpPr>
@@ -3783,7 +3754,7 @@
       </p:sp>
       <p:sp>
         <p:nvSpPr>
-          <p:cNvPr id="16" name="Text 14"/>
+          <p:cNvPr id="15" name="Text 13"/>
           <p:cNvSpPr/>
           <p:nvPr/>
         </p:nvSpPr>
@@ -3822,7 +3793,7 @@
       </p:sp>
       <p:sp>
         <p:nvSpPr>
-          <p:cNvPr id="17" name="Text 15"/>
+          <p:cNvPr id="16" name="Text 14"/>
           <p:cNvSpPr/>
           <p:nvPr/>
         </p:nvSpPr>
@@ -3861,7 +3832,7 @@
       </p:sp>
       <p:sp>
         <p:nvSpPr>
-          <p:cNvPr id="18" name="Text 16"/>
+          <p:cNvPr id="17" name="Text 15"/>
           <p:cNvSpPr/>
           <p:nvPr/>
         </p:nvSpPr>
@@ -3900,7 +3871,7 @@
       </p:sp>
       <p:sp>
         <p:nvSpPr>
-          <p:cNvPr id="19" name="Text 17"/>
+          <p:cNvPr id="18" name="Text 16"/>
           <p:cNvSpPr/>
           <p:nvPr/>
         </p:nvSpPr>
@@ -3939,7 +3910,7 @@
       </p:sp>
       <p:sp>
         <p:nvSpPr>
-          <p:cNvPr id="20" name="Shape 18"/>
+          <p:cNvPr id="19" name="Shape 17"/>
           <p:cNvSpPr/>
           <p:nvPr/>
         </p:nvSpPr>
@@ -3959,7 +3930,7 @@
       </p:sp>
       <p:sp>
         <p:nvSpPr>
-          <p:cNvPr id="21" name="Text 19"/>
+          <p:cNvPr id="20" name="Text 18"/>
           <p:cNvSpPr/>
           <p:nvPr/>
         </p:nvSpPr>
@@ -3998,7 +3969,7 @@
       </p:sp>
       <p:sp>
         <p:nvSpPr>
-          <p:cNvPr id="22" name="Text 20"/>
+          <p:cNvPr id="21" name="Text 19"/>
           <p:cNvSpPr/>
           <p:nvPr/>
         </p:nvSpPr>
@@ -4037,7 +4008,7 @@
       </p:sp>
       <p:sp>
         <p:nvSpPr>
-          <p:cNvPr id="23" name="Text 21"/>
+          <p:cNvPr id="22" name="Text 20"/>
           <p:cNvSpPr/>
           <p:nvPr/>
         </p:nvSpPr>
@@ -4076,7 +4047,7 @@
       </p:sp>
       <p:sp>
         <p:nvSpPr>
-          <p:cNvPr id="24" name="Text 22"/>
+          <p:cNvPr id="23" name="Text 21"/>
           <p:cNvSpPr/>
           <p:nvPr/>
         </p:nvSpPr>
@@ -4115,7 +4086,7 @@
       </p:sp>
       <p:sp>
         <p:nvSpPr>
-          <p:cNvPr id="25" name="Text 23"/>
+          <p:cNvPr id="24" name="Text 22"/>
           <p:cNvSpPr/>
           <p:nvPr/>
         </p:nvSpPr>
@@ -4157,36 +4128,7 @@
       </p:sp>
       <p:sp>
         <p:nvSpPr>
-          <p:cNvPr id="26" name="Shape 24"/>
-          <p:cNvSpPr/>
-          <p:nvPr/>
-        </p:nvSpPr>
-        <p:spPr>
-          <a:xfrm>
-            <a:off x="6263640" y="1783080"/>
-            <a:ext cx="5285232" cy="4023360"/>
-          </a:xfrm>
-          <a:prstGeom prst="roundRect">
-            <a:avLst>
-              <a:gd name="adj" fmla="val 1364"/>
-            </a:avLst>
-          </a:prstGeom>
-          <a:solidFill>
-            <a:srgbClr val="F4F5FA"/>
-          </a:solidFill>
-          <a:ln/>
-          <a:effectLst>
-            <a:outerShdw sx="100000" sy="100000" kx="0" ky="0" algn="bl" rotWithShape="0" blurRad="127000" dist="25400" dir="5400000">
-              <a:srgbClr val="1E2B4A">
-                <a:alpha val="10000"/>
-              </a:srgbClr>
-            </a:outerShdw>
-          </a:effectLst>
-        </p:spPr>
-      </p:sp>
-      <p:sp>
-        <p:nvSpPr>
-          <p:cNvPr id="27" name="Text 25"/>
+          <p:cNvPr id="25" name="Text 23"/>
           <p:cNvSpPr/>
           <p:nvPr/>
         </p:nvSpPr>
@@ -4225,7 +4167,7 @@
       </p:sp>
       <p:sp>
         <p:nvSpPr>
-          <p:cNvPr id="28" name="Text 26"/>
+          <p:cNvPr id="26" name="Text 24"/>
           <p:cNvSpPr/>
           <p:nvPr/>
         </p:nvSpPr>
@@ -4264,7 +4206,7 @@
       </p:sp>
       <p:sp>
         <p:nvSpPr>
-          <p:cNvPr id="29" name="Text 27"/>
+          <p:cNvPr id="27" name="Text 25"/>
           <p:cNvSpPr/>
           <p:nvPr/>
         </p:nvSpPr>
@@ -4303,7 +4245,7 @@
       </p:sp>
       <p:sp>
         <p:nvSpPr>
-          <p:cNvPr id="30" name="Shape 28"/>
+          <p:cNvPr id="28" name="Shape 26"/>
           <p:cNvSpPr/>
           <p:nvPr/>
         </p:nvSpPr>
@@ -4325,7 +4267,7 @@
       </p:sp>
       <p:sp>
         <p:nvSpPr>
-          <p:cNvPr id="31" name="Text 29"/>
+          <p:cNvPr id="29" name="Text 27"/>
           <p:cNvSpPr/>
           <p:nvPr/>
         </p:nvSpPr>
@@ -4364,7 +4306,7 @@
       </p:sp>
       <p:sp>
         <p:nvSpPr>
-          <p:cNvPr id="32" name="Text 30"/>
+          <p:cNvPr id="30" name="Text 28"/>
           <p:cNvSpPr/>
           <p:nvPr/>
         </p:nvSpPr>
@@ -4403,7 +4345,7 @@
       </p:sp>
       <p:sp>
         <p:nvSpPr>
-          <p:cNvPr id="33" name="Shape 31"/>
+          <p:cNvPr id="31" name="Shape 29"/>
           <p:cNvSpPr/>
           <p:nvPr/>
         </p:nvSpPr>
@@ -4425,7 +4367,7 @@
       </p:sp>
       <p:sp>
         <p:nvSpPr>
-          <p:cNvPr id="34" name="Text 32"/>
+          <p:cNvPr id="32" name="Text 30"/>
           <p:cNvSpPr/>
           <p:nvPr/>
         </p:nvSpPr>
@@ -4464,7 +4406,7 @@
       </p:sp>
       <p:sp>
         <p:nvSpPr>
-          <p:cNvPr id="35" name="Text 33"/>
+          <p:cNvPr id="33" name="Text 31"/>
           <p:cNvSpPr/>
           <p:nvPr/>
         </p:nvSpPr>
@@ -4503,7 +4445,7 @@
       </p:sp>
       <p:sp>
         <p:nvSpPr>
-          <p:cNvPr id="36" name="Text 34"/>
+          <p:cNvPr id="34" name="Text 32"/>
           <p:cNvSpPr/>
           <p:nvPr/>
         </p:nvSpPr>
@@ -4542,7 +4484,7 @@
       </p:sp>
       <p:sp>
         <p:nvSpPr>
-          <p:cNvPr id="37" name="Shape 35"/>
+          <p:cNvPr id="35" name="Shape 33"/>
           <p:cNvSpPr/>
           <p:nvPr/>
         </p:nvSpPr>
@@ -4564,7 +4506,7 @@
       </p:sp>
       <p:sp>
         <p:nvSpPr>
-          <p:cNvPr id="38" name="Text 36"/>
+          <p:cNvPr id="36" name="Text 34"/>
           <p:cNvSpPr/>
           <p:nvPr/>
         </p:nvSpPr>
@@ -4603,7 +4545,7 @@
       </p:sp>
       <p:sp>
         <p:nvSpPr>
-          <p:cNvPr id="39" name="Text 37"/>
+          <p:cNvPr id="37" name="Text 35"/>
           <p:cNvSpPr/>
           <p:nvPr/>
         </p:nvSpPr>
@@ -4642,7 +4584,7 @@
       </p:sp>
       <p:sp>
         <p:nvSpPr>
-          <p:cNvPr id="40" name="Shape 38"/>
+          <p:cNvPr id="38" name="Shape 36"/>
           <p:cNvSpPr/>
           <p:nvPr/>
         </p:nvSpPr>
@@ -4664,7 +4606,7 @@
       </p:sp>
       <p:sp>
         <p:nvSpPr>
-          <p:cNvPr id="41" name="Text 39"/>
+          <p:cNvPr id="39" name="Text 37"/>
           <p:cNvSpPr/>
           <p:nvPr/>
         </p:nvSpPr>
@@ -4703,7 +4645,7 @@
       </p:sp>
       <p:sp>
         <p:nvSpPr>
-          <p:cNvPr id="42" name="Text 40"/>
+          <p:cNvPr id="40" name="Text 38"/>
           <p:cNvSpPr/>
           <p:nvPr/>
         </p:nvSpPr>
@@ -4745,7 +4687,7 @@
       </p:sp>
       <p:sp>
         <p:nvSpPr>
-          <p:cNvPr id="43" name="Text 41"/>
+          <p:cNvPr id="41" name="Text 39"/>
           <p:cNvSpPr/>
           <p:nvPr/>
         </p:nvSpPr>
@@ -4784,7 +4726,7 @@
       </p:sp>
       <p:sp>
         <p:nvSpPr>
-          <p:cNvPr id="44" name="Text 42"/>
+          <p:cNvPr id="42" name="Text 40"/>
           <p:cNvSpPr/>
           <p:nvPr/>
         </p:nvSpPr>
@@ -4823,7 +4765,7 @@
       </p:sp>
       <p:pic>
         <p:nvPicPr>
-          <p:cNvPr id="45" name="Image 0" descr="logos/logo_ensae_new.png">    </p:cNvPr>
+          <p:cNvPr id="43" name="Image 0" descr="logos/logo_ensae_new.png">    </p:cNvPr>
           <p:cNvPicPr>
             <a:picLocks noChangeAspect="1"/>
           </p:cNvPicPr>
@@ -4960,36 +4902,7 @@
       </p:sp>
       <p:sp>
         <p:nvSpPr>
-          <p:cNvPr id="4" name="Shape 2"/>
-          <p:cNvSpPr/>
-          <p:nvPr/>
-        </p:nvSpPr>
-        <p:spPr>
-          <a:xfrm>
-            <a:off x="658368" y="1737360"/>
-            <a:ext cx="2606040" cy="1645920"/>
-          </a:xfrm>
-          <a:prstGeom prst="roundRect">
-            <a:avLst>
-              <a:gd name="adj" fmla="val 3333"/>
-            </a:avLst>
-          </a:prstGeom>
-          <a:solidFill>
-            <a:srgbClr val="F4F5FA"/>
-          </a:solidFill>
-          <a:ln/>
-          <a:effectLst>
-            <a:outerShdw sx="100000" sy="100000" kx="0" ky="0" algn="bl" rotWithShape="0" blurRad="127000" dist="25400" dir="5400000">
-              <a:srgbClr val="1E2B4A">
-                <a:alpha val="10000"/>
-              </a:srgbClr>
-            </a:outerShdw>
-          </a:effectLst>
-        </p:spPr>
-      </p:sp>
-      <p:sp>
-        <p:nvSpPr>
-          <p:cNvPr id="5" name="Text 3"/>
+          <p:cNvPr id="4" name="Text 2"/>
           <p:cNvSpPr/>
           <p:nvPr/>
         </p:nvSpPr>
@@ -5028,7 +4941,7 @@
       </p:sp>
       <p:sp>
         <p:nvSpPr>
-          <p:cNvPr id="6" name="Text 4"/>
+          <p:cNvPr id="5" name="Text 3"/>
           <p:cNvSpPr/>
           <p:nvPr/>
         </p:nvSpPr>
@@ -5090,36 +5003,7 @@
       </p:sp>
       <p:sp>
         <p:nvSpPr>
-          <p:cNvPr id="7" name="Shape 5"/>
-          <p:cNvSpPr/>
-          <p:nvPr/>
-        </p:nvSpPr>
-        <p:spPr>
-          <a:xfrm>
-            <a:off x="3410712" y="1737360"/>
-            <a:ext cx="2606040" cy="1645920"/>
-          </a:xfrm>
-          <a:prstGeom prst="roundRect">
-            <a:avLst>
-              <a:gd name="adj" fmla="val 3333"/>
-            </a:avLst>
-          </a:prstGeom>
-          <a:solidFill>
-            <a:srgbClr val="F4F5FA"/>
-          </a:solidFill>
-          <a:ln/>
-          <a:effectLst>
-            <a:outerShdw sx="100000" sy="100000" kx="0" ky="0" algn="bl" rotWithShape="0" blurRad="127000" dist="25400" dir="5400000">
-              <a:srgbClr val="1E2B4A">
-                <a:alpha val="10000"/>
-              </a:srgbClr>
-            </a:outerShdw>
-          </a:effectLst>
-        </p:spPr>
-      </p:sp>
-      <p:sp>
-        <p:nvSpPr>
-          <p:cNvPr id="8" name="Text 6"/>
+          <p:cNvPr id="6" name="Text 4"/>
           <p:cNvSpPr/>
           <p:nvPr/>
         </p:nvSpPr>
@@ -5158,7 +5042,7 @@
       </p:sp>
       <p:sp>
         <p:nvSpPr>
-          <p:cNvPr id="9" name="Text 7"/>
+          <p:cNvPr id="7" name="Text 5"/>
           <p:cNvSpPr/>
           <p:nvPr/>
         </p:nvSpPr>
@@ -5220,36 +5104,7 @@
       </p:sp>
       <p:sp>
         <p:nvSpPr>
-          <p:cNvPr id="10" name="Shape 8"/>
-          <p:cNvSpPr/>
-          <p:nvPr/>
-        </p:nvSpPr>
-        <p:spPr>
-          <a:xfrm>
-            <a:off x="6163056" y="1737360"/>
-            <a:ext cx="2606040" cy="1645920"/>
-          </a:xfrm>
-          <a:prstGeom prst="roundRect">
-            <a:avLst>
-              <a:gd name="adj" fmla="val 3333"/>
-            </a:avLst>
-          </a:prstGeom>
-          <a:solidFill>
-            <a:srgbClr val="F4F5FA"/>
-          </a:solidFill>
-          <a:ln/>
-          <a:effectLst>
-            <a:outerShdw sx="100000" sy="100000" kx="0" ky="0" algn="bl" rotWithShape="0" blurRad="127000" dist="25400" dir="5400000">
-              <a:srgbClr val="1E2B4A">
-                <a:alpha val="10000"/>
-              </a:srgbClr>
-            </a:outerShdw>
-          </a:effectLst>
-        </p:spPr>
-      </p:sp>
-      <p:sp>
-        <p:nvSpPr>
-          <p:cNvPr id="11" name="Text 9"/>
+          <p:cNvPr id="8" name="Text 6"/>
           <p:cNvSpPr/>
           <p:nvPr/>
         </p:nvSpPr>
@@ -5288,7 +5143,7 @@
       </p:sp>
       <p:sp>
         <p:nvSpPr>
-          <p:cNvPr id="12" name="Text 10"/>
+          <p:cNvPr id="9" name="Text 7"/>
           <p:cNvSpPr/>
           <p:nvPr/>
         </p:nvSpPr>
@@ -5350,36 +5205,7 @@
       </p:sp>
       <p:sp>
         <p:nvSpPr>
-          <p:cNvPr id="13" name="Shape 11"/>
-          <p:cNvSpPr/>
-          <p:nvPr/>
-        </p:nvSpPr>
-        <p:spPr>
-          <a:xfrm>
-            <a:off x="8915400" y="1737360"/>
-            <a:ext cx="2606040" cy="1645920"/>
-          </a:xfrm>
-          <a:prstGeom prst="roundRect">
-            <a:avLst>
-              <a:gd name="adj" fmla="val 3333"/>
-            </a:avLst>
-          </a:prstGeom>
-          <a:solidFill>
-            <a:srgbClr val="F4F5FA"/>
-          </a:solidFill>
-          <a:ln/>
-          <a:effectLst>
-            <a:outerShdw sx="100000" sy="100000" kx="0" ky="0" algn="bl" rotWithShape="0" blurRad="127000" dist="25400" dir="5400000">
-              <a:srgbClr val="1E2B4A">
-                <a:alpha val="10000"/>
-              </a:srgbClr>
-            </a:outerShdw>
-          </a:effectLst>
-        </p:spPr>
-      </p:sp>
-      <p:sp>
-        <p:nvSpPr>
-          <p:cNvPr id="14" name="Text 12"/>
+          <p:cNvPr id="10" name="Text 8"/>
           <p:cNvSpPr/>
           <p:nvPr/>
         </p:nvSpPr>
@@ -5418,7 +5244,7 @@
       </p:sp>
       <p:sp>
         <p:nvSpPr>
-          <p:cNvPr id="15" name="Text 13"/>
+          <p:cNvPr id="11" name="Text 9"/>
           <p:cNvSpPr/>
           <p:nvPr/>
         </p:nvSpPr>
@@ -5480,36 +5306,7 @@
       </p:sp>
       <p:sp>
         <p:nvSpPr>
-          <p:cNvPr id="16" name="Shape 14"/>
-          <p:cNvSpPr/>
-          <p:nvPr/>
-        </p:nvSpPr>
-        <p:spPr>
-          <a:xfrm>
-            <a:off x="658368" y="3611880"/>
-            <a:ext cx="10890504" cy="2194560"/>
-          </a:xfrm>
-          <a:prstGeom prst="roundRect">
-            <a:avLst>
-              <a:gd name="adj" fmla="val 2500"/>
-            </a:avLst>
-          </a:prstGeom>
-          <a:solidFill>
-            <a:srgbClr val="F4F5FA"/>
-          </a:solidFill>
-          <a:ln/>
-          <a:effectLst>
-            <a:outerShdw sx="100000" sy="100000" kx="0" ky="0" algn="bl" rotWithShape="0" blurRad="127000" dist="25400" dir="5400000">
-              <a:srgbClr val="1E2B4A">
-                <a:alpha val="10000"/>
-              </a:srgbClr>
-            </a:outerShdw>
-          </a:effectLst>
-        </p:spPr>
-      </p:sp>
-      <p:sp>
-        <p:nvSpPr>
-          <p:cNvPr id="17" name="Text 15"/>
+          <p:cNvPr id="12" name="Text 10"/>
           <p:cNvSpPr/>
           <p:nvPr/>
         </p:nvSpPr>
@@ -5548,7 +5345,7 @@
       </p:sp>
       <p:sp>
         <p:nvSpPr>
-          <p:cNvPr id="18" name="Text 16"/>
+          <p:cNvPr id="13" name="Text 11"/>
           <p:cNvSpPr/>
           <p:nvPr/>
         </p:nvSpPr>
@@ -5587,7 +5384,7 @@
       </p:sp>
       <p:sp>
         <p:nvSpPr>
-          <p:cNvPr id="19" name="Shape 17"/>
+          <p:cNvPr id="14" name="Shape 12"/>
           <p:cNvSpPr/>
           <p:nvPr/>
         </p:nvSpPr>
@@ -5609,7 +5406,7 @@
       </p:sp>
       <p:sp>
         <p:nvSpPr>
-          <p:cNvPr id="20" name="Shape 18"/>
+          <p:cNvPr id="15" name="Shape 13"/>
           <p:cNvSpPr/>
           <p:nvPr/>
         </p:nvSpPr>
@@ -5631,7 +5428,7 @@
       </p:sp>
       <p:sp>
         <p:nvSpPr>
-          <p:cNvPr id="21" name="Text 19"/>
+          <p:cNvPr id="16" name="Text 14"/>
           <p:cNvSpPr/>
           <p:nvPr/>
         </p:nvSpPr>
@@ -5670,7 +5467,7 @@
       </p:sp>
       <p:sp>
         <p:nvSpPr>
-          <p:cNvPr id="22" name="Text 20"/>
+          <p:cNvPr id="17" name="Text 15"/>
           <p:cNvSpPr/>
           <p:nvPr/>
         </p:nvSpPr>
@@ -5709,7 +5506,7 @@
       </p:sp>
       <p:sp>
         <p:nvSpPr>
-          <p:cNvPr id="23" name="Shape 21"/>
+          <p:cNvPr id="18" name="Shape 16"/>
           <p:cNvSpPr/>
           <p:nvPr/>
         </p:nvSpPr>
@@ -5731,7 +5528,7 @@
       </p:sp>
       <p:sp>
         <p:nvSpPr>
-          <p:cNvPr id="24" name="Shape 22"/>
+          <p:cNvPr id="19" name="Shape 17"/>
           <p:cNvSpPr/>
           <p:nvPr/>
         </p:nvSpPr>
@@ -5753,7 +5550,7 @@
       </p:sp>
       <p:sp>
         <p:nvSpPr>
-          <p:cNvPr id="25" name="Text 23"/>
+          <p:cNvPr id="20" name="Text 18"/>
           <p:cNvSpPr/>
           <p:nvPr/>
         </p:nvSpPr>
@@ -5792,7 +5589,7 @@
       </p:sp>
       <p:sp>
         <p:nvSpPr>
-          <p:cNvPr id="26" name="Text 24"/>
+          <p:cNvPr id="21" name="Text 19"/>
           <p:cNvSpPr/>
           <p:nvPr/>
         </p:nvSpPr>
@@ -5831,7 +5628,7 @@
       </p:sp>
       <p:sp>
         <p:nvSpPr>
-          <p:cNvPr id="27" name="Shape 25"/>
+          <p:cNvPr id="22" name="Shape 20"/>
           <p:cNvSpPr/>
           <p:nvPr/>
         </p:nvSpPr>
@@ -5853,7 +5650,7 @@
       </p:sp>
       <p:sp>
         <p:nvSpPr>
-          <p:cNvPr id="28" name="Shape 26"/>
+          <p:cNvPr id="23" name="Shape 21"/>
           <p:cNvSpPr/>
           <p:nvPr/>
         </p:nvSpPr>
@@ -5875,7 +5672,7 @@
       </p:sp>
       <p:sp>
         <p:nvSpPr>
-          <p:cNvPr id="29" name="Text 27"/>
+          <p:cNvPr id="24" name="Text 22"/>
           <p:cNvSpPr/>
           <p:nvPr/>
         </p:nvSpPr>
@@ -5914,7 +5711,7 @@
       </p:sp>
       <p:sp>
         <p:nvSpPr>
-          <p:cNvPr id="30" name="Text 28"/>
+          <p:cNvPr id="25" name="Text 23"/>
           <p:cNvSpPr/>
           <p:nvPr/>
         </p:nvSpPr>
@@ -5953,7 +5750,7 @@
       </p:sp>
       <p:sp>
         <p:nvSpPr>
-          <p:cNvPr id="31" name="Shape 29"/>
+          <p:cNvPr id="26" name="Shape 24"/>
           <p:cNvSpPr/>
           <p:nvPr/>
         </p:nvSpPr>
@@ -5975,7 +5772,7 @@
       </p:sp>
       <p:sp>
         <p:nvSpPr>
-          <p:cNvPr id="32" name="Shape 30"/>
+          <p:cNvPr id="27" name="Shape 25"/>
           <p:cNvSpPr/>
           <p:nvPr/>
         </p:nvSpPr>
@@ -5997,7 +5794,7 @@
       </p:sp>
       <p:sp>
         <p:nvSpPr>
-          <p:cNvPr id="33" name="Text 31"/>
+          <p:cNvPr id="28" name="Text 26"/>
           <p:cNvSpPr/>
           <p:nvPr/>
         </p:nvSpPr>
@@ -6036,7 +5833,7 @@
       </p:sp>
       <p:sp>
         <p:nvSpPr>
-          <p:cNvPr id="34" name="Text 32"/>
+          <p:cNvPr id="29" name="Text 27"/>
           <p:cNvSpPr/>
           <p:nvPr/>
         </p:nvSpPr>
@@ -6075,7 +5872,7 @@
       </p:sp>
       <p:sp>
         <p:nvSpPr>
-          <p:cNvPr id="35" name="Shape 33"/>
+          <p:cNvPr id="30" name="Shape 28"/>
           <p:cNvSpPr/>
           <p:nvPr/>
         </p:nvSpPr>
@@ -6097,7 +5894,7 @@
       </p:sp>
       <p:sp>
         <p:nvSpPr>
-          <p:cNvPr id="36" name="Shape 34"/>
+          <p:cNvPr id="31" name="Shape 29"/>
           <p:cNvSpPr/>
           <p:nvPr/>
         </p:nvSpPr>
@@ -6119,7 +5916,7 @@
       </p:sp>
       <p:sp>
         <p:nvSpPr>
-          <p:cNvPr id="37" name="Text 35"/>
+          <p:cNvPr id="32" name="Text 30"/>
           <p:cNvSpPr/>
           <p:nvPr/>
         </p:nvSpPr>
@@ -6158,7 +5955,7 @@
       </p:sp>
       <p:sp>
         <p:nvSpPr>
-          <p:cNvPr id="38" name="Text 36"/>
+          <p:cNvPr id="33" name="Text 31"/>
           <p:cNvSpPr/>
           <p:nvPr/>
         </p:nvSpPr>
@@ -6197,7 +5994,7 @@
       </p:sp>
       <p:sp>
         <p:nvSpPr>
-          <p:cNvPr id="39" name="Shape 37"/>
+          <p:cNvPr id="34" name="Shape 32"/>
           <p:cNvSpPr/>
           <p:nvPr/>
         </p:nvSpPr>
@@ -6219,7 +6016,7 @@
       </p:sp>
       <p:sp>
         <p:nvSpPr>
-          <p:cNvPr id="40" name="Shape 38"/>
+          <p:cNvPr id="35" name="Shape 33"/>
           <p:cNvSpPr/>
           <p:nvPr/>
         </p:nvSpPr>
@@ -6241,7 +6038,7 @@
       </p:sp>
       <p:sp>
         <p:nvSpPr>
-          <p:cNvPr id="41" name="Text 39"/>
+          <p:cNvPr id="36" name="Text 34"/>
           <p:cNvSpPr/>
           <p:nvPr/>
         </p:nvSpPr>
@@ -6280,7 +6077,7 @@
       </p:sp>
       <p:sp>
         <p:nvSpPr>
-          <p:cNvPr id="42" name="Text 40"/>
+          <p:cNvPr id="37" name="Text 35"/>
           <p:cNvSpPr/>
           <p:nvPr/>
         </p:nvSpPr>
@@ -6319,7 +6116,7 @@
       </p:sp>
       <p:sp>
         <p:nvSpPr>
-          <p:cNvPr id="43" name="Text 41"/>
+          <p:cNvPr id="38" name="Text 36"/>
           <p:cNvSpPr/>
           <p:nvPr/>
         </p:nvSpPr>
@@ -6358,7 +6155,7 @@
       </p:sp>
       <p:pic>
         <p:nvPicPr>
-          <p:cNvPr id="44" name="Image 0" descr="logos/logo_ensae_new.png">    </p:cNvPr>
+          <p:cNvPr id="39" name="Image 0" descr="logos/logo_ensae_new.png">    </p:cNvPr>
           <p:cNvPicPr>
             <a:picLocks noChangeAspect="1"/>
           </p:cNvPicPr>
@@ -6471,13 +6268,6 @@
             <a:srgbClr val="1E2B4A"/>
           </a:solidFill>
           <a:ln/>
-          <a:effectLst>
-            <a:outerShdw sx="100000" sy="100000" kx="0" ky="0" algn="bl" rotWithShape="0" blurRad="127000" dist="25400" dir="5400000">
-              <a:srgbClr val="1E2B4A">
-                <a:alpha val="10000"/>
-              </a:srgbClr>
-            </a:outerShdw>
-          </a:effectLst>
         </p:spPr>
       </p:sp>
       <p:sp>
@@ -6641,36 +6431,7 @@
       </p:sp>
       <p:sp>
         <p:nvSpPr>
-          <p:cNvPr id="8" name="Shape 6"/>
-          <p:cNvSpPr/>
-          <p:nvPr/>
-        </p:nvSpPr>
-        <p:spPr>
-          <a:xfrm>
-            <a:off x="4206240" y="1298448"/>
-            <a:ext cx="4023360" cy="4526280"/>
-          </a:xfrm>
-          <a:prstGeom prst="roundRect">
-            <a:avLst>
-              <a:gd name="adj" fmla="val 1364"/>
-            </a:avLst>
-          </a:prstGeom>
-          <a:solidFill>
-            <a:srgbClr val="F4F5FA"/>
-          </a:solidFill>
-          <a:ln/>
-          <a:effectLst>
-            <a:outerShdw sx="100000" sy="100000" kx="0" ky="0" algn="bl" rotWithShape="0" blurRad="127000" dist="25400" dir="5400000">
-              <a:srgbClr val="1E2B4A">
-                <a:alpha val="10000"/>
-              </a:srgbClr>
-            </a:outerShdw>
-          </a:effectLst>
-        </p:spPr>
-      </p:sp>
-      <p:sp>
-        <p:nvSpPr>
-          <p:cNvPr id="9" name="Text 7"/>
+          <p:cNvPr id="8" name="Text 6"/>
           <p:cNvSpPr/>
           <p:nvPr/>
         </p:nvSpPr>
@@ -6709,7 +6470,7 @@
       </p:sp>
       <p:sp>
         <p:nvSpPr>
-          <p:cNvPr id="10" name="Shape 8"/>
+          <p:cNvPr id="9" name="Shape 7"/>
           <p:cNvSpPr/>
           <p:nvPr/>
         </p:nvSpPr>
@@ -6731,7 +6492,7 @@
       </p:sp>
       <p:sp>
         <p:nvSpPr>
-          <p:cNvPr id="11" name="Text 9"/>
+          <p:cNvPr id="10" name="Text 8"/>
           <p:cNvSpPr/>
           <p:nvPr/>
         </p:nvSpPr>
@@ -6770,7 +6531,7 @@
       </p:sp>
       <p:sp>
         <p:nvSpPr>
-          <p:cNvPr id="12" name="Text 10"/>
+          <p:cNvPr id="11" name="Text 9"/>
           <p:cNvSpPr/>
           <p:nvPr/>
         </p:nvSpPr>
@@ -6812,7 +6573,7 @@
       </p:sp>
       <p:sp>
         <p:nvSpPr>
-          <p:cNvPr id="13" name="Shape 11"/>
+          <p:cNvPr id="12" name="Shape 10"/>
           <p:cNvSpPr/>
           <p:nvPr/>
         </p:nvSpPr>
@@ -6834,7 +6595,7 @@
       </p:sp>
       <p:sp>
         <p:nvSpPr>
-          <p:cNvPr id="14" name="Text 12"/>
+          <p:cNvPr id="13" name="Text 11"/>
           <p:cNvSpPr/>
           <p:nvPr/>
         </p:nvSpPr>
@@ -6873,7 +6634,7 @@
       </p:sp>
       <p:sp>
         <p:nvSpPr>
-          <p:cNvPr id="15" name="Text 13"/>
+          <p:cNvPr id="14" name="Text 12"/>
           <p:cNvSpPr/>
           <p:nvPr/>
         </p:nvSpPr>
@@ -6935,7 +6696,7 @@
       </p:sp>
       <p:sp>
         <p:nvSpPr>
-          <p:cNvPr id="16" name="Shape 14"/>
+          <p:cNvPr id="15" name="Shape 13"/>
           <p:cNvSpPr/>
           <p:nvPr/>
         </p:nvSpPr>
@@ -6955,7 +6716,7 @@
       </p:sp>
       <p:sp>
         <p:nvSpPr>
-          <p:cNvPr id="17" name="Text 15"/>
+          <p:cNvPr id="16" name="Text 14"/>
           <p:cNvSpPr/>
           <p:nvPr/>
         </p:nvSpPr>
@@ -6994,36 +6755,7 @@
       </p:sp>
       <p:sp>
         <p:nvSpPr>
-          <p:cNvPr id="18" name="Shape 16"/>
-          <p:cNvSpPr/>
-          <p:nvPr/>
-        </p:nvSpPr>
-        <p:spPr>
-          <a:xfrm>
-            <a:off x="8485632" y="1298448"/>
-            <a:ext cx="3063240" cy="4526280"/>
-          </a:xfrm>
-          <a:prstGeom prst="roundRect">
-            <a:avLst>
-              <a:gd name="adj" fmla="val 1791"/>
-            </a:avLst>
-          </a:prstGeom>
-          <a:solidFill>
-            <a:srgbClr val="F4F5FA"/>
-          </a:solidFill>
-          <a:ln/>
-          <a:effectLst>
-            <a:outerShdw sx="100000" sy="100000" kx="0" ky="0" algn="bl" rotWithShape="0" blurRad="127000" dist="25400" dir="5400000">
-              <a:srgbClr val="1E2B4A">
-                <a:alpha val="10000"/>
-              </a:srgbClr>
-            </a:outerShdw>
-          </a:effectLst>
-        </p:spPr>
-      </p:sp>
-      <p:sp>
-        <p:nvSpPr>
-          <p:cNvPr id="19" name="Text 17"/>
+          <p:cNvPr id="17" name="Text 15"/>
           <p:cNvSpPr/>
           <p:nvPr/>
         </p:nvSpPr>
@@ -7062,7 +6794,7 @@
       </p:sp>
       <p:sp>
         <p:nvSpPr>
-          <p:cNvPr id="20" name="Text 18"/>
+          <p:cNvPr id="18" name="Text 16"/>
           <p:cNvSpPr/>
           <p:nvPr/>
         </p:nvSpPr>
@@ -7104,7 +6836,7 @@
       </p:sp>
       <p:sp>
         <p:nvSpPr>
-          <p:cNvPr id="21" name="Text 19"/>
+          <p:cNvPr id="19" name="Text 17"/>
           <p:cNvSpPr/>
           <p:nvPr/>
         </p:nvSpPr>
@@ -7143,7 +6875,7 @@
       </p:sp>
       <p:sp>
         <p:nvSpPr>
-          <p:cNvPr id="22" name="Shape 20"/>
+          <p:cNvPr id="20" name="Shape 18"/>
           <p:cNvSpPr/>
           <p:nvPr/>
         </p:nvSpPr>
@@ -7163,7 +6895,7 @@
       </p:sp>
       <p:sp>
         <p:nvSpPr>
-          <p:cNvPr id="23" name="Text 21"/>
+          <p:cNvPr id="21" name="Text 19"/>
           <p:cNvSpPr/>
           <p:nvPr/>
         </p:nvSpPr>
@@ -7205,7 +6937,7 @@
       </p:sp>
       <p:sp>
         <p:nvSpPr>
-          <p:cNvPr id="24" name="Text 22"/>
+          <p:cNvPr id="22" name="Text 20"/>
           <p:cNvSpPr/>
           <p:nvPr/>
         </p:nvSpPr>
@@ -7244,7 +6976,7 @@
       </p:sp>
       <p:sp>
         <p:nvSpPr>
-          <p:cNvPr id="25" name="Shape 23"/>
+          <p:cNvPr id="23" name="Shape 21"/>
           <p:cNvSpPr/>
           <p:nvPr/>
         </p:nvSpPr>
@@ -7264,7 +6996,7 @@
       </p:sp>
       <p:sp>
         <p:nvSpPr>
-          <p:cNvPr id="26" name="Text 24"/>
+          <p:cNvPr id="24" name="Text 22"/>
           <p:cNvSpPr/>
           <p:nvPr/>
         </p:nvSpPr>
@@ -7306,7 +7038,7 @@
       </p:sp>
       <p:sp>
         <p:nvSpPr>
-          <p:cNvPr id="27" name="Text 25"/>
+          <p:cNvPr id="25" name="Text 23"/>
           <p:cNvSpPr/>
           <p:nvPr/>
         </p:nvSpPr>
@@ -7345,7 +7077,7 @@
       </p:sp>
       <p:sp>
         <p:nvSpPr>
-          <p:cNvPr id="28" name="Shape 26"/>
+          <p:cNvPr id="26" name="Shape 24"/>
           <p:cNvSpPr/>
           <p:nvPr/>
         </p:nvSpPr>
@@ -7365,7 +7097,7 @@
       </p:sp>
       <p:sp>
         <p:nvSpPr>
-          <p:cNvPr id="29" name="Text 27"/>
+          <p:cNvPr id="27" name="Text 25"/>
           <p:cNvSpPr/>
           <p:nvPr/>
         </p:nvSpPr>
@@ -7407,7 +7139,7 @@
       </p:sp>
       <p:sp>
         <p:nvSpPr>
-          <p:cNvPr id="30" name="Text 28"/>
+          <p:cNvPr id="28" name="Text 26"/>
           <p:cNvSpPr/>
           <p:nvPr/>
         </p:nvSpPr>
@@ -7446,7 +7178,7 @@
       </p:sp>
       <p:sp>
         <p:nvSpPr>
-          <p:cNvPr id="31" name="Shape 29"/>
+          <p:cNvPr id="29" name="Shape 27"/>
           <p:cNvSpPr/>
           <p:nvPr/>
         </p:nvSpPr>
@@ -7466,7 +7198,7 @@
       </p:sp>
       <p:sp>
         <p:nvSpPr>
-          <p:cNvPr id="32" name="Text 30"/>
+          <p:cNvPr id="30" name="Text 28"/>
           <p:cNvSpPr/>
           <p:nvPr/>
         </p:nvSpPr>
@@ -7508,7 +7240,7 @@
       </p:sp>
       <p:sp>
         <p:nvSpPr>
-          <p:cNvPr id="33" name="Text 31"/>
+          <p:cNvPr id="31" name="Text 29"/>
           <p:cNvSpPr/>
           <p:nvPr/>
         </p:nvSpPr>
@@ -7547,7 +7279,7 @@
       </p:sp>
       <p:sp>
         <p:nvSpPr>
-          <p:cNvPr id="34" name="Text 32"/>
+          <p:cNvPr id="32" name="Text 30"/>
           <p:cNvSpPr/>
           <p:nvPr/>
         </p:nvSpPr>
@@ -7586,7 +7318,7 @@
       </p:sp>
       <p:pic>
         <p:nvPicPr>
-          <p:cNvPr id="35" name="Image 0" descr="logos/logo_ensae_new.png">    </p:cNvPr>
+          <p:cNvPr id="33" name="Image 0" descr="logos/logo_ensae_new.png">    </p:cNvPr>
           <p:cNvPicPr>
             <a:picLocks noChangeAspect="1"/>
           </p:cNvPicPr>
@@ -7723,36 +7455,7 @@
       </p:sp>
       <p:sp>
         <p:nvSpPr>
-          <p:cNvPr id="4" name="Shape 2"/>
-          <p:cNvSpPr/>
-          <p:nvPr/>
-        </p:nvSpPr>
-        <p:spPr>
-          <a:xfrm>
-            <a:off x="658368" y="1783080"/>
-            <a:ext cx="6583680" cy="4023360"/>
-          </a:xfrm>
-          <a:prstGeom prst="roundRect">
-            <a:avLst>
-              <a:gd name="adj" fmla="val 1364"/>
-            </a:avLst>
-          </a:prstGeom>
-          <a:solidFill>
-            <a:srgbClr val="F4F5FA"/>
-          </a:solidFill>
-          <a:ln/>
-          <a:effectLst>
-            <a:outerShdw sx="100000" sy="100000" kx="0" ky="0" algn="bl" rotWithShape="0" blurRad="127000" dist="25400" dir="5400000">
-              <a:srgbClr val="1E2B4A">
-                <a:alpha val="10000"/>
-              </a:srgbClr>
-            </a:outerShdw>
-          </a:effectLst>
-        </p:spPr>
-      </p:sp>
-      <p:sp>
-        <p:nvSpPr>
-          <p:cNvPr id="5" name="Text 3"/>
+          <p:cNvPr id="4" name="Text 2"/>
           <p:cNvSpPr/>
           <p:nvPr/>
         </p:nvSpPr>
@@ -7791,7 +7494,7 @@
       </p:sp>
       <p:sp>
         <p:nvSpPr>
-          <p:cNvPr id="6" name="Text 4"/>
+          <p:cNvPr id="5" name="Text 3"/>
           <p:cNvSpPr/>
           <p:nvPr/>
         </p:nvSpPr>
@@ -7830,7 +7533,7 @@
       </p:sp>
       <p:sp>
         <p:nvSpPr>
-          <p:cNvPr id="7" name="Shape 5"/>
+          <p:cNvPr id="6" name="Shape 4"/>
           <p:cNvSpPr/>
           <p:nvPr/>
         </p:nvSpPr>
@@ -7852,7 +7555,7 @@
       </p:sp>
       <p:sp>
         <p:nvSpPr>
-          <p:cNvPr id="8" name="Text 6"/>
+          <p:cNvPr id="7" name="Text 5"/>
           <p:cNvSpPr/>
           <p:nvPr/>
         </p:nvSpPr>
@@ -7891,7 +7594,7 @@
       </p:sp>
       <p:sp>
         <p:nvSpPr>
-          <p:cNvPr id="9" name="Text 7"/>
+          <p:cNvPr id="8" name="Text 6"/>
           <p:cNvSpPr/>
           <p:nvPr/>
         </p:nvSpPr>
@@ -7930,7 +7633,7 @@
       </p:sp>
       <p:sp>
         <p:nvSpPr>
-          <p:cNvPr id="10" name="Text 8"/>
+          <p:cNvPr id="9" name="Text 7"/>
           <p:cNvSpPr/>
           <p:nvPr/>
         </p:nvSpPr>
@@ -7969,7 +7672,7 @@
       </p:sp>
       <p:sp>
         <p:nvSpPr>
-          <p:cNvPr id="11" name="Shape 9"/>
+          <p:cNvPr id="10" name="Shape 8"/>
           <p:cNvSpPr/>
           <p:nvPr/>
         </p:nvSpPr>
@@ -7991,7 +7694,7 @@
       </p:sp>
       <p:sp>
         <p:nvSpPr>
-          <p:cNvPr id="12" name="Text 10"/>
+          <p:cNvPr id="11" name="Text 9"/>
           <p:cNvSpPr/>
           <p:nvPr/>
         </p:nvSpPr>
@@ -8030,7 +7733,7 @@
       </p:sp>
       <p:sp>
         <p:nvSpPr>
-          <p:cNvPr id="13" name="Text 11"/>
+          <p:cNvPr id="12" name="Text 10"/>
           <p:cNvSpPr/>
           <p:nvPr/>
         </p:nvSpPr>
@@ -8069,7 +7772,7 @@
       </p:sp>
       <p:sp>
         <p:nvSpPr>
-          <p:cNvPr id="14" name="Shape 12"/>
+          <p:cNvPr id="13" name="Shape 11"/>
           <p:cNvSpPr/>
           <p:nvPr/>
         </p:nvSpPr>
@@ -8091,7 +7794,7 @@
       </p:sp>
       <p:sp>
         <p:nvSpPr>
-          <p:cNvPr id="15" name="Text 13"/>
+          <p:cNvPr id="14" name="Text 12"/>
           <p:cNvSpPr/>
           <p:nvPr/>
         </p:nvSpPr>
@@ -8130,7 +7833,7 @@
       </p:sp>
       <p:sp>
         <p:nvSpPr>
-          <p:cNvPr id="16" name="Text 14"/>
+          <p:cNvPr id="15" name="Text 13"/>
           <p:cNvSpPr/>
           <p:nvPr/>
         </p:nvSpPr>
@@ -8169,7 +7872,7 @@
       </p:sp>
       <p:sp>
         <p:nvSpPr>
-          <p:cNvPr id="17" name="Shape 15"/>
+          <p:cNvPr id="16" name="Shape 14"/>
           <p:cNvSpPr/>
           <p:nvPr/>
         </p:nvSpPr>
@@ -8191,7 +7894,7 @@
       </p:sp>
       <p:sp>
         <p:nvSpPr>
-          <p:cNvPr id="18" name="Text 16"/>
+          <p:cNvPr id="17" name="Text 15"/>
           <p:cNvSpPr/>
           <p:nvPr/>
         </p:nvSpPr>
@@ -8230,7 +7933,7 @@
       </p:sp>
       <p:sp>
         <p:nvSpPr>
-          <p:cNvPr id="19" name="Text 17"/>
+          <p:cNvPr id="18" name="Text 16"/>
           <p:cNvSpPr/>
           <p:nvPr/>
         </p:nvSpPr>
@@ -8269,7 +7972,7 @@
       </p:sp>
       <p:sp>
         <p:nvSpPr>
-          <p:cNvPr id="20" name="Shape 18"/>
+          <p:cNvPr id="19" name="Shape 17"/>
           <p:cNvSpPr/>
           <p:nvPr/>
         </p:nvSpPr>
@@ -8291,7 +7994,7 @@
       </p:sp>
       <p:sp>
         <p:nvSpPr>
-          <p:cNvPr id="21" name="Text 19"/>
+          <p:cNvPr id="20" name="Text 18"/>
           <p:cNvSpPr/>
           <p:nvPr/>
         </p:nvSpPr>
@@ -8330,7 +8033,7 @@
       </p:sp>
       <p:sp>
         <p:nvSpPr>
-          <p:cNvPr id="22" name="Text 20"/>
+          <p:cNvPr id="21" name="Text 19"/>
           <p:cNvSpPr/>
           <p:nvPr/>
         </p:nvSpPr>
@@ -8369,7 +8072,7 @@
       </p:sp>
       <p:sp>
         <p:nvSpPr>
-          <p:cNvPr id="23" name="Shape 21"/>
+          <p:cNvPr id="22" name="Shape 20"/>
           <p:cNvSpPr/>
           <p:nvPr/>
         </p:nvSpPr>
@@ -8391,7 +8094,7 @@
       </p:sp>
       <p:sp>
         <p:nvSpPr>
-          <p:cNvPr id="24" name="Text 22"/>
+          <p:cNvPr id="23" name="Text 21"/>
           <p:cNvSpPr/>
           <p:nvPr/>
         </p:nvSpPr>
@@ -8430,7 +8133,7 @@
       </p:sp>
       <p:sp>
         <p:nvSpPr>
-          <p:cNvPr id="25" name="Text 23"/>
+          <p:cNvPr id="24" name="Text 22"/>
           <p:cNvSpPr/>
           <p:nvPr/>
         </p:nvSpPr>
@@ -8469,7 +8172,7 @@
       </p:sp>
       <p:sp>
         <p:nvSpPr>
-          <p:cNvPr id="26" name="Shape 24"/>
+          <p:cNvPr id="25" name="Shape 23"/>
           <p:cNvSpPr/>
           <p:nvPr/>
         </p:nvSpPr>
@@ -8491,7 +8194,7 @@
       </p:sp>
       <p:sp>
         <p:nvSpPr>
-          <p:cNvPr id="27" name="Text 25"/>
+          <p:cNvPr id="26" name="Text 24"/>
           <p:cNvSpPr/>
           <p:nvPr/>
         </p:nvSpPr>
@@ -8530,7 +8233,7 @@
       </p:sp>
       <p:sp>
         <p:nvSpPr>
-          <p:cNvPr id="28" name="Shape 26"/>
+          <p:cNvPr id="27" name="Shape 25"/>
           <p:cNvSpPr/>
           <p:nvPr/>
         </p:nvSpPr>
@@ -8548,18 +8251,11 @@
             <a:srgbClr val="F7EAE4"/>
           </a:solidFill>
           <a:ln/>
-          <a:effectLst>
-            <a:outerShdw sx="100000" sy="100000" kx="0" ky="0" algn="bl" rotWithShape="0" blurRad="127000" dist="25400" dir="5400000">
-              <a:srgbClr val="1E2B4A">
-                <a:alpha val="10000"/>
-              </a:srgbClr>
-            </a:outerShdw>
-          </a:effectLst>
-        </p:spPr>
-      </p:sp>
-      <p:sp>
-        <p:nvSpPr>
-          <p:cNvPr id="29" name="Shape 27"/>
+        </p:spPr>
+      </p:sp>
+      <p:sp>
+        <p:nvSpPr>
+          <p:cNvPr id="28" name="Shape 26"/>
           <p:cNvSpPr/>
           <p:nvPr/>
         </p:nvSpPr>
@@ -8591,7 +8287,7 @@
       </p:sp>
       <p:pic>
         <p:nvPicPr>
-          <p:cNvPr id="30" name="Image 0" descr="preencoded.png">    </p:cNvPr>
+          <p:cNvPr id="29" name="Image 0" descr="preencoded.png">    </p:cNvPr>
           <p:cNvPicPr>
             <a:picLocks noChangeAspect="1"/>
           </p:cNvPicPr>
@@ -8615,7 +8311,7 @@
       </p:pic>
       <p:sp>
         <p:nvSpPr>
-          <p:cNvPr id="31" name="Text 28"/>
+          <p:cNvPr id="30" name="Text 27"/>
           <p:cNvSpPr/>
           <p:nvPr/>
         </p:nvSpPr>
@@ -8657,7 +8353,7 @@
       </p:sp>
       <p:sp>
         <p:nvSpPr>
-          <p:cNvPr id="32" name="Text 29"/>
+          <p:cNvPr id="31" name="Text 28"/>
           <p:cNvSpPr/>
           <p:nvPr/>
         </p:nvSpPr>
@@ -8699,36 +8395,7 @@
       </p:sp>
       <p:sp>
         <p:nvSpPr>
-          <p:cNvPr id="33" name="Shape 30"/>
-          <p:cNvSpPr/>
-          <p:nvPr/>
-        </p:nvSpPr>
-        <p:spPr>
-          <a:xfrm>
-            <a:off x="7498080" y="3931920"/>
-            <a:ext cx="4050792" cy="1874520"/>
-          </a:xfrm>
-          <a:prstGeom prst="roundRect">
-            <a:avLst>
-              <a:gd name="adj" fmla="val 2927"/>
-            </a:avLst>
-          </a:prstGeom>
-          <a:solidFill>
-            <a:srgbClr val="F4F5FA"/>
-          </a:solidFill>
-          <a:ln/>
-          <a:effectLst>
-            <a:outerShdw sx="100000" sy="100000" kx="0" ky="0" algn="bl" rotWithShape="0" blurRad="127000" dist="25400" dir="5400000">
-              <a:srgbClr val="1E2B4A">
-                <a:alpha val="10000"/>
-              </a:srgbClr>
-            </a:outerShdw>
-          </a:effectLst>
-        </p:spPr>
-      </p:sp>
-      <p:sp>
-        <p:nvSpPr>
-          <p:cNvPr id="34" name="Text 31"/>
+          <p:cNvPr id="32" name="Text 29"/>
           <p:cNvSpPr/>
           <p:nvPr/>
         </p:nvSpPr>
@@ -8767,7 +8434,7 @@
       </p:sp>
       <p:sp>
         <p:nvSpPr>
-          <p:cNvPr id="35" name="Text 32"/>
+          <p:cNvPr id="33" name="Text 30"/>
           <p:cNvSpPr/>
           <p:nvPr/>
         </p:nvSpPr>
@@ -8806,7 +8473,7 @@
       </p:sp>
       <p:sp>
         <p:nvSpPr>
-          <p:cNvPr id="36" name="Text 33"/>
+          <p:cNvPr id="34" name="Text 31"/>
           <p:cNvSpPr/>
           <p:nvPr/>
         </p:nvSpPr>
@@ -8845,7 +8512,7 @@
       </p:sp>
       <p:sp>
         <p:nvSpPr>
-          <p:cNvPr id="37" name="Text 34"/>
+          <p:cNvPr id="35" name="Text 32"/>
           <p:cNvSpPr/>
           <p:nvPr/>
         </p:nvSpPr>
@@ -8884,7 +8551,7 @@
       </p:sp>
       <p:sp>
         <p:nvSpPr>
-          <p:cNvPr id="38" name="Text 35"/>
+          <p:cNvPr id="36" name="Text 33"/>
           <p:cNvSpPr/>
           <p:nvPr/>
         </p:nvSpPr>
@@ -8923,7 +8590,7 @@
       </p:sp>
       <p:sp>
         <p:nvSpPr>
-          <p:cNvPr id="39" name="Text 36"/>
+          <p:cNvPr id="37" name="Text 34"/>
           <p:cNvSpPr/>
           <p:nvPr/>
         </p:nvSpPr>
@@ -8962,7 +8629,7 @@
       </p:sp>
       <p:sp>
         <p:nvSpPr>
-          <p:cNvPr id="40" name="Text 37"/>
+          <p:cNvPr id="38" name="Text 35"/>
           <p:cNvSpPr/>
           <p:nvPr/>
         </p:nvSpPr>
@@ -9001,7 +8668,7 @@
       </p:sp>
       <p:sp>
         <p:nvSpPr>
-          <p:cNvPr id="41" name="Text 38"/>
+          <p:cNvPr id="39" name="Text 36"/>
           <p:cNvSpPr/>
           <p:nvPr/>
         </p:nvSpPr>
@@ -9040,7 +8707,7 @@
       </p:sp>
       <p:sp>
         <p:nvSpPr>
-          <p:cNvPr id="42" name="Text 39"/>
+          <p:cNvPr id="40" name="Text 37"/>
           <p:cNvSpPr/>
           <p:nvPr/>
         </p:nvSpPr>
@@ -9079,7 +8746,7 @@
       </p:sp>
       <p:sp>
         <p:nvSpPr>
-          <p:cNvPr id="43" name="Text 40"/>
+          <p:cNvPr id="41" name="Text 38"/>
           <p:cNvSpPr/>
           <p:nvPr/>
         </p:nvSpPr>
@@ -9118,7 +8785,7 @@
       </p:sp>
       <p:pic>
         <p:nvPicPr>
-          <p:cNvPr id="44" name="Image 1" descr="logos/logo_ensae_new.png">    </p:cNvPr>
+          <p:cNvPr id="42" name="Image 1" descr="logos/logo_ensae_new.png">    </p:cNvPr>
           <p:cNvPicPr>
             <a:picLocks noChangeAspect="1"/>
           </p:cNvPicPr>
@@ -9255,36 +8922,7 @@
       </p:sp>
       <p:sp>
         <p:nvSpPr>
-          <p:cNvPr id="4" name="Shape 2"/>
-          <p:cNvSpPr/>
-          <p:nvPr/>
-        </p:nvSpPr>
-        <p:spPr>
-          <a:xfrm>
-            <a:off x="658368" y="1783080"/>
-            <a:ext cx="6949440" cy="4023360"/>
-          </a:xfrm>
-          <a:prstGeom prst="roundRect">
-            <a:avLst>
-              <a:gd name="adj" fmla="val 1364"/>
-            </a:avLst>
-          </a:prstGeom>
-          <a:solidFill>
-            <a:srgbClr val="F4F5FA"/>
-          </a:solidFill>
-          <a:ln/>
-          <a:effectLst>
-            <a:outerShdw sx="100000" sy="100000" kx="0" ky="0" algn="bl" rotWithShape="0" blurRad="127000" dist="25400" dir="5400000">
-              <a:srgbClr val="1E2B4A">
-                <a:alpha val="10000"/>
-              </a:srgbClr>
-            </a:outerShdw>
-          </a:effectLst>
-        </p:spPr>
-      </p:sp>
-      <p:sp>
-        <p:nvSpPr>
-          <p:cNvPr id="5" name="Text 3"/>
+          <p:cNvPr id="4" name="Text 2"/>
           <p:cNvSpPr/>
           <p:nvPr/>
         </p:nvSpPr>
@@ -9323,7 +8961,7 @@
       </p:sp>
       <p:sp>
         <p:nvSpPr>
-          <p:cNvPr id="6" name="Text 4"/>
+          <p:cNvPr id="5" name="Text 3"/>
           <p:cNvSpPr/>
           <p:nvPr/>
         </p:nvSpPr>
@@ -9362,7 +9000,7 @@
       </p:sp>
       <p:sp>
         <p:nvSpPr>
-          <p:cNvPr id="7" name="Text 5"/>
+          <p:cNvPr id="6" name="Text 4"/>
           <p:cNvSpPr/>
           <p:nvPr/>
         </p:nvSpPr>
@@ -9401,7 +9039,7 @@
       </p:sp>
       <p:sp>
         <p:nvSpPr>
-          <p:cNvPr id="8" name="Shape 6"/>
+          <p:cNvPr id="7" name="Shape 5"/>
           <p:cNvSpPr/>
           <p:nvPr/>
         </p:nvSpPr>
@@ -9423,7 +9061,7 @@
       </p:sp>
       <p:sp>
         <p:nvSpPr>
-          <p:cNvPr id="9" name="Text 7"/>
+          <p:cNvPr id="8" name="Text 6"/>
           <p:cNvSpPr/>
           <p:nvPr/>
         </p:nvSpPr>
@@ -9462,7 +9100,7 @@
       </p:sp>
       <p:sp>
         <p:nvSpPr>
-          <p:cNvPr id="10" name="Text 8"/>
+          <p:cNvPr id="9" name="Text 7"/>
           <p:cNvSpPr/>
           <p:nvPr/>
         </p:nvSpPr>
@@ -9501,7 +9139,7 @@
       </p:sp>
       <p:sp>
         <p:nvSpPr>
-          <p:cNvPr id="11" name="Text 9"/>
+          <p:cNvPr id="10" name="Text 8"/>
           <p:cNvSpPr/>
           <p:nvPr/>
         </p:nvSpPr>
@@ -9540,7 +9178,7 @@
       </p:sp>
       <p:sp>
         <p:nvSpPr>
-          <p:cNvPr id="12" name="Text 10"/>
+          <p:cNvPr id="11" name="Text 9"/>
           <p:cNvSpPr/>
           <p:nvPr/>
         </p:nvSpPr>
@@ -9579,7 +9217,7 @@
       </p:sp>
       <p:sp>
         <p:nvSpPr>
-          <p:cNvPr id="13" name="Shape 11"/>
+          <p:cNvPr id="12" name="Shape 10"/>
           <p:cNvSpPr/>
           <p:nvPr/>
         </p:nvSpPr>
@@ -9601,7 +9239,7 @@
       </p:sp>
       <p:sp>
         <p:nvSpPr>
-          <p:cNvPr id="14" name="Text 12"/>
+          <p:cNvPr id="13" name="Text 11"/>
           <p:cNvSpPr/>
           <p:nvPr/>
         </p:nvSpPr>
@@ -9640,7 +9278,7 @@
       </p:sp>
       <p:sp>
         <p:nvSpPr>
-          <p:cNvPr id="15" name="Text 13"/>
+          <p:cNvPr id="14" name="Text 12"/>
           <p:cNvSpPr/>
           <p:nvPr/>
         </p:nvSpPr>
@@ -9679,7 +9317,7 @@
       </p:sp>
       <p:sp>
         <p:nvSpPr>
-          <p:cNvPr id="16" name="Text 14"/>
+          <p:cNvPr id="15" name="Text 13"/>
           <p:cNvSpPr/>
           <p:nvPr/>
         </p:nvSpPr>
@@ -9718,7 +9356,7 @@
       </p:sp>
       <p:sp>
         <p:nvSpPr>
-          <p:cNvPr id="17" name="Text 15"/>
+          <p:cNvPr id="16" name="Text 14"/>
           <p:cNvSpPr/>
           <p:nvPr/>
         </p:nvSpPr>
@@ -9757,7 +9395,7 @@
       </p:sp>
       <p:sp>
         <p:nvSpPr>
-          <p:cNvPr id="18" name="Shape 16"/>
+          <p:cNvPr id="17" name="Shape 15"/>
           <p:cNvSpPr/>
           <p:nvPr/>
         </p:nvSpPr>
@@ -9779,7 +9417,7 @@
       </p:sp>
       <p:sp>
         <p:nvSpPr>
-          <p:cNvPr id="19" name="Text 17"/>
+          <p:cNvPr id="18" name="Text 16"/>
           <p:cNvSpPr/>
           <p:nvPr/>
         </p:nvSpPr>
@@ -9818,7 +9456,7 @@
       </p:sp>
       <p:sp>
         <p:nvSpPr>
-          <p:cNvPr id="20" name="Text 18"/>
+          <p:cNvPr id="19" name="Text 17"/>
           <p:cNvSpPr/>
           <p:nvPr/>
         </p:nvSpPr>
@@ -9857,7 +9495,7 @@
       </p:sp>
       <p:sp>
         <p:nvSpPr>
-          <p:cNvPr id="21" name="Text 19"/>
+          <p:cNvPr id="20" name="Text 18"/>
           <p:cNvSpPr/>
           <p:nvPr/>
         </p:nvSpPr>
@@ -9896,7 +9534,7 @@
       </p:sp>
       <p:sp>
         <p:nvSpPr>
-          <p:cNvPr id="22" name="Shape 20"/>
+          <p:cNvPr id="21" name="Shape 19"/>
           <p:cNvSpPr/>
           <p:nvPr/>
         </p:nvSpPr>
@@ -9918,7 +9556,7 @@
       </p:sp>
       <p:sp>
         <p:nvSpPr>
-          <p:cNvPr id="23" name="Text 21"/>
+          <p:cNvPr id="22" name="Text 20"/>
           <p:cNvSpPr/>
           <p:nvPr/>
         </p:nvSpPr>
@@ -9957,7 +9595,7 @@
       </p:sp>
       <p:sp>
         <p:nvSpPr>
-          <p:cNvPr id="24" name="Text 22"/>
+          <p:cNvPr id="23" name="Text 21"/>
           <p:cNvSpPr/>
           <p:nvPr/>
         </p:nvSpPr>
@@ -9996,7 +9634,7 @@
       </p:sp>
       <p:sp>
         <p:nvSpPr>
-          <p:cNvPr id="25" name="Text 23"/>
+          <p:cNvPr id="24" name="Text 22"/>
           <p:cNvSpPr/>
           <p:nvPr/>
         </p:nvSpPr>
@@ -10035,7 +9673,7 @@
       </p:sp>
       <p:sp>
         <p:nvSpPr>
-          <p:cNvPr id="26" name="Shape 24"/>
+          <p:cNvPr id="25" name="Shape 23"/>
           <p:cNvSpPr/>
           <p:nvPr/>
         </p:nvSpPr>
@@ -10057,7 +9695,7 @@
       </p:sp>
       <p:sp>
         <p:nvSpPr>
-          <p:cNvPr id="27" name="Text 25"/>
+          <p:cNvPr id="26" name="Text 24"/>
           <p:cNvSpPr/>
           <p:nvPr/>
         </p:nvSpPr>
@@ -10096,7 +9734,7 @@
       </p:sp>
       <p:sp>
         <p:nvSpPr>
-          <p:cNvPr id="28" name="Shape 26"/>
+          <p:cNvPr id="27" name="Shape 25"/>
           <p:cNvSpPr/>
           <p:nvPr/>
         </p:nvSpPr>
@@ -10116,7 +9754,7 @@
       </p:sp>
       <p:sp>
         <p:nvSpPr>
-          <p:cNvPr id="29" name="Shape 27"/>
+          <p:cNvPr id="28" name="Shape 26"/>
           <p:cNvSpPr/>
           <p:nvPr/>
         </p:nvSpPr>
@@ -10134,18 +9772,11 @@
             <a:srgbClr val="1E2B4A"/>
           </a:solidFill>
           <a:ln/>
-          <a:effectLst>
-            <a:outerShdw sx="100000" sy="100000" kx="0" ky="0" algn="bl" rotWithShape="0" blurRad="127000" dist="25400" dir="5400000">
-              <a:srgbClr val="1E2B4A">
-                <a:alpha val="10000"/>
-              </a:srgbClr>
-            </a:outerShdw>
-          </a:effectLst>
-        </p:spPr>
-      </p:sp>
-      <p:sp>
-        <p:nvSpPr>
-          <p:cNvPr id="30" name="Text 28"/>
+        </p:spPr>
+      </p:sp>
+      <p:sp>
+        <p:nvSpPr>
+          <p:cNvPr id="29" name="Text 27"/>
           <p:cNvSpPr/>
           <p:nvPr/>
         </p:nvSpPr>
@@ -10184,7 +9815,7 @@
       </p:sp>
       <p:sp>
         <p:nvSpPr>
-          <p:cNvPr id="31" name="Text 29"/>
+          <p:cNvPr id="30" name="Text 28"/>
           <p:cNvSpPr/>
           <p:nvPr/>
         </p:nvSpPr>
@@ -10223,7 +9854,7 @@
       </p:sp>
       <p:sp>
         <p:nvSpPr>
-          <p:cNvPr id="32" name="Text 30"/>
+          <p:cNvPr id="31" name="Text 29"/>
           <p:cNvSpPr/>
           <p:nvPr/>
         </p:nvSpPr>
@@ -10265,36 +9896,7 @@
       </p:sp>
       <p:sp>
         <p:nvSpPr>
-          <p:cNvPr id="33" name="Shape 31"/>
-          <p:cNvSpPr/>
-          <p:nvPr/>
-        </p:nvSpPr>
-        <p:spPr>
-          <a:xfrm>
-            <a:off x="7863840" y="3931920"/>
-            <a:ext cx="3685032" cy="1874520"/>
-          </a:xfrm>
-          <a:prstGeom prst="roundRect">
-            <a:avLst>
-              <a:gd name="adj" fmla="val 2927"/>
-            </a:avLst>
-          </a:prstGeom>
-          <a:solidFill>
-            <a:srgbClr val="F4F5FA"/>
-          </a:solidFill>
-          <a:ln/>
-          <a:effectLst>
-            <a:outerShdw sx="100000" sy="100000" kx="0" ky="0" algn="bl" rotWithShape="0" blurRad="127000" dist="25400" dir="5400000">
-              <a:srgbClr val="1E2B4A">
-                <a:alpha val="10000"/>
-              </a:srgbClr>
-            </a:outerShdw>
-          </a:effectLst>
-        </p:spPr>
-      </p:sp>
-      <p:sp>
-        <p:nvSpPr>
-          <p:cNvPr id="34" name="Text 32"/>
+          <p:cNvPr id="32" name="Text 30"/>
           <p:cNvSpPr/>
           <p:nvPr/>
         </p:nvSpPr>
@@ -10333,7 +9935,7 @@
       </p:sp>
       <p:sp>
         <p:nvSpPr>
-          <p:cNvPr id="35" name="Text 33"/>
+          <p:cNvPr id="33" name="Text 31"/>
           <p:cNvSpPr/>
           <p:nvPr/>
         </p:nvSpPr>
@@ -10375,7 +9977,7 @@
       </p:sp>
       <p:sp>
         <p:nvSpPr>
-          <p:cNvPr id="36" name="Text 34"/>
+          <p:cNvPr id="34" name="Text 32"/>
           <p:cNvSpPr/>
           <p:nvPr/>
         </p:nvSpPr>
@@ -10414,7 +10016,7 @@
       </p:sp>
       <p:sp>
         <p:nvSpPr>
-          <p:cNvPr id="37" name="Text 35"/>
+          <p:cNvPr id="35" name="Text 33"/>
           <p:cNvSpPr/>
           <p:nvPr/>
         </p:nvSpPr>
@@ -10453,7 +10055,7 @@
       </p:sp>
       <p:pic>
         <p:nvPicPr>
-          <p:cNvPr id="38" name="Image 0" descr="logos/logo_ensae_new.png">    </p:cNvPr>
+          <p:cNvPr id="36" name="Image 0" descr="logos/logo_ensae_new.png">    </p:cNvPr>
           <p:cNvPicPr>
             <a:picLocks noChangeAspect="1"/>
           </p:cNvPicPr>
@@ -10554,35 +10156,6 @@
         </p:nvSpPr>
         <p:spPr>
           <a:xfrm>
-            <a:off x="658368" y="1481328"/>
-            <a:ext cx="5285232" cy="1965960"/>
-          </a:xfrm>
-          <a:prstGeom prst="roundRect">
-            <a:avLst>
-              <a:gd name="adj" fmla="val 2791"/>
-            </a:avLst>
-          </a:prstGeom>
-          <a:solidFill>
-            <a:srgbClr val="F4F5FA"/>
-          </a:solidFill>
-          <a:ln/>
-          <a:effectLst>
-            <a:outerShdw sx="100000" sy="100000" kx="0" ky="0" algn="bl" rotWithShape="0" blurRad="127000" dist="25400" dir="5400000">
-              <a:srgbClr val="1E2B4A">
-                <a:alpha val="10000"/>
-              </a:srgbClr>
-            </a:outerShdw>
-          </a:effectLst>
-        </p:spPr>
-      </p:sp>
-      <p:sp>
-        <p:nvSpPr>
-          <p:cNvPr id="4" name="Shape 2"/>
-          <p:cNvSpPr/>
-          <p:nvPr/>
-        </p:nvSpPr>
-        <p:spPr>
-          <a:xfrm>
             <a:off x="932688" y="1773936"/>
             <a:ext cx="777240" cy="777240"/>
           </a:xfrm>
@@ -10609,7 +10182,7 @@
       </p:sp>
       <p:pic>
         <p:nvPicPr>
-          <p:cNvPr id="5" name="Image 0" descr="preencoded.png">    </p:cNvPr>
+          <p:cNvPr id="4" name="Image 0" descr="preencoded.png">    </p:cNvPr>
           <p:cNvPicPr>
             <a:picLocks noChangeAspect="1"/>
           </p:cNvPicPr>
@@ -10633,7 +10206,7 @@
       </p:pic>
       <p:sp>
         <p:nvSpPr>
-          <p:cNvPr id="6" name="Text 3"/>
+          <p:cNvPr id="5" name="Text 2"/>
           <p:cNvSpPr/>
           <p:nvPr/>
         </p:nvSpPr>
@@ -10672,7 +10245,7 @@
       </p:sp>
       <p:sp>
         <p:nvSpPr>
-          <p:cNvPr id="7" name="Text 4"/>
+          <p:cNvPr id="6" name="Text 3"/>
           <p:cNvSpPr/>
           <p:nvPr/>
         </p:nvSpPr>
@@ -10711,7 +10284,7 @@
       </p:sp>
       <p:sp>
         <p:nvSpPr>
-          <p:cNvPr id="8" name="Text 5"/>
+          <p:cNvPr id="7" name="Text 4"/>
           <p:cNvSpPr/>
           <p:nvPr/>
         </p:nvSpPr>
@@ -10753,36 +10326,7 @@
       </p:sp>
       <p:sp>
         <p:nvSpPr>
-          <p:cNvPr id="9" name="Shape 6"/>
-          <p:cNvSpPr/>
-          <p:nvPr/>
-        </p:nvSpPr>
-        <p:spPr>
-          <a:xfrm>
-            <a:off x="6263640" y="1481328"/>
-            <a:ext cx="5285232" cy="1965960"/>
-          </a:xfrm>
-          <a:prstGeom prst="roundRect">
-            <a:avLst>
-              <a:gd name="adj" fmla="val 2791"/>
-            </a:avLst>
-          </a:prstGeom>
-          <a:solidFill>
-            <a:srgbClr val="F4F5FA"/>
-          </a:solidFill>
-          <a:ln/>
-          <a:effectLst>
-            <a:outerShdw sx="100000" sy="100000" kx="0" ky="0" algn="bl" rotWithShape="0" blurRad="127000" dist="25400" dir="5400000">
-              <a:srgbClr val="1E2B4A">
-                <a:alpha val="10000"/>
-              </a:srgbClr>
-            </a:outerShdw>
-          </a:effectLst>
-        </p:spPr>
-      </p:sp>
-      <p:sp>
-        <p:nvSpPr>
-          <p:cNvPr id="10" name="Shape 7"/>
+          <p:cNvPr id="8" name="Shape 5"/>
           <p:cNvSpPr/>
           <p:nvPr/>
         </p:nvSpPr>
@@ -10814,7 +10358,7 @@
       </p:sp>
       <p:pic>
         <p:nvPicPr>
-          <p:cNvPr id="11" name="Image 1" descr="preencoded.png">    </p:cNvPr>
+          <p:cNvPr id="9" name="Image 1" descr="preencoded.png">    </p:cNvPr>
           <p:cNvPicPr>
             <a:picLocks noChangeAspect="1"/>
           </p:cNvPicPr>
@@ -10838,7 +10382,7 @@
       </p:pic>
       <p:sp>
         <p:nvSpPr>
-          <p:cNvPr id="12" name="Text 8"/>
+          <p:cNvPr id="10" name="Text 6"/>
           <p:cNvSpPr/>
           <p:nvPr/>
         </p:nvSpPr>
@@ -10877,7 +10421,7 @@
       </p:sp>
       <p:sp>
         <p:nvSpPr>
-          <p:cNvPr id="13" name="Text 9"/>
+          <p:cNvPr id="11" name="Text 7"/>
           <p:cNvSpPr/>
           <p:nvPr/>
         </p:nvSpPr>
@@ -10916,7 +10460,7 @@
       </p:sp>
       <p:sp>
         <p:nvSpPr>
-          <p:cNvPr id="14" name="Text 10"/>
+          <p:cNvPr id="12" name="Text 8"/>
           <p:cNvSpPr/>
           <p:nvPr/>
         </p:nvSpPr>
@@ -10958,36 +10502,7 @@
       </p:sp>
       <p:sp>
         <p:nvSpPr>
-          <p:cNvPr id="15" name="Shape 11"/>
-          <p:cNvSpPr/>
-          <p:nvPr/>
-        </p:nvSpPr>
-        <p:spPr>
-          <a:xfrm>
-            <a:off x="658368" y="3721608"/>
-            <a:ext cx="5285232" cy="1965960"/>
-          </a:xfrm>
-          <a:prstGeom prst="roundRect">
-            <a:avLst>
-              <a:gd name="adj" fmla="val 2791"/>
-            </a:avLst>
-          </a:prstGeom>
-          <a:solidFill>
-            <a:srgbClr val="F4F5FA"/>
-          </a:solidFill>
-          <a:ln/>
-          <a:effectLst>
-            <a:outerShdw sx="100000" sy="100000" kx="0" ky="0" algn="bl" rotWithShape="0" blurRad="127000" dist="25400" dir="5400000">
-              <a:srgbClr val="1E2B4A">
-                <a:alpha val="10000"/>
-              </a:srgbClr>
-            </a:outerShdw>
-          </a:effectLst>
-        </p:spPr>
-      </p:sp>
-      <p:sp>
-        <p:nvSpPr>
-          <p:cNvPr id="16" name="Shape 12"/>
+          <p:cNvPr id="13" name="Shape 9"/>
           <p:cNvSpPr/>
           <p:nvPr/>
         </p:nvSpPr>
@@ -11019,7 +10534,7 @@
       </p:sp>
       <p:pic>
         <p:nvPicPr>
-          <p:cNvPr id="17" name="Image 2" descr="preencoded.png">    </p:cNvPr>
+          <p:cNvPr id="14" name="Image 2" descr="preencoded.png">    </p:cNvPr>
           <p:cNvPicPr>
             <a:picLocks noChangeAspect="1"/>
           </p:cNvPicPr>
@@ -11043,7 +10558,7 @@
       </p:pic>
       <p:sp>
         <p:nvSpPr>
-          <p:cNvPr id="18" name="Text 13"/>
+          <p:cNvPr id="15" name="Text 10"/>
           <p:cNvSpPr/>
           <p:nvPr/>
         </p:nvSpPr>
@@ -11082,7 +10597,7 @@
       </p:sp>
       <p:sp>
         <p:nvSpPr>
-          <p:cNvPr id="19" name="Text 14"/>
+          <p:cNvPr id="16" name="Text 11"/>
           <p:cNvSpPr/>
           <p:nvPr/>
         </p:nvSpPr>
@@ -11121,7 +10636,7 @@
       </p:sp>
       <p:sp>
         <p:nvSpPr>
-          <p:cNvPr id="20" name="Text 15"/>
+          <p:cNvPr id="17" name="Text 12"/>
           <p:cNvSpPr/>
           <p:nvPr/>
         </p:nvSpPr>
@@ -11163,36 +10678,7 @@
       </p:sp>
       <p:sp>
         <p:nvSpPr>
-          <p:cNvPr id="21" name="Shape 16"/>
-          <p:cNvSpPr/>
-          <p:nvPr/>
-        </p:nvSpPr>
-        <p:spPr>
-          <a:xfrm>
-            <a:off x="6263640" y="3721608"/>
-            <a:ext cx="5285232" cy="1965960"/>
-          </a:xfrm>
-          <a:prstGeom prst="roundRect">
-            <a:avLst>
-              <a:gd name="adj" fmla="val 2791"/>
-            </a:avLst>
-          </a:prstGeom>
-          <a:solidFill>
-            <a:srgbClr val="F4F5FA"/>
-          </a:solidFill>
-          <a:ln/>
-          <a:effectLst>
-            <a:outerShdw sx="100000" sy="100000" kx="0" ky="0" algn="bl" rotWithShape="0" blurRad="127000" dist="25400" dir="5400000">
-              <a:srgbClr val="1E2B4A">
-                <a:alpha val="10000"/>
-              </a:srgbClr>
-            </a:outerShdw>
-          </a:effectLst>
-        </p:spPr>
-      </p:sp>
-      <p:sp>
-        <p:nvSpPr>
-          <p:cNvPr id="22" name="Shape 17"/>
+          <p:cNvPr id="18" name="Shape 13"/>
           <p:cNvSpPr/>
           <p:nvPr/>
         </p:nvSpPr>
@@ -11224,7 +10710,7 @@
       </p:sp>
       <p:pic>
         <p:nvPicPr>
-          <p:cNvPr id="23" name="Image 3" descr="preencoded.png">    </p:cNvPr>
+          <p:cNvPr id="19" name="Image 3" descr="preencoded.png">    </p:cNvPr>
           <p:cNvPicPr>
             <a:picLocks noChangeAspect="1"/>
           </p:cNvPicPr>
@@ -11248,7 +10734,7 @@
       </p:pic>
       <p:sp>
         <p:nvSpPr>
-          <p:cNvPr id="24" name="Text 18"/>
+          <p:cNvPr id="20" name="Text 14"/>
           <p:cNvSpPr/>
           <p:nvPr/>
         </p:nvSpPr>
@@ -11287,7 +10773,7 @@
       </p:sp>
       <p:sp>
         <p:nvSpPr>
-          <p:cNvPr id="25" name="Text 19"/>
+          <p:cNvPr id="21" name="Text 15"/>
           <p:cNvSpPr/>
           <p:nvPr/>
         </p:nvSpPr>
@@ -11326,7 +10812,7 @@
       </p:sp>
       <p:sp>
         <p:nvSpPr>
-          <p:cNvPr id="26" name="Text 20"/>
+          <p:cNvPr id="22" name="Text 16"/>
           <p:cNvSpPr/>
           <p:nvPr/>
         </p:nvSpPr>
@@ -11368,7 +10854,7 @@
       </p:sp>
       <p:sp>
         <p:nvSpPr>
-          <p:cNvPr id="27" name="Shape 21"/>
+          <p:cNvPr id="23" name="Shape 17"/>
           <p:cNvSpPr/>
           <p:nvPr/>
         </p:nvSpPr>
@@ -11386,18 +10872,11 @@
             <a:srgbClr val="FFFFFF"/>
           </a:solidFill>
           <a:ln/>
-          <a:effectLst>
-            <a:outerShdw sx="100000" sy="100000" kx="0" ky="0" algn="bl" rotWithShape="0" blurRad="127000" dist="25400" dir="5400000">
-              <a:srgbClr val="1E2B4A">
-                <a:alpha val="10000"/>
-              </a:srgbClr>
-            </a:outerShdw>
-          </a:effectLst>
-        </p:spPr>
-      </p:sp>
-      <p:sp>
-        <p:nvSpPr>
-          <p:cNvPr id="28" name="Text 22"/>
+        </p:spPr>
+      </p:sp>
+      <p:sp>
+        <p:nvSpPr>
+          <p:cNvPr id="24" name="Text 18"/>
           <p:cNvSpPr/>
           <p:nvPr/>
         </p:nvSpPr>
@@ -11436,7 +10915,7 @@
       </p:sp>
       <p:sp>
         <p:nvSpPr>
-          <p:cNvPr id="29" name="Text 23"/>
+          <p:cNvPr id="25" name="Text 19"/>
           <p:cNvSpPr/>
           <p:nvPr/>
         </p:nvSpPr>
@@ -11475,7 +10954,7 @@
       </p:sp>
       <p:pic>
         <p:nvPicPr>
-          <p:cNvPr id="30" name="Image 4" descr="logos/logo_ensae_new.png">    </p:cNvPr>
+          <p:cNvPr id="26" name="Image 4" descr="logos/logo_ensae_new.png">    </p:cNvPr>
           <p:cNvPicPr>
             <a:picLocks noChangeAspect="1"/>
           </p:cNvPicPr>
@@ -11570,36 +11049,7 @@
       </p:sp>
       <p:sp>
         <p:nvSpPr>
-          <p:cNvPr id="3" name="Shape 1"/>
-          <p:cNvSpPr/>
-          <p:nvPr/>
-        </p:nvSpPr>
-        <p:spPr>
-          <a:xfrm>
-            <a:off x="658368" y="1481328"/>
-            <a:ext cx="10890504" cy="2057400"/>
-          </a:xfrm>
-          <a:prstGeom prst="roundRect">
-            <a:avLst>
-              <a:gd name="adj" fmla="val 2667"/>
-            </a:avLst>
-          </a:prstGeom>
-          <a:solidFill>
-            <a:srgbClr val="F4F5FA"/>
-          </a:solidFill>
-          <a:ln/>
-          <a:effectLst>
-            <a:outerShdw sx="100000" sy="100000" kx="0" ky="0" algn="bl" rotWithShape="0" blurRad="127000" dist="25400" dir="5400000">
-              <a:srgbClr val="1E2B4A">
-                <a:alpha val="10000"/>
-              </a:srgbClr>
-            </a:outerShdw>
-          </a:effectLst>
-        </p:spPr>
-      </p:sp>
-      <p:sp>
-        <p:nvSpPr>
-          <p:cNvPr id="4" name="Text 2"/>
+          <p:cNvPr id="3" name="Text 1"/>
           <p:cNvSpPr/>
           <p:nvPr/>
         </p:nvSpPr>
@@ -11638,7 +11088,7 @@
       </p:sp>
       <p:sp>
         <p:nvSpPr>
-          <p:cNvPr id="5" name="Text 3"/>
+          <p:cNvPr id="4" name="Text 2"/>
           <p:cNvSpPr/>
           <p:nvPr/>
         </p:nvSpPr>
@@ -11680,7 +11130,7 @@
       </p:sp>
       <p:sp>
         <p:nvSpPr>
-          <p:cNvPr id="6" name="Text 4"/>
+          <p:cNvPr id="5" name="Text 3"/>
           <p:cNvSpPr/>
           <p:nvPr/>
         </p:nvSpPr>
@@ -11722,7 +11172,7 @@
       </p:sp>
       <p:sp>
         <p:nvSpPr>
-          <p:cNvPr id="7" name="Text 5"/>
+          <p:cNvPr id="6" name="Text 4"/>
           <p:cNvSpPr/>
           <p:nvPr/>
         </p:nvSpPr>
@@ -11761,36 +11211,7 @@
       </p:sp>
       <p:sp>
         <p:nvSpPr>
-          <p:cNvPr id="8" name="Shape 6"/>
-          <p:cNvSpPr/>
-          <p:nvPr/>
-        </p:nvSpPr>
-        <p:spPr>
-          <a:xfrm>
-            <a:off x="658368" y="3813048"/>
-            <a:ext cx="10890504" cy="2057400"/>
-          </a:xfrm>
-          <a:prstGeom prst="roundRect">
-            <a:avLst>
-              <a:gd name="adj" fmla="val 2667"/>
-            </a:avLst>
-          </a:prstGeom>
-          <a:solidFill>
-            <a:srgbClr val="F4F5FA"/>
-          </a:solidFill>
-          <a:ln/>
-          <a:effectLst>
-            <a:outerShdw sx="100000" sy="100000" kx="0" ky="0" algn="bl" rotWithShape="0" blurRad="127000" dist="25400" dir="5400000">
-              <a:srgbClr val="1E2B4A">
-                <a:alpha val="10000"/>
-              </a:srgbClr>
-            </a:outerShdw>
-          </a:effectLst>
-        </p:spPr>
-      </p:sp>
-      <p:sp>
-        <p:nvSpPr>
-          <p:cNvPr id="9" name="Text 7"/>
+          <p:cNvPr id="7" name="Text 5"/>
           <p:cNvSpPr/>
           <p:nvPr/>
         </p:nvSpPr>
@@ -11829,7 +11250,7 @@
       </p:sp>
       <p:sp>
         <p:nvSpPr>
-          <p:cNvPr id="10" name="Text 8"/>
+          <p:cNvPr id="8" name="Text 6"/>
           <p:cNvSpPr/>
           <p:nvPr/>
         </p:nvSpPr>
@@ -11871,7 +11292,7 @@
       </p:sp>
       <p:sp>
         <p:nvSpPr>
-          <p:cNvPr id="11" name="Text 9"/>
+          <p:cNvPr id="9" name="Text 7"/>
           <p:cNvSpPr/>
           <p:nvPr/>
         </p:nvSpPr>
@@ -11913,7 +11334,7 @@
       </p:sp>
       <p:sp>
         <p:nvSpPr>
-          <p:cNvPr id="12" name="Text 10"/>
+          <p:cNvPr id="10" name="Text 8"/>
           <p:cNvSpPr/>
           <p:nvPr/>
         </p:nvSpPr>
@@ -11952,7 +11373,7 @@
       </p:sp>
       <p:sp>
         <p:nvSpPr>
-          <p:cNvPr id="13" name="Shape 11"/>
+          <p:cNvPr id="11" name="Shape 9"/>
           <p:cNvSpPr/>
           <p:nvPr/>
         </p:nvSpPr>
@@ -11984,7 +11405,7 @@
       </p:sp>
       <p:pic>
         <p:nvPicPr>
-          <p:cNvPr id="14" name="Image 0" descr="preencoded.png">    </p:cNvPr>
+          <p:cNvPr id="12" name="Image 0" descr="preencoded.png">    </p:cNvPr>
           <p:cNvPicPr>
             <a:picLocks noChangeAspect="1"/>
           </p:cNvPicPr>
@@ -12008,7 +11429,7 @@
       </p:pic>
       <p:sp>
         <p:nvSpPr>
-          <p:cNvPr id="15" name="Shape 12"/>
+          <p:cNvPr id="13" name="Shape 10"/>
           <p:cNvSpPr/>
           <p:nvPr/>
         </p:nvSpPr>
@@ -12040,7 +11461,7 @@
       </p:sp>
       <p:pic>
         <p:nvPicPr>
-          <p:cNvPr id="16" name="Image 1" descr="preencoded.png">    </p:cNvPr>
+          <p:cNvPr id="14" name="Image 1" descr="preencoded.png">    </p:cNvPr>
           <p:cNvPicPr>
             <a:picLocks noChangeAspect="1"/>
           </p:cNvPicPr>
@@ -12064,7 +11485,7 @@
       </p:pic>
       <p:sp>
         <p:nvSpPr>
-          <p:cNvPr id="17" name="Text 13"/>
+          <p:cNvPr id="15" name="Text 11"/>
           <p:cNvSpPr/>
           <p:nvPr/>
         </p:nvSpPr>
@@ -12103,7 +11524,7 @@
       </p:sp>
       <p:pic>
         <p:nvPicPr>
-          <p:cNvPr id="18" name="Image 2" descr="logos/logo_ensae_new.png">    </p:cNvPr>
+          <p:cNvPr id="16" name="Image 2" descr="logos/logo_ensae_new.png">    </p:cNvPr>
           <p:cNvPicPr>
             <a:picLocks noChangeAspect="1"/>
           </p:cNvPicPr>
@@ -12246,35 +11667,6 @@
         </p:nvSpPr>
         <p:spPr>
           <a:xfrm>
-            <a:off x="658368" y="1691640"/>
-            <a:ext cx="3456432" cy="4114800"/>
-          </a:xfrm>
-          <a:prstGeom prst="roundRect">
-            <a:avLst>
-              <a:gd name="adj" fmla="val 1587"/>
-            </a:avLst>
-          </a:prstGeom>
-          <a:solidFill>
-            <a:srgbClr val="F4F5FA"/>
-          </a:solidFill>
-          <a:ln/>
-          <a:effectLst>
-            <a:outerShdw sx="100000" sy="100000" kx="0" ky="0" algn="bl" rotWithShape="0" blurRad="127000" dist="25400" dir="5400000">
-              <a:srgbClr val="1E2B4A">
-                <a:alpha val="10000"/>
-              </a:srgbClr>
-            </a:outerShdw>
-          </a:effectLst>
-        </p:spPr>
-      </p:sp>
-      <p:sp>
-        <p:nvSpPr>
-          <p:cNvPr id="5" name="Shape 3"/>
-          <p:cNvSpPr/>
-          <p:nvPr/>
-        </p:nvSpPr>
-        <p:spPr>
-          <a:xfrm>
             <a:off x="1984248" y="1965960"/>
             <a:ext cx="822960" cy="822960"/>
           </a:xfrm>
@@ -12301,7 +11693,7 @@
       </p:sp>
       <p:pic>
         <p:nvPicPr>
-          <p:cNvPr id="6" name="Image 0" descr="preencoded.png">    </p:cNvPr>
+          <p:cNvPr id="5" name="Image 0" descr="preencoded.png">    </p:cNvPr>
           <p:cNvPicPr>
             <a:picLocks noChangeAspect="1"/>
           </p:cNvPicPr>
@@ -12325,7 +11717,7 @@
       </p:pic>
       <p:sp>
         <p:nvSpPr>
-          <p:cNvPr id="7" name="Text 4"/>
+          <p:cNvPr id="6" name="Text 3"/>
           <p:cNvSpPr/>
           <p:nvPr/>
         </p:nvSpPr>
@@ -12367,7 +11759,7 @@
       </p:sp>
       <p:sp>
         <p:nvSpPr>
-          <p:cNvPr id="8" name="Text 5"/>
+          <p:cNvPr id="7" name="Text 4"/>
           <p:cNvSpPr/>
           <p:nvPr/>
         </p:nvSpPr>
@@ -12409,36 +11801,7 @@
       </p:sp>
       <p:sp>
         <p:nvSpPr>
-          <p:cNvPr id="9" name="Shape 6"/>
-          <p:cNvSpPr/>
-          <p:nvPr/>
-        </p:nvSpPr>
-        <p:spPr>
-          <a:xfrm>
-            <a:off x="4453128" y="1691640"/>
-            <a:ext cx="3456432" cy="4114800"/>
-          </a:xfrm>
-          <a:prstGeom prst="roundRect">
-            <a:avLst>
-              <a:gd name="adj" fmla="val 1587"/>
-            </a:avLst>
-          </a:prstGeom>
-          <a:solidFill>
-            <a:srgbClr val="F4F5FA"/>
-          </a:solidFill>
-          <a:ln/>
-          <a:effectLst>
-            <a:outerShdw sx="100000" sy="100000" kx="0" ky="0" algn="bl" rotWithShape="0" blurRad="127000" dist="25400" dir="5400000">
-              <a:srgbClr val="1E2B4A">
-                <a:alpha val="10000"/>
-              </a:srgbClr>
-            </a:outerShdw>
-          </a:effectLst>
-        </p:spPr>
-      </p:sp>
-      <p:sp>
-        <p:nvSpPr>
-          <p:cNvPr id="10" name="Shape 7"/>
+          <p:cNvPr id="8" name="Shape 5"/>
           <p:cNvSpPr/>
           <p:nvPr/>
         </p:nvSpPr>
@@ -12470,7 +11833,7 @@
       </p:sp>
       <p:pic>
         <p:nvPicPr>
-          <p:cNvPr id="11" name="Image 1" descr="preencoded.png">    </p:cNvPr>
+          <p:cNvPr id="9" name="Image 1" descr="preencoded.png">    </p:cNvPr>
           <p:cNvPicPr>
             <a:picLocks noChangeAspect="1"/>
           </p:cNvPicPr>
@@ -12494,7 +11857,7 @@
       </p:pic>
       <p:sp>
         <p:nvSpPr>
-          <p:cNvPr id="12" name="Text 8"/>
+          <p:cNvPr id="10" name="Text 6"/>
           <p:cNvSpPr/>
           <p:nvPr/>
         </p:nvSpPr>
@@ -12536,7 +11899,7 @@
       </p:sp>
       <p:sp>
         <p:nvSpPr>
-          <p:cNvPr id="13" name="Text 9"/>
+          <p:cNvPr id="11" name="Text 7"/>
           <p:cNvSpPr/>
           <p:nvPr/>
         </p:nvSpPr>
@@ -12578,36 +11941,7 @@
       </p:sp>
       <p:sp>
         <p:nvSpPr>
-          <p:cNvPr id="14" name="Shape 10"/>
-          <p:cNvSpPr/>
-          <p:nvPr/>
-        </p:nvSpPr>
-        <p:spPr>
-          <a:xfrm>
-            <a:off x="8247888" y="1691640"/>
-            <a:ext cx="3456432" cy="4114800"/>
-          </a:xfrm>
-          <a:prstGeom prst="roundRect">
-            <a:avLst>
-              <a:gd name="adj" fmla="val 1587"/>
-            </a:avLst>
-          </a:prstGeom>
-          <a:solidFill>
-            <a:srgbClr val="F4F5FA"/>
-          </a:solidFill>
-          <a:ln/>
-          <a:effectLst>
-            <a:outerShdw sx="100000" sy="100000" kx="0" ky="0" algn="bl" rotWithShape="0" blurRad="127000" dist="25400" dir="5400000">
-              <a:srgbClr val="1E2B4A">
-                <a:alpha val="10000"/>
-              </a:srgbClr>
-            </a:outerShdw>
-          </a:effectLst>
-        </p:spPr>
-      </p:sp>
-      <p:sp>
-        <p:nvSpPr>
-          <p:cNvPr id="15" name="Shape 11"/>
+          <p:cNvPr id="12" name="Shape 8"/>
           <p:cNvSpPr/>
           <p:nvPr/>
         </p:nvSpPr>
@@ -12639,7 +11973,7 @@
       </p:sp>
       <p:pic>
         <p:nvPicPr>
-          <p:cNvPr id="16" name="Image 2" descr="preencoded.png">    </p:cNvPr>
+          <p:cNvPr id="13" name="Image 2" descr="preencoded.png">    </p:cNvPr>
           <p:cNvPicPr>
             <a:picLocks noChangeAspect="1"/>
           </p:cNvPicPr>
@@ -12663,7 +11997,7 @@
       </p:pic>
       <p:sp>
         <p:nvSpPr>
-          <p:cNvPr id="17" name="Text 12"/>
+          <p:cNvPr id="14" name="Text 9"/>
           <p:cNvSpPr/>
           <p:nvPr/>
         </p:nvSpPr>
@@ -12705,7 +12039,7 @@
       </p:sp>
       <p:sp>
         <p:nvSpPr>
-          <p:cNvPr id="18" name="Text 13"/>
+          <p:cNvPr id="15" name="Text 10"/>
           <p:cNvSpPr/>
           <p:nvPr/>
         </p:nvSpPr>
@@ -12747,7 +12081,7 @@
       </p:sp>
       <p:sp>
         <p:nvSpPr>
-          <p:cNvPr id="19" name="Text 14"/>
+          <p:cNvPr id="16" name="Text 11"/>
           <p:cNvSpPr/>
           <p:nvPr/>
         </p:nvSpPr>
@@ -12786,7 +12120,7 @@
       </p:sp>
       <p:pic>
         <p:nvPicPr>
-          <p:cNvPr id="20" name="Image 3" descr="logos/logo_ensae_new.png">    </p:cNvPr>
+          <p:cNvPr id="17" name="Image 3" descr="logos/logo_ensae_new.png">    </p:cNvPr>
           <p:cNvPicPr>
             <a:picLocks noChangeAspect="1"/>
           </p:cNvPicPr>
@@ -12887,35 +12221,6 @@
         </p:nvSpPr>
         <p:spPr>
           <a:xfrm>
-            <a:off x="658368" y="1417320"/>
-            <a:ext cx="5394960" cy="4389120"/>
-          </a:xfrm>
-          <a:prstGeom prst="roundRect">
-            <a:avLst>
-              <a:gd name="adj" fmla="val 1250"/>
-            </a:avLst>
-          </a:prstGeom>
-          <a:solidFill>
-            <a:srgbClr val="F4F5FA"/>
-          </a:solidFill>
-          <a:ln/>
-          <a:effectLst>
-            <a:outerShdw sx="100000" sy="100000" kx="0" ky="0" algn="bl" rotWithShape="0" blurRad="127000" dist="25400" dir="5400000">
-              <a:srgbClr val="1E2B4A">
-                <a:alpha val="10000"/>
-              </a:srgbClr>
-            </a:outerShdw>
-          </a:effectLst>
-        </p:spPr>
-      </p:sp>
-      <p:sp>
-        <p:nvSpPr>
-          <p:cNvPr id="4" name="Shape 2"/>
-          <p:cNvSpPr/>
-          <p:nvPr/>
-        </p:nvSpPr>
-        <p:spPr>
-          <a:xfrm>
             <a:off x="960120" y="1691640"/>
             <a:ext cx="777240" cy="777240"/>
           </a:xfrm>
@@ -12942,7 +12247,7 @@
       </p:sp>
       <p:pic>
         <p:nvPicPr>
-          <p:cNvPr id="5" name="Image 0" descr="preencoded.png">    </p:cNvPr>
+          <p:cNvPr id="4" name="Image 0" descr="preencoded.png">    </p:cNvPr>
           <p:cNvPicPr>
             <a:picLocks noChangeAspect="1"/>
           </p:cNvPicPr>
@@ -12966,7 +12271,7 @@
       </p:pic>
       <p:sp>
         <p:nvSpPr>
-          <p:cNvPr id="6" name="Text 3"/>
+          <p:cNvPr id="5" name="Text 2"/>
           <p:cNvSpPr/>
           <p:nvPr/>
         </p:nvSpPr>
@@ -13005,7 +12310,7 @@
       </p:sp>
       <p:sp>
         <p:nvSpPr>
-          <p:cNvPr id="7" name="Text 4"/>
+          <p:cNvPr id="6" name="Text 3"/>
           <p:cNvSpPr/>
           <p:nvPr/>
         </p:nvSpPr>
@@ -13044,7 +12349,7 @@
       </p:sp>
       <p:sp>
         <p:nvSpPr>
-          <p:cNvPr id="8" name="Text 5"/>
+          <p:cNvPr id="7" name="Text 4"/>
           <p:cNvSpPr/>
           <p:nvPr/>
         </p:nvSpPr>
@@ -13086,7 +12391,7 @@
       </p:sp>
       <p:sp>
         <p:nvSpPr>
-          <p:cNvPr id="9" name="Text 6"/>
+          <p:cNvPr id="8" name="Text 5"/>
           <p:cNvSpPr/>
           <p:nvPr/>
         </p:nvSpPr>
@@ -13125,7 +12430,7 @@
       </p:sp>
       <p:sp>
         <p:nvSpPr>
-          <p:cNvPr id="10" name="Text 7"/>
+          <p:cNvPr id="9" name="Text 6"/>
           <p:cNvSpPr/>
           <p:nvPr/>
         </p:nvSpPr>
@@ -13167,36 +12472,7 @@
       </p:sp>
       <p:sp>
         <p:nvSpPr>
-          <p:cNvPr id="11" name="Shape 8"/>
-          <p:cNvSpPr/>
-          <p:nvPr/>
-        </p:nvSpPr>
-        <p:spPr>
-          <a:xfrm>
-            <a:off x="6263640" y="1417320"/>
-            <a:ext cx="5285232" cy="4389120"/>
-          </a:xfrm>
-          <a:prstGeom prst="roundRect">
-            <a:avLst>
-              <a:gd name="adj" fmla="val 1250"/>
-            </a:avLst>
-          </a:prstGeom>
-          <a:solidFill>
-            <a:srgbClr val="F4F5FA"/>
-          </a:solidFill>
-          <a:ln/>
-          <a:effectLst>
-            <a:outerShdw sx="100000" sy="100000" kx="0" ky="0" algn="bl" rotWithShape="0" blurRad="127000" dist="25400" dir="5400000">
-              <a:srgbClr val="1E2B4A">
-                <a:alpha val="10000"/>
-              </a:srgbClr>
-            </a:outerShdw>
-          </a:effectLst>
-        </p:spPr>
-      </p:sp>
-      <p:sp>
-        <p:nvSpPr>
-          <p:cNvPr id="12" name="Shape 9"/>
+          <p:cNvPr id="10" name="Shape 7"/>
           <p:cNvSpPr/>
           <p:nvPr/>
         </p:nvSpPr>
@@ -13228,7 +12504,7 @@
       </p:sp>
       <p:pic>
         <p:nvPicPr>
-          <p:cNvPr id="13" name="Image 1" descr="preencoded.png">    </p:cNvPr>
+          <p:cNvPr id="11" name="Image 1" descr="preencoded.png">    </p:cNvPr>
           <p:cNvPicPr>
             <a:picLocks noChangeAspect="1"/>
           </p:cNvPicPr>
@@ -13252,7 +12528,7 @@
       </p:pic>
       <p:sp>
         <p:nvSpPr>
-          <p:cNvPr id="14" name="Text 10"/>
+          <p:cNvPr id="12" name="Text 8"/>
           <p:cNvSpPr/>
           <p:nvPr/>
         </p:nvSpPr>
@@ -13291,7 +12567,7 @@
       </p:sp>
       <p:sp>
         <p:nvSpPr>
-          <p:cNvPr id="15" name="Shape 11"/>
+          <p:cNvPr id="13" name="Shape 9"/>
           <p:cNvSpPr/>
           <p:nvPr/>
         </p:nvSpPr>
@@ -13311,7 +12587,7 @@
       </p:sp>
       <p:sp>
         <p:nvSpPr>
-          <p:cNvPr id="16" name="Text 12"/>
+          <p:cNvPr id="14" name="Text 10"/>
           <p:cNvSpPr/>
           <p:nvPr/>
         </p:nvSpPr>
@@ -13350,7 +12626,7 @@
       </p:sp>
       <p:sp>
         <p:nvSpPr>
-          <p:cNvPr id="17" name="Text 13"/>
+          <p:cNvPr id="15" name="Text 11"/>
           <p:cNvSpPr/>
           <p:nvPr/>
         </p:nvSpPr>
@@ -13392,7 +12668,7 @@
       </p:sp>
       <p:sp>
         <p:nvSpPr>
-          <p:cNvPr id="18" name="Shape 14"/>
+          <p:cNvPr id="16" name="Shape 12"/>
           <p:cNvSpPr/>
           <p:nvPr/>
         </p:nvSpPr>
@@ -13412,7 +12688,7 @@
       </p:sp>
       <p:sp>
         <p:nvSpPr>
-          <p:cNvPr id="19" name="Text 15"/>
+          <p:cNvPr id="17" name="Text 13"/>
           <p:cNvSpPr/>
           <p:nvPr/>
         </p:nvSpPr>
@@ -13451,7 +12727,7 @@
       </p:sp>
       <p:sp>
         <p:nvSpPr>
-          <p:cNvPr id="20" name="Text 16"/>
+          <p:cNvPr id="18" name="Text 14"/>
           <p:cNvSpPr/>
           <p:nvPr/>
         </p:nvSpPr>
@@ -13493,7 +12769,7 @@
       </p:sp>
       <p:sp>
         <p:nvSpPr>
-          <p:cNvPr id="21" name="Shape 17"/>
+          <p:cNvPr id="19" name="Shape 15"/>
           <p:cNvSpPr/>
           <p:nvPr/>
         </p:nvSpPr>
@@ -13513,7 +12789,7 @@
       </p:sp>
       <p:sp>
         <p:nvSpPr>
-          <p:cNvPr id="22" name="Text 18"/>
+          <p:cNvPr id="20" name="Text 16"/>
           <p:cNvSpPr/>
           <p:nvPr/>
         </p:nvSpPr>
@@ -13552,7 +12828,7 @@
       </p:sp>
       <p:sp>
         <p:nvSpPr>
-          <p:cNvPr id="23" name="Text 19"/>
+          <p:cNvPr id="21" name="Text 17"/>
           <p:cNvSpPr/>
           <p:nvPr/>
         </p:nvSpPr>
@@ -13594,7 +12870,7 @@
       </p:sp>
       <p:sp>
         <p:nvSpPr>
-          <p:cNvPr id="24" name="Text 20"/>
+          <p:cNvPr id="22" name="Text 18"/>
           <p:cNvSpPr/>
           <p:nvPr/>
         </p:nvSpPr>
@@ -13633,7 +12909,7 @@
       </p:sp>
       <p:pic>
         <p:nvPicPr>
-          <p:cNvPr id="25" name="Image 2" descr="logos/logo_ensae_new.png">    </p:cNvPr>
+          <p:cNvPr id="23" name="Image 2" descr="logos/logo_ensae_new.png">    </p:cNvPr>
           <p:cNvPicPr>
             <a:picLocks noChangeAspect="1"/>
           </p:cNvPicPr>
@@ -13746,13 +13022,6 @@
             <a:srgbClr val="1E2B4A"/>
           </a:solidFill>
           <a:ln/>
-          <a:effectLst>
-            <a:outerShdw sx="100000" sy="100000" kx="0" ky="0" algn="bl" rotWithShape="0" blurRad="127000" dist="25400" dir="5400000">
-              <a:srgbClr val="1E2B4A">
-                <a:alpha val="10000"/>
-              </a:srgbClr>
-            </a:outerShdw>
-          </a:effectLst>
         </p:spPr>
       </p:sp>
       <p:sp>
@@ -13799,36 +13068,7 @@
       </p:sp>
       <p:sp>
         <p:nvSpPr>
-          <p:cNvPr id="5" name="Shape 3"/>
-          <p:cNvSpPr/>
-          <p:nvPr/>
-        </p:nvSpPr>
-        <p:spPr>
-          <a:xfrm>
-            <a:off x="658368" y="3063240"/>
-            <a:ext cx="2514600" cy="2743200"/>
-          </a:xfrm>
-          <a:prstGeom prst="roundRect">
-            <a:avLst>
-              <a:gd name="adj" fmla="val 2182"/>
-            </a:avLst>
-          </a:prstGeom>
-          <a:solidFill>
-            <a:srgbClr val="F4F5FA"/>
-          </a:solidFill>
-          <a:ln/>
-          <a:effectLst>
-            <a:outerShdw sx="100000" sy="100000" kx="0" ky="0" algn="bl" rotWithShape="0" blurRad="127000" dist="25400" dir="5400000">
-              <a:srgbClr val="1E2B4A">
-                <a:alpha val="10000"/>
-              </a:srgbClr>
-            </a:outerShdw>
-          </a:effectLst>
-        </p:spPr>
-      </p:sp>
-      <p:sp>
-        <p:nvSpPr>
-          <p:cNvPr id="6" name="Text 4"/>
+          <p:cNvPr id="5" name="Text 3"/>
           <p:cNvSpPr/>
           <p:nvPr/>
         </p:nvSpPr>
@@ -13867,7 +13107,7 @@
       </p:sp>
       <p:sp>
         <p:nvSpPr>
-          <p:cNvPr id="7" name="Text 5"/>
+          <p:cNvPr id="6" name="Text 4"/>
           <p:cNvSpPr/>
           <p:nvPr/>
         </p:nvSpPr>
@@ -13906,7 +13146,7 @@
       </p:sp>
       <p:sp>
         <p:nvSpPr>
-          <p:cNvPr id="8" name="Text 6"/>
+          <p:cNvPr id="7" name="Text 5"/>
           <p:cNvSpPr/>
           <p:nvPr/>
         </p:nvSpPr>
@@ -13948,36 +13188,7 @@
       </p:sp>
       <p:sp>
         <p:nvSpPr>
-          <p:cNvPr id="9" name="Shape 7"/>
-          <p:cNvSpPr/>
-          <p:nvPr/>
-        </p:nvSpPr>
-        <p:spPr>
-          <a:xfrm>
-            <a:off x="3447288" y="3063240"/>
-            <a:ext cx="2514600" cy="2743200"/>
-          </a:xfrm>
-          <a:prstGeom prst="roundRect">
-            <a:avLst>
-              <a:gd name="adj" fmla="val 2182"/>
-            </a:avLst>
-          </a:prstGeom>
-          <a:solidFill>
-            <a:srgbClr val="F4F5FA"/>
-          </a:solidFill>
-          <a:ln/>
-          <a:effectLst>
-            <a:outerShdw sx="100000" sy="100000" kx="0" ky="0" algn="bl" rotWithShape="0" blurRad="127000" dist="25400" dir="5400000">
-              <a:srgbClr val="1E2B4A">
-                <a:alpha val="10000"/>
-              </a:srgbClr>
-            </a:outerShdw>
-          </a:effectLst>
-        </p:spPr>
-      </p:sp>
-      <p:sp>
-        <p:nvSpPr>
-          <p:cNvPr id="10" name="Text 8"/>
+          <p:cNvPr id="8" name="Text 6"/>
           <p:cNvSpPr/>
           <p:nvPr/>
         </p:nvSpPr>
@@ -14016,7 +13227,7 @@
       </p:sp>
       <p:sp>
         <p:nvSpPr>
-          <p:cNvPr id="11" name="Text 9"/>
+          <p:cNvPr id="9" name="Text 7"/>
           <p:cNvSpPr/>
           <p:nvPr/>
         </p:nvSpPr>
@@ -14055,7 +13266,7 @@
       </p:sp>
       <p:sp>
         <p:nvSpPr>
-          <p:cNvPr id="12" name="Text 10"/>
+          <p:cNvPr id="10" name="Text 8"/>
           <p:cNvSpPr/>
           <p:nvPr/>
         </p:nvSpPr>
@@ -14097,36 +13308,7 @@
       </p:sp>
       <p:sp>
         <p:nvSpPr>
-          <p:cNvPr id="13" name="Shape 11"/>
-          <p:cNvSpPr/>
-          <p:nvPr/>
-        </p:nvSpPr>
-        <p:spPr>
-          <a:xfrm>
-            <a:off x="6236208" y="3063240"/>
-            <a:ext cx="2514600" cy="2743200"/>
-          </a:xfrm>
-          <a:prstGeom prst="roundRect">
-            <a:avLst>
-              <a:gd name="adj" fmla="val 2182"/>
-            </a:avLst>
-          </a:prstGeom>
-          <a:solidFill>
-            <a:srgbClr val="F4F5FA"/>
-          </a:solidFill>
-          <a:ln/>
-          <a:effectLst>
-            <a:outerShdw sx="100000" sy="100000" kx="0" ky="0" algn="bl" rotWithShape="0" blurRad="127000" dist="25400" dir="5400000">
-              <a:srgbClr val="1E2B4A">
-                <a:alpha val="10000"/>
-              </a:srgbClr>
-            </a:outerShdw>
-          </a:effectLst>
-        </p:spPr>
-      </p:sp>
-      <p:sp>
-        <p:nvSpPr>
-          <p:cNvPr id="14" name="Text 12"/>
+          <p:cNvPr id="11" name="Text 9"/>
           <p:cNvSpPr/>
           <p:nvPr/>
         </p:nvSpPr>
@@ -14165,7 +13347,7 @@
       </p:sp>
       <p:sp>
         <p:nvSpPr>
-          <p:cNvPr id="15" name="Text 13"/>
+          <p:cNvPr id="12" name="Text 10"/>
           <p:cNvSpPr/>
           <p:nvPr/>
         </p:nvSpPr>
@@ -14204,7 +13386,7 @@
       </p:sp>
       <p:sp>
         <p:nvSpPr>
-          <p:cNvPr id="16" name="Text 14"/>
+          <p:cNvPr id="13" name="Text 11"/>
           <p:cNvSpPr/>
           <p:nvPr/>
         </p:nvSpPr>
@@ -14246,36 +13428,7 @@
       </p:sp>
       <p:sp>
         <p:nvSpPr>
-          <p:cNvPr id="17" name="Shape 15"/>
-          <p:cNvSpPr/>
-          <p:nvPr/>
-        </p:nvSpPr>
-        <p:spPr>
-          <a:xfrm>
-            <a:off x="9025128" y="3063240"/>
-            <a:ext cx="2514600" cy="2743200"/>
-          </a:xfrm>
-          <a:prstGeom prst="roundRect">
-            <a:avLst>
-              <a:gd name="adj" fmla="val 2182"/>
-            </a:avLst>
-          </a:prstGeom>
-          <a:solidFill>
-            <a:srgbClr val="F4F5FA"/>
-          </a:solidFill>
-          <a:ln/>
-          <a:effectLst>
-            <a:outerShdw sx="100000" sy="100000" kx="0" ky="0" algn="bl" rotWithShape="0" blurRad="127000" dist="25400" dir="5400000">
-              <a:srgbClr val="1E2B4A">
-                <a:alpha val="10000"/>
-              </a:srgbClr>
-            </a:outerShdw>
-          </a:effectLst>
-        </p:spPr>
-      </p:sp>
-      <p:sp>
-        <p:nvSpPr>
-          <p:cNvPr id="18" name="Text 16"/>
+          <p:cNvPr id="14" name="Text 12"/>
           <p:cNvSpPr/>
           <p:nvPr/>
         </p:nvSpPr>
@@ -14314,7 +13467,7 @@
       </p:sp>
       <p:sp>
         <p:nvSpPr>
-          <p:cNvPr id="19" name="Text 17"/>
+          <p:cNvPr id="15" name="Text 13"/>
           <p:cNvSpPr/>
           <p:nvPr/>
         </p:nvSpPr>
@@ -14353,7 +13506,7 @@
       </p:sp>
       <p:sp>
         <p:nvSpPr>
-          <p:cNvPr id="20" name="Text 18"/>
+          <p:cNvPr id="16" name="Text 14"/>
           <p:cNvSpPr/>
           <p:nvPr/>
         </p:nvSpPr>
@@ -14395,7 +13548,7 @@
       </p:sp>
       <p:sp>
         <p:nvSpPr>
-          <p:cNvPr id="21" name="Text 19"/>
+          <p:cNvPr id="17" name="Text 15"/>
           <p:cNvSpPr/>
           <p:nvPr/>
         </p:nvSpPr>
@@ -14434,7 +13587,7 @@
       </p:sp>
       <p:pic>
         <p:nvPicPr>
-          <p:cNvPr id="22" name="Image 0" descr="logos/logo_ensae_new.png">    </p:cNvPr>
+          <p:cNvPr id="18" name="Image 0" descr="logos/logo_ensae_new.png">    </p:cNvPr>
           <p:cNvPicPr>
             <a:picLocks noChangeAspect="1"/>
           </p:cNvPicPr>
@@ -14535,35 +13688,6 @@
         </p:nvSpPr>
         <p:spPr>
           <a:xfrm>
-            <a:off x="685800" y="1572768"/>
-            <a:ext cx="3429000" cy="1965960"/>
-          </a:xfrm>
-          <a:prstGeom prst="roundRect">
-            <a:avLst>
-              <a:gd name="adj" fmla="val 2791"/>
-            </a:avLst>
-          </a:prstGeom>
-          <a:solidFill>
-            <a:srgbClr val="F4F5FA"/>
-          </a:solidFill>
-          <a:ln/>
-          <a:effectLst>
-            <a:outerShdw sx="100000" sy="100000" kx="0" ky="0" algn="bl" rotWithShape="0" blurRad="127000" dist="25400" dir="5400000">
-              <a:srgbClr val="1E2B4A">
-                <a:alpha val="10000"/>
-              </a:srgbClr>
-            </a:outerShdw>
-          </a:effectLst>
-        </p:spPr>
-      </p:sp>
-      <p:sp>
-        <p:nvSpPr>
-          <p:cNvPr id="4" name="Shape 2"/>
-          <p:cNvSpPr/>
-          <p:nvPr/>
-        </p:nvSpPr>
-        <p:spPr>
-          <a:xfrm>
             <a:off x="978408" y="1883664"/>
             <a:ext cx="841248" cy="841248"/>
           </a:xfrm>
@@ -14590,7 +13714,7 @@
       </p:sp>
       <p:pic>
         <p:nvPicPr>
-          <p:cNvPr id="5" name="Image 0" descr="preencoded.png">    </p:cNvPr>
+          <p:cNvPr id="4" name="Image 0" descr="preencoded.png">    </p:cNvPr>
           <p:cNvPicPr>
             <a:picLocks noChangeAspect="1"/>
           </p:cNvPicPr>
@@ -14614,7 +13738,7 @@
       </p:pic>
       <p:sp>
         <p:nvSpPr>
-          <p:cNvPr id="6" name="Text 3"/>
+          <p:cNvPr id="5" name="Text 2"/>
           <p:cNvSpPr/>
           <p:nvPr/>
         </p:nvSpPr>
@@ -14653,7 +13777,7 @@
       </p:sp>
       <p:sp>
         <p:nvSpPr>
-          <p:cNvPr id="7" name="Text 4"/>
+          <p:cNvPr id="6" name="Text 3"/>
           <p:cNvSpPr/>
           <p:nvPr/>
         </p:nvSpPr>
@@ -14692,7 +13816,7 @@
       </p:sp>
       <p:sp>
         <p:nvSpPr>
-          <p:cNvPr id="8" name="Text 5"/>
+          <p:cNvPr id="7" name="Text 4"/>
           <p:cNvSpPr/>
           <p:nvPr/>
         </p:nvSpPr>
@@ -14731,36 +13855,7 @@
       </p:sp>
       <p:sp>
         <p:nvSpPr>
-          <p:cNvPr id="9" name="Shape 6"/>
-          <p:cNvSpPr/>
-          <p:nvPr/>
-        </p:nvSpPr>
-        <p:spPr>
-          <a:xfrm>
-            <a:off x="4480560" y="1572768"/>
-            <a:ext cx="3429000" cy="1965960"/>
-          </a:xfrm>
-          <a:prstGeom prst="roundRect">
-            <a:avLst>
-              <a:gd name="adj" fmla="val 2791"/>
-            </a:avLst>
-          </a:prstGeom>
-          <a:solidFill>
-            <a:srgbClr val="F4F5FA"/>
-          </a:solidFill>
-          <a:ln/>
-          <a:effectLst>
-            <a:outerShdw sx="100000" sy="100000" kx="0" ky="0" algn="bl" rotWithShape="0" blurRad="127000" dist="25400" dir="5400000">
-              <a:srgbClr val="1E2B4A">
-                <a:alpha val="10000"/>
-              </a:srgbClr>
-            </a:outerShdw>
-          </a:effectLst>
-        </p:spPr>
-      </p:sp>
-      <p:sp>
-        <p:nvSpPr>
-          <p:cNvPr id="10" name="Shape 7"/>
+          <p:cNvPr id="8" name="Shape 5"/>
           <p:cNvSpPr/>
           <p:nvPr/>
         </p:nvSpPr>
@@ -14792,7 +13887,7 @@
       </p:sp>
       <p:pic>
         <p:nvPicPr>
-          <p:cNvPr id="11" name="Image 1" descr="preencoded.png">    </p:cNvPr>
+          <p:cNvPr id="9" name="Image 1" descr="preencoded.png">    </p:cNvPr>
           <p:cNvPicPr>
             <a:picLocks noChangeAspect="1"/>
           </p:cNvPicPr>
@@ -14816,7 +13911,7 @@
       </p:pic>
       <p:sp>
         <p:nvSpPr>
-          <p:cNvPr id="12" name="Text 8"/>
+          <p:cNvPr id="10" name="Text 6"/>
           <p:cNvSpPr/>
           <p:nvPr/>
         </p:nvSpPr>
@@ -14855,7 +13950,7 @@
       </p:sp>
       <p:sp>
         <p:nvSpPr>
-          <p:cNvPr id="13" name="Text 9"/>
+          <p:cNvPr id="11" name="Text 7"/>
           <p:cNvSpPr/>
           <p:nvPr/>
         </p:nvSpPr>
@@ -14894,7 +13989,7 @@
       </p:sp>
       <p:sp>
         <p:nvSpPr>
-          <p:cNvPr id="14" name="Text 10"/>
+          <p:cNvPr id="12" name="Text 8"/>
           <p:cNvSpPr/>
           <p:nvPr/>
         </p:nvSpPr>
@@ -14933,36 +14028,7 @@
       </p:sp>
       <p:sp>
         <p:nvSpPr>
-          <p:cNvPr id="15" name="Shape 11"/>
-          <p:cNvSpPr/>
-          <p:nvPr/>
-        </p:nvSpPr>
-        <p:spPr>
-          <a:xfrm>
-            <a:off x="8275320" y="1572768"/>
-            <a:ext cx="3429000" cy="1965960"/>
-          </a:xfrm>
-          <a:prstGeom prst="roundRect">
-            <a:avLst>
-              <a:gd name="adj" fmla="val 2791"/>
-            </a:avLst>
-          </a:prstGeom>
-          <a:solidFill>
-            <a:srgbClr val="F4F5FA"/>
-          </a:solidFill>
-          <a:ln/>
-          <a:effectLst>
-            <a:outerShdw sx="100000" sy="100000" kx="0" ky="0" algn="bl" rotWithShape="0" blurRad="127000" dist="25400" dir="5400000">
-              <a:srgbClr val="1E2B4A">
-                <a:alpha val="10000"/>
-              </a:srgbClr>
-            </a:outerShdw>
-          </a:effectLst>
-        </p:spPr>
-      </p:sp>
-      <p:sp>
-        <p:nvSpPr>
-          <p:cNvPr id="16" name="Shape 12"/>
+          <p:cNvPr id="13" name="Shape 9"/>
           <p:cNvSpPr/>
           <p:nvPr/>
         </p:nvSpPr>
@@ -14994,7 +14060,7 @@
       </p:sp>
       <p:pic>
         <p:nvPicPr>
-          <p:cNvPr id="17" name="Image 2" descr="preencoded.png">    </p:cNvPr>
+          <p:cNvPr id="14" name="Image 2" descr="preencoded.png">    </p:cNvPr>
           <p:cNvPicPr>
             <a:picLocks noChangeAspect="1"/>
           </p:cNvPicPr>
@@ -15018,7 +14084,7 @@
       </p:pic>
       <p:sp>
         <p:nvSpPr>
-          <p:cNvPr id="18" name="Text 13"/>
+          <p:cNvPr id="15" name="Text 10"/>
           <p:cNvSpPr/>
           <p:nvPr/>
         </p:nvSpPr>
@@ -15057,7 +14123,7 @@
       </p:sp>
       <p:sp>
         <p:nvSpPr>
-          <p:cNvPr id="19" name="Text 14"/>
+          <p:cNvPr id="16" name="Text 11"/>
           <p:cNvSpPr/>
           <p:nvPr/>
         </p:nvSpPr>
@@ -15096,7 +14162,7 @@
       </p:sp>
       <p:sp>
         <p:nvSpPr>
-          <p:cNvPr id="20" name="Text 15"/>
+          <p:cNvPr id="17" name="Text 12"/>
           <p:cNvSpPr/>
           <p:nvPr/>
         </p:nvSpPr>
@@ -15135,36 +14201,7 @@
       </p:sp>
       <p:sp>
         <p:nvSpPr>
-          <p:cNvPr id="21" name="Shape 16"/>
-          <p:cNvSpPr/>
-          <p:nvPr/>
-        </p:nvSpPr>
-        <p:spPr>
-          <a:xfrm>
-            <a:off x="685800" y="3904488"/>
-            <a:ext cx="3429000" cy="1965960"/>
-          </a:xfrm>
-          <a:prstGeom prst="roundRect">
-            <a:avLst>
-              <a:gd name="adj" fmla="val 2791"/>
-            </a:avLst>
-          </a:prstGeom>
-          <a:solidFill>
-            <a:srgbClr val="F4F5FA"/>
-          </a:solidFill>
-          <a:ln/>
-          <a:effectLst>
-            <a:outerShdw sx="100000" sy="100000" kx="0" ky="0" algn="bl" rotWithShape="0" blurRad="127000" dist="25400" dir="5400000">
-              <a:srgbClr val="1E2B4A">
-                <a:alpha val="10000"/>
-              </a:srgbClr>
-            </a:outerShdw>
-          </a:effectLst>
-        </p:spPr>
-      </p:sp>
-      <p:sp>
-        <p:nvSpPr>
-          <p:cNvPr id="22" name="Shape 17"/>
+          <p:cNvPr id="18" name="Shape 13"/>
           <p:cNvSpPr/>
           <p:nvPr/>
         </p:nvSpPr>
@@ -15196,7 +14233,7 @@
       </p:sp>
       <p:pic>
         <p:nvPicPr>
-          <p:cNvPr id="23" name="Image 3" descr="preencoded.png">    </p:cNvPr>
+          <p:cNvPr id="19" name="Image 3" descr="preencoded.png">    </p:cNvPr>
           <p:cNvPicPr>
             <a:picLocks noChangeAspect="1"/>
           </p:cNvPicPr>
@@ -15220,7 +14257,7 @@
       </p:pic>
       <p:sp>
         <p:nvSpPr>
-          <p:cNvPr id="24" name="Text 18"/>
+          <p:cNvPr id="20" name="Text 14"/>
           <p:cNvSpPr/>
           <p:nvPr/>
         </p:nvSpPr>
@@ -15259,7 +14296,7 @@
       </p:sp>
       <p:sp>
         <p:nvSpPr>
-          <p:cNvPr id="25" name="Text 19"/>
+          <p:cNvPr id="21" name="Text 15"/>
           <p:cNvSpPr/>
           <p:nvPr/>
         </p:nvSpPr>
@@ -15298,7 +14335,7 @@
       </p:sp>
       <p:sp>
         <p:nvSpPr>
-          <p:cNvPr id="26" name="Text 20"/>
+          <p:cNvPr id="22" name="Text 16"/>
           <p:cNvSpPr/>
           <p:nvPr/>
         </p:nvSpPr>
@@ -15337,36 +14374,7 @@
       </p:sp>
       <p:sp>
         <p:nvSpPr>
-          <p:cNvPr id="27" name="Shape 21"/>
-          <p:cNvSpPr/>
-          <p:nvPr/>
-        </p:nvSpPr>
-        <p:spPr>
-          <a:xfrm>
-            <a:off x="4480560" y="3904488"/>
-            <a:ext cx="3429000" cy="1965960"/>
-          </a:xfrm>
-          <a:prstGeom prst="roundRect">
-            <a:avLst>
-              <a:gd name="adj" fmla="val 2791"/>
-            </a:avLst>
-          </a:prstGeom>
-          <a:solidFill>
-            <a:srgbClr val="F4F5FA"/>
-          </a:solidFill>
-          <a:ln/>
-          <a:effectLst>
-            <a:outerShdw sx="100000" sy="100000" kx="0" ky="0" algn="bl" rotWithShape="0" blurRad="127000" dist="25400" dir="5400000">
-              <a:srgbClr val="1E2B4A">
-                <a:alpha val="10000"/>
-              </a:srgbClr>
-            </a:outerShdw>
-          </a:effectLst>
-        </p:spPr>
-      </p:sp>
-      <p:sp>
-        <p:nvSpPr>
-          <p:cNvPr id="28" name="Shape 22"/>
+          <p:cNvPr id="23" name="Shape 17"/>
           <p:cNvSpPr/>
           <p:nvPr/>
         </p:nvSpPr>
@@ -15398,7 +14406,7 @@
       </p:sp>
       <p:pic>
         <p:nvPicPr>
-          <p:cNvPr id="29" name="Image 4" descr="preencoded.png">    </p:cNvPr>
+          <p:cNvPr id="24" name="Image 4" descr="preencoded.png">    </p:cNvPr>
           <p:cNvPicPr>
             <a:picLocks noChangeAspect="1"/>
           </p:cNvPicPr>
@@ -15422,7 +14430,7 @@
       </p:pic>
       <p:sp>
         <p:nvSpPr>
-          <p:cNvPr id="30" name="Text 23"/>
+          <p:cNvPr id="25" name="Text 18"/>
           <p:cNvSpPr/>
           <p:nvPr/>
         </p:nvSpPr>
@@ -15461,7 +14469,7 @@
       </p:sp>
       <p:sp>
         <p:nvSpPr>
-          <p:cNvPr id="31" name="Text 24"/>
+          <p:cNvPr id="26" name="Text 19"/>
           <p:cNvSpPr/>
           <p:nvPr/>
         </p:nvSpPr>
@@ -15500,7 +14508,7 @@
       </p:sp>
       <p:sp>
         <p:nvSpPr>
-          <p:cNvPr id="32" name="Text 25"/>
+          <p:cNvPr id="27" name="Text 20"/>
           <p:cNvSpPr/>
           <p:nvPr/>
         </p:nvSpPr>
@@ -15539,36 +14547,7 @@
       </p:sp>
       <p:sp>
         <p:nvSpPr>
-          <p:cNvPr id="33" name="Shape 26"/>
-          <p:cNvSpPr/>
-          <p:nvPr/>
-        </p:nvSpPr>
-        <p:spPr>
-          <a:xfrm>
-            <a:off x="8275320" y="3904488"/>
-            <a:ext cx="3429000" cy="1965960"/>
-          </a:xfrm>
-          <a:prstGeom prst="roundRect">
-            <a:avLst>
-              <a:gd name="adj" fmla="val 2791"/>
-            </a:avLst>
-          </a:prstGeom>
-          <a:solidFill>
-            <a:srgbClr val="F4F5FA"/>
-          </a:solidFill>
-          <a:ln/>
-          <a:effectLst>
-            <a:outerShdw sx="100000" sy="100000" kx="0" ky="0" algn="bl" rotWithShape="0" blurRad="127000" dist="25400" dir="5400000">
-              <a:srgbClr val="1E2B4A">
-                <a:alpha val="10000"/>
-              </a:srgbClr>
-            </a:outerShdw>
-          </a:effectLst>
-        </p:spPr>
-      </p:sp>
-      <p:sp>
-        <p:nvSpPr>
-          <p:cNvPr id="34" name="Shape 27"/>
+          <p:cNvPr id="28" name="Shape 21"/>
           <p:cNvSpPr/>
           <p:nvPr/>
         </p:nvSpPr>
@@ -15600,7 +14579,7 @@
       </p:sp>
       <p:pic>
         <p:nvPicPr>
-          <p:cNvPr id="35" name="Image 5" descr="preencoded.png">    </p:cNvPr>
+          <p:cNvPr id="29" name="Image 5" descr="preencoded.png">    </p:cNvPr>
           <p:cNvPicPr>
             <a:picLocks noChangeAspect="1"/>
           </p:cNvPicPr>
@@ -15624,7 +14603,7 @@
       </p:pic>
       <p:sp>
         <p:nvSpPr>
-          <p:cNvPr id="36" name="Text 28"/>
+          <p:cNvPr id="30" name="Text 22"/>
           <p:cNvSpPr/>
           <p:nvPr/>
         </p:nvSpPr>
@@ -15663,7 +14642,7 @@
       </p:sp>
       <p:sp>
         <p:nvSpPr>
-          <p:cNvPr id="37" name="Text 29"/>
+          <p:cNvPr id="31" name="Text 23"/>
           <p:cNvSpPr/>
           <p:nvPr/>
         </p:nvSpPr>
@@ -15702,7 +14681,7 @@
       </p:sp>
       <p:sp>
         <p:nvSpPr>
-          <p:cNvPr id="38" name="Text 30"/>
+          <p:cNvPr id="32" name="Text 24"/>
           <p:cNvSpPr/>
           <p:nvPr/>
         </p:nvSpPr>
@@ -15741,7 +14720,7 @@
       </p:sp>
       <p:sp>
         <p:nvSpPr>
-          <p:cNvPr id="39" name="Text 31"/>
+          <p:cNvPr id="33" name="Text 25"/>
           <p:cNvSpPr/>
           <p:nvPr/>
         </p:nvSpPr>
@@ -15780,7 +14759,7 @@
       </p:sp>
       <p:pic>
         <p:nvPicPr>
-          <p:cNvPr id="40" name="Image 6" descr="logos/logo_ensae_new.png">    </p:cNvPr>
+          <p:cNvPr id="34" name="Image 6" descr="logos/logo_ensae_new.png">    </p:cNvPr>
           <p:cNvPicPr>
             <a:picLocks noChangeAspect="1"/>
           </p:cNvPicPr>
@@ -15923,35 +14902,6 @@
         </p:nvSpPr>
         <p:spPr>
           <a:xfrm>
-            <a:off x="658368" y="1783080"/>
-            <a:ext cx="10890504" cy="1234440"/>
-          </a:xfrm>
-          <a:prstGeom prst="roundRect">
-            <a:avLst>
-              <a:gd name="adj" fmla="val 4444"/>
-            </a:avLst>
-          </a:prstGeom>
-          <a:solidFill>
-            <a:srgbClr val="F4F5FA"/>
-          </a:solidFill>
-          <a:ln/>
-          <a:effectLst>
-            <a:outerShdw sx="100000" sy="100000" kx="0" ky="0" algn="bl" rotWithShape="0" blurRad="127000" dist="25400" dir="5400000">
-              <a:srgbClr val="1E2B4A">
-                <a:alpha val="10000"/>
-              </a:srgbClr>
-            </a:outerShdw>
-          </a:effectLst>
-        </p:spPr>
-      </p:sp>
-      <p:sp>
-        <p:nvSpPr>
-          <p:cNvPr id="5" name="Shape 3"/>
-          <p:cNvSpPr/>
-          <p:nvPr/>
-        </p:nvSpPr>
-        <p:spPr>
-          <a:xfrm>
             <a:off x="960120" y="2002536"/>
             <a:ext cx="804672" cy="804672"/>
           </a:xfrm>
@@ -15978,7 +14928,7 @@
       </p:sp>
       <p:pic>
         <p:nvPicPr>
-          <p:cNvPr id="6" name="Image 0" descr="preencoded.png">    </p:cNvPr>
+          <p:cNvPr id="5" name="Image 0" descr="preencoded.png">    </p:cNvPr>
           <p:cNvPicPr>
             <a:picLocks noChangeAspect="1"/>
           </p:cNvPicPr>
@@ -16002,7 +14952,7 @@
       </p:pic>
       <p:sp>
         <p:nvSpPr>
-          <p:cNvPr id="7" name="Text 4"/>
+          <p:cNvPr id="6" name="Text 3"/>
           <p:cNvSpPr/>
           <p:nvPr/>
         </p:nvSpPr>
@@ -16044,7 +14994,7 @@
       </p:sp>
       <p:sp>
         <p:nvSpPr>
-          <p:cNvPr id="8" name="Text 5"/>
+          <p:cNvPr id="7" name="Text 4"/>
           <p:cNvSpPr/>
           <p:nvPr/>
         </p:nvSpPr>
@@ -16086,36 +15036,7 @@
       </p:sp>
       <p:sp>
         <p:nvSpPr>
-          <p:cNvPr id="9" name="Shape 6"/>
-          <p:cNvSpPr/>
-          <p:nvPr/>
-        </p:nvSpPr>
-        <p:spPr>
-          <a:xfrm>
-            <a:off x="658368" y="3200400"/>
-            <a:ext cx="10890504" cy="1234440"/>
-          </a:xfrm>
-          <a:prstGeom prst="roundRect">
-            <a:avLst>
-              <a:gd name="adj" fmla="val 4444"/>
-            </a:avLst>
-          </a:prstGeom>
-          <a:solidFill>
-            <a:srgbClr val="F4F5FA"/>
-          </a:solidFill>
-          <a:ln/>
-          <a:effectLst>
-            <a:outerShdw sx="100000" sy="100000" kx="0" ky="0" algn="bl" rotWithShape="0" blurRad="127000" dist="25400" dir="5400000">
-              <a:srgbClr val="1E2B4A">
-                <a:alpha val="10000"/>
-              </a:srgbClr>
-            </a:outerShdw>
-          </a:effectLst>
-        </p:spPr>
-      </p:sp>
-      <p:sp>
-        <p:nvSpPr>
-          <p:cNvPr id="10" name="Shape 7"/>
+          <p:cNvPr id="8" name="Shape 5"/>
           <p:cNvSpPr/>
           <p:nvPr/>
         </p:nvSpPr>
@@ -16147,7 +15068,7 @@
       </p:sp>
       <p:pic>
         <p:nvPicPr>
-          <p:cNvPr id="11" name="Image 1" descr="preencoded.png">    </p:cNvPr>
+          <p:cNvPr id="9" name="Image 1" descr="preencoded.png">    </p:cNvPr>
           <p:cNvPicPr>
             <a:picLocks noChangeAspect="1"/>
           </p:cNvPicPr>
@@ -16171,7 +15092,7 @@
       </p:pic>
       <p:sp>
         <p:nvSpPr>
-          <p:cNvPr id="12" name="Text 8"/>
+          <p:cNvPr id="10" name="Text 6"/>
           <p:cNvSpPr/>
           <p:nvPr/>
         </p:nvSpPr>
@@ -16213,7 +15134,7 @@
       </p:sp>
       <p:sp>
         <p:nvSpPr>
-          <p:cNvPr id="13" name="Text 9"/>
+          <p:cNvPr id="11" name="Text 7"/>
           <p:cNvSpPr/>
           <p:nvPr/>
         </p:nvSpPr>
@@ -16255,36 +15176,7 @@
       </p:sp>
       <p:sp>
         <p:nvSpPr>
-          <p:cNvPr id="14" name="Shape 10"/>
-          <p:cNvSpPr/>
-          <p:nvPr/>
-        </p:nvSpPr>
-        <p:spPr>
-          <a:xfrm>
-            <a:off x="658368" y="4617720"/>
-            <a:ext cx="10890504" cy="1234440"/>
-          </a:xfrm>
-          <a:prstGeom prst="roundRect">
-            <a:avLst>
-              <a:gd name="adj" fmla="val 4444"/>
-            </a:avLst>
-          </a:prstGeom>
-          <a:solidFill>
-            <a:srgbClr val="F4F5FA"/>
-          </a:solidFill>
-          <a:ln/>
-          <a:effectLst>
-            <a:outerShdw sx="100000" sy="100000" kx="0" ky="0" algn="bl" rotWithShape="0" blurRad="127000" dist="25400" dir="5400000">
-              <a:srgbClr val="1E2B4A">
-                <a:alpha val="10000"/>
-              </a:srgbClr>
-            </a:outerShdw>
-          </a:effectLst>
-        </p:spPr>
-      </p:sp>
-      <p:sp>
-        <p:nvSpPr>
-          <p:cNvPr id="15" name="Shape 11"/>
+          <p:cNvPr id="12" name="Shape 8"/>
           <p:cNvSpPr/>
           <p:nvPr/>
         </p:nvSpPr>
@@ -16316,7 +15208,7 @@
       </p:sp>
       <p:pic>
         <p:nvPicPr>
-          <p:cNvPr id="16" name="Image 2" descr="preencoded.png">    </p:cNvPr>
+          <p:cNvPr id="13" name="Image 2" descr="preencoded.png">    </p:cNvPr>
           <p:cNvPicPr>
             <a:picLocks noChangeAspect="1"/>
           </p:cNvPicPr>
@@ -16340,7 +15232,7 @@
       </p:pic>
       <p:sp>
         <p:nvSpPr>
-          <p:cNvPr id="17" name="Text 12"/>
+          <p:cNvPr id="14" name="Text 9"/>
           <p:cNvSpPr/>
           <p:nvPr/>
         </p:nvSpPr>
@@ -16382,7 +15274,7 @@
       </p:sp>
       <p:sp>
         <p:nvSpPr>
-          <p:cNvPr id="18" name="Text 13"/>
+          <p:cNvPr id="15" name="Text 10"/>
           <p:cNvSpPr/>
           <p:nvPr/>
         </p:nvSpPr>
@@ -16424,7 +15316,7 @@
       </p:sp>
       <p:sp>
         <p:nvSpPr>
-          <p:cNvPr id="19" name="Text 14"/>
+          <p:cNvPr id="16" name="Text 11"/>
           <p:cNvSpPr/>
           <p:nvPr/>
         </p:nvSpPr>
@@ -16463,7 +15355,7 @@
       </p:sp>
       <p:pic>
         <p:nvPicPr>
-          <p:cNvPr id="20" name="Image 3" descr="logos/logo_ensae_new.png">    </p:cNvPr>
+          <p:cNvPr id="17" name="Image 3" descr="logos/logo_ensae_new.png">    </p:cNvPr>
           <p:cNvPicPr>
             <a:picLocks noChangeAspect="1"/>
           </p:cNvPicPr>
@@ -16753,35 +15645,6 @@
         </p:nvSpPr>
         <p:spPr>
           <a:xfrm>
-            <a:off x="640080" y="1298448"/>
-            <a:ext cx="5349240" cy="4480560"/>
-          </a:xfrm>
-          <a:prstGeom prst="roundRect">
-            <a:avLst>
-              <a:gd name="adj" fmla="val 1224"/>
-            </a:avLst>
-          </a:prstGeom>
-          <a:solidFill>
-            <a:srgbClr val="F4F5FA"/>
-          </a:solidFill>
-          <a:ln/>
-          <a:effectLst>
-            <a:outerShdw sx="100000" sy="100000" kx="0" ky="0" algn="bl" rotWithShape="0" blurRad="127000" dist="25400" dir="5400000">
-              <a:srgbClr val="1E2B4A">
-                <a:alpha val="10000"/>
-              </a:srgbClr>
-            </a:outerShdw>
-          </a:effectLst>
-        </p:spPr>
-      </p:sp>
-      <p:sp>
-        <p:nvSpPr>
-          <p:cNvPr id="4" name="Shape 2"/>
-          <p:cNvSpPr/>
-          <p:nvPr/>
-        </p:nvSpPr>
-        <p:spPr>
-          <a:xfrm>
             <a:off x="960120" y="1600200"/>
             <a:ext cx="868680" cy="868680"/>
           </a:xfrm>
@@ -16808,7 +15671,7 @@
       </p:sp>
       <p:pic>
         <p:nvPicPr>
-          <p:cNvPr id="5" name="Image 0" descr="preencoded.png">    </p:cNvPr>
+          <p:cNvPr id="4" name="Image 0" descr="preencoded.png">    </p:cNvPr>
           <p:cNvPicPr>
             <a:picLocks noChangeAspect="1"/>
           </p:cNvPicPr>
@@ -16832,7 +15695,7 @@
       </p:pic>
       <p:sp>
         <p:nvSpPr>
-          <p:cNvPr id="6" name="Text 3"/>
+          <p:cNvPr id="5" name="Text 2"/>
           <p:cNvSpPr/>
           <p:nvPr/>
         </p:nvSpPr>
@@ -16874,7 +15737,7 @@
       </p:sp>
       <p:sp>
         <p:nvSpPr>
-          <p:cNvPr id="7" name="Text 4"/>
+          <p:cNvPr id="6" name="Text 3"/>
           <p:cNvSpPr/>
           <p:nvPr/>
         </p:nvSpPr>
@@ -16913,7 +15776,7 @@
       </p:sp>
       <p:sp>
         <p:nvSpPr>
-          <p:cNvPr id="8" name="Text 5"/>
+          <p:cNvPr id="7" name="Text 4"/>
           <p:cNvSpPr/>
           <p:nvPr/>
         </p:nvSpPr>
@@ -16975,7 +15838,7 @@
       </p:sp>
       <p:sp>
         <p:nvSpPr>
-          <p:cNvPr id="9" name="Text 6"/>
+          <p:cNvPr id="8" name="Text 5"/>
           <p:cNvSpPr/>
           <p:nvPr/>
         </p:nvSpPr>
@@ -17014,7 +15877,7 @@
       </p:sp>
       <p:sp>
         <p:nvSpPr>
-          <p:cNvPr id="10" name="Text 7"/>
+          <p:cNvPr id="9" name="Text 6"/>
           <p:cNvSpPr/>
           <p:nvPr/>
         </p:nvSpPr>
@@ -17076,7 +15939,7 @@
       </p:sp>
       <p:sp>
         <p:nvSpPr>
-          <p:cNvPr id="11" name="Text 8"/>
+          <p:cNvPr id="10" name="Text 7"/>
           <p:cNvSpPr/>
           <p:nvPr/>
         </p:nvSpPr>
@@ -17118,7 +15981,7 @@
       </p:sp>
       <p:sp>
         <p:nvSpPr>
-          <p:cNvPr id="12" name="Text 9"/>
+          <p:cNvPr id="11" name="Text 8"/>
           <p:cNvSpPr/>
           <p:nvPr/>
         </p:nvSpPr>
@@ -17157,36 +16020,7 @@
       </p:sp>
       <p:sp>
         <p:nvSpPr>
-          <p:cNvPr id="13" name="Shape 10"/>
-          <p:cNvSpPr/>
-          <p:nvPr/>
-        </p:nvSpPr>
-        <p:spPr>
-          <a:xfrm>
-            <a:off x="6263640" y="1298448"/>
-            <a:ext cx="5285232" cy="4480560"/>
-          </a:xfrm>
-          <a:prstGeom prst="roundRect">
-            <a:avLst>
-              <a:gd name="adj" fmla="val 1224"/>
-            </a:avLst>
-          </a:prstGeom>
-          <a:solidFill>
-            <a:srgbClr val="F4F5FA"/>
-          </a:solidFill>
-          <a:ln/>
-          <a:effectLst>
-            <a:outerShdw sx="100000" sy="100000" kx="0" ky="0" algn="bl" rotWithShape="0" blurRad="127000" dist="25400" dir="5400000">
-              <a:srgbClr val="1E2B4A">
-                <a:alpha val="10000"/>
-              </a:srgbClr>
-            </a:outerShdw>
-          </a:effectLst>
-        </p:spPr>
-      </p:sp>
-      <p:sp>
-        <p:nvSpPr>
-          <p:cNvPr id="14" name="Shape 11"/>
+          <p:cNvPr id="12" name="Shape 9"/>
           <p:cNvSpPr/>
           <p:nvPr/>
         </p:nvSpPr>
@@ -17218,7 +16052,7 @@
       </p:sp>
       <p:pic>
         <p:nvPicPr>
-          <p:cNvPr id="15" name="Image 1" descr="preencoded.png">    </p:cNvPr>
+          <p:cNvPr id="13" name="Image 1" descr="preencoded.png">    </p:cNvPr>
           <p:cNvPicPr>
             <a:picLocks noChangeAspect="1"/>
           </p:cNvPicPr>
@@ -17242,7 +16076,7 @@
       </p:pic>
       <p:sp>
         <p:nvSpPr>
-          <p:cNvPr id="16" name="Text 12"/>
+          <p:cNvPr id="14" name="Text 10"/>
           <p:cNvSpPr/>
           <p:nvPr/>
         </p:nvSpPr>
@@ -17284,7 +16118,7 @@
       </p:sp>
       <p:sp>
         <p:nvSpPr>
-          <p:cNvPr id="17" name="Text 13"/>
+          <p:cNvPr id="15" name="Text 11"/>
           <p:cNvSpPr/>
           <p:nvPr/>
         </p:nvSpPr>
@@ -17323,7 +16157,7 @@
       </p:sp>
       <p:sp>
         <p:nvSpPr>
-          <p:cNvPr id="18" name="Text 14"/>
+          <p:cNvPr id="16" name="Text 12"/>
           <p:cNvSpPr/>
           <p:nvPr/>
         </p:nvSpPr>
@@ -17385,7 +16219,7 @@
       </p:sp>
       <p:sp>
         <p:nvSpPr>
-          <p:cNvPr id="19" name="Text 15"/>
+          <p:cNvPr id="17" name="Text 13"/>
           <p:cNvSpPr/>
           <p:nvPr/>
         </p:nvSpPr>
@@ -17424,7 +16258,7 @@
       </p:sp>
       <p:sp>
         <p:nvSpPr>
-          <p:cNvPr id="20" name="Text 16"/>
+          <p:cNvPr id="18" name="Text 14"/>
           <p:cNvSpPr/>
           <p:nvPr/>
         </p:nvSpPr>
@@ -17486,7 +16320,7 @@
       </p:sp>
       <p:sp>
         <p:nvSpPr>
-          <p:cNvPr id="21" name="Text 17"/>
+          <p:cNvPr id="19" name="Text 15"/>
           <p:cNvSpPr/>
           <p:nvPr/>
         </p:nvSpPr>
@@ -17528,7 +16362,7 @@
       </p:sp>
       <p:sp>
         <p:nvSpPr>
-          <p:cNvPr id="22" name="Text 18"/>
+          <p:cNvPr id="20" name="Text 16"/>
           <p:cNvSpPr/>
           <p:nvPr/>
         </p:nvSpPr>
@@ -17567,7 +16401,7 @@
       </p:sp>
       <p:sp>
         <p:nvSpPr>
-          <p:cNvPr id="23" name="Text 19"/>
+          <p:cNvPr id="21" name="Text 17"/>
           <p:cNvSpPr/>
           <p:nvPr/>
         </p:nvSpPr>
@@ -17606,7 +16440,7 @@
       </p:sp>
       <p:pic>
         <p:nvPicPr>
-          <p:cNvPr id="24" name="Image 2" descr="logos/logo_ensae_new.png">    </p:cNvPr>
+          <p:cNvPr id="22" name="Image 2" descr="logos/logo_ensae_new.png">    </p:cNvPr>
           <p:cNvPicPr>
             <a:picLocks noChangeAspect="1"/>
           </p:cNvPicPr>
@@ -17719,13 +16553,6 @@
             <a:srgbClr val="1E2B4A"/>
           </a:solidFill>
           <a:ln/>
-          <a:effectLst>
-            <a:outerShdw sx="100000" sy="100000" kx="0" ky="0" algn="bl" rotWithShape="0" blurRad="127000" dist="25400" dir="5400000">
-              <a:srgbClr val="1E2B4A">
-                <a:alpha val="10000"/>
-              </a:srgbClr>
-            </a:outerShdw>
-          </a:effectLst>
         </p:spPr>
       </p:sp>
       <p:sp>
@@ -17792,36 +16619,7 @@
       </p:sp>
       <p:sp>
         <p:nvSpPr>
-          <p:cNvPr id="5" name="Shape 3"/>
-          <p:cNvSpPr/>
-          <p:nvPr/>
-        </p:nvSpPr>
-        <p:spPr>
-          <a:xfrm>
-            <a:off x="640080" y="3154680"/>
-            <a:ext cx="3456432" cy="2697480"/>
-          </a:xfrm>
-          <a:prstGeom prst="roundRect">
-            <a:avLst>
-              <a:gd name="adj" fmla="val 2034"/>
-            </a:avLst>
-          </a:prstGeom>
-          <a:solidFill>
-            <a:srgbClr val="F4F5FA"/>
-          </a:solidFill>
-          <a:ln/>
-          <a:effectLst>
-            <a:outerShdw sx="100000" sy="100000" kx="0" ky="0" algn="bl" rotWithShape="0" blurRad="127000" dist="25400" dir="5400000">
-              <a:srgbClr val="1E2B4A">
-                <a:alpha val="10000"/>
-              </a:srgbClr>
-            </a:outerShdw>
-          </a:effectLst>
-        </p:spPr>
-      </p:sp>
-      <p:sp>
-        <p:nvSpPr>
-          <p:cNvPr id="6" name="Text 4"/>
+          <p:cNvPr id="5" name="Text 3"/>
           <p:cNvSpPr/>
           <p:nvPr/>
         </p:nvSpPr>
@@ -17863,7 +16661,7 @@
       </p:sp>
       <p:sp>
         <p:nvSpPr>
-          <p:cNvPr id="7" name="Text 5"/>
+          <p:cNvPr id="6" name="Text 4"/>
           <p:cNvSpPr/>
           <p:nvPr/>
         </p:nvSpPr>
@@ -17905,36 +16703,7 @@
       </p:sp>
       <p:sp>
         <p:nvSpPr>
-          <p:cNvPr id="8" name="Shape 6"/>
-          <p:cNvSpPr/>
-          <p:nvPr/>
-        </p:nvSpPr>
-        <p:spPr>
-          <a:xfrm>
-            <a:off x="4434840" y="3154680"/>
-            <a:ext cx="3456432" cy="2697480"/>
-          </a:xfrm>
-          <a:prstGeom prst="roundRect">
-            <a:avLst>
-              <a:gd name="adj" fmla="val 2034"/>
-            </a:avLst>
-          </a:prstGeom>
-          <a:solidFill>
-            <a:srgbClr val="F4F5FA"/>
-          </a:solidFill>
-          <a:ln/>
-          <a:effectLst>
-            <a:outerShdw sx="100000" sy="100000" kx="0" ky="0" algn="bl" rotWithShape="0" blurRad="127000" dist="25400" dir="5400000">
-              <a:srgbClr val="1E2B4A">
-                <a:alpha val="10000"/>
-              </a:srgbClr>
-            </a:outerShdw>
-          </a:effectLst>
-        </p:spPr>
-      </p:sp>
-      <p:sp>
-        <p:nvSpPr>
-          <p:cNvPr id="9" name="Text 7"/>
+          <p:cNvPr id="7" name="Text 5"/>
           <p:cNvSpPr/>
           <p:nvPr/>
         </p:nvSpPr>
@@ -17976,7 +16745,7 @@
       </p:sp>
       <p:sp>
         <p:nvSpPr>
-          <p:cNvPr id="10" name="Text 8"/>
+          <p:cNvPr id="8" name="Text 6"/>
           <p:cNvSpPr/>
           <p:nvPr/>
         </p:nvSpPr>
@@ -18018,36 +16787,7 @@
       </p:sp>
       <p:sp>
         <p:nvSpPr>
-          <p:cNvPr id="11" name="Shape 9"/>
-          <p:cNvSpPr/>
-          <p:nvPr/>
-        </p:nvSpPr>
-        <p:spPr>
-          <a:xfrm>
-            <a:off x="8229600" y="3154680"/>
-            <a:ext cx="3456432" cy="2697480"/>
-          </a:xfrm>
-          <a:prstGeom prst="roundRect">
-            <a:avLst>
-              <a:gd name="adj" fmla="val 2034"/>
-            </a:avLst>
-          </a:prstGeom>
-          <a:solidFill>
-            <a:srgbClr val="F4F5FA"/>
-          </a:solidFill>
-          <a:ln/>
-          <a:effectLst>
-            <a:outerShdw sx="100000" sy="100000" kx="0" ky="0" algn="bl" rotWithShape="0" blurRad="127000" dist="25400" dir="5400000">
-              <a:srgbClr val="1E2B4A">
-                <a:alpha val="10000"/>
-              </a:srgbClr>
-            </a:outerShdw>
-          </a:effectLst>
-        </p:spPr>
-      </p:sp>
-      <p:sp>
-        <p:nvSpPr>
-          <p:cNvPr id="12" name="Text 10"/>
+          <p:cNvPr id="9" name="Text 7"/>
           <p:cNvSpPr/>
           <p:nvPr/>
         </p:nvSpPr>
@@ -18089,7 +16829,7 @@
       </p:sp>
       <p:sp>
         <p:nvSpPr>
-          <p:cNvPr id="13" name="Text 11"/>
+          <p:cNvPr id="10" name="Text 8"/>
           <p:cNvSpPr/>
           <p:nvPr/>
         </p:nvSpPr>
@@ -18131,7 +16871,7 @@
       </p:sp>
       <p:sp>
         <p:nvSpPr>
-          <p:cNvPr id="14" name="Shape 12"/>
+          <p:cNvPr id="11" name="Shape 9"/>
           <p:cNvSpPr/>
           <p:nvPr/>
         </p:nvSpPr>
@@ -18163,7 +16903,7 @@
       </p:sp>
       <p:pic>
         <p:nvPicPr>
-          <p:cNvPr id="15" name="Image 0" descr="preencoded.png">    </p:cNvPr>
+          <p:cNvPr id="12" name="Image 0" descr="preencoded.png">    </p:cNvPr>
           <p:cNvPicPr>
             <a:picLocks noChangeAspect="1"/>
           </p:cNvPicPr>
@@ -18187,7 +16927,7 @@
       </p:pic>
       <p:sp>
         <p:nvSpPr>
-          <p:cNvPr id="16" name="Shape 13"/>
+          <p:cNvPr id="13" name="Shape 10"/>
           <p:cNvSpPr/>
           <p:nvPr/>
         </p:nvSpPr>
@@ -18219,7 +16959,7 @@
       </p:sp>
       <p:pic>
         <p:nvPicPr>
-          <p:cNvPr id="17" name="Image 1" descr="preencoded.png">    </p:cNvPr>
+          <p:cNvPr id="14" name="Image 1" descr="preencoded.png">    </p:cNvPr>
           <p:cNvPicPr>
             <a:picLocks noChangeAspect="1"/>
           </p:cNvPicPr>
@@ -18243,7 +16983,7 @@
       </p:pic>
       <p:sp>
         <p:nvSpPr>
-          <p:cNvPr id="18" name="Shape 14"/>
+          <p:cNvPr id="15" name="Shape 11"/>
           <p:cNvSpPr/>
           <p:nvPr/>
         </p:nvSpPr>
@@ -18275,7 +17015,7 @@
       </p:sp>
       <p:pic>
         <p:nvPicPr>
-          <p:cNvPr id="19" name="Image 2" descr="preencoded.png">    </p:cNvPr>
+          <p:cNvPr id="16" name="Image 2" descr="preencoded.png">    </p:cNvPr>
           <p:cNvPicPr>
             <a:picLocks noChangeAspect="1"/>
           </p:cNvPicPr>
@@ -18299,7 +17039,7 @@
       </p:pic>
       <p:sp>
         <p:nvSpPr>
-          <p:cNvPr id="20" name="Text 15"/>
+          <p:cNvPr id="17" name="Text 12"/>
           <p:cNvSpPr/>
           <p:nvPr/>
         </p:nvSpPr>
@@ -18338,7 +17078,7 @@
       </p:sp>
       <p:pic>
         <p:nvPicPr>
-          <p:cNvPr id="21" name="Image 3" descr="logos/logo_ensae_new.png">    </p:cNvPr>
+          <p:cNvPr id="18" name="Image 3" descr="logos/logo_ensae_new.png">    </p:cNvPr>
           <p:cNvPicPr>
             <a:picLocks noChangeAspect="1"/>
           </p:cNvPicPr>
@@ -18439,35 +17179,6 @@
         </p:nvSpPr>
         <p:spPr>
           <a:xfrm>
-            <a:off x="640080" y="1298448"/>
-            <a:ext cx="5349240" cy="4480560"/>
-          </a:xfrm>
-          <a:prstGeom prst="roundRect">
-            <a:avLst>
-              <a:gd name="adj" fmla="val 1224"/>
-            </a:avLst>
-          </a:prstGeom>
-          <a:solidFill>
-            <a:srgbClr val="F4F5FA"/>
-          </a:solidFill>
-          <a:ln/>
-          <a:effectLst>
-            <a:outerShdw sx="100000" sy="100000" kx="0" ky="0" algn="bl" rotWithShape="0" blurRad="127000" dist="25400" dir="5400000">
-              <a:srgbClr val="1E2B4A">
-                <a:alpha val="10000"/>
-              </a:srgbClr>
-            </a:outerShdw>
-          </a:effectLst>
-        </p:spPr>
-      </p:sp>
-      <p:sp>
-        <p:nvSpPr>
-          <p:cNvPr id="4" name="Shape 2"/>
-          <p:cNvSpPr/>
-          <p:nvPr/>
-        </p:nvSpPr>
-        <p:spPr>
-          <a:xfrm>
             <a:off x="960120" y="1600200"/>
             <a:ext cx="822960" cy="822960"/>
           </a:xfrm>
@@ -18494,7 +17205,7 @@
       </p:sp>
       <p:pic>
         <p:nvPicPr>
-          <p:cNvPr id="5" name="Image 0" descr="preencoded.png">    </p:cNvPr>
+          <p:cNvPr id="4" name="Image 0" descr="preencoded.png">    </p:cNvPr>
           <p:cNvPicPr>
             <a:picLocks noChangeAspect="1"/>
           </p:cNvPicPr>
@@ -18518,7 +17229,7 @@
       </p:pic>
       <p:sp>
         <p:nvSpPr>
-          <p:cNvPr id="6" name="Text 3"/>
+          <p:cNvPr id="5" name="Text 2"/>
           <p:cNvSpPr/>
           <p:nvPr/>
         </p:nvSpPr>
@@ -18557,7 +17268,7 @@
       </p:sp>
       <p:sp>
         <p:nvSpPr>
-          <p:cNvPr id="7" name="Text 4"/>
+          <p:cNvPr id="6" name="Text 3"/>
           <p:cNvSpPr/>
           <p:nvPr/>
         </p:nvSpPr>
@@ -18599,7 +17310,7 @@
       </p:sp>
       <p:sp>
         <p:nvSpPr>
-          <p:cNvPr id="8" name="Shape 5"/>
+          <p:cNvPr id="7" name="Shape 4"/>
           <p:cNvSpPr/>
           <p:nvPr/>
         </p:nvSpPr>
@@ -18619,7 +17330,7 @@
       </p:sp>
       <p:sp>
         <p:nvSpPr>
-          <p:cNvPr id="9" name="Text 6"/>
+          <p:cNvPr id="8" name="Text 5"/>
           <p:cNvSpPr/>
           <p:nvPr/>
         </p:nvSpPr>
@@ -18658,7 +17369,7 @@
       </p:sp>
       <p:sp>
         <p:nvSpPr>
-          <p:cNvPr id="10" name="Text 7"/>
+          <p:cNvPr id="9" name="Text 6"/>
           <p:cNvSpPr/>
           <p:nvPr/>
         </p:nvSpPr>
@@ -18700,7 +17411,7 @@
       </p:sp>
       <p:sp>
         <p:nvSpPr>
-          <p:cNvPr id="11" name="Shape 8"/>
+          <p:cNvPr id="10" name="Shape 7"/>
           <p:cNvSpPr/>
           <p:nvPr/>
         </p:nvSpPr>
@@ -18720,7 +17431,7 @@
       </p:sp>
       <p:sp>
         <p:nvSpPr>
-          <p:cNvPr id="12" name="Text 9"/>
+          <p:cNvPr id="11" name="Text 8"/>
           <p:cNvSpPr/>
           <p:nvPr/>
         </p:nvSpPr>
@@ -18759,7 +17470,7 @@
       </p:sp>
       <p:sp>
         <p:nvSpPr>
-          <p:cNvPr id="13" name="Text 10"/>
+          <p:cNvPr id="12" name="Text 9"/>
           <p:cNvSpPr/>
           <p:nvPr/>
         </p:nvSpPr>
@@ -18801,36 +17512,7 @@
       </p:sp>
       <p:sp>
         <p:nvSpPr>
-          <p:cNvPr id="14" name="Shape 11"/>
-          <p:cNvSpPr/>
-          <p:nvPr/>
-        </p:nvSpPr>
-        <p:spPr>
-          <a:xfrm>
-            <a:off x="6263640" y="1298448"/>
-            <a:ext cx="5285232" cy="4480560"/>
-          </a:xfrm>
-          <a:prstGeom prst="roundRect">
-            <a:avLst>
-              <a:gd name="adj" fmla="val 1224"/>
-            </a:avLst>
-          </a:prstGeom>
-          <a:solidFill>
-            <a:srgbClr val="F4F5FA"/>
-          </a:solidFill>
-          <a:ln/>
-          <a:effectLst>
-            <a:outerShdw sx="100000" sy="100000" kx="0" ky="0" algn="bl" rotWithShape="0" blurRad="127000" dist="25400" dir="5400000">
-              <a:srgbClr val="1E2B4A">
-                <a:alpha val="10000"/>
-              </a:srgbClr>
-            </a:outerShdw>
-          </a:effectLst>
-        </p:spPr>
-      </p:sp>
-      <p:sp>
-        <p:nvSpPr>
-          <p:cNvPr id="15" name="Shape 12"/>
+          <p:cNvPr id="13" name="Shape 10"/>
           <p:cNvSpPr/>
           <p:nvPr/>
         </p:nvSpPr>
@@ -18862,7 +17544,7 @@
       </p:sp>
       <p:pic>
         <p:nvPicPr>
-          <p:cNvPr id="16" name="Image 1" descr="preencoded.png">    </p:cNvPr>
+          <p:cNvPr id="14" name="Image 1" descr="preencoded.png">    </p:cNvPr>
           <p:cNvPicPr>
             <a:picLocks noChangeAspect="1"/>
           </p:cNvPicPr>
@@ -18886,7 +17568,7 @@
       </p:pic>
       <p:sp>
         <p:nvSpPr>
-          <p:cNvPr id="17" name="Text 13"/>
+          <p:cNvPr id="15" name="Text 11"/>
           <p:cNvSpPr/>
           <p:nvPr/>
         </p:nvSpPr>
@@ -18925,7 +17607,7 @@
       </p:sp>
       <p:sp>
         <p:nvSpPr>
-          <p:cNvPr id="18" name="Shape 14"/>
+          <p:cNvPr id="16" name="Shape 12"/>
           <p:cNvSpPr/>
           <p:nvPr/>
         </p:nvSpPr>
@@ -18943,18 +17625,11 @@
             <a:srgbClr val="E5EEF4"/>
           </a:solidFill>
           <a:ln/>
-          <a:effectLst>
-            <a:outerShdw sx="100000" sy="100000" kx="0" ky="0" algn="bl" rotWithShape="0" blurRad="127000" dist="25400" dir="5400000">
-              <a:srgbClr val="1E2B4A">
-                <a:alpha val="10000"/>
-              </a:srgbClr>
-            </a:outerShdw>
-          </a:effectLst>
-        </p:spPr>
-      </p:sp>
-      <p:sp>
-        <p:nvSpPr>
-          <p:cNvPr id="19" name="Text 15"/>
+        </p:spPr>
+      </p:sp>
+      <p:sp>
+        <p:nvSpPr>
+          <p:cNvPr id="17" name="Text 13"/>
           <p:cNvSpPr/>
           <p:nvPr/>
         </p:nvSpPr>
@@ -18993,7 +17668,7 @@
       </p:sp>
       <p:sp>
         <p:nvSpPr>
-          <p:cNvPr id="20" name="Text 16"/>
+          <p:cNvPr id="18" name="Text 14"/>
           <p:cNvSpPr/>
           <p:nvPr/>
         </p:nvSpPr>
@@ -19035,7 +17710,7 @@
       </p:sp>
       <p:sp>
         <p:nvSpPr>
-          <p:cNvPr id="21" name="Shape 17"/>
+          <p:cNvPr id="19" name="Shape 15"/>
           <p:cNvSpPr/>
           <p:nvPr/>
         </p:nvSpPr>
@@ -19053,18 +17728,11 @@
             <a:srgbClr val="E5EEF4"/>
           </a:solidFill>
           <a:ln/>
-          <a:effectLst>
-            <a:outerShdw sx="100000" sy="100000" kx="0" ky="0" algn="bl" rotWithShape="0" blurRad="127000" dist="25400" dir="5400000">
-              <a:srgbClr val="1E2B4A">
-                <a:alpha val="10000"/>
-              </a:srgbClr>
-            </a:outerShdw>
-          </a:effectLst>
-        </p:spPr>
-      </p:sp>
-      <p:sp>
-        <p:nvSpPr>
-          <p:cNvPr id="22" name="Text 18"/>
+        </p:spPr>
+      </p:sp>
+      <p:sp>
+        <p:nvSpPr>
+          <p:cNvPr id="20" name="Text 16"/>
           <p:cNvSpPr/>
           <p:nvPr/>
         </p:nvSpPr>
@@ -19103,7 +17771,7 @@
       </p:sp>
       <p:sp>
         <p:nvSpPr>
-          <p:cNvPr id="23" name="Text 19"/>
+          <p:cNvPr id="21" name="Text 17"/>
           <p:cNvSpPr/>
           <p:nvPr/>
         </p:nvSpPr>
@@ -19145,7 +17813,7 @@
       </p:sp>
       <p:sp>
         <p:nvSpPr>
-          <p:cNvPr id="24" name="Text 20"/>
+          <p:cNvPr id="22" name="Text 18"/>
           <p:cNvSpPr/>
           <p:nvPr/>
         </p:nvSpPr>
@@ -19184,7 +17852,7 @@
       </p:sp>
       <p:pic>
         <p:nvPicPr>
-          <p:cNvPr id="25" name="Image 2" descr="logos/logo_ensae_new.png">    </p:cNvPr>
+          <p:cNvPr id="23" name="Image 2" descr="logos/logo_ensae_new.png">    </p:cNvPr>
           <p:cNvPicPr>
             <a:picLocks noChangeAspect="1"/>
           </p:cNvPicPr>
@@ -19279,36 +17947,7 @@
       </p:sp>
       <p:sp>
         <p:nvSpPr>
-          <p:cNvPr id="3" name="Shape 1"/>
-          <p:cNvSpPr/>
-          <p:nvPr/>
-        </p:nvSpPr>
-        <p:spPr>
-          <a:xfrm>
-            <a:off x="640080" y="1298448"/>
-            <a:ext cx="5349240" cy="4480560"/>
-          </a:xfrm>
-          <a:prstGeom prst="roundRect">
-            <a:avLst>
-              <a:gd name="adj" fmla="val 1224"/>
-            </a:avLst>
-          </a:prstGeom>
-          <a:solidFill>
-            <a:srgbClr val="F4F5FA"/>
-          </a:solidFill>
-          <a:ln/>
-          <a:effectLst>
-            <a:outerShdw sx="100000" sy="100000" kx="0" ky="0" algn="bl" rotWithShape="0" blurRad="127000" dist="25400" dir="5400000">
-              <a:srgbClr val="1E2B4A">
-                <a:alpha val="10000"/>
-              </a:srgbClr>
-            </a:outerShdw>
-          </a:effectLst>
-        </p:spPr>
-      </p:sp>
-      <p:sp>
-        <p:nvSpPr>
-          <p:cNvPr id="4" name="Text 2"/>
+          <p:cNvPr id="3" name="Text 1"/>
           <p:cNvSpPr/>
           <p:nvPr/>
         </p:nvSpPr>
@@ -19347,7 +17986,7 @@
       </p:sp>
       <p:sp>
         <p:nvSpPr>
-          <p:cNvPr id="5" name="Shape 3"/>
+          <p:cNvPr id="4" name="Shape 2"/>
           <p:cNvSpPr/>
           <p:nvPr/>
         </p:nvSpPr>
@@ -19367,7 +18006,7 @@
       </p:sp>
       <p:sp>
         <p:nvSpPr>
-          <p:cNvPr id="6" name="Text 4"/>
+          <p:cNvPr id="5" name="Text 3"/>
           <p:cNvSpPr/>
           <p:nvPr/>
         </p:nvSpPr>
@@ -19406,7 +18045,7 @@
       </p:sp>
       <p:sp>
         <p:nvSpPr>
-          <p:cNvPr id="7" name="Text 5"/>
+          <p:cNvPr id="6" name="Text 4"/>
           <p:cNvSpPr/>
           <p:nvPr/>
         </p:nvSpPr>
@@ -19448,7 +18087,7 @@
       </p:sp>
       <p:sp>
         <p:nvSpPr>
-          <p:cNvPr id="8" name="Text 6"/>
+          <p:cNvPr id="7" name="Text 5"/>
           <p:cNvSpPr/>
           <p:nvPr/>
         </p:nvSpPr>
@@ -19487,7 +18126,7 @@
       </p:sp>
       <p:sp>
         <p:nvSpPr>
-          <p:cNvPr id="9" name="Shape 7"/>
+          <p:cNvPr id="8" name="Shape 6"/>
           <p:cNvSpPr/>
           <p:nvPr/>
         </p:nvSpPr>
@@ -19507,7 +18146,7 @@
       </p:sp>
       <p:sp>
         <p:nvSpPr>
-          <p:cNvPr id="10" name="Text 8"/>
+          <p:cNvPr id="9" name="Text 7"/>
           <p:cNvSpPr/>
           <p:nvPr/>
         </p:nvSpPr>
@@ -19546,7 +18185,7 @@
       </p:sp>
       <p:sp>
         <p:nvSpPr>
-          <p:cNvPr id="11" name="Text 9"/>
+          <p:cNvPr id="10" name="Text 8"/>
           <p:cNvSpPr/>
           <p:nvPr/>
         </p:nvSpPr>
@@ -19588,7 +18227,7 @@
       </p:sp>
       <p:sp>
         <p:nvSpPr>
-          <p:cNvPr id="12" name="Text 10"/>
+          <p:cNvPr id="11" name="Text 9"/>
           <p:cNvSpPr/>
           <p:nvPr/>
         </p:nvSpPr>
@@ -19627,7 +18266,7 @@
       </p:sp>
       <p:sp>
         <p:nvSpPr>
-          <p:cNvPr id="13" name="Shape 11"/>
+          <p:cNvPr id="12" name="Shape 10"/>
           <p:cNvSpPr/>
           <p:nvPr/>
         </p:nvSpPr>
@@ -19647,7 +18286,7 @@
       </p:sp>
       <p:sp>
         <p:nvSpPr>
-          <p:cNvPr id="14" name="Text 12"/>
+          <p:cNvPr id="13" name="Text 11"/>
           <p:cNvSpPr/>
           <p:nvPr/>
         </p:nvSpPr>
@@ -19686,7 +18325,7 @@
       </p:sp>
       <p:sp>
         <p:nvSpPr>
-          <p:cNvPr id="15" name="Text 13"/>
+          <p:cNvPr id="14" name="Text 12"/>
           <p:cNvSpPr/>
           <p:nvPr/>
         </p:nvSpPr>
@@ -19728,7 +18367,7 @@
       </p:sp>
       <p:sp>
         <p:nvSpPr>
-          <p:cNvPr id="16" name="Text 14"/>
+          <p:cNvPr id="15" name="Text 13"/>
           <p:cNvSpPr/>
           <p:nvPr/>
         </p:nvSpPr>
@@ -19767,36 +18406,7 @@
       </p:sp>
       <p:sp>
         <p:nvSpPr>
-          <p:cNvPr id="17" name="Shape 15"/>
-          <p:cNvSpPr/>
-          <p:nvPr/>
-        </p:nvSpPr>
-        <p:spPr>
-          <a:xfrm>
-            <a:off x="6263640" y="1298448"/>
-            <a:ext cx="5285232" cy="4480560"/>
-          </a:xfrm>
-          <a:prstGeom prst="roundRect">
-            <a:avLst>
-              <a:gd name="adj" fmla="val 1224"/>
-            </a:avLst>
-          </a:prstGeom>
-          <a:solidFill>
-            <a:srgbClr val="F4F5FA"/>
-          </a:solidFill>
-          <a:ln/>
-          <a:effectLst>
-            <a:outerShdw sx="100000" sy="100000" kx="0" ky="0" algn="bl" rotWithShape="0" blurRad="127000" dist="25400" dir="5400000">
-              <a:srgbClr val="1E2B4A">
-                <a:alpha val="10000"/>
-              </a:srgbClr>
-            </a:outerShdw>
-          </a:effectLst>
-        </p:spPr>
-      </p:sp>
-      <p:sp>
-        <p:nvSpPr>
-          <p:cNvPr id="18" name="Text 16"/>
+          <p:cNvPr id="16" name="Text 14"/>
           <p:cNvSpPr/>
           <p:nvPr/>
         </p:nvSpPr>
@@ -19835,7 +18445,7 @@
       </p:sp>
       <p:sp>
         <p:nvSpPr>
-          <p:cNvPr id="19" name="Text 17"/>
+          <p:cNvPr id="17" name="Text 15"/>
           <p:cNvSpPr/>
           <p:nvPr/>
         </p:nvSpPr>
@@ -19874,7 +18484,7 @@
       </p:sp>
       <p:sp>
         <p:nvSpPr>
-          <p:cNvPr id="20" name="Text 18"/>
+          <p:cNvPr id="18" name="Text 16"/>
           <p:cNvSpPr/>
           <p:nvPr/>
         </p:nvSpPr>
@@ -19916,7 +18526,7 @@
       </p:sp>
       <p:sp>
         <p:nvSpPr>
-          <p:cNvPr id="21" name="Text 19"/>
+          <p:cNvPr id="19" name="Text 17"/>
           <p:cNvSpPr/>
           <p:nvPr/>
         </p:nvSpPr>
@@ -19955,7 +18565,7 @@
       </p:sp>
       <p:sp>
         <p:nvSpPr>
-          <p:cNvPr id="22" name="Text 20"/>
+          <p:cNvPr id="20" name="Text 18"/>
           <p:cNvSpPr/>
           <p:nvPr/>
         </p:nvSpPr>
@@ -19994,7 +18604,7 @@
       </p:sp>
       <p:sp>
         <p:nvSpPr>
-          <p:cNvPr id="23" name="Text 21"/>
+          <p:cNvPr id="21" name="Text 19"/>
           <p:cNvSpPr/>
           <p:nvPr/>
         </p:nvSpPr>
@@ -20036,7 +18646,7 @@
       </p:sp>
       <p:sp>
         <p:nvSpPr>
-          <p:cNvPr id="24" name="Text 22"/>
+          <p:cNvPr id="22" name="Text 20"/>
           <p:cNvSpPr/>
           <p:nvPr/>
         </p:nvSpPr>
@@ -20075,7 +18685,7 @@
       </p:sp>
       <p:sp>
         <p:nvSpPr>
-          <p:cNvPr id="25" name="Text 23"/>
+          <p:cNvPr id="23" name="Text 21"/>
           <p:cNvSpPr/>
           <p:nvPr/>
         </p:nvSpPr>
@@ -20114,7 +18724,7 @@
       </p:sp>
       <p:sp>
         <p:nvSpPr>
-          <p:cNvPr id="26" name="Text 24"/>
+          <p:cNvPr id="24" name="Text 22"/>
           <p:cNvSpPr/>
           <p:nvPr/>
         </p:nvSpPr>
@@ -20156,7 +18766,7 @@
       </p:sp>
       <p:sp>
         <p:nvSpPr>
-          <p:cNvPr id="27" name="Text 25"/>
+          <p:cNvPr id="25" name="Text 23"/>
           <p:cNvSpPr/>
           <p:nvPr/>
         </p:nvSpPr>
@@ -20195,7 +18805,7 @@
       </p:sp>
       <p:sp>
         <p:nvSpPr>
-          <p:cNvPr id="28" name="Shape 26"/>
+          <p:cNvPr id="26" name="Shape 24"/>
           <p:cNvSpPr/>
           <p:nvPr/>
         </p:nvSpPr>
@@ -20227,7 +18837,7 @@
       </p:sp>
       <p:pic>
         <p:nvPicPr>
-          <p:cNvPr id="29" name="Image 0" descr="preencoded.png">    </p:cNvPr>
+          <p:cNvPr id="27" name="Image 0" descr="preencoded.png">    </p:cNvPr>
           <p:cNvPicPr>
             <a:picLocks noChangeAspect="1"/>
           </p:cNvPicPr>
@@ -20251,7 +18861,7 @@
       </p:pic>
       <p:sp>
         <p:nvSpPr>
-          <p:cNvPr id="30" name="Shape 27"/>
+          <p:cNvPr id="28" name="Shape 25"/>
           <p:cNvSpPr/>
           <p:nvPr/>
         </p:nvSpPr>
@@ -20283,7 +18893,7 @@
       </p:sp>
       <p:pic>
         <p:nvPicPr>
-          <p:cNvPr id="31" name="Image 1" descr="preencoded.png">    </p:cNvPr>
+          <p:cNvPr id="29" name="Image 1" descr="preencoded.png">    </p:cNvPr>
           <p:cNvPicPr>
             <a:picLocks noChangeAspect="1"/>
           </p:cNvPicPr>
@@ -20307,7 +18917,7 @@
       </p:pic>
       <p:sp>
         <p:nvSpPr>
-          <p:cNvPr id="32" name="Shape 28"/>
+          <p:cNvPr id="30" name="Shape 26"/>
           <p:cNvSpPr/>
           <p:nvPr/>
         </p:nvSpPr>
@@ -20339,7 +18949,7 @@
       </p:sp>
       <p:pic>
         <p:nvPicPr>
-          <p:cNvPr id="33" name="Image 2" descr="preencoded.png">    </p:cNvPr>
+          <p:cNvPr id="31" name="Image 2" descr="preencoded.png">    </p:cNvPr>
           <p:cNvPicPr>
             <a:picLocks noChangeAspect="1"/>
           </p:cNvPicPr>
@@ -20363,7 +18973,7 @@
       </p:pic>
       <p:sp>
         <p:nvSpPr>
-          <p:cNvPr id="34" name="Text 29"/>
+          <p:cNvPr id="32" name="Text 27"/>
           <p:cNvSpPr/>
           <p:nvPr/>
         </p:nvSpPr>
@@ -20402,7 +19012,7 @@
       </p:sp>
       <p:pic>
         <p:nvPicPr>
-          <p:cNvPr id="35" name="Image 3" descr="logos/logo_ensae_new.png">    </p:cNvPr>
+          <p:cNvPr id="33" name="Image 3" descr="logos/logo_ensae_new.png">    </p:cNvPr>
           <p:cNvPicPr>
             <a:picLocks noChangeAspect="1"/>
           </p:cNvPicPr>
@@ -20545,35 +19155,6 @@
         </p:nvSpPr>
         <p:spPr>
           <a:xfrm>
-            <a:off x="658368" y="1783080"/>
-            <a:ext cx="1481328" cy="1783080"/>
-          </a:xfrm>
-          <a:prstGeom prst="roundRect">
-            <a:avLst>
-              <a:gd name="adj" fmla="val 3704"/>
-            </a:avLst>
-          </a:prstGeom>
-          <a:solidFill>
-            <a:srgbClr val="F4F5FA"/>
-          </a:solidFill>
-          <a:ln/>
-          <a:effectLst>
-            <a:outerShdw sx="100000" sy="100000" kx="0" ky="0" algn="bl" rotWithShape="0" blurRad="127000" dist="25400" dir="5400000">
-              <a:srgbClr val="1E2B4A">
-                <a:alpha val="10000"/>
-              </a:srgbClr>
-            </a:outerShdw>
-          </a:effectLst>
-        </p:spPr>
-      </p:sp>
-      <p:sp>
-        <p:nvSpPr>
-          <p:cNvPr id="5" name="Shape 3"/>
-          <p:cNvSpPr/>
-          <p:nvPr/>
-        </p:nvSpPr>
-        <p:spPr>
-          <a:xfrm>
             <a:off x="987552" y="2011680"/>
             <a:ext cx="822960" cy="822960"/>
           </a:xfrm>
@@ -20600,7 +19181,7 @@
       </p:sp>
       <p:pic>
         <p:nvPicPr>
-          <p:cNvPr id="6" name="Image 0" descr="preencoded.png">    </p:cNvPr>
+          <p:cNvPr id="5" name="Image 0" descr="preencoded.png">    </p:cNvPr>
           <p:cNvPicPr>
             <a:picLocks noChangeAspect="1"/>
           </p:cNvPicPr>
@@ -20624,7 +19205,7 @@
       </p:pic>
       <p:sp>
         <p:nvSpPr>
-          <p:cNvPr id="7" name="Text 4"/>
+          <p:cNvPr id="6" name="Text 3"/>
           <p:cNvSpPr/>
           <p:nvPr/>
         </p:nvSpPr>
@@ -20666,36 +19247,7 @@
       </p:sp>
       <p:sp>
         <p:nvSpPr>
-          <p:cNvPr id="8" name="Shape 5"/>
-          <p:cNvSpPr/>
-          <p:nvPr/>
-        </p:nvSpPr>
-        <p:spPr>
-          <a:xfrm>
-            <a:off x="2221992" y="1783080"/>
-            <a:ext cx="1481328" cy="1783080"/>
-          </a:xfrm>
-          <a:prstGeom prst="roundRect">
-            <a:avLst>
-              <a:gd name="adj" fmla="val 3704"/>
-            </a:avLst>
-          </a:prstGeom>
-          <a:solidFill>
-            <a:srgbClr val="F4F5FA"/>
-          </a:solidFill>
-          <a:ln/>
-          <a:effectLst>
-            <a:outerShdw sx="100000" sy="100000" kx="0" ky="0" algn="bl" rotWithShape="0" blurRad="127000" dist="25400" dir="5400000">
-              <a:srgbClr val="1E2B4A">
-                <a:alpha val="10000"/>
-              </a:srgbClr>
-            </a:outerShdw>
-          </a:effectLst>
-        </p:spPr>
-      </p:sp>
-      <p:sp>
-        <p:nvSpPr>
-          <p:cNvPr id="9" name="Shape 6"/>
+          <p:cNvPr id="7" name="Shape 4"/>
           <p:cNvSpPr/>
           <p:nvPr/>
         </p:nvSpPr>
@@ -20727,7 +19279,7 @@
       </p:sp>
       <p:pic>
         <p:nvPicPr>
-          <p:cNvPr id="10" name="Image 1" descr="preencoded.png">    </p:cNvPr>
+          <p:cNvPr id="8" name="Image 1" descr="preencoded.png">    </p:cNvPr>
           <p:cNvPicPr>
             <a:picLocks noChangeAspect="1"/>
           </p:cNvPicPr>
@@ -20751,7 +19303,7 @@
       </p:pic>
       <p:sp>
         <p:nvSpPr>
-          <p:cNvPr id="11" name="Text 7"/>
+          <p:cNvPr id="9" name="Text 5"/>
           <p:cNvSpPr/>
           <p:nvPr/>
         </p:nvSpPr>
@@ -20793,36 +19345,7 @@
       </p:sp>
       <p:sp>
         <p:nvSpPr>
-          <p:cNvPr id="12" name="Shape 8"/>
-          <p:cNvSpPr/>
-          <p:nvPr/>
-        </p:nvSpPr>
-        <p:spPr>
-          <a:xfrm>
-            <a:off x="3785616" y="1783080"/>
-            <a:ext cx="1481328" cy="1783080"/>
-          </a:xfrm>
-          <a:prstGeom prst="roundRect">
-            <a:avLst>
-              <a:gd name="adj" fmla="val 3704"/>
-            </a:avLst>
-          </a:prstGeom>
-          <a:solidFill>
-            <a:srgbClr val="F4F5FA"/>
-          </a:solidFill>
-          <a:ln/>
-          <a:effectLst>
-            <a:outerShdw sx="100000" sy="100000" kx="0" ky="0" algn="bl" rotWithShape="0" blurRad="127000" dist="25400" dir="5400000">
-              <a:srgbClr val="1E2B4A">
-                <a:alpha val="10000"/>
-              </a:srgbClr>
-            </a:outerShdw>
-          </a:effectLst>
-        </p:spPr>
-      </p:sp>
-      <p:sp>
-        <p:nvSpPr>
-          <p:cNvPr id="13" name="Shape 9"/>
+          <p:cNvPr id="10" name="Shape 6"/>
           <p:cNvSpPr/>
           <p:nvPr/>
         </p:nvSpPr>
@@ -20854,7 +19377,7 @@
       </p:sp>
       <p:pic>
         <p:nvPicPr>
-          <p:cNvPr id="14" name="Image 2" descr="preencoded.png">    </p:cNvPr>
+          <p:cNvPr id="11" name="Image 2" descr="preencoded.png">    </p:cNvPr>
           <p:cNvPicPr>
             <a:picLocks noChangeAspect="1"/>
           </p:cNvPicPr>
@@ -20878,7 +19401,7 @@
       </p:pic>
       <p:sp>
         <p:nvSpPr>
-          <p:cNvPr id="15" name="Text 10"/>
+          <p:cNvPr id="12" name="Text 7"/>
           <p:cNvSpPr/>
           <p:nvPr/>
         </p:nvSpPr>
@@ -20920,36 +19443,7 @@
       </p:sp>
       <p:sp>
         <p:nvSpPr>
-          <p:cNvPr id="16" name="Shape 11"/>
-          <p:cNvSpPr/>
-          <p:nvPr/>
-        </p:nvSpPr>
-        <p:spPr>
-          <a:xfrm>
-            <a:off x="5349240" y="1783080"/>
-            <a:ext cx="1481328" cy="1783080"/>
-          </a:xfrm>
-          <a:prstGeom prst="roundRect">
-            <a:avLst>
-              <a:gd name="adj" fmla="val 3704"/>
-            </a:avLst>
-          </a:prstGeom>
-          <a:solidFill>
-            <a:srgbClr val="F4F5FA"/>
-          </a:solidFill>
-          <a:ln/>
-          <a:effectLst>
-            <a:outerShdw sx="100000" sy="100000" kx="0" ky="0" algn="bl" rotWithShape="0" blurRad="127000" dist="25400" dir="5400000">
-              <a:srgbClr val="1E2B4A">
-                <a:alpha val="10000"/>
-              </a:srgbClr>
-            </a:outerShdw>
-          </a:effectLst>
-        </p:spPr>
-      </p:sp>
-      <p:sp>
-        <p:nvSpPr>
-          <p:cNvPr id="17" name="Shape 12"/>
+          <p:cNvPr id="13" name="Shape 8"/>
           <p:cNvSpPr/>
           <p:nvPr/>
         </p:nvSpPr>
@@ -20981,7 +19475,7 @@
       </p:sp>
       <p:pic>
         <p:nvPicPr>
-          <p:cNvPr id="18" name="Image 3" descr="preencoded.png">    </p:cNvPr>
+          <p:cNvPr id="14" name="Image 3" descr="preencoded.png">    </p:cNvPr>
           <p:cNvPicPr>
             <a:picLocks noChangeAspect="1"/>
           </p:cNvPicPr>
@@ -21005,7 +19499,7 @@
       </p:pic>
       <p:sp>
         <p:nvSpPr>
-          <p:cNvPr id="19" name="Text 13"/>
+          <p:cNvPr id="15" name="Text 9"/>
           <p:cNvSpPr/>
           <p:nvPr/>
         </p:nvSpPr>
@@ -21047,36 +19541,7 @@
       </p:sp>
       <p:sp>
         <p:nvSpPr>
-          <p:cNvPr id="20" name="Shape 14"/>
-          <p:cNvSpPr/>
-          <p:nvPr/>
-        </p:nvSpPr>
-        <p:spPr>
-          <a:xfrm>
-            <a:off x="6912864" y="1783080"/>
-            <a:ext cx="1481328" cy="1783080"/>
-          </a:xfrm>
-          <a:prstGeom prst="roundRect">
-            <a:avLst>
-              <a:gd name="adj" fmla="val 3704"/>
-            </a:avLst>
-          </a:prstGeom>
-          <a:solidFill>
-            <a:srgbClr val="F4F5FA"/>
-          </a:solidFill>
-          <a:ln/>
-          <a:effectLst>
-            <a:outerShdw sx="100000" sy="100000" kx="0" ky="0" algn="bl" rotWithShape="0" blurRad="127000" dist="25400" dir="5400000">
-              <a:srgbClr val="1E2B4A">
-                <a:alpha val="10000"/>
-              </a:srgbClr>
-            </a:outerShdw>
-          </a:effectLst>
-        </p:spPr>
-      </p:sp>
-      <p:sp>
-        <p:nvSpPr>
-          <p:cNvPr id="21" name="Shape 15"/>
+          <p:cNvPr id="16" name="Shape 10"/>
           <p:cNvSpPr/>
           <p:nvPr/>
         </p:nvSpPr>
@@ -21108,7 +19573,7 @@
       </p:sp>
       <p:pic>
         <p:nvPicPr>
-          <p:cNvPr id="22" name="Image 4" descr="preencoded.png">    </p:cNvPr>
+          <p:cNvPr id="17" name="Image 4" descr="preencoded.png">    </p:cNvPr>
           <p:cNvPicPr>
             <a:picLocks noChangeAspect="1"/>
           </p:cNvPicPr>
@@ -21132,7 +19597,7 @@
       </p:pic>
       <p:sp>
         <p:nvSpPr>
-          <p:cNvPr id="23" name="Text 16"/>
+          <p:cNvPr id="18" name="Text 11"/>
           <p:cNvSpPr/>
           <p:nvPr/>
         </p:nvSpPr>
@@ -21174,36 +19639,7 @@
       </p:sp>
       <p:sp>
         <p:nvSpPr>
-          <p:cNvPr id="24" name="Shape 17"/>
-          <p:cNvSpPr/>
-          <p:nvPr/>
-        </p:nvSpPr>
-        <p:spPr>
-          <a:xfrm>
-            <a:off x="8476488" y="1783080"/>
-            <a:ext cx="1481328" cy="1783080"/>
-          </a:xfrm>
-          <a:prstGeom prst="roundRect">
-            <a:avLst>
-              <a:gd name="adj" fmla="val 3704"/>
-            </a:avLst>
-          </a:prstGeom>
-          <a:solidFill>
-            <a:srgbClr val="F4F5FA"/>
-          </a:solidFill>
-          <a:ln/>
-          <a:effectLst>
-            <a:outerShdw sx="100000" sy="100000" kx="0" ky="0" algn="bl" rotWithShape="0" blurRad="127000" dist="25400" dir="5400000">
-              <a:srgbClr val="1E2B4A">
-                <a:alpha val="10000"/>
-              </a:srgbClr>
-            </a:outerShdw>
-          </a:effectLst>
-        </p:spPr>
-      </p:sp>
-      <p:sp>
-        <p:nvSpPr>
-          <p:cNvPr id="25" name="Shape 18"/>
+          <p:cNvPr id="19" name="Shape 12"/>
           <p:cNvSpPr/>
           <p:nvPr/>
         </p:nvSpPr>
@@ -21235,7 +19671,7 @@
       </p:sp>
       <p:pic>
         <p:nvPicPr>
-          <p:cNvPr id="26" name="Image 5" descr="preencoded.png">    </p:cNvPr>
+          <p:cNvPr id="20" name="Image 5" descr="preencoded.png">    </p:cNvPr>
           <p:cNvPicPr>
             <a:picLocks noChangeAspect="1"/>
           </p:cNvPicPr>
@@ -21259,7 +19695,7 @@
       </p:pic>
       <p:sp>
         <p:nvSpPr>
-          <p:cNvPr id="27" name="Text 19"/>
+          <p:cNvPr id="21" name="Text 13"/>
           <p:cNvSpPr/>
           <p:nvPr/>
         </p:nvSpPr>
@@ -21301,36 +19737,7 @@
       </p:sp>
       <p:sp>
         <p:nvSpPr>
-          <p:cNvPr id="28" name="Shape 20"/>
-          <p:cNvSpPr/>
-          <p:nvPr/>
-        </p:nvSpPr>
-        <p:spPr>
-          <a:xfrm>
-            <a:off x="10040112" y="1783080"/>
-            <a:ext cx="1481328" cy="1783080"/>
-          </a:xfrm>
-          <a:prstGeom prst="roundRect">
-            <a:avLst>
-              <a:gd name="adj" fmla="val 3704"/>
-            </a:avLst>
-          </a:prstGeom>
-          <a:solidFill>
-            <a:srgbClr val="F4F5FA"/>
-          </a:solidFill>
-          <a:ln/>
-          <a:effectLst>
-            <a:outerShdw sx="100000" sy="100000" kx="0" ky="0" algn="bl" rotWithShape="0" blurRad="127000" dist="25400" dir="5400000">
-              <a:srgbClr val="1E2B4A">
-                <a:alpha val="10000"/>
-              </a:srgbClr>
-            </a:outerShdw>
-          </a:effectLst>
-        </p:spPr>
-      </p:sp>
-      <p:sp>
-        <p:nvSpPr>
-          <p:cNvPr id="29" name="Shape 21"/>
+          <p:cNvPr id="22" name="Shape 14"/>
           <p:cNvSpPr/>
           <p:nvPr/>
         </p:nvSpPr>
@@ -21362,7 +19769,7 @@
       </p:sp>
       <p:pic>
         <p:nvPicPr>
-          <p:cNvPr id="30" name="Image 6" descr="preencoded.png">    </p:cNvPr>
+          <p:cNvPr id="23" name="Image 6" descr="preencoded.png">    </p:cNvPr>
           <p:cNvPicPr>
             <a:picLocks noChangeAspect="1"/>
           </p:cNvPicPr>
@@ -21386,7 +19793,7 @@
       </p:pic>
       <p:sp>
         <p:nvSpPr>
-          <p:cNvPr id="31" name="Text 22"/>
+          <p:cNvPr id="24" name="Text 15"/>
           <p:cNvSpPr/>
           <p:nvPr/>
         </p:nvSpPr>
@@ -21428,36 +19835,7 @@
       </p:sp>
       <p:sp>
         <p:nvSpPr>
-          <p:cNvPr id="32" name="Shape 23"/>
-          <p:cNvSpPr/>
-          <p:nvPr/>
-        </p:nvSpPr>
-        <p:spPr>
-          <a:xfrm>
-            <a:off x="658368" y="3858768"/>
-            <a:ext cx="5486400" cy="1965960"/>
-          </a:xfrm>
-          <a:prstGeom prst="roundRect">
-            <a:avLst>
-              <a:gd name="adj" fmla="val 2791"/>
-            </a:avLst>
-          </a:prstGeom>
-          <a:solidFill>
-            <a:srgbClr val="F4F5FA"/>
-          </a:solidFill>
-          <a:ln/>
-          <a:effectLst>
-            <a:outerShdw sx="100000" sy="100000" kx="0" ky="0" algn="bl" rotWithShape="0" blurRad="127000" dist="25400" dir="5400000">
-              <a:srgbClr val="1E2B4A">
-                <a:alpha val="10000"/>
-              </a:srgbClr>
-            </a:outerShdw>
-          </a:effectLst>
-        </p:spPr>
-      </p:sp>
-      <p:sp>
-        <p:nvSpPr>
-          <p:cNvPr id="33" name="Text 24"/>
+          <p:cNvPr id="25" name="Text 16"/>
           <p:cNvSpPr/>
           <p:nvPr/>
         </p:nvSpPr>
@@ -21496,7 +19874,7 @@
       </p:sp>
       <p:sp>
         <p:nvSpPr>
-          <p:cNvPr id="34" name="Text 25"/>
+          <p:cNvPr id="26" name="Text 17"/>
           <p:cNvSpPr/>
           <p:nvPr/>
         </p:nvSpPr>
@@ -21558,36 +19936,7 @@
       </p:sp>
       <p:sp>
         <p:nvSpPr>
-          <p:cNvPr id="35" name="Shape 26"/>
-          <p:cNvSpPr/>
-          <p:nvPr/>
-        </p:nvSpPr>
-        <p:spPr>
-          <a:xfrm>
-            <a:off x="6355080" y="3858768"/>
-            <a:ext cx="5193792" cy="1965960"/>
-          </a:xfrm>
-          <a:prstGeom prst="roundRect">
-            <a:avLst>
-              <a:gd name="adj" fmla="val 2791"/>
-            </a:avLst>
-          </a:prstGeom>
-          <a:solidFill>
-            <a:srgbClr val="F4F5FA"/>
-          </a:solidFill>
-          <a:ln/>
-          <a:effectLst>
-            <a:outerShdw sx="100000" sy="100000" kx="0" ky="0" algn="bl" rotWithShape="0" blurRad="127000" dist="25400" dir="5400000">
-              <a:srgbClr val="1E2B4A">
-                <a:alpha val="10000"/>
-              </a:srgbClr>
-            </a:outerShdw>
-          </a:effectLst>
-        </p:spPr>
-      </p:sp>
-      <p:sp>
-        <p:nvSpPr>
-          <p:cNvPr id="36" name="Text 27"/>
+          <p:cNvPr id="27" name="Text 18"/>
           <p:cNvSpPr/>
           <p:nvPr/>
         </p:nvSpPr>
@@ -21626,7 +19975,7 @@
       </p:sp>
       <p:sp>
         <p:nvSpPr>
-          <p:cNvPr id="37" name="Text 28"/>
+          <p:cNvPr id="28" name="Text 19"/>
           <p:cNvSpPr/>
           <p:nvPr/>
         </p:nvSpPr>
@@ -21665,7 +20014,7 @@
       </p:sp>
       <p:sp>
         <p:nvSpPr>
-          <p:cNvPr id="38" name="Text 29"/>
+          <p:cNvPr id="29" name="Text 20"/>
           <p:cNvSpPr/>
           <p:nvPr/>
         </p:nvSpPr>
@@ -21704,7 +20053,7 @@
       </p:sp>
       <p:sp>
         <p:nvSpPr>
-          <p:cNvPr id="39" name="Text 30"/>
+          <p:cNvPr id="30" name="Text 21"/>
           <p:cNvSpPr/>
           <p:nvPr/>
         </p:nvSpPr>
@@ -21743,7 +20092,7 @@
       </p:sp>
       <p:sp>
         <p:nvSpPr>
-          <p:cNvPr id="40" name="Text 31"/>
+          <p:cNvPr id="31" name="Text 22"/>
           <p:cNvSpPr/>
           <p:nvPr/>
         </p:nvSpPr>
@@ -21782,7 +20131,7 @@
       </p:sp>
       <p:sp>
         <p:nvSpPr>
-          <p:cNvPr id="41" name="Text 32"/>
+          <p:cNvPr id="32" name="Text 23"/>
           <p:cNvSpPr/>
           <p:nvPr/>
         </p:nvSpPr>
@@ -21821,7 +20170,7 @@
       </p:sp>
       <p:sp>
         <p:nvSpPr>
-          <p:cNvPr id="42" name="Text 33"/>
+          <p:cNvPr id="33" name="Text 24"/>
           <p:cNvSpPr/>
           <p:nvPr/>
         </p:nvSpPr>
@@ -21860,7 +20209,7 @@
       </p:sp>
       <p:sp>
         <p:nvSpPr>
-          <p:cNvPr id="43" name="Text 34"/>
+          <p:cNvPr id="34" name="Text 25"/>
           <p:cNvSpPr/>
           <p:nvPr/>
         </p:nvSpPr>
@@ -21902,7 +20251,7 @@
       </p:sp>
       <p:sp>
         <p:nvSpPr>
-          <p:cNvPr id="44" name="Text 35"/>
+          <p:cNvPr id="35" name="Text 26"/>
           <p:cNvSpPr/>
           <p:nvPr/>
         </p:nvSpPr>
@@ -21941,7 +20290,7 @@
       </p:sp>
       <p:sp>
         <p:nvSpPr>
-          <p:cNvPr id="45" name="Text 36"/>
+          <p:cNvPr id="36" name="Text 27"/>
           <p:cNvSpPr/>
           <p:nvPr/>
         </p:nvSpPr>
@@ -21980,7 +20329,7 @@
       </p:sp>
       <p:pic>
         <p:nvPicPr>
-          <p:cNvPr id="46" name="Image 7" descr="logos/logo_ensae_new.png">    </p:cNvPr>
+          <p:cNvPr id="37" name="Image 7" descr="logos/logo_ensae_new.png">    </p:cNvPr>
           <p:cNvPicPr>
             <a:picLocks noChangeAspect="1"/>
           </p:cNvPicPr>
@@ -22117,36 +20466,7 @@
       </p:sp>
       <p:sp>
         <p:nvSpPr>
-          <p:cNvPr id="4" name="Shape 2"/>
-          <p:cNvSpPr/>
-          <p:nvPr/>
-        </p:nvSpPr>
-        <p:spPr>
-          <a:xfrm>
-            <a:off x="658368" y="1691640"/>
-            <a:ext cx="2606040" cy="1600200"/>
-          </a:xfrm>
-          <a:prstGeom prst="roundRect">
-            <a:avLst>
-              <a:gd name="adj" fmla="val 3429"/>
-            </a:avLst>
-          </a:prstGeom>
-          <a:solidFill>
-            <a:srgbClr val="F4F5FA"/>
-          </a:solidFill>
-          <a:ln/>
-          <a:effectLst>
-            <a:outerShdw sx="100000" sy="100000" kx="0" ky="0" algn="bl" rotWithShape="0" blurRad="127000" dist="25400" dir="5400000">
-              <a:srgbClr val="1E2B4A">
-                <a:alpha val="10000"/>
-              </a:srgbClr>
-            </a:outerShdw>
-          </a:effectLst>
-        </p:spPr>
-      </p:sp>
-      <p:sp>
-        <p:nvSpPr>
-          <p:cNvPr id="5" name="Text 3"/>
+          <p:cNvPr id="4" name="Text 2"/>
           <p:cNvSpPr/>
           <p:nvPr/>
         </p:nvSpPr>
@@ -22185,7 +20505,7 @@
       </p:sp>
       <p:sp>
         <p:nvSpPr>
-          <p:cNvPr id="6" name="Text 4"/>
+          <p:cNvPr id="5" name="Text 3"/>
           <p:cNvSpPr/>
           <p:nvPr/>
         </p:nvSpPr>
@@ -22247,36 +20567,7 @@
       </p:sp>
       <p:sp>
         <p:nvSpPr>
-          <p:cNvPr id="7" name="Shape 5"/>
-          <p:cNvSpPr/>
-          <p:nvPr/>
-        </p:nvSpPr>
-        <p:spPr>
-          <a:xfrm>
-            <a:off x="3410712" y="1691640"/>
-            <a:ext cx="2606040" cy="1600200"/>
-          </a:xfrm>
-          <a:prstGeom prst="roundRect">
-            <a:avLst>
-              <a:gd name="adj" fmla="val 3429"/>
-            </a:avLst>
-          </a:prstGeom>
-          <a:solidFill>
-            <a:srgbClr val="F4F5FA"/>
-          </a:solidFill>
-          <a:ln/>
-          <a:effectLst>
-            <a:outerShdw sx="100000" sy="100000" kx="0" ky="0" algn="bl" rotWithShape="0" blurRad="127000" dist="25400" dir="5400000">
-              <a:srgbClr val="1E2B4A">
-                <a:alpha val="10000"/>
-              </a:srgbClr>
-            </a:outerShdw>
-          </a:effectLst>
-        </p:spPr>
-      </p:sp>
-      <p:sp>
-        <p:nvSpPr>
-          <p:cNvPr id="8" name="Text 6"/>
+          <p:cNvPr id="6" name="Text 4"/>
           <p:cNvSpPr/>
           <p:nvPr/>
         </p:nvSpPr>
@@ -22315,7 +20606,7 @@
       </p:sp>
       <p:sp>
         <p:nvSpPr>
-          <p:cNvPr id="9" name="Text 7"/>
+          <p:cNvPr id="7" name="Text 5"/>
           <p:cNvSpPr/>
           <p:nvPr/>
         </p:nvSpPr>
@@ -22377,36 +20668,7 @@
       </p:sp>
       <p:sp>
         <p:nvSpPr>
-          <p:cNvPr id="10" name="Shape 8"/>
-          <p:cNvSpPr/>
-          <p:nvPr/>
-        </p:nvSpPr>
-        <p:spPr>
-          <a:xfrm>
-            <a:off x="6163056" y="1691640"/>
-            <a:ext cx="2606040" cy="1600200"/>
-          </a:xfrm>
-          <a:prstGeom prst="roundRect">
-            <a:avLst>
-              <a:gd name="adj" fmla="val 3429"/>
-            </a:avLst>
-          </a:prstGeom>
-          <a:solidFill>
-            <a:srgbClr val="F4F5FA"/>
-          </a:solidFill>
-          <a:ln/>
-          <a:effectLst>
-            <a:outerShdw sx="100000" sy="100000" kx="0" ky="0" algn="bl" rotWithShape="0" blurRad="127000" dist="25400" dir="5400000">
-              <a:srgbClr val="1E2B4A">
-                <a:alpha val="10000"/>
-              </a:srgbClr>
-            </a:outerShdw>
-          </a:effectLst>
-        </p:spPr>
-      </p:sp>
-      <p:sp>
-        <p:nvSpPr>
-          <p:cNvPr id="11" name="Text 9"/>
+          <p:cNvPr id="8" name="Text 6"/>
           <p:cNvSpPr/>
           <p:nvPr/>
         </p:nvSpPr>
@@ -22445,7 +20707,7 @@
       </p:sp>
       <p:sp>
         <p:nvSpPr>
-          <p:cNvPr id="12" name="Text 10"/>
+          <p:cNvPr id="9" name="Text 7"/>
           <p:cNvSpPr/>
           <p:nvPr/>
         </p:nvSpPr>
@@ -22507,36 +20769,7 @@
       </p:sp>
       <p:sp>
         <p:nvSpPr>
-          <p:cNvPr id="13" name="Shape 11"/>
-          <p:cNvSpPr/>
-          <p:nvPr/>
-        </p:nvSpPr>
-        <p:spPr>
-          <a:xfrm>
-            <a:off x="8915400" y="1691640"/>
-            <a:ext cx="2606040" cy="1600200"/>
-          </a:xfrm>
-          <a:prstGeom prst="roundRect">
-            <a:avLst>
-              <a:gd name="adj" fmla="val 3429"/>
-            </a:avLst>
-          </a:prstGeom>
-          <a:solidFill>
-            <a:srgbClr val="F4F5FA"/>
-          </a:solidFill>
-          <a:ln/>
-          <a:effectLst>
-            <a:outerShdw sx="100000" sy="100000" kx="0" ky="0" algn="bl" rotWithShape="0" blurRad="127000" dist="25400" dir="5400000">
-              <a:srgbClr val="1E2B4A">
-                <a:alpha val="10000"/>
-              </a:srgbClr>
-            </a:outerShdw>
-          </a:effectLst>
-        </p:spPr>
-      </p:sp>
-      <p:sp>
-        <p:nvSpPr>
-          <p:cNvPr id="14" name="Text 12"/>
+          <p:cNvPr id="10" name="Text 8"/>
           <p:cNvSpPr/>
           <p:nvPr/>
         </p:nvSpPr>
@@ -22575,7 +20808,7 @@
       </p:sp>
       <p:sp>
         <p:nvSpPr>
-          <p:cNvPr id="15" name="Text 13"/>
+          <p:cNvPr id="11" name="Text 9"/>
           <p:cNvSpPr/>
           <p:nvPr/>
         </p:nvSpPr>
@@ -22637,36 +20870,7 @@
       </p:sp>
       <p:sp>
         <p:nvSpPr>
-          <p:cNvPr id="16" name="Shape 14"/>
-          <p:cNvSpPr/>
-          <p:nvPr/>
-        </p:nvSpPr>
-        <p:spPr>
-          <a:xfrm>
-            <a:off x="658368" y="3520440"/>
-            <a:ext cx="5394960" cy="2286000"/>
-          </a:xfrm>
-          <a:prstGeom prst="roundRect">
-            <a:avLst>
-              <a:gd name="adj" fmla="val 2400"/>
-            </a:avLst>
-          </a:prstGeom>
-          <a:solidFill>
-            <a:srgbClr val="F4F5FA"/>
-          </a:solidFill>
-          <a:ln/>
-          <a:effectLst>
-            <a:outerShdw sx="100000" sy="100000" kx="0" ky="0" algn="bl" rotWithShape="0" blurRad="127000" dist="25400" dir="5400000">
-              <a:srgbClr val="1E2B4A">
-                <a:alpha val="10000"/>
-              </a:srgbClr>
-            </a:outerShdw>
-          </a:effectLst>
-        </p:spPr>
-      </p:sp>
-      <p:sp>
-        <p:nvSpPr>
-          <p:cNvPr id="17" name="Shape 15"/>
+          <p:cNvPr id="12" name="Shape 10"/>
           <p:cNvSpPr/>
           <p:nvPr/>
         </p:nvSpPr>
@@ -22698,7 +20902,7 @@
       </p:sp>
       <p:pic>
         <p:nvPicPr>
-          <p:cNvPr id="18" name="Image 0" descr="preencoded.png">    </p:cNvPr>
+          <p:cNvPr id="13" name="Image 0" descr="preencoded.png">    </p:cNvPr>
           <p:cNvPicPr>
             <a:picLocks noChangeAspect="1"/>
           </p:cNvPicPr>
@@ -22722,7 +20926,7 @@
       </p:pic>
       <p:sp>
         <p:nvSpPr>
-          <p:cNvPr id="19" name="Text 16"/>
+          <p:cNvPr id="14" name="Text 11"/>
           <p:cNvSpPr/>
           <p:nvPr/>
         </p:nvSpPr>
@@ -22761,7 +20965,7 @@
       </p:sp>
       <p:sp>
         <p:nvSpPr>
-          <p:cNvPr id="20" name="Text 17"/>
+          <p:cNvPr id="15" name="Text 12"/>
           <p:cNvSpPr/>
           <p:nvPr/>
         </p:nvSpPr>
@@ -22803,36 +21007,7 @@
       </p:sp>
       <p:sp>
         <p:nvSpPr>
-          <p:cNvPr id="21" name="Shape 18"/>
-          <p:cNvSpPr/>
-          <p:nvPr/>
-        </p:nvSpPr>
-        <p:spPr>
-          <a:xfrm>
-            <a:off x="6263640" y="3520440"/>
-            <a:ext cx="5285232" cy="2286000"/>
-          </a:xfrm>
-          <a:prstGeom prst="roundRect">
-            <a:avLst>
-              <a:gd name="adj" fmla="val 2400"/>
-            </a:avLst>
-          </a:prstGeom>
-          <a:solidFill>
-            <a:srgbClr val="F4F5FA"/>
-          </a:solidFill>
-          <a:ln/>
-          <a:effectLst>
-            <a:outerShdw sx="100000" sy="100000" kx="0" ky="0" algn="bl" rotWithShape="0" blurRad="127000" dist="25400" dir="5400000">
-              <a:srgbClr val="1E2B4A">
-                <a:alpha val="10000"/>
-              </a:srgbClr>
-            </a:outerShdw>
-          </a:effectLst>
-        </p:spPr>
-      </p:sp>
-      <p:sp>
-        <p:nvSpPr>
-          <p:cNvPr id="22" name="Shape 19"/>
+          <p:cNvPr id="16" name="Shape 13"/>
           <p:cNvSpPr/>
           <p:nvPr/>
         </p:nvSpPr>
@@ -22864,7 +21039,7 @@
       </p:sp>
       <p:pic>
         <p:nvPicPr>
-          <p:cNvPr id="23" name="Image 1" descr="preencoded.png">    </p:cNvPr>
+          <p:cNvPr id="17" name="Image 1" descr="preencoded.png">    </p:cNvPr>
           <p:cNvPicPr>
             <a:picLocks noChangeAspect="1"/>
           </p:cNvPicPr>
@@ -22888,7 +21063,7 @@
       </p:pic>
       <p:sp>
         <p:nvSpPr>
-          <p:cNvPr id="24" name="Text 20"/>
+          <p:cNvPr id="18" name="Text 14"/>
           <p:cNvSpPr/>
           <p:nvPr/>
         </p:nvSpPr>
@@ -22927,7 +21102,7 @@
       </p:sp>
       <p:sp>
         <p:nvSpPr>
-          <p:cNvPr id="25" name="Text 21"/>
+          <p:cNvPr id="19" name="Text 15"/>
           <p:cNvSpPr/>
           <p:nvPr/>
         </p:nvSpPr>
@@ -22966,7 +21141,7 @@
       </p:sp>
       <p:sp>
         <p:nvSpPr>
-          <p:cNvPr id="26" name="Shape 22"/>
+          <p:cNvPr id="20" name="Shape 16"/>
           <p:cNvSpPr/>
           <p:nvPr/>
         </p:nvSpPr>
@@ -22988,7 +21163,7 @@
       </p:sp>
       <p:sp>
         <p:nvSpPr>
-          <p:cNvPr id="27" name="Text 23"/>
+          <p:cNvPr id="21" name="Text 17"/>
           <p:cNvSpPr/>
           <p:nvPr/>
         </p:nvSpPr>
@@ -23027,7 +21202,7 @@
       </p:sp>
       <p:sp>
         <p:nvSpPr>
-          <p:cNvPr id="28" name="Text 24"/>
+          <p:cNvPr id="22" name="Text 18"/>
           <p:cNvSpPr/>
           <p:nvPr/>
         </p:nvSpPr>
@@ -23066,7 +21241,7 @@
       </p:sp>
       <p:sp>
         <p:nvSpPr>
-          <p:cNvPr id="29" name="Shape 25"/>
+          <p:cNvPr id="23" name="Shape 19"/>
           <p:cNvSpPr/>
           <p:nvPr/>
         </p:nvSpPr>
@@ -23088,7 +21263,7 @@
       </p:sp>
       <p:sp>
         <p:nvSpPr>
-          <p:cNvPr id="30" name="Text 26"/>
+          <p:cNvPr id="24" name="Text 20"/>
           <p:cNvSpPr/>
           <p:nvPr/>
         </p:nvSpPr>
@@ -23127,7 +21302,7 @@
       </p:sp>
       <p:sp>
         <p:nvSpPr>
-          <p:cNvPr id="31" name="Text 27"/>
+          <p:cNvPr id="25" name="Text 21"/>
           <p:cNvSpPr/>
           <p:nvPr/>
         </p:nvSpPr>
@@ -23166,7 +21341,7 @@
       </p:sp>
       <p:sp>
         <p:nvSpPr>
-          <p:cNvPr id="32" name="Shape 28"/>
+          <p:cNvPr id="26" name="Shape 22"/>
           <p:cNvSpPr/>
           <p:nvPr/>
         </p:nvSpPr>
@@ -23188,7 +21363,7 @@
       </p:sp>
       <p:sp>
         <p:nvSpPr>
-          <p:cNvPr id="33" name="Text 29"/>
+          <p:cNvPr id="27" name="Text 23"/>
           <p:cNvSpPr/>
           <p:nvPr/>
         </p:nvSpPr>
@@ -23227,7 +21402,7 @@
       </p:sp>
       <p:sp>
         <p:nvSpPr>
-          <p:cNvPr id="34" name="Text 30"/>
+          <p:cNvPr id="28" name="Text 24"/>
           <p:cNvSpPr/>
           <p:nvPr/>
         </p:nvSpPr>
@@ -23266,7 +21441,7 @@
       </p:sp>
       <p:sp>
         <p:nvSpPr>
-          <p:cNvPr id="35" name="Shape 31"/>
+          <p:cNvPr id="29" name="Shape 25"/>
           <p:cNvSpPr/>
           <p:nvPr/>
         </p:nvSpPr>
@@ -23288,7 +21463,7 @@
       </p:sp>
       <p:sp>
         <p:nvSpPr>
-          <p:cNvPr id="36" name="Text 32"/>
+          <p:cNvPr id="30" name="Text 26"/>
           <p:cNvSpPr/>
           <p:nvPr/>
         </p:nvSpPr>
@@ -23327,7 +21502,7 @@
       </p:sp>
       <p:sp>
         <p:nvSpPr>
-          <p:cNvPr id="37" name="Text 33"/>
+          <p:cNvPr id="31" name="Text 27"/>
           <p:cNvSpPr/>
           <p:nvPr/>
         </p:nvSpPr>
@@ -23366,7 +21541,7 @@
       </p:sp>
       <p:sp>
         <p:nvSpPr>
-          <p:cNvPr id="38" name="Text 34"/>
+          <p:cNvPr id="32" name="Text 28"/>
           <p:cNvSpPr/>
           <p:nvPr/>
         </p:nvSpPr>
@@ -23405,7 +21580,7 @@
       </p:sp>
       <p:pic>
         <p:nvPicPr>
-          <p:cNvPr id="39" name="Image 2" descr="logos/logo_ensae_new.png">    </p:cNvPr>
+          <p:cNvPr id="33" name="Image 2" descr="logos/logo_ensae_new.png">    </p:cNvPr>
           <p:cNvPicPr>
             <a:picLocks noChangeAspect="1"/>
           </p:cNvPicPr>
@@ -23548,35 +21723,6 @@
         </p:nvSpPr>
         <p:spPr>
           <a:xfrm>
-            <a:off x="658368" y="1691640"/>
-            <a:ext cx="3456432" cy="3108960"/>
-          </a:xfrm>
-          <a:prstGeom prst="roundRect">
-            <a:avLst>
-              <a:gd name="adj" fmla="val 1765"/>
-            </a:avLst>
-          </a:prstGeom>
-          <a:solidFill>
-            <a:srgbClr val="F4F5FA"/>
-          </a:solidFill>
-          <a:ln/>
-          <a:effectLst>
-            <a:outerShdw sx="100000" sy="100000" kx="0" ky="0" algn="bl" rotWithShape="0" blurRad="127000" dist="25400" dir="5400000">
-              <a:srgbClr val="1E2B4A">
-                <a:alpha val="10000"/>
-              </a:srgbClr>
-            </a:outerShdw>
-          </a:effectLst>
-        </p:spPr>
-      </p:sp>
-      <p:sp>
-        <p:nvSpPr>
-          <p:cNvPr id="5" name="Shape 3"/>
-          <p:cNvSpPr/>
-          <p:nvPr/>
-        </p:nvSpPr>
-        <p:spPr>
-          <a:xfrm>
             <a:off x="932688" y="1965960"/>
             <a:ext cx="804672" cy="804672"/>
           </a:xfrm>
@@ -23603,7 +21749,7 @@
       </p:sp>
       <p:pic>
         <p:nvPicPr>
-          <p:cNvPr id="6" name="Image 0" descr="preencoded.png">    </p:cNvPr>
+          <p:cNvPr id="5" name="Image 0" descr="preencoded.png">    </p:cNvPr>
           <p:cNvPicPr>
             <a:picLocks noChangeAspect="1"/>
           </p:cNvPicPr>
@@ -23627,7 +21773,7 @@
       </p:pic>
       <p:sp>
         <p:nvSpPr>
-          <p:cNvPr id="7" name="Text 4"/>
+          <p:cNvPr id="6" name="Text 3"/>
           <p:cNvSpPr/>
           <p:nvPr/>
         </p:nvSpPr>
@@ -23666,7 +21812,7 @@
       </p:sp>
       <p:sp>
         <p:nvSpPr>
-          <p:cNvPr id="8" name="Text 5"/>
+          <p:cNvPr id="7" name="Text 4"/>
           <p:cNvSpPr/>
           <p:nvPr/>
         </p:nvSpPr>
@@ -23705,7 +21851,7 @@
       </p:sp>
       <p:sp>
         <p:nvSpPr>
-          <p:cNvPr id="9" name="Text 6"/>
+          <p:cNvPr id="8" name="Text 5"/>
           <p:cNvSpPr/>
           <p:nvPr/>
         </p:nvSpPr>
@@ -23747,36 +21893,7 @@
       </p:sp>
       <p:sp>
         <p:nvSpPr>
-          <p:cNvPr id="10" name="Shape 7"/>
-          <p:cNvSpPr/>
-          <p:nvPr/>
-        </p:nvSpPr>
-        <p:spPr>
-          <a:xfrm>
-            <a:off x="4453128" y="1691640"/>
-            <a:ext cx="3456432" cy="3108960"/>
-          </a:xfrm>
-          <a:prstGeom prst="roundRect">
-            <a:avLst>
-              <a:gd name="adj" fmla="val 1765"/>
-            </a:avLst>
-          </a:prstGeom>
-          <a:solidFill>
-            <a:srgbClr val="F4F5FA"/>
-          </a:solidFill>
-          <a:ln/>
-          <a:effectLst>
-            <a:outerShdw sx="100000" sy="100000" kx="0" ky="0" algn="bl" rotWithShape="0" blurRad="127000" dist="25400" dir="5400000">
-              <a:srgbClr val="1E2B4A">
-                <a:alpha val="10000"/>
-              </a:srgbClr>
-            </a:outerShdw>
-          </a:effectLst>
-        </p:spPr>
-      </p:sp>
-      <p:sp>
-        <p:nvSpPr>
-          <p:cNvPr id="11" name="Shape 8"/>
+          <p:cNvPr id="9" name="Shape 6"/>
           <p:cNvSpPr/>
           <p:nvPr/>
         </p:nvSpPr>
@@ -23808,7 +21925,7 @@
       </p:sp>
       <p:pic>
         <p:nvPicPr>
-          <p:cNvPr id="12" name="Image 1" descr="preencoded.png">    </p:cNvPr>
+          <p:cNvPr id="10" name="Image 1" descr="preencoded.png">    </p:cNvPr>
           <p:cNvPicPr>
             <a:picLocks noChangeAspect="1"/>
           </p:cNvPicPr>
@@ -23832,7 +21949,7 @@
       </p:pic>
       <p:sp>
         <p:nvSpPr>
-          <p:cNvPr id="13" name="Text 9"/>
+          <p:cNvPr id="11" name="Text 7"/>
           <p:cNvSpPr/>
           <p:nvPr/>
         </p:nvSpPr>
@@ -23871,7 +21988,7 @@
       </p:sp>
       <p:sp>
         <p:nvSpPr>
-          <p:cNvPr id="14" name="Text 10"/>
+          <p:cNvPr id="12" name="Text 8"/>
           <p:cNvSpPr/>
           <p:nvPr/>
         </p:nvSpPr>
@@ -23910,7 +22027,7 @@
       </p:sp>
       <p:sp>
         <p:nvSpPr>
-          <p:cNvPr id="15" name="Text 11"/>
+          <p:cNvPr id="13" name="Text 9"/>
           <p:cNvSpPr/>
           <p:nvPr/>
         </p:nvSpPr>
@@ -23952,36 +22069,7 @@
       </p:sp>
       <p:sp>
         <p:nvSpPr>
-          <p:cNvPr id="16" name="Shape 12"/>
-          <p:cNvSpPr/>
-          <p:nvPr/>
-        </p:nvSpPr>
-        <p:spPr>
-          <a:xfrm>
-            <a:off x="8247888" y="1691640"/>
-            <a:ext cx="3456432" cy="3108960"/>
-          </a:xfrm>
-          <a:prstGeom prst="roundRect">
-            <a:avLst>
-              <a:gd name="adj" fmla="val 1765"/>
-            </a:avLst>
-          </a:prstGeom>
-          <a:solidFill>
-            <a:srgbClr val="F4F5FA"/>
-          </a:solidFill>
-          <a:ln/>
-          <a:effectLst>
-            <a:outerShdw sx="100000" sy="100000" kx="0" ky="0" algn="bl" rotWithShape="0" blurRad="127000" dist="25400" dir="5400000">
-              <a:srgbClr val="1E2B4A">
-                <a:alpha val="10000"/>
-              </a:srgbClr>
-            </a:outerShdw>
-          </a:effectLst>
-        </p:spPr>
-      </p:sp>
-      <p:sp>
-        <p:nvSpPr>
-          <p:cNvPr id="17" name="Shape 13"/>
+          <p:cNvPr id="14" name="Shape 10"/>
           <p:cNvSpPr/>
           <p:nvPr/>
         </p:nvSpPr>
@@ -24013,7 +22101,7 @@
       </p:sp>
       <p:pic>
         <p:nvPicPr>
-          <p:cNvPr id="18" name="Image 2" descr="preencoded.png">    </p:cNvPr>
+          <p:cNvPr id="15" name="Image 2" descr="preencoded.png">    </p:cNvPr>
           <p:cNvPicPr>
             <a:picLocks noChangeAspect="1"/>
           </p:cNvPicPr>
@@ -24037,7 +22125,7 @@
       </p:pic>
       <p:sp>
         <p:nvSpPr>
-          <p:cNvPr id="19" name="Text 14"/>
+          <p:cNvPr id="16" name="Text 11"/>
           <p:cNvSpPr/>
           <p:nvPr/>
         </p:nvSpPr>
@@ -24076,7 +22164,7 @@
       </p:sp>
       <p:sp>
         <p:nvSpPr>
-          <p:cNvPr id="20" name="Text 15"/>
+          <p:cNvPr id="17" name="Text 12"/>
           <p:cNvSpPr/>
           <p:nvPr/>
         </p:nvSpPr>
@@ -24115,7 +22203,7 @@
       </p:sp>
       <p:sp>
         <p:nvSpPr>
-          <p:cNvPr id="21" name="Text 16"/>
+          <p:cNvPr id="18" name="Text 13"/>
           <p:cNvSpPr/>
           <p:nvPr/>
         </p:nvSpPr>
@@ -24157,7 +22245,7 @@
       </p:sp>
       <p:sp>
         <p:nvSpPr>
-          <p:cNvPr id="22" name="Shape 17"/>
+          <p:cNvPr id="19" name="Shape 14"/>
           <p:cNvSpPr/>
           <p:nvPr/>
         </p:nvSpPr>
@@ -24175,18 +22263,11 @@
             <a:srgbClr val="1E2B4A"/>
           </a:solidFill>
           <a:ln/>
-          <a:effectLst>
-            <a:outerShdw sx="100000" sy="100000" kx="0" ky="0" algn="bl" rotWithShape="0" blurRad="127000" dist="25400" dir="5400000">
-              <a:srgbClr val="1E2B4A">
-                <a:alpha val="10000"/>
-              </a:srgbClr>
-            </a:outerShdw>
-          </a:effectLst>
-        </p:spPr>
-      </p:sp>
-      <p:sp>
-        <p:nvSpPr>
-          <p:cNvPr id="23" name="Text 18"/>
+        </p:spPr>
+      </p:sp>
+      <p:sp>
+        <p:nvSpPr>
+          <p:cNvPr id="20" name="Text 15"/>
           <p:cNvSpPr/>
           <p:nvPr/>
         </p:nvSpPr>
@@ -24228,7 +22309,7 @@
       </p:sp>
       <p:sp>
         <p:nvSpPr>
-          <p:cNvPr id="24" name="Text 19"/>
+          <p:cNvPr id="21" name="Text 16"/>
           <p:cNvSpPr/>
           <p:nvPr/>
         </p:nvSpPr>
@@ -24267,7 +22348,7 @@
       </p:sp>
       <p:pic>
         <p:nvPicPr>
-          <p:cNvPr id="25" name="Image 3" descr="logos/logo_ensae_new.png">    </p:cNvPr>
+          <p:cNvPr id="22" name="Image 3" descr="logos/logo_ensae_new.png">    </p:cNvPr>
           <p:cNvPicPr>
             <a:picLocks noChangeAspect="1"/>
           </p:cNvPicPr>

--- a/infographie/presentation_infographique.pptx
+++ b/infographie/presentation_infographique.pptx
@@ -2637,7 +2637,7 @@
     <p:bg>
       <p:bgPr>
         <a:solidFill>
-          <a:srgbClr val="16213D"/>
+          <a:srgbClr val="1E1B4B"/>
         </a:solidFill>
       </p:bgPr>
     </p:bg>
@@ -2670,7 +2670,7 @@
             <a:avLst/>
           </a:prstGeom>
           <a:solidFill>
-            <a:srgbClr val="24365E"/>
+            <a:srgbClr val="312E81"/>
           </a:solidFill>
           <a:ln/>
         </p:spPr>
@@ -2690,7 +2690,7 @@
             <a:avLst/>
           </a:prstGeom>
           <a:solidFill>
-            <a:srgbClr val="24365E"/>
+            <a:srgbClr val="312E81"/>
           </a:solidFill>
           <a:ln/>
         </p:spPr>
@@ -2717,7 +2717,7 @@
           <a:ln/>
           <a:effectLst>
             <a:outerShdw sx="100000" sy="100000" kx="0" ky="0" algn="bl" rotWithShape="0" blurRad="127000" dist="25400" dir="5400000">
-              <a:srgbClr val="1E2B4A">
+              <a:srgbClr val="312E81">
                 <a:alpha val="22000"/>
               </a:srgbClr>
             </a:outerShdw>
@@ -2770,7 +2770,7 @@
           <a:ln/>
           <a:effectLst>
             <a:outerShdw sx="100000" sy="100000" kx="0" ky="0" algn="bl" rotWithShape="0" blurRad="127000" dist="25400" dir="5400000">
-              <a:srgbClr val="1E2B4A">
+              <a:srgbClr val="312E81">
                 <a:alpha val="22000"/>
               </a:srgbClr>
             </a:outerShdw>
@@ -2828,7 +2828,7 @@
             <a:r>
               <a:rPr lang="en-US" sz="1200" b="1" spc="200" kern="0" dirty="0">
                 <a:solidFill>
-                  <a:srgbClr val="8FA6CC"/>
+                  <a:srgbClr val="A5B4FC"/>
                 </a:solidFill>
                 <a:latin typeface="Calibri" pitchFamily="34" charset="0"/>
                 <a:ea typeface="Calibri" pitchFamily="34" charset="-122"/>
@@ -2867,7 +2867,7 @@
             <a:r>
               <a:rPr lang="en-US" sz="1250" dirty="0">
                 <a:solidFill>
-                  <a:srgbClr val="AFC0DA"/>
+                  <a:srgbClr val="A5B4FC"/>
                 </a:solidFill>
                 <a:latin typeface="Calibri" pitchFamily="34" charset="0"/>
                 <a:ea typeface="Calibri" pitchFamily="34" charset="-122"/>
@@ -2968,7 +2968,7 @@
             <a:r>
               <a:rPr lang="en-US" sz="1400" dirty="0">
                 <a:solidFill>
-                  <a:srgbClr val="D96F2B"/>
+                  <a:srgbClr val="D97706"/>
                 </a:solidFill>
                 <a:latin typeface="Calibri" pitchFamily="34" charset="0"/>
                 <a:ea typeface="Calibri" pitchFamily="34" charset="-122"/>
@@ -3007,7 +3007,7 @@
             <a:r>
               <a:rPr lang="en-US" sz="1100" dirty="0">
                 <a:solidFill>
-                  <a:srgbClr val="8FA6CC"/>
+                  <a:srgbClr val="A5B4FC"/>
                 </a:solidFill>
                 <a:latin typeface="Calibri" pitchFamily="34" charset="0"/>
                 <a:ea typeface="Calibri" pitchFamily="34" charset="-122"/>
@@ -3088,7 +3088,7 @@
             <a:r>
               <a:rPr lang="en-US" sz="1050" dirty="0">
                 <a:solidFill>
-                  <a:srgbClr val="AFC0DA"/>
+                  <a:srgbClr val="A5B4FC"/>
                 </a:solidFill>
                 <a:latin typeface="Calibri" pitchFamily="34" charset="0"/>
                 <a:ea typeface="Calibri" pitchFamily="34" charset="-122"/>
@@ -3127,7 +3127,7 @@
             <a:r>
               <a:rPr lang="en-US" sz="1100" dirty="0">
                 <a:solidFill>
-                  <a:srgbClr val="8FA6CC"/>
+                  <a:srgbClr val="A5B4FC"/>
                 </a:solidFill>
                 <a:latin typeface="Calibri" pitchFamily="34" charset="0"/>
                 <a:ea typeface="Calibri" pitchFamily="34" charset="-122"/>
@@ -3208,7 +3208,7 @@
             <a:r>
               <a:rPr lang="en-US" sz="1050" dirty="0">
                 <a:solidFill>
-                  <a:srgbClr val="AFC0DA"/>
+                  <a:srgbClr val="A5B4FC"/>
                 </a:solidFill>
                 <a:latin typeface="Calibri" pitchFamily="34" charset="0"/>
                 <a:ea typeface="Calibri" pitchFamily="34" charset="-122"/>
@@ -3247,7 +3247,7 @@
             <a:r>
               <a:rPr lang="en-US" sz="1300" dirty="0">
                 <a:solidFill>
-                  <a:srgbClr val="8FA6CC"/>
+                  <a:srgbClr val="A5B4FC"/>
                 </a:solidFill>
                 <a:latin typeface="Calibri" pitchFamily="34" charset="0"/>
                 <a:ea typeface="Calibri" pitchFamily="34" charset="-122"/>
@@ -3318,7 +3318,7 @@
             <a:r>
               <a:rPr lang="en-US" sz="2700" b="1" dirty="0">
                 <a:solidFill>
-                  <a:srgbClr val="1E2B4A"/>
+                  <a:srgbClr val="312E81"/>
                 </a:solidFill>
                 <a:latin typeface="Calibri" pitchFamily="34" charset="0"/>
                 <a:ea typeface="Calibri" pitchFamily="34" charset="-122"/>
@@ -3360,7 +3360,7 @@
             <a:r>
               <a:rPr lang="en-US" sz="1300" dirty="0">
                 <a:solidFill>
-                  <a:srgbClr val="4A5468"/>
+                  <a:srgbClr val="475569"/>
                 </a:solidFill>
                 <a:latin typeface="Calibri" pitchFamily="34" charset="0"/>
                 <a:ea typeface="Calibri" pitchFamily="34" charset="-122"/>
@@ -3399,7 +3399,7 @@
             <a:r>
               <a:rPr lang="en-US" sz="1500" b="1" dirty="0">
                 <a:solidFill>
-                  <a:srgbClr val="1D2433"/>
+                  <a:srgbClr val="0F172A"/>
                 </a:solidFill>
                 <a:latin typeface="Calibri" pitchFamily="34" charset="0"/>
                 <a:ea typeface="Calibri" pitchFamily="34" charset="-122"/>
@@ -3466,7 +3466,7 @@
             <a:r>
               <a:rPr lang="en-US" sz="1100" b="1" dirty="0">
                 <a:solidFill>
-                  <a:srgbClr val="8A93A5"/>
+                  <a:srgbClr val="94A3B8"/>
                 </a:solidFill>
                 <a:latin typeface="Calibri" pitchFamily="34" charset="0"/>
                 <a:ea typeface="Calibri" pitchFamily="34" charset="-122"/>
@@ -3505,7 +3505,7 @@
             <a:r>
               <a:rPr lang="en-US" sz="1100" b="1" dirty="0">
                 <a:solidFill>
-                  <a:srgbClr val="8A93A5"/>
+                  <a:srgbClr val="94A3B8"/>
                 </a:solidFill>
                 <a:latin typeface="Calibri" pitchFamily="34" charset="0"/>
                 <a:ea typeface="Calibri" pitchFamily="34" charset="-122"/>
@@ -3544,7 +3544,7 @@
             <a:r>
               <a:rPr lang="en-US" sz="1100" b="1" dirty="0">
                 <a:solidFill>
-                  <a:srgbClr val="8A93A5"/>
+                  <a:srgbClr val="94A3B8"/>
                 </a:solidFill>
                 <a:latin typeface="Calibri" pitchFamily="34" charset="0"/>
                 <a:ea typeface="Calibri" pitchFamily="34" charset="-122"/>
@@ -3571,7 +3571,7 @@
             <a:avLst/>
           </a:prstGeom>
           <a:solidFill>
-            <a:srgbClr val="E3E7EE"/>
+            <a:srgbClr val="E2E8F0"/>
           </a:solidFill>
           <a:ln/>
         </p:spPr>
@@ -3603,7 +3603,7 @@
             <a:r>
               <a:rPr lang="en-US" sz="1250" dirty="0">
                 <a:solidFill>
-                  <a:srgbClr val="4A5468"/>
+                  <a:srgbClr val="475569"/>
                 </a:solidFill>
                 <a:latin typeface="Calibri" pitchFamily="34" charset="0"/>
                 <a:ea typeface="Calibri" pitchFamily="34" charset="-122"/>
@@ -3642,7 +3642,7 @@
             <a:r>
               <a:rPr lang="en-US" sz="1500" b="1" dirty="0">
                 <a:solidFill>
-                  <a:srgbClr val="1E2B4A"/>
+                  <a:srgbClr val="312E81"/>
                 </a:solidFill>
                 <a:latin typeface="Calibri" pitchFamily="34" charset="0"/>
                 <a:ea typeface="Calibri" pitchFamily="34" charset="-122"/>
@@ -3681,7 +3681,7 @@
             <a:r>
               <a:rPr lang="en-US" sz="1500" b="1" dirty="0">
                 <a:solidFill>
-                  <a:srgbClr val="1E2B4A"/>
+                  <a:srgbClr val="312E81"/>
                 </a:solidFill>
                 <a:latin typeface="Calibri" pitchFamily="34" charset="0"/>
                 <a:ea typeface="Calibri" pitchFamily="34" charset="-122"/>
@@ -3720,7 +3720,7 @@
             <a:r>
               <a:rPr lang="en-US" sz="1500" b="1" dirty="0">
                 <a:solidFill>
-                  <a:srgbClr val="D96F2B"/>
+                  <a:srgbClr val="D97706"/>
                 </a:solidFill>
                 <a:latin typeface="Calibri" pitchFamily="34" charset="0"/>
                 <a:ea typeface="Calibri" pitchFamily="34" charset="-122"/>
@@ -3747,7 +3747,7 @@
             <a:avLst/>
           </a:prstGeom>
           <a:solidFill>
-            <a:srgbClr val="E3E7EE"/>
+            <a:srgbClr val="E2E8F0"/>
           </a:solidFill>
           <a:ln/>
         </p:spPr>
@@ -3779,7 +3779,7 @@
             <a:r>
               <a:rPr lang="en-US" sz="1250" dirty="0">
                 <a:solidFill>
-                  <a:srgbClr val="4A5468"/>
+                  <a:srgbClr val="475569"/>
                 </a:solidFill>
                 <a:latin typeface="Calibri" pitchFamily="34" charset="0"/>
                 <a:ea typeface="Calibri" pitchFamily="34" charset="-122"/>
@@ -3818,7 +3818,7 @@
             <a:r>
               <a:rPr lang="en-US" sz="1500" b="1" dirty="0">
                 <a:solidFill>
-                  <a:srgbClr val="1E2B4A"/>
+                  <a:srgbClr val="312E81"/>
                 </a:solidFill>
                 <a:latin typeface="Calibri" pitchFamily="34" charset="0"/>
                 <a:ea typeface="Calibri" pitchFamily="34" charset="-122"/>
@@ -3857,7 +3857,7 @@
             <a:r>
               <a:rPr lang="en-US" sz="1500" b="1" dirty="0">
                 <a:solidFill>
-                  <a:srgbClr val="1E2B4A"/>
+                  <a:srgbClr val="312E81"/>
                 </a:solidFill>
                 <a:latin typeface="Calibri" pitchFamily="34" charset="0"/>
                 <a:ea typeface="Calibri" pitchFamily="34" charset="-122"/>
@@ -3896,7 +3896,7 @@
             <a:r>
               <a:rPr lang="en-US" sz="1500" b="1" dirty="0">
                 <a:solidFill>
-                  <a:srgbClr val="D96F2B"/>
+                  <a:srgbClr val="D97706"/>
                 </a:solidFill>
                 <a:latin typeface="Calibri" pitchFamily="34" charset="0"/>
                 <a:ea typeface="Calibri" pitchFamily="34" charset="-122"/>
@@ -3923,7 +3923,7 @@
             <a:avLst/>
           </a:prstGeom>
           <a:solidFill>
-            <a:srgbClr val="E3E7EE"/>
+            <a:srgbClr val="E2E8F0"/>
           </a:solidFill>
           <a:ln/>
         </p:spPr>
@@ -3955,7 +3955,7 @@
             <a:r>
               <a:rPr lang="en-US" sz="1250" dirty="0">
                 <a:solidFill>
-                  <a:srgbClr val="4A5468"/>
+                  <a:srgbClr val="475569"/>
                 </a:solidFill>
                 <a:latin typeface="Calibri" pitchFamily="34" charset="0"/>
                 <a:ea typeface="Calibri" pitchFamily="34" charset="-122"/>
@@ -3994,7 +3994,7 @@
             <a:r>
               <a:rPr lang="en-US" sz="1500" b="1" dirty="0">
                 <a:solidFill>
-                  <a:srgbClr val="1E2B4A"/>
+                  <a:srgbClr val="312E81"/>
                 </a:solidFill>
                 <a:latin typeface="Calibri" pitchFamily="34" charset="0"/>
                 <a:ea typeface="Calibri" pitchFamily="34" charset="-122"/>
@@ -4033,7 +4033,7 @@
             <a:r>
               <a:rPr lang="en-US" sz="1500" b="1" dirty="0">
                 <a:solidFill>
-                  <a:srgbClr val="1E2B4A"/>
+                  <a:srgbClr val="312E81"/>
                 </a:solidFill>
                 <a:latin typeface="Calibri" pitchFamily="34" charset="0"/>
                 <a:ea typeface="Calibri" pitchFamily="34" charset="-122"/>
@@ -4072,7 +4072,7 @@
             <a:r>
               <a:rPr lang="en-US" sz="1500" b="1" dirty="0">
                 <a:solidFill>
-                  <a:srgbClr val="D96F2B"/>
+                  <a:srgbClr val="D97706"/>
                 </a:solidFill>
                 <a:latin typeface="Calibri" pitchFamily="34" charset="0"/>
                 <a:ea typeface="Calibri" pitchFamily="34" charset="-122"/>
@@ -4114,7 +4114,7 @@
             <a:r>
               <a:rPr lang="en-US" sz="1100" dirty="0">
                 <a:solidFill>
-                  <a:srgbClr val="4A5468"/>
+                  <a:srgbClr val="475569"/>
                 </a:solidFill>
                 <a:latin typeface="Calibri" pitchFamily="34" charset="0"/>
                 <a:ea typeface="Calibri" pitchFamily="34" charset="-122"/>
@@ -4153,7 +4153,7 @@
             <a:r>
               <a:rPr lang="en-US" sz="1500" b="1" dirty="0">
                 <a:solidFill>
-                  <a:srgbClr val="1D2433"/>
+                  <a:srgbClr val="0F172A"/>
                 </a:solidFill>
                 <a:latin typeface="Calibri" pitchFamily="34" charset="0"/>
                 <a:ea typeface="Calibri" pitchFamily="34" charset="-122"/>
@@ -4192,7 +4192,7 @@
             <a:r>
               <a:rPr lang="en-US" sz="1250" b="1" dirty="0">
                 <a:solidFill>
-                  <a:srgbClr val="1D2433"/>
+                  <a:srgbClr val="0F172A"/>
                 </a:solidFill>
                 <a:latin typeface="Calibri" pitchFamily="34" charset="0"/>
                 <a:ea typeface="Calibri" pitchFamily="34" charset="-122"/>
@@ -4231,7 +4231,7 @@
             <a:r>
               <a:rPr lang="en-US" sz="1050" dirty="0">
                 <a:solidFill>
-                  <a:srgbClr val="8A93A5"/>
+                  <a:srgbClr val="94A3B8"/>
                 </a:solidFill>
                 <a:latin typeface="Calibri" pitchFamily="34" charset="0"/>
                 <a:ea typeface="Calibri" pitchFamily="34" charset="-122"/>
@@ -4260,7 +4260,7 @@
             </a:avLst>
           </a:prstGeom>
           <a:solidFill>
-            <a:srgbClr val="41639E"/>
+            <a:srgbClr val="4F46E5"/>
           </a:solidFill>
           <a:ln/>
         </p:spPr>
@@ -4292,7 +4292,7 @@
             <a:r>
               <a:rPr lang="en-US" sz="1150" b="1" dirty="0">
                 <a:solidFill>
-                  <a:srgbClr val="1D2433"/>
+                  <a:srgbClr val="0F172A"/>
                 </a:solidFill>
                 <a:latin typeface="Calibri" pitchFamily="34" charset="0"/>
                 <a:ea typeface="Calibri" pitchFamily="34" charset="-122"/>
@@ -4331,7 +4331,7 @@
             <a:r>
               <a:rPr lang="en-US" sz="1050" dirty="0">
                 <a:solidFill>
-                  <a:srgbClr val="8A93A5"/>
+                  <a:srgbClr val="94A3B8"/>
                 </a:solidFill>
                 <a:latin typeface="Calibri" pitchFamily="34" charset="0"/>
                 <a:ea typeface="Calibri" pitchFamily="34" charset="-122"/>
@@ -4360,7 +4360,7 @@
             </a:avLst>
           </a:prstGeom>
           <a:solidFill>
-            <a:srgbClr val="41639E"/>
+            <a:srgbClr val="4F46E5"/>
           </a:solidFill>
           <a:ln/>
         </p:spPr>
@@ -4392,7 +4392,7 @@
             <a:r>
               <a:rPr lang="en-US" sz="1150" b="1" dirty="0">
                 <a:solidFill>
-                  <a:srgbClr val="1D2433"/>
+                  <a:srgbClr val="0F172A"/>
                 </a:solidFill>
                 <a:latin typeface="Calibri" pitchFamily="34" charset="0"/>
                 <a:ea typeface="Calibri" pitchFamily="34" charset="-122"/>
@@ -4431,7 +4431,7 @@
             <a:r>
               <a:rPr lang="en-US" sz="1250" b="1" dirty="0">
                 <a:solidFill>
-                  <a:srgbClr val="1D2433"/>
+                  <a:srgbClr val="0F172A"/>
                 </a:solidFill>
                 <a:latin typeface="Calibri" pitchFamily="34" charset="0"/>
                 <a:ea typeface="Calibri" pitchFamily="34" charset="-122"/>
@@ -4470,7 +4470,7 @@
             <a:r>
               <a:rPr lang="en-US" sz="1050" dirty="0">
                 <a:solidFill>
-                  <a:srgbClr val="8A93A5"/>
+                  <a:srgbClr val="94A3B8"/>
                 </a:solidFill>
                 <a:latin typeface="Calibri" pitchFamily="34" charset="0"/>
                 <a:ea typeface="Calibri" pitchFamily="34" charset="-122"/>
@@ -4499,7 +4499,7 @@
             </a:avLst>
           </a:prstGeom>
           <a:solidFill>
-            <a:srgbClr val="D96F2B"/>
+            <a:srgbClr val="D97706"/>
           </a:solidFill>
           <a:ln/>
         </p:spPr>
@@ -4531,7 +4531,7 @@
             <a:r>
               <a:rPr lang="en-US" sz="1150" b="1" dirty="0">
                 <a:solidFill>
-                  <a:srgbClr val="1D2433"/>
+                  <a:srgbClr val="0F172A"/>
                 </a:solidFill>
                 <a:latin typeface="Calibri" pitchFamily="34" charset="0"/>
                 <a:ea typeface="Calibri" pitchFamily="34" charset="-122"/>
@@ -4570,7 +4570,7 @@
             <a:r>
               <a:rPr lang="en-US" sz="1050" dirty="0">
                 <a:solidFill>
-                  <a:srgbClr val="8A93A5"/>
+                  <a:srgbClr val="94A3B8"/>
                 </a:solidFill>
                 <a:latin typeface="Calibri" pitchFamily="34" charset="0"/>
                 <a:ea typeface="Calibri" pitchFamily="34" charset="-122"/>
@@ -4599,7 +4599,7 @@
             </a:avLst>
           </a:prstGeom>
           <a:solidFill>
-            <a:srgbClr val="D96F2B"/>
+            <a:srgbClr val="D97706"/>
           </a:solidFill>
           <a:ln/>
         </p:spPr>
@@ -4631,7 +4631,7 @@
             <a:r>
               <a:rPr lang="en-US" sz="1150" b="1" dirty="0">
                 <a:solidFill>
-                  <a:srgbClr val="1D2433"/>
+                  <a:srgbClr val="0F172A"/>
                 </a:solidFill>
                 <a:latin typeface="Calibri" pitchFamily="34" charset="0"/>
                 <a:ea typeface="Calibri" pitchFamily="34" charset="-122"/>
@@ -4673,7 +4673,7 @@
             <a:r>
               <a:rPr lang="en-US" sz="1100" dirty="0">
                 <a:solidFill>
-                  <a:srgbClr val="4A5468"/>
+                  <a:srgbClr val="475569"/>
                 </a:solidFill>
                 <a:latin typeface="Calibri" pitchFamily="34" charset="0"/>
                 <a:ea typeface="Calibri" pitchFamily="34" charset="-122"/>
@@ -4712,7 +4712,7 @@
             <a:r>
               <a:rPr lang="en-US" sz="900" dirty="0">
                 <a:solidFill>
-                  <a:srgbClr val="8A93A5"/>
+                  <a:srgbClr val="94A3B8"/>
                 </a:solidFill>
                 <a:latin typeface="Calibri" pitchFamily="34" charset="0"/>
                 <a:ea typeface="Calibri" pitchFamily="34" charset="-122"/>
@@ -4751,7 +4751,7 @@
             <a:r>
               <a:rPr lang="en-US" sz="950" dirty="0">
                 <a:solidFill>
-                  <a:srgbClr val="8A93A5"/>
+                  <a:srgbClr val="94A3B8"/>
                 </a:solidFill>
                 <a:latin typeface="Calibri" pitchFamily="34" charset="0"/>
                 <a:ea typeface="Calibri" pitchFamily="34" charset="-122"/>
@@ -4846,7 +4846,7 @@
             <a:r>
               <a:rPr lang="en-US" sz="2700" b="1" dirty="0">
                 <a:solidFill>
-                  <a:srgbClr val="1E2B4A"/>
+                  <a:srgbClr val="312E81"/>
                 </a:solidFill>
                 <a:latin typeface="Calibri" pitchFamily="34" charset="0"/>
                 <a:ea typeface="Calibri" pitchFamily="34" charset="-122"/>
@@ -4888,7 +4888,7 @@
             <a:r>
               <a:rPr lang="en-US" sz="1300" dirty="0">
                 <a:solidFill>
-                  <a:srgbClr val="4A5468"/>
+                  <a:srgbClr val="475569"/>
                 </a:solidFill>
                 <a:latin typeface="Calibri" pitchFamily="34" charset="0"/>
                 <a:ea typeface="Calibri" pitchFamily="34" charset="-122"/>
@@ -4927,7 +4927,7 @@
             <a:r>
               <a:rPr lang="en-US" sz="3000" b="1" dirty="0">
                 <a:solidFill>
-                  <a:srgbClr val="1E2B4A"/>
+                  <a:srgbClr val="312E81"/>
                 </a:solidFill>
                 <a:latin typeface="Calibri" pitchFamily="34" charset="0"/>
                 <a:ea typeface="Calibri" pitchFamily="34" charset="-122"/>
@@ -4969,7 +4969,7 @@
             <a:r>
               <a:rPr lang="en-US" sz="1050" dirty="0">
                 <a:solidFill>
-                  <a:srgbClr val="4A5468"/>
+                  <a:srgbClr val="475569"/>
                 </a:solidFill>
                 <a:latin typeface="Calibri" pitchFamily="34" charset="0"/>
                 <a:ea typeface="Calibri" pitchFamily="34" charset="-122"/>
@@ -4989,7 +4989,7 @@
             <a:r>
               <a:rPr lang="en-US" sz="1050" dirty="0">
                 <a:solidFill>
-                  <a:srgbClr val="4A5468"/>
+                  <a:srgbClr val="475569"/>
                 </a:solidFill>
                 <a:latin typeface="Calibri" pitchFamily="34" charset="0"/>
                 <a:ea typeface="Calibri" pitchFamily="34" charset="-122"/>
@@ -5028,7 +5028,7 @@
             <a:r>
               <a:rPr lang="en-US" sz="3000" b="1" dirty="0">
                 <a:solidFill>
-                  <a:srgbClr val="1E2B4A"/>
+                  <a:srgbClr val="312E81"/>
                 </a:solidFill>
                 <a:latin typeface="Calibri" pitchFamily="34" charset="0"/>
                 <a:ea typeface="Calibri" pitchFamily="34" charset="-122"/>
@@ -5070,7 +5070,7 @@
             <a:r>
               <a:rPr lang="en-US" sz="1050" dirty="0">
                 <a:solidFill>
-                  <a:srgbClr val="4A5468"/>
+                  <a:srgbClr val="475569"/>
                 </a:solidFill>
                 <a:latin typeface="Calibri" pitchFamily="34" charset="0"/>
                 <a:ea typeface="Calibri" pitchFamily="34" charset="-122"/>
@@ -5090,7 +5090,7 @@
             <a:r>
               <a:rPr lang="en-US" sz="1050" dirty="0">
                 <a:solidFill>
-                  <a:srgbClr val="4A5468"/>
+                  <a:srgbClr val="475569"/>
                 </a:solidFill>
                 <a:latin typeface="Calibri" pitchFamily="34" charset="0"/>
                 <a:ea typeface="Calibri" pitchFamily="34" charset="-122"/>
@@ -5129,7 +5129,7 @@
             <a:r>
               <a:rPr lang="en-US" sz="3000" b="1" dirty="0">
                 <a:solidFill>
-                  <a:srgbClr val="1E2B4A"/>
+                  <a:srgbClr val="312E81"/>
                 </a:solidFill>
                 <a:latin typeface="Calibri" pitchFamily="34" charset="0"/>
                 <a:ea typeface="Calibri" pitchFamily="34" charset="-122"/>
@@ -5171,7 +5171,7 @@
             <a:r>
               <a:rPr lang="en-US" sz="1050" dirty="0">
                 <a:solidFill>
-                  <a:srgbClr val="4A5468"/>
+                  <a:srgbClr val="475569"/>
                 </a:solidFill>
                 <a:latin typeface="Calibri" pitchFamily="34" charset="0"/>
                 <a:ea typeface="Calibri" pitchFamily="34" charset="-122"/>
@@ -5191,7 +5191,7 @@
             <a:r>
               <a:rPr lang="en-US" sz="1050" dirty="0">
                 <a:solidFill>
-                  <a:srgbClr val="4A5468"/>
+                  <a:srgbClr val="475569"/>
                 </a:solidFill>
                 <a:latin typeface="Calibri" pitchFamily="34" charset="0"/>
                 <a:ea typeface="Calibri" pitchFamily="34" charset="-122"/>
@@ -5230,7 +5230,7 @@
             <a:r>
               <a:rPr lang="en-US" sz="3000" b="1" dirty="0">
                 <a:solidFill>
-                  <a:srgbClr val="1E2B4A"/>
+                  <a:srgbClr val="312E81"/>
                 </a:solidFill>
                 <a:latin typeface="Calibri" pitchFamily="34" charset="0"/>
                 <a:ea typeface="Calibri" pitchFamily="34" charset="-122"/>
@@ -5272,7 +5272,7 @@
             <a:r>
               <a:rPr lang="en-US" sz="1050" dirty="0">
                 <a:solidFill>
-                  <a:srgbClr val="4A5468"/>
+                  <a:srgbClr val="475569"/>
                 </a:solidFill>
                 <a:latin typeface="Calibri" pitchFamily="34" charset="0"/>
                 <a:ea typeface="Calibri" pitchFamily="34" charset="-122"/>
@@ -5292,7 +5292,7 @@
             <a:r>
               <a:rPr lang="en-US" sz="1050" dirty="0">
                 <a:solidFill>
-                  <a:srgbClr val="4A5468"/>
+                  <a:srgbClr val="475569"/>
                 </a:solidFill>
                 <a:latin typeface="Calibri" pitchFamily="34" charset="0"/>
                 <a:ea typeface="Calibri" pitchFamily="34" charset="-122"/>
@@ -5331,7 +5331,7 @@
             <a:r>
               <a:rPr lang="en-US" sz="1400" b="1" dirty="0">
                 <a:solidFill>
-                  <a:srgbClr val="1D2433"/>
+                  <a:srgbClr val="0F172A"/>
                 </a:solidFill>
                 <a:latin typeface="Calibri" pitchFamily="34" charset="0"/>
                 <a:ea typeface="Calibri" pitchFamily="34" charset="-122"/>
@@ -5370,7 +5370,7 @@
             <a:r>
               <a:rPr lang="en-US" sz="1100" dirty="0">
                 <a:solidFill>
-                  <a:srgbClr val="4A5468"/>
+                  <a:srgbClr val="475569"/>
                 </a:solidFill>
                 <a:latin typeface="Calibri" pitchFamily="34" charset="0"/>
                 <a:ea typeface="Calibri" pitchFamily="34" charset="-122"/>
@@ -5399,7 +5399,7 @@
             </a:avLst>
           </a:prstGeom>
           <a:solidFill>
-            <a:srgbClr val="E3E7EE"/>
+            <a:srgbClr val="E2E8F0"/>
           </a:solidFill>
           <a:ln/>
         </p:spPr>
@@ -5421,7 +5421,7 @@
             </a:avLst>
           </a:prstGeom>
           <a:solidFill>
-            <a:srgbClr val="3E8C9A"/>
+            <a:srgbClr val="DB2777"/>
           </a:solidFill>
           <a:ln/>
         </p:spPr>
@@ -5453,7 +5453,7 @@
             <a:r>
               <a:rPr lang="en-US" sz="1100" b="1" dirty="0">
                 <a:solidFill>
-                  <a:srgbClr val="1D2433"/>
+                  <a:srgbClr val="0F172A"/>
                 </a:solidFill>
                 <a:latin typeface="Calibri" pitchFamily="34" charset="0"/>
                 <a:ea typeface="Calibri" pitchFamily="34" charset="-122"/>
@@ -5492,7 +5492,7 @@
             <a:r>
               <a:rPr lang="en-US" sz="1100" dirty="0">
                 <a:solidFill>
-                  <a:srgbClr val="4A5468"/>
+                  <a:srgbClr val="475569"/>
                 </a:solidFill>
                 <a:latin typeface="Calibri" pitchFamily="34" charset="0"/>
                 <a:ea typeface="Calibri" pitchFamily="34" charset="-122"/>
@@ -5521,7 +5521,7 @@
             </a:avLst>
           </a:prstGeom>
           <a:solidFill>
-            <a:srgbClr val="E3E7EE"/>
+            <a:srgbClr val="E2E8F0"/>
           </a:solidFill>
           <a:ln/>
         </p:spPr>
@@ -5543,7 +5543,7 @@
             </a:avLst>
           </a:prstGeom>
           <a:solidFill>
-            <a:srgbClr val="3E8C9A"/>
+            <a:srgbClr val="DB2777"/>
           </a:solidFill>
           <a:ln/>
         </p:spPr>
@@ -5575,7 +5575,7 @@
             <a:r>
               <a:rPr lang="en-US" sz="1100" b="1" dirty="0">
                 <a:solidFill>
-                  <a:srgbClr val="1D2433"/>
+                  <a:srgbClr val="0F172A"/>
                 </a:solidFill>
                 <a:latin typeface="Calibri" pitchFamily="34" charset="0"/>
                 <a:ea typeface="Calibri" pitchFamily="34" charset="-122"/>
@@ -5614,7 +5614,7 @@
             <a:r>
               <a:rPr lang="en-US" sz="1100" dirty="0">
                 <a:solidFill>
-                  <a:srgbClr val="4A5468"/>
+                  <a:srgbClr val="475569"/>
                 </a:solidFill>
                 <a:latin typeface="Calibri" pitchFamily="34" charset="0"/>
                 <a:ea typeface="Calibri" pitchFamily="34" charset="-122"/>
@@ -5643,7 +5643,7 @@
             </a:avLst>
           </a:prstGeom>
           <a:solidFill>
-            <a:srgbClr val="E3E7EE"/>
+            <a:srgbClr val="E2E8F0"/>
           </a:solidFill>
           <a:ln/>
         </p:spPr>
@@ -5665,7 +5665,7 @@
             </a:avLst>
           </a:prstGeom>
           <a:solidFill>
-            <a:srgbClr val="3E8C9A"/>
+            <a:srgbClr val="DB2777"/>
           </a:solidFill>
           <a:ln/>
         </p:spPr>
@@ -5697,7 +5697,7 @@
             <a:r>
               <a:rPr lang="en-US" sz="1100" b="1" dirty="0">
                 <a:solidFill>
-                  <a:srgbClr val="1D2433"/>
+                  <a:srgbClr val="0F172A"/>
                 </a:solidFill>
                 <a:latin typeface="Calibri" pitchFamily="34" charset="0"/>
                 <a:ea typeface="Calibri" pitchFamily="34" charset="-122"/>
@@ -5736,7 +5736,7 @@
             <a:r>
               <a:rPr lang="en-US" sz="1100" dirty="0">
                 <a:solidFill>
-                  <a:srgbClr val="4A5468"/>
+                  <a:srgbClr val="475569"/>
                 </a:solidFill>
                 <a:latin typeface="Calibri" pitchFamily="34" charset="0"/>
                 <a:ea typeface="Calibri" pitchFamily="34" charset="-122"/>
@@ -5765,7 +5765,7 @@
             </a:avLst>
           </a:prstGeom>
           <a:solidFill>
-            <a:srgbClr val="E3E7EE"/>
+            <a:srgbClr val="E2E8F0"/>
           </a:solidFill>
           <a:ln/>
         </p:spPr>
@@ -5787,7 +5787,7 @@
             </a:avLst>
           </a:prstGeom>
           <a:solidFill>
-            <a:srgbClr val="3E8C9A"/>
+            <a:srgbClr val="DB2777"/>
           </a:solidFill>
           <a:ln/>
         </p:spPr>
@@ -5819,7 +5819,7 @@
             <a:r>
               <a:rPr lang="en-US" sz="1100" b="1" dirty="0">
                 <a:solidFill>
-                  <a:srgbClr val="1D2433"/>
+                  <a:srgbClr val="0F172A"/>
                 </a:solidFill>
                 <a:latin typeface="Calibri" pitchFamily="34" charset="0"/>
                 <a:ea typeface="Calibri" pitchFamily="34" charset="-122"/>
@@ -5858,7 +5858,7 @@
             <a:r>
               <a:rPr lang="en-US" sz="1100" dirty="0">
                 <a:solidFill>
-                  <a:srgbClr val="4A5468"/>
+                  <a:srgbClr val="475569"/>
                 </a:solidFill>
                 <a:latin typeface="Calibri" pitchFamily="34" charset="0"/>
                 <a:ea typeface="Calibri" pitchFamily="34" charset="-122"/>
@@ -5887,7 +5887,7 @@
             </a:avLst>
           </a:prstGeom>
           <a:solidFill>
-            <a:srgbClr val="E3E7EE"/>
+            <a:srgbClr val="E2E8F0"/>
           </a:solidFill>
           <a:ln/>
         </p:spPr>
@@ -5909,7 +5909,7 @@
             </a:avLst>
           </a:prstGeom>
           <a:solidFill>
-            <a:srgbClr val="3E8C9A"/>
+            <a:srgbClr val="DB2777"/>
           </a:solidFill>
           <a:ln/>
         </p:spPr>
@@ -5941,7 +5941,7 @@
             <a:r>
               <a:rPr lang="en-US" sz="1100" b="1" dirty="0">
                 <a:solidFill>
-                  <a:srgbClr val="1D2433"/>
+                  <a:srgbClr val="0F172A"/>
                 </a:solidFill>
                 <a:latin typeface="Calibri" pitchFamily="34" charset="0"/>
                 <a:ea typeface="Calibri" pitchFamily="34" charset="-122"/>
@@ -5980,7 +5980,7 @@
             <a:r>
               <a:rPr lang="en-US" sz="1100" dirty="0">
                 <a:solidFill>
-                  <a:srgbClr val="4A5468"/>
+                  <a:srgbClr val="475569"/>
                 </a:solidFill>
                 <a:latin typeface="Calibri" pitchFamily="34" charset="0"/>
                 <a:ea typeface="Calibri" pitchFamily="34" charset="-122"/>
@@ -6009,7 +6009,7 @@
             </a:avLst>
           </a:prstGeom>
           <a:solidFill>
-            <a:srgbClr val="E3E7EE"/>
+            <a:srgbClr val="E2E8F0"/>
           </a:solidFill>
           <a:ln/>
         </p:spPr>
@@ -6031,7 +6031,7 @@
             </a:avLst>
           </a:prstGeom>
           <a:solidFill>
-            <a:srgbClr val="3E8C9A"/>
+            <a:srgbClr val="DB2777"/>
           </a:solidFill>
           <a:ln/>
         </p:spPr>
@@ -6063,7 +6063,7 @@
             <a:r>
               <a:rPr lang="en-US" sz="1100" b="1" dirty="0">
                 <a:solidFill>
-                  <a:srgbClr val="1D2433"/>
+                  <a:srgbClr val="0F172A"/>
                 </a:solidFill>
                 <a:latin typeface="Calibri" pitchFamily="34" charset="0"/>
                 <a:ea typeface="Calibri" pitchFamily="34" charset="-122"/>
@@ -6102,7 +6102,7 @@
             <a:r>
               <a:rPr lang="en-US" sz="900" dirty="0">
                 <a:solidFill>
-                  <a:srgbClr val="8A93A5"/>
+                  <a:srgbClr val="94A3B8"/>
                 </a:solidFill>
                 <a:latin typeface="Calibri" pitchFamily="34" charset="0"/>
                 <a:ea typeface="Calibri" pitchFamily="34" charset="-122"/>
@@ -6141,7 +6141,7 @@
             <a:r>
               <a:rPr lang="en-US" sz="950" dirty="0">
                 <a:solidFill>
-                  <a:srgbClr val="8A93A5"/>
+                  <a:srgbClr val="94A3B8"/>
                 </a:solidFill>
                 <a:latin typeface="Calibri" pitchFamily="34" charset="0"/>
                 <a:ea typeface="Calibri" pitchFamily="34" charset="-122"/>
@@ -6236,7 +6236,7 @@
             <a:r>
               <a:rPr lang="en-US" sz="2700" b="1" dirty="0">
                 <a:solidFill>
-                  <a:srgbClr val="1E2B4A"/>
+                  <a:srgbClr val="312E81"/>
                 </a:solidFill>
                 <a:latin typeface="Calibri" pitchFamily="34" charset="0"/>
                 <a:ea typeface="Calibri" pitchFamily="34" charset="-122"/>
@@ -6265,7 +6265,7 @@
             </a:avLst>
           </a:prstGeom>
           <a:solidFill>
-            <a:srgbClr val="1E2B4A"/>
+            <a:srgbClr val="312E81"/>
           </a:solidFill>
           <a:ln/>
         </p:spPr>
@@ -6336,7 +6336,7 @@
             <a:r>
               <a:rPr lang="en-US" sz="1400" b="1" dirty="0">
                 <a:solidFill>
-                  <a:srgbClr val="D96F2B"/>
+                  <a:srgbClr val="D97706"/>
                 </a:solidFill>
                 <a:latin typeface="Calibri" pitchFamily="34" charset="0"/>
                 <a:ea typeface="Calibri" pitchFamily="34" charset="-122"/>
@@ -6417,7 +6417,7 @@
             <a:r>
               <a:rPr lang="en-US" sz="1500" b="1" dirty="0">
                 <a:solidFill>
-                  <a:srgbClr val="D96F2B"/>
+                  <a:srgbClr val="D97706"/>
                 </a:solidFill>
                 <a:latin typeface="Calibri" pitchFamily="34" charset="0"/>
                 <a:ea typeface="Calibri" pitchFamily="34" charset="-122"/>
@@ -6456,7 +6456,7 @@
             <a:r>
               <a:rPr lang="en-US" sz="1350" b="1" dirty="0">
                 <a:solidFill>
-                  <a:srgbClr val="1D2433"/>
+                  <a:srgbClr val="0F172A"/>
                 </a:solidFill>
                 <a:latin typeface="Calibri" pitchFamily="34" charset="0"/>
                 <a:ea typeface="Calibri" pitchFamily="34" charset="-122"/>
@@ -6485,7 +6485,7 @@
             </a:avLst>
           </a:prstGeom>
           <a:solidFill>
-            <a:srgbClr val="D96F2B"/>
+            <a:srgbClr val="D97706"/>
           </a:solidFill>
           <a:ln/>
         </p:spPr>
@@ -6517,7 +6517,7 @@
             <a:r>
               <a:rPr lang="en-US" sz="1500" b="1" dirty="0">
                 <a:solidFill>
-                  <a:srgbClr val="1D2433"/>
+                  <a:srgbClr val="0F172A"/>
                 </a:solidFill>
                 <a:latin typeface="Calibri" pitchFamily="34" charset="0"/>
                 <a:ea typeface="Calibri" pitchFamily="34" charset="-122"/>
@@ -6559,7 +6559,7 @@
             <a:r>
               <a:rPr lang="en-US" sz="1150" b="1" dirty="0">
                 <a:solidFill>
-                  <a:srgbClr val="4A5468"/>
+                  <a:srgbClr val="475569"/>
                 </a:solidFill>
                 <a:latin typeface="Calibri" pitchFamily="34" charset="0"/>
                 <a:ea typeface="Calibri" pitchFamily="34" charset="-122"/>
@@ -6588,7 +6588,7 @@
             </a:avLst>
           </a:prstGeom>
           <a:solidFill>
-            <a:srgbClr val="41639E"/>
+            <a:srgbClr val="4F46E5"/>
           </a:solidFill>
           <a:ln/>
         </p:spPr>
@@ -6620,7 +6620,7 @@
             <a:r>
               <a:rPr lang="en-US" sz="1500" b="1" dirty="0">
                 <a:solidFill>
-                  <a:srgbClr val="1D2433"/>
+                  <a:srgbClr val="0F172A"/>
                 </a:solidFill>
                 <a:latin typeface="Calibri" pitchFamily="34" charset="0"/>
                 <a:ea typeface="Calibri" pitchFamily="34" charset="-122"/>
@@ -6662,7 +6662,7 @@
             <a:r>
               <a:rPr lang="en-US" sz="1150" b="1" dirty="0">
                 <a:solidFill>
-                  <a:srgbClr val="4A5468"/>
+                  <a:srgbClr val="475569"/>
                 </a:solidFill>
                 <a:latin typeface="Calibri" pitchFamily="34" charset="0"/>
                 <a:ea typeface="Calibri" pitchFamily="34" charset="-122"/>
@@ -6682,7 +6682,7 @@
             <a:r>
               <a:rPr lang="en-US" sz="1150" b="1" dirty="0">
                 <a:solidFill>
-                  <a:srgbClr val="4A5468"/>
+                  <a:srgbClr val="475569"/>
                 </a:solidFill>
                 <a:latin typeface="Calibri" pitchFamily="34" charset="0"/>
                 <a:ea typeface="Calibri" pitchFamily="34" charset="-122"/>
@@ -6709,7 +6709,7 @@
             <a:avLst/>
           </a:prstGeom>
           <a:solidFill>
-            <a:srgbClr val="CFD4DD"/>
+            <a:srgbClr val="CBD5E1"/>
           </a:solidFill>
           <a:ln/>
         </p:spPr>
@@ -6741,7 +6741,7 @@
             <a:r>
               <a:rPr lang="en-US" sz="1100" dirty="0">
                 <a:solidFill>
-                  <a:srgbClr val="4A5468"/>
+                  <a:srgbClr val="475569"/>
                 </a:solidFill>
                 <a:latin typeface="Calibri" pitchFamily="34" charset="0"/>
                 <a:ea typeface="Calibri" pitchFamily="34" charset="-122"/>
@@ -6780,7 +6780,7 @@
             <a:r>
               <a:rPr lang="en-US" sz="1350" b="1" dirty="0">
                 <a:solidFill>
-                  <a:srgbClr val="1D2433"/>
+                  <a:srgbClr val="0F172A"/>
                 </a:solidFill>
                 <a:latin typeface="Calibri" pitchFamily="34" charset="0"/>
                 <a:ea typeface="Calibri" pitchFamily="34" charset="-122"/>
@@ -6822,7 +6822,7 @@
             <a:r>
               <a:rPr lang="en-US" sz="1100" dirty="0">
                 <a:solidFill>
-                  <a:srgbClr val="4A5468"/>
+                  <a:srgbClr val="475569"/>
                 </a:solidFill>
                 <a:latin typeface="Calibri" pitchFamily="34" charset="0"/>
                 <a:ea typeface="Calibri" pitchFamily="34" charset="-122"/>
@@ -6861,7 +6861,7 @@
             <a:r>
               <a:rPr lang="en-US" sz="1500" b="1" dirty="0">
                 <a:solidFill>
-                  <a:srgbClr val="1E2B4A"/>
+                  <a:srgbClr val="312E81"/>
                 </a:solidFill>
                 <a:latin typeface="Calibri" pitchFamily="34" charset="0"/>
                 <a:ea typeface="Calibri" pitchFamily="34" charset="-122"/>
@@ -6888,7 +6888,7 @@
             <a:avLst/>
           </a:prstGeom>
           <a:solidFill>
-            <a:srgbClr val="E3E7EE"/>
+            <a:srgbClr val="E2E8F0"/>
           </a:solidFill>
           <a:ln/>
         </p:spPr>
@@ -6923,7 +6923,7 @@
             <a:r>
               <a:rPr lang="en-US" sz="1100" dirty="0">
                 <a:solidFill>
-                  <a:srgbClr val="4A5468"/>
+                  <a:srgbClr val="475569"/>
                 </a:solidFill>
                 <a:latin typeface="Calibri" pitchFamily="34" charset="0"/>
                 <a:ea typeface="Calibri" pitchFamily="34" charset="-122"/>
@@ -6962,7 +6962,7 @@
             <a:r>
               <a:rPr lang="en-US" sz="1500" b="1" dirty="0">
                 <a:solidFill>
-                  <a:srgbClr val="1E2B4A"/>
+                  <a:srgbClr val="312E81"/>
                 </a:solidFill>
                 <a:latin typeface="Calibri" pitchFamily="34" charset="0"/>
                 <a:ea typeface="Calibri" pitchFamily="34" charset="-122"/>
@@ -6989,7 +6989,7 @@
             <a:avLst/>
           </a:prstGeom>
           <a:solidFill>
-            <a:srgbClr val="E3E7EE"/>
+            <a:srgbClr val="E2E8F0"/>
           </a:solidFill>
           <a:ln/>
         </p:spPr>
@@ -7024,7 +7024,7 @@
             <a:r>
               <a:rPr lang="en-US" sz="1100" dirty="0">
                 <a:solidFill>
-                  <a:srgbClr val="4A5468"/>
+                  <a:srgbClr val="475569"/>
                 </a:solidFill>
                 <a:latin typeface="Calibri" pitchFamily="34" charset="0"/>
                 <a:ea typeface="Calibri" pitchFamily="34" charset="-122"/>
@@ -7063,7 +7063,7 @@
             <a:r>
               <a:rPr lang="en-US" sz="1500" b="1" dirty="0">
                 <a:solidFill>
-                  <a:srgbClr val="1E2B4A"/>
+                  <a:srgbClr val="312E81"/>
                 </a:solidFill>
                 <a:latin typeface="Calibri" pitchFamily="34" charset="0"/>
                 <a:ea typeface="Calibri" pitchFamily="34" charset="-122"/>
@@ -7090,7 +7090,7 @@
             <a:avLst/>
           </a:prstGeom>
           <a:solidFill>
-            <a:srgbClr val="E3E7EE"/>
+            <a:srgbClr val="E2E8F0"/>
           </a:solidFill>
           <a:ln/>
         </p:spPr>
@@ -7125,7 +7125,7 @@
             <a:r>
               <a:rPr lang="en-US" sz="1100" dirty="0">
                 <a:solidFill>
-                  <a:srgbClr val="4A5468"/>
+                  <a:srgbClr val="475569"/>
                 </a:solidFill>
                 <a:latin typeface="Calibri" pitchFamily="34" charset="0"/>
                 <a:ea typeface="Calibri" pitchFamily="34" charset="-122"/>
@@ -7164,7 +7164,7 @@
             <a:r>
               <a:rPr lang="en-US" sz="1500" b="1" dirty="0">
                 <a:solidFill>
-                  <a:srgbClr val="8A93A5"/>
+                  <a:srgbClr val="94A3B8"/>
                 </a:solidFill>
                 <a:latin typeface="Calibri" pitchFamily="34" charset="0"/>
                 <a:ea typeface="Calibri" pitchFamily="34" charset="-122"/>
@@ -7191,7 +7191,7 @@
             <a:avLst/>
           </a:prstGeom>
           <a:solidFill>
-            <a:srgbClr val="E3E7EE"/>
+            <a:srgbClr val="E2E8F0"/>
           </a:solidFill>
           <a:ln/>
         </p:spPr>
@@ -7226,7 +7226,7 @@
             <a:r>
               <a:rPr lang="en-US" sz="1050" dirty="0">
                 <a:solidFill>
-                  <a:srgbClr val="4A5468"/>
+                  <a:srgbClr val="475569"/>
                 </a:solidFill>
                 <a:latin typeface="Calibri" pitchFamily="34" charset="0"/>
                 <a:ea typeface="Calibri" pitchFamily="34" charset="-122"/>
@@ -7265,7 +7265,7 @@
             <a:r>
               <a:rPr lang="en-US" sz="900" dirty="0">
                 <a:solidFill>
-                  <a:srgbClr val="8A93A5"/>
+                  <a:srgbClr val="94A3B8"/>
                 </a:solidFill>
                 <a:latin typeface="Calibri" pitchFamily="34" charset="0"/>
                 <a:ea typeface="Calibri" pitchFamily="34" charset="-122"/>
@@ -7304,7 +7304,7 @@
             <a:r>
               <a:rPr lang="en-US" sz="950" dirty="0">
                 <a:solidFill>
-                  <a:srgbClr val="8A93A5"/>
+                  <a:srgbClr val="94A3B8"/>
                 </a:solidFill>
                 <a:latin typeface="Calibri" pitchFamily="34" charset="0"/>
                 <a:ea typeface="Calibri" pitchFamily="34" charset="-122"/>
@@ -7399,7 +7399,7 @@
             <a:r>
               <a:rPr lang="en-US" sz="2700" b="1" dirty="0">
                 <a:solidFill>
-                  <a:srgbClr val="1E2B4A"/>
+                  <a:srgbClr val="312E81"/>
                 </a:solidFill>
                 <a:latin typeface="Calibri" pitchFamily="34" charset="0"/>
                 <a:ea typeface="Calibri" pitchFamily="34" charset="-122"/>
@@ -7441,7 +7441,7 @@
             <a:r>
               <a:rPr lang="en-US" sz="1300" dirty="0">
                 <a:solidFill>
-                  <a:srgbClr val="4A5468"/>
+                  <a:srgbClr val="475569"/>
                 </a:solidFill>
                 <a:latin typeface="Calibri" pitchFamily="34" charset="0"/>
                 <a:ea typeface="Calibri" pitchFamily="34" charset="-122"/>
@@ -7480,7 +7480,7 @@
             <a:r>
               <a:rPr lang="en-US" sz="1400" b="1" dirty="0">
                 <a:solidFill>
-                  <a:srgbClr val="1D2433"/>
+                  <a:srgbClr val="0F172A"/>
                 </a:solidFill>
                 <a:latin typeface="Calibri" pitchFamily="34" charset="0"/>
                 <a:ea typeface="Calibri" pitchFamily="34" charset="-122"/>
@@ -7519,7 +7519,7 @@
             <a:r>
               <a:rPr lang="en-US" sz="1150" b="1" dirty="0">
                 <a:solidFill>
-                  <a:srgbClr val="1D2433"/>
+                  <a:srgbClr val="0F172A"/>
                 </a:solidFill>
                 <a:latin typeface="Calibri" pitchFamily="34" charset="0"/>
                 <a:ea typeface="Calibri" pitchFamily="34" charset="-122"/>
@@ -7548,7 +7548,7 @@
             </a:avLst>
           </a:prstGeom>
           <a:solidFill>
-            <a:srgbClr val="D96F2B"/>
+            <a:srgbClr val="D97706"/>
           </a:solidFill>
           <a:ln/>
         </p:spPr>
@@ -7580,7 +7580,7 @@
             <a:r>
               <a:rPr lang="en-US" sz="1200" b="1" dirty="0">
                 <a:solidFill>
-                  <a:srgbClr val="1D2433"/>
+                  <a:srgbClr val="0F172A"/>
                 </a:solidFill>
                 <a:latin typeface="Calibri" pitchFamily="34" charset="0"/>
                 <a:ea typeface="Calibri" pitchFamily="34" charset="-122"/>
@@ -7619,7 +7619,7 @@
             <a:r>
               <a:rPr lang="en-US" sz="1400" b="1" dirty="0">
                 <a:solidFill>
-                  <a:srgbClr val="D96F2B"/>
+                  <a:srgbClr val="D97706"/>
                 </a:solidFill>
                 <a:latin typeface="Calibri" pitchFamily="34" charset="0"/>
                 <a:ea typeface="Calibri" pitchFamily="34" charset="-122"/>
@@ -7658,7 +7658,7 @@
             <a:r>
               <a:rPr lang="en-US" sz="1150" dirty="0">
                 <a:solidFill>
-                  <a:srgbClr val="4A5468"/>
+                  <a:srgbClr val="475569"/>
                 </a:solidFill>
                 <a:latin typeface="Calibri" pitchFamily="34" charset="0"/>
                 <a:ea typeface="Calibri" pitchFamily="34" charset="-122"/>
@@ -7687,7 +7687,7 @@
             </a:avLst>
           </a:prstGeom>
           <a:solidFill>
-            <a:srgbClr val="E3E7EE"/>
+            <a:srgbClr val="E2E8F0"/>
           </a:solidFill>
           <a:ln/>
         </p:spPr>
@@ -7719,7 +7719,7 @@
             <a:r>
               <a:rPr lang="en-US" sz="1200" b="1" dirty="0">
                 <a:solidFill>
-                  <a:srgbClr val="1D2433"/>
+                  <a:srgbClr val="0F172A"/>
                 </a:solidFill>
                 <a:latin typeface="Calibri" pitchFamily="34" charset="0"/>
                 <a:ea typeface="Calibri" pitchFamily="34" charset="-122"/>
@@ -7758,7 +7758,7 @@
             <a:r>
               <a:rPr lang="en-US" sz="1150" dirty="0">
                 <a:solidFill>
-                  <a:srgbClr val="4A5468"/>
+                  <a:srgbClr val="475569"/>
                 </a:solidFill>
                 <a:latin typeface="Calibri" pitchFamily="34" charset="0"/>
                 <a:ea typeface="Calibri" pitchFamily="34" charset="-122"/>
@@ -7787,7 +7787,7 @@
             </a:avLst>
           </a:prstGeom>
           <a:solidFill>
-            <a:srgbClr val="E3E7EE"/>
+            <a:srgbClr val="E2E8F0"/>
           </a:solidFill>
           <a:ln/>
         </p:spPr>
@@ -7819,7 +7819,7 @@
             <a:r>
               <a:rPr lang="en-US" sz="1200" b="1" dirty="0">
                 <a:solidFill>
-                  <a:srgbClr val="1D2433"/>
+                  <a:srgbClr val="0F172A"/>
                 </a:solidFill>
                 <a:latin typeface="Calibri" pitchFamily="34" charset="0"/>
                 <a:ea typeface="Calibri" pitchFamily="34" charset="-122"/>
@@ -7858,7 +7858,7 @@
             <a:r>
               <a:rPr lang="en-US" sz="1150" dirty="0">
                 <a:solidFill>
-                  <a:srgbClr val="4A5468"/>
+                  <a:srgbClr val="475569"/>
                 </a:solidFill>
                 <a:latin typeface="Calibri" pitchFamily="34" charset="0"/>
                 <a:ea typeface="Calibri" pitchFamily="34" charset="-122"/>
@@ -7887,7 +7887,7 @@
             </a:avLst>
           </a:prstGeom>
           <a:solidFill>
-            <a:srgbClr val="E3E7EE"/>
+            <a:srgbClr val="E2E8F0"/>
           </a:solidFill>
           <a:ln/>
         </p:spPr>
@@ -7919,7 +7919,7 @@
             <a:r>
               <a:rPr lang="en-US" sz="1200" b="1" dirty="0">
                 <a:solidFill>
-                  <a:srgbClr val="1D2433"/>
+                  <a:srgbClr val="0F172A"/>
                 </a:solidFill>
                 <a:latin typeface="Calibri" pitchFamily="34" charset="0"/>
                 <a:ea typeface="Calibri" pitchFamily="34" charset="-122"/>
@@ -7958,7 +7958,7 @@
             <a:r>
               <a:rPr lang="en-US" sz="1150" dirty="0">
                 <a:solidFill>
-                  <a:srgbClr val="4A5468"/>
+                  <a:srgbClr val="475569"/>
                 </a:solidFill>
                 <a:latin typeface="Calibri" pitchFamily="34" charset="0"/>
                 <a:ea typeface="Calibri" pitchFamily="34" charset="-122"/>
@@ -7987,7 +7987,7 @@
             </a:avLst>
           </a:prstGeom>
           <a:solidFill>
-            <a:srgbClr val="E3E7EE"/>
+            <a:srgbClr val="E2E8F0"/>
           </a:solidFill>
           <a:ln/>
         </p:spPr>
@@ -8019,7 +8019,7 @@
             <a:r>
               <a:rPr lang="en-US" sz="1200" b="1" dirty="0">
                 <a:solidFill>
-                  <a:srgbClr val="1D2433"/>
+                  <a:srgbClr val="0F172A"/>
                 </a:solidFill>
                 <a:latin typeface="Calibri" pitchFamily="34" charset="0"/>
                 <a:ea typeface="Calibri" pitchFamily="34" charset="-122"/>
@@ -8058,7 +8058,7 @@
             <a:r>
               <a:rPr lang="en-US" sz="1150" dirty="0">
                 <a:solidFill>
-                  <a:srgbClr val="4A5468"/>
+                  <a:srgbClr val="475569"/>
                 </a:solidFill>
                 <a:latin typeface="Calibri" pitchFamily="34" charset="0"/>
                 <a:ea typeface="Calibri" pitchFamily="34" charset="-122"/>
@@ -8087,7 +8087,7 @@
             </a:avLst>
           </a:prstGeom>
           <a:solidFill>
-            <a:srgbClr val="E3E7EE"/>
+            <a:srgbClr val="E2E8F0"/>
           </a:solidFill>
           <a:ln/>
         </p:spPr>
@@ -8119,7 +8119,7 @@
             <a:r>
               <a:rPr lang="en-US" sz="1200" b="1" dirty="0">
                 <a:solidFill>
-                  <a:srgbClr val="1D2433"/>
+                  <a:srgbClr val="0F172A"/>
                 </a:solidFill>
                 <a:latin typeface="Calibri" pitchFamily="34" charset="0"/>
                 <a:ea typeface="Calibri" pitchFamily="34" charset="-122"/>
@@ -8158,7 +8158,7 @@
             <a:r>
               <a:rPr lang="en-US" sz="1150" dirty="0">
                 <a:solidFill>
-                  <a:srgbClr val="4A5468"/>
+                  <a:srgbClr val="475569"/>
                 </a:solidFill>
                 <a:latin typeface="Calibri" pitchFamily="34" charset="0"/>
                 <a:ea typeface="Calibri" pitchFamily="34" charset="-122"/>
@@ -8187,7 +8187,7 @@
             </a:avLst>
           </a:prstGeom>
           <a:solidFill>
-            <a:srgbClr val="E3E7EE"/>
+            <a:srgbClr val="E2E8F0"/>
           </a:solidFill>
           <a:ln/>
         </p:spPr>
@@ -8219,7 +8219,7 @@
             <a:r>
               <a:rPr lang="en-US" sz="1200" b="1" dirty="0">
                 <a:solidFill>
-                  <a:srgbClr val="1D2433"/>
+                  <a:srgbClr val="0F172A"/>
                 </a:solidFill>
                 <a:latin typeface="Calibri" pitchFamily="34" charset="0"/>
                 <a:ea typeface="Calibri" pitchFamily="34" charset="-122"/>
@@ -8248,7 +8248,7 @@
             </a:avLst>
           </a:prstGeom>
           <a:solidFill>
-            <a:srgbClr val="F7EAE4"/>
+            <a:srgbClr val="FEF3C7"/>
           </a:solidFill>
           <a:ln/>
         </p:spPr>
@@ -8268,17 +8268,17 @@
             <a:avLst/>
           </a:prstGeom>
           <a:solidFill>
-            <a:srgbClr val="F9E8DD"/>
+            <a:srgbClr val="F9E9D7"/>
           </a:solidFill>
           <a:ln w="15875">
             <a:solidFill>
-              <a:srgbClr val="F1CBB3"/>
+              <a:srgbClr val="F1CEA5"/>
             </a:solidFill>
             <a:prstDash val="solid"/>
           </a:ln>
           <a:effectLst>
             <a:outerShdw sx="100000" sy="100000" kx="0" ky="0" algn="bl" rotWithShape="0" blurRad="127000" dist="25400" dir="5400000">
-              <a:srgbClr val="1E2B4A">
+              <a:srgbClr val="312E81">
                 <a:alpha val="8000"/>
               </a:srgbClr>
             </a:outerShdw>
@@ -8339,7 +8339,7 @@
             <a:r>
               <a:rPr lang="en-US" sz="1400" b="1" dirty="0">
                 <a:solidFill>
-                  <a:srgbClr val="1D2433"/>
+                  <a:srgbClr val="0F172A"/>
                 </a:solidFill>
                 <a:latin typeface="Calibri" pitchFamily="34" charset="0"/>
                 <a:ea typeface="Calibri" pitchFamily="34" charset="-122"/>
@@ -8381,7 +8381,7 @@
             <a:r>
               <a:rPr lang="en-US" sz="1100" dirty="0">
                 <a:solidFill>
-                  <a:srgbClr val="4A5468"/>
+                  <a:srgbClr val="475569"/>
                 </a:solidFill>
                 <a:latin typeface="Calibri" pitchFamily="34" charset="0"/>
                 <a:ea typeface="Calibri" pitchFamily="34" charset="-122"/>
@@ -8420,7 +8420,7 @@
             <a:r>
               <a:rPr lang="en-US" sz="1400" b="1" dirty="0">
                 <a:solidFill>
-                  <a:srgbClr val="1D2433"/>
+                  <a:srgbClr val="0F172A"/>
                 </a:solidFill>
                 <a:latin typeface="Calibri" pitchFamily="34" charset="0"/>
                 <a:ea typeface="Calibri" pitchFamily="34" charset="-122"/>
@@ -8459,7 +8459,7 @@
             <a:r>
               <a:rPr lang="en-US" sz="1150" dirty="0">
                 <a:solidFill>
-                  <a:srgbClr val="4A5468"/>
+                  <a:srgbClr val="475569"/>
                 </a:solidFill>
                 <a:latin typeface="Calibri" pitchFamily="34" charset="0"/>
                 <a:ea typeface="Calibri" pitchFamily="34" charset="-122"/>
@@ -8498,7 +8498,7 @@
             <a:r>
               <a:rPr lang="en-US" sz="1150" b="1" dirty="0">
                 <a:solidFill>
-                  <a:srgbClr val="1D2433"/>
+                  <a:srgbClr val="0F172A"/>
                 </a:solidFill>
                 <a:latin typeface="Calibri" pitchFamily="34" charset="0"/>
                 <a:ea typeface="Calibri" pitchFamily="34" charset="-122"/>
@@ -8537,7 +8537,7 @@
             <a:r>
               <a:rPr lang="en-US" sz="1150" dirty="0">
                 <a:solidFill>
-                  <a:srgbClr val="4A5468"/>
+                  <a:srgbClr val="475569"/>
                 </a:solidFill>
                 <a:latin typeface="Calibri" pitchFamily="34" charset="0"/>
                 <a:ea typeface="Calibri" pitchFamily="34" charset="-122"/>
@@ -8576,7 +8576,7 @@
             <a:r>
               <a:rPr lang="en-US" sz="1150" b="1" dirty="0">
                 <a:solidFill>
-                  <a:srgbClr val="1D2433"/>
+                  <a:srgbClr val="0F172A"/>
                 </a:solidFill>
                 <a:latin typeface="Calibri" pitchFamily="34" charset="0"/>
                 <a:ea typeface="Calibri" pitchFamily="34" charset="-122"/>
@@ -8615,7 +8615,7 @@
             <a:r>
               <a:rPr lang="en-US" sz="1150" dirty="0">
                 <a:solidFill>
-                  <a:srgbClr val="4A5468"/>
+                  <a:srgbClr val="475569"/>
                 </a:solidFill>
                 <a:latin typeface="Calibri" pitchFamily="34" charset="0"/>
                 <a:ea typeface="Calibri" pitchFamily="34" charset="-122"/>
@@ -8654,7 +8654,7 @@
             <a:r>
               <a:rPr lang="en-US" sz="1150" b="1" dirty="0">
                 <a:solidFill>
-                  <a:srgbClr val="1D2433"/>
+                  <a:srgbClr val="0F172A"/>
                 </a:solidFill>
                 <a:latin typeface="Calibri" pitchFamily="34" charset="0"/>
                 <a:ea typeface="Calibri" pitchFamily="34" charset="-122"/>
@@ -8732,7 +8732,7 @@
             <a:r>
               <a:rPr lang="en-US" sz="900" dirty="0">
                 <a:solidFill>
-                  <a:srgbClr val="8A93A5"/>
+                  <a:srgbClr val="94A3B8"/>
                 </a:solidFill>
                 <a:latin typeface="Calibri" pitchFamily="34" charset="0"/>
                 <a:ea typeface="Calibri" pitchFamily="34" charset="-122"/>
@@ -8771,7 +8771,7 @@
             <a:r>
               <a:rPr lang="en-US" sz="950" dirty="0">
                 <a:solidFill>
-                  <a:srgbClr val="8A93A5"/>
+                  <a:srgbClr val="94A3B8"/>
                 </a:solidFill>
                 <a:latin typeface="Calibri" pitchFamily="34" charset="0"/>
                 <a:ea typeface="Calibri" pitchFamily="34" charset="-122"/>
@@ -8866,7 +8866,7 @@
             <a:r>
               <a:rPr lang="en-US" sz="2700" b="1" dirty="0">
                 <a:solidFill>
-                  <a:srgbClr val="1E2B4A"/>
+                  <a:srgbClr val="312E81"/>
                 </a:solidFill>
                 <a:latin typeface="Calibri" pitchFamily="34" charset="0"/>
                 <a:ea typeface="Calibri" pitchFamily="34" charset="-122"/>
@@ -8908,7 +8908,7 @@
             <a:r>
               <a:rPr lang="en-US" sz="1300" dirty="0">
                 <a:solidFill>
-                  <a:srgbClr val="4A5468"/>
+                  <a:srgbClr val="475569"/>
                 </a:solidFill>
                 <a:latin typeface="Calibri" pitchFamily="34" charset="0"/>
                 <a:ea typeface="Calibri" pitchFamily="34" charset="-122"/>
@@ -8947,7 +8947,7 @@
             <a:r>
               <a:rPr lang="en-US" sz="1400" b="1" dirty="0">
                 <a:solidFill>
-                  <a:srgbClr val="1D2433"/>
+                  <a:srgbClr val="0F172A"/>
                 </a:solidFill>
                 <a:latin typeface="Calibri" pitchFamily="34" charset="0"/>
                 <a:ea typeface="Calibri" pitchFamily="34" charset="-122"/>
@@ -8986,7 +8986,7 @@
             <a:r>
               <a:rPr lang="en-US" sz="1300" b="1" dirty="0">
                 <a:solidFill>
-                  <a:srgbClr val="1D2433"/>
+                  <a:srgbClr val="0F172A"/>
                 </a:solidFill>
                 <a:latin typeface="Calibri" pitchFamily="34" charset="0"/>
                 <a:ea typeface="Calibri" pitchFamily="34" charset="-122"/>
@@ -9025,7 +9025,7 @@
             <a:r>
               <a:rPr lang="en-US" sz="1050" dirty="0">
                 <a:solidFill>
-                  <a:srgbClr val="8A93A5"/>
+                  <a:srgbClr val="94A3B8"/>
                 </a:solidFill>
                 <a:latin typeface="Calibri" pitchFamily="34" charset="0"/>
                 <a:ea typeface="Calibri" pitchFamily="34" charset="-122"/>
@@ -9054,7 +9054,7 @@
             </a:avLst>
           </a:prstGeom>
           <a:solidFill>
-            <a:srgbClr val="D96F2B"/>
+            <a:srgbClr val="D97706"/>
           </a:solidFill>
           <a:ln/>
         </p:spPr>
@@ -9086,7 +9086,7 @@
             <a:r>
               <a:rPr lang="en-US" sz="1200" b="1" dirty="0">
                 <a:solidFill>
-                  <a:srgbClr val="1D2433"/>
+                  <a:srgbClr val="0F172A"/>
                 </a:solidFill>
                 <a:latin typeface="Calibri" pitchFamily="34" charset="0"/>
                 <a:ea typeface="Calibri" pitchFamily="34" charset="-122"/>
@@ -9125,7 +9125,7 @@
             <a:r>
               <a:rPr lang="en-US" sz="1300" b="1" dirty="0">
                 <a:solidFill>
-                  <a:srgbClr val="D96F2B"/>
+                  <a:srgbClr val="D97706"/>
                 </a:solidFill>
                 <a:latin typeface="Calibri" pitchFamily="34" charset="0"/>
                 <a:ea typeface="Calibri" pitchFamily="34" charset="-122"/>
@@ -9164,7 +9164,7 @@
             <a:r>
               <a:rPr lang="en-US" sz="1300" b="1" dirty="0">
                 <a:solidFill>
-                  <a:srgbClr val="1D2433"/>
+                  <a:srgbClr val="0F172A"/>
                 </a:solidFill>
                 <a:latin typeface="Calibri" pitchFamily="34" charset="0"/>
                 <a:ea typeface="Calibri" pitchFamily="34" charset="-122"/>
@@ -9203,7 +9203,7 @@
             <a:r>
               <a:rPr lang="en-US" sz="1050" dirty="0">
                 <a:solidFill>
-                  <a:srgbClr val="8A93A5"/>
+                  <a:srgbClr val="94A3B8"/>
                 </a:solidFill>
                 <a:latin typeface="Calibri" pitchFamily="34" charset="0"/>
                 <a:ea typeface="Calibri" pitchFamily="34" charset="-122"/>
@@ -9232,7 +9232,7 @@
             </a:avLst>
           </a:prstGeom>
           <a:solidFill>
-            <a:srgbClr val="D96F2B"/>
+            <a:srgbClr val="D97706"/>
           </a:solidFill>
           <a:ln/>
         </p:spPr>
@@ -9264,7 +9264,7 @@
             <a:r>
               <a:rPr lang="en-US" sz="1200" b="1" dirty="0">
                 <a:solidFill>
-                  <a:srgbClr val="1D2433"/>
+                  <a:srgbClr val="0F172A"/>
                 </a:solidFill>
                 <a:latin typeface="Calibri" pitchFamily="34" charset="0"/>
                 <a:ea typeface="Calibri" pitchFamily="34" charset="-122"/>
@@ -9303,7 +9303,7 @@
             <a:r>
               <a:rPr lang="en-US" sz="1300" b="1" dirty="0">
                 <a:solidFill>
-                  <a:srgbClr val="D96F2B"/>
+                  <a:srgbClr val="D97706"/>
                 </a:solidFill>
                 <a:latin typeface="Calibri" pitchFamily="34" charset="0"/>
                 <a:ea typeface="Calibri" pitchFamily="34" charset="-122"/>
@@ -9342,7 +9342,7 @@
             <a:r>
               <a:rPr lang="en-US" sz="1300" b="1" dirty="0">
                 <a:solidFill>
-                  <a:srgbClr val="1D2433"/>
+                  <a:srgbClr val="0F172A"/>
                 </a:solidFill>
                 <a:latin typeface="Calibri" pitchFamily="34" charset="0"/>
                 <a:ea typeface="Calibri" pitchFamily="34" charset="-122"/>
@@ -9381,7 +9381,7 @@
             <a:r>
               <a:rPr lang="en-US" sz="1050" dirty="0">
                 <a:solidFill>
-                  <a:srgbClr val="8A93A5"/>
+                  <a:srgbClr val="94A3B8"/>
                 </a:solidFill>
                 <a:latin typeface="Calibri" pitchFamily="34" charset="0"/>
                 <a:ea typeface="Calibri" pitchFamily="34" charset="-122"/>
@@ -9410,7 +9410,7 @@
             </a:avLst>
           </a:prstGeom>
           <a:solidFill>
-            <a:srgbClr val="E3E7EE"/>
+            <a:srgbClr val="E2E8F0"/>
           </a:solidFill>
           <a:ln/>
         </p:spPr>
@@ -9442,7 +9442,7 @@
             <a:r>
               <a:rPr lang="en-US" sz="1200" b="1" dirty="0">
                 <a:solidFill>
-                  <a:srgbClr val="1D2433"/>
+                  <a:srgbClr val="0F172A"/>
                 </a:solidFill>
                 <a:latin typeface="Calibri" pitchFamily="34" charset="0"/>
                 <a:ea typeface="Calibri" pitchFamily="34" charset="-122"/>
@@ -9481,7 +9481,7 @@
             <a:r>
               <a:rPr lang="en-US" sz="1300" b="1" dirty="0">
                 <a:solidFill>
-                  <a:srgbClr val="1D2433"/>
+                  <a:srgbClr val="0F172A"/>
                 </a:solidFill>
                 <a:latin typeface="Calibri" pitchFamily="34" charset="0"/>
                 <a:ea typeface="Calibri" pitchFamily="34" charset="-122"/>
@@ -9520,7 +9520,7 @@
             <a:r>
               <a:rPr lang="en-US" sz="1050" dirty="0">
                 <a:solidFill>
-                  <a:srgbClr val="8A93A5"/>
+                  <a:srgbClr val="94A3B8"/>
                 </a:solidFill>
                 <a:latin typeface="Calibri" pitchFamily="34" charset="0"/>
                 <a:ea typeface="Calibri" pitchFamily="34" charset="-122"/>
@@ -9549,7 +9549,7 @@
             </a:avLst>
           </a:prstGeom>
           <a:solidFill>
-            <a:srgbClr val="E3E7EE"/>
+            <a:srgbClr val="E2E8F0"/>
           </a:solidFill>
           <a:ln/>
         </p:spPr>
@@ -9581,7 +9581,7 @@
             <a:r>
               <a:rPr lang="en-US" sz="1200" b="1" dirty="0">
                 <a:solidFill>
-                  <a:srgbClr val="1D2433"/>
+                  <a:srgbClr val="0F172A"/>
                 </a:solidFill>
                 <a:latin typeface="Calibri" pitchFamily="34" charset="0"/>
                 <a:ea typeface="Calibri" pitchFamily="34" charset="-122"/>
@@ -9620,7 +9620,7 @@
             <a:r>
               <a:rPr lang="en-US" sz="1300" b="1" dirty="0">
                 <a:solidFill>
-                  <a:srgbClr val="1D2433"/>
+                  <a:srgbClr val="0F172A"/>
                 </a:solidFill>
                 <a:latin typeface="Calibri" pitchFamily="34" charset="0"/>
                 <a:ea typeface="Calibri" pitchFamily="34" charset="-122"/>
@@ -9659,7 +9659,7 @@
             <a:r>
               <a:rPr lang="en-US" sz="1050" dirty="0">
                 <a:solidFill>
-                  <a:srgbClr val="8A93A5"/>
+                  <a:srgbClr val="94A3B8"/>
                 </a:solidFill>
                 <a:latin typeface="Calibri" pitchFamily="34" charset="0"/>
                 <a:ea typeface="Calibri" pitchFamily="34" charset="-122"/>
@@ -9688,7 +9688,7 @@
             </a:avLst>
           </a:prstGeom>
           <a:solidFill>
-            <a:srgbClr val="E3E7EE"/>
+            <a:srgbClr val="E2E8F0"/>
           </a:solidFill>
           <a:ln/>
         </p:spPr>
@@ -9720,7 +9720,7 @@
             <a:r>
               <a:rPr lang="en-US" sz="1200" b="1" dirty="0">
                 <a:solidFill>
-                  <a:srgbClr val="1D2433"/>
+                  <a:srgbClr val="0F172A"/>
                 </a:solidFill>
                 <a:latin typeface="Calibri" pitchFamily="34" charset="0"/>
                 <a:ea typeface="Calibri" pitchFamily="34" charset="-122"/>
@@ -9747,7 +9747,7 @@
             <a:avLst/>
           </a:prstGeom>
           <a:solidFill>
-            <a:srgbClr val="B9C0CC"/>
+            <a:srgbClr val="CBD5E1"/>
           </a:solidFill>
           <a:ln/>
         </p:spPr>
@@ -9769,7 +9769,7 @@
             </a:avLst>
           </a:prstGeom>
           <a:solidFill>
-            <a:srgbClr val="1E2B4A"/>
+            <a:srgbClr val="312E81"/>
           </a:solidFill>
           <a:ln/>
         </p:spPr>
@@ -9840,7 +9840,7 @@
             <a:r>
               <a:rPr lang="en-US" sz="1150" b="1" dirty="0">
                 <a:solidFill>
-                  <a:srgbClr val="D96F2B"/>
+                  <a:srgbClr val="D97706"/>
                 </a:solidFill>
                 <a:latin typeface="Calibri" pitchFamily="34" charset="0"/>
                 <a:ea typeface="Calibri" pitchFamily="34" charset="-122"/>
@@ -9921,7 +9921,7 @@
             <a:r>
               <a:rPr lang="en-US" sz="1400" b="1" dirty="0">
                 <a:solidFill>
-                  <a:srgbClr val="1D2433"/>
+                  <a:srgbClr val="0F172A"/>
                 </a:solidFill>
                 <a:latin typeface="Calibri" pitchFamily="34" charset="0"/>
                 <a:ea typeface="Calibri" pitchFamily="34" charset="-122"/>
@@ -9963,7 +9963,7 @@
             <a:r>
               <a:rPr lang="en-US" sz="1100" dirty="0">
                 <a:solidFill>
-                  <a:srgbClr val="4A5468"/>
+                  <a:srgbClr val="475569"/>
                 </a:solidFill>
                 <a:latin typeface="Calibri" pitchFamily="34" charset="0"/>
                 <a:ea typeface="Calibri" pitchFamily="34" charset="-122"/>
@@ -10002,7 +10002,7 @@
             <a:r>
               <a:rPr lang="en-US" sz="900" dirty="0">
                 <a:solidFill>
-                  <a:srgbClr val="8A93A5"/>
+                  <a:srgbClr val="94A3B8"/>
                 </a:solidFill>
                 <a:latin typeface="Calibri" pitchFamily="34" charset="0"/>
                 <a:ea typeface="Calibri" pitchFamily="34" charset="-122"/>
@@ -10041,7 +10041,7 @@
             <a:r>
               <a:rPr lang="en-US" sz="950" dirty="0">
                 <a:solidFill>
-                  <a:srgbClr val="8A93A5"/>
+                  <a:srgbClr val="94A3B8"/>
                 </a:solidFill>
                 <a:latin typeface="Calibri" pitchFamily="34" charset="0"/>
                 <a:ea typeface="Calibri" pitchFamily="34" charset="-122"/>
@@ -10136,7 +10136,7 @@
             <a:r>
               <a:rPr lang="en-US" sz="2700" b="1" dirty="0">
                 <a:solidFill>
-                  <a:srgbClr val="1E2B4A"/>
+                  <a:srgbClr val="312E81"/>
                 </a:solidFill>
                 <a:latin typeface="Calibri" pitchFamily="34" charset="0"/>
                 <a:ea typeface="Calibri" pitchFamily="34" charset="-122"/>
@@ -10163,17 +10163,17 @@
             <a:avLst/>
           </a:prstGeom>
           <a:solidFill>
-            <a:srgbClr val="E1E6EF"/>
+            <a:srgbClr val="E3E1FB"/>
           </a:solidFill>
           <a:ln w="15875">
             <a:solidFill>
-              <a:srgbClr val="BBC7DC"/>
+              <a:srgbClr val="C0BCF6"/>
             </a:solidFill>
             <a:prstDash val="solid"/>
           </a:ln>
           <a:effectLst>
             <a:outerShdw sx="100000" sy="100000" kx="0" ky="0" algn="bl" rotWithShape="0" blurRad="127000" dist="25400" dir="5400000">
-              <a:srgbClr val="1E2B4A">
+              <a:srgbClr val="312E81">
                 <a:alpha val="8000"/>
               </a:srgbClr>
             </a:outerShdw>
@@ -10231,7 +10231,7 @@
             <a:r>
               <a:rPr lang="en-US" sz="1500" b="1" dirty="0">
                 <a:solidFill>
-                  <a:srgbClr val="1D2433"/>
+                  <a:srgbClr val="0F172A"/>
                 </a:solidFill>
                 <a:latin typeface="Calibri" pitchFamily="34" charset="0"/>
                 <a:ea typeface="Calibri" pitchFamily="34" charset="-122"/>
@@ -10270,7 +10270,7 @@
             <a:r>
               <a:rPr lang="en-US" sz="1100" b="1" dirty="0">
                 <a:solidFill>
-                  <a:srgbClr val="41639E"/>
+                  <a:srgbClr val="4F46E5"/>
                 </a:solidFill>
                 <a:latin typeface="Calibri" pitchFamily="34" charset="0"/>
                 <a:ea typeface="Calibri" pitchFamily="34" charset="-122"/>
@@ -10312,7 +10312,7 @@
             <a:r>
               <a:rPr lang="en-US" sz="1200" dirty="0">
                 <a:solidFill>
-                  <a:srgbClr val="4A5468"/>
+                  <a:srgbClr val="475569"/>
                 </a:solidFill>
                 <a:latin typeface="Calibri" pitchFamily="34" charset="0"/>
                 <a:ea typeface="Calibri" pitchFamily="34" charset="-122"/>
@@ -10339,17 +10339,17 @@
             <a:avLst/>
           </a:prstGeom>
           <a:solidFill>
-            <a:srgbClr val="E0EDEF"/>
+            <a:srgbClr val="F9DCE9"/>
           </a:solidFill>
           <a:ln w="15875">
             <a:solidFill>
-              <a:srgbClr val="BAD6DB"/>
+              <a:srgbClr val="F2B1CE"/>
             </a:solidFill>
             <a:prstDash val="solid"/>
           </a:ln>
           <a:effectLst>
             <a:outerShdw sx="100000" sy="100000" kx="0" ky="0" algn="bl" rotWithShape="0" blurRad="127000" dist="25400" dir="5400000">
-              <a:srgbClr val="1E2B4A">
+              <a:srgbClr val="312E81">
                 <a:alpha val="8000"/>
               </a:srgbClr>
             </a:outerShdw>
@@ -10407,7 +10407,7 @@
             <a:r>
               <a:rPr lang="en-US" sz="1500" b="1" dirty="0">
                 <a:solidFill>
-                  <a:srgbClr val="1D2433"/>
+                  <a:srgbClr val="0F172A"/>
                 </a:solidFill>
                 <a:latin typeface="Calibri" pitchFamily="34" charset="0"/>
                 <a:ea typeface="Calibri" pitchFamily="34" charset="-122"/>
@@ -10446,7 +10446,7 @@
             <a:r>
               <a:rPr lang="en-US" sz="1100" b="1" dirty="0">
                 <a:solidFill>
-                  <a:srgbClr val="3E8C9A"/>
+                  <a:srgbClr val="DB2777"/>
                 </a:solidFill>
                 <a:latin typeface="Calibri" pitchFamily="34" charset="0"/>
                 <a:ea typeface="Calibri" pitchFamily="34" charset="-122"/>
@@ -10488,7 +10488,7 @@
             <a:r>
               <a:rPr lang="en-US" sz="1200" dirty="0">
                 <a:solidFill>
-                  <a:srgbClr val="4A5468"/>
+                  <a:srgbClr val="475569"/>
                 </a:solidFill>
                 <a:latin typeface="Calibri" pitchFamily="34" charset="0"/>
                 <a:ea typeface="Calibri" pitchFamily="34" charset="-122"/>
@@ -10515,17 +10515,17 @@
             <a:avLst/>
           </a:prstGeom>
           <a:solidFill>
-            <a:srgbClr val="F6ECDC"/>
+            <a:srgbClr val="D7EDF3"/>
           </a:solidFill>
           <a:ln w="15875">
             <a:solidFill>
-              <a:srgbClr val="ECD5B0"/>
+              <a:srgbClr val="A6D7E3"/>
             </a:solidFill>
             <a:prstDash val="solid"/>
           </a:ln>
           <a:effectLst>
             <a:outerShdw sx="100000" sy="100000" kx="0" ky="0" algn="bl" rotWithShape="0" blurRad="127000" dist="25400" dir="5400000">
-              <a:srgbClr val="1E2B4A">
+              <a:srgbClr val="312E81">
                 <a:alpha val="8000"/>
               </a:srgbClr>
             </a:outerShdw>
@@ -10583,7 +10583,7 @@
             <a:r>
               <a:rPr lang="en-US" sz="1500" b="1" dirty="0">
                 <a:solidFill>
-                  <a:srgbClr val="1D2433"/>
+                  <a:srgbClr val="0F172A"/>
                 </a:solidFill>
                 <a:latin typeface="Calibri" pitchFamily="34" charset="0"/>
                 <a:ea typeface="Calibri" pitchFamily="34" charset="-122"/>
@@ -10622,7 +10622,7 @@
             <a:r>
               <a:rPr lang="en-US" sz="1100" b="1" dirty="0">
                 <a:solidFill>
-                  <a:srgbClr val="C98A24"/>
+                  <a:srgbClr val="0891B2"/>
                 </a:solidFill>
                 <a:latin typeface="Calibri" pitchFamily="34" charset="0"/>
                 <a:ea typeface="Calibri" pitchFamily="34" charset="-122"/>
@@ -10664,7 +10664,7 @@
             <a:r>
               <a:rPr lang="en-US" sz="1200" dirty="0">
                 <a:solidFill>
-                  <a:srgbClr val="4A5468"/>
+                  <a:srgbClr val="475569"/>
                 </a:solidFill>
                 <a:latin typeface="Calibri" pitchFamily="34" charset="0"/>
                 <a:ea typeface="Calibri" pitchFamily="34" charset="-122"/>
@@ -10691,17 +10691,17 @@
             <a:avLst/>
           </a:prstGeom>
           <a:solidFill>
-            <a:srgbClr val="F9E8DD"/>
+            <a:srgbClr val="F9E9D7"/>
           </a:solidFill>
           <a:ln w="15875">
             <a:solidFill>
-              <a:srgbClr val="F1CBB3"/>
+              <a:srgbClr val="F1CEA5"/>
             </a:solidFill>
             <a:prstDash val="solid"/>
           </a:ln>
           <a:effectLst>
             <a:outerShdw sx="100000" sy="100000" kx="0" ky="0" algn="bl" rotWithShape="0" blurRad="127000" dist="25400" dir="5400000">
-              <a:srgbClr val="1E2B4A">
+              <a:srgbClr val="312E81">
                 <a:alpha val="8000"/>
               </a:srgbClr>
             </a:outerShdw>
@@ -10759,7 +10759,7 @@
             <a:r>
               <a:rPr lang="en-US" sz="1500" b="1" dirty="0">
                 <a:solidFill>
-                  <a:srgbClr val="1D2433"/>
+                  <a:srgbClr val="0F172A"/>
                 </a:solidFill>
                 <a:latin typeface="Calibri" pitchFamily="34" charset="0"/>
                 <a:ea typeface="Calibri" pitchFamily="34" charset="-122"/>
@@ -10798,7 +10798,7 @@
             <a:r>
               <a:rPr lang="en-US" sz="1100" b="1" dirty="0">
                 <a:solidFill>
-                  <a:srgbClr val="D96F2B"/>
+                  <a:srgbClr val="D97706"/>
                 </a:solidFill>
                 <a:latin typeface="Calibri" pitchFamily="34" charset="0"/>
                 <a:ea typeface="Calibri" pitchFamily="34" charset="-122"/>
@@ -10840,7 +10840,7 @@
             <a:r>
               <a:rPr lang="en-US" sz="1200" dirty="0">
                 <a:solidFill>
-                  <a:srgbClr val="4A5468"/>
+                  <a:srgbClr val="475569"/>
                 </a:solidFill>
                 <a:latin typeface="Calibri" pitchFamily="34" charset="0"/>
                 <a:ea typeface="Calibri" pitchFamily="34" charset="-122"/>
@@ -10901,7 +10901,7 @@
             <a:r>
               <a:rPr lang="en-US" sz="900" dirty="0">
                 <a:solidFill>
-                  <a:srgbClr val="8A93A5"/>
+                  <a:srgbClr val="94A3B8"/>
                 </a:solidFill>
                 <a:latin typeface="Calibri" pitchFamily="34" charset="0"/>
                 <a:ea typeface="Calibri" pitchFamily="34" charset="-122"/>
@@ -10940,7 +10940,7 @@
             <a:r>
               <a:rPr lang="en-US" sz="950" dirty="0">
                 <a:solidFill>
-                  <a:srgbClr val="8A93A5"/>
+                  <a:srgbClr val="94A3B8"/>
                 </a:solidFill>
                 <a:latin typeface="Calibri" pitchFamily="34" charset="0"/>
                 <a:ea typeface="Calibri" pitchFamily="34" charset="-122"/>
@@ -11035,7 +11035,7 @@
             <a:r>
               <a:rPr lang="en-US" sz="2700" b="1" dirty="0">
                 <a:solidFill>
-                  <a:srgbClr val="1E2B4A"/>
+                  <a:srgbClr val="312E81"/>
                 </a:solidFill>
                 <a:latin typeface="Calibri" pitchFamily="34" charset="0"/>
                 <a:ea typeface="Calibri" pitchFamily="34" charset="-122"/>
@@ -11074,7 +11074,7 @@
             <a:r>
               <a:rPr lang="en-US" sz="2600" b="1" dirty="0">
                 <a:solidFill>
-                  <a:srgbClr val="D96F2B"/>
+                  <a:srgbClr val="D97706"/>
                 </a:solidFill>
                 <a:latin typeface="Calibri" pitchFamily="34" charset="0"/>
                 <a:ea typeface="Calibri" pitchFamily="34" charset="-122"/>
@@ -11116,7 +11116,7 @@
             <a:r>
               <a:rPr lang="en-US" sz="1200" i="1" dirty="0">
                 <a:solidFill>
-                  <a:srgbClr val="4A5468"/>
+                  <a:srgbClr val="475569"/>
                 </a:solidFill>
                 <a:latin typeface="Calibri" pitchFamily="34" charset="0"/>
                 <a:ea typeface="Calibri" pitchFamily="34" charset="-122"/>
@@ -11158,7 +11158,7 @@
             <a:r>
               <a:rPr lang="en-US" sz="1250" dirty="0">
                 <a:solidFill>
-                  <a:srgbClr val="1D2433"/>
+                  <a:srgbClr val="0F172A"/>
                 </a:solidFill>
                 <a:latin typeface="Calibri" pitchFamily="34" charset="0"/>
                 <a:ea typeface="Calibri" pitchFamily="34" charset="-122"/>
@@ -11197,7 +11197,7 @@
             <a:r>
               <a:rPr lang="en-US" sz="1350" b="1" dirty="0">
                 <a:solidFill>
-                  <a:srgbClr val="D96F2B"/>
+                  <a:srgbClr val="D97706"/>
                 </a:solidFill>
                 <a:latin typeface="Calibri" pitchFamily="34" charset="0"/>
                 <a:ea typeface="Calibri" pitchFamily="34" charset="-122"/>
@@ -11236,7 +11236,7 @@
             <a:r>
               <a:rPr lang="en-US" sz="2600" b="1" dirty="0">
                 <a:solidFill>
-                  <a:srgbClr val="3E8C9A"/>
+                  <a:srgbClr val="DB2777"/>
                 </a:solidFill>
                 <a:latin typeface="Calibri" pitchFamily="34" charset="0"/>
                 <a:ea typeface="Calibri" pitchFamily="34" charset="-122"/>
@@ -11278,7 +11278,7 @@
             <a:r>
               <a:rPr lang="en-US" sz="1200" i="1" dirty="0">
                 <a:solidFill>
-                  <a:srgbClr val="4A5468"/>
+                  <a:srgbClr val="475569"/>
                 </a:solidFill>
                 <a:latin typeface="Calibri" pitchFamily="34" charset="0"/>
                 <a:ea typeface="Calibri" pitchFamily="34" charset="-122"/>
@@ -11320,7 +11320,7 @@
             <a:r>
               <a:rPr lang="en-US" sz="1250" dirty="0">
                 <a:solidFill>
-                  <a:srgbClr val="1D2433"/>
+                  <a:srgbClr val="0F172A"/>
                 </a:solidFill>
                 <a:latin typeface="Calibri" pitchFamily="34" charset="0"/>
                 <a:ea typeface="Calibri" pitchFamily="34" charset="-122"/>
@@ -11359,7 +11359,7 @@
             <a:r>
               <a:rPr lang="en-US" sz="1350" b="1" dirty="0">
                 <a:solidFill>
-                  <a:srgbClr val="3E8C9A"/>
+                  <a:srgbClr val="DB2777"/>
                 </a:solidFill>
                 <a:latin typeface="Calibri" pitchFamily="34" charset="0"/>
                 <a:ea typeface="Calibri" pitchFamily="34" charset="-122"/>
@@ -11386,17 +11386,17 @@
             <a:avLst/>
           </a:prstGeom>
           <a:solidFill>
-            <a:srgbClr val="F9E8DD"/>
+            <a:srgbClr val="F9E9D7"/>
           </a:solidFill>
           <a:ln w="15875">
             <a:solidFill>
-              <a:srgbClr val="F1CBB3"/>
+              <a:srgbClr val="F1CEA5"/>
             </a:solidFill>
             <a:prstDash val="solid"/>
           </a:ln>
           <a:effectLst>
             <a:outerShdw sx="100000" sy="100000" kx="0" ky="0" algn="bl" rotWithShape="0" blurRad="127000" dist="25400" dir="5400000">
-              <a:srgbClr val="1E2B4A">
+              <a:srgbClr val="312E81">
                 <a:alpha val="8000"/>
               </a:srgbClr>
             </a:outerShdw>
@@ -11442,17 +11442,17 @@
             <a:avLst/>
           </a:prstGeom>
           <a:solidFill>
-            <a:srgbClr val="E0EDEF"/>
+            <a:srgbClr val="F9DCE9"/>
           </a:solidFill>
           <a:ln w="15875">
             <a:solidFill>
-              <a:srgbClr val="BAD6DB"/>
+              <a:srgbClr val="F2B1CE"/>
             </a:solidFill>
             <a:prstDash val="solid"/>
           </a:ln>
           <a:effectLst>
             <a:outerShdw sx="100000" sy="100000" kx="0" ky="0" algn="bl" rotWithShape="0" blurRad="127000" dist="25400" dir="5400000">
-              <a:srgbClr val="1E2B4A">
+              <a:srgbClr val="312E81">
                 <a:alpha val="8000"/>
               </a:srgbClr>
             </a:outerShdw>
@@ -11510,7 +11510,7 @@
             <a:r>
               <a:rPr lang="en-US" sz="950" dirty="0">
                 <a:solidFill>
-                  <a:srgbClr val="8A93A5"/>
+                  <a:srgbClr val="94A3B8"/>
                 </a:solidFill>
                 <a:latin typeface="Calibri" pitchFamily="34" charset="0"/>
                 <a:ea typeface="Calibri" pitchFamily="34" charset="-122"/>
@@ -11605,7 +11605,7 @@
             <a:r>
               <a:rPr lang="en-US" sz="2700" b="1" dirty="0">
                 <a:solidFill>
-                  <a:srgbClr val="1E2B4A"/>
+                  <a:srgbClr val="312E81"/>
                 </a:solidFill>
                 <a:latin typeface="Calibri" pitchFamily="34" charset="0"/>
                 <a:ea typeface="Calibri" pitchFamily="34" charset="-122"/>
@@ -11647,7 +11647,7 @@
             <a:r>
               <a:rPr lang="en-US" sz="1300" dirty="0">
                 <a:solidFill>
-                  <a:srgbClr val="4A5468"/>
+                  <a:srgbClr val="475569"/>
                 </a:solidFill>
                 <a:latin typeface="Calibri" pitchFamily="34" charset="0"/>
                 <a:ea typeface="Calibri" pitchFamily="34" charset="-122"/>
@@ -11674,17 +11674,17 @@
             <a:avLst/>
           </a:prstGeom>
           <a:solidFill>
-            <a:srgbClr val="F6ECDC"/>
+            <a:srgbClr val="D7EDF3"/>
           </a:solidFill>
           <a:ln w="15875">
             <a:solidFill>
-              <a:srgbClr val="ECD5B0"/>
+              <a:srgbClr val="A6D7E3"/>
             </a:solidFill>
             <a:prstDash val="solid"/>
           </a:ln>
           <a:effectLst>
             <a:outerShdw sx="100000" sy="100000" kx="0" ky="0" algn="bl" rotWithShape="0" blurRad="127000" dist="25400" dir="5400000">
-              <a:srgbClr val="1E2B4A">
+              <a:srgbClr val="312E81">
                 <a:alpha val="8000"/>
               </a:srgbClr>
             </a:outerShdw>
@@ -11745,7 +11745,7 @@
             <a:r>
               <a:rPr lang="en-US" sz="1450" b="1" dirty="0">
                 <a:solidFill>
-                  <a:srgbClr val="1D2433"/>
+                  <a:srgbClr val="0F172A"/>
                 </a:solidFill>
                 <a:latin typeface="Calibri" pitchFamily="34" charset="0"/>
                 <a:ea typeface="Calibri" pitchFamily="34" charset="-122"/>
@@ -11787,7 +11787,7 @@
             <a:r>
               <a:rPr lang="en-US" sz="1150" dirty="0">
                 <a:solidFill>
-                  <a:srgbClr val="4A5468"/>
+                  <a:srgbClr val="475569"/>
                 </a:solidFill>
                 <a:latin typeface="Calibri" pitchFamily="34" charset="0"/>
                 <a:ea typeface="Calibri" pitchFamily="34" charset="-122"/>
@@ -11814,17 +11814,17 @@
             <a:avLst/>
           </a:prstGeom>
           <a:solidFill>
-            <a:srgbClr val="E1E6EF"/>
+            <a:srgbClr val="E3E1FB"/>
           </a:solidFill>
           <a:ln w="15875">
             <a:solidFill>
-              <a:srgbClr val="BBC7DC"/>
+              <a:srgbClr val="C0BCF6"/>
             </a:solidFill>
             <a:prstDash val="solid"/>
           </a:ln>
           <a:effectLst>
             <a:outerShdw sx="100000" sy="100000" kx="0" ky="0" algn="bl" rotWithShape="0" blurRad="127000" dist="25400" dir="5400000">
-              <a:srgbClr val="1E2B4A">
+              <a:srgbClr val="312E81">
                 <a:alpha val="8000"/>
               </a:srgbClr>
             </a:outerShdw>
@@ -11885,7 +11885,7 @@
             <a:r>
               <a:rPr lang="en-US" sz="1450" b="1" dirty="0">
                 <a:solidFill>
-                  <a:srgbClr val="1D2433"/>
+                  <a:srgbClr val="0F172A"/>
                 </a:solidFill>
                 <a:latin typeface="Calibri" pitchFamily="34" charset="0"/>
                 <a:ea typeface="Calibri" pitchFamily="34" charset="-122"/>
@@ -11927,7 +11927,7 @@
             <a:r>
               <a:rPr lang="en-US" sz="1150" dirty="0">
                 <a:solidFill>
-                  <a:srgbClr val="4A5468"/>
+                  <a:srgbClr val="475569"/>
                 </a:solidFill>
                 <a:latin typeface="Calibri" pitchFamily="34" charset="0"/>
                 <a:ea typeface="Calibri" pitchFamily="34" charset="-122"/>
@@ -11954,17 +11954,17 @@
             <a:avLst/>
           </a:prstGeom>
           <a:solidFill>
-            <a:srgbClr val="E0EDEF"/>
+            <a:srgbClr val="F9DCE9"/>
           </a:solidFill>
           <a:ln w="15875">
             <a:solidFill>
-              <a:srgbClr val="BAD6DB"/>
+              <a:srgbClr val="F2B1CE"/>
             </a:solidFill>
             <a:prstDash val="solid"/>
           </a:ln>
           <a:effectLst>
             <a:outerShdw sx="100000" sy="100000" kx="0" ky="0" algn="bl" rotWithShape="0" blurRad="127000" dist="25400" dir="5400000">
-              <a:srgbClr val="1E2B4A">
+              <a:srgbClr val="312E81">
                 <a:alpha val="8000"/>
               </a:srgbClr>
             </a:outerShdw>
@@ -12025,7 +12025,7 @@
             <a:r>
               <a:rPr lang="en-US" sz="1450" b="1" dirty="0">
                 <a:solidFill>
-                  <a:srgbClr val="1D2433"/>
+                  <a:srgbClr val="0F172A"/>
                 </a:solidFill>
                 <a:latin typeface="Calibri" pitchFamily="34" charset="0"/>
                 <a:ea typeface="Calibri" pitchFamily="34" charset="-122"/>
@@ -12067,7 +12067,7 @@
             <a:r>
               <a:rPr lang="en-US" sz="1150" dirty="0">
                 <a:solidFill>
-                  <a:srgbClr val="4A5468"/>
+                  <a:srgbClr val="475569"/>
                 </a:solidFill>
                 <a:latin typeface="Calibri" pitchFamily="34" charset="0"/>
                 <a:ea typeface="Calibri" pitchFamily="34" charset="-122"/>
@@ -12106,7 +12106,7 @@
             <a:r>
               <a:rPr lang="en-US" sz="950" dirty="0">
                 <a:solidFill>
-                  <a:srgbClr val="8A93A5"/>
+                  <a:srgbClr val="94A3B8"/>
                 </a:solidFill>
                 <a:latin typeface="Calibri" pitchFamily="34" charset="0"/>
                 <a:ea typeface="Calibri" pitchFamily="34" charset="-122"/>
@@ -12201,7 +12201,7 @@
             <a:r>
               <a:rPr lang="en-US" sz="2700" b="1" dirty="0">
                 <a:solidFill>
-                  <a:srgbClr val="1E2B4A"/>
+                  <a:srgbClr val="312E81"/>
                 </a:solidFill>
                 <a:latin typeface="Calibri" pitchFamily="34" charset="0"/>
                 <a:ea typeface="Calibri" pitchFamily="34" charset="-122"/>
@@ -12228,17 +12228,17 @@
             <a:avLst/>
           </a:prstGeom>
           <a:solidFill>
-            <a:srgbClr val="F9E8DD"/>
+            <a:srgbClr val="F9E9D7"/>
           </a:solidFill>
           <a:ln w="15875">
             <a:solidFill>
-              <a:srgbClr val="F1CBB3"/>
+              <a:srgbClr val="F1CEA5"/>
             </a:solidFill>
             <a:prstDash val="solid"/>
           </a:ln>
           <a:effectLst>
             <a:outerShdw sx="100000" sy="100000" kx="0" ky="0" algn="bl" rotWithShape="0" blurRad="127000" dist="25400" dir="5400000">
-              <a:srgbClr val="1E2B4A">
+              <a:srgbClr val="312E81">
                 <a:alpha val="8000"/>
               </a:srgbClr>
             </a:outerShdw>
@@ -12296,7 +12296,7 @@
             <a:r>
               <a:rPr lang="en-US" sz="1700" b="1" dirty="0">
                 <a:solidFill>
-                  <a:srgbClr val="1D2433"/>
+                  <a:srgbClr val="0F172A"/>
                 </a:solidFill>
                 <a:latin typeface="Calibri" pitchFamily="34" charset="0"/>
                 <a:ea typeface="Calibri" pitchFamily="34" charset="-122"/>
@@ -12335,7 +12335,7 @@
             <a:r>
               <a:rPr lang="en-US" sz="1350" b="1" dirty="0">
                 <a:solidFill>
-                  <a:srgbClr val="D96F2B"/>
+                  <a:srgbClr val="D97706"/>
                 </a:solidFill>
                 <a:latin typeface="Calibri" pitchFamily="34" charset="0"/>
                 <a:ea typeface="Calibri" pitchFamily="34" charset="-122"/>
@@ -12377,7 +12377,7 @@
             <a:r>
               <a:rPr lang="en-US" sz="1200" dirty="0">
                 <a:solidFill>
-                  <a:srgbClr val="4A5468"/>
+                  <a:srgbClr val="475569"/>
                 </a:solidFill>
                 <a:latin typeface="Calibri" pitchFamily="34" charset="0"/>
                 <a:ea typeface="Calibri" pitchFamily="34" charset="-122"/>
@@ -12416,7 +12416,7 @@
             <a:r>
               <a:rPr lang="en-US" sz="1350" b="1" dirty="0">
                 <a:solidFill>
-                  <a:srgbClr val="D96F2B"/>
+                  <a:srgbClr val="D97706"/>
                 </a:solidFill>
                 <a:latin typeface="Calibri" pitchFamily="34" charset="0"/>
                 <a:ea typeface="Calibri" pitchFamily="34" charset="-122"/>
@@ -12458,7 +12458,7 @@
             <a:r>
               <a:rPr lang="en-US" sz="1200" dirty="0">
                 <a:solidFill>
-                  <a:srgbClr val="4A5468"/>
+                  <a:srgbClr val="475569"/>
                 </a:solidFill>
                 <a:latin typeface="Calibri" pitchFamily="34" charset="0"/>
                 <a:ea typeface="Calibri" pitchFamily="34" charset="-122"/>
@@ -12485,17 +12485,17 @@
             <a:avLst/>
           </a:prstGeom>
           <a:solidFill>
-            <a:srgbClr val="E0EDEF"/>
+            <a:srgbClr val="F9DCE9"/>
           </a:solidFill>
           <a:ln w="15875">
             <a:solidFill>
-              <a:srgbClr val="BAD6DB"/>
+              <a:srgbClr val="F2B1CE"/>
             </a:solidFill>
             <a:prstDash val="solid"/>
           </a:ln>
           <a:effectLst>
             <a:outerShdw sx="100000" sy="100000" kx="0" ky="0" algn="bl" rotWithShape="0" blurRad="127000" dist="25400" dir="5400000">
-              <a:srgbClr val="1E2B4A">
+              <a:srgbClr val="312E81">
                 <a:alpha val="8000"/>
               </a:srgbClr>
             </a:outerShdw>
@@ -12553,7 +12553,7 @@
             <a:r>
               <a:rPr lang="en-US" sz="1700" b="1" dirty="0">
                 <a:solidFill>
-                  <a:srgbClr val="1D2433"/>
+                  <a:srgbClr val="0F172A"/>
                 </a:solidFill>
                 <a:latin typeface="Calibri" pitchFamily="34" charset="0"/>
                 <a:ea typeface="Calibri" pitchFamily="34" charset="-122"/>
@@ -12580,7 +12580,7 @@
             <a:avLst/>
           </a:prstGeom>
           <a:solidFill>
-            <a:srgbClr val="3E8C9A"/>
+            <a:srgbClr val="DB2777"/>
           </a:solidFill>
           <a:ln/>
         </p:spPr>
@@ -12654,7 +12654,7 @@
             <a:r>
               <a:rPr lang="en-US" sz="1200" dirty="0">
                 <a:solidFill>
-                  <a:srgbClr val="4A5468"/>
+                  <a:srgbClr val="475569"/>
                 </a:solidFill>
                 <a:latin typeface="Calibri" pitchFamily="34" charset="0"/>
                 <a:ea typeface="Calibri" pitchFamily="34" charset="-122"/>
@@ -12681,7 +12681,7 @@
             <a:avLst/>
           </a:prstGeom>
           <a:solidFill>
-            <a:srgbClr val="3E8C9A"/>
+            <a:srgbClr val="DB2777"/>
           </a:solidFill>
           <a:ln/>
         </p:spPr>
@@ -12755,7 +12755,7 @@
             <a:r>
               <a:rPr lang="en-US" sz="1200" dirty="0">
                 <a:solidFill>
-                  <a:srgbClr val="4A5468"/>
+                  <a:srgbClr val="475569"/>
                 </a:solidFill>
                 <a:latin typeface="Calibri" pitchFamily="34" charset="0"/>
                 <a:ea typeface="Calibri" pitchFamily="34" charset="-122"/>
@@ -12782,7 +12782,7 @@
             <a:avLst/>
           </a:prstGeom>
           <a:solidFill>
-            <a:srgbClr val="3E8C9A"/>
+            <a:srgbClr val="DB2777"/>
           </a:solidFill>
           <a:ln/>
         </p:spPr>
@@ -12856,7 +12856,7 @@
             <a:r>
               <a:rPr lang="en-US" sz="1200" dirty="0">
                 <a:solidFill>
-                  <a:srgbClr val="4A5468"/>
+                  <a:srgbClr val="475569"/>
                 </a:solidFill>
                 <a:latin typeface="Calibri" pitchFamily="34" charset="0"/>
                 <a:ea typeface="Calibri" pitchFamily="34" charset="-122"/>
@@ -12895,7 +12895,7 @@
             <a:r>
               <a:rPr lang="en-US" sz="950" dirty="0">
                 <a:solidFill>
-                  <a:srgbClr val="8A93A5"/>
+                  <a:srgbClr val="94A3B8"/>
                 </a:solidFill>
                 <a:latin typeface="Calibri" pitchFamily="34" charset="0"/>
                 <a:ea typeface="Calibri" pitchFamily="34" charset="-122"/>
@@ -12990,7 +12990,7 @@
             <a:r>
               <a:rPr lang="en-US" sz="2700" b="1" dirty="0">
                 <a:solidFill>
-                  <a:srgbClr val="1E2B4A"/>
+                  <a:srgbClr val="312E81"/>
                 </a:solidFill>
                 <a:latin typeface="Calibri" pitchFamily="34" charset="0"/>
                 <a:ea typeface="Calibri" pitchFamily="34" charset="-122"/>
@@ -13019,7 +13019,7 @@
             </a:avLst>
           </a:prstGeom>
           <a:solidFill>
-            <a:srgbClr val="1E2B4A"/>
+            <a:srgbClr val="312E81"/>
           </a:solidFill>
           <a:ln/>
         </p:spPr>
@@ -13093,7 +13093,7 @@
             <a:r>
               <a:rPr lang="en-US" sz="3600" b="1" dirty="0">
                 <a:solidFill>
-                  <a:srgbClr val="D96F2B"/>
+                  <a:srgbClr val="D97706"/>
                 </a:solidFill>
                 <a:latin typeface="Calibri" pitchFamily="34" charset="0"/>
                 <a:ea typeface="Calibri" pitchFamily="34" charset="-122"/>
@@ -13132,7 +13132,7 @@
             <a:r>
               <a:rPr lang="en-US" sz="1200" b="1" dirty="0">
                 <a:solidFill>
-                  <a:srgbClr val="1D2433"/>
+                  <a:srgbClr val="0F172A"/>
                 </a:solidFill>
                 <a:latin typeface="Calibri" pitchFamily="34" charset="0"/>
                 <a:ea typeface="Calibri" pitchFamily="34" charset="-122"/>
@@ -13174,7 +13174,7 @@
             <a:r>
               <a:rPr lang="en-US" sz="1150" dirty="0">
                 <a:solidFill>
-                  <a:srgbClr val="4A5468"/>
+                  <a:srgbClr val="475569"/>
                 </a:solidFill>
                 <a:latin typeface="Calibri" pitchFamily="34" charset="0"/>
                 <a:ea typeface="Calibri" pitchFamily="34" charset="-122"/>
@@ -13213,7 +13213,7 @@
             <a:r>
               <a:rPr lang="en-US" sz="3600" b="1" dirty="0">
                 <a:solidFill>
-                  <a:srgbClr val="41639E"/>
+                  <a:srgbClr val="4F46E5"/>
                 </a:solidFill>
                 <a:latin typeface="Calibri" pitchFamily="34" charset="0"/>
                 <a:ea typeface="Calibri" pitchFamily="34" charset="-122"/>
@@ -13252,7 +13252,7 @@
             <a:r>
               <a:rPr lang="en-US" sz="1200" b="1" dirty="0">
                 <a:solidFill>
-                  <a:srgbClr val="1D2433"/>
+                  <a:srgbClr val="0F172A"/>
                 </a:solidFill>
                 <a:latin typeface="Calibri" pitchFamily="34" charset="0"/>
                 <a:ea typeface="Calibri" pitchFamily="34" charset="-122"/>
@@ -13294,7 +13294,7 @@
             <a:r>
               <a:rPr lang="en-US" sz="1150" dirty="0">
                 <a:solidFill>
-                  <a:srgbClr val="4A5468"/>
+                  <a:srgbClr val="475569"/>
                 </a:solidFill>
                 <a:latin typeface="Calibri" pitchFamily="34" charset="0"/>
                 <a:ea typeface="Calibri" pitchFamily="34" charset="-122"/>
@@ -13333,7 +13333,7 @@
             <a:r>
               <a:rPr lang="en-US" sz="3600" b="1" dirty="0">
                 <a:solidFill>
-                  <a:srgbClr val="3E8C9A"/>
+                  <a:srgbClr val="DB2777"/>
                 </a:solidFill>
                 <a:latin typeface="Calibri" pitchFamily="34" charset="0"/>
                 <a:ea typeface="Calibri" pitchFamily="34" charset="-122"/>
@@ -13372,7 +13372,7 @@
             <a:r>
               <a:rPr lang="en-US" sz="1200" b="1" dirty="0">
                 <a:solidFill>
-                  <a:srgbClr val="1D2433"/>
+                  <a:srgbClr val="0F172A"/>
                 </a:solidFill>
                 <a:latin typeface="Calibri" pitchFamily="34" charset="0"/>
                 <a:ea typeface="Calibri" pitchFamily="34" charset="-122"/>
@@ -13414,7 +13414,7 @@
             <a:r>
               <a:rPr lang="en-US" sz="1150" dirty="0">
                 <a:solidFill>
-                  <a:srgbClr val="4A5468"/>
+                  <a:srgbClr val="475569"/>
                 </a:solidFill>
                 <a:latin typeface="Calibri" pitchFamily="34" charset="0"/>
                 <a:ea typeface="Calibri" pitchFamily="34" charset="-122"/>
@@ -13453,7 +13453,7 @@
             <a:r>
               <a:rPr lang="en-US" sz="3600" b="1" dirty="0">
                 <a:solidFill>
-                  <a:srgbClr val="C98A24"/>
+                  <a:srgbClr val="0891B2"/>
                 </a:solidFill>
                 <a:latin typeface="Calibri" pitchFamily="34" charset="0"/>
                 <a:ea typeface="Calibri" pitchFamily="34" charset="-122"/>
@@ -13492,7 +13492,7 @@
             <a:r>
               <a:rPr lang="en-US" sz="1200" b="1" dirty="0">
                 <a:solidFill>
-                  <a:srgbClr val="1D2433"/>
+                  <a:srgbClr val="0F172A"/>
                 </a:solidFill>
                 <a:latin typeface="Calibri" pitchFamily="34" charset="0"/>
                 <a:ea typeface="Calibri" pitchFamily="34" charset="-122"/>
@@ -13534,7 +13534,7 @@
             <a:r>
               <a:rPr lang="en-US" sz="1150" dirty="0">
                 <a:solidFill>
-                  <a:srgbClr val="4A5468"/>
+                  <a:srgbClr val="475569"/>
                 </a:solidFill>
                 <a:latin typeface="Calibri" pitchFamily="34" charset="0"/>
                 <a:ea typeface="Calibri" pitchFamily="34" charset="-122"/>
@@ -13573,7 +13573,7 @@
             <a:r>
               <a:rPr lang="en-US" sz="950" dirty="0">
                 <a:solidFill>
-                  <a:srgbClr val="8A93A5"/>
+                  <a:srgbClr val="94A3B8"/>
                 </a:solidFill>
                 <a:latin typeface="Calibri" pitchFamily="34" charset="0"/>
                 <a:ea typeface="Calibri" pitchFamily="34" charset="-122"/>
@@ -13668,7 +13668,7 @@
             <a:r>
               <a:rPr lang="en-US" sz="2700" b="1" dirty="0">
                 <a:solidFill>
-                  <a:srgbClr val="1E2B4A"/>
+                  <a:srgbClr val="312E81"/>
                 </a:solidFill>
                 <a:latin typeface="Calibri" pitchFamily="34" charset="0"/>
                 <a:ea typeface="Calibri" pitchFamily="34" charset="-122"/>
@@ -13695,17 +13695,17 @@
             <a:avLst/>
           </a:prstGeom>
           <a:solidFill>
-            <a:srgbClr val="E1E6EF"/>
+            <a:srgbClr val="E3E1FB"/>
           </a:solidFill>
           <a:ln w="15875">
             <a:solidFill>
-              <a:srgbClr val="BBC7DC"/>
+              <a:srgbClr val="C0BCF6"/>
             </a:solidFill>
             <a:prstDash val="solid"/>
           </a:ln>
           <a:effectLst>
             <a:outerShdw sx="100000" sy="100000" kx="0" ky="0" algn="bl" rotWithShape="0" blurRad="127000" dist="25400" dir="5400000">
-              <a:srgbClr val="1E2B4A">
+              <a:srgbClr val="312E81">
                 <a:alpha val="8000"/>
               </a:srgbClr>
             </a:outerShdw>
@@ -13763,7 +13763,7 @@
             <a:r>
               <a:rPr lang="en-US" sz="3000" b="1" dirty="0">
                 <a:solidFill>
-                  <a:srgbClr val="E3E7EE"/>
+                  <a:srgbClr val="E2E8F0"/>
                 </a:solidFill>
                 <a:latin typeface="Calibri" pitchFamily="34" charset="0"/>
                 <a:ea typeface="Calibri" pitchFamily="34" charset="-122"/>
@@ -13802,7 +13802,7 @@
             <a:r>
               <a:rPr lang="en-US" sz="1450" b="1" dirty="0">
                 <a:solidFill>
-                  <a:srgbClr val="1D2433"/>
+                  <a:srgbClr val="0F172A"/>
                 </a:solidFill>
                 <a:latin typeface="Calibri" pitchFamily="34" charset="0"/>
                 <a:ea typeface="Calibri" pitchFamily="34" charset="-122"/>
@@ -13841,7 +13841,7 @@
             <a:r>
               <a:rPr lang="en-US" sz="1100" dirty="0">
                 <a:solidFill>
-                  <a:srgbClr val="4A5468"/>
+                  <a:srgbClr val="475569"/>
                 </a:solidFill>
                 <a:latin typeface="Calibri" pitchFamily="34" charset="0"/>
                 <a:ea typeface="Calibri" pitchFamily="34" charset="-122"/>
@@ -13868,17 +13868,17 @@
             <a:avLst/>
           </a:prstGeom>
           <a:solidFill>
-            <a:srgbClr val="F9E8DD"/>
+            <a:srgbClr val="F9E9D7"/>
           </a:solidFill>
           <a:ln w="15875">
             <a:solidFill>
-              <a:srgbClr val="F1CBB3"/>
+              <a:srgbClr val="F1CEA5"/>
             </a:solidFill>
             <a:prstDash val="solid"/>
           </a:ln>
           <a:effectLst>
             <a:outerShdw sx="100000" sy="100000" kx="0" ky="0" algn="bl" rotWithShape="0" blurRad="127000" dist="25400" dir="5400000">
-              <a:srgbClr val="1E2B4A">
+              <a:srgbClr val="312E81">
                 <a:alpha val="8000"/>
               </a:srgbClr>
             </a:outerShdw>
@@ -13936,7 +13936,7 @@
             <a:r>
               <a:rPr lang="en-US" sz="3000" b="1" dirty="0">
                 <a:solidFill>
-                  <a:srgbClr val="E3E7EE"/>
+                  <a:srgbClr val="E2E8F0"/>
                 </a:solidFill>
                 <a:latin typeface="Calibri" pitchFamily="34" charset="0"/>
                 <a:ea typeface="Calibri" pitchFamily="34" charset="-122"/>
@@ -13975,7 +13975,7 @@
             <a:r>
               <a:rPr lang="en-US" sz="1450" b="1" dirty="0">
                 <a:solidFill>
-                  <a:srgbClr val="1D2433"/>
+                  <a:srgbClr val="0F172A"/>
                 </a:solidFill>
                 <a:latin typeface="Calibri" pitchFamily="34" charset="0"/>
                 <a:ea typeface="Calibri" pitchFamily="34" charset="-122"/>
@@ -14014,7 +14014,7 @@
             <a:r>
               <a:rPr lang="en-US" sz="1100" dirty="0">
                 <a:solidFill>
-                  <a:srgbClr val="4A5468"/>
+                  <a:srgbClr val="475569"/>
                 </a:solidFill>
                 <a:latin typeface="Calibri" pitchFamily="34" charset="0"/>
                 <a:ea typeface="Calibri" pitchFamily="34" charset="-122"/>
@@ -14041,17 +14041,17 @@
             <a:avLst/>
           </a:prstGeom>
           <a:solidFill>
-            <a:srgbClr val="E0EDEF"/>
+            <a:srgbClr val="F9DCE9"/>
           </a:solidFill>
           <a:ln w="15875">
             <a:solidFill>
-              <a:srgbClr val="BAD6DB"/>
+              <a:srgbClr val="F2B1CE"/>
             </a:solidFill>
             <a:prstDash val="solid"/>
           </a:ln>
           <a:effectLst>
             <a:outerShdw sx="100000" sy="100000" kx="0" ky="0" algn="bl" rotWithShape="0" blurRad="127000" dist="25400" dir="5400000">
-              <a:srgbClr val="1E2B4A">
+              <a:srgbClr val="312E81">
                 <a:alpha val="8000"/>
               </a:srgbClr>
             </a:outerShdw>
@@ -14109,7 +14109,7 @@
             <a:r>
               <a:rPr lang="en-US" sz="3000" b="1" dirty="0">
                 <a:solidFill>
-                  <a:srgbClr val="E3E7EE"/>
+                  <a:srgbClr val="E2E8F0"/>
                 </a:solidFill>
                 <a:latin typeface="Calibri" pitchFamily="34" charset="0"/>
                 <a:ea typeface="Calibri" pitchFamily="34" charset="-122"/>
@@ -14148,7 +14148,7 @@
             <a:r>
               <a:rPr lang="en-US" sz="1450" b="1" dirty="0">
                 <a:solidFill>
-                  <a:srgbClr val="1D2433"/>
+                  <a:srgbClr val="0F172A"/>
                 </a:solidFill>
                 <a:latin typeface="Calibri" pitchFamily="34" charset="0"/>
                 <a:ea typeface="Calibri" pitchFamily="34" charset="-122"/>
@@ -14187,7 +14187,7 @@
             <a:r>
               <a:rPr lang="en-US" sz="1100" dirty="0">
                 <a:solidFill>
-                  <a:srgbClr val="4A5468"/>
+                  <a:srgbClr val="475569"/>
                 </a:solidFill>
                 <a:latin typeface="Calibri" pitchFamily="34" charset="0"/>
                 <a:ea typeface="Calibri" pitchFamily="34" charset="-122"/>
@@ -14214,17 +14214,17 @@
             <a:avLst/>
           </a:prstGeom>
           <a:solidFill>
-            <a:srgbClr val="F6ECDC"/>
+            <a:srgbClr val="D7EDF3"/>
           </a:solidFill>
           <a:ln w="15875">
             <a:solidFill>
-              <a:srgbClr val="ECD5B0"/>
+              <a:srgbClr val="A6D7E3"/>
             </a:solidFill>
             <a:prstDash val="solid"/>
           </a:ln>
           <a:effectLst>
             <a:outerShdw sx="100000" sy="100000" kx="0" ky="0" algn="bl" rotWithShape="0" blurRad="127000" dist="25400" dir="5400000">
-              <a:srgbClr val="1E2B4A">
+              <a:srgbClr val="312E81">
                 <a:alpha val="8000"/>
               </a:srgbClr>
             </a:outerShdw>
@@ -14282,7 +14282,7 @@
             <a:r>
               <a:rPr lang="en-US" sz="3000" b="1" dirty="0">
                 <a:solidFill>
-                  <a:srgbClr val="E3E7EE"/>
+                  <a:srgbClr val="E2E8F0"/>
                 </a:solidFill>
                 <a:latin typeface="Calibri" pitchFamily="34" charset="0"/>
                 <a:ea typeface="Calibri" pitchFamily="34" charset="-122"/>
@@ -14321,7 +14321,7 @@
             <a:r>
               <a:rPr lang="en-US" sz="1450" b="1" dirty="0">
                 <a:solidFill>
-                  <a:srgbClr val="1D2433"/>
+                  <a:srgbClr val="0F172A"/>
                 </a:solidFill>
                 <a:latin typeface="Calibri" pitchFamily="34" charset="0"/>
                 <a:ea typeface="Calibri" pitchFamily="34" charset="-122"/>
@@ -14360,7 +14360,7 @@
             <a:r>
               <a:rPr lang="en-US" sz="1100" dirty="0">
                 <a:solidFill>
-                  <a:srgbClr val="4A5468"/>
+                  <a:srgbClr val="475569"/>
                 </a:solidFill>
                 <a:latin typeface="Calibri" pitchFamily="34" charset="0"/>
                 <a:ea typeface="Calibri" pitchFamily="34" charset="-122"/>
@@ -14387,17 +14387,17 @@
             <a:avLst/>
           </a:prstGeom>
           <a:solidFill>
-            <a:srgbClr val="E1E6EF"/>
+            <a:srgbClr val="E3E1FB"/>
           </a:solidFill>
           <a:ln w="15875">
             <a:solidFill>
-              <a:srgbClr val="BBC7DC"/>
+              <a:srgbClr val="C0BCF6"/>
             </a:solidFill>
             <a:prstDash val="solid"/>
           </a:ln>
           <a:effectLst>
             <a:outerShdw sx="100000" sy="100000" kx="0" ky="0" algn="bl" rotWithShape="0" blurRad="127000" dist="25400" dir="5400000">
-              <a:srgbClr val="1E2B4A">
+              <a:srgbClr val="312E81">
                 <a:alpha val="8000"/>
               </a:srgbClr>
             </a:outerShdw>
@@ -14455,7 +14455,7 @@
             <a:r>
               <a:rPr lang="en-US" sz="3000" b="1" dirty="0">
                 <a:solidFill>
-                  <a:srgbClr val="E3E7EE"/>
+                  <a:srgbClr val="E2E8F0"/>
                 </a:solidFill>
                 <a:latin typeface="Calibri" pitchFamily="34" charset="0"/>
                 <a:ea typeface="Calibri" pitchFamily="34" charset="-122"/>
@@ -14494,7 +14494,7 @@
             <a:r>
               <a:rPr lang="en-US" sz="1450" b="1" dirty="0">
                 <a:solidFill>
-                  <a:srgbClr val="1D2433"/>
+                  <a:srgbClr val="0F172A"/>
                 </a:solidFill>
                 <a:latin typeface="Calibri" pitchFamily="34" charset="0"/>
                 <a:ea typeface="Calibri" pitchFamily="34" charset="-122"/>
@@ -14533,7 +14533,7 @@
             <a:r>
               <a:rPr lang="en-US" sz="1100" dirty="0">
                 <a:solidFill>
-                  <a:srgbClr val="4A5468"/>
+                  <a:srgbClr val="475569"/>
                 </a:solidFill>
                 <a:latin typeface="Calibri" pitchFamily="34" charset="0"/>
                 <a:ea typeface="Calibri" pitchFamily="34" charset="-122"/>
@@ -14560,17 +14560,17 @@
             <a:avLst/>
           </a:prstGeom>
           <a:solidFill>
-            <a:srgbClr val="F9E8DD"/>
+            <a:srgbClr val="F9E9D7"/>
           </a:solidFill>
           <a:ln w="15875">
             <a:solidFill>
-              <a:srgbClr val="F1CBB3"/>
+              <a:srgbClr val="F1CEA5"/>
             </a:solidFill>
             <a:prstDash val="solid"/>
           </a:ln>
           <a:effectLst>
             <a:outerShdw sx="100000" sy="100000" kx="0" ky="0" algn="bl" rotWithShape="0" blurRad="127000" dist="25400" dir="5400000">
-              <a:srgbClr val="1E2B4A">
+              <a:srgbClr val="312E81">
                 <a:alpha val="8000"/>
               </a:srgbClr>
             </a:outerShdw>
@@ -14628,7 +14628,7 @@
             <a:r>
               <a:rPr lang="en-US" sz="3000" b="1" dirty="0">
                 <a:solidFill>
-                  <a:srgbClr val="E3E7EE"/>
+                  <a:srgbClr val="E2E8F0"/>
                 </a:solidFill>
                 <a:latin typeface="Calibri" pitchFamily="34" charset="0"/>
                 <a:ea typeface="Calibri" pitchFamily="34" charset="-122"/>
@@ -14667,7 +14667,7 @@
             <a:r>
               <a:rPr lang="en-US" sz="1450" b="1" dirty="0">
                 <a:solidFill>
-                  <a:srgbClr val="1D2433"/>
+                  <a:srgbClr val="0F172A"/>
                 </a:solidFill>
                 <a:latin typeface="Calibri" pitchFamily="34" charset="0"/>
                 <a:ea typeface="Calibri" pitchFamily="34" charset="-122"/>
@@ -14706,7 +14706,7 @@
             <a:r>
               <a:rPr lang="en-US" sz="1100" dirty="0">
                 <a:solidFill>
-                  <a:srgbClr val="4A5468"/>
+                  <a:srgbClr val="475569"/>
                 </a:solidFill>
                 <a:latin typeface="Calibri" pitchFamily="34" charset="0"/>
                 <a:ea typeface="Calibri" pitchFamily="34" charset="-122"/>
@@ -14745,7 +14745,7 @@
             <a:r>
               <a:rPr lang="en-US" sz="950" dirty="0">
                 <a:solidFill>
-                  <a:srgbClr val="8A93A5"/>
+                  <a:srgbClr val="94A3B8"/>
                 </a:solidFill>
                 <a:latin typeface="Calibri" pitchFamily="34" charset="0"/>
                 <a:ea typeface="Calibri" pitchFamily="34" charset="-122"/>
@@ -14840,7 +14840,7 @@
             <a:r>
               <a:rPr lang="en-US" sz="2700" b="1" dirty="0">
                 <a:solidFill>
-                  <a:srgbClr val="1E2B4A"/>
+                  <a:srgbClr val="312E81"/>
                 </a:solidFill>
                 <a:latin typeface="Calibri" pitchFamily="34" charset="0"/>
                 <a:ea typeface="Calibri" pitchFamily="34" charset="-122"/>
@@ -14882,7 +14882,7 @@
             <a:r>
               <a:rPr lang="en-US" sz="1300" dirty="0">
                 <a:solidFill>
-                  <a:srgbClr val="4A5468"/>
+                  <a:srgbClr val="475569"/>
                 </a:solidFill>
                 <a:latin typeface="Calibri" pitchFamily="34" charset="0"/>
                 <a:ea typeface="Calibri" pitchFamily="34" charset="-122"/>
@@ -14909,17 +14909,17 @@
             <a:avLst/>
           </a:prstGeom>
           <a:solidFill>
-            <a:srgbClr val="F6ECDC"/>
+            <a:srgbClr val="D7EDF3"/>
           </a:solidFill>
           <a:ln w="15875">
             <a:solidFill>
-              <a:srgbClr val="ECD5B0"/>
+              <a:srgbClr val="A6D7E3"/>
             </a:solidFill>
             <a:prstDash val="solid"/>
           </a:ln>
           <a:effectLst>
             <a:outerShdw sx="100000" sy="100000" kx="0" ky="0" algn="bl" rotWithShape="0" blurRad="127000" dist="25400" dir="5400000">
-              <a:srgbClr val="1E2B4A">
+              <a:srgbClr val="312E81">
                 <a:alpha val="8000"/>
               </a:srgbClr>
             </a:outerShdw>
@@ -14980,7 +14980,7 @@
             <a:r>
               <a:rPr lang="en-US" sz="1450" b="1" dirty="0">
                 <a:solidFill>
-                  <a:srgbClr val="1D2433"/>
+                  <a:srgbClr val="0F172A"/>
                 </a:solidFill>
                 <a:latin typeface="Calibri" pitchFamily="34" charset="0"/>
                 <a:ea typeface="Calibri" pitchFamily="34" charset="-122"/>
@@ -15022,7 +15022,7 @@
             <a:r>
               <a:rPr lang="en-US" sz="1200" dirty="0">
                 <a:solidFill>
-                  <a:srgbClr val="4A5468"/>
+                  <a:srgbClr val="475569"/>
                 </a:solidFill>
                 <a:latin typeface="Calibri" pitchFamily="34" charset="0"/>
                 <a:ea typeface="Calibri" pitchFamily="34" charset="-122"/>
@@ -15049,17 +15049,17 @@
             <a:avLst/>
           </a:prstGeom>
           <a:solidFill>
-            <a:srgbClr val="E1E6EF"/>
+            <a:srgbClr val="E3E1FB"/>
           </a:solidFill>
           <a:ln w="15875">
             <a:solidFill>
-              <a:srgbClr val="BBC7DC"/>
+              <a:srgbClr val="C0BCF6"/>
             </a:solidFill>
             <a:prstDash val="solid"/>
           </a:ln>
           <a:effectLst>
             <a:outerShdw sx="100000" sy="100000" kx="0" ky="0" algn="bl" rotWithShape="0" blurRad="127000" dist="25400" dir="5400000">
-              <a:srgbClr val="1E2B4A">
+              <a:srgbClr val="312E81">
                 <a:alpha val="8000"/>
               </a:srgbClr>
             </a:outerShdw>
@@ -15120,7 +15120,7 @@
             <a:r>
               <a:rPr lang="en-US" sz="1450" b="1" dirty="0">
                 <a:solidFill>
-                  <a:srgbClr val="1D2433"/>
+                  <a:srgbClr val="0F172A"/>
                 </a:solidFill>
                 <a:latin typeface="Calibri" pitchFamily="34" charset="0"/>
                 <a:ea typeface="Calibri" pitchFamily="34" charset="-122"/>
@@ -15162,7 +15162,7 @@
             <a:r>
               <a:rPr lang="en-US" sz="1200" dirty="0">
                 <a:solidFill>
-                  <a:srgbClr val="4A5468"/>
+                  <a:srgbClr val="475569"/>
                 </a:solidFill>
                 <a:latin typeface="Calibri" pitchFamily="34" charset="0"/>
                 <a:ea typeface="Calibri" pitchFamily="34" charset="-122"/>
@@ -15189,17 +15189,17 @@
             <a:avLst/>
           </a:prstGeom>
           <a:solidFill>
-            <a:srgbClr val="E0EDEF"/>
+            <a:srgbClr val="F9DCE9"/>
           </a:solidFill>
           <a:ln w="15875">
             <a:solidFill>
-              <a:srgbClr val="BAD6DB"/>
+              <a:srgbClr val="F2B1CE"/>
             </a:solidFill>
             <a:prstDash val="solid"/>
           </a:ln>
           <a:effectLst>
             <a:outerShdw sx="100000" sy="100000" kx="0" ky="0" algn="bl" rotWithShape="0" blurRad="127000" dist="25400" dir="5400000">
-              <a:srgbClr val="1E2B4A">
+              <a:srgbClr val="312E81">
                 <a:alpha val="8000"/>
               </a:srgbClr>
             </a:outerShdw>
@@ -15260,7 +15260,7 @@
             <a:r>
               <a:rPr lang="en-US" sz="1450" b="1" dirty="0">
                 <a:solidFill>
-                  <a:srgbClr val="1D2433"/>
+                  <a:srgbClr val="0F172A"/>
                 </a:solidFill>
                 <a:latin typeface="Calibri" pitchFamily="34" charset="0"/>
                 <a:ea typeface="Calibri" pitchFamily="34" charset="-122"/>
@@ -15302,7 +15302,7 @@
             <a:r>
               <a:rPr lang="en-US" sz="1200" dirty="0">
                 <a:solidFill>
-                  <a:srgbClr val="4A5468"/>
+                  <a:srgbClr val="475569"/>
                 </a:solidFill>
                 <a:latin typeface="Calibri" pitchFamily="34" charset="0"/>
                 <a:ea typeface="Calibri" pitchFamily="34" charset="-122"/>
@@ -15341,7 +15341,7 @@
             <a:r>
               <a:rPr lang="en-US" sz="950" dirty="0">
                 <a:solidFill>
-                  <a:srgbClr val="8A93A5"/>
+                  <a:srgbClr val="94A3B8"/>
                 </a:solidFill>
                 <a:latin typeface="Calibri" pitchFamily="34" charset="0"/>
                 <a:ea typeface="Calibri" pitchFamily="34" charset="-122"/>
@@ -15391,7 +15391,7 @@
     <p:bg>
       <p:bgPr>
         <a:solidFill>
-          <a:srgbClr val="16213D"/>
+          <a:srgbClr val="1E1B4B"/>
         </a:solidFill>
       </p:bgPr>
     </p:bg>
@@ -15424,7 +15424,7 @@
             <a:avLst/>
           </a:prstGeom>
           <a:solidFill>
-            <a:srgbClr val="24365E"/>
+            <a:srgbClr val="312E81"/>
           </a:solidFill>
           <a:ln/>
         </p:spPr>
@@ -15444,7 +15444,7 @@
             <a:avLst/>
           </a:prstGeom>
           <a:solidFill>
-            <a:srgbClr val="24365E"/>
+            <a:srgbClr val="312E81"/>
           </a:solidFill>
           <a:ln/>
         </p:spPr>
@@ -15515,7 +15515,7 @@
             <a:r>
               <a:rPr lang="en-US" sz="1400" dirty="0">
                 <a:solidFill>
-                  <a:srgbClr val="D96F2B"/>
+                  <a:srgbClr val="D97706"/>
                 </a:solidFill>
                 <a:latin typeface="Calibri" pitchFamily="34" charset="0"/>
                 <a:ea typeface="Calibri" pitchFamily="34" charset="-122"/>
@@ -15554,7 +15554,7 @@
             <a:r>
               <a:rPr lang="en-US" sz="1250" dirty="0">
                 <a:solidFill>
-                  <a:srgbClr val="8FA6CC"/>
+                  <a:srgbClr val="A5B4FC"/>
                 </a:solidFill>
                 <a:latin typeface="Calibri" pitchFamily="34" charset="0"/>
                 <a:ea typeface="Calibri" pitchFamily="34" charset="-122"/>
@@ -15625,7 +15625,7 @@
             <a:r>
               <a:rPr lang="en-US" sz="2700" b="1" dirty="0">
                 <a:solidFill>
-                  <a:srgbClr val="1E2B4A"/>
+                  <a:srgbClr val="312E81"/>
                 </a:solidFill>
                 <a:latin typeface="Calibri" pitchFamily="34" charset="0"/>
                 <a:ea typeface="Calibri" pitchFamily="34" charset="-122"/>
@@ -15652,17 +15652,17 @@
             <a:avLst/>
           </a:prstGeom>
           <a:solidFill>
-            <a:srgbClr val="E1E6EF"/>
+            <a:srgbClr val="E3E1FB"/>
           </a:solidFill>
           <a:ln w="15875">
             <a:solidFill>
-              <a:srgbClr val="BBC7DC"/>
+              <a:srgbClr val="C0BCF6"/>
             </a:solidFill>
             <a:prstDash val="solid"/>
           </a:ln>
           <a:effectLst>
             <a:outerShdw sx="100000" sy="100000" kx="0" ky="0" algn="bl" rotWithShape="0" blurRad="127000" dist="25400" dir="5400000">
-              <a:srgbClr val="1E2B4A">
+              <a:srgbClr val="312E81">
                 <a:alpha val="8000"/>
               </a:srgbClr>
             </a:outerShdw>
@@ -15723,7 +15723,7 @@
             <a:r>
               <a:rPr lang="en-US" sz="1600" b="1" dirty="0">
                 <a:solidFill>
-                  <a:srgbClr val="1D2433"/>
+                  <a:srgbClr val="0F172A"/>
                 </a:solidFill>
                 <a:latin typeface="Calibri" pitchFamily="34" charset="0"/>
                 <a:ea typeface="Calibri" pitchFamily="34" charset="-122"/>
@@ -15762,7 +15762,7 @@
             <a:r>
               <a:rPr lang="en-US" sz="3400" b="1" dirty="0">
                 <a:solidFill>
-                  <a:srgbClr val="1E2B4A"/>
+                  <a:srgbClr val="312E81"/>
                 </a:solidFill>
                 <a:latin typeface="Calibri" pitchFamily="34" charset="0"/>
                 <a:ea typeface="Calibri" pitchFamily="34" charset="-122"/>
@@ -15804,7 +15804,7 @@
             <a:r>
               <a:rPr lang="en-US" sz="1050" dirty="0">
                 <a:solidFill>
-                  <a:srgbClr val="4A5468"/>
+                  <a:srgbClr val="475569"/>
                 </a:solidFill>
                 <a:latin typeface="Calibri" pitchFamily="34" charset="0"/>
                 <a:ea typeface="Calibri" pitchFamily="34" charset="-122"/>
@@ -15824,7 +15824,7 @@
             <a:r>
               <a:rPr lang="en-US" sz="1050" dirty="0">
                 <a:solidFill>
-                  <a:srgbClr val="4A5468"/>
+                  <a:srgbClr val="475569"/>
                 </a:solidFill>
                 <a:latin typeface="Calibri" pitchFamily="34" charset="0"/>
                 <a:ea typeface="Calibri" pitchFamily="34" charset="-122"/>
@@ -15863,7 +15863,7 @@
             <a:r>
               <a:rPr lang="en-US" sz="3400" b="1" dirty="0">
                 <a:solidFill>
-                  <a:srgbClr val="1E2B4A"/>
+                  <a:srgbClr val="312E81"/>
                 </a:solidFill>
                 <a:latin typeface="Calibri" pitchFamily="34" charset="0"/>
                 <a:ea typeface="Calibri" pitchFamily="34" charset="-122"/>
@@ -15905,7 +15905,7 @@
             <a:r>
               <a:rPr lang="en-US" sz="1050" dirty="0">
                 <a:solidFill>
-                  <a:srgbClr val="4A5468"/>
+                  <a:srgbClr val="475569"/>
                 </a:solidFill>
                 <a:latin typeface="Calibri" pitchFamily="34" charset="0"/>
                 <a:ea typeface="Calibri" pitchFamily="34" charset="-122"/>
@@ -15925,7 +15925,7 @@
             <a:r>
               <a:rPr lang="en-US" sz="1050" dirty="0">
                 <a:solidFill>
-                  <a:srgbClr val="4A5468"/>
+                  <a:srgbClr val="475569"/>
                 </a:solidFill>
                 <a:latin typeface="Calibri" pitchFamily="34" charset="0"/>
                 <a:ea typeface="Calibri" pitchFamily="34" charset="-122"/>
@@ -15967,7 +15967,7 @@
             <a:r>
               <a:rPr lang="en-US" sz="1250" dirty="0">
                 <a:solidFill>
-                  <a:srgbClr val="4A5468"/>
+                  <a:srgbClr val="475569"/>
                 </a:solidFill>
                 <a:latin typeface="Calibri" pitchFamily="34" charset="0"/>
                 <a:ea typeface="Calibri" pitchFamily="34" charset="-122"/>
@@ -16006,7 +16006,7 @@
             <a:r>
               <a:rPr lang="en-US" sz="950" dirty="0">
                 <a:solidFill>
-                  <a:srgbClr val="8A93A5"/>
+                  <a:srgbClr val="94A3B8"/>
                 </a:solidFill>
                 <a:latin typeface="Calibri" pitchFamily="34" charset="0"/>
                 <a:ea typeface="Calibri" pitchFamily="34" charset="-122"/>
@@ -16033,17 +16033,17 @@
             <a:avLst/>
           </a:prstGeom>
           <a:solidFill>
-            <a:srgbClr val="F9E8DD"/>
+            <a:srgbClr val="F9E9D7"/>
           </a:solidFill>
           <a:ln w="15875">
             <a:solidFill>
-              <a:srgbClr val="F1CBB3"/>
+              <a:srgbClr val="F1CEA5"/>
             </a:solidFill>
             <a:prstDash val="solid"/>
           </a:ln>
           <a:effectLst>
             <a:outerShdw sx="100000" sy="100000" kx="0" ky="0" algn="bl" rotWithShape="0" blurRad="127000" dist="25400" dir="5400000">
-              <a:srgbClr val="1E2B4A">
+              <a:srgbClr val="312E81">
                 <a:alpha val="8000"/>
               </a:srgbClr>
             </a:outerShdw>
@@ -16104,7 +16104,7 @@
             <a:r>
               <a:rPr lang="en-US" sz="1600" b="1" dirty="0">
                 <a:solidFill>
-                  <a:srgbClr val="1D2433"/>
+                  <a:srgbClr val="0F172A"/>
                 </a:solidFill>
                 <a:latin typeface="Calibri" pitchFamily="34" charset="0"/>
                 <a:ea typeface="Calibri" pitchFamily="34" charset="-122"/>
@@ -16143,7 +16143,7 @@
             <a:r>
               <a:rPr lang="en-US" sz="3400" b="1" dirty="0">
                 <a:solidFill>
-                  <a:srgbClr val="1E2B4A"/>
+                  <a:srgbClr val="312E81"/>
                 </a:solidFill>
                 <a:latin typeface="Calibri" pitchFamily="34" charset="0"/>
                 <a:ea typeface="Calibri" pitchFamily="34" charset="-122"/>
@@ -16185,7 +16185,7 @@
             <a:r>
               <a:rPr lang="en-US" sz="1050" dirty="0">
                 <a:solidFill>
-                  <a:srgbClr val="4A5468"/>
+                  <a:srgbClr val="475569"/>
                 </a:solidFill>
                 <a:latin typeface="Calibri" pitchFamily="34" charset="0"/>
                 <a:ea typeface="Calibri" pitchFamily="34" charset="-122"/>
@@ -16205,7 +16205,7 @@
             <a:r>
               <a:rPr lang="en-US" sz="1050" dirty="0">
                 <a:solidFill>
-                  <a:srgbClr val="4A5468"/>
+                  <a:srgbClr val="475569"/>
                 </a:solidFill>
                 <a:latin typeface="Calibri" pitchFamily="34" charset="0"/>
                 <a:ea typeface="Calibri" pitchFamily="34" charset="-122"/>
@@ -16244,7 +16244,7 @@
             <a:r>
               <a:rPr lang="en-US" sz="3400" b="1" dirty="0">
                 <a:solidFill>
-                  <a:srgbClr val="1E2B4A"/>
+                  <a:srgbClr val="312E81"/>
                 </a:solidFill>
                 <a:latin typeface="Calibri" pitchFamily="34" charset="0"/>
                 <a:ea typeface="Calibri" pitchFamily="34" charset="-122"/>
@@ -16286,7 +16286,7 @@
             <a:r>
               <a:rPr lang="en-US" sz="1050" dirty="0">
                 <a:solidFill>
-                  <a:srgbClr val="4A5468"/>
+                  <a:srgbClr val="475569"/>
                 </a:solidFill>
                 <a:latin typeface="Calibri" pitchFamily="34" charset="0"/>
                 <a:ea typeface="Calibri" pitchFamily="34" charset="-122"/>
@@ -16306,7 +16306,7 @@
             <a:r>
               <a:rPr lang="en-US" sz="1050" dirty="0">
                 <a:solidFill>
-                  <a:srgbClr val="4A5468"/>
+                  <a:srgbClr val="475569"/>
                 </a:solidFill>
                 <a:latin typeface="Calibri" pitchFamily="34" charset="0"/>
                 <a:ea typeface="Calibri" pitchFamily="34" charset="-122"/>
@@ -16348,7 +16348,7 @@
             <a:r>
               <a:rPr lang="en-US" sz="1250" dirty="0">
                 <a:solidFill>
-                  <a:srgbClr val="4A5468"/>
+                  <a:srgbClr val="475569"/>
                 </a:solidFill>
                 <a:latin typeface="Calibri" pitchFamily="34" charset="0"/>
                 <a:ea typeface="Calibri" pitchFamily="34" charset="-122"/>
@@ -16387,7 +16387,7 @@
             <a:r>
               <a:rPr lang="en-US" sz="950" dirty="0">
                 <a:solidFill>
-                  <a:srgbClr val="8A93A5"/>
+                  <a:srgbClr val="94A3B8"/>
                 </a:solidFill>
                 <a:latin typeface="Calibri" pitchFamily="34" charset="0"/>
                 <a:ea typeface="Calibri" pitchFamily="34" charset="-122"/>
@@ -16426,7 +16426,7 @@
             <a:r>
               <a:rPr lang="en-US" sz="950" dirty="0">
                 <a:solidFill>
-                  <a:srgbClr val="8A93A5"/>
+                  <a:srgbClr val="94A3B8"/>
                 </a:solidFill>
                 <a:latin typeface="Calibri" pitchFamily="34" charset="0"/>
                 <a:ea typeface="Calibri" pitchFamily="34" charset="-122"/>
@@ -16521,7 +16521,7 @@
             <a:r>
               <a:rPr lang="en-US" sz="2700" b="1" dirty="0">
                 <a:solidFill>
-                  <a:srgbClr val="1E2B4A"/>
+                  <a:srgbClr val="312E81"/>
                 </a:solidFill>
                 <a:latin typeface="Calibri" pitchFamily="34" charset="0"/>
                 <a:ea typeface="Calibri" pitchFamily="34" charset="-122"/>
@@ -16550,7 +16550,7 @@
             </a:avLst>
           </a:prstGeom>
           <a:solidFill>
-            <a:srgbClr val="1E2B4A"/>
+            <a:srgbClr val="312E81"/>
           </a:solidFill>
           <a:ln/>
         </p:spPr>
@@ -16647,7 +16647,7 @@
             <a:r>
               <a:rPr lang="en-US" sz="1400" b="1" dirty="0">
                 <a:solidFill>
-                  <a:srgbClr val="1D2433"/>
+                  <a:srgbClr val="0F172A"/>
                 </a:solidFill>
                 <a:latin typeface="Calibri" pitchFamily="34" charset="0"/>
                 <a:ea typeface="Calibri" pitchFamily="34" charset="-122"/>
@@ -16689,7 +16689,7 @@
             <a:r>
               <a:rPr lang="en-US" sz="1200" dirty="0">
                 <a:solidFill>
-                  <a:srgbClr val="4A5468"/>
+                  <a:srgbClr val="475569"/>
                 </a:solidFill>
                 <a:latin typeface="Calibri" pitchFamily="34" charset="0"/>
                 <a:ea typeface="Calibri" pitchFamily="34" charset="-122"/>
@@ -16731,7 +16731,7 @@
             <a:r>
               <a:rPr lang="en-US" sz="1400" b="1" dirty="0">
                 <a:solidFill>
-                  <a:srgbClr val="1D2433"/>
+                  <a:srgbClr val="0F172A"/>
                 </a:solidFill>
                 <a:latin typeface="Calibri" pitchFamily="34" charset="0"/>
                 <a:ea typeface="Calibri" pitchFamily="34" charset="-122"/>
@@ -16773,7 +16773,7 @@
             <a:r>
               <a:rPr lang="en-US" sz="1200" dirty="0">
                 <a:solidFill>
-                  <a:srgbClr val="4A5468"/>
+                  <a:srgbClr val="475569"/>
                 </a:solidFill>
                 <a:latin typeface="Calibri" pitchFamily="34" charset="0"/>
                 <a:ea typeface="Calibri" pitchFamily="34" charset="-122"/>
@@ -16815,7 +16815,7 @@
             <a:r>
               <a:rPr lang="en-US" sz="1400" b="1" dirty="0">
                 <a:solidFill>
-                  <a:srgbClr val="1D2433"/>
+                  <a:srgbClr val="0F172A"/>
                 </a:solidFill>
                 <a:latin typeface="Calibri" pitchFamily="34" charset="0"/>
                 <a:ea typeface="Calibri" pitchFamily="34" charset="-122"/>
@@ -16857,7 +16857,7 @@
             <a:r>
               <a:rPr lang="en-US" sz="1200" dirty="0">
                 <a:solidFill>
-                  <a:srgbClr val="4A5468"/>
+                  <a:srgbClr val="475569"/>
                 </a:solidFill>
                 <a:latin typeface="Calibri" pitchFamily="34" charset="0"/>
                 <a:ea typeface="Calibri" pitchFamily="34" charset="-122"/>
@@ -16884,17 +16884,17 @@
             <a:avLst/>
           </a:prstGeom>
           <a:solidFill>
-            <a:srgbClr val="F9E8DD"/>
+            <a:srgbClr val="F9E9D7"/>
           </a:solidFill>
           <a:ln w="15875">
             <a:solidFill>
-              <a:srgbClr val="F1CBB3"/>
+              <a:srgbClr val="F1CEA5"/>
             </a:solidFill>
             <a:prstDash val="solid"/>
           </a:ln>
           <a:effectLst>
             <a:outerShdw sx="100000" sy="100000" kx="0" ky="0" algn="bl" rotWithShape="0" blurRad="127000" dist="25400" dir="5400000">
-              <a:srgbClr val="1E2B4A">
+              <a:srgbClr val="312E81">
                 <a:alpha val="8000"/>
               </a:srgbClr>
             </a:outerShdw>
@@ -16940,17 +16940,17 @@
             <a:avLst/>
           </a:prstGeom>
           <a:solidFill>
-            <a:srgbClr val="F6ECDC"/>
+            <a:srgbClr val="D7EDF3"/>
           </a:solidFill>
           <a:ln w="15875">
             <a:solidFill>
-              <a:srgbClr val="ECD5B0"/>
+              <a:srgbClr val="A6D7E3"/>
             </a:solidFill>
             <a:prstDash val="solid"/>
           </a:ln>
           <a:effectLst>
             <a:outerShdw sx="100000" sy="100000" kx="0" ky="0" algn="bl" rotWithShape="0" blurRad="127000" dist="25400" dir="5400000">
-              <a:srgbClr val="1E2B4A">
+              <a:srgbClr val="312E81">
                 <a:alpha val="8000"/>
               </a:srgbClr>
             </a:outerShdw>
@@ -16996,17 +16996,17 @@
             <a:avLst/>
           </a:prstGeom>
           <a:solidFill>
-            <a:srgbClr val="E0EDEF"/>
+            <a:srgbClr val="F9DCE9"/>
           </a:solidFill>
           <a:ln w="15875">
             <a:solidFill>
-              <a:srgbClr val="BAD6DB"/>
+              <a:srgbClr val="F2B1CE"/>
             </a:solidFill>
             <a:prstDash val="solid"/>
           </a:ln>
           <a:effectLst>
             <a:outerShdw sx="100000" sy="100000" kx="0" ky="0" algn="bl" rotWithShape="0" blurRad="127000" dist="25400" dir="5400000">
-              <a:srgbClr val="1E2B4A">
+              <a:srgbClr val="312E81">
                 <a:alpha val="8000"/>
               </a:srgbClr>
             </a:outerShdw>
@@ -17064,7 +17064,7 @@
             <a:r>
               <a:rPr lang="en-US" sz="950" dirty="0">
                 <a:solidFill>
-                  <a:srgbClr val="8A93A5"/>
+                  <a:srgbClr val="94A3B8"/>
                 </a:solidFill>
                 <a:latin typeface="Calibri" pitchFamily="34" charset="0"/>
                 <a:ea typeface="Calibri" pitchFamily="34" charset="-122"/>
@@ -17159,7 +17159,7 @@
             <a:r>
               <a:rPr lang="en-US" sz="2700" b="1" dirty="0">
                 <a:solidFill>
-                  <a:srgbClr val="1E2B4A"/>
+                  <a:srgbClr val="312E81"/>
                 </a:solidFill>
                 <a:latin typeface="Calibri" pitchFamily="34" charset="0"/>
                 <a:ea typeface="Calibri" pitchFamily="34" charset="-122"/>
@@ -17186,17 +17186,17 @@
             <a:avLst/>
           </a:prstGeom>
           <a:solidFill>
-            <a:srgbClr val="E1E6EF"/>
+            <a:srgbClr val="E3E1FB"/>
           </a:solidFill>
           <a:ln w="15875">
             <a:solidFill>
-              <a:srgbClr val="BBC7DC"/>
+              <a:srgbClr val="C0BCF6"/>
             </a:solidFill>
             <a:prstDash val="solid"/>
           </a:ln>
           <a:effectLst>
             <a:outerShdw sx="100000" sy="100000" kx="0" ky="0" algn="bl" rotWithShape="0" blurRad="127000" dist="25400" dir="5400000">
-              <a:srgbClr val="1E2B4A">
+              <a:srgbClr val="312E81">
                 <a:alpha val="8000"/>
               </a:srgbClr>
             </a:outerShdw>
@@ -17254,7 +17254,7 @@
             <a:r>
               <a:rPr lang="en-US" sz="1800" b="1" dirty="0">
                 <a:solidFill>
-                  <a:srgbClr val="1D2433"/>
+                  <a:srgbClr val="0F172A"/>
                 </a:solidFill>
                 <a:latin typeface="Calibri" pitchFamily="34" charset="0"/>
                 <a:ea typeface="Calibri" pitchFamily="34" charset="-122"/>
@@ -17296,7 +17296,7 @@
             <a:r>
               <a:rPr lang="en-US" sz="1350" b="1" dirty="0">
                 <a:solidFill>
-                  <a:srgbClr val="1D2433"/>
+                  <a:srgbClr val="0F172A"/>
                 </a:solidFill>
                 <a:latin typeface="Calibri" pitchFamily="34" charset="0"/>
                 <a:ea typeface="Calibri" pitchFamily="34" charset="-122"/>
@@ -17323,7 +17323,7 @@
             <a:avLst/>
           </a:prstGeom>
           <a:solidFill>
-            <a:srgbClr val="41639E"/>
+            <a:srgbClr val="4F46E5"/>
           </a:solidFill>
           <a:ln/>
         </p:spPr>
@@ -17397,7 +17397,7 @@
             <a:r>
               <a:rPr lang="en-US" sz="1250" dirty="0">
                 <a:solidFill>
-                  <a:srgbClr val="4A5468"/>
+                  <a:srgbClr val="475569"/>
                 </a:solidFill>
                 <a:latin typeface="Calibri" pitchFamily="34" charset="0"/>
                 <a:ea typeface="Calibri" pitchFamily="34" charset="-122"/>
@@ -17424,7 +17424,7 @@
             <a:avLst/>
           </a:prstGeom>
           <a:solidFill>
-            <a:srgbClr val="41639E"/>
+            <a:srgbClr val="4F46E5"/>
           </a:solidFill>
           <a:ln/>
         </p:spPr>
@@ -17498,7 +17498,7 @@
             <a:r>
               <a:rPr lang="en-US" sz="1250" dirty="0">
                 <a:solidFill>
-                  <a:srgbClr val="4A5468"/>
+                  <a:srgbClr val="475569"/>
                 </a:solidFill>
                 <a:latin typeface="Calibri" pitchFamily="34" charset="0"/>
                 <a:ea typeface="Calibri" pitchFamily="34" charset="-122"/>
@@ -17525,17 +17525,17 @@
             <a:avLst/>
           </a:prstGeom>
           <a:solidFill>
-            <a:srgbClr val="F9E8DD"/>
+            <a:srgbClr val="F9E9D7"/>
           </a:solidFill>
           <a:ln w="15875">
             <a:solidFill>
-              <a:srgbClr val="F1CBB3"/>
+              <a:srgbClr val="F1CEA5"/>
             </a:solidFill>
             <a:prstDash val="solid"/>
           </a:ln>
           <a:effectLst>
             <a:outerShdw sx="100000" sy="100000" kx="0" ky="0" algn="bl" rotWithShape="0" blurRad="127000" dist="25400" dir="5400000">
-              <a:srgbClr val="1E2B4A">
+              <a:srgbClr val="312E81">
                 <a:alpha val="8000"/>
               </a:srgbClr>
             </a:outerShdw>
@@ -17593,7 +17593,7 @@
             <a:r>
               <a:rPr lang="en-US" sz="1800" b="1" dirty="0">
                 <a:solidFill>
-                  <a:srgbClr val="1D2433"/>
+                  <a:srgbClr val="0F172A"/>
                 </a:solidFill>
                 <a:latin typeface="Calibri" pitchFamily="34" charset="0"/>
                 <a:ea typeface="Calibri" pitchFamily="34" charset="-122"/>
@@ -17622,7 +17622,7 @@
             </a:avLst>
           </a:prstGeom>
           <a:solidFill>
-            <a:srgbClr val="E5EEF4"/>
+            <a:srgbClr val="EEF2FF"/>
           </a:solidFill>
           <a:ln/>
         </p:spPr>
@@ -17654,7 +17654,7 @@
             <a:r>
               <a:rPr lang="en-US" sz="2200" b="1" dirty="0">
                 <a:solidFill>
-                  <a:srgbClr val="D96F2B"/>
+                  <a:srgbClr val="D97706"/>
                 </a:solidFill>
                 <a:latin typeface="Calibri" pitchFamily="34" charset="0"/>
                 <a:ea typeface="Calibri" pitchFamily="34" charset="-122"/>
@@ -17696,7 +17696,7 @@
             <a:r>
               <a:rPr lang="en-US" sz="1200" dirty="0">
                 <a:solidFill>
-                  <a:srgbClr val="1D2433"/>
+                  <a:srgbClr val="0F172A"/>
                 </a:solidFill>
                 <a:latin typeface="Calibri" pitchFamily="34" charset="0"/>
                 <a:ea typeface="Calibri" pitchFamily="34" charset="-122"/>
@@ -17725,7 +17725,7 @@
             </a:avLst>
           </a:prstGeom>
           <a:solidFill>
-            <a:srgbClr val="E5EEF4"/>
+            <a:srgbClr val="EEF2FF"/>
           </a:solidFill>
           <a:ln/>
         </p:spPr>
@@ -17757,7 +17757,7 @@
             <a:r>
               <a:rPr lang="en-US" sz="2200" b="1" dirty="0">
                 <a:solidFill>
-                  <a:srgbClr val="D96F2B"/>
+                  <a:srgbClr val="D97706"/>
                 </a:solidFill>
                 <a:latin typeface="Calibri" pitchFamily="34" charset="0"/>
                 <a:ea typeface="Calibri" pitchFamily="34" charset="-122"/>
@@ -17799,7 +17799,7 @@
             <a:r>
               <a:rPr lang="en-US" sz="1200" dirty="0">
                 <a:solidFill>
-                  <a:srgbClr val="1D2433"/>
+                  <a:srgbClr val="0F172A"/>
                 </a:solidFill>
                 <a:latin typeface="Calibri" pitchFamily="34" charset="0"/>
                 <a:ea typeface="Calibri" pitchFamily="34" charset="-122"/>
@@ -17838,7 +17838,7 @@
             <a:r>
               <a:rPr lang="en-US" sz="950" dirty="0">
                 <a:solidFill>
-                  <a:srgbClr val="8A93A5"/>
+                  <a:srgbClr val="94A3B8"/>
                 </a:solidFill>
                 <a:latin typeface="Calibri" pitchFamily="34" charset="0"/>
                 <a:ea typeface="Calibri" pitchFamily="34" charset="-122"/>
@@ -17933,7 +17933,7 @@
             <a:r>
               <a:rPr lang="en-US" sz="2700" b="1" dirty="0">
                 <a:solidFill>
-                  <a:srgbClr val="1E2B4A"/>
+                  <a:srgbClr val="312E81"/>
                 </a:solidFill>
                 <a:latin typeface="Calibri" pitchFamily="34" charset="0"/>
                 <a:ea typeface="Calibri" pitchFamily="34" charset="-122"/>
@@ -17972,7 +17972,7 @@
             <a:r>
               <a:rPr lang="en-US" sz="1700" b="1" dirty="0">
                 <a:solidFill>
-                  <a:srgbClr val="1D2433"/>
+                  <a:srgbClr val="0F172A"/>
                 </a:solidFill>
                 <a:latin typeface="Calibri" pitchFamily="34" charset="0"/>
                 <a:ea typeface="Calibri" pitchFamily="34" charset="-122"/>
@@ -17999,7 +17999,7 @@
             <a:avLst/>
           </a:prstGeom>
           <a:solidFill>
-            <a:srgbClr val="41639E"/>
+            <a:srgbClr val="4F46E5"/>
           </a:solidFill>
           <a:ln/>
         </p:spPr>
@@ -18031,7 +18031,7 @@
             <a:r>
               <a:rPr lang="en-US" sz="1400" b="1" dirty="0">
                 <a:solidFill>
-                  <a:srgbClr val="1D2433"/>
+                  <a:srgbClr val="0F172A"/>
                 </a:solidFill>
                 <a:latin typeface="Calibri" pitchFamily="34" charset="0"/>
                 <a:ea typeface="Calibri" pitchFamily="34" charset="-122"/>
@@ -18073,7 +18073,7 @@
             <a:r>
               <a:rPr lang="en-US" sz="1200" dirty="0">
                 <a:solidFill>
-                  <a:srgbClr val="4A5468"/>
+                  <a:srgbClr val="475569"/>
                 </a:solidFill>
                 <a:latin typeface="Calibri" pitchFamily="34" charset="0"/>
                 <a:ea typeface="Calibri" pitchFamily="34" charset="-122"/>
@@ -18112,7 +18112,7 @@
             <a:r>
               <a:rPr lang="en-US" sz="1050" i="1" dirty="0">
                 <a:solidFill>
-                  <a:srgbClr val="8A93A5"/>
+                  <a:srgbClr val="94A3B8"/>
                 </a:solidFill>
                 <a:latin typeface="Calibri" pitchFamily="34" charset="0"/>
                 <a:ea typeface="Calibri" pitchFamily="34" charset="-122"/>
@@ -18139,7 +18139,7 @@
             <a:avLst/>
           </a:prstGeom>
           <a:solidFill>
-            <a:srgbClr val="41639E"/>
+            <a:srgbClr val="4F46E5"/>
           </a:solidFill>
           <a:ln/>
         </p:spPr>
@@ -18171,7 +18171,7 @@
             <a:r>
               <a:rPr lang="en-US" sz="1400" b="1" dirty="0">
                 <a:solidFill>
-                  <a:srgbClr val="1D2433"/>
+                  <a:srgbClr val="0F172A"/>
                 </a:solidFill>
                 <a:latin typeface="Calibri" pitchFamily="34" charset="0"/>
                 <a:ea typeface="Calibri" pitchFamily="34" charset="-122"/>
@@ -18213,7 +18213,7 @@
             <a:r>
               <a:rPr lang="en-US" sz="1200" dirty="0">
                 <a:solidFill>
-                  <a:srgbClr val="4A5468"/>
+                  <a:srgbClr val="475569"/>
                 </a:solidFill>
                 <a:latin typeface="Calibri" pitchFamily="34" charset="0"/>
                 <a:ea typeface="Calibri" pitchFamily="34" charset="-122"/>
@@ -18252,7 +18252,7 @@
             <a:r>
               <a:rPr lang="en-US" sz="1050" i="1" dirty="0">
                 <a:solidFill>
-                  <a:srgbClr val="8A93A5"/>
+                  <a:srgbClr val="94A3B8"/>
                 </a:solidFill>
                 <a:latin typeface="Calibri" pitchFamily="34" charset="0"/>
                 <a:ea typeface="Calibri" pitchFamily="34" charset="-122"/>
@@ -18279,7 +18279,7 @@
             <a:avLst/>
           </a:prstGeom>
           <a:solidFill>
-            <a:srgbClr val="41639E"/>
+            <a:srgbClr val="4F46E5"/>
           </a:solidFill>
           <a:ln/>
         </p:spPr>
@@ -18311,7 +18311,7 @@
             <a:r>
               <a:rPr lang="en-US" sz="1400" b="1" dirty="0">
                 <a:solidFill>
-                  <a:srgbClr val="1D2433"/>
+                  <a:srgbClr val="0F172A"/>
                 </a:solidFill>
                 <a:latin typeface="Calibri" pitchFamily="34" charset="0"/>
                 <a:ea typeface="Calibri" pitchFamily="34" charset="-122"/>
@@ -18353,7 +18353,7 @@
             <a:r>
               <a:rPr lang="en-US" sz="1200" dirty="0">
                 <a:solidFill>
-                  <a:srgbClr val="4A5468"/>
+                  <a:srgbClr val="475569"/>
                 </a:solidFill>
                 <a:latin typeface="Calibri" pitchFamily="34" charset="0"/>
                 <a:ea typeface="Calibri" pitchFamily="34" charset="-122"/>
@@ -18392,7 +18392,7 @@
             <a:r>
               <a:rPr lang="en-US" sz="1050" i="1" dirty="0">
                 <a:solidFill>
-                  <a:srgbClr val="8A93A5"/>
+                  <a:srgbClr val="94A3B8"/>
                 </a:solidFill>
                 <a:latin typeface="Calibri" pitchFamily="34" charset="0"/>
                 <a:ea typeface="Calibri" pitchFamily="34" charset="-122"/>
@@ -18431,7 +18431,7 @@
             <a:r>
               <a:rPr lang="en-US" sz="1700" b="1" dirty="0">
                 <a:solidFill>
-                  <a:srgbClr val="1D2433"/>
+                  <a:srgbClr val="0F172A"/>
                 </a:solidFill>
                 <a:latin typeface="Calibri" pitchFamily="34" charset="0"/>
                 <a:ea typeface="Calibri" pitchFamily="34" charset="-122"/>
@@ -18470,7 +18470,7 @@
             <a:r>
               <a:rPr lang="en-US" sz="1400" b="1" dirty="0">
                 <a:solidFill>
-                  <a:srgbClr val="1D2433"/>
+                  <a:srgbClr val="0F172A"/>
                 </a:solidFill>
                 <a:latin typeface="Calibri" pitchFamily="34" charset="0"/>
                 <a:ea typeface="Calibri" pitchFamily="34" charset="-122"/>
@@ -18512,7 +18512,7 @@
             <a:r>
               <a:rPr lang="en-US" sz="1200" dirty="0">
                 <a:solidFill>
-                  <a:srgbClr val="4A5468"/>
+                  <a:srgbClr val="475569"/>
                 </a:solidFill>
                 <a:latin typeface="Calibri" pitchFamily="34" charset="0"/>
                 <a:ea typeface="Calibri" pitchFamily="34" charset="-122"/>
@@ -18551,7 +18551,7 @@
             <a:r>
               <a:rPr lang="en-US" sz="1050" i="1" dirty="0">
                 <a:solidFill>
-                  <a:srgbClr val="8A93A5"/>
+                  <a:srgbClr val="94A3B8"/>
                 </a:solidFill>
                 <a:latin typeface="Calibri" pitchFamily="34" charset="0"/>
                 <a:ea typeface="Calibri" pitchFamily="34" charset="-122"/>
@@ -18590,7 +18590,7 @@
             <a:r>
               <a:rPr lang="en-US" sz="1400" b="1" dirty="0">
                 <a:solidFill>
-                  <a:srgbClr val="1D2433"/>
+                  <a:srgbClr val="0F172A"/>
                 </a:solidFill>
                 <a:latin typeface="Calibri" pitchFamily="34" charset="0"/>
                 <a:ea typeface="Calibri" pitchFamily="34" charset="-122"/>
@@ -18632,7 +18632,7 @@
             <a:r>
               <a:rPr lang="en-US" sz="1200" dirty="0">
                 <a:solidFill>
-                  <a:srgbClr val="4A5468"/>
+                  <a:srgbClr val="475569"/>
                 </a:solidFill>
                 <a:latin typeface="Calibri" pitchFamily="34" charset="0"/>
                 <a:ea typeface="Calibri" pitchFamily="34" charset="-122"/>
@@ -18671,7 +18671,7 @@
             <a:r>
               <a:rPr lang="en-US" sz="1050" i="1" dirty="0">
                 <a:solidFill>
-                  <a:srgbClr val="8A93A5"/>
+                  <a:srgbClr val="94A3B8"/>
                 </a:solidFill>
                 <a:latin typeface="Calibri" pitchFamily="34" charset="0"/>
                 <a:ea typeface="Calibri" pitchFamily="34" charset="-122"/>
@@ -18710,7 +18710,7 @@
             <a:r>
               <a:rPr lang="en-US" sz="1400" b="1" dirty="0">
                 <a:solidFill>
-                  <a:srgbClr val="1D2433"/>
+                  <a:srgbClr val="0F172A"/>
                 </a:solidFill>
                 <a:latin typeface="Calibri" pitchFamily="34" charset="0"/>
                 <a:ea typeface="Calibri" pitchFamily="34" charset="-122"/>
@@ -18752,7 +18752,7 @@
             <a:r>
               <a:rPr lang="en-US" sz="1200" dirty="0">
                 <a:solidFill>
-                  <a:srgbClr val="4A5468"/>
+                  <a:srgbClr val="475569"/>
                 </a:solidFill>
                 <a:latin typeface="Calibri" pitchFamily="34" charset="0"/>
                 <a:ea typeface="Calibri" pitchFamily="34" charset="-122"/>
@@ -18791,7 +18791,7 @@
             <a:r>
               <a:rPr lang="en-US" sz="1050" i="1" dirty="0">
                 <a:solidFill>
-                  <a:srgbClr val="8A93A5"/>
+                  <a:srgbClr val="94A3B8"/>
                 </a:solidFill>
                 <a:latin typeface="Calibri" pitchFamily="34" charset="0"/>
                 <a:ea typeface="Calibri" pitchFamily="34" charset="-122"/>
@@ -18818,17 +18818,17 @@
             <a:avLst/>
           </a:prstGeom>
           <a:solidFill>
-            <a:srgbClr val="E1E6EF"/>
+            <a:srgbClr val="E3E1FB"/>
           </a:solidFill>
           <a:ln w="15875">
             <a:solidFill>
-              <a:srgbClr val="BBC7DC"/>
+              <a:srgbClr val="C0BCF6"/>
             </a:solidFill>
             <a:prstDash val="solid"/>
           </a:ln>
           <a:effectLst>
             <a:outerShdw sx="100000" sy="100000" kx="0" ky="0" algn="bl" rotWithShape="0" blurRad="127000" dist="25400" dir="5400000">
-              <a:srgbClr val="1E2B4A">
+              <a:srgbClr val="312E81">
                 <a:alpha val="8000"/>
               </a:srgbClr>
             </a:outerShdw>
@@ -18874,17 +18874,17 @@
             <a:avLst/>
           </a:prstGeom>
           <a:solidFill>
-            <a:srgbClr val="F6ECDC"/>
+            <a:srgbClr val="D7EDF3"/>
           </a:solidFill>
           <a:ln w="15875">
             <a:solidFill>
-              <a:srgbClr val="ECD5B0"/>
+              <a:srgbClr val="A6D7E3"/>
             </a:solidFill>
             <a:prstDash val="solid"/>
           </a:ln>
           <a:effectLst>
             <a:outerShdw sx="100000" sy="100000" kx="0" ky="0" algn="bl" rotWithShape="0" blurRad="127000" dist="25400" dir="5400000">
-              <a:srgbClr val="1E2B4A">
+              <a:srgbClr val="312E81">
                 <a:alpha val="8000"/>
               </a:srgbClr>
             </a:outerShdw>
@@ -18930,17 +18930,17 @@
             <a:avLst/>
           </a:prstGeom>
           <a:solidFill>
-            <a:srgbClr val="F9E8DD"/>
+            <a:srgbClr val="F9E9D7"/>
           </a:solidFill>
           <a:ln w="15875">
             <a:solidFill>
-              <a:srgbClr val="F1CBB3"/>
+              <a:srgbClr val="F1CEA5"/>
             </a:solidFill>
             <a:prstDash val="solid"/>
           </a:ln>
           <a:effectLst>
             <a:outerShdw sx="100000" sy="100000" kx="0" ky="0" algn="bl" rotWithShape="0" blurRad="127000" dist="25400" dir="5400000">
-              <a:srgbClr val="1E2B4A">
+              <a:srgbClr val="312E81">
                 <a:alpha val="8000"/>
               </a:srgbClr>
             </a:outerShdw>
@@ -18998,7 +18998,7 @@
             <a:r>
               <a:rPr lang="en-US" sz="950" dirty="0">
                 <a:solidFill>
-                  <a:srgbClr val="8A93A5"/>
+                  <a:srgbClr val="94A3B8"/>
                 </a:solidFill>
                 <a:latin typeface="Calibri" pitchFamily="34" charset="0"/>
                 <a:ea typeface="Calibri" pitchFamily="34" charset="-122"/>
@@ -19093,7 +19093,7 @@
             <a:r>
               <a:rPr lang="en-US" sz="2700" b="1" dirty="0">
                 <a:solidFill>
-                  <a:srgbClr val="1E2B4A"/>
+                  <a:srgbClr val="312E81"/>
                 </a:solidFill>
                 <a:latin typeface="Calibri" pitchFamily="34" charset="0"/>
                 <a:ea typeface="Calibri" pitchFamily="34" charset="-122"/>
@@ -19135,7 +19135,7 @@
             <a:r>
               <a:rPr lang="en-US" sz="1300" dirty="0">
                 <a:solidFill>
-                  <a:srgbClr val="4A5468"/>
+                  <a:srgbClr val="475569"/>
                 </a:solidFill>
                 <a:latin typeface="Calibri" pitchFamily="34" charset="0"/>
                 <a:ea typeface="Calibri" pitchFamily="34" charset="-122"/>
@@ -19162,17 +19162,17 @@
             <a:avLst/>
           </a:prstGeom>
           <a:solidFill>
-            <a:srgbClr val="E1E6EF"/>
+            <a:srgbClr val="E3E1FB"/>
           </a:solidFill>
           <a:ln w="15875">
             <a:solidFill>
-              <a:srgbClr val="BBC7DC"/>
+              <a:srgbClr val="C0BCF6"/>
             </a:solidFill>
             <a:prstDash val="solid"/>
           </a:ln>
           <a:effectLst>
             <a:outerShdw sx="100000" sy="100000" kx="0" ky="0" algn="bl" rotWithShape="0" blurRad="127000" dist="25400" dir="5400000">
-              <a:srgbClr val="1E2B4A">
+              <a:srgbClr val="312E81">
                 <a:alpha val="8000"/>
               </a:srgbClr>
             </a:outerShdw>
@@ -19233,7 +19233,7 @@
             <a:r>
               <a:rPr lang="en-US" sz="1150" b="1" dirty="0">
                 <a:solidFill>
-                  <a:srgbClr val="1D2433"/>
+                  <a:srgbClr val="0F172A"/>
                 </a:solidFill>
                 <a:latin typeface="Calibri" pitchFamily="34" charset="0"/>
                 <a:ea typeface="Calibri" pitchFamily="34" charset="-122"/>
@@ -19260,17 +19260,17 @@
             <a:avLst/>
           </a:prstGeom>
           <a:solidFill>
-            <a:srgbClr val="E0EDEF"/>
+            <a:srgbClr val="F9DCE9"/>
           </a:solidFill>
           <a:ln w="15875">
             <a:solidFill>
-              <a:srgbClr val="BAD6DB"/>
+              <a:srgbClr val="F2B1CE"/>
             </a:solidFill>
             <a:prstDash val="solid"/>
           </a:ln>
           <a:effectLst>
             <a:outerShdw sx="100000" sy="100000" kx="0" ky="0" algn="bl" rotWithShape="0" blurRad="127000" dist="25400" dir="5400000">
-              <a:srgbClr val="1E2B4A">
+              <a:srgbClr val="312E81">
                 <a:alpha val="8000"/>
               </a:srgbClr>
             </a:outerShdw>
@@ -19331,7 +19331,7 @@
             <a:r>
               <a:rPr lang="en-US" sz="1150" b="1" dirty="0">
                 <a:solidFill>
-                  <a:srgbClr val="1D2433"/>
+                  <a:srgbClr val="0F172A"/>
                 </a:solidFill>
                 <a:latin typeface="Calibri" pitchFamily="34" charset="0"/>
                 <a:ea typeface="Calibri" pitchFamily="34" charset="-122"/>
@@ -19358,17 +19358,17 @@
             <a:avLst/>
           </a:prstGeom>
           <a:solidFill>
-            <a:srgbClr val="E1E6EF"/>
+            <a:srgbClr val="E3E1FB"/>
           </a:solidFill>
           <a:ln w="15875">
             <a:solidFill>
-              <a:srgbClr val="BBC7DC"/>
+              <a:srgbClr val="C0BCF6"/>
             </a:solidFill>
             <a:prstDash val="solid"/>
           </a:ln>
           <a:effectLst>
             <a:outerShdw sx="100000" sy="100000" kx="0" ky="0" algn="bl" rotWithShape="0" blurRad="127000" dist="25400" dir="5400000">
-              <a:srgbClr val="1E2B4A">
+              <a:srgbClr val="312E81">
                 <a:alpha val="8000"/>
               </a:srgbClr>
             </a:outerShdw>
@@ -19429,7 +19429,7 @@
             <a:r>
               <a:rPr lang="en-US" sz="1150" b="1" dirty="0">
                 <a:solidFill>
-                  <a:srgbClr val="1D2433"/>
+                  <a:srgbClr val="0F172A"/>
                 </a:solidFill>
                 <a:latin typeface="Calibri" pitchFamily="34" charset="0"/>
                 <a:ea typeface="Calibri" pitchFamily="34" charset="-122"/>
@@ -19456,17 +19456,17 @@
             <a:avLst/>
           </a:prstGeom>
           <a:solidFill>
-            <a:srgbClr val="F9E8DD"/>
+            <a:srgbClr val="F9E9D7"/>
           </a:solidFill>
           <a:ln w="15875">
             <a:solidFill>
-              <a:srgbClr val="F1CBB3"/>
+              <a:srgbClr val="F1CEA5"/>
             </a:solidFill>
             <a:prstDash val="solid"/>
           </a:ln>
           <a:effectLst>
             <a:outerShdw sx="100000" sy="100000" kx="0" ky="0" algn="bl" rotWithShape="0" blurRad="127000" dist="25400" dir="5400000">
-              <a:srgbClr val="1E2B4A">
+              <a:srgbClr val="312E81">
                 <a:alpha val="8000"/>
               </a:srgbClr>
             </a:outerShdw>
@@ -19527,7 +19527,7 @@
             <a:r>
               <a:rPr lang="en-US" sz="1150" b="1" dirty="0">
                 <a:solidFill>
-                  <a:srgbClr val="1D2433"/>
+                  <a:srgbClr val="0F172A"/>
                 </a:solidFill>
                 <a:latin typeface="Calibri" pitchFamily="34" charset="0"/>
                 <a:ea typeface="Calibri" pitchFamily="34" charset="-122"/>
@@ -19554,17 +19554,17 @@
             <a:avLst/>
           </a:prstGeom>
           <a:solidFill>
-            <a:srgbClr val="F6ECDC"/>
+            <a:srgbClr val="D7EDF3"/>
           </a:solidFill>
           <a:ln w="15875">
             <a:solidFill>
-              <a:srgbClr val="ECD5B0"/>
+              <a:srgbClr val="A6D7E3"/>
             </a:solidFill>
             <a:prstDash val="solid"/>
           </a:ln>
           <a:effectLst>
             <a:outerShdw sx="100000" sy="100000" kx="0" ky="0" algn="bl" rotWithShape="0" blurRad="127000" dist="25400" dir="5400000">
-              <a:srgbClr val="1E2B4A">
+              <a:srgbClr val="312E81">
                 <a:alpha val="8000"/>
               </a:srgbClr>
             </a:outerShdw>
@@ -19625,7 +19625,7 @@
             <a:r>
               <a:rPr lang="en-US" sz="1150" b="1" dirty="0">
                 <a:solidFill>
-                  <a:srgbClr val="1D2433"/>
+                  <a:srgbClr val="0F172A"/>
                 </a:solidFill>
                 <a:latin typeface="Calibri" pitchFamily="34" charset="0"/>
                 <a:ea typeface="Calibri" pitchFamily="34" charset="-122"/>
@@ -19652,17 +19652,17 @@
             <a:avLst/>
           </a:prstGeom>
           <a:solidFill>
-            <a:srgbClr val="E0EDEF"/>
+            <a:srgbClr val="F9DCE9"/>
           </a:solidFill>
           <a:ln w="15875">
             <a:solidFill>
-              <a:srgbClr val="BAD6DB"/>
+              <a:srgbClr val="F2B1CE"/>
             </a:solidFill>
             <a:prstDash val="solid"/>
           </a:ln>
           <a:effectLst>
             <a:outerShdw sx="100000" sy="100000" kx="0" ky="0" algn="bl" rotWithShape="0" blurRad="127000" dist="25400" dir="5400000">
-              <a:srgbClr val="1E2B4A">
+              <a:srgbClr val="312E81">
                 <a:alpha val="8000"/>
               </a:srgbClr>
             </a:outerShdw>
@@ -19723,7 +19723,7 @@
             <a:r>
               <a:rPr lang="en-US" sz="1150" b="1" dirty="0">
                 <a:solidFill>
-                  <a:srgbClr val="1D2433"/>
+                  <a:srgbClr val="0F172A"/>
                 </a:solidFill>
                 <a:latin typeface="Calibri" pitchFamily="34" charset="0"/>
                 <a:ea typeface="Calibri" pitchFamily="34" charset="-122"/>
@@ -19750,17 +19750,17 @@
             <a:avLst/>
           </a:prstGeom>
           <a:solidFill>
-            <a:srgbClr val="E1E6EF"/>
+            <a:srgbClr val="E3E1FB"/>
           </a:solidFill>
           <a:ln w="15875">
             <a:solidFill>
-              <a:srgbClr val="BBC7DC"/>
+              <a:srgbClr val="C0BCF6"/>
             </a:solidFill>
             <a:prstDash val="solid"/>
           </a:ln>
           <a:effectLst>
             <a:outerShdw sx="100000" sy="100000" kx="0" ky="0" algn="bl" rotWithShape="0" blurRad="127000" dist="25400" dir="5400000">
-              <a:srgbClr val="1E2B4A">
+              <a:srgbClr val="312E81">
                 <a:alpha val="8000"/>
               </a:srgbClr>
             </a:outerShdw>
@@ -19821,7 +19821,7 @@
             <a:r>
               <a:rPr lang="en-US" sz="1150" b="1" dirty="0">
                 <a:solidFill>
-                  <a:srgbClr val="1D2433"/>
+                  <a:srgbClr val="0F172A"/>
                 </a:solidFill>
                 <a:latin typeface="Calibri" pitchFamily="34" charset="0"/>
                 <a:ea typeface="Calibri" pitchFamily="34" charset="-122"/>
@@ -19860,7 +19860,7 @@
             <a:r>
               <a:rPr lang="en-US" sz="1450" b="1" dirty="0">
                 <a:solidFill>
-                  <a:srgbClr val="1D2433"/>
+                  <a:srgbClr val="0F172A"/>
                 </a:solidFill>
                 <a:latin typeface="Calibri" pitchFamily="34" charset="0"/>
                 <a:ea typeface="Calibri" pitchFamily="34" charset="-122"/>
@@ -19902,7 +19902,7 @@
             <a:r>
               <a:rPr lang="en-US" sz="1200" dirty="0">
                 <a:solidFill>
-                  <a:srgbClr val="4A5468"/>
+                  <a:srgbClr val="475569"/>
                 </a:solidFill>
                 <a:latin typeface="Calibri" pitchFamily="34" charset="0"/>
                 <a:ea typeface="Calibri" pitchFamily="34" charset="-122"/>
@@ -19922,7 +19922,7 @@
             <a:r>
               <a:rPr lang="en-US" sz="1200" dirty="0">
                 <a:solidFill>
-                  <a:srgbClr val="4A5468"/>
+                  <a:srgbClr val="475569"/>
                 </a:solidFill>
                 <a:latin typeface="Calibri" pitchFamily="34" charset="0"/>
                 <a:ea typeface="Calibri" pitchFamily="34" charset="-122"/>
@@ -19961,7 +19961,7 @@
             <a:r>
               <a:rPr lang="en-US" sz="1450" b="1" dirty="0">
                 <a:solidFill>
-                  <a:srgbClr val="1D2433"/>
+                  <a:srgbClr val="0F172A"/>
                 </a:solidFill>
                 <a:latin typeface="Calibri" pitchFamily="34" charset="0"/>
                 <a:ea typeface="Calibri" pitchFamily="34" charset="-122"/>
@@ -20000,7 +20000,7 @@
             <a:r>
               <a:rPr lang="en-US" sz="1250" b="1" dirty="0">
                 <a:solidFill>
-                  <a:srgbClr val="1D2433"/>
+                  <a:srgbClr val="0F172A"/>
                 </a:solidFill>
                 <a:latin typeface="Calibri" pitchFamily="34" charset="0"/>
                 <a:ea typeface="Calibri" pitchFamily="34" charset="-122"/>
@@ -20039,7 +20039,7 @@
             <a:r>
               <a:rPr lang="en-US" sz="1150" dirty="0">
                 <a:solidFill>
-                  <a:srgbClr val="4A5468"/>
+                  <a:srgbClr val="475569"/>
                 </a:solidFill>
                 <a:latin typeface="Calibri" pitchFamily="34" charset="0"/>
                 <a:ea typeface="Calibri" pitchFamily="34" charset="-122"/>
@@ -20078,7 +20078,7 @@
             <a:r>
               <a:rPr lang="en-US" sz="1250" b="1" dirty="0">
                 <a:solidFill>
-                  <a:srgbClr val="1D2433"/>
+                  <a:srgbClr val="0F172A"/>
                 </a:solidFill>
                 <a:latin typeface="Calibri" pitchFamily="34" charset="0"/>
                 <a:ea typeface="Calibri" pitchFamily="34" charset="-122"/>
@@ -20117,7 +20117,7 @@
             <a:r>
               <a:rPr lang="en-US" sz="1150" dirty="0">
                 <a:solidFill>
-                  <a:srgbClr val="4A5468"/>
+                  <a:srgbClr val="475569"/>
                 </a:solidFill>
                 <a:latin typeface="Calibri" pitchFamily="34" charset="0"/>
                 <a:ea typeface="Calibri" pitchFamily="34" charset="-122"/>
@@ -20156,7 +20156,7 @@
             <a:r>
               <a:rPr lang="en-US" sz="1250" b="1" dirty="0">
                 <a:solidFill>
-                  <a:srgbClr val="1D2433"/>
+                  <a:srgbClr val="0F172A"/>
                 </a:solidFill>
                 <a:latin typeface="Calibri" pitchFamily="34" charset="0"/>
                 <a:ea typeface="Calibri" pitchFamily="34" charset="-122"/>
@@ -20195,7 +20195,7 @@
             <a:r>
               <a:rPr lang="en-US" sz="1150" dirty="0">
                 <a:solidFill>
-                  <a:srgbClr val="4A5468"/>
+                  <a:srgbClr val="475569"/>
                 </a:solidFill>
                 <a:latin typeface="Calibri" pitchFamily="34" charset="0"/>
                 <a:ea typeface="Calibri" pitchFamily="34" charset="-122"/>
@@ -20237,7 +20237,7 @@
             <a:r>
               <a:rPr lang="en-US" sz="1100" dirty="0">
                 <a:solidFill>
-                  <a:srgbClr val="4A5468"/>
+                  <a:srgbClr val="475569"/>
                 </a:solidFill>
                 <a:latin typeface="Calibri" pitchFamily="34" charset="0"/>
                 <a:ea typeface="Calibri" pitchFamily="34" charset="-122"/>
@@ -20276,7 +20276,7 @@
             <a:r>
               <a:rPr lang="en-US" sz="900" dirty="0">
                 <a:solidFill>
-                  <a:srgbClr val="8A93A5"/>
+                  <a:srgbClr val="94A3B8"/>
                 </a:solidFill>
                 <a:latin typeface="Calibri" pitchFamily="34" charset="0"/>
                 <a:ea typeface="Calibri" pitchFamily="34" charset="-122"/>
@@ -20315,7 +20315,7 @@
             <a:r>
               <a:rPr lang="en-US" sz="950" dirty="0">
                 <a:solidFill>
-                  <a:srgbClr val="8A93A5"/>
+                  <a:srgbClr val="94A3B8"/>
                 </a:solidFill>
                 <a:latin typeface="Calibri" pitchFamily="34" charset="0"/>
                 <a:ea typeface="Calibri" pitchFamily="34" charset="-122"/>
@@ -20410,7 +20410,7 @@
             <a:r>
               <a:rPr lang="en-US" sz="2700" b="1" dirty="0">
                 <a:solidFill>
-                  <a:srgbClr val="1E2B4A"/>
+                  <a:srgbClr val="312E81"/>
                 </a:solidFill>
                 <a:latin typeface="Calibri" pitchFamily="34" charset="0"/>
                 <a:ea typeface="Calibri" pitchFamily="34" charset="-122"/>
@@ -20452,7 +20452,7 @@
             <a:r>
               <a:rPr lang="en-US" sz="1300" dirty="0">
                 <a:solidFill>
-                  <a:srgbClr val="4A5468"/>
+                  <a:srgbClr val="475569"/>
                 </a:solidFill>
                 <a:latin typeface="Calibri" pitchFamily="34" charset="0"/>
                 <a:ea typeface="Calibri" pitchFamily="34" charset="-122"/>
@@ -20491,7 +20491,7 @@
             <a:r>
               <a:rPr lang="en-US" sz="3200" b="1" dirty="0">
                 <a:solidFill>
-                  <a:srgbClr val="1E2B4A"/>
+                  <a:srgbClr val="312E81"/>
                 </a:solidFill>
                 <a:latin typeface="Calibri" pitchFamily="34" charset="0"/>
                 <a:ea typeface="Calibri" pitchFamily="34" charset="-122"/>
@@ -20533,7 +20533,7 @@
             <a:r>
               <a:rPr lang="en-US" sz="1050" dirty="0">
                 <a:solidFill>
-                  <a:srgbClr val="4A5468"/>
+                  <a:srgbClr val="475569"/>
                 </a:solidFill>
                 <a:latin typeface="Calibri" pitchFamily="34" charset="0"/>
                 <a:ea typeface="Calibri" pitchFamily="34" charset="-122"/>
@@ -20553,7 +20553,7 @@
             <a:r>
               <a:rPr lang="en-US" sz="1050" dirty="0">
                 <a:solidFill>
-                  <a:srgbClr val="4A5468"/>
+                  <a:srgbClr val="475569"/>
                 </a:solidFill>
                 <a:latin typeface="Calibri" pitchFamily="34" charset="0"/>
                 <a:ea typeface="Calibri" pitchFamily="34" charset="-122"/>
@@ -20592,7 +20592,7 @@
             <a:r>
               <a:rPr lang="en-US" sz="3200" b="1" dirty="0">
                 <a:solidFill>
-                  <a:srgbClr val="1E2B4A"/>
+                  <a:srgbClr val="312E81"/>
                 </a:solidFill>
                 <a:latin typeface="Calibri" pitchFamily="34" charset="0"/>
                 <a:ea typeface="Calibri" pitchFamily="34" charset="-122"/>
@@ -20634,7 +20634,7 @@
             <a:r>
               <a:rPr lang="en-US" sz="1050" dirty="0">
                 <a:solidFill>
-                  <a:srgbClr val="4A5468"/>
+                  <a:srgbClr val="475569"/>
                 </a:solidFill>
                 <a:latin typeface="Calibri" pitchFamily="34" charset="0"/>
                 <a:ea typeface="Calibri" pitchFamily="34" charset="-122"/>
@@ -20654,7 +20654,7 @@
             <a:r>
               <a:rPr lang="en-US" sz="1050" dirty="0">
                 <a:solidFill>
-                  <a:srgbClr val="4A5468"/>
+                  <a:srgbClr val="475569"/>
                 </a:solidFill>
                 <a:latin typeface="Calibri" pitchFamily="34" charset="0"/>
                 <a:ea typeface="Calibri" pitchFamily="34" charset="-122"/>
@@ -20693,7 +20693,7 @@
             <a:r>
               <a:rPr lang="en-US" sz="3200" b="1" dirty="0">
                 <a:solidFill>
-                  <a:srgbClr val="1E2B4A"/>
+                  <a:srgbClr val="312E81"/>
                 </a:solidFill>
                 <a:latin typeface="Calibri" pitchFamily="34" charset="0"/>
                 <a:ea typeface="Calibri" pitchFamily="34" charset="-122"/>
@@ -20735,7 +20735,7 @@
             <a:r>
               <a:rPr lang="en-US" sz="1050" dirty="0">
                 <a:solidFill>
-                  <a:srgbClr val="4A5468"/>
+                  <a:srgbClr val="475569"/>
                 </a:solidFill>
                 <a:latin typeface="Calibri" pitchFamily="34" charset="0"/>
                 <a:ea typeface="Calibri" pitchFamily="34" charset="-122"/>
@@ -20755,7 +20755,7 @@
             <a:r>
               <a:rPr lang="en-US" sz="1050" dirty="0">
                 <a:solidFill>
-                  <a:srgbClr val="4A5468"/>
+                  <a:srgbClr val="475569"/>
                 </a:solidFill>
                 <a:latin typeface="Calibri" pitchFamily="34" charset="0"/>
                 <a:ea typeface="Calibri" pitchFamily="34" charset="-122"/>
@@ -20794,7 +20794,7 @@
             <a:r>
               <a:rPr lang="en-US" sz="3200" b="1" dirty="0">
                 <a:solidFill>
-                  <a:srgbClr val="1E2B4A"/>
+                  <a:srgbClr val="312E81"/>
                 </a:solidFill>
                 <a:latin typeface="Calibri" pitchFamily="34" charset="0"/>
                 <a:ea typeface="Calibri" pitchFamily="34" charset="-122"/>
@@ -20836,7 +20836,7 @@
             <a:r>
               <a:rPr lang="en-US" sz="1050" dirty="0">
                 <a:solidFill>
-                  <a:srgbClr val="4A5468"/>
+                  <a:srgbClr val="475569"/>
                 </a:solidFill>
                 <a:latin typeface="Calibri" pitchFamily="34" charset="0"/>
                 <a:ea typeface="Calibri" pitchFamily="34" charset="-122"/>
@@ -20856,7 +20856,7 @@
             <a:r>
               <a:rPr lang="en-US" sz="1050" dirty="0">
                 <a:solidFill>
-                  <a:srgbClr val="4A5468"/>
+                  <a:srgbClr val="475569"/>
                 </a:solidFill>
                 <a:latin typeface="Calibri" pitchFamily="34" charset="0"/>
                 <a:ea typeface="Calibri" pitchFamily="34" charset="-122"/>
@@ -20883,17 +20883,17 @@
             <a:avLst/>
           </a:prstGeom>
           <a:solidFill>
-            <a:srgbClr val="E0EDEF"/>
+            <a:srgbClr val="F9DCE9"/>
           </a:solidFill>
           <a:ln w="15875">
             <a:solidFill>
-              <a:srgbClr val="BAD6DB"/>
+              <a:srgbClr val="F2B1CE"/>
             </a:solidFill>
             <a:prstDash val="solid"/>
           </a:ln>
           <a:effectLst>
             <a:outerShdw sx="100000" sy="100000" kx="0" ky="0" algn="bl" rotWithShape="0" blurRad="127000" dist="25400" dir="5400000">
-              <a:srgbClr val="1E2B4A">
+              <a:srgbClr val="312E81">
                 <a:alpha val="8000"/>
               </a:srgbClr>
             </a:outerShdw>
@@ -20951,7 +20951,7 @@
             <a:r>
               <a:rPr lang="en-US" sz="1500" b="1" dirty="0">
                 <a:solidFill>
-                  <a:srgbClr val="1D2433"/>
+                  <a:srgbClr val="0F172A"/>
                 </a:solidFill>
                 <a:latin typeface="Calibri" pitchFamily="34" charset="0"/>
                 <a:ea typeface="Calibri" pitchFamily="34" charset="-122"/>
@@ -20993,7 +20993,7 @@
             <a:r>
               <a:rPr lang="en-US" sz="1200" dirty="0">
                 <a:solidFill>
-                  <a:srgbClr val="4A5468"/>
+                  <a:srgbClr val="475569"/>
                 </a:solidFill>
                 <a:latin typeface="Calibri" pitchFamily="34" charset="0"/>
                 <a:ea typeface="Calibri" pitchFamily="34" charset="-122"/>
@@ -21020,17 +21020,17 @@
             <a:avLst/>
           </a:prstGeom>
           <a:solidFill>
-            <a:srgbClr val="F6ECDC"/>
+            <a:srgbClr val="D7EDF3"/>
           </a:solidFill>
           <a:ln w="15875">
             <a:solidFill>
-              <a:srgbClr val="ECD5B0"/>
+              <a:srgbClr val="A6D7E3"/>
             </a:solidFill>
             <a:prstDash val="solid"/>
           </a:ln>
           <a:effectLst>
             <a:outerShdw sx="100000" sy="100000" kx="0" ky="0" algn="bl" rotWithShape="0" blurRad="127000" dist="25400" dir="5400000">
-              <a:srgbClr val="1E2B4A">
+              <a:srgbClr val="312E81">
                 <a:alpha val="8000"/>
               </a:srgbClr>
             </a:outerShdw>
@@ -21088,7 +21088,7 @@
             <a:r>
               <a:rPr lang="en-US" sz="1500" b="1" dirty="0">
                 <a:solidFill>
-                  <a:srgbClr val="1D2433"/>
+                  <a:srgbClr val="0F172A"/>
                 </a:solidFill>
                 <a:latin typeface="Calibri" pitchFamily="34" charset="0"/>
                 <a:ea typeface="Calibri" pitchFamily="34" charset="-122"/>
@@ -21127,7 +21127,7 @@
             <a:r>
               <a:rPr lang="en-US" sz="1100" dirty="0">
                 <a:solidFill>
-                  <a:srgbClr val="4A5468"/>
+                  <a:srgbClr val="475569"/>
                 </a:solidFill>
                 <a:latin typeface="Calibri" pitchFamily="34" charset="0"/>
                 <a:ea typeface="Calibri" pitchFamily="34" charset="-122"/>
@@ -21156,7 +21156,7 @@
             </a:avLst>
           </a:prstGeom>
           <a:solidFill>
-            <a:srgbClr val="C98A24"/>
+            <a:srgbClr val="0891B2"/>
           </a:solidFill>
           <a:ln/>
         </p:spPr>
@@ -21188,7 +21188,7 @@
             <a:r>
               <a:rPr lang="en-US" sz="1100" b="1" dirty="0">
                 <a:solidFill>
-                  <a:srgbClr val="1D2433"/>
+                  <a:srgbClr val="0F172A"/>
                 </a:solidFill>
                 <a:latin typeface="Calibri" pitchFamily="34" charset="0"/>
                 <a:ea typeface="Calibri" pitchFamily="34" charset="-122"/>
@@ -21227,7 +21227,7 @@
             <a:r>
               <a:rPr lang="en-US" sz="1100" dirty="0">
                 <a:solidFill>
-                  <a:srgbClr val="4A5468"/>
+                  <a:srgbClr val="475569"/>
                 </a:solidFill>
                 <a:latin typeface="Calibri" pitchFamily="34" charset="0"/>
                 <a:ea typeface="Calibri" pitchFamily="34" charset="-122"/>
@@ -21256,7 +21256,7 @@
             </a:avLst>
           </a:prstGeom>
           <a:solidFill>
-            <a:srgbClr val="E3E7EE"/>
+            <a:srgbClr val="E2E8F0"/>
           </a:solidFill>
           <a:ln/>
         </p:spPr>
@@ -21288,7 +21288,7 @@
             <a:r>
               <a:rPr lang="en-US" sz="1100" b="1" dirty="0">
                 <a:solidFill>
-                  <a:srgbClr val="1D2433"/>
+                  <a:srgbClr val="0F172A"/>
                 </a:solidFill>
                 <a:latin typeface="Calibri" pitchFamily="34" charset="0"/>
                 <a:ea typeface="Calibri" pitchFamily="34" charset="-122"/>
@@ -21327,7 +21327,7 @@
             <a:r>
               <a:rPr lang="en-US" sz="1100" dirty="0">
                 <a:solidFill>
-                  <a:srgbClr val="4A5468"/>
+                  <a:srgbClr val="475569"/>
                 </a:solidFill>
                 <a:latin typeface="Calibri" pitchFamily="34" charset="0"/>
                 <a:ea typeface="Calibri" pitchFamily="34" charset="-122"/>
@@ -21356,7 +21356,7 @@
             </a:avLst>
           </a:prstGeom>
           <a:solidFill>
-            <a:srgbClr val="E3E7EE"/>
+            <a:srgbClr val="E2E8F0"/>
           </a:solidFill>
           <a:ln/>
         </p:spPr>
@@ -21388,7 +21388,7 @@
             <a:r>
               <a:rPr lang="en-US" sz="1100" b="1" dirty="0">
                 <a:solidFill>
-                  <a:srgbClr val="1D2433"/>
+                  <a:srgbClr val="0F172A"/>
                 </a:solidFill>
                 <a:latin typeface="Calibri" pitchFamily="34" charset="0"/>
                 <a:ea typeface="Calibri" pitchFamily="34" charset="-122"/>
@@ -21427,7 +21427,7 @@
             <a:r>
               <a:rPr lang="en-US" sz="1100" dirty="0">
                 <a:solidFill>
-                  <a:srgbClr val="4A5468"/>
+                  <a:srgbClr val="475569"/>
                 </a:solidFill>
                 <a:latin typeface="Calibri" pitchFamily="34" charset="0"/>
                 <a:ea typeface="Calibri" pitchFamily="34" charset="-122"/>
@@ -21456,7 +21456,7 @@
             </a:avLst>
           </a:prstGeom>
           <a:solidFill>
-            <a:srgbClr val="E3E7EE"/>
+            <a:srgbClr val="E2E8F0"/>
           </a:solidFill>
           <a:ln/>
         </p:spPr>
@@ -21488,7 +21488,7 @@
             <a:r>
               <a:rPr lang="en-US" sz="1100" b="1" dirty="0">
                 <a:solidFill>
-                  <a:srgbClr val="1D2433"/>
+                  <a:srgbClr val="0F172A"/>
                 </a:solidFill>
                 <a:latin typeface="Calibri" pitchFamily="34" charset="0"/>
                 <a:ea typeface="Calibri" pitchFamily="34" charset="-122"/>
@@ -21527,7 +21527,7 @@
             <a:r>
               <a:rPr lang="en-US" sz="900" dirty="0">
                 <a:solidFill>
-                  <a:srgbClr val="8A93A5"/>
+                  <a:srgbClr val="94A3B8"/>
                 </a:solidFill>
                 <a:latin typeface="Calibri" pitchFamily="34" charset="0"/>
                 <a:ea typeface="Calibri" pitchFamily="34" charset="-122"/>
@@ -21566,7 +21566,7 @@
             <a:r>
               <a:rPr lang="en-US" sz="950" dirty="0">
                 <a:solidFill>
-                  <a:srgbClr val="8A93A5"/>
+                  <a:srgbClr val="94A3B8"/>
                 </a:solidFill>
                 <a:latin typeface="Calibri" pitchFamily="34" charset="0"/>
                 <a:ea typeface="Calibri" pitchFamily="34" charset="-122"/>
@@ -21661,7 +21661,7 @@
             <a:r>
               <a:rPr lang="en-US" sz="2700" b="1" dirty="0">
                 <a:solidFill>
-                  <a:srgbClr val="1E2B4A"/>
+                  <a:srgbClr val="312E81"/>
                 </a:solidFill>
                 <a:latin typeface="Calibri" pitchFamily="34" charset="0"/>
                 <a:ea typeface="Calibri" pitchFamily="34" charset="-122"/>
@@ -21703,7 +21703,7 @@
             <a:r>
               <a:rPr lang="en-US" sz="1300" dirty="0">
                 <a:solidFill>
-                  <a:srgbClr val="4A5468"/>
+                  <a:srgbClr val="475569"/>
                 </a:solidFill>
                 <a:latin typeface="Calibri" pitchFamily="34" charset="0"/>
                 <a:ea typeface="Calibri" pitchFamily="34" charset="-122"/>
@@ -21730,17 +21730,17 @@
             <a:avLst/>
           </a:prstGeom>
           <a:solidFill>
-            <a:srgbClr val="E1E6EF"/>
+            <a:srgbClr val="E3E1FB"/>
           </a:solidFill>
           <a:ln w="15875">
             <a:solidFill>
-              <a:srgbClr val="BBC7DC"/>
+              <a:srgbClr val="C0BCF6"/>
             </a:solidFill>
             <a:prstDash val="solid"/>
           </a:ln>
           <a:effectLst>
             <a:outerShdw sx="100000" sy="100000" kx="0" ky="0" algn="bl" rotWithShape="0" blurRad="127000" dist="25400" dir="5400000">
-              <a:srgbClr val="1E2B4A">
+              <a:srgbClr val="312E81">
                 <a:alpha val="8000"/>
               </a:srgbClr>
             </a:outerShdw>
@@ -21798,7 +21798,7 @@
             <a:r>
               <a:rPr lang="en-US" sz="3400" b="1" dirty="0">
                 <a:solidFill>
-                  <a:srgbClr val="E3E7EE"/>
+                  <a:srgbClr val="E2E8F0"/>
                 </a:solidFill>
                 <a:latin typeface="Calibri" pitchFamily="34" charset="0"/>
                 <a:ea typeface="Calibri" pitchFamily="34" charset="-122"/>
@@ -21837,7 +21837,7 @@
             <a:r>
               <a:rPr lang="en-US" sz="1500" b="1" dirty="0">
                 <a:solidFill>
-                  <a:srgbClr val="1D2433"/>
+                  <a:srgbClr val="0F172A"/>
                 </a:solidFill>
                 <a:latin typeface="Calibri" pitchFamily="34" charset="0"/>
                 <a:ea typeface="Calibri" pitchFamily="34" charset="-122"/>
@@ -21879,7 +21879,7 @@
             <a:r>
               <a:rPr lang="en-US" sz="1150" dirty="0">
                 <a:solidFill>
-                  <a:srgbClr val="4A5468"/>
+                  <a:srgbClr val="475569"/>
                 </a:solidFill>
                 <a:latin typeface="Calibri" pitchFamily="34" charset="0"/>
                 <a:ea typeface="Calibri" pitchFamily="34" charset="-122"/>
@@ -21906,17 +21906,17 @@
             <a:avLst/>
           </a:prstGeom>
           <a:solidFill>
-            <a:srgbClr val="E0EDEF"/>
+            <a:srgbClr val="F9DCE9"/>
           </a:solidFill>
           <a:ln w="15875">
             <a:solidFill>
-              <a:srgbClr val="BAD6DB"/>
+              <a:srgbClr val="F2B1CE"/>
             </a:solidFill>
             <a:prstDash val="solid"/>
           </a:ln>
           <a:effectLst>
             <a:outerShdw sx="100000" sy="100000" kx="0" ky="0" algn="bl" rotWithShape="0" blurRad="127000" dist="25400" dir="5400000">
-              <a:srgbClr val="1E2B4A">
+              <a:srgbClr val="312E81">
                 <a:alpha val="8000"/>
               </a:srgbClr>
             </a:outerShdw>
@@ -21974,7 +21974,7 @@
             <a:r>
               <a:rPr lang="en-US" sz="3400" b="1" dirty="0">
                 <a:solidFill>
-                  <a:srgbClr val="E3E7EE"/>
+                  <a:srgbClr val="E2E8F0"/>
                 </a:solidFill>
                 <a:latin typeface="Calibri" pitchFamily="34" charset="0"/>
                 <a:ea typeface="Calibri" pitchFamily="34" charset="-122"/>
@@ -22013,7 +22013,7 @@
             <a:r>
               <a:rPr lang="en-US" sz="1500" b="1" dirty="0">
                 <a:solidFill>
-                  <a:srgbClr val="1D2433"/>
+                  <a:srgbClr val="0F172A"/>
                 </a:solidFill>
                 <a:latin typeface="Calibri" pitchFamily="34" charset="0"/>
                 <a:ea typeface="Calibri" pitchFamily="34" charset="-122"/>
@@ -22055,7 +22055,7 @@
             <a:r>
               <a:rPr lang="en-US" sz="1150" dirty="0">
                 <a:solidFill>
-                  <a:srgbClr val="4A5468"/>
+                  <a:srgbClr val="475569"/>
                 </a:solidFill>
                 <a:latin typeface="Calibri" pitchFamily="34" charset="0"/>
                 <a:ea typeface="Calibri" pitchFamily="34" charset="-122"/>
@@ -22082,17 +22082,17 @@
             <a:avLst/>
           </a:prstGeom>
           <a:solidFill>
-            <a:srgbClr val="F9E8DD"/>
+            <a:srgbClr val="F9E9D7"/>
           </a:solidFill>
           <a:ln w="15875">
             <a:solidFill>
-              <a:srgbClr val="F1CBB3"/>
+              <a:srgbClr val="F1CEA5"/>
             </a:solidFill>
             <a:prstDash val="solid"/>
           </a:ln>
           <a:effectLst>
             <a:outerShdw sx="100000" sy="100000" kx="0" ky="0" algn="bl" rotWithShape="0" blurRad="127000" dist="25400" dir="5400000">
-              <a:srgbClr val="1E2B4A">
+              <a:srgbClr val="312E81">
                 <a:alpha val="8000"/>
               </a:srgbClr>
             </a:outerShdw>
@@ -22150,7 +22150,7 @@
             <a:r>
               <a:rPr lang="en-US" sz="3400" b="1" dirty="0">
                 <a:solidFill>
-                  <a:srgbClr val="E3E7EE"/>
+                  <a:srgbClr val="E2E8F0"/>
                 </a:solidFill>
                 <a:latin typeface="Calibri" pitchFamily="34" charset="0"/>
                 <a:ea typeface="Calibri" pitchFamily="34" charset="-122"/>
@@ -22189,7 +22189,7 @@
             <a:r>
               <a:rPr lang="en-US" sz="1500" b="1" dirty="0">
                 <a:solidFill>
-                  <a:srgbClr val="1D2433"/>
+                  <a:srgbClr val="0F172A"/>
                 </a:solidFill>
                 <a:latin typeface="Calibri" pitchFamily="34" charset="0"/>
                 <a:ea typeface="Calibri" pitchFamily="34" charset="-122"/>
@@ -22231,7 +22231,7 @@
             <a:r>
               <a:rPr lang="en-US" sz="1150" dirty="0">
                 <a:solidFill>
-                  <a:srgbClr val="4A5468"/>
+                  <a:srgbClr val="475569"/>
                 </a:solidFill>
                 <a:latin typeface="Calibri" pitchFamily="34" charset="0"/>
                 <a:ea typeface="Calibri" pitchFamily="34" charset="-122"/>
@@ -22260,7 +22260,7 @@
             </a:avLst>
           </a:prstGeom>
           <a:solidFill>
-            <a:srgbClr val="1E2B4A"/>
+            <a:srgbClr val="312E81"/>
           </a:solidFill>
           <a:ln/>
         </p:spPr>
@@ -22334,7 +22334,7 @@
             <a:r>
               <a:rPr lang="en-US" sz="950" dirty="0">
                 <a:solidFill>
-                  <a:srgbClr val="8A93A5"/>
+                  <a:srgbClr val="94A3B8"/>
                 </a:solidFill>
                 <a:latin typeface="Calibri" pitchFamily="34" charset="0"/>
                 <a:ea typeface="Calibri" pitchFamily="34" charset="-122"/>

--- a/infographie/presentation_infographique.pptx
+++ b/infographie/presentation_infographique.pptx
@@ -2826,7 +2826,7 @@
               <a:buNone/>
             </a:pPr>
             <a:r>
-              <a:rPr lang="en-US" sz="1200" b="1" spc="200" kern="0" dirty="0">
+              <a:rPr lang="en-US" sz="1350" b="1" spc="200" kern="0" dirty="0">
                 <a:solidFill>
                   <a:srgbClr val="A5B4FC"/>
                 </a:solidFill>
@@ -2836,7 +2836,7 @@
               </a:rPr>
               <a:t>RÉPUBLIQUE DU SÉNÉGAL</a:t>
             </a:r>
-            <a:endParaRPr lang="en-US" sz="1200" dirty="0"/>
+            <a:endParaRPr lang="en-US" sz="1350" dirty="0"/>
           </a:p>
         </p:txBody>
       </p:sp>
@@ -2865,7 +2865,7 @@
               <a:buNone/>
             </a:pPr>
             <a:r>
-              <a:rPr lang="en-US" sz="1250" dirty="0">
+              <a:rPr lang="en-US" sz="1400" dirty="0">
                 <a:solidFill>
                   <a:srgbClr val="A5B4FC"/>
                 </a:solidFill>
@@ -2875,7 +2875,7 @@
               </a:rPr>
               <a:t>École nationale de la statistique et de l'analyse économique Pierre Ndiaye</a:t>
             </a:r>
-            <a:endParaRPr lang="en-US" sz="1250" dirty="0"/>
+            <a:endParaRPr lang="en-US" sz="1400" dirty="0"/>
           </a:p>
         </p:txBody>
       </p:sp>
@@ -3005,7 +3005,7 @@
               <a:buNone/>
             </a:pPr>
             <a:r>
-              <a:rPr lang="en-US" sz="1100" dirty="0">
+              <a:rPr lang="en-US" sz="1300" dirty="0">
                 <a:solidFill>
                   <a:srgbClr val="A5B4FC"/>
                 </a:solidFill>
@@ -3015,7 +3015,7 @@
               </a:rPr>
               <a:t>Présenté par</a:t>
             </a:r>
-            <a:endParaRPr lang="en-US" sz="1100" dirty="0"/>
+            <a:endParaRPr lang="en-US" sz="1300" dirty="0"/>
           </a:p>
         </p:txBody>
       </p:sp>
@@ -3086,7 +3086,7 @@
               <a:buNone/>
             </a:pPr>
             <a:r>
-              <a:rPr lang="en-US" sz="1050" dirty="0">
+              <a:rPr lang="en-US" sz="1200" dirty="0">
                 <a:solidFill>
                   <a:srgbClr val="A5B4FC"/>
                 </a:solidFill>
@@ -3096,7 +3096,7 @@
               </a:rPr>
               <a:t>Élève ingénieur statisticien économiste</a:t>
             </a:r>
-            <a:endParaRPr lang="en-US" sz="1050" dirty="0"/>
+            <a:endParaRPr lang="en-US" sz="1200" dirty="0"/>
           </a:p>
         </p:txBody>
       </p:sp>
@@ -3125,7 +3125,7 @@
               <a:buNone/>
             </a:pPr>
             <a:r>
-              <a:rPr lang="en-US" sz="1100" dirty="0">
+              <a:rPr lang="en-US" sz="1300" dirty="0">
                 <a:solidFill>
                   <a:srgbClr val="A5B4FC"/>
                 </a:solidFill>
@@ -3135,7 +3135,7 @@
               </a:rPr>
               <a:t>Sous la direction de</a:t>
             </a:r>
-            <a:endParaRPr lang="en-US" sz="1100" dirty="0"/>
+            <a:endParaRPr lang="en-US" sz="1300" dirty="0"/>
           </a:p>
         </p:txBody>
       </p:sp>
@@ -3206,7 +3206,7 @@
               <a:buNone/>
             </a:pPr>
             <a:r>
-              <a:rPr lang="en-US" sz="1050" dirty="0">
+              <a:rPr lang="en-US" sz="1200" dirty="0">
                 <a:solidFill>
                   <a:srgbClr val="A5B4FC"/>
                 </a:solidFill>
@@ -3216,7 +3216,7 @@
               </a:rPr>
               <a:t>Chercheur postdoctoral en économie appliquée</a:t>
             </a:r>
-            <a:endParaRPr lang="en-US" sz="1050" dirty="0"/>
+            <a:endParaRPr lang="en-US" sz="1200" dirty="0"/>
           </a:p>
         </p:txBody>
       </p:sp>
@@ -3245,7 +3245,7 @@
               <a:buNone/>
             </a:pPr>
             <a:r>
-              <a:rPr lang="en-US" sz="1300" dirty="0">
+              <a:rPr lang="en-US" sz="1400" dirty="0">
                 <a:solidFill>
                   <a:srgbClr val="A5B4FC"/>
                 </a:solidFill>
@@ -3255,7 +3255,7 @@
               </a:rPr>
               <a:t>Août 2026</a:t>
             </a:r>
-            <a:endParaRPr lang="en-US" sz="1300" dirty="0"/>
+            <a:endParaRPr lang="en-US" sz="1400" dirty="0"/>
           </a:p>
         </p:txBody>
       </p:sp>
@@ -3316,7 +3316,7 @@
               <a:buNone/>
             </a:pPr>
             <a:r>
-              <a:rPr lang="en-US" sz="2700" b="1" dirty="0">
+              <a:rPr lang="en-US" sz="3000" b="1" dirty="0">
                 <a:solidFill>
                   <a:srgbClr val="312E81"/>
                 </a:solidFill>
@@ -3326,7 +3326,7 @@
               </a:rPr>
               <a:t>État de la pauvreté multidimensionnelle des enfants</a:t>
             </a:r>
-            <a:endParaRPr lang="en-US" sz="2700" dirty="0"/>
+            <a:endParaRPr lang="en-US" sz="3000" dirty="0"/>
           </a:p>
         </p:txBody>
       </p:sp>
@@ -3358,7 +3358,7 @@
               <a:buNone/>
             </a:pPr>
             <a:r>
-              <a:rPr lang="en-US" sz="1300" dirty="0">
+              <a:rPr lang="en-US" sz="1400" dirty="0">
                 <a:solidFill>
                   <a:srgbClr val="475569"/>
                 </a:solidFill>
@@ -3368,7 +3368,7 @@
               </a:rPr>
               <a:t>L'incidence recule entre les deux vagues, mais l'intensité reste stable : les enfants pauvres cumulent toujours près de cinq privations sur sept.</a:t>
             </a:r>
-            <a:endParaRPr lang="en-US" sz="1300" dirty="0"/>
+            <a:endParaRPr lang="en-US" sz="1400" dirty="0"/>
           </a:p>
         </p:txBody>
       </p:sp>
@@ -3435,7 +3435,7 @@
             <a:pPr algn="l" indent="0" marL="0">
               <a:buNone/>
             </a:pPr>
-            <a:endParaRPr lang="en-US" sz="1100" dirty="0"/>
+            <a:endParaRPr lang="en-US" sz="1300" dirty="0"/>
           </a:p>
         </p:txBody>
       </p:sp>
@@ -3464,7 +3464,7 @@
               <a:buNone/>
             </a:pPr>
             <a:r>
-              <a:rPr lang="en-US" sz="1100" b="1" dirty="0">
+              <a:rPr lang="en-US" sz="1300" b="1" dirty="0">
                 <a:solidFill>
                   <a:srgbClr val="94A3B8"/>
                 </a:solidFill>
@@ -3474,7 +3474,7 @@
               </a:rPr>
               <a:t>2018-19</a:t>
             </a:r>
-            <a:endParaRPr lang="en-US" sz="1100" dirty="0"/>
+            <a:endParaRPr lang="en-US" sz="1300" dirty="0"/>
           </a:p>
         </p:txBody>
       </p:sp>
@@ -3503,7 +3503,7 @@
               <a:buNone/>
             </a:pPr>
             <a:r>
-              <a:rPr lang="en-US" sz="1100" b="1" dirty="0">
+              <a:rPr lang="en-US" sz="1300" b="1" dirty="0">
                 <a:solidFill>
                   <a:srgbClr val="94A3B8"/>
                 </a:solidFill>
@@ -3513,7 +3513,7 @@
               </a:rPr>
               <a:t>2021-22</a:t>
             </a:r>
-            <a:endParaRPr lang="en-US" sz="1100" dirty="0"/>
+            <a:endParaRPr lang="en-US" sz="1300" dirty="0"/>
           </a:p>
         </p:txBody>
       </p:sp>
@@ -3542,7 +3542,7 @@
               <a:buNone/>
             </a:pPr>
             <a:r>
-              <a:rPr lang="en-US" sz="1100" b="1" dirty="0">
+              <a:rPr lang="en-US" sz="1300" b="1" dirty="0">
                 <a:solidFill>
                   <a:srgbClr val="94A3B8"/>
                 </a:solidFill>
@@ -3552,7 +3552,7 @@
               </a:rPr>
               <a:t>Écart</a:t>
             </a:r>
-            <a:endParaRPr lang="en-US" sz="1100" dirty="0"/>
+            <a:endParaRPr lang="en-US" sz="1300" dirty="0"/>
           </a:p>
         </p:txBody>
       </p:sp>
@@ -4112,7 +4112,7 @@
               <a:buNone/>
             </a:pPr>
             <a:r>
-              <a:rPr lang="en-US" sz="1100" dirty="0">
+              <a:rPr lang="en-US" sz="1300" dirty="0">
                 <a:solidFill>
                   <a:srgbClr val="475569"/>
                 </a:solidFill>
@@ -4122,7 +4122,7 @@
               </a:rPr>
               <a:t>Enfants de 0 à 17 ans suivis aux deux vagues, seuil de quatre dimensions.</a:t>
             </a:r>
-            <a:endParaRPr lang="en-US" sz="1100" dirty="0"/>
+            <a:endParaRPr lang="en-US" sz="1300" dirty="0"/>
           </a:p>
         </p:txBody>
       </p:sp>
@@ -4190,7 +4190,7 @@
               <a:buNone/>
             </a:pPr>
             <a:r>
-              <a:rPr lang="en-US" sz="1250" b="1" dirty="0">
+              <a:rPr lang="en-US" sz="1400" b="1" dirty="0">
                 <a:solidFill>
                   <a:srgbClr val="0F172A"/>
                 </a:solidFill>
@@ -4200,7 +4200,7 @@
               </a:rPr>
               <a:t>Non-bénéficiaires</a:t>
             </a:r>
-            <a:endParaRPr lang="en-US" sz="1250" dirty="0"/>
+            <a:endParaRPr lang="en-US" sz="1400" dirty="0"/>
           </a:p>
         </p:txBody>
       </p:sp>
@@ -4229,7 +4229,7 @@
               <a:buNone/>
             </a:pPr>
             <a:r>
-              <a:rPr lang="en-US" sz="1050" dirty="0">
+              <a:rPr lang="en-US" sz="1200" dirty="0">
                 <a:solidFill>
                   <a:srgbClr val="94A3B8"/>
                 </a:solidFill>
@@ -4239,7 +4239,7 @@
               </a:rPr>
               <a:t>2018-19</a:t>
             </a:r>
-            <a:endParaRPr lang="en-US" sz="1050" dirty="0"/>
+            <a:endParaRPr lang="en-US" sz="1200" dirty="0"/>
           </a:p>
         </p:txBody>
       </p:sp>
@@ -4290,7 +4290,7 @@
               <a:buNone/>
             </a:pPr>
             <a:r>
-              <a:rPr lang="en-US" sz="1150" b="1" dirty="0">
+              <a:rPr lang="en-US" sz="1300" b="1" dirty="0">
                 <a:solidFill>
                   <a:srgbClr val="0F172A"/>
                 </a:solidFill>
@@ -4300,7 +4300,7 @@
               </a:rPr>
               <a:t>66,6 %</a:t>
             </a:r>
-            <a:endParaRPr lang="en-US" sz="1150" dirty="0"/>
+            <a:endParaRPr lang="en-US" sz="1300" dirty="0"/>
           </a:p>
         </p:txBody>
       </p:sp>
@@ -4329,7 +4329,7 @@
               <a:buNone/>
             </a:pPr>
             <a:r>
-              <a:rPr lang="en-US" sz="1050" dirty="0">
+              <a:rPr lang="en-US" sz="1200" dirty="0">
                 <a:solidFill>
                   <a:srgbClr val="94A3B8"/>
                 </a:solidFill>
@@ -4339,7 +4339,7 @@
               </a:rPr>
               <a:t>2021-22</a:t>
             </a:r>
-            <a:endParaRPr lang="en-US" sz="1050" dirty="0"/>
+            <a:endParaRPr lang="en-US" sz="1200" dirty="0"/>
           </a:p>
         </p:txBody>
       </p:sp>
@@ -4390,7 +4390,7 @@
               <a:buNone/>
             </a:pPr>
             <a:r>
-              <a:rPr lang="en-US" sz="1150" b="1" dirty="0">
+              <a:rPr lang="en-US" sz="1300" b="1" dirty="0">
                 <a:solidFill>
                   <a:srgbClr val="0F172A"/>
                 </a:solidFill>
@@ -4400,7 +4400,7 @@
               </a:rPr>
               <a:t>60,5 %</a:t>
             </a:r>
-            <a:endParaRPr lang="en-US" sz="1150" dirty="0"/>
+            <a:endParaRPr lang="en-US" sz="1300" dirty="0"/>
           </a:p>
         </p:txBody>
       </p:sp>
@@ -4429,7 +4429,7 @@
               <a:buNone/>
             </a:pPr>
             <a:r>
-              <a:rPr lang="en-US" sz="1250" b="1" dirty="0">
+              <a:rPr lang="en-US" sz="1400" b="1" dirty="0">
                 <a:solidFill>
                   <a:srgbClr val="0F172A"/>
                 </a:solidFill>
@@ -4439,7 +4439,7 @@
               </a:rPr>
               <a:t>Bénéficiaires</a:t>
             </a:r>
-            <a:endParaRPr lang="en-US" sz="1250" dirty="0"/>
+            <a:endParaRPr lang="en-US" sz="1400" dirty="0"/>
           </a:p>
         </p:txBody>
       </p:sp>
@@ -4468,7 +4468,7 @@
               <a:buNone/>
             </a:pPr>
             <a:r>
-              <a:rPr lang="en-US" sz="1050" dirty="0">
+              <a:rPr lang="en-US" sz="1200" dirty="0">
                 <a:solidFill>
                   <a:srgbClr val="94A3B8"/>
                 </a:solidFill>
@@ -4478,7 +4478,7 @@
               </a:rPr>
               <a:t>2018-19</a:t>
             </a:r>
-            <a:endParaRPr lang="en-US" sz="1050" dirty="0"/>
+            <a:endParaRPr lang="en-US" sz="1200" dirty="0"/>
           </a:p>
         </p:txBody>
       </p:sp>
@@ -4529,7 +4529,7 @@
               <a:buNone/>
             </a:pPr>
             <a:r>
-              <a:rPr lang="en-US" sz="1150" b="1" dirty="0">
+              <a:rPr lang="en-US" sz="1300" b="1" dirty="0">
                 <a:solidFill>
                   <a:srgbClr val="0F172A"/>
                 </a:solidFill>
@@ -4539,7 +4539,7 @@
               </a:rPr>
               <a:t>46,2 %</a:t>
             </a:r>
-            <a:endParaRPr lang="en-US" sz="1150" dirty="0"/>
+            <a:endParaRPr lang="en-US" sz="1300" dirty="0"/>
           </a:p>
         </p:txBody>
       </p:sp>
@@ -4568,7 +4568,7 @@
               <a:buNone/>
             </a:pPr>
             <a:r>
-              <a:rPr lang="en-US" sz="1050" dirty="0">
+              <a:rPr lang="en-US" sz="1200" dirty="0">
                 <a:solidFill>
                   <a:srgbClr val="94A3B8"/>
                 </a:solidFill>
@@ -4578,7 +4578,7 @@
               </a:rPr>
               <a:t>2021-22</a:t>
             </a:r>
-            <a:endParaRPr lang="en-US" sz="1050" dirty="0"/>
+            <a:endParaRPr lang="en-US" sz="1200" dirty="0"/>
           </a:p>
         </p:txBody>
       </p:sp>
@@ -4629,7 +4629,7 @@
               <a:buNone/>
             </a:pPr>
             <a:r>
-              <a:rPr lang="en-US" sz="1150" b="1" dirty="0">
+              <a:rPr lang="en-US" sz="1300" b="1" dirty="0">
                 <a:solidFill>
                   <a:srgbClr val="0F172A"/>
                 </a:solidFill>
@@ -4639,7 +4639,7 @@
               </a:rPr>
               <a:t>42,5 %</a:t>
             </a:r>
-            <a:endParaRPr lang="en-US" sz="1150" dirty="0"/>
+            <a:endParaRPr lang="en-US" sz="1300" dirty="0"/>
           </a:p>
         </p:txBody>
       </p:sp>
@@ -4671,7 +4671,7 @@
               <a:buNone/>
             </a:pPr>
             <a:r>
-              <a:rPr lang="en-US" sz="1100" dirty="0">
+              <a:rPr lang="en-US" sz="1300" dirty="0">
                 <a:solidFill>
                   <a:srgbClr val="475569"/>
                 </a:solidFill>
@@ -4681,7 +4681,7 @@
               </a:rPr>
               <a:t>Les enfants de ménages bénéficiaires partent d'un niveau plus favorable : cet avantage précède le traitement.</a:t>
             </a:r>
-            <a:endParaRPr lang="en-US" sz="1100" dirty="0"/>
+            <a:endParaRPr lang="en-US" sz="1300" dirty="0"/>
           </a:p>
         </p:txBody>
       </p:sp>
@@ -4710,7 +4710,7 @@
               <a:buNone/>
             </a:pPr>
             <a:r>
-              <a:rPr lang="en-US" sz="900" dirty="0">
+              <a:rPr lang="en-US" sz="1000" dirty="0">
                 <a:solidFill>
                   <a:srgbClr val="94A3B8"/>
                 </a:solidFill>
@@ -4720,7 +4720,7 @@
               </a:rPr>
               <a:t>Source : calcul de l'auteur, EHCVM I (2018-2019) et EHCVM II (2021-2022).</a:t>
             </a:r>
-            <a:endParaRPr lang="en-US" sz="900" dirty="0"/>
+            <a:endParaRPr lang="en-US" sz="1000" dirty="0"/>
           </a:p>
         </p:txBody>
       </p:sp>
@@ -4749,7 +4749,7 @@
               <a:buNone/>
             </a:pPr>
             <a:r>
-              <a:rPr lang="en-US" sz="950" dirty="0">
+              <a:rPr lang="en-US" sz="1000" dirty="0">
                 <a:solidFill>
                   <a:srgbClr val="94A3B8"/>
                 </a:solidFill>
@@ -4759,7 +4759,7 @@
               </a:rPr>
               <a:t>10</a:t>
             </a:r>
-            <a:endParaRPr lang="en-US" sz="950" dirty="0"/>
+            <a:endParaRPr lang="en-US" sz="1000" dirty="0"/>
           </a:p>
         </p:txBody>
       </p:sp>
@@ -4844,7 +4844,7 @@
               <a:buNone/>
             </a:pPr>
             <a:r>
-              <a:rPr lang="en-US" sz="2700" b="1" dirty="0">
+              <a:rPr lang="en-US" sz="3000" b="1" dirty="0">
                 <a:solidFill>
                   <a:srgbClr val="312E81"/>
                 </a:solidFill>
@@ -4854,7 +4854,7 @@
               </a:rPr>
               <a:t>Qualité de l'appariement</a:t>
             </a:r>
-            <a:endParaRPr lang="en-US" sz="2700" dirty="0"/>
+            <a:endParaRPr lang="en-US" sz="3000" dirty="0"/>
           </a:p>
         </p:txBody>
       </p:sp>
@@ -4886,7 +4886,7 @@
               <a:buNone/>
             </a:pPr>
             <a:r>
-              <a:rPr lang="en-US" sz="1300" dirty="0">
+              <a:rPr lang="en-US" sz="1400" dirty="0">
                 <a:solidFill>
                   <a:srgbClr val="475569"/>
                 </a:solidFill>
@@ -4896,7 +4896,7 @@
               </a:rPr>
               <a:t>Après appariement, les enfants traités et leurs témoins ne se distinguent plus sur les caractéristiques observables.</a:t>
             </a:r>
-            <a:endParaRPr lang="en-US" sz="1300" dirty="0"/>
+            <a:endParaRPr lang="en-US" sz="1400" dirty="0"/>
           </a:p>
         </p:txBody>
       </p:sp>
@@ -4948,7 +4948,7 @@
         <p:spPr>
           <a:xfrm>
             <a:off x="658368" y="2484120"/>
-            <a:ext cx="2606040" cy="384048"/>
+            <a:ext cx="2606040" cy="566928"/>
           </a:xfrm>
           <a:prstGeom prst="rect">
             <a:avLst/>
@@ -4967,7 +4967,7 @@
               <a:buNone/>
             </a:pPr>
             <a:r>
-              <a:rPr lang="en-US" sz="1050" dirty="0">
+              <a:rPr lang="en-US" sz="1200" dirty="0">
                 <a:solidFill>
                   <a:srgbClr val="475569"/>
                 </a:solidFill>
@@ -4977,7 +4977,7 @@
               </a:rPr>
               <a:t>différence standardisée</a:t>
             </a:r>
-            <a:endParaRPr lang="en-US" sz="1050" dirty="0"/>
+            <a:endParaRPr lang="en-US" sz="1200" dirty="0"/>
           </a:p>
           <a:p>
             <a:pPr algn="ctr" indent="0" marL="0">
@@ -4987,7 +4987,7 @@
               <a:buNone/>
             </a:pPr>
             <a:r>
-              <a:rPr lang="en-US" sz="1050" dirty="0">
+              <a:rPr lang="en-US" sz="1200" dirty="0">
                 <a:solidFill>
                   <a:srgbClr val="475569"/>
                 </a:solidFill>
@@ -4997,7 +4997,7 @@
               </a:rPr>
               <a:t>moyenne avant appariement</a:t>
             </a:r>
-            <a:endParaRPr lang="en-US" sz="1050" dirty="0"/>
+            <a:endParaRPr lang="en-US" sz="1200" dirty="0"/>
           </a:p>
         </p:txBody>
       </p:sp>
@@ -5049,7 +5049,7 @@
         <p:spPr>
           <a:xfrm>
             <a:off x="3410712" y="2484120"/>
-            <a:ext cx="2606040" cy="384048"/>
+            <a:ext cx="2606040" cy="566928"/>
           </a:xfrm>
           <a:prstGeom prst="rect">
             <a:avLst/>
@@ -5068,7 +5068,7 @@
               <a:buNone/>
             </a:pPr>
             <a:r>
-              <a:rPr lang="en-US" sz="1050" dirty="0">
+              <a:rPr lang="en-US" sz="1200" dirty="0">
                 <a:solidFill>
                   <a:srgbClr val="475569"/>
                 </a:solidFill>
@@ -5078,7 +5078,7 @@
               </a:rPr>
               <a:t>après appariement,</a:t>
             </a:r>
-            <a:endParaRPr lang="en-US" sz="1050" dirty="0"/>
+            <a:endParaRPr lang="en-US" sz="1200" dirty="0"/>
           </a:p>
           <a:p>
             <a:pPr algn="ctr" indent="0" marL="0">
@@ -5088,7 +5088,7 @@
               <a:buNone/>
             </a:pPr>
             <a:r>
-              <a:rPr lang="en-US" sz="1050" dirty="0">
+              <a:rPr lang="en-US" sz="1200" dirty="0">
                 <a:solidFill>
                   <a:srgbClr val="475569"/>
                 </a:solidFill>
@@ -5098,7 +5098,7 @@
               </a:rPr>
               <a:t>bien sous le seuil de 10 %</a:t>
             </a:r>
-            <a:endParaRPr lang="en-US" sz="1050" dirty="0"/>
+            <a:endParaRPr lang="en-US" sz="1200" dirty="0"/>
           </a:p>
         </p:txBody>
       </p:sp>
@@ -5150,7 +5150,7 @@
         <p:spPr>
           <a:xfrm>
             <a:off x="6163056" y="2484120"/>
-            <a:ext cx="2606040" cy="384048"/>
+            <a:ext cx="2606040" cy="566928"/>
           </a:xfrm>
           <a:prstGeom prst="rect">
             <a:avLst/>
@@ -5169,7 +5169,7 @@
               <a:buNone/>
             </a:pPr>
             <a:r>
-              <a:rPr lang="en-US" sz="1050" dirty="0">
+              <a:rPr lang="en-US" sz="1200" dirty="0">
                 <a:solidFill>
                   <a:srgbClr val="475569"/>
                 </a:solidFill>
@@ -5179,7 +5179,7 @@
               </a:rPr>
               <a:t>observations-enfants</a:t>
             </a:r>
-            <a:endParaRPr lang="en-US" sz="1050" dirty="0"/>
+            <a:endParaRPr lang="en-US" sz="1200" dirty="0"/>
           </a:p>
           <a:p>
             <a:pPr algn="ctr" indent="0" marL="0">
@@ -5189,7 +5189,7 @@
               <a:buNone/>
             </a:pPr>
             <a:r>
-              <a:rPr lang="en-US" sz="1050" dirty="0">
+              <a:rPr lang="en-US" sz="1200" dirty="0">
                 <a:solidFill>
                   <a:srgbClr val="475569"/>
                 </a:solidFill>
@@ -5199,7 +5199,7 @@
               </a:rPr>
               <a:t>sur le support commun</a:t>
             </a:r>
-            <a:endParaRPr lang="en-US" sz="1050" dirty="0"/>
+            <a:endParaRPr lang="en-US" sz="1200" dirty="0"/>
           </a:p>
         </p:txBody>
       </p:sp>
@@ -5251,7 +5251,7 @@
         <p:spPr>
           <a:xfrm>
             <a:off x="8915400" y="2484120"/>
-            <a:ext cx="2606040" cy="384048"/>
+            <a:ext cx="2606040" cy="566928"/>
           </a:xfrm>
           <a:prstGeom prst="rect">
             <a:avLst/>
@@ -5270,7 +5270,7 @@
               <a:buNone/>
             </a:pPr>
             <a:r>
-              <a:rPr lang="en-US" sz="1050" dirty="0">
+              <a:rPr lang="en-US" sz="1200" dirty="0">
                 <a:solidFill>
                   <a:srgbClr val="475569"/>
                 </a:solidFill>
@@ -5280,7 +5280,7 @@
               </a:rPr>
               <a:t>pseudo-R² du logit,</a:t>
             </a:r>
-            <a:endParaRPr lang="en-US" sz="1050" dirty="0"/>
+            <a:endParaRPr lang="en-US" sz="1200" dirty="0"/>
           </a:p>
           <a:p>
             <a:pPr algn="ctr" indent="0" marL="0">
@@ -5290,7 +5290,7 @@
               <a:buNone/>
             </a:pPr>
             <a:r>
-              <a:rPr lang="en-US" sz="1050" dirty="0">
+              <a:rPr lang="en-US" sz="1200" dirty="0">
                 <a:solidFill>
                   <a:srgbClr val="475569"/>
                 </a:solidFill>
@@ -5300,7 +5300,7 @@
               </a:rPr>
               <a:t>sur 17 735 enfants</a:t>
             </a:r>
-            <a:endParaRPr lang="en-US" sz="1050" dirty="0"/>
+            <a:endParaRPr lang="en-US" sz="1200" dirty="0"/>
           </a:p>
         </p:txBody>
       </p:sp>
@@ -5368,7 +5368,7 @@
               <a:buNone/>
             </a:pPr>
             <a:r>
-              <a:rPr lang="en-US" sz="1100" dirty="0">
+              <a:rPr lang="en-US" sz="1300" dirty="0">
                 <a:solidFill>
                   <a:srgbClr val="475569"/>
                 </a:solidFill>
@@ -5378,7 +5378,7 @@
               </a:rPr>
               <a:t>Taille du ménage</a:t>
             </a:r>
-            <a:endParaRPr lang="en-US" sz="1100" dirty="0"/>
+            <a:endParaRPr lang="en-US" sz="1300" dirty="0"/>
           </a:p>
         </p:txBody>
       </p:sp>
@@ -5451,7 +5451,7 @@
               <a:buNone/>
             </a:pPr>
             <a:r>
-              <a:rPr lang="en-US" sz="1100" b="1" dirty="0">
+              <a:rPr lang="en-US" sz="1300" b="1" dirty="0">
                 <a:solidFill>
                   <a:srgbClr val="0F172A"/>
                 </a:solidFill>
@@ -5461,7 +5461,7 @@
               </a:rPr>
               <a:t>49,7  →  19,4</a:t>
             </a:r>
-            <a:endParaRPr lang="en-US" sz="1100" dirty="0"/>
+            <a:endParaRPr lang="en-US" sz="1300" dirty="0"/>
           </a:p>
         </p:txBody>
       </p:sp>
@@ -5490,7 +5490,7 @@
               <a:buNone/>
             </a:pPr>
             <a:r>
-              <a:rPr lang="en-US" sz="1100" dirty="0">
+              <a:rPr lang="en-US" sz="1300" dirty="0">
                 <a:solidFill>
                   <a:srgbClr val="475569"/>
                 </a:solidFill>
@@ -5500,7 +5500,7 @@
               </a:rPr>
               <a:t>Dépense par tête</a:t>
             </a:r>
-            <a:endParaRPr lang="en-US" sz="1100" dirty="0"/>
+            <a:endParaRPr lang="en-US" sz="1300" dirty="0"/>
           </a:p>
         </p:txBody>
       </p:sp>
@@ -5573,7 +5573,7 @@
               <a:buNone/>
             </a:pPr>
             <a:r>
-              <a:rPr lang="en-US" sz="1100" b="1" dirty="0">
+              <a:rPr lang="en-US" sz="1300" b="1" dirty="0">
                 <a:solidFill>
                   <a:srgbClr val="0F172A"/>
                 </a:solidFill>
@@ -5583,7 +5583,7 @@
               </a:rPr>
               <a:t>29,3  →  20,2</a:t>
             </a:r>
-            <a:endParaRPr lang="en-US" sz="1100" dirty="0"/>
+            <a:endParaRPr lang="en-US" sz="1300" dirty="0"/>
           </a:p>
         </p:txBody>
       </p:sp>
@@ -5612,7 +5612,7 @@
               <a:buNone/>
             </a:pPr>
             <a:r>
-              <a:rPr lang="en-US" sz="1100" dirty="0">
+              <a:rPr lang="en-US" sz="1300" dirty="0">
                 <a:solidFill>
                   <a:srgbClr val="475569"/>
                 </a:solidFill>
@@ -5622,7 +5622,7 @@
               </a:rPr>
               <a:t>Milieu rural</a:t>
             </a:r>
-            <a:endParaRPr lang="en-US" sz="1100" dirty="0"/>
+            <a:endParaRPr lang="en-US" sz="1300" dirty="0"/>
           </a:p>
         </p:txBody>
       </p:sp>
@@ -5695,7 +5695,7 @@
               <a:buNone/>
             </a:pPr>
             <a:r>
-              <a:rPr lang="en-US" sz="1100" b="1" dirty="0">
+              <a:rPr lang="en-US" sz="1300" b="1" dirty="0">
                 <a:solidFill>
                   <a:srgbClr val="0F172A"/>
                 </a:solidFill>
@@ -5705,7 +5705,7 @@
               </a:rPr>
               <a:t>22,2  →  8,9</a:t>
             </a:r>
-            <a:endParaRPr lang="en-US" sz="1100" dirty="0"/>
+            <a:endParaRPr lang="en-US" sz="1300" dirty="0"/>
           </a:p>
         </p:txBody>
       </p:sp>
@@ -5734,7 +5734,7 @@
               <a:buNone/>
             </a:pPr>
             <a:r>
-              <a:rPr lang="en-US" sz="1100" dirty="0">
+              <a:rPr lang="en-US" sz="1300" dirty="0">
                 <a:solidFill>
                   <a:srgbClr val="475569"/>
                 </a:solidFill>
@@ -5744,7 +5744,7 @@
               </a:rPr>
               <a:t>Genre du chef</a:t>
             </a:r>
-            <a:endParaRPr lang="en-US" sz="1100" dirty="0"/>
+            <a:endParaRPr lang="en-US" sz="1300" dirty="0"/>
           </a:p>
         </p:txBody>
       </p:sp>
@@ -5817,7 +5817,7 @@
               <a:buNone/>
             </a:pPr>
             <a:r>
-              <a:rPr lang="en-US" sz="1100" b="1" dirty="0">
+              <a:rPr lang="en-US" sz="1300" b="1" dirty="0">
                 <a:solidFill>
                   <a:srgbClr val="0F172A"/>
                 </a:solidFill>
@@ -5827,7 +5827,7 @@
               </a:rPr>
               <a:t>27,5  →  9,0</a:t>
             </a:r>
-            <a:endParaRPr lang="en-US" sz="1100" dirty="0"/>
+            <a:endParaRPr lang="en-US" sz="1300" dirty="0"/>
           </a:p>
         </p:txBody>
       </p:sp>
@@ -5856,7 +5856,7 @@
               <a:buNone/>
             </a:pPr>
             <a:r>
-              <a:rPr lang="en-US" sz="1100" dirty="0">
+              <a:rPr lang="en-US" sz="1300" dirty="0">
                 <a:solidFill>
                   <a:srgbClr val="475569"/>
                 </a:solidFill>
@@ -5866,7 +5866,7 @@
               </a:rPr>
               <a:t>Genre de l'enfant</a:t>
             </a:r>
-            <a:endParaRPr lang="en-US" sz="1100" dirty="0"/>
+            <a:endParaRPr lang="en-US" sz="1300" dirty="0"/>
           </a:p>
         </p:txBody>
       </p:sp>
@@ -5939,7 +5939,7 @@
               <a:buNone/>
             </a:pPr>
             <a:r>
-              <a:rPr lang="en-US" sz="1100" b="1" dirty="0">
+              <a:rPr lang="en-US" sz="1300" b="1" dirty="0">
                 <a:solidFill>
                   <a:srgbClr val="0F172A"/>
                 </a:solidFill>
@@ -5949,7 +5949,7 @@
               </a:rPr>
               <a:t>0,6  →  2,7</a:t>
             </a:r>
-            <a:endParaRPr lang="en-US" sz="1100" dirty="0"/>
+            <a:endParaRPr lang="en-US" sz="1300" dirty="0"/>
           </a:p>
         </p:txBody>
       </p:sp>
@@ -5978,7 +5978,7 @@
               <a:buNone/>
             </a:pPr>
             <a:r>
-              <a:rPr lang="en-US" sz="1100" dirty="0">
+              <a:rPr lang="en-US" sz="1300" dirty="0">
                 <a:solidFill>
                   <a:srgbClr val="475569"/>
                 </a:solidFill>
@@ -5988,7 +5988,7 @@
               </a:rPr>
               <a:t>Âge de l'enfant</a:t>
             </a:r>
-            <a:endParaRPr lang="en-US" sz="1100" dirty="0"/>
+            <a:endParaRPr lang="en-US" sz="1300" dirty="0"/>
           </a:p>
         </p:txBody>
       </p:sp>
@@ -6061,7 +6061,7 @@
               <a:buNone/>
             </a:pPr>
             <a:r>
-              <a:rPr lang="en-US" sz="1100" b="1" dirty="0">
+              <a:rPr lang="en-US" sz="1300" b="1" dirty="0">
                 <a:solidFill>
                   <a:srgbClr val="0F172A"/>
                 </a:solidFill>
@@ -6071,7 +6071,7 @@
               </a:rPr>
               <a:t>2,0  →  2,5</a:t>
             </a:r>
-            <a:endParaRPr lang="en-US" sz="1100" dirty="0"/>
+            <a:endParaRPr lang="en-US" sz="1300" dirty="0"/>
           </a:p>
         </p:txBody>
       </p:sp>
@@ -6100,7 +6100,7 @@
               <a:buNone/>
             </a:pPr>
             <a:r>
-              <a:rPr lang="en-US" sz="900" dirty="0">
+              <a:rPr lang="en-US" sz="1000" dirty="0">
                 <a:solidFill>
                   <a:srgbClr val="94A3B8"/>
                 </a:solidFill>
@@ -6110,7 +6110,7 @@
               </a:rPr>
               <a:t>Gris : avant appariement ; vert : après appariement. Source : calcul de l'auteur, EHCVM I (2018-2019) et EHCVM II (2021-2022).</a:t>
             </a:r>
-            <a:endParaRPr lang="en-US" sz="900" dirty="0"/>
+            <a:endParaRPr lang="en-US" sz="1000" dirty="0"/>
           </a:p>
         </p:txBody>
       </p:sp>
@@ -6139,7 +6139,7 @@
               <a:buNone/>
             </a:pPr>
             <a:r>
-              <a:rPr lang="en-US" sz="950" dirty="0">
+              <a:rPr lang="en-US" sz="1000" dirty="0">
                 <a:solidFill>
                   <a:srgbClr val="94A3B8"/>
                 </a:solidFill>
@@ -6149,7 +6149,7 @@
               </a:rPr>
               <a:t>11</a:t>
             </a:r>
-            <a:endParaRPr lang="en-US" sz="950" dirty="0"/>
+            <a:endParaRPr lang="en-US" sz="1000" dirty="0"/>
           </a:p>
         </p:txBody>
       </p:sp>
@@ -6234,7 +6234,7 @@
               <a:buNone/>
             </a:pPr>
             <a:r>
-              <a:rPr lang="en-US" sz="2700" b="1" dirty="0">
+              <a:rPr lang="en-US" sz="3000" b="1" dirty="0">
                 <a:solidFill>
                   <a:srgbClr val="312E81"/>
                 </a:solidFill>
@@ -6244,7 +6244,7 @@
               </a:rPr>
               <a:t>Le résultat central</a:t>
             </a:r>
-            <a:endParaRPr lang="en-US" sz="2700" dirty="0"/>
+            <a:endParaRPr lang="en-US" sz="3000" dirty="0"/>
           </a:p>
         </p:txBody>
       </p:sp>
@@ -6376,7 +6376,7 @@
               <a:buNone/>
             </a:pPr>
             <a:r>
-              <a:rPr lang="en-US" sz="1250" dirty="0">
+              <a:rPr lang="en-US" sz="1400" dirty="0">
                 <a:solidFill>
                   <a:srgbClr val="D5DEEC"/>
                 </a:solidFill>
@@ -6386,7 +6386,7 @@
               </a:rPr>
               <a:t>d'écart de trajectoire défavorable aux enfants des ménages bénéficiaires, significatif au seuil de 5 %.</a:t>
             </a:r>
-            <a:endParaRPr lang="en-US" sz="1250" dirty="0"/>
+            <a:endParaRPr lang="en-US" sz="1400" dirty="0"/>
           </a:p>
         </p:txBody>
       </p:sp>
@@ -6557,7 +6557,7 @@
               <a:buNone/>
             </a:pPr>
             <a:r>
-              <a:rPr lang="en-US" sz="1150" b="1" dirty="0">
+              <a:rPr lang="en-US" sz="1300" b="1" dirty="0">
                 <a:solidFill>
                   <a:srgbClr val="475569"/>
                 </a:solidFill>
@@ -6567,7 +6567,7 @@
               </a:rPr>
               <a:t>Bénéficiaires</a:t>
             </a:r>
-            <a:endParaRPr lang="en-US" sz="1150" dirty="0"/>
+            <a:endParaRPr lang="en-US" sz="1300" dirty="0"/>
           </a:p>
         </p:txBody>
       </p:sp>
@@ -6660,7 +6660,7 @@
               <a:buNone/>
             </a:pPr>
             <a:r>
-              <a:rPr lang="en-US" sz="1150" b="1" dirty="0">
+              <a:rPr lang="en-US" sz="1300" b="1" dirty="0">
                 <a:solidFill>
                   <a:srgbClr val="475569"/>
                 </a:solidFill>
@@ -6670,7 +6670,7 @@
               </a:rPr>
               <a:t>Témoins</a:t>
             </a:r>
-            <a:endParaRPr lang="en-US" sz="1150" dirty="0"/>
+            <a:endParaRPr lang="en-US" sz="1300" dirty="0"/>
           </a:p>
           <a:p>
             <a:pPr algn="ctr" indent="0" marL="0">
@@ -6680,7 +6680,7 @@
               <a:buNone/>
             </a:pPr>
             <a:r>
-              <a:rPr lang="en-US" sz="1150" b="1" dirty="0">
+              <a:rPr lang="en-US" sz="1300" b="1" dirty="0">
                 <a:solidFill>
                   <a:srgbClr val="475569"/>
                 </a:solidFill>
@@ -6690,7 +6690,7 @@
               </a:rPr>
               <a:t>appariés</a:t>
             </a:r>
-            <a:endParaRPr lang="en-US" sz="1150" dirty="0"/>
+            <a:endParaRPr lang="en-US" sz="1300" dirty="0"/>
           </a:p>
         </p:txBody>
       </p:sp>
@@ -6722,8 +6722,8 @@
         </p:nvSpPr>
         <p:spPr>
           <a:xfrm>
-            <a:off x="3291840" y="5532120"/>
-            <a:ext cx="5074920" cy="310896"/>
+            <a:off x="3017520" y="5650992"/>
+            <a:ext cx="5486400" cy="420624"/>
           </a:xfrm>
           <a:prstGeom prst="rect">
             <a:avLst/>
@@ -6739,7 +6739,7 @@
               <a:buNone/>
             </a:pPr>
             <a:r>
-              <a:rPr lang="en-US" sz="1100" dirty="0">
+              <a:rPr lang="en-US" sz="1300" dirty="0">
                 <a:solidFill>
                   <a:srgbClr val="475569"/>
                 </a:solidFill>
@@ -6749,7 +6749,7 @@
               </a:rPr>
               <a:t>La pauvreté a reculé près de trois fois moins vite chez les bénéficiaires.</a:t>
             </a:r>
-            <a:endParaRPr lang="en-US" sz="1100" dirty="0"/>
+            <a:endParaRPr lang="en-US" sz="1300" dirty="0"/>
           </a:p>
         </p:txBody>
       </p:sp>
@@ -6820,7 +6820,7 @@
               <a:buNone/>
             </a:pPr>
             <a:r>
-              <a:rPr lang="en-US" sz="1100" dirty="0">
+              <a:rPr lang="en-US" sz="1300" dirty="0">
                 <a:solidFill>
                   <a:srgbClr val="475569"/>
                 </a:solidFill>
@@ -6830,7 +6830,7 @@
               </a:rPr>
               <a:t>k plus proches voisins</a:t>
             </a:r>
-            <a:endParaRPr lang="en-US" sz="1100" dirty="0"/>
+            <a:endParaRPr lang="en-US" sz="1300" dirty="0"/>
           </a:p>
         </p:txBody>
       </p:sp>
@@ -6921,7 +6921,7 @@
               <a:buNone/>
             </a:pPr>
             <a:r>
-              <a:rPr lang="en-US" sz="1100" dirty="0">
+              <a:rPr lang="en-US" sz="1300" dirty="0">
                 <a:solidFill>
                   <a:srgbClr val="475569"/>
                 </a:solidFill>
@@ -6931,7 +6931,7 @@
               </a:rPr>
               <a:t>Noyau Epanechnikov</a:t>
             </a:r>
-            <a:endParaRPr lang="en-US" sz="1100" dirty="0"/>
+            <a:endParaRPr lang="en-US" sz="1300" dirty="0"/>
           </a:p>
         </p:txBody>
       </p:sp>
@@ -7022,7 +7022,7 @@
               <a:buNone/>
             </a:pPr>
             <a:r>
-              <a:rPr lang="en-US" sz="1100" dirty="0">
+              <a:rPr lang="en-US" sz="1300" dirty="0">
                 <a:solidFill>
                   <a:srgbClr val="475569"/>
                 </a:solidFill>
@@ -7032,7 +7032,7 @@
               </a:rPr>
               <a:t>Caliper</a:t>
             </a:r>
-            <a:endParaRPr lang="en-US" sz="1100" dirty="0"/>
+            <a:endParaRPr lang="en-US" sz="1300" dirty="0"/>
           </a:p>
         </p:txBody>
       </p:sp>
@@ -7123,7 +7123,7 @@
               <a:buNone/>
             </a:pPr>
             <a:r>
-              <a:rPr lang="en-US" sz="1100" dirty="0">
+              <a:rPr lang="en-US" sz="1300" dirty="0">
                 <a:solidFill>
                   <a:srgbClr val="475569"/>
                 </a:solidFill>
@@ -7133,7 +7133,7 @@
               </a:rPr>
               <a:t>Double différence brute</a:t>
             </a:r>
-            <a:endParaRPr lang="en-US" sz="1100" dirty="0"/>
+            <a:endParaRPr lang="en-US" sz="1300" dirty="0"/>
           </a:p>
         </p:txBody>
       </p:sp>
@@ -7224,7 +7224,7 @@
               <a:buNone/>
             </a:pPr>
             <a:r>
-              <a:rPr lang="en-US" sz="1050" dirty="0">
+              <a:rPr lang="en-US" sz="1200" dirty="0">
                 <a:solidFill>
                   <a:srgbClr val="475569"/>
                 </a:solidFill>
@@ -7234,7 +7234,7 @@
               </a:rPr>
               <a:t>Le résultat ne tient pas au choix de l'algorithme. La double différence sans appariement, qui ne corrige pas l'avantage initial, donne le même signe atténué.</a:t>
             </a:r>
-            <a:endParaRPr lang="en-US" sz="1050" dirty="0"/>
+            <a:endParaRPr lang="en-US" sz="1200" dirty="0"/>
           </a:p>
         </p:txBody>
       </p:sp>
@@ -7263,7 +7263,7 @@
               <a:buNone/>
             </a:pPr>
             <a:r>
-              <a:rPr lang="en-US" sz="900" dirty="0">
+              <a:rPr lang="en-US" sz="1000" dirty="0">
                 <a:solidFill>
                   <a:srgbClr val="94A3B8"/>
                 </a:solidFill>
@@ -7273,7 +7273,7 @@
               </a:rPr>
               <a:t>** significatif à 5 %, * à 10 %. Source : calcul de l'auteur, EHCVM I (2018-2019) et EHCVM II (2021-2022).</a:t>
             </a:r>
-            <a:endParaRPr lang="en-US" sz="900" dirty="0"/>
+            <a:endParaRPr lang="en-US" sz="1000" dirty="0"/>
           </a:p>
         </p:txBody>
       </p:sp>
@@ -7302,7 +7302,7 @@
               <a:buNone/>
             </a:pPr>
             <a:r>
-              <a:rPr lang="en-US" sz="950" dirty="0">
+              <a:rPr lang="en-US" sz="1000" dirty="0">
                 <a:solidFill>
                   <a:srgbClr val="94A3B8"/>
                 </a:solidFill>
@@ -7312,7 +7312,7 @@
               </a:rPr>
               <a:t>12</a:t>
             </a:r>
-            <a:endParaRPr lang="en-US" sz="950" dirty="0"/>
+            <a:endParaRPr lang="en-US" sz="1000" dirty="0"/>
           </a:p>
         </p:txBody>
       </p:sp>
@@ -7397,7 +7397,7 @@
               <a:buNone/>
             </a:pPr>
             <a:r>
-              <a:rPr lang="en-US" sz="2700" b="1" dirty="0">
+              <a:rPr lang="en-US" sz="3000" b="1" dirty="0">
                 <a:solidFill>
                   <a:srgbClr val="312E81"/>
                 </a:solidFill>
@@ -7407,7 +7407,7 @@
               </a:rPr>
               <a:t>Où se concentre l'écart</a:t>
             </a:r>
-            <a:endParaRPr lang="en-US" sz="2700" dirty="0"/>
+            <a:endParaRPr lang="en-US" sz="3000" dirty="0"/>
           </a:p>
         </p:txBody>
       </p:sp>
@@ -7439,7 +7439,7 @@
               <a:buNone/>
             </a:pPr>
             <a:r>
-              <a:rPr lang="en-US" sz="1300" dirty="0">
+              <a:rPr lang="en-US" sz="1400" dirty="0">
                 <a:solidFill>
                   <a:srgbClr val="475569"/>
                 </a:solidFill>
@@ -7449,7 +7449,7 @@
               </a:rPr>
               <a:t>Sur les sept dimensions, une seule ressort : la nutrition, celle qui dépend le plus directement du budget courant du ménage.</a:t>
             </a:r>
-            <a:endParaRPr lang="en-US" sz="1300" dirty="0"/>
+            <a:endParaRPr lang="en-US" sz="1400" dirty="0"/>
           </a:p>
         </p:txBody>
       </p:sp>
@@ -7517,7 +7517,7 @@
               <a:buNone/>
             </a:pPr>
             <a:r>
-              <a:rPr lang="en-US" sz="1150" b="1" dirty="0">
+              <a:rPr lang="en-US" sz="1300" b="1" dirty="0">
                 <a:solidFill>
                   <a:srgbClr val="0F172A"/>
                 </a:solidFill>
@@ -7527,7 +7527,7 @@
               </a:rPr>
               <a:t>Nutrition</a:t>
             </a:r>
-            <a:endParaRPr lang="en-US" sz="1150" dirty="0"/>
+            <a:endParaRPr lang="en-US" sz="1300" dirty="0"/>
           </a:p>
         </p:txBody>
       </p:sp>
@@ -7578,7 +7578,7 @@
               <a:buNone/>
             </a:pPr>
             <a:r>
-              <a:rPr lang="en-US" sz="1200" b="1" dirty="0">
+              <a:rPr lang="en-US" sz="1350" b="1" dirty="0">
                 <a:solidFill>
                   <a:srgbClr val="0F172A"/>
                 </a:solidFill>
@@ -7588,7 +7588,7 @@
               </a:rPr>
               <a:t>+6,8</a:t>
             </a:r>
-            <a:endParaRPr lang="en-US" sz="1200" dirty="0"/>
+            <a:endParaRPr lang="en-US" sz="1350" dirty="0"/>
           </a:p>
         </p:txBody>
       </p:sp>
@@ -7656,7 +7656,7 @@
               <a:buNone/>
             </a:pPr>
             <a:r>
-              <a:rPr lang="en-US" sz="1150" dirty="0">
+              <a:rPr lang="en-US" sz="1300" dirty="0">
                 <a:solidFill>
                   <a:srgbClr val="475569"/>
                 </a:solidFill>
@@ -7666,7 +7666,7 @@
               </a:rPr>
               <a:t>Assainissement</a:t>
             </a:r>
-            <a:endParaRPr lang="en-US" sz="1150" dirty="0"/>
+            <a:endParaRPr lang="en-US" sz="1300" dirty="0"/>
           </a:p>
         </p:txBody>
       </p:sp>
@@ -7717,7 +7717,7 @@
               <a:buNone/>
             </a:pPr>
             <a:r>
-              <a:rPr lang="en-US" sz="1200" b="1" dirty="0">
+              <a:rPr lang="en-US" sz="1350" b="1" dirty="0">
                 <a:solidFill>
                   <a:srgbClr val="0F172A"/>
                 </a:solidFill>
@@ -7727,7 +7727,7 @@
               </a:rPr>
               <a:t>+4,6</a:t>
             </a:r>
-            <a:endParaRPr lang="en-US" sz="1200" dirty="0"/>
+            <a:endParaRPr lang="en-US" sz="1350" dirty="0"/>
           </a:p>
         </p:txBody>
       </p:sp>
@@ -7756,7 +7756,7 @@
               <a:buNone/>
             </a:pPr>
             <a:r>
-              <a:rPr lang="en-US" sz="1150" dirty="0">
+              <a:rPr lang="en-US" sz="1300" dirty="0">
                 <a:solidFill>
                   <a:srgbClr val="475569"/>
                 </a:solidFill>
@@ -7766,7 +7766,7 @@
               </a:rPr>
               <a:t>Eau</a:t>
             </a:r>
-            <a:endParaRPr lang="en-US" sz="1150" dirty="0"/>
+            <a:endParaRPr lang="en-US" sz="1300" dirty="0"/>
           </a:p>
         </p:txBody>
       </p:sp>
@@ -7817,7 +7817,7 @@
               <a:buNone/>
             </a:pPr>
             <a:r>
-              <a:rPr lang="en-US" sz="1200" b="1" dirty="0">
+              <a:rPr lang="en-US" sz="1350" b="1" dirty="0">
                 <a:solidFill>
                   <a:srgbClr val="0F172A"/>
                 </a:solidFill>
@@ -7827,7 +7827,7 @@
               </a:rPr>
               <a:t>+2,4</a:t>
             </a:r>
-            <a:endParaRPr lang="en-US" sz="1200" dirty="0"/>
+            <a:endParaRPr lang="en-US" sz="1350" dirty="0"/>
           </a:p>
         </p:txBody>
       </p:sp>
@@ -7856,7 +7856,7 @@
               <a:buNone/>
             </a:pPr>
             <a:r>
-              <a:rPr lang="en-US" sz="1150" dirty="0">
+              <a:rPr lang="en-US" sz="1300" dirty="0">
                 <a:solidFill>
                   <a:srgbClr val="475569"/>
                 </a:solidFill>
@@ -7866,7 +7866,7 @@
               </a:rPr>
               <a:t>Logement</a:t>
             </a:r>
-            <a:endParaRPr lang="en-US" sz="1150" dirty="0"/>
+            <a:endParaRPr lang="en-US" sz="1300" dirty="0"/>
           </a:p>
         </p:txBody>
       </p:sp>
@@ -7917,7 +7917,7 @@
               <a:buNone/>
             </a:pPr>
             <a:r>
-              <a:rPr lang="en-US" sz="1200" b="1" dirty="0">
+              <a:rPr lang="en-US" sz="1350" b="1" dirty="0">
                 <a:solidFill>
                   <a:srgbClr val="0F172A"/>
                 </a:solidFill>
@@ -7927,7 +7927,7 @@
               </a:rPr>
               <a:t>+2,4</a:t>
             </a:r>
-            <a:endParaRPr lang="en-US" sz="1200" dirty="0"/>
+            <a:endParaRPr lang="en-US" sz="1350" dirty="0"/>
           </a:p>
         </p:txBody>
       </p:sp>
@@ -7956,7 +7956,7 @@
               <a:buNone/>
             </a:pPr>
             <a:r>
-              <a:rPr lang="en-US" sz="1150" dirty="0">
+              <a:rPr lang="en-US" sz="1300" dirty="0">
                 <a:solidFill>
                   <a:srgbClr val="475569"/>
                 </a:solidFill>
@@ -7966,7 +7966,7 @@
               </a:rPr>
               <a:t>Protection</a:t>
             </a:r>
-            <a:endParaRPr lang="en-US" sz="1150" dirty="0"/>
+            <a:endParaRPr lang="en-US" sz="1300" dirty="0"/>
           </a:p>
         </p:txBody>
       </p:sp>
@@ -8017,7 +8017,7 @@
               <a:buNone/>
             </a:pPr>
             <a:r>
-              <a:rPr lang="en-US" sz="1200" b="1" dirty="0">
+              <a:rPr lang="en-US" sz="1350" b="1" dirty="0">
                 <a:solidFill>
                   <a:srgbClr val="0F172A"/>
                 </a:solidFill>
@@ -8027,7 +8027,7 @@
               </a:rPr>
               <a:t>+1,1</a:t>
             </a:r>
-            <a:endParaRPr lang="en-US" sz="1200" dirty="0"/>
+            <a:endParaRPr lang="en-US" sz="1350" dirty="0"/>
           </a:p>
         </p:txBody>
       </p:sp>
@@ -8056,7 +8056,7 @@
               <a:buNone/>
             </a:pPr>
             <a:r>
-              <a:rPr lang="en-US" sz="1150" dirty="0">
+              <a:rPr lang="en-US" sz="1300" dirty="0">
                 <a:solidFill>
                   <a:srgbClr val="475569"/>
                 </a:solidFill>
@@ -8066,7 +8066,7 @@
               </a:rPr>
               <a:t>Santé</a:t>
             </a:r>
-            <a:endParaRPr lang="en-US" sz="1150" dirty="0"/>
+            <a:endParaRPr lang="en-US" sz="1300" dirty="0"/>
           </a:p>
         </p:txBody>
       </p:sp>
@@ -8117,7 +8117,7 @@
               <a:buNone/>
             </a:pPr>
             <a:r>
-              <a:rPr lang="en-US" sz="1200" b="1" dirty="0">
+              <a:rPr lang="en-US" sz="1350" b="1" dirty="0">
                 <a:solidFill>
                   <a:srgbClr val="0F172A"/>
                 </a:solidFill>
@@ -8127,7 +8127,7 @@
               </a:rPr>
               <a:t>+1,0</a:t>
             </a:r>
-            <a:endParaRPr lang="en-US" sz="1200" dirty="0"/>
+            <a:endParaRPr lang="en-US" sz="1350" dirty="0"/>
           </a:p>
         </p:txBody>
       </p:sp>
@@ -8156,7 +8156,7 @@
               <a:buNone/>
             </a:pPr>
             <a:r>
-              <a:rPr lang="en-US" sz="1150" dirty="0">
+              <a:rPr lang="en-US" sz="1300" dirty="0">
                 <a:solidFill>
                   <a:srgbClr val="475569"/>
                 </a:solidFill>
@@ -8166,7 +8166,7 @@
               </a:rPr>
               <a:t>Éducation</a:t>
             </a:r>
-            <a:endParaRPr lang="en-US" sz="1150" dirty="0"/>
+            <a:endParaRPr lang="en-US" sz="1300" dirty="0"/>
           </a:p>
         </p:txBody>
       </p:sp>
@@ -8217,7 +8217,7 @@
               <a:buNone/>
             </a:pPr>
             <a:r>
-              <a:rPr lang="en-US" sz="1200" b="1" dirty="0">
+              <a:rPr lang="en-US" sz="1350" b="1" dirty="0">
                 <a:solidFill>
                   <a:srgbClr val="0F172A"/>
                 </a:solidFill>
@@ -8227,7 +8227,7 @@
               </a:rPr>
               <a:t>+0,5</a:t>
             </a:r>
-            <a:endParaRPr lang="en-US" sz="1200" dirty="0"/>
+            <a:endParaRPr lang="en-US" sz="1350" dirty="0"/>
           </a:p>
         </p:txBody>
       </p:sp>
@@ -8359,8 +8359,8 @@
         </p:nvSpPr>
         <p:spPr>
           <a:xfrm>
-            <a:off x="7772400" y="2926080"/>
-            <a:ext cx="3520440" cy="640080"/>
+            <a:off x="7772400" y="2907792"/>
+            <a:ext cx="3520440" cy="685800"/>
           </a:xfrm>
           <a:prstGeom prst="rect">
             <a:avLst/>
@@ -8379,7 +8379,7 @@
               <a:buNone/>
             </a:pPr>
             <a:r>
-              <a:rPr lang="en-US" sz="1100" dirty="0">
+              <a:rPr lang="en-US" sz="1300" dirty="0">
                 <a:solidFill>
                   <a:srgbClr val="475569"/>
                 </a:solidFill>
@@ -8387,9 +8387,9 @@
                 <a:ea typeface="Calibri" pitchFamily="34" charset="-122"/>
                 <a:cs typeface="Calibri" pitchFamily="34" charset="-120"/>
               </a:rPr>
-              <a:t>Significatif à 5 %. Effet par âge et effet par dimension se répondent : les besoins des plus jeunes passent d'abord par l'alimentation.</a:t>
-            </a:r>
-            <a:endParaRPr lang="en-US" sz="1100" dirty="0"/>
+              <a:t>Significatif à 5 %. Les besoins des plus jeunes passent d'abord par l'alimentation.</a:t>
+            </a:r>
+            <a:endParaRPr lang="en-US" sz="1300" dirty="0"/>
           </a:p>
         </p:txBody>
       </p:sp>
@@ -8457,7 +8457,7 @@
               <a:buNone/>
             </a:pPr>
             <a:r>
-              <a:rPr lang="en-US" sz="1150" dirty="0">
+              <a:rPr lang="en-US" sz="1300" dirty="0">
                 <a:solidFill>
                   <a:srgbClr val="475569"/>
                 </a:solidFill>
@@ -8467,7 +8467,7 @@
               </a:rPr>
               <a:t>Milieu de résidence</a:t>
             </a:r>
-            <a:endParaRPr lang="en-US" sz="1150" dirty="0"/>
+            <a:endParaRPr lang="en-US" sz="1300" dirty="0"/>
           </a:p>
         </p:txBody>
       </p:sp>
@@ -8496,7 +8496,7 @@
               <a:buNone/>
             </a:pPr>
             <a:r>
-              <a:rPr lang="en-US" sz="1150" b="1" dirty="0">
+              <a:rPr lang="en-US" sz="1300" b="1" dirty="0">
                 <a:solidFill>
                   <a:srgbClr val="0F172A"/>
                 </a:solidFill>
@@ -8506,7 +8506,7 @@
               </a:rPr>
               <a:t>p = 0,863</a:t>
             </a:r>
-            <a:endParaRPr lang="en-US" sz="1150" dirty="0"/>
+            <a:endParaRPr lang="en-US" sz="1300" dirty="0"/>
           </a:p>
         </p:txBody>
       </p:sp>
@@ -8535,7 +8535,7 @@
               <a:buNone/>
             </a:pPr>
             <a:r>
-              <a:rPr lang="en-US" sz="1150" dirty="0">
+              <a:rPr lang="en-US" sz="1300" dirty="0">
                 <a:solidFill>
                   <a:srgbClr val="475569"/>
                 </a:solidFill>
@@ -8545,7 +8545,7 @@
               </a:rPr>
               <a:t>Genre du chef de ménage</a:t>
             </a:r>
-            <a:endParaRPr lang="en-US" sz="1150" dirty="0"/>
+            <a:endParaRPr lang="en-US" sz="1300" dirty="0"/>
           </a:p>
         </p:txBody>
       </p:sp>
@@ -8574,7 +8574,7 @@
               <a:buNone/>
             </a:pPr>
             <a:r>
-              <a:rPr lang="en-US" sz="1150" b="1" dirty="0">
+              <a:rPr lang="en-US" sz="1300" b="1" dirty="0">
                 <a:solidFill>
                   <a:srgbClr val="0F172A"/>
                 </a:solidFill>
@@ -8584,7 +8584,7 @@
               </a:rPr>
               <a:t>p = 0,879</a:t>
             </a:r>
-            <a:endParaRPr lang="en-US" sz="1150" dirty="0"/>
+            <a:endParaRPr lang="en-US" sz="1300" dirty="0"/>
           </a:p>
         </p:txBody>
       </p:sp>
@@ -8613,7 +8613,7 @@
               <a:buNone/>
             </a:pPr>
             <a:r>
-              <a:rPr lang="en-US" sz="1150" dirty="0">
+              <a:rPr lang="en-US" sz="1300" dirty="0">
                 <a:solidFill>
                   <a:srgbClr val="475569"/>
                 </a:solidFill>
@@ -8623,7 +8623,7 @@
               </a:rPr>
               <a:t>Groupe d'âge</a:t>
             </a:r>
-            <a:endParaRPr lang="en-US" sz="1150" dirty="0"/>
+            <a:endParaRPr lang="en-US" sz="1300" dirty="0"/>
           </a:p>
         </p:txBody>
       </p:sp>
@@ -8652,7 +8652,7 @@
               <a:buNone/>
             </a:pPr>
             <a:r>
-              <a:rPr lang="en-US" sz="1150" b="1" dirty="0">
+              <a:rPr lang="en-US" sz="1300" b="1" dirty="0">
                 <a:solidFill>
                   <a:srgbClr val="0F172A"/>
                 </a:solidFill>
@@ -8662,7 +8662,7 @@
               </a:rPr>
               <a:t>p = 0,252</a:t>
             </a:r>
-            <a:endParaRPr lang="en-US" sz="1150" dirty="0"/>
+            <a:endParaRPr lang="en-US" sz="1300" dirty="0"/>
           </a:p>
         </p:txBody>
       </p:sp>
@@ -8730,7 +8730,7 @@
               <a:buNone/>
             </a:pPr>
             <a:r>
-              <a:rPr lang="en-US" sz="900" dirty="0">
+              <a:rPr lang="en-US" sz="1000" dirty="0">
                 <a:solidFill>
                   <a:srgbClr val="94A3B8"/>
                 </a:solidFill>
@@ -8740,7 +8740,7 @@
               </a:rPr>
               <a:t>* significatif à 10 %. Appariement au plus proche voisin. Source : calcul de l'auteur, EHCVM I (2018-2019) et EHCVM II (2021-2022).</a:t>
             </a:r>
-            <a:endParaRPr lang="en-US" sz="900" dirty="0"/>
+            <a:endParaRPr lang="en-US" sz="1000" dirty="0"/>
           </a:p>
         </p:txBody>
       </p:sp>
@@ -8769,7 +8769,7 @@
               <a:buNone/>
             </a:pPr>
             <a:r>
-              <a:rPr lang="en-US" sz="950" dirty="0">
+              <a:rPr lang="en-US" sz="1000" dirty="0">
                 <a:solidFill>
                   <a:srgbClr val="94A3B8"/>
                 </a:solidFill>
@@ -8779,7 +8779,7 @@
               </a:rPr>
               <a:t>13</a:t>
             </a:r>
-            <a:endParaRPr lang="en-US" sz="950" dirty="0"/>
+            <a:endParaRPr lang="en-US" sz="1000" dirty="0"/>
           </a:p>
         </p:txBody>
       </p:sp>
@@ -8864,7 +8864,7 @@
               <a:buNone/>
             </a:pPr>
             <a:r>
-              <a:rPr lang="en-US" sz="2700" b="1" dirty="0">
+              <a:rPr lang="en-US" sz="3000" b="1" dirty="0">
                 <a:solidFill>
                   <a:srgbClr val="312E81"/>
                 </a:solidFill>
@@ -8874,7 +8874,7 @@
               </a:rPr>
               <a:t>Un gradient selon le montant reçu</a:t>
             </a:r>
-            <a:endParaRPr lang="en-US" sz="2700" dirty="0"/>
+            <a:endParaRPr lang="en-US" sz="3000" dirty="0"/>
           </a:p>
         </p:txBody>
       </p:sp>
@@ -8906,7 +8906,7 @@
               <a:buNone/>
             </a:pPr>
             <a:r>
-              <a:rPr lang="en-US" sz="1300" dirty="0">
+              <a:rPr lang="en-US" sz="1400" dirty="0">
                 <a:solidFill>
                   <a:srgbClr val="475569"/>
                 </a:solidFill>
@@ -8916,7 +8916,7 @@
               </a:rPr>
               <a:t>L'écart défavorable se concentre sur les plus faibles montants et ne se retrouve pas pour les transferts les plus élevés.</a:t>
             </a:r>
-            <a:endParaRPr lang="en-US" sz="1300" dirty="0"/>
+            <a:endParaRPr lang="en-US" sz="1400" dirty="0"/>
           </a:p>
         </p:txBody>
       </p:sp>
@@ -8984,7 +8984,7 @@
               <a:buNone/>
             </a:pPr>
             <a:r>
-              <a:rPr lang="en-US" sz="1300" b="1" dirty="0">
+              <a:rPr lang="en-US" sz="1400" b="1" dirty="0">
                 <a:solidFill>
                   <a:srgbClr val="0F172A"/>
                 </a:solidFill>
@@ -8994,7 +8994,7 @@
               </a:rPr>
               <a:t>Q1</a:t>
             </a:r>
-            <a:endParaRPr lang="en-US" sz="1300" dirty="0"/>
+            <a:endParaRPr lang="en-US" sz="1400" dirty="0"/>
           </a:p>
         </p:txBody>
       </p:sp>
@@ -9023,7 +9023,7 @@
               <a:buNone/>
             </a:pPr>
             <a:r>
-              <a:rPr lang="en-US" sz="1050" dirty="0">
+              <a:rPr lang="en-US" sz="1200" dirty="0">
                 <a:solidFill>
                   <a:srgbClr val="94A3B8"/>
                 </a:solidFill>
@@ -9033,7 +9033,7 @@
               </a:rPr>
               <a:t>jusqu'à 100 000 FCFA</a:t>
             </a:r>
-            <a:endParaRPr lang="en-US" sz="1050" dirty="0"/>
+            <a:endParaRPr lang="en-US" sz="1200" dirty="0"/>
           </a:p>
         </p:txBody>
       </p:sp>
@@ -9084,7 +9084,7 @@
               <a:buNone/>
             </a:pPr>
             <a:r>
-              <a:rPr lang="en-US" sz="1200" b="1" dirty="0">
+              <a:rPr lang="en-US" sz="1350" b="1" dirty="0">
                 <a:solidFill>
                   <a:srgbClr val="0F172A"/>
                 </a:solidFill>
@@ -9094,7 +9094,7 @@
               </a:rPr>
               <a:t>+12,9</a:t>
             </a:r>
-            <a:endParaRPr lang="en-US" sz="1200" dirty="0"/>
+            <a:endParaRPr lang="en-US" sz="1350" dirty="0"/>
           </a:p>
         </p:txBody>
       </p:sp>
@@ -9123,7 +9123,7 @@
               <a:buNone/>
             </a:pPr>
             <a:r>
-              <a:rPr lang="en-US" sz="1300" b="1" dirty="0">
+              <a:rPr lang="en-US" sz="1400" b="1" dirty="0">
                 <a:solidFill>
                   <a:srgbClr val="D97706"/>
                 </a:solidFill>
@@ -9133,7 +9133,7 @@
               </a:rPr>
               <a:t>**</a:t>
             </a:r>
-            <a:endParaRPr lang="en-US" sz="1300" dirty="0"/>
+            <a:endParaRPr lang="en-US" sz="1400" dirty="0"/>
           </a:p>
         </p:txBody>
       </p:sp>
@@ -9162,7 +9162,7 @@
               <a:buNone/>
             </a:pPr>
             <a:r>
-              <a:rPr lang="en-US" sz="1300" b="1" dirty="0">
+              <a:rPr lang="en-US" sz="1400" b="1" dirty="0">
                 <a:solidFill>
                   <a:srgbClr val="0F172A"/>
                 </a:solidFill>
@@ -9172,7 +9172,7 @@
               </a:rPr>
               <a:t>Q2</a:t>
             </a:r>
-            <a:endParaRPr lang="en-US" sz="1300" dirty="0"/>
+            <a:endParaRPr lang="en-US" sz="1400" dirty="0"/>
           </a:p>
         </p:txBody>
       </p:sp>
@@ -9201,7 +9201,7 @@
               <a:buNone/>
             </a:pPr>
             <a:r>
-              <a:rPr lang="en-US" sz="1050" dirty="0">
+              <a:rPr lang="en-US" sz="1200" dirty="0">
                 <a:solidFill>
                   <a:srgbClr val="94A3B8"/>
                 </a:solidFill>
@@ -9211,7 +9211,7 @@
               </a:rPr>
               <a:t>110 000 à 360 000</a:t>
             </a:r>
-            <a:endParaRPr lang="en-US" sz="1050" dirty="0"/>
+            <a:endParaRPr lang="en-US" sz="1200" dirty="0"/>
           </a:p>
         </p:txBody>
       </p:sp>
@@ -9262,7 +9262,7 @@
               <a:buNone/>
             </a:pPr>
             <a:r>
-              <a:rPr lang="en-US" sz="1200" b="1" dirty="0">
+              <a:rPr lang="en-US" sz="1350" b="1" dirty="0">
                 <a:solidFill>
                   <a:srgbClr val="0F172A"/>
                 </a:solidFill>
@@ -9272,7 +9272,7 @@
               </a:rPr>
               <a:t>+9,9</a:t>
             </a:r>
-            <a:endParaRPr lang="en-US" sz="1200" dirty="0"/>
+            <a:endParaRPr lang="en-US" sz="1350" dirty="0"/>
           </a:p>
         </p:txBody>
       </p:sp>
@@ -9301,7 +9301,7 @@
               <a:buNone/>
             </a:pPr>
             <a:r>
-              <a:rPr lang="en-US" sz="1300" b="1" dirty="0">
+              <a:rPr lang="en-US" sz="1400" b="1" dirty="0">
                 <a:solidFill>
                   <a:srgbClr val="D97706"/>
                 </a:solidFill>
@@ -9311,7 +9311,7 @@
               </a:rPr>
               <a:t>**</a:t>
             </a:r>
-            <a:endParaRPr lang="en-US" sz="1300" dirty="0"/>
+            <a:endParaRPr lang="en-US" sz="1400" dirty="0"/>
           </a:p>
         </p:txBody>
       </p:sp>
@@ -9340,7 +9340,7 @@
               <a:buNone/>
             </a:pPr>
             <a:r>
-              <a:rPr lang="en-US" sz="1300" b="1" dirty="0">
+              <a:rPr lang="en-US" sz="1400" b="1" dirty="0">
                 <a:solidFill>
                   <a:srgbClr val="0F172A"/>
                 </a:solidFill>
@@ -9350,7 +9350,7 @@
               </a:rPr>
               <a:t>Q3</a:t>
             </a:r>
-            <a:endParaRPr lang="en-US" sz="1300" dirty="0"/>
+            <a:endParaRPr lang="en-US" sz="1400" dirty="0"/>
           </a:p>
         </p:txBody>
       </p:sp>
@@ -9379,7 +9379,7 @@
               <a:buNone/>
             </a:pPr>
             <a:r>
-              <a:rPr lang="en-US" sz="1050" dirty="0">
+              <a:rPr lang="en-US" sz="1200" dirty="0">
                 <a:solidFill>
                   <a:srgbClr val="94A3B8"/>
                 </a:solidFill>
@@ -9389,7 +9389,7 @@
               </a:rPr>
               <a:t>380 000 à 900 000</a:t>
             </a:r>
-            <a:endParaRPr lang="en-US" sz="1050" dirty="0"/>
+            <a:endParaRPr lang="en-US" sz="1200" dirty="0"/>
           </a:p>
         </p:txBody>
       </p:sp>
@@ -9440,7 +9440,7 @@
               <a:buNone/>
             </a:pPr>
             <a:r>
-              <a:rPr lang="en-US" sz="1200" b="1" dirty="0">
+              <a:rPr lang="en-US" sz="1350" b="1" dirty="0">
                 <a:solidFill>
                   <a:srgbClr val="0F172A"/>
                 </a:solidFill>
@@ -9450,7 +9450,7 @@
               </a:rPr>
               <a:t>+2,0</a:t>
             </a:r>
-            <a:endParaRPr lang="en-US" sz="1200" dirty="0"/>
+            <a:endParaRPr lang="en-US" sz="1350" dirty="0"/>
           </a:p>
         </p:txBody>
       </p:sp>
@@ -9479,7 +9479,7 @@
               <a:buNone/>
             </a:pPr>
             <a:r>
-              <a:rPr lang="en-US" sz="1300" b="1" dirty="0">
+              <a:rPr lang="en-US" sz="1400" b="1" dirty="0">
                 <a:solidFill>
                   <a:srgbClr val="0F172A"/>
                 </a:solidFill>
@@ -9489,7 +9489,7 @@
               </a:rPr>
               <a:t>Q4</a:t>
             </a:r>
-            <a:endParaRPr lang="en-US" sz="1300" dirty="0"/>
+            <a:endParaRPr lang="en-US" sz="1400" dirty="0"/>
           </a:p>
         </p:txBody>
       </p:sp>
@@ -9518,7 +9518,7 @@
               <a:buNone/>
             </a:pPr>
             <a:r>
-              <a:rPr lang="en-US" sz="1050" dirty="0">
+              <a:rPr lang="en-US" sz="1200" dirty="0">
                 <a:solidFill>
                   <a:srgbClr val="94A3B8"/>
                 </a:solidFill>
@@ -9528,7 +9528,7 @@
               </a:rPr>
               <a:t>920 000 à 1 800 000</a:t>
             </a:r>
-            <a:endParaRPr lang="en-US" sz="1050" dirty="0"/>
+            <a:endParaRPr lang="en-US" sz="1200" dirty="0"/>
           </a:p>
         </p:txBody>
       </p:sp>
@@ -9579,7 +9579,7 @@
               <a:buNone/>
             </a:pPr>
             <a:r>
-              <a:rPr lang="en-US" sz="1200" b="1" dirty="0">
+              <a:rPr lang="en-US" sz="1350" b="1" dirty="0">
                 <a:solidFill>
                   <a:srgbClr val="0F172A"/>
                 </a:solidFill>
@@ -9589,7 +9589,7 @@
               </a:rPr>
               <a:t>+8,4</a:t>
             </a:r>
-            <a:endParaRPr lang="en-US" sz="1200" dirty="0"/>
+            <a:endParaRPr lang="en-US" sz="1350" dirty="0"/>
           </a:p>
         </p:txBody>
       </p:sp>
@@ -9618,7 +9618,7 @@
               <a:buNone/>
             </a:pPr>
             <a:r>
-              <a:rPr lang="en-US" sz="1300" b="1" dirty="0">
+              <a:rPr lang="en-US" sz="1400" b="1" dirty="0">
                 <a:solidFill>
                   <a:srgbClr val="0F172A"/>
                 </a:solidFill>
@@ -9628,7 +9628,7 @@
               </a:rPr>
               <a:t>Q5</a:t>
             </a:r>
-            <a:endParaRPr lang="en-US" sz="1300" dirty="0"/>
+            <a:endParaRPr lang="en-US" sz="1400" dirty="0"/>
           </a:p>
         </p:txBody>
       </p:sp>
@@ -9657,7 +9657,7 @@
               <a:buNone/>
             </a:pPr>
             <a:r>
-              <a:rPr lang="en-US" sz="1050" dirty="0">
+              <a:rPr lang="en-US" sz="1200" dirty="0">
                 <a:solidFill>
                   <a:srgbClr val="94A3B8"/>
                 </a:solidFill>
@@ -9667,7 +9667,7 @@
               </a:rPr>
               <a:t>au-delà de 1 824 000</a:t>
             </a:r>
-            <a:endParaRPr lang="en-US" sz="1050" dirty="0"/>
+            <a:endParaRPr lang="en-US" sz="1200" dirty="0"/>
           </a:p>
         </p:txBody>
       </p:sp>
@@ -9718,7 +9718,7 @@
               <a:buNone/>
             </a:pPr>
             <a:r>
-              <a:rPr lang="en-US" sz="1200" b="1" dirty="0">
+              <a:rPr lang="en-US" sz="1350" b="1" dirty="0">
                 <a:solidFill>
                   <a:srgbClr val="0F172A"/>
                 </a:solidFill>
@@ -9728,7 +9728,7 @@
               </a:rPr>
               <a:t>−0,8</a:t>
             </a:r>
-            <a:endParaRPr lang="en-US" sz="1200" dirty="0"/>
+            <a:endParaRPr lang="en-US" sz="1350" dirty="0"/>
           </a:p>
         </p:txBody>
       </p:sp>
@@ -9821,8 +9821,8 @@
         </p:nvSpPr>
         <p:spPr>
           <a:xfrm>
-            <a:off x="8092440" y="2578608"/>
-            <a:ext cx="3246120" cy="274320"/>
+            <a:off x="8001000" y="2542032"/>
+            <a:ext cx="3429000" cy="420624"/>
           </a:xfrm>
           <a:prstGeom prst="rect">
             <a:avLst/>
@@ -9838,7 +9838,7 @@
               <a:buNone/>
             </a:pPr>
             <a:r>
-              <a:rPr lang="en-US" sz="1150" b="1" dirty="0">
+              <a:rPr lang="en-US" sz="1300" b="1" dirty="0">
                 <a:solidFill>
                   <a:srgbClr val="D97706"/>
                 </a:solidFill>
@@ -9848,7 +9848,7 @@
               </a:rPr>
               <a:t>pente dose-réponse, significative à 10 %</a:t>
             </a:r>
-            <a:endParaRPr lang="en-US" sz="1150" dirty="0"/>
+            <a:endParaRPr lang="en-US" sz="1300" dirty="0"/>
           </a:p>
         </p:txBody>
       </p:sp>
@@ -9860,8 +9860,8 @@
         </p:nvSpPr>
         <p:spPr>
           <a:xfrm>
-            <a:off x="8092440" y="2926080"/>
-            <a:ext cx="3246120" cy="566928"/>
+            <a:off x="8046720" y="3035808"/>
+            <a:ext cx="3337560" cy="566928"/>
           </a:xfrm>
           <a:prstGeom prst="rect">
             <a:avLst/>
@@ -9880,7 +9880,7 @@
               <a:buNone/>
             </a:pPr>
             <a:r>
-              <a:rPr lang="en-US" sz="1100" dirty="0">
+              <a:rPr lang="en-US" sz="1300" dirty="0">
                 <a:solidFill>
                   <a:srgbClr val="D5DEEC"/>
                 </a:solidFill>
@@ -9890,7 +9890,7 @@
               </a:rPr>
               <a:t>Plus le montant reçu est élevé, plus l'écart de trajectoire tend à se réduire.</a:t>
             </a:r>
-            <a:endParaRPr lang="en-US" sz="1100" dirty="0"/>
+            <a:endParaRPr lang="en-US" sz="1300" dirty="0"/>
           </a:p>
         </p:txBody>
       </p:sp>
@@ -9961,7 +9961,7 @@
               <a:buNone/>
             </a:pPr>
             <a:r>
-              <a:rPr lang="en-US" sz="1100" dirty="0">
+              <a:rPr lang="en-US" sz="1300" dirty="0">
                 <a:solidFill>
                   <a:srgbClr val="475569"/>
                 </a:solidFill>
@@ -9969,9 +9969,9 @@
                 <a:ea typeface="Calibri" pitchFamily="34" charset="-122"/>
                 <a:cs typeface="Calibri" pitchFamily="34" charset="-120"/>
               </a:rPr>
-              <a:t>Le profil n'est pas strictement monotone, le quatrième quintile remontant sans être significatif. Le montant relevant du choix du migrant, le gradient se lit comme une association conditionnelle.</a:t>
-            </a:r>
-            <a:endParaRPr lang="en-US" sz="1100" dirty="0"/>
+              <a:t>Le profil n'est pas strictement monotone. Le montant relevant du migrant, le gradient se lit comme une association conditionnelle.</a:t>
+            </a:r>
+            <a:endParaRPr lang="en-US" sz="1300" dirty="0"/>
           </a:p>
         </p:txBody>
       </p:sp>
@@ -10000,7 +10000,7 @@
               <a:buNone/>
             </a:pPr>
             <a:r>
-              <a:rPr lang="en-US" sz="900" dirty="0">
+              <a:rPr lang="en-US" sz="1000" dirty="0">
                 <a:solidFill>
                   <a:srgbClr val="94A3B8"/>
                 </a:solidFill>
@@ -10010,7 +10010,7 @@
               </a:rPr>
               <a:t>** significatif à 5 %. Source : calcul de l'auteur, EHCVM I (2018-2019) et EHCVM II (2021-2022).</a:t>
             </a:r>
-            <a:endParaRPr lang="en-US" sz="900" dirty="0"/>
+            <a:endParaRPr lang="en-US" sz="1000" dirty="0"/>
           </a:p>
         </p:txBody>
       </p:sp>
@@ -10039,7 +10039,7 @@
               <a:buNone/>
             </a:pPr>
             <a:r>
-              <a:rPr lang="en-US" sz="950" dirty="0">
+              <a:rPr lang="en-US" sz="1000" dirty="0">
                 <a:solidFill>
                   <a:srgbClr val="94A3B8"/>
                 </a:solidFill>
@@ -10049,7 +10049,7 @@
               </a:rPr>
               <a:t>14</a:t>
             </a:r>
-            <a:endParaRPr lang="en-US" sz="950" dirty="0"/>
+            <a:endParaRPr lang="en-US" sz="1000" dirty="0"/>
           </a:p>
         </p:txBody>
       </p:sp>
@@ -10134,7 +10134,7 @@
               <a:buNone/>
             </a:pPr>
             <a:r>
-              <a:rPr lang="en-US" sz="2700" b="1" dirty="0">
+              <a:rPr lang="en-US" sz="3000" b="1" dirty="0">
                 <a:solidFill>
                   <a:srgbClr val="312E81"/>
                 </a:solidFill>
@@ -10144,7 +10144,7 @@
               </a:rPr>
               <a:t>Tests de robustesse</a:t>
             </a:r>
-            <a:endParaRPr lang="en-US" sz="2700" dirty="0"/>
+            <a:endParaRPr lang="en-US" sz="3000" dirty="0"/>
           </a:p>
         </p:txBody>
       </p:sp>
@@ -10212,8 +10212,8 @@
         </p:nvSpPr>
         <p:spPr>
           <a:xfrm>
-            <a:off x="1865376" y="1755648"/>
-            <a:ext cx="2724912" cy="384048"/>
+            <a:off x="1865376" y="1737360"/>
+            <a:ext cx="2514600" cy="420624"/>
           </a:xfrm>
           <a:prstGeom prst="rect">
             <a:avLst/>
@@ -10251,8 +10251,8 @@
         </p:nvSpPr>
         <p:spPr>
           <a:xfrm>
-            <a:off x="4681728" y="1773936"/>
-            <a:ext cx="1051560" cy="329184"/>
+            <a:off x="4480560" y="1737360"/>
+            <a:ext cx="1234440" cy="420624"/>
           </a:xfrm>
           <a:prstGeom prst="rect">
             <a:avLst/>
@@ -10268,7 +10268,7 @@
               <a:buNone/>
             </a:pPr>
             <a:r>
-              <a:rPr lang="en-US" sz="1100" b="1" dirty="0">
+              <a:rPr lang="en-US" sz="1300" b="1" dirty="0">
                 <a:solidFill>
                   <a:srgbClr val="4F46E5"/>
                 </a:solidFill>
@@ -10278,7 +10278,7 @@
               </a:rPr>
               <a:t>Le résultat tient</a:t>
             </a:r>
-            <a:endParaRPr lang="en-US" sz="1100" dirty="0"/>
+            <a:endParaRPr lang="en-US" sz="1300" dirty="0"/>
           </a:p>
         </p:txBody>
       </p:sp>
@@ -10310,7 +10310,7 @@
               <a:buNone/>
             </a:pPr>
             <a:r>
-              <a:rPr lang="en-US" sz="1200" dirty="0">
+              <a:rPr lang="en-US" sz="1350" dirty="0">
                 <a:solidFill>
                   <a:srgbClr val="475569"/>
                 </a:solidFill>
@@ -10320,7 +10320,7 @@
               </a:rPr>
               <a:t>Trois algorithmes, effet de 0,050 à 0,064, tous significatifs au moins à 10 %.</a:t>
             </a:r>
-            <a:endParaRPr lang="en-US" sz="1200" dirty="0"/>
+            <a:endParaRPr lang="en-US" sz="1350" dirty="0"/>
           </a:p>
         </p:txBody>
       </p:sp>
@@ -10388,8 +10388,8 @@
         </p:nvSpPr>
         <p:spPr>
           <a:xfrm>
-            <a:off x="7470648" y="1755648"/>
-            <a:ext cx="2724912" cy="384048"/>
+            <a:off x="7470648" y="1737360"/>
+            <a:ext cx="2514600" cy="420624"/>
           </a:xfrm>
           <a:prstGeom prst="rect">
             <a:avLst/>
@@ -10427,8 +10427,8 @@
         </p:nvSpPr>
         <p:spPr>
           <a:xfrm>
-            <a:off x="10287000" y="1773936"/>
-            <a:ext cx="1051560" cy="329184"/>
+            <a:off x="10085832" y="1737360"/>
+            <a:ext cx="1234440" cy="420624"/>
           </a:xfrm>
           <a:prstGeom prst="rect">
             <a:avLst/>
@@ -10444,7 +10444,7 @@
               <a:buNone/>
             </a:pPr>
             <a:r>
-              <a:rPr lang="en-US" sz="1100" b="1" dirty="0">
+              <a:rPr lang="en-US" sz="1300" b="1" dirty="0">
                 <a:solidFill>
                   <a:srgbClr val="DB2777"/>
                 </a:solidFill>
@@ -10454,7 +10454,7 @@
               </a:rPr>
               <a:t>Le signe tient</a:t>
             </a:r>
-            <a:endParaRPr lang="en-US" sz="1100" dirty="0"/>
+            <a:endParaRPr lang="en-US" sz="1300" dirty="0"/>
           </a:p>
         </p:txBody>
       </p:sp>
@@ -10486,7 +10486,7 @@
               <a:buNone/>
             </a:pPr>
             <a:r>
-              <a:rPr lang="en-US" sz="1200" dirty="0">
+              <a:rPr lang="en-US" sz="1350" dirty="0">
                 <a:solidFill>
                   <a:srgbClr val="475569"/>
                 </a:solidFill>
@@ -10496,7 +10496,7 @@
               </a:rPr>
               <a:t>Testé de 1 à 7 dimensions, l'ampleur suit une courbe en cloche, maximale au seuil retenu.</a:t>
             </a:r>
-            <a:endParaRPr lang="en-US" sz="1200" dirty="0"/>
+            <a:endParaRPr lang="en-US" sz="1350" dirty="0"/>
           </a:p>
         </p:txBody>
       </p:sp>
@@ -10564,8 +10564,8 @@
         </p:nvSpPr>
         <p:spPr>
           <a:xfrm>
-            <a:off x="1865376" y="3995928"/>
-            <a:ext cx="2724912" cy="384048"/>
+            <a:off x="1865376" y="3977640"/>
+            <a:ext cx="2514600" cy="420624"/>
           </a:xfrm>
           <a:prstGeom prst="rect">
             <a:avLst/>
@@ -10603,8 +10603,8 @@
         </p:nvSpPr>
         <p:spPr>
           <a:xfrm>
-            <a:off x="4681728" y="4014216"/>
-            <a:ext cx="1051560" cy="329184"/>
+            <a:off x="4480560" y="3977640"/>
+            <a:ext cx="1234440" cy="420624"/>
           </a:xfrm>
           <a:prstGeom prst="rect">
             <a:avLst/>
@@ -10620,7 +10620,7 @@
               <a:buNone/>
             </a:pPr>
             <a:r>
-              <a:rPr lang="en-US" sz="1100" b="1" dirty="0">
+              <a:rPr lang="en-US" sz="1300" b="1" dirty="0">
                 <a:solidFill>
                   <a:srgbClr val="0891B2"/>
                 </a:solidFill>
@@ -10630,7 +10630,7 @@
               </a:rPr>
               <a:t>Le résultat tient</a:t>
             </a:r>
-            <a:endParaRPr lang="en-US" sz="1100" dirty="0"/>
+            <a:endParaRPr lang="en-US" sz="1300" dirty="0"/>
           </a:p>
         </p:txBody>
       </p:sp>
@@ -10662,7 +10662,7 @@
               <a:buNone/>
             </a:pPr>
             <a:r>
-              <a:rPr lang="en-US" sz="1200" dirty="0">
+              <a:rPr lang="en-US" sz="1350" dirty="0">
                 <a:solidFill>
                   <a:srgbClr val="475569"/>
                 </a:solidFill>
@@ -10672,7 +10672,7 @@
               </a:rPr>
               <a:t>Une implémentation indépendante du même estimateur retrouve le résultat.</a:t>
             </a:r>
-            <a:endParaRPr lang="en-US" sz="1200" dirty="0"/>
+            <a:endParaRPr lang="en-US" sz="1350" dirty="0"/>
           </a:p>
         </p:txBody>
       </p:sp>
@@ -10740,8 +10740,8 @@
         </p:nvSpPr>
         <p:spPr>
           <a:xfrm>
-            <a:off x="7470648" y="3995928"/>
-            <a:ext cx="2724912" cy="384048"/>
+            <a:off x="7470648" y="3977640"/>
+            <a:ext cx="2514600" cy="420624"/>
           </a:xfrm>
           <a:prstGeom prst="rect">
             <a:avLst/>
@@ -10779,8 +10779,8 @@
         </p:nvSpPr>
         <p:spPr>
           <a:xfrm>
-            <a:off x="10287000" y="4014216"/>
-            <a:ext cx="1051560" cy="329184"/>
+            <a:off x="10085832" y="3977640"/>
+            <a:ext cx="1234440" cy="420624"/>
           </a:xfrm>
           <a:prstGeom prst="rect">
             <a:avLst/>
@@ -10796,7 +10796,7 @@
               <a:buNone/>
             </a:pPr>
             <a:r>
-              <a:rPr lang="en-US" sz="1100" b="1" dirty="0">
+              <a:rPr lang="en-US" sz="1300" b="1" dirty="0">
                 <a:solidFill>
                   <a:srgbClr val="D97706"/>
                 </a:solidFill>
@@ -10806,7 +10806,7 @@
               </a:rPr>
               <a:t>À nuancer</a:t>
             </a:r>
-            <a:endParaRPr lang="en-US" sz="1100" dirty="0"/>
+            <a:endParaRPr lang="en-US" sz="1300" dirty="0"/>
           </a:p>
         </p:txBody>
       </p:sp>
@@ -10838,7 +10838,7 @@
               <a:buNone/>
             </a:pPr>
             <a:r>
-              <a:rPr lang="en-US" sz="1200" dirty="0">
+              <a:rPr lang="en-US" sz="1350" dirty="0">
                 <a:solidFill>
                   <a:srgbClr val="475569"/>
                 </a:solidFill>
@@ -10848,7 +10848,7 @@
               </a:rPr>
               <a:t>Chez les bénéficiaires de longue date, l'écart ne se retrouve pas (0,022 et −0,008, non significatifs).</a:t>
             </a:r>
-            <a:endParaRPr lang="en-US" sz="1200" dirty="0"/>
+            <a:endParaRPr lang="en-US" sz="1350" dirty="0"/>
           </a:p>
         </p:txBody>
       </p:sp>
@@ -10899,7 +10899,7 @@
               <a:buNone/>
             </a:pPr>
             <a:r>
-              <a:rPr lang="en-US" sz="900" dirty="0">
+              <a:rPr lang="en-US" sz="1000" dirty="0">
                 <a:solidFill>
                   <a:srgbClr val="94A3B8"/>
                 </a:solidFill>
@@ -10909,7 +10909,7 @@
               </a:rPr>
               <a:t>Source : calcul de l'auteur, EHCVM I (2018-2019) et EHCVM II (2021-2022).</a:t>
             </a:r>
-            <a:endParaRPr lang="en-US" sz="900" dirty="0"/>
+            <a:endParaRPr lang="en-US" sz="1000" dirty="0"/>
           </a:p>
         </p:txBody>
       </p:sp>
@@ -10938,7 +10938,7 @@
               <a:buNone/>
             </a:pPr>
             <a:r>
-              <a:rPr lang="en-US" sz="950" dirty="0">
+              <a:rPr lang="en-US" sz="1000" dirty="0">
                 <a:solidFill>
                   <a:srgbClr val="94A3B8"/>
                 </a:solidFill>
@@ -10948,7 +10948,7 @@
               </a:rPr>
               <a:t>15</a:t>
             </a:r>
-            <a:endParaRPr lang="en-US" sz="950" dirty="0"/>
+            <a:endParaRPr lang="en-US" sz="1000" dirty="0"/>
           </a:p>
         </p:txBody>
       </p:sp>
@@ -11033,7 +11033,7 @@
               <a:buNone/>
             </a:pPr>
             <a:r>
-              <a:rPr lang="en-US" sz="2700" b="1" dirty="0">
+              <a:rPr lang="en-US" sz="3000" b="1" dirty="0">
                 <a:solidFill>
                   <a:srgbClr val="312E81"/>
                 </a:solidFill>
@@ -11043,7 +11043,7 @@
               </a:rPr>
               <a:t>Validation des hypothèses</a:t>
             </a:r>
-            <a:endParaRPr lang="en-US" sz="2700" dirty="0"/>
+            <a:endParaRPr lang="en-US" sz="3000" dirty="0"/>
           </a:p>
         </p:txBody>
       </p:sp>
@@ -11114,7 +11114,7 @@
               <a:buNone/>
             </a:pPr>
             <a:r>
-              <a:rPr lang="en-US" sz="1200" i="1" dirty="0">
+              <a:rPr lang="en-US" sz="1350" i="1" dirty="0">
                 <a:solidFill>
                   <a:srgbClr val="475569"/>
                 </a:solidFill>
@@ -11124,7 +11124,7 @@
               </a:rPr>
               <a:t>Les transferts réduisent significativement la pauvreté multidimensionnelle des enfants.</a:t>
             </a:r>
-            <a:endParaRPr lang="en-US" sz="1200" dirty="0"/>
+            <a:endParaRPr lang="en-US" sz="1350" dirty="0"/>
           </a:p>
         </p:txBody>
       </p:sp>
@@ -11156,7 +11156,7 @@
               <a:buNone/>
             </a:pPr>
             <a:r>
-              <a:rPr lang="en-US" sz="1250" dirty="0">
+              <a:rPr lang="en-US" sz="1400" dirty="0">
                 <a:solidFill>
                   <a:srgbClr val="0F172A"/>
                 </a:solidFill>
@@ -11166,7 +11166,7 @@
               </a:rPr>
               <a:t>L'effet estimé vaut +0,064, significatif à 5 %, et de signe défavorable : aucune réduction n'est observée sur l'horizon.</a:t>
             </a:r>
-            <a:endParaRPr lang="en-US" sz="1250" dirty="0"/>
+            <a:endParaRPr lang="en-US" sz="1400" dirty="0"/>
           </a:p>
         </p:txBody>
       </p:sp>
@@ -11276,7 +11276,7 @@
               <a:buNone/>
             </a:pPr>
             <a:r>
-              <a:rPr lang="en-US" sz="1200" i="1" dirty="0">
+              <a:rPr lang="en-US" sz="1350" i="1" dirty="0">
                 <a:solidFill>
                   <a:srgbClr val="475569"/>
                 </a:solidFill>
@@ -11286,7 +11286,7 @@
               </a:rPr>
               <a:t>L'impact est hétérogène selon les dimensions, le milieu, le genre du chef, l'âge et le montant.</a:t>
             </a:r>
-            <a:endParaRPr lang="en-US" sz="1200" dirty="0"/>
+            <a:endParaRPr lang="en-US" sz="1350" dirty="0"/>
           </a:p>
         </p:txBody>
       </p:sp>
@@ -11318,7 +11318,7 @@
               <a:buNone/>
             </a:pPr>
             <a:r>
-              <a:rPr lang="en-US" sz="1250" dirty="0">
+              <a:rPr lang="en-US" sz="1400" dirty="0">
                 <a:solidFill>
                   <a:srgbClr val="0F172A"/>
                 </a:solidFill>
@@ -11328,7 +11328,7 @@
               </a:rPr>
               <a:t>L'effet n'est établi que sur la nutrition et chez les 0 à 4 ans, avec un gradient net selon le montant. Aucun test d'égalité ne conclut par milieu, genre du chef ou âge.</a:t>
             </a:r>
-            <a:endParaRPr lang="en-US" sz="1250" dirty="0"/>
+            <a:endParaRPr lang="en-US" sz="1400" dirty="0"/>
           </a:p>
         </p:txBody>
       </p:sp>
@@ -11508,7 +11508,7 @@
               <a:buNone/>
             </a:pPr>
             <a:r>
-              <a:rPr lang="en-US" sz="950" dirty="0">
+              <a:rPr lang="en-US" sz="1000" dirty="0">
                 <a:solidFill>
                   <a:srgbClr val="94A3B8"/>
                 </a:solidFill>
@@ -11518,7 +11518,7 @@
               </a:rPr>
               <a:t>16</a:t>
             </a:r>
-            <a:endParaRPr lang="en-US" sz="950" dirty="0"/>
+            <a:endParaRPr lang="en-US" sz="1000" dirty="0"/>
           </a:p>
         </p:txBody>
       </p:sp>
@@ -11603,7 +11603,7 @@
               <a:buNone/>
             </a:pPr>
             <a:r>
-              <a:rPr lang="en-US" sz="2700" b="1" dirty="0">
+              <a:rPr lang="en-US" sz="3000" b="1" dirty="0">
                 <a:solidFill>
                   <a:srgbClr val="312E81"/>
                 </a:solidFill>
@@ -11613,7 +11613,7 @@
               </a:rPr>
               <a:t>Comment comprendre ce résultat</a:t>
             </a:r>
-            <a:endParaRPr lang="en-US" sz="2700" dirty="0"/>
+            <a:endParaRPr lang="en-US" sz="3000" dirty="0"/>
           </a:p>
         </p:txBody>
       </p:sp>
@@ -11645,7 +11645,7 @@
               <a:buNone/>
             </a:pPr>
             <a:r>
-              <a:rPr lang="en-US" sz="1300" dirty="0">
+              <a:rPr lang="en-US" sz="1400" dirty="0">
                 <a:solidFill>
                   <a:srgbClr val="475569"/>
                 </a:solidFill>
@@ -11653,9 +11653,9 @@
                 <a:ea typeface="Calibri" pitchFamily="34" charset="-122"/>
                 <a:cs typeface="Calibri" pitchFamily="34" charset="-120"/>
               </a:rPr>
-              <a:t>Le résultat ne dit pas que les transferts appauvrissent les enfants : il dit que les conditions de vie s'améliorent plus lentement chez les bénéficiaires.</a:t>
-            </a:r>
-            <a:endParaRPr lang="en-US" sz="1300" dirty="0"/>
+              <a:t>Les conditions de vie ne reculent pas : elles progressent plus lentement chez les bénéficiaires.</a:t>
+            </a:r>
+            <a:endParaRPr lang="en-US" sz="1400" dirty="0"/>
           </a:p>
         </p:txBody>
       </p:sp>
@@ -11785,7 +11785,7 @@
               <a:buNone/>
             </a:pPr>
             <a:r>
-              <a:rPr lang="en-US" sz="1150" dirty="0">
+              <a:rPr lang="en-US" sz="1300" dirty="0">
                 <a:solidFill>
                   <a:srgbClr val="475569"/>
                 </a:solidFill>
@@ -11793,9 +11793,9 @@
                 <a:ea typeface="Calibri" pitchFamily="34" charset="-122"/>
                 <a:cs typeface="Calibri" pitchFamily="34" charset="-120"/>
               </a:rPr>
-              <a:t>68,5 % des transferts relèvent du soutien courant, moins d'un dixième va explicitement à la santé ou à la scolarité. Un flux qui finance l'ordinaire déplace peu les seuils de privation.</a:t>
-            </a:r>
-            <a:endParaRPr lang="en-US" sz="1150" dirty="0"/>
+              <a:t>68,5 % en soutien courant, moins d'un dixième en santé ou scolarité. Financer l'ordinaire déplace peu les seuils.</a:t>
+            </a:r>
+            <a:endParaRPr lang="en-US" sz="1300" dirty="0"/>
           </a:p>
         </p:txBody>
       </p:sp>
@@ -11925,7 +11925,7 @@
               <a:buNone/>
             </a:pPr>
             <a:r>
-              <a:rPr lang="en-US" sz="1150" dirty="0">
+              <a:rPr lang="en-US" sz="1300" dirty="0">
                 <a:solidFill>
                   <a:srgbClr val="475569"/>
                 </a:solidFill>
@@ -11933,9 +11933,9 @@
                 <a:ea typeface="Calibri" pitchFamily="34" charset="-122"/>
                 <a:cs typeface="Calibri" pitchFamily="34" charset="-120"/>
               </a:rPr>
-              <a:t>L'eau, l'assainissement et l'accès aux soins supposent des investissements collectifs. Le pouvoir d'achat supplémentaire ne les crée pas : la privation en santé touche 97 % des enfants aux deux vagues.</a:t>
-            </a:r>
-            <a:endParaRPr lang="en-US" sz="1150" dirty="0"/>
+              <a:t>Eau, assainissement et soins supposent des investissements collectifs. La privation en santé touche 97 % des enfants.</a:t>
+            </a:r>
+            <a:endParaRPr lang="en-US" sz="1300" dirty="0"/>
           </a:p>
         </p:txBody>
       </p:sp>
@@ -12065,7 +12065,7 @@
               <a:buNone/>
             </a:pPr>
             <a:r>
-              <a:rPr lang="en-US" sz="1150" dirty="0">
+              <a:rPr lang="en-US" sz="1300" dirty="0">
                 <a:solidFill>
                   <a:srgbClr val="475569"/>
                 </a:solidFill>
@@ -12073,9 +12073,9 @@
                 <a:ea typeface="Calibri" pitchFamily="34" charset="-122"/>
                 <a:cs typeface="Calibri" pitchFamily="34" charset="-120"/>
               </a:rPr>
-              <a:t>La sensibilité au seuil montre que l'écart se joue au milieu de la distribution des privations. Le noyau des enfants les plus démunis relève de déficits qu'aucun flux privé ne déplace en trois ans.</a:t>
-            </a:r>
-            <a:endParaRPr lang="en-US" sz="1150" dirty="0"/>
+              <a:t>L'écart se joue au milieu de la distribution. Les plus démunis relèvent de déficits qu'aucun flux privé ne comble.</a:t>
+            </a:r>
+            <a:endParaRPr lang="en-US" sz="1300" dirty="0"/>
           </a:p>
         </p:txBody>
       </p:sp>
@@ -12104,7 +12104,7 @@
               <a:buNone/>
             </a:pPr>
             <a:r>
-              <a:rPr lang="en-US" sz="950" dirty="0">
+              <a:rPr lang="en-US" sz="1000" dirty="0">
                 <a:solidFill>
                   <a:srgbClr val="94A3B8"/>
                 </a:solidFill>
@@ -12114,7 +12114,7 @@
               </a:rPr>
               <a:t>17</a:t>
             </a:r>
-            <a:endParaRPr lang="en-US" sz="950" dirty="0"/>
+            <a:endParaRPr lang="en-US" sz="1000" dirty="0"/>
           </a:p>
         </p:txBody>
       </p:sp>
@@ -12199,7 +12199,7 @@
               <a:buNone/>
             </a:pPr>
             <a:r>
-              <a:rPr lang="en-US" sz="2700" b="1" dirty="0">
+              <a:rPr lang="en-US" sz="3000" b="1" dirty="0">
                 <a:solidFill>
                   <a:srgbClr val="312E81"/>
                 </a:solidFill>
@@ -12209,7 +12209,7 @@
               </a:rPr>
               <a:t>Limites et perspectives</a:t>
             </a:r>
-            <a:endParaRPr lang="en-US" sz="2700" dirty="0"/>
+            <a:endParaRPr lang="en-US" sz="3000" dirty="0"/>
           </a:p>
         </p:txBody>
       </p:sp>
@@ -12375,7 +12375,7 @@
               <a:buNone/>
             </a:pPr>
             <a:r>
-              <a:rPr lang="en-US" sz="1200" dirty="0">
+              <a:rPr lang="en-US" sz="1350" dirty="0">
                 <a:solidFill>
                   <a:srgbClr val="475569"/>
                 </a:solidFill>
@@ -12383,9 +12383,9 @@
                 <a:ea typeface="Calibri" pitchFamily="34" charset="-122"/>
                 <a:cs typeface="Calibri" pitchFamily="34" charset="-120"/>
               </a:rPr>
-              <a:t>L'hypothèse n'est pas testable directement, deux vagues seulement étant disponibles. L'appariement sur les niveaux initiaux la rend plus crédible.</a:t>
-            </a:r>
-            <a:endParaRPr lang="en-US" sz="1200" dirty="0"/>
+              <a:t>Deux vagues seulement, donc pas de test direct. L'appariement sur les niveaux initiaux la rend crédible.</a:t>
+            </a:r>
+            <a:endParaRPr lang="en-US" sz="1350" dirty="0"/>
           </a:p>
         </p:txBody>
       </p:sp>
@@ -12456,7 +12456,7 @@
               <a:buNone/>
             </a:pPr>
             <a:r>
-              <a:rPr lang="en-US" sz="1200" dirty="0">
+              <a:rPr lang="en-US" sz="1350" dirty="0">
                 <a:solidFill>
                   <a:srgbClr val="475569"/>
                 </a:solidFill>
@@ -12464,9 +12464,9 @@
                 <a:ea typeface="Calibri" pitchFamily="34" charset="-122"/>
                 <a:cs typeface="Calibri" pitchFamily="34" charset="-120"/>
               </a:rPr>
-              <a:t>Chaque enfant est évalué sur la grille de son âge courant à chaque vague. Les groupes d'âge figés à la période de base neutralisent l'essentiel de cet effet.</a:t>
-            </a:r>
-            <a:endParaRPr lang="en-US" sz="1200" dirty="0"/>
+              <a:t>Chaque enfant est évalué sur la grille de son âge. Les groupes figés en 2018 neutralisent l'essentiel.</a:t>
+            </a:r>
+            <a:endParaRPr lang="en-US" sz="1350" dirty="0"/>
           </a:p>
         </p:txBody>
       </p:sp>
@@ -12610,7 +12610,7 @@
               <a:buNone/>
             </a:pPr>
             <a:r>
-              <a:rPr lang="en-US" sz="1200" b="1" dirty="0">
+              <a:rPr lang="en-US" sz="1350" b="1" dirty="0">
                 <a:solidFill>
                   <a:srgbClr val="FFFFFF"/>
                 </a:solidFill>
@@ -12620,7 +12620,7 @@
               </a:rPr>
               <a:t>1</a:t>
             </a:r>
-            <a:endParaRPr lang="en-US" sz="1200" dirty="0"/>
+            <a:endParaRPr lang="en-US" sz="1350" dirty="0"/>
           </a:p>
         </p:txBody>
       </p:sp>
@@ -12652,7 +12652,7 @@
               <a:buNone/>
             </a:pPr>
             <a:r>
-              <a:rPr lang="en-US" sz="1200" dirty="0">
+              <a:rPr lang="en-US" sz="1350" dirty="0">
                 <a:solidFill>
                   <a:srgbClr val="475569"/>
                 </a:solidFill>
@@ -12662,7 +12662,7 @@
               </a:rPr>
               <a:t>Analyser les mécanismes de transmission, dépenses en éducation, en santé et en logement.</a:t>
             </a:r>
-            <a:endParaRPr lang="en-US" sz="1200" dirty="0"/>
+            <a:endParaRPr lang="en-US" sz="1350" dirty="0"/>
           </a:p>
         </p:txBody>
       </p:sp>
@@ -12711,7 +12711,7 @@
               <a:buNone/>
             </a:pPr>
             <a:r>
-              <a:rPr lang="en-US" sz="1200" b="1" dirty="0">
+              <a:rPr lang="en-US" sz="1350" b="1" dirty="0">
                 <a:solidFill>
                   <a:srgbClr val="FFFFFF"/>
                 </a:solidFill>
@@ -12721,7 +12721,7 @@
               </a:rPr>
               <a:t>2</a:t>
             </a:r>
-            <a:endParaRPr lang="en-US" sz="1200" dirty="0"/>
+            <a:endParaRPr lang="en-US" sz="1350" dirty="0"/>
           </a:p>
         </p:txBody>
       </p:sp>
@@ -12753,7 +12753,7 @@
               <a:buNone/>
             </a:pPr>
             <a:r>
-              <a:rPr lang="en-US" sz="1200" dirty="0">
+              <a:rPr lang="en-US" sz="1350" dirty="0">
                 <a:solidFill>
                   <a:srgbClr val="475569"/>
                 </a:solidFill>
@@ -12763,7 +12763,7 @@
               </a:rPr>
               <a:t>Intégrer la durée d'exposition aux transferts et leurs usages effectifs.</a:t>
             </a:r>
-            <a:endParaRPr lang="en-US" sz="1200" dirty="0"/>
+            <a:endParaRPr lang="en-US" sz="1350" dirty="0"/>
           </a:p>
         </p:txBody>
       </p:sp>
@@ -12812,7 +12812,7 @@
               <a:buNone/>
             </a:pPr>
             <a:r>
-              <a:rPr lang="en-US" sz="1200" b="1" dirty="0">
+              <a:rPr lang="en-US" sz="1350" b="1" dirty="0">
                 <a:solidFill>
                   <a:srgbClr val="FFFFFF"/>
                 </a:solidFill>
@@ -12822,7 +12822,7 @@
               </a:rPr>
               <a:t>3</a:t>
             </a:r>
-            <a:endParaRPr lang="en-US" sz="1200" dirty="0"/>
+            <a:endParaRPr lang="en-US" sz="1350" dirty="0"/>
           </a:p>
         </p:txBody>
       </p:sp>
@@ -12854,7 +12854,7 @@
               <a:buNone/>
             </a:pPr>
             <a:r>
-              <a:rPr lang="en-US" sz="1200" dirty="0">
+              <a:rPr lang="en-US" sz="1350" dirty="0">
                 <a:solidFill>
                   <a:srgbClr val="475569"/>
                 </a:solidFill>
@@ -12864,7 +12864,7 @@
               </a:rPr>
               <a:t>Étendre l'analyse aux autres pays de l'UEMOA couverts par l'EHCVM.</a:t>
             </a:r>
-            <a:endParaRPr lang="en-US" sz="1200" dirty="0"/>
+            <a:endParaRPr lang="en-US" sz="1350" dirty="0"/>
           </a:p>
         </p:txBody>
       </p:sp>
@@ -12893,7 +12893,7 @@
               <a:buNone/>
             </a:pPr>
             <a:r>
-              <a:rPr lang="en-US" sz="950" dirty="0">
+              <a:rPr lang="en-US" sz="1000" dirty="0">
                 <a:solidFill>
                   <a:srgbClr val="94A3B8"/>
                 </a:solidFill>
@@ -12903,7 +12903,7 @@
               </a:rPr>
               <a:t>18</a:t>
             </a:r>
-            <a:endParaRPr lang="en-US" sz="950" dirty="0"/>
+            <a:endParaRPr lang="en-US" sz="1000" dirty="0"/>
           </a:p>
         </p:txBody>
       </p:sp>
@@ -12988,7 +12988,7 @@
               <a:buNone/>
             </a:pPr>
             <a:r>
-              <a:rPr lang="en-US" sz="2700" b="1" dirty="0">
+              <a:rPr lang="en-US" sz="3000" b="1" dirty="0">
                 <a:solidFill>
                   <a:srgbClr val="312E81"/>
                 </a:solidFill>
@@ -12998,7 +12998,7 @@
               </a:rPr>
               <a:t>Ce que l'étude établit</a:t>
             </a:r>
-            <a:endParaRPr lang="en-US" sz="2700" dirty="0"/>
+            <a:endParaRPr lang="en-US" sz="3000" dirty="0"/>
           </a:p>
         </p:txBody>
       </p:sp>
@@ -13130,7 +13130,7 @@
               <a:buNone/>
             </a:pPr>
             <a:r>
-              <a:rPr lang="en-US" sz="1200" b="1" dirty="0">
+              <a:rPr lang="en-US" sz="1350" b="1" dirty="0">
                 <a:solidFill>
                   <a:srgbClr val="0F172A"/>
                 </a:solidFill>
@@ -13140,7 +13140,7 @@
               </a:rPr>
               <a:t>points</a:t>
             </a:r>
-            <a:endParaRPr lang="en-US" sz="1200" dirty="0"/>
+            <a:endParaRPr lang="en-US" sz="1350" dirty="0"/>
           </a:p>
         </p:txBody>
       </p:sp>
@@ -13172,7 +13172,7 @@
               <a:buNone/>
             </a:pPr>
             <a:r>
-              <a:rPr lang="en-US" sz="1150" dirty="0">
+              <a:rPr lang="en-US" sz="1300" dirty="0">
                 <a:solidFill>
                   <a:srgbClr val="475569"/>
                 </a:solidFill>
@@ -13182,7 +13182,7 @@
               </a:rPr>
               <a:t>d'écart de trajectoire, significatif à 5 % et stable aux trois appariements.</a:t>
             </a:r>
-            <a:endParaRPr lang="en-US" sz="1150" dirty="0"/>
+            <a:endParaRPr lang="en-US" sz="1300" dirty="0"/>
           </a:p>
         </p:txBody>
       </p:sp>
@@ -13250,7 +13250,7 @@
               <a:buNone/>
             </a:pPr>
             <a:r>
-              <a:rPr lang="en-US" sz="1200" b="1" dirty="0">
+              <a:rPr lang="en-US" sz="1350" b="1" dirty="0">
                 <a:solidFill>
                   <a:srgbClr val="0F172A"/>
                 </a:solidFill>
@@ -13260,7 +13260,7 @@
               </a:rPr>
               <a:t>dimension</a:t>
             </a:r>
-            <a:endParaRPr lang="en-US" sz="1200" dirty="0"/>
+            <a:endParaRPr lang="en-US" sz="1350" dirty="0"/>
           </a:p>
         </p:txBody>
       </p:sp>
@@ -13292,7 +13292,7 @@
               <a:buNone/>
             </a:pPr>
             <a:r>
-              <a:rPr lang="en-US" sz="1150" dirty="0">
+              <a:rPr lang="en-US" sz="1300" dirty="0">
                 <a:solidFill>
                   <a:srgbClr val="475569"/>
                 </a:solidFill>
@@ -13302,7 +13302,7 @@
               </a:rPr>
               <a:t>sur sept ressort, la nutrition, et un seul groupe d'âge, les 0 à 4 ans.</a:t>
             </a:r>
-            <a:endParaRPr lang="en-US" sz="1150" dirty="0"/>
+            <a:endParaRPr lang="en-US" sz="1300" dirty="0"/>
           </a:p>
         </p:txBody>
       </p:sp>
@@ -13370,7 +13370,7 @@
               <a:buNone/>
             </a:pPr>
             <a:r>
-              <a:rPr lang="en-US" sz="1200" b="1" dirty="0">
+              <a:rPr lang="en-US" sz="1350" b="1" dirty="0">
                 <a:solidFill>
                   <a:srgbClr val="0F172A"/>
                 </a:solidFill>
@@ -13380,7 +13380,7 @@
               </a:rPr>
               <a:t>seulement</a:t>
             </a:r>
-            <a:endParaRPr lang="en-US" sz="1200" dirty="0"/>
+            <a:endParaRPr lang="en-US" sz="1350" dirty="0"/>
           </a:p>
         </p:txBody>
       </p:sp>
@@ -13412,7 +13412,7 @@
               <a:buNone/>
             </a:pPr>
             <a:r>
-              <a:rPr lang="en-US" sz="1150" dirty="0">
+              <a:rPr lang="en-US" sz="1300" dirty="0">
                 <a:solidFill>
                   <a:srgbClr val="475569"/>
                 </a:solidFill>
@@ -13422,7 +13422,7 @@
               </a:rPr>
               <a:t>les deux premiers quintiles de montant portent l'écart observé.</a:t>
             </a:r>
-            <a:endParaRPr lang="en-US" sz="1150" dirty="0"/>
+            <a:endParaRPr lang="en-US" sz="1300" dirty="0"/>
           </a:p>
         </p:txBody>
       </p:sp>
@@ -13490,7 +13490,7 @@
               <a:buNone/>
             </a:pPr>
             <a:r>
-              <a:rPr lang="en-US" sz="1200" b="1" dirty="0">
+              <a:rPr lang="en-US" sz="1350" b="1" dirty="0">
                 <a:solidFill>
                   <a:srgbClr val="0F172A"/>
                 </a:solidFill>
@@ -13500,7 +13500,7 @@
               </a:rPr>
               <a:t>test concluant</a:t>
             </a:r>
-            <a:endParaRPr lang="en-US" sz="1200" dirty="0"/>
+            <a:endParaRPr lang="en-US" sz="1350" dirty="0"/>
           </a:p>
         </p:txBody>
       </p:sp>
@@ -13532,7 +13532,7 @@
               <a:buNone/>
             </a:pPr>
             <a:r>
-              <a:rPr lang="en-US" sz="1150" dirty="0">
+              <a:rPr lang="en-US" sz="1300" dirty="0">
                 <a:solidFill>
                   <a:srgbClr val="475569"/>
                 </a:solidFill>
@@ -13542,7 +13542,7 @@
               </a:rPr>
               <a:t>par milieu, genre du chef de ménage ou tranche d'âge.</a:t>
             </a:r>
-            <a:endParaRPr lang="en-US" sz="1150" dirty="0"/>
+            <a:endParaRPr lang="en-US" sz="1300" dirty="0"/>
           </a:p>
         </p:txBody>
       </p:sp>
@@ -13571,7 +13571,7 @@
               <a:buNone/>
             </a:pPr>
             <a:r>
-              <a:rPr lang="en-US" sz="950" dirty="0">
+              <a:rPr lang="en-US" sz="1000" dirty="0">
                 <a:solidFill>
                   <a:srgbClr val="94A3B8"/>
                 </a:solidFill>
@@ -13581,7 +13581,7 @@
               </a:rPr>
               <a:t>19</a:t>
             </a:r>
-            <a:endParaRPr lang="en-US" sz="950" dirty="0"/>
+            <a:endParaRPr lang="en-US" sz="1000" dirty="0"/>
           </a:p>
         </p:txBody>
       </p:sp>
@@ -13666,7 +13666,7 @@
               <a:buNone/>
             </a:pPr>
             <a:r>
-              <a:rPr lang="en-US" sz="2700" b="1" dirty="0">
+              <a:rPr lang="en-US" sz="3000" b="1" dirty="0">
                 <a:solidFill>
                   <a:srgbClr val="312E81"/>
                 </a:solidFill>
@@ -13676,7 +13676,7 @@
               </a:rPr>
               <a:t>Plan de la présentation</a:t>
             </a:r>
-            <a:endParaRPr lang="en-US" sz="2700" dirty="0"/>
+            <a:endParaRPr lang="en-US" sz="3000" dirty="0"/>
           </a:p>
         </p:txBody>
       </p:sp>
@@ -13839,7 +13839,7 @@
               <a:buNone/>
             </a:pPr>
             <a:r>
-              <a:rPr lang="en-US" sz="1100" dirty="0">
+              <a:rPr lang="en-US" sz="1300" dirty="0">
                 <a:solidFill>
                   <a:srgbClr val="475569"/>
                 </a:solidFill>
@@ -13849,7 +13849,7 @@
               </a:rPr>
               <a:t>Deux réalités qui se rejoignent</a:t>
             </a:r>
-            <a:endParaRPr lang="en-US" sz="1100" dirty="0"/>
+            <a:endParaRPr lang="en-US" sz="1300" dirty="0"/>
           </a:p>
         </p:txBody>
       </p:sp>
@@ -14012,7 +14012,7 @@
               <a:buNone/>
             </a:pPr>
             <a:r>
-              <a:rPr lang="en-US" sz="1100" dirty="0">
+              <a:rPr lang="en-US" sz="1300" dirty="0">
                 <a:solidFill>
                   <a:srgbClr val="475569"/>
                 </a:solidFill>
@@ -14022,7 +14022,7 @@
               </a:rPr>
               <a:t>Canaux, mesure et lacune</a:t>
             </a:r>
-            <a:endParaRPr lang="en-US" sz="1100" dirty="0"/>
+            <a:endParaRPr lang="en-US" sz="1300" dirty="0"/>
           </a:p>
         </p:txBody>
       </p:sp>
@@ -14185,7 +14185,7 @@
               <a:buNone/>
             </a:pPr>
             <a:r>
-              <a:rPr lang="en-US" sz="1100" dirty="0">
+              <a:rPr lang="en-US" sz="1300" dirty="0">
                 <a:solidFill>
                   <a:srgbClr val="475569"/>
                 </a:solidFill>
@@ -14195,7 +14195,7 @@
               </a:rPr>
               <a:t>MODA et identification PSM-DD</a:t>
             </a:r>
-            <a:endParaRPr lang="en-US" sz="1100" dirty="0"/>
+            <a:endParaRPr lang="en-US" sz="1300" dirty="0"/>
           </a:p>
         </p:txBody>
       </p:sp>
@@ -14358,7 +14358,7 @@
               <a:buNone/>
             </a:pPr>
             <a:r>
-              <a:rPr lang="en-US" sz="1100" dirty="0">
+              <a:rPr lang="en-US" sz="1300" dirty="0">
                 <a:solidFill>
                   <a:srgbClr val="475569"/>
                 </a:solidFill>
@@ -14368,7 +14368,7 @@
               </a:rPr>
               <a:t>Effet, dimensions, montants</a:t>
             </a:r>
-            <a:endParaRPr lang="en-US" sz="1100" dirty="0"/>
+            <a:endParaRPr lang="en-US" sz="1300" dirty="0"/>
           </a:p>
         </p:txBody>
       </p:sp>
@@ -14531,7 +14531,7 @@
               <a:buNone/>
             </a:pPr>
             <a:r>
-              <a:rPr lang="en-US" sz="1100" dirty="0">
+              <a:rPr lang="en-US" sz="1300" dirty="0">
                 <a:solidFill>
                   <a:srgbClr val="475569"/>
                 </a:solidFill>
@@ -14541,7 +14541,7 @@
               </a:rPr>
               <a:t>Ce qui tient et ce qui ne tient pas</a:t>
             </a:r>
-            <a:endParaRPr lang="en-US" sz="1100" dirty="0"/>
+            <a:endParaRPr lang="en-US" sz="1300" dirty="0"/>
           </a:p>
         </p:txBody>
       </p:sp>
@@ -14704,7 +14704,7 @@
               <a:buNone/>
             </a:pPr>
             <a:r>
-              <a:rPr lang="en-US" sz="1100" dirty="0">
+              <a:rPr lang="en-US" sz="1300" dirty="0">
                 <a:solidFill>
                   <a:srgbClr val="475569"/>
                 </a:solidFill>
@@ -14714,7 +14714,7 @@
               </a:rPr>
               <a:t>Ce qu'il faut en faire</a:t>
             </a:r>
-            <a:endParaRPr lang="en-US" sz="1100" dirty="0"/>
+            <a:endParaRPr lang="en-US" sz="1300" dirty="0"/>
           </a:p>
         </p:txBody>
       </p:sp>
@@ -14743,7 +14743,7 @@
               <a:buNone/>
             </a:pPr>
             <a:r>
-              <a:rPr lang="en-US" sz="950" dirty="0">
+              <a:rPr lang="en-US" sz="1000" dirty="0">
                 <a:solidFill>
                   <a:srgbClr val="94A3B8"/>
                 </a:solidFill>
@@ -14753,7 +14753,7 @@
               </a:rPr>
               <a:t>2</a:t>
             </a:r>
-            <a:endParaRPr lang="en-US" sz="950" dirty="0"/>
+            <a:endParaRPr lang="en-US" sz="1000" dirty="0"/>
           </a:p>
         </p:txBody>
       </p:sp>
@@ -14838,7 +14838,7 @@
               <a:buNone/>
             </a:pPr>
             <a:r>
-              <a:rPr lang="en-US" sz="2700" b="1" dirty="0">
+              <a:rPr lang="en-US" sz="3000" b="1" dirty="0">
                 <a:solidFill>
                   <a:srgbClr val="312E81"/>
                 </a:solidFill>
@@ -14848,7 +14848,7 @@
               </a:rPr>
               <a:t>Recommandations de politique économique</a:t>
             </a:r>
-            <a:endParaRPr lang="en-US" sz="2700" dirty="0"/>
+            <a:endParaRPr lang="en-US" sz="3000" dirty="0"/>
           </a:p>
         </p:txBody>
       </p:sp>
@@ -14880,7 +14880,7 @@
               <a:buNone/>
             </a:pPr>
             <a:r>
-              <a:rPr lang="en-US" sz="1300" dirty="0">
+              <a:rPr lang="en-US" sz="1400" dirty="0">
                 <a:solidFill>
                   <a:srgbClr val="475569"/>
                 </a:solidFill>
@@ -14888,9 +14888,9 @@
                 <a:ea typeface="Calibri" pitchFamily="34" charset="-122"/>
                 <a:cs typeface="Calibri" pitchFamily="34" charset="-120"/>
               </a:rPr>
-              <a:t>Elles suivent l'ordre des faits établis, de la dimension et du groupe d'âge sur lesquels l'écart se concentre jusqu'aux conditions de conversion des transferts.</a:t>
-            </a:r>
-            <a:endParaRPr lang="en-US" sz="1300" dirty="0"/>
+              <a:t>Elles suivent l'ordre des faits établis, de la dimension touchée aux conditions de conversion.</a:t>
+            </a:r>
+            <a:endParaRPr lang="en-US" sz="1400" dirty="0"/>
           </a:p>
         </p:txBody>
       </p:sp>
@@ -15020,7 +15020,7 @@
               <a:buNone/>
             </a:pPr>
             <a:r>
-              <a:rPr lang="en-US" sz="1200" dirty="0">
+              <a:rPr lang="en-US" sz="1350" dirty="0">
                 <a:solidFill>
                   <a:srgbClr val="475569"/>
                 </a:solidFill>
@@ -15028,9 +15028,9 @@
                 <a:ea typeface="Calibri" pitchFamily="34" charset="-122"/>
                 <a:cs typeface="Calibri" pitchFamily="34" charset="-120"/>
               </a:rPr>
-              <a:t>Filets sociaux, cantines scolaires et suivi nutritionnel en priorité dans les communes d'émigration, sans écarter les ménages bénéficiaires au motif qu'ils reçoivent une ressource extérieure.</a:t>
-            </a:r>
-            <a:endParaRPr lang="en-US" sz="1200" dirty="0"/>
+              <a:t>Filets sociaux, cantines et suivi nutritionnel dans les communes d'émigration, bénéficiaires compris.</a:t>
+            </a:r>
+            <a:endParaRPr lang="en-US" sz="1350" dirty="0"/>
           </a:p>
         </p:txBody>
       </p:sp>
@@ -15160,7 +15160,7 @@
               <a:buNone/>
             </a:pPr>
             <a:r>
-              <a:rPr lang="en-US" sz="1200" dirty="0">
+              <a:rPr lang="en-US" sz="1350" dirty="0">
                 <a:solidFill>
                   <a:srgbClr val="475569"/>
                 </a:solidFill>
@@ -15168,9 +15168,9 @@
                 <a:ea typeface="Calibri" pitchFamily="34" charset="-122"/>
                 <a:cs typeface="Calibri" pitchFamily="34" charset="-120"/>
               </a:rPr>
-              <a:t>L'eau, l'assainissement et la santé relèvent d'investissements collectifs que le pouvoir d'achat privé ne remplace pas. Cibler prioritairement les communes rurales d'émigration.</a:t>
-            </a:r>
-            <a:endParaRPr lang="en-US" sz="1200" dirty="0"/>
+              <a:t>Eau, assainissement et santé relèvent de l'offre publique, en priorité dans les communes rurales.</a:t>
+            </a:r>
+            <a:endParaRPr lang="en-US" sz="1350" dirty="0"/>
           </a:p>
         </p:txBody>
       </p:sp>
@@ -15300,7 +15300,7 @@
               <a:buNone/>
             </a:pPr>
             <a:r>
-              <a:rPr lang="en-US" sz="1200" dirty="0">
+              <a:rPr lang="en-US" sz="1350" dirty="0">
                 <a:solidFill>
                   <a:srgbClr val="475569"/>
                 </a:solidFill>
@@ -15308,9 +15308,9 @@
                 <a:ea typeface="Calibri" pitchFamily="34" charset="-122"/>
                 <a:cs typeface="Calibri" pitchFamily="34" charset="-120"/>
               </a:rPr>
-              <a:t>Accompagner les ménages qui reçoivent le moins, et réduire les coûts de transaction des envois formels pour accroître les fonds réellement disponibles.</a:t>
-            </a:r>
-            <a:endParaRPr lang="en-US" sz="1200" dirty="0"/>
+              <a:t>Accompagner les ménages qui reçoivent le moins et réduire les coûts des envois formels.</a:t>
+            </a:r>
+            <a:endParaRPr lang="en-US" sz="1350" dirty="0"/>
           </a:p>
         </p:txBody>
       </p:sp>
@@ -15339,7 +15339,7 @@
               <a:buNone/>
             </a:pPr>
             <a:r>
-              <a:rPr lang="en-US" sz="950" dirty="0">
+              <a:rPr lang="en-US" sz="1000" dirty="0">
                 <a:solidFill>
                   <a:srgbClr val="94A3B8"/>
                 </a:solidFill>
@@ -15349,7 +15349,7 @@
               </a:rPr>
               <a:t>20</a:t>
             </a:r>
-            <a:endParaRPr lang="en-US" sz="950" dirty="0"/>
+            <a:endParaRPr lang="en-US" sz="1000" dirty="0"/>
           </a:p>
         </p:txBody>
       </p:sp>
@@ -15552,7 +15552,7 @@
               <a:buNone/>
             </a:pPr>
             <a:r>
-              <a:rPr lang="en-US" sz="1250" dirty="0">
+              <a:rPr lang="en-US" sz="1400" dirty="0">
                 <a:solidFill>
                   <a:srgbClr val="A5B4FC"/>
                 </a:solidFill>
@@ -15562,7 +15562,7 @@
               </a:rPr>
               <a:t>ENSAE Pierre Ndiaye   ·   Août 2026</a:t>
             </a:r>
-            <a:endParaRPr lang="en-US" sz="1250" dirty="0"/>
+            <a:endParaRPr lang="en-US" sz="1400" dirty="0"/>
           </a:p>
         </p:txBody>
       </p:sp>
@@ -15623,7 +15623,7 @@
               <a:buNone/>
             </a:pPr>
             <a:r>
-              <a:rPr lang="en-US" sz="2700" b="1" dirty="0">
+              <a:rPr lang="en-US" sz="3000" b="1" dirty="0">
                 <a:solidFill>
                   <a:srgbClr val="312E81"/>
                 </a:solidFill>
@@ -15633,7 +15633,7 @@
               </a:rPr>
               <a:t>Deux réalités qui se rejoignent</a:t>
             </a:r>
-            <a:endParaRPr lang="en-US" sz="2700" dirty="0"/>
+            <a:endParaRPr lang="en-US" sz="3000" dirty="0"/>
           </a:p>
         </p:txBody>
       </p:sp>
@@ -15783,7 +15783,7 @@
         <p:spPr>
           <a:xfrm>
             <a:off x="914400" y="3293872"/>
-            <a:ext cx="2286000" cy="384048"/>
+            <a:ext cx="2286000" cy="566928"/>
           </a:xfrm>
           <a:prstGeom prst="rect">
             <a:avLst/>
@@ -15802,7 +15802,7 @@
               <a:buNone/>
             </a:pPr>
             <a:r>
-              <a:rPr lang="en-US" sz="1050" dirty="0">
+              <a:rPr lang="en-US" sz="1200" dirty="0">
                 <a:solidFill>
                   <a:srgbClr val="475569"/>
                 </a:solidFill>
@@ -15812,7 +15812,7 @@
               </a:rPr>
               <a:t>millions de dollars reçus en 2017,</a:t>
             </a:r>
-            <a:endParaRPr lang="en-US" sz="1050" dirty="0"/>
+            <a:endParaRPr lang="en-US" sz="1200" dirty="0"/>
           </a:p>
           <a:p>
             <a:pPr algn="ctr" indent="0" marL="0">
@@ -15822,7 +15822,7 @@
               <a:buNone/>
             </a:pPr>
             <a:r>
-              <a:rPr lang="en-US" sz="1050" dirty="0">
+              <a:rPr lang="en-US" sz="1200" dirty="0">
                 <a:solidFill>
                   <a:srgbClr val="475569"/>
                 </a:solidFill>
@@ -15832,7 +15832,7 @@
               </a:rPr>
               <a:t>contre 233 en 2000</a:t>
             </a:r>
-            <a:endParaRPr lang="en-US" sz="1050" dirty="0"/>
+            <a:endParaRPr lang="en-US" sz="1200" dirty="0"/>
           </a:p>
         </p:txBody>
       </p:sp>
@@ -15884,7 +15884,7 @@
         <p:spPr>
           <a:xfrm>
             <a:off x="3383280" y="3293872"/>
-            <a:ext cx="2286000" cy="384048"/>
+            <a:ext cx="2286000" cy="566928"/>
           </a:xfrm>
           <a:prstGeom prst="rect">
             <a:avLst/>
@@ -15903,7 +15903,7 @@
               <a:buNone/>
             </a:pPr>
             <a:r>
-              <a:rPr lang="en-US" sz="1050" dirty="0">
+              <a:rPr lang="en-US" sz="1200" dirty="0">
                 <a:solidFill>
                   <a:srgbClr val="475569"/>
                 </a:solidFill>
@@ -15913,7 +15913,7 @@
               </a:rPr>
               <a:t>du produit intérieur brut,</a:t>
             </a:r>
-            <a:endParaRPr lang="en-US" sz="1050" dirty="0"/>
+            <a:endParaRPr lang="en-US" sz="1200" dirty="0"/>
           </a:p>
           <a:p>
             <a:pPr algn="ctr" indent="0" marL="0">
@@ -15923,7 +15923,7 @@
               <a:buNone/>
             </a:pPr>
             <a:r>
-              <a:rPr lang="en-US" sz="1050" dirty="0">
+              <a:rPr lang="en-US" sz="1200" dirty="0">
                 <a:solidFill>
                   <a:srgbClr val="475569"/>
                 </a:solidFill>
@@ -15933,7 +15933,7 @@
               </a:rPr>
               <a:t>4ᵉ récepteur subsaharien</a:t>
             </a:r>
-            <a:endParaRPr lang="en-US" sz="1050" dirty="0"/>
+            <a:endParaRPr lang="en-US" sz="1200" dirty="0"/>
           </a:p>
         </p:txBody>
       </p:sp>
@@ -15965,7 +15965,7 @@
               <a:buNone/>
             </a:pPr>
             <a:r>
-              <a:rPr lang="en-US" sz="1250" dirty="0">
+              <a:rPr lang="en-US" sz="1400" dirty="0">
                 <a:solidFill>
                   <a:srgbClr val="475569"/>
                 </a:solidFill>
@@ -15975,7 +15975,7 @@
               </a:rPr>
               <a:t>À l'échelle des ménages, les montants reçus avoisinent le seuil de pauvreté monétaire annuel par tête.</a:t>
             </a:r>
-            <a:endParaRPr lang="en-US" sz="1250" dirty="0"/>
+            <a:endParaRPr lang="en-US" sz="1400" dirty="0"/>
           </a:p>
         </p:txBody>
       </p:sp>
@@ -16164,7 +16164,7 @@
         <p:spPr>
           <a:xfrm>
             <a:off x="6537960" y="3293872"/>
-            <a:ext cx="2286000" cy="384048"/>
+            <a:ext cx="2286000" cy="566928"/>
           </a:xfrm>
           <a:prstGeom prst="rect">
             <a:avLst/>
@@ -16183,7 +16183,7 @@
               <a:buNone/>
             </a:pPr>
             <a:r>
-              <a:rPr lang="en-US" sz="1050" dirty="0">
+              <a:rPr lang="en-US" sz="1200" dirty="0">
                 <a:solidFill>
                   <a:srgbClr val="475569"/>
                 </a:solidFill>
@@ -16193,7 +16193,7 @@
               </a:rPr>
               <a:t>des enfants de 0 à 17 ans privés</a:t>
             </a:r>
-            <a:endParaRPr lang="en-US" sz="1050" dirty="0"/>
+            <a:endParaRPr lang="en-US" sz="1200" dirty="0"/>
           </a:p>
           <a:p>
             <a:pPr algn="ctr" indent="0" marL="0">
@@ -16203,7 +16203,7 @@
               <a:buNone/>
             </a:pPr>
             <a:r>
-              <a:rPr lang="en-US" sz="1050" dirty="0">
+              <a:rPr lang="en-US" sz="1200" dirty="0">
                 <a:solidFill>
                   <a:srgbClr val="475569"/>
                 </a:solidFill>
@@ -16213,7 +16213,7 @@
               </a:rPr>
               <a:t>dans au moins 4 des 7 domaines</a:t>
             </a:r>
-            <a:endParaRPr lang="en-US" sz="1050" dirty="0"/>
+            <a:endParaRPr lang="en-US" sz="1200" dirty="0"/>
           </a:p>
         </p:txBody>
       </p:sp>
@@ -16265,7 +16265,7 @@
         <p:spPr>
           <a:xfrm>
             <a:off x="9006840" y="3293872"/>
-            <a:ext cx="2286000" cy="384048"/>
+            <a:ext cx="2286000" cy="566928"/>
           </a:xfrm>
           <a:prstGeom prst="rect">
             <a:avLst/>
@@ -16284,7 +16284,7 @@
               <a:buNone/>
             </a:pPr>
             <a:r>
-              <a:rPr lang="en-US" sz="1050" dirty="0">
+              <a:rPr lang="en-US" sz="1200" dirty="0">
                 <a:solidFill>
                   <a:srgbClr val="475569"/>
                 </a:solidFill>
@@ -16294,7 +16294,7 @@
               </a:rPr>
               <a:t>domaines du bien-être,</a:t>
             </a:r>
-            <a:endParaRPr lang="en-US" sz="1050" dirty="0"/>
+            <a:endParaRPr lang="en-US" sz="1200" dirty="0"/>
           </a:p>
           <a:p>
             <a:pPr algn="ctr" indent="0" marL="0">
@@ -16304,7 +16304,7 @@
               <a:buNone/>
             </a:pPr>
             <a:r>
-              <a:rPr lang="en-US" sz="1050" dirty="0">
+              <a:rPr lang="en-US" sz="1200" dirty="0">
                 <a:solidFill>
                   <a:srgbClr val="475569"/>
                 </a:solidFill>
@@ -16314,7 +16314,7 @@
               </a:rPr>
               <a:t>de l'eau à l'éducation</a:t>
             </a:r>
-            <a:endParaRPr lang="en-US" sz="1050" dirty="0"/>
+            <a:endParaRPr lang="en-US" sz="1200" dirty="0"/>
           </a:p>
         </p:txBody>
       </p:sp>
@@ -16346,7 +16346,7 @@
               <a:buNone/>
             </a:pPr>
             <a:r>
-              <a:rPr lang="en-US" sz="1250" dirty="0">
+              <a:rPr lang="en-US" sz="1400" dirty="0">
                 <a:solidFill>
                   <a:srgbClr val="475569"/>
                 </a:solidFill>
@@ -16356,7 +16356,7 @@
               </a:rPr>
               <a:t>Ces manques échappent aux mesures fondées sur le seul revenu : un enfant peut vivre au-dessus du seuil monétaire et rester déscolarisé.</a:t>
             </a:r>
-            <a:endParaRPr lang="en-US" sz="1250" dirty="0"/>
+            <a:endParaRPr lang="en-US" sz="1400" dirty="0"/>
           </a:p>
         </p:txBody>
       </p:sp>
@@ -16424,7 +16424,7 @@
               <a:buNone/>
             </a:pPr>
             <a:r>
-              <a:rPr lang="en-US" sz="950" dirty="0">
+              <a:rPr lang="en-US" sz="1000" dirty="0">
                 <a:solidFill>
                   <a:srgbClr val="94A3B8"/>
                 </a:solidFill>
@@ -16434,7 +16434,7 @@
               </a:rPr>
               <a:t>3</a:t>
             </a:r>
-            <a:endParaRPr lang="en-US" sz="950" dirty="0"/>
+            <a:endParaRPr lang="en-US" sz="1000" dirty="0"/>
           </a:p>
         </p:txBody>
       </p:sp>
@@ -16519,7 +16519,7 @@
               <a:buNone/>
             </a:pPr>
             <a:r>
-              <a:rPr lang="en-US" sz="2700" b="1" dirty="0">
+              <a:rPr lang="en-US" sz="3000" b="1" dirty="0">
                 <a:solidFill>
                   <a:srgbClr val="312E81"/>
                 </a:solidFill>
@@ -16529,7 +16529,7 @@
               </a:rPr>
               <a:t>Problématique</a:t>
             </a:r>
-            <a:endParaRPr lang="en-US" sz="2700" dirty="0"/>
+            <a:endParaRPr lang="en-US" sz="3000" dirty="0"/>
           </a:p>
         </p:txBody>
       </p:sp>
@@ -16687,7 +16687,7 @@
               <a:buNone/>
             </a:pPr>
             <a:r>
-              <a:rPr lang="en-US" sz="1200" dirty="0">
+              <a:rPr lang="en-US" sz="1350" dirty="0">
                 <a:solidFill>
                   <a:srgbClr val="475569"/>
                 </a:solidFill>
@@ -16697,7 +16697,7 @@
               </a:rPr>
               <a:t>Les transferts desserrent la contrainte budgétaire, sans qu'un supplément de ressources se traduise mécaniquement par un recul des privations.</a:t>
             </a:r>
-            <a:endParaRPr lang="en-US" sz="1200" dirty="0"/>
+            <a:endParaRPr lang="en-US" sz="1350" dirty="0"/>
           </a:p>
         </p:txBody>
       </p:sp>
@@ -16771,7 +16771,7 @@
               <a:buNone/>
             </a:pPr>
             <a:r>
-              <a:rPr lang="en-US" sz="1200" dirty="0">
+              <a:rPr lang="en-US" sz="1350" dirty="0">
                 <a:solidFill>
                   <a:srgbClr val="475569"/>
                 </a:solidFill>
@@ -16781,7 +16781,7 @@
               </a:rPr>
               <a:t>Recevoir des transferts suppose un réseau migratoire : les ménages bénéficiaires diffèrent des autres avant même le premier franc reçu.</a:t>
             </a:r>
-            <a:endParaRPr lang="en-US" sz="1200" dirty="0"/>
+            <a:endParaRPr lang="en-US" sz="1350" dirty="0"/>
           </a:p>
         </p:txBody>
       </p:sp>
@@ -16855,7 +16855,7 @@
               <a:buNone/>
             </a:pPr>
             <a:r>
-              <a:rPr lang="en-US" sz="1200" dirty="0">
+              <a:rPr lang="en-US" sz="1350" dirty="0">
                 <a:solidFill>
                   <a:srgbClr val="475569"/>
                 </a:solidFill>
@@ -16865,7 +16865,7 @@
               </a:rPr>
               <a:t>Aucune étude recensée ne combine mesure multidimensionnelle de la pauvreté infantile et identification sur panel en Afrique de l'Ouest.</a:t>
             </a:r>
-            <a:endParaRPr lang="en-US" sz="1200" dirty="0"/>
+            <a:endParaRPr lang="en-US" sz="1350" dirty="0"/>
           </a:p>
         </p:txBody>
       </p:sp>
@@ -17062,7 +17062,7 @@
               <a:buNone/>
             </a:pPr>
             <a:r>
-              <a:rPr lang="en-US" sz="950" dirty="0">
+              <a:rPr lang="en-US" sz="1000" dirty="0">
                 <a:solidFill>
                   <a:srgbClr val="94A3B8"/>
                 </a:solidFill>
@@ -17072,7 +17072,7 @@
               </a:rPr>
               <a:t>4</a:t>
             </a:r>
-            <a:endParaRPr lang="en-US" sz="950" dirty="0"/>
+            <a:endParaRPr lang="en-US" sz="1000" dirty="0"/>
           </a:p>
         </p:txBody>
       </p:sp>
@@ -17157,7 +17157,7 @@
               <a:buNone/>
             </a:pPr>
             <a:r>
-              <a:rPr lang="en-US" sz="2700" b="1" dirty="0">
+              <a:rPr lang="en-US" sz="3000" b="1" dirty="0">
                 <a:solidFill>
                   <a:srgbClr val="312E81"/>
                 </a:solidFill>
@@ -17167,7 +17167,7 @@
               </a:rPr>
               <a:t>Objectifs et hypothèses</a:t>
             </a:r>
-            <a:endParaRPr lang="en-US" sz="2700" dirty="0"/>
+            <a:endParaRPr lang="en-US" sz="3000" dirty="0"/>
           </a:p>
         </p:txBody>
       </p:sp>
@@ -17353,7 +17353,7 @@
               <a:buNone/>
             </a:pPr>
             <a:r>
-              <a:rPr lang="en-US" sz="1300" b="1" dirty="0">
+              <a:rPr lang="en-US" sz="1400" b="1" dirty="0">
                 <a:solidFill>
                   <a:srgbClr val="FFFFFF"/>
                 </a:solidFill>
@@ -17363,7 +17363,7 @@
               </a:rPr>
               <a:t>1</a:t>
             </a:r>
-            <a:endParaRPr lang="en-US" sz="1300" dirty="0"/>
+            <a:endParaRPr lang="en-US" sz="1400" dirty="0"/>
           </a:p>
         </p:txBody>
       </p:sp>
@@ -17395,7 +17395,7 @@
               <a:buNone/>
             </a:pPr>
             <a:r>
-              <a:rPr lang="en-US" sz="1250" dirty="0">
+              <a:rPr lang="en-US" sz="1400" dirty="0">
                 <a:solidFill>
                   <a:srgbClr val="475569"/>
                 </a:solidFill>
@@ -17405,7 +17405,7 @@
               </a:rPr>
               <a:t>Construire un indice de pauvreté multidimensionnelle adapté aux enfants sénégalais.</a:t>
             </a:r>
-            <a:endParaRPr lang="en-US" sz="1250" dirty="0"/>
+            <a:endParaRPr lang="en-US" sz="1400" dirty="0"/>
           </a:p>
         </p:txBody>
       </p:sp>
@@ -17454,7 +17454,7 @@
               <a:buNone/>
             </a:pPr>
             <a:r>
-              <a:rPr lang="en-US" sz="1300" b="1" dirty="0">
+              <a:rPr lang="en-US" sz="1400" b="1" dirty="0">
                 <a:solidFill>
                   <a:srgbClr val="FFFFFF"/>
                 </a:solidFill>
@@ -17464,7 +17464,7 @@
               </a:rPr>
               <a:t>2</a:t>
             </a:r>
-            <a:endParaRPr lang="en-US" sz="1300" dirty="0"/>
+            <a:endParaRPr lang="en-US" sz="1400" dirty="0"/>
           </a:p>
         </p:txBody>
       </p:sp>
@@ -17496,7 +17496,7 @@
               <a:buNone/>
             </a:pPr>
             <a:r>
-              <a:rPr lang="en-US" sz="1250" dirty="0">
+              <a:rPr lang="en-US" sz="1400" dirty="0">
                 <a:solidFill>
                   <a:srgbClr val="475569"/>
                 </a:solidFill>
@@ -17506,7 +17506,7 @@
               </a:rPr>
               <a:t>Estimer l'impact des transferts sur cet indice et en analyser l'hétérogénéité.</a:t>
             </a:r>
-            <a:endParaRPr lang="en-US" sz="1250" dirty="0"/>
+            <a:endParaRPr lang="en-US" sz="1400" dirty="0"/>
           </a:p>
         </p:txBody>
       </p:sp>
@@ -17694,7 +17694,7 @@
               <a:buNone/>
             </a:pPr>
             <a:r>
-              <a:rPr lang="en-US" sz="1200" dirty="0">
+              <a:rPr lang="en-US" sz="1350" dirty="0">
                 <a:solidFill>
                   <a:srgbClr val="0F172A"/>
                 </a:solidFill>
@@ -17704,7 +17704,7 @@
               </a:rPr>
               <a:t>Les transferts de migrants réduisent significativement la pauvreté multidimensionnelle des enfants.</a:t>
             </a:r>
-            <a:endParaRPr lang="en-US" sz="1200" dirty="0"/>
+            <a:endParaRPr lang="en-US" sz="1350" dirty="0"/>
           </a:p>
         </p:txBody>
       </p:sp>
@@ -17797,7 +17797,7 @@
               <a:buNone/>
             </a:pPr>
             <a:r>
-              <a:rPr lang="en-US" sz="1200" dirty="0">
+              <a:rPr lang="en-US" sz="1350" dirty="0">
                 <a:solidFill>
                   <a:srgbClr val="0F172A"/>
                 </a:solidFill>
@@ -17807,7 +17807,7 @@
               </a:rPr>
               <a:t>Leur impact est hétérogène selon les dimensions, le milieu, le genre du chef de ménage, l'âge de l'enfant et le montant reçu.</a:t>
             </a:r>
-            <a:endParaRPr lang="en-US" sz="1200" dirty="0"/>
+            <a:endParaRPr lang="en-US" sz="1350" dirty="0"/>
           </a:p>
         </p:txBody>
       </p:sp>
@@ -17836,7 +17836,7 @@
               <a:buNone/>
             </a:pPr>
             <a:r>
-              <a:rPr lang="en-US" sz="950" dirty="0">
+              <a:rPr lang="en-US" sz="1000" dirty="0">
                 <a:solidFill>
                   <a:srgbClr val="94A3B8"/>
                 </a:solidFill>
@@ -17846,7 +17846,7 @@
               </a:rPr>
               <a:t>5</a:t>
             </a:r>
-            <a:endParaRPr lang="en-US" sz="950" dirty="0"/>
+            <a:endParaRPr lang="en-US" sz="1000" dirty="0"/>
           </a:p>
         </p:txBody>
       </p:sp>
@@ -17931,7 +17931,7 @@
               <a:buNone/>
             </a:pPr>
             <a:r>
-              <a:rPr lang="en-US" sz="2700" b="1" dirty="0">
+              <a:rPr lang="en-US" sz="3000" b="1" dirty="0">
                 <a:solidFill>
                   <a:srgbClr val="312E81"/>
                 </a:solidFill>
@@ -17941,7 +17941,7 @@
               </a:rPr>
               <a:t>Pourquoi les migrants transfèrent, et avec quels effets</a:t>
             </a:r>
-            <a:endParaRPr lang="en-US" sz="2700" dirty="0"/>
+            <a:endParaRPr lang="en-US" sz="3000" dirty="0"/>
           </a:p>
         </p:txBody>
       </p:sp>
@@ -17992,7 +17992,7 @@
         </p:nvSpPr>
         <p:spPr>
           <a:xfrm>
-            <a:off x="960120" y="2194560"/>
+            <a:off x="960120" y="2212848"/>
             <a:ext cx="274320" cy="274320"/>
           </a:xfrm>
           <a:prstGeom prst="ellipse">
@@ -18052,7 +18052,7 @@
         <p:spPr>
           <a:xfrm>
             <a:off x="1417320" y="2432304"/>
-            <a:ext cx="4297680" cy="329184"/>
+            <a:ext cx="4297680" cy="420624"/>
           </a:xfrm>
           <a:prstGeom prst="rect">
             <a:avLst/>
@@ -18071,7 +18071,7 @@
               <a:buNone/>
             </a:pPr>
             <a:r>
-              <a:rPr lang="en-US" sz="1200" dirty="0">
+              <a:rPr lang="en-US" sz="1350" dirty="0">
                 <a:solidFill>
                   <a:srgbClr val="475569"/>
                 </a:solidFill>
@@ -18081,58 +18081,58 @@
               </a:rPr>
               <a:t>Les transferts décroissent avec le revenu du receveur.</a:t>
             </a:r>
+            <a:endParaRPr lang="en-US" sz="1350" dirty="0"/>
+          </a:p>
+        </p:txBody>
+      </p:sp>
+      <p:sp>
+        <p:nvSpPr>
+          <p:cNvPr id="7" name="Text 5"/>
+          <p:cNvSpPr/>
+          <p:nvPr/>
+        </p:nvSpPr>
+        <p:spPr>
+          <a:xfrm>
+            <a:off x="1417320" y="2889504"/>
+            <a:ext cx="4297680" cy="274320"/>
+          </a:xfrm>
+          <a:prstGeom prst="rect">
+            <a:avLst/>
+          </a:prstGeom>
+          <a:noFill/>
+          <a:ln/>
+        </p:spPr>
+        <p:txBody>
+          <a:bodyPr wrap="square" lIns="0" tIns="0" rIns="0" bIns="0" rtlCol="0" anchor="ctr"/>
+          <a:lstStyle/>
+          <a:p>
+            <a:pPr indent="0" marL="0">
+              <a:buNone/>
+            </a:pPr>
+            <a:r>
+              <a:rPr lang="en-US" sz="1200" i="1" dirty="0">
+                <a:solidFill>
+                  <a:srgbClr val="94A3B8"/>
+                </a:solidFill>
+                <a:latin typeface="Calibri" pitchFamily="34" charset="0"/>
+                <a:ea typeface="Calibri" pitchFamily="34" charset="-122"/>
+                <a:cs typeface="Calibri" pitchFamily="34" charset="-120"/>
+              </a:rPr>
+              <a:t>Lucas &amp; Stark, 1985</a:t>
+            </a:r>
             <a:endParaRPr lang="en-US" sz="1200" dirty="0"/>
           </a:p>
         </p:txBody>
       </p:sp>
       <p:sp>
         <p:nvSpPr>
-          <p:cNvPr id="7" name="Text 5"/>
-          <p:cNvSpPr/>
-          <p:nvPr/>
-        </p:nvSpPr>
-        <p:spPr>
-          <a:xfrm>
-            <a:off x="1417320" y="2779776"/>
-            <a:ext cx="4297680" cy="237744"/>
-          </a:xfrm>
-          <a:prstGeom prst="rect">
-            <a:avLst/>
-          </a:prstGeom>
-          <a:noFill/>
-          <a:ln/>
-        </p:spPr>
-        <p:txBody>
-          <a:bodyPr wrap="square" lIns="0" tIns="0" rIns="0" bIns="0" rtlCol="0" anchor="ctr"/>
-          <a:lstStyle/>
-          <a:p>
-            <a:pPr indent="0" marL="0">
-              <a:buNone/>
-            </a:pPr>
-            <a:r>
-              <a:rPr lang="en-US" sz="1050" i="1" dirty="0">
-                <a:solidFill>
-                  <a:srgbClr val="94A3B8"/>
-                </a:solidFill>
-                <a:latin typeface="Calibri" pitchFamily="34" charset="0"/>
-                <a:ea typeface="Calibri" pitchFamily="34" charset="-122"/>
-                <a:cs typeface="Calibri" pitchFamily="34" charset="-120"/>
-              </a:rPr>
-              <a:t>Lucas &amp; Stark, 1985</a:t>
-            </a:r>
-            <a:endParaRPr lang="en-US" sz="1050" dirty="0"/>
-          </a:p>
-        </p:txBody>
-      </p:sp>
-      <p:sp>
-        <p:nvSpPr>
           <p:cNvPr id="8" name="Shape 6"/>
           <p:cNvSpPr/>
           <p:nvPr/>
         </p:nvSpPr>
         <p:spPr>
           <a:xfrm>
-            <a:off x="960120" y="3401568"/>
+            <a:off x="960120" y="3538728"/>
             <a:ext cx="274320" cy="274320"/>
           </a:xfrm>
           <a:prstGeom prst="ellipse">
@@ -18152,7 +18152,7 @@
         </p:nvSpPr>
         <p:spPr>
           <a:xfrm>
-            <a:off x="1417320" y="3328416"/>
+            <a:off x="1417320" y="3447288"/>
             <a:ext cx="4297680" cy="292608"/>
           </a:xfrm>
           <a:prstGeom prst="rect">
@@ -18191,8 +18191,8 @@
         </p:nvSpPr>
         <p:spPr>
           <a:xfrm>
-            <a:off x="1417320" y="3639312"/>
-            <a:ext cx="4297680" cy="329184"/>
+            <a:off x="1417320" y="3758184"/>
+            <a:ext cx="4297680" cy="420624"/>
           </a:xfrm>
           <a:prstGeom prst="rect">
             <a:avLst/>
@@ -18211,7 +18211,7 @@
               <a:buNone/>
             </a:pPr>
             <a:r>
-              <a:rPr lang="en-US" sz="1200" dirty="0">
+              <a:rPr lang="en-US" sz="1350" dirty="0">
                 <a:solidFill>
                   <a:srgbClr val="475569"/>
                 </a:solidFill>
@@ -18221,58 +18221,58 @@
               </a:rPr>
               <a:t>Préserver un héritage, rembourser la dette du départ.</a:t>
             </a:r>
+            <a:endParaRPr lang="en-US" sz="1350" dirty="0"/>
+          </a:p>
+        </p:txBody>
+      </p:sp>
+      <p:sp>
+        <p:nvSpPr>
+          <p:cNvPr id="11" name="Text 9"/>
+          <p:cNvSpPr/>
+          <p:nvPr/>
+        </p:nvSpPr>
+        <p:spPr>
+          <a:xfrm>
+            <a:off x="1417320" y="4215384"/>
+            <a:ext cx="4297680" cy="274320"/>
+          </a:xfrm>
+          <a:prstGeom prst="rect">
+            <a:avLst/>
+          </a:prstGeom>
+          <a:noFill/>
+          <a:ln/>
+        </p:spPr>
+        <p:txBody>
+          <a:bodyPr wrap="square" lIns="0" tIns="0" rIns="0" bIns="0" rtlCol="0" anchor="ctr"/>
+          <a:lstStyle/>
+          <a:p>
+            <a:pPr indent="0" marL="0">
+              <a:buNone/>
+            </a:pPr>
+            <a:r>
+              <a:rPr lang="en-US" sz="1200" i="1" dirty="0">
+                <a:solidFill>
+                  <a:srgbClr val="94A3B8"/>
+                </a:solidFill>
+                <a:latin typeface="Calibri" pitchFamily="34" charset="0"/>
+                <a:ea typeface="Calibri" pitchFamily="34" charset="-122"/>
+                <a:cs typeface="Calibri" pitchFamily="34" charset="-120"/>
+              </a:rPr>
+              <a:t>Rapoport &amp; Docquier, 2006</a:t>
+            </a:r>
             <a:endParaRPr lang="en-US" sz="1200" dirty="0"/>
           </a:p>
         </p:txBody>
       </p:sp>
       <p:sp>
         <p:nvSpPr>
-          <p:cNvPr id="11" name="Text 9"/>
-          <p:cNvSpPr/>
-          <p:nvPr/>
-        </p:nvSpPr>
-        <p:spPr>
-          <a:xfrm>
-            <a:off x="1417320" y="3986784"/>
-            <a:ext cx="4297680" cy="237744"/>
-          </a:xfrm>
-          <a:prstGeom prst="rect">
-            <a:avLst/>
-          </a:prstGeom>
-          <a:noFill/>
-          <a:ln/>
-        </p:spPr>
-        <p:txBody>
-          <a:bodyPr wrap="square" lIns="0" tIns="0" rIns="0" bIns="0" rtlCol="0" anchor="ctr"/>
-          <a:lstStyle/>
-          <a:p>
-            <a:pPr indent="0" marL="0">
-              <a:buNone/>
-            </a:pPr>
-            <a:r>
-              <a:rPr lang="en-US" sz="1050" i="1" dirty="0">
-                <a:solidFill>
-                  <a:srgbClr val="94A3B8"/>
-                </a:solidFill>
-                <a:latin typeface="Calibri" pitchFamily="34" charset="0"/>
-                <a:ea typeface="Calibri" pitchFamily="34" charset="-122"/>
-                <a:cs typeface="Calibri" pitchFamily="34" charset="-120"/>
-              </a:rPr>
-              <a:t>Rapoport &amp; Docquier, 2006</a:t>
-            </a:r>
-            <a:endParaRPr lang="en-US" sz="1050" dirty="0"/>
-          </a:p>
-        </p:txBody>
-      </p:sp>
-      <p:sp>
-        <p:nvSpPr>
           <p:cNvPr id="12" name="Shape 10"/>
           <p:cNvSpPr/>
           <p:nvPr/>
         </p:nvSpPr>
         <p:spPr>
           <a:xfrm>
-            <a:off x="960120" y="4608576"/>
+            <a:off x="960120" y="4864608"/>
             <a:ext cx="274320" cy="274320"/>
           </a:xfrm>
           <a:prstGeom prst="ellipse">
@@ -18292,7 +18292,7 @@
         </p:nvSpPr>
         <p:spPr>
           <a:xfrm>
-            <a:off x="1417320" y="4535424"/>
+            <a:off x="1417320" y="4773168"/>
             <a:ext cx="4297680" cy="292608"/>
           </a:xfrm>
           <a:prstGeom prst="rect">
@@ -18331,8 +18331,8 @@
         </p:nvSpPr>
         <p:spPr>
           <a:xfrm>
-            <a:off x="1417320" y="4846320"/>
-            <a:ext cx="4297680" cy="329184"/>
+            <a:off x="1417320" y="5084064"/>
+            <a:ext cx="4297680" cy="420624"/>
           </a:xfrm>
           <a:prstGeom prst="rect">
             <a:avLst/>
@@ -18351,7 +18351,7 @@
               <a:buNone/>
             </a:pPr>
             <a:r>
-              <a:rPr lang="en-US" sz="1200" dirty="0">
+              <a:rPr lang="en-US" sz="1350" dirty="0">
                 <a:solidFill>
                   <a:srgbClr val="475569"/>
                 </a:solidFill>
@@ -18361,46 +18361,46 @@
               </a:rPr>
               <a:t>Les transferts assurent le ménage contre les chocs.</a:t>
             </a:r>
+            <a:endParaRPr lang="en-US" sz="1350" dirty="0"/>
+          </a:p>
+        </p:txBody>
+      </p:sp>
+      <p:sp>
+        <p:nvSpPr>
+          <p:cNvPr id="15" name="Text 13"/>
+          <p:cNvSpPr/>
+          <p:nvPr/>
+        </p:nvSpPr>
+        <p:spPr>
+          <a:xfrm>
+            <a:off x="1417320" y="5541264"/>
+            <a:ext cx="4297680" cy="274320"/>
+          </a:xfrm>
+          <a:prstGeom prst="rect">
+            <a:avLst/>
+          </a:prstGeom>
+          <a:noFill/>
+          <a:ln/>
+        </p:spPr>
+        <p:txBody>
+          <a:bodyPr wrap="square" lIns="0" tIns="0" rIns="0" bIns="0" rtlCol="0" anchor="ctr"/>
+          <a:lstStyle/>
+          <a:p>
+            <a:pPr indent="0" marL="0">
+              <a:buNone/>
+            </a:pPr>
+            <a:r>
+              <a:rPr lang="en-US" sz="1200" i="1" dirty="0">
+                <a:solidFill>
+                  <a:srgbClr val="94A3B8"/>
+                </a:solidFill>
+                <a:latin typeface="Calibri" pitchFamily="34" charset="0"/>
+                <a:ea typeface="Calibri" pitchFamily="34" charset="-122"/>
+                <a:cs typeface="Calibri" pitchFamily="34" charset="-120"/>
+              </a:rPr>
+              <a:t>Stark &amp; Bloom, 1985</a:t>
+            </a:r>
             <a:endParaRPr lang="en-US" sz="1200" dirty="0"/>
-          </a:p>
-        </p:txBody>
-      </p:sp>
-      <p:sp>
-        <p:nvSpPr>
-          <p:cNvPr id="15" name="Text 13"/>
-          <p:cNvSpPr/>
-          <p:nvPr/>
-        </p:nvSpPr>
-        <p:spPr>
-          <a:xfrm>
-            <a:off x="1417320" y="5193792"/>
-            <a:ext cx="4297680" cy="237744"/>
-          </a:xfrm>
-          <a:prstGeom prst="rect">
-            <a:avLst/>
-          </a:prstGeom>
-          <a:noFill/>
-          <a:ln/>
-        </p:spPr>
-        <p:txBody>
-          <a:bodyPr wrap="square" lIns="0" tIns="0" rIns="0" bIns="0" rtlCol="0" anchor="ctr"/>
-          <a:lstStyle/>
-          <a:p>
-            <a:pPr indent="0" marL="0">
-              <a:buNone/>
-            </a:pPr>
-            <a:r>
-              <a:rPr lang="en-US" sz="1050" i="1" dirty="0">
-                <a:solidFill>
-                  <a:srgbClr val="94A3B8"/>
-                </a:solidFill>
-                <a:latin typeface="Calibri" pitchFamily="34" charset="0"/>
-                <a:ea typeface="Calibri" pitchFamily="34" charset="-122"/>
-                <a:cs typeface="Calibri" pitchFamily="34" charset="-120"/>
-              </a:rPr>
-              <a:t>Stark &amp; Bloom, 1985</a:t>
-            </a:r>
-            <a:endParaRPr lang="en-US" sz="1050" dirty="0"/>
           </a:p>
         </p:txBody>
       </p:sp>
@@ -18491,7 +18491,7 @@
         <p:spPr>
           <a:xfrm>
             <a:off x="7635240" y="2432304"/>
-            <a:ext cx="3657600" cy="329184"/>
+            <a:ext cx="3657600" cy="420624"/>
           </a:xfrm>
           <a:prstGeom prst="rect">
             <a:avLst/>
@@ -18510,7 +18510,7 @@
               <a:buNone/>
             </a:pPr>
             <a:r>
-              <a:rPr lang="en-US" sz="1200" dirty="0">
+              <a:rPr lang="en-US" sz="1350" dirty="0">
                 <a:solidFill>
                   <a:srgbClr val="475569"/>
                 </a:solidFill>
@@ -18520,20 +18520,59 @@
               </a:rPr>
               <a:t>Recul modeste, atténué par les coûts.</a:t>
             </a:r>
+            <a:endParaRPr lang="en-US" sz="1350" dirty="0"/>
+          </a:p>
+        </p:txBody>
+      </p:sp>
+      <p:sp>
+        <p:nvSpPr>
+          <p:cNvPr id="19" name="Text 17"/>
+          <p:cNvSpPr/>
+          <p:nvPr/>
+        </p:nvSpPr>
+        <p:spPr>
+          <a:xfrm>
+            <a:off x="7635240" y="2889504"/>
+            <a:ext cx="3657600" cy="274320"/>
+          </a:xfrm>
+          <a:prstGeom prst="rect">
+            <a:avLst/>
+          </a:prstGeom>
+          <a:noFill/>
+          <a:ln/>
+        </p:spPr>
+        <p:txBody>
+          <a:bodyPr wrap="square" lIns="0" tIns="0" rIns="0" bIns="0" rtlCol="0" anchor="ctr"/>
+          <a:lstStyle/>
+          <a:p>
+            <a:pPr indent="0" marL="0">
+              <a:buNone/>
+            </a:pPr>
+            <a:r>
+              <a:rPr lang="en-US" sz="1200" i="1" dirty="0">
+                <a:solidFill>
+                  <a:srgbClr val="94A3B8"/>
+                </a:solidFill>
+                <a:latin typeface="Calibri" pitchFamily="34" charset="0"/>
+                <a:ea typeface="Calibri" pitchFamily="34" charset="-122"/>
+                <a:cs typeface="Calibri" pitchFamily="34" charset="-120"/>
+              </a:rPr>
+              <a:t>Azam &amp; Gubert, 2006 ; Combes &amp; Ebeke, 2011</a:t>
+            </a:r>
             <a:endParaRPr lang="en-US" sz="1200" dirty="0"/>
           </a:p>
         </p:txBody>
       </p:sp>
       <p:sp>
         <p:nvSpPr>
-          <p:cNvPr id="19" name="Text 17"/>
-          <p:cNvSpPr/>
-          <p:nvPr/>
-        </p:nvSpPr>
-        <p:spPr>
-          <a:xfrm>
-            <a:off x="7635240" y="2779776"/>
-            <a:ext cx="3657600" cy="237744"/>
+          <p:cNvPr id="20" name="Text 18"/>
+          <p:cNvSpPr/>
+          <p:nvPr/>
+        </p:nvSpPr>
+        <p:spPr>
+          <a:xfrm>
+            <a:off x="7635240" y="3447288"/>
+            <a:ext cx="3657600" cy="292608"/>
           </a:xfrm>
           <a:prstGeom prst="rect">
             <a:avLst/>
@@ -18549,45 +18588,6 @@
               <a:buNone/>
             </a:pPr>
             <a:r>
-              <a:rPr lang="en-US" sz="1050" i="1" dirty="0">
-                <a:solidFill>
-                  <a:srgbClr val="94A3B8"/>
-                </a:solidFill>
-                <a:latin typeface="Calibri" pitchFamily="34" charset="0"/>
-                <a:ea typeface="Calibri" pitchFamily="34" charset="-122"/>
-                <a:cs typeface="Calibri" pitchFamily="34" charset="-120"/>
-              </a:rPr>
-              <a:t>Azam &amp; Gubert, 2006 ; Combes &amp; Ebeke, 2011</a:t>
-            </a:r>
-            <a:endParaRPr lang="en-US" sz="1050" dirty="0"/>
-          </a:p>
-        </p:txBody>
-      </p:sp>
-      <p:sp>
-        <p:nvSpPr>
-          <p:cNvPr id="20" name="Text 18"/>
-          <p:cNvSpPr/>
-          <p:nvPr/>
-        </p:nvSpPr>
-        <p:spPr>
-          <a:xfrm>
-            <a:off x="7635240" y="3328416"/>
-            <a:ext cx="3657600" cy="292608"/>
-          </a:xfrm>
-          <a:prstGeom prst="rect">
-            <a:avLst/>
-          </a:prstGeom>
-          <a:noFill/>
-          <a:ln/>
-        </p:spPr>
-        <p:txBody>
-          <a:bodyPr wrap="square" lIns="0" tIns="0" rIns="0" bIns="0" rtlCol="0" anchor="ctr"/>
-          <a:lstStyle/>
-          <a:p>
-            <a:pPr indent="0" marL="0">
-              <a:buNone/>
-            </a:pPr>
-            <a:r>
               <a:rPr lang="en-US" sz="1400" b="1" dirty="0">
                 <a:solidFill>
                   <a:srgbClr val="0F172A"/>
@@ -18610,8 +18610,8 @@
         </p:nvSpPr>
         <p:spPr>
           <a:xfrm>
-            <a:off x="7635240" y="3639312"/>
-            <a:ext cx="3657600" cy="329184"/>
+            <a:off x="7635240" y="3758184"/>
+            <a:ext cx="3657600" cy="420624"/>
           </a:xfrm>
           <a:prstGeom prst="rect">
             <a:avLst/>
@@ -18630,7 +18630,7 @@
               <a:buNone/>
             </a:pPr>
             <a:r>
-              <a:rPr lang="en-US" sz="1200" dirty="0">
+              <a:rPr lang="en-US" sz="1350" dirty="0">
                 <a:solidFill>
                   <a:srgbClr val="475569"/>
                 </a:solidFill>
@@ -18640,20 +18640,59 @@
               </a:rPr>
               <a:t>Scolarisation et capital humain en hausse.</a:t>
             </a:r>
+            <a:endParaRPr lang="en-US" sz="1350" dirty="0"/>
+          </a:p>
+        </p:txBody>
+      </p:sp>
+      <p:sp>
+        <p:nvSpPr>
+          <p:cNvPr id="22" name="Text 20"/>
+          <p:cNvSpPr/>
+          <p:nvPr/>
+        </p:nvSpPr>
+        <p:spPr>
+          <a:xfrm>
+            <a:off x="7635240" y="4215384"/>
+            <a:ext cx="3657600" cy="274320"/>
+          </a:xfrm>
+          <a:prstGeom prst="rect">
+            <a:avLst/>
+          </a:prstGeom>
+          <a:noFill/>
+          <a:ln/>
+        </p:spPr>
+        <p:txBody>
+          <a:bodyPr wrap="square" lIns="0" tIns="0" rIns="0" bIns="0" rtlCol="0" anchor="ctr"/>
+          <a:lstStyle/>
+          <a:p>
+            <a:pPr indent="0" marL="0">
+              <a:buNone/>
+            </a:pPr>
+            <a:r>
+              <a:rPr lang="en-US" sz="1200" i="1" dirty="0">
+                <a:solidFill>
+                  <a:srgbClr val="94A3B8"/>
+                </a:solidFill>
+                <a:latin typeface="Calibri" pitchFamily="34" charset="0"/>
+                <a:ea typeface="Calibri" pitchFamily="34" charset="-122"/>
+                <a:cs typeface="Calibri" pitchFamily="34" charset="-120"/>
+              </a:rPr>
+              <a:t>Cox Edwards &amp; Ureta, 2003 ; Yang, 2008</a:t>
+            </a:r>
             <a:endParaRPr lang="en-US" sz="1200" dirty="0"/>
           </a:p>
         </p:txBody>
       </p:sp>
       <p:sp>
         <p:nvSpPr>
-          <p:cNvPr id="22" name="Text 20"/>
-          <p:cNvSpPr/>
-          <p:nvPr/>
-        </p:nvSpPr>
-        <p:spPr>
-          <a:xfrm>
-            <a:off x="7635240" y="3986784"/>
-            <a:ext cx="3657600" cy="237744"/>
+          <p:cNvPr id="23" name="Text 21"/>
+          <p:cNvSpPr/>
+          <p:nvPr/>
+        </p:nvSpPr>
+        <p:spPr>
+          <a:xfrm>
+            <a:off x="7635240" y="4773168"/>
+            <a:ext cx="3657600" cy="292608"/>
           </a:xfrm>
           <a:prstGeom prst="rect">
             <a:avLst/>
@@ -18669,45 +18708,6 @@
               <a:buNone/>
             </a:pPr>
             <a:r>
-              <a:rPr lang="en-US" sz="1050" i="1" dirty="0">
-                <a:solidFill>
-                  <a:srgbClr val="94A3B8"/>
-                </a:solidFill>
-                <a:latin typeface="Calibri" pitchFamily="34" charset="0"/>
-                <a:ea typeface="Calibri" pitchFamily="34" charset="-122"/>
-                <a:cs typeface="Calibri" pitchFamily="34" charset="-120"/>
-              </a:rPr>
-              <a:t>Cox Edwards &amp; Ureta, 2003 ; Yang, 2008</a:t>
-            </a:r>
-            <a:endParaRPr lang="en-US" sz="1050" dirty="0"/>
-          </a:p>
-        </p:txBody>
-      </p:sp>
-      <p:sp>
-        <p:nvSpPr>
-          <p:cNvPr id="23" name="Text 21"/>
-          <p:cNvSpPr/>
-          <p:nvPr/>
-        </p:nvSpPr>
-        <p:spPr>
-          <a:xfrm>
-            <a:off x="7635240" y="4535424"/>
-            <a:ext cx="3657600" cy="292608"/>
-          </a:xfrm>
-          <a:prstGeom prst="rect">
-            <a:avLst/>
-          </a:prstGeom>
-          <a:noFill/>
-          <a:ln/>
-        </p:spPr>
-        <p:txBody>
-          <a:bodyPr wrap="square" lIns="0" tIns="0" rIns="0" bIns="0" rtlCol="0" anchor="ctr"/>
-          <a:lstStyle/>
-          <a:p>
-            <a:pPr indent="0" marL="0">
-              <a:buNone/>
-            </a:pPr>
-            <a:r>
               <a:rPr lang="en-US" sz="1400" b="1" dirty="0">
                 <a:solidFill>
                   <a:srgbClr val="0F172A"/>
@@ -18730,8 +18730,8 @@
         </p:nvSpPr>
         <p:spPr>
           <a:xfrm>
-            <a:off x="7635240" y="4846320"/>
-            <a:ext cx="3657600" cy="329184"/>
+            <a:off x="7635240" y="5084064"/>
+            <a:ext cx="3657600" cy="420624"/>
           </a:xfrm>
           <a:prstGeom prst="rect">
             <a:avLst/>
@@ -18750,7 +18750,7 @@
               <a:buNone/>
             </a:pPr>
             <a:r>
-              <a:rPr lang="en-US" sz="1200" dirty="0">
+              <a:rPr lang="en-US" sz="1350" dirty="0">
                 <a:solidFill>
                   <a:srgbClr val="475569"/>
                 </a:solidFill>
@@ -18760,46 +18760,46 @@
               </a:rPr>
               <a:t>Effets fragiles, liés au maintien du lien.</a:t>
             </a:r>
+            <a:endParaRPr lang="en-US" sz="1350" dirty="0"/>
+          </a:p>
+        </p:txBody>
+      </p:sp>
+      <p:sp>
+        <p:nvSpPr>
+          <p:cNvPr id="25" name="Text 23"/>
+          <p:cNvSpPr/>
+          <p:nvPr/>
+        </p:nvSpPr>
+        <p:spPr>
+          <a:xfrm>
+            <a:off x="7635240" y="5541264"/>
+            <a:ext cx="3657600" cy="274320"/>
+          </a:xfrm>
+          <a:prstGeom prst="rect">
+            <a:avLst/>
+          </a:prstGeom>
+          <a:noFill/>
+          <a:ln/>
+        </p:spPr>
+        <p:txBody>
+          <a:bodyPr wrap="square" lIns="0" tIns="0" rIns="0" bIns="0" rtlCol="0" anchor="ctr"/>
+          <a:lstStyle/>
+          <a:p>
+            <a:pPr indent="0" marL="0">
+              <a:buNone/>
+            </a:pPr>
+            <a:r>
+              <a:rPr lang="en-US" sz="1200" i="1" dirty="0">
+                <a:solidFill>
+                  <a:srgbClr val="94A3B8"/>
+                </a:solidFill>
+                <a:latin typeface="Calibri" pitchFamily="34" charset="0"/>
+                <a:ea typeface="Calibri" pitchFamily="34" charset="-122"/>
+                <a:cs typeface="Calibri" pitchFamily="34" charset="-120"/>
+              </a:rPr>
+              <a:t>Davis &amp; Brazil, 2016</a:t>
+            </a:r>
             <a:endParaRPr lang="en-US" sz="1200" dirty="0"/>
-          </a:p>
-        </p:txBody>
-      </p:sp>
-      <p:sp>
-        <p:nvSpPr>
-          <p:cNvPr id="25" name="Text 23"/>
-          <p:cNvSpPr/>
-          <p:nvPr/>
-        </p:nvSpPr>
-        <p:spPr>
-          <a:xfrm>
-            <a:off x="7635240" y="5193792"/>
-            <a:ext cx="3657600" cy="237744"/>
-          </a:xfrm>
-          <a:prstGeom prst="rect">
-            <a:avLst/>
-          </a:prstGeom>
-          <a:noFill/>
-          <a:ln/>
-        </p:spPr>
-        <p:txBody>
-          <a:bodyPr wrap="square" lIns="0" tIns="0" rIns="0" bIns="0" rtlCol="0" anchor="ctr"/>
-          <a:lstStyle/>
-          <a:p>
-            <a:pPr indent="0" marL="0">
-              <a:buNone/>
-            </a:pPr>
-            <a:r>
-              <a:rPr lang="en-US" sz="1050" i="1" dirty="0">
-                <a:solidFill>
-                  <a:srgbClr val="94A3B8"/>
-                </a:solidFill>
-                <a:latin typeface="Calibri" pitchFamily="34" charset="0"/>
-                <a:ea typeface="Calibri" pitchFamily="34" charset="-122"/>
-                <a:cs typeface="Calibri" pitchFamily="34" charset="-120"/>
-              </a:rPr>
-              <a:t>Davis &amp; Brazil, 2016</a:t>
-            </a:r>
-            <a:endParaRPr lang="en-US" sz="1050" dirty="0"/>
           </a:p>
         </p:txBody>
       </p:sp>
@@ -18867,7 +18867,7 @@
         </p:nvSpPr>
         <p:spPr>
           <a:xfrm>
-            <a:off x="6583680" y="3383280"/>
+            <a:off x="6583680" y="3502152"/>
             <a:ext cx="749808" cy="749808"/>
           </a:xfrm>
           <a:prstGeom prst="ellipse">
@@ -18907,7 +18907,7 @@
         </p:blipFill>
         <p:spPr>
           <a:xfrm>
-            <a:off x="6786128" y="3585728"/>
+            <a:off x="6786128" y="3704600"/>
             <a:ext cx="344912" cy="344912"/>
           </a:xfrm>
           <a:prstGeom prst="rect">
@@ -18923,7 +18923,7 @@
         </p:nvSpPr>
         <p:spPr>
           <a:xfrm>
-            <a:off x="6583680" y="4590288"/>
+            <a:off x="6583680" y="4828032"/>
             <a:ext cx="749808" cy="749808"/>
           </a:xfrm>
           <a:prstGeom prst="ellipse">
@@ -18963,7 +18963,7 @@
         </p:blipFill>
         <p:spPr>
           <a:xfrm>
-            <a:off x="6786128" y="4792736"/>
+            <a:off x="6786128" y="5030480"/>
             <a:ext cx="344912" cy="344912"/>
           </a:xfrm>
           <a:prstGeom prst="rect">
@@ -18996,7 +18996,7 @@
               <a:buNone/>
             </a:pPr>
             <a:r>
-              <a:rPr lang="en-US" sz="950" dirty="0">
+              <a:rPr lang="en-US" sz="1000" dirty="0">
                 <a:solidFill>
                   <a:srgbClr val="94A3B8"/>
                 </a:solidFill>
@@ -19006,7 +19006,7 @@
               </a:rPr>
               <a:t>6</a:t>
             </a:r>
-            <a:endParaRPr lang="en-US" sz="950" dirty="0"/>
+            <a:endParaRPr lang="en-US" sz="1000" dirty="0"/>
           </a:p>
         </p:txBody>
       </p:sp>
@@ -19091,7 +19091,7 @@
               <a:buNone/>
             </a:pPr>
             <a:r>
-              <a:rPr lang="en-US" sz="2700" b="1" dirty="0">
+              <a:rPr lang="en-US" sz="3000" b="1" dirty="0">
                 <a:solidFill>
                   <a:srgbClr val="312E81"/>
                 </a:solidFill>
@@ -19101,7 +19101,7 @@
               </a:rPr>
               <a:t>Mesurer la pauvreté de l'enfant, l'approche MODA</a:t>
             </a:r>
-            <a:endParaRPr lang="en-US" sz="2700" dirty="0"/>
+            <a:endParaRPr lang="en-US" sz="3000" dirty="0"/>
           </a:p>
         </p:txBody>
       </p:sp>
@@ -19133,7 +19133,7 @@
               <a:buNone/>
             </a:pPr>
             <a:r>
-              <a:rPr lang="en-US" sz="1300" dirty="0">
+              <a:rPr lang="en-US" sz="1400" dirty="0">
                 <a:solidFill>
                   <a:srgbClr val="475569"/>
                 </a:solidFill>
@@ -19143,7 +19143,7 @@
               </a:rPr>
               <a:t>Sept dimensions, 14 indicateurs, trois groupes d'âge. Un enfant est pauvre s'il est privé dans au moins quatre dimensions.</a:t>
             </a:r>
-            <a:endParaRPr lang="en-US" sz="1300" dirty="0"/>
+            <a:endParaRPr lang="en-US" sz="1400" dirty="0"/>
           </a:p>
         </p:txBody>
       </p:sp>
@@ -19231,7 +19231,7 @@
               <a:buNone/>
             </a:pPr>
             <a:r>
-              <a:rPr lang="en-US" sz="1150" b="1" dirty="0">
+              <a:rPr lang="en-US" sz="1300" b="1" dirty="0">
                 <a:solidFill>
                   <a:srgbClr val="0F172A"/>
                 </a:solidFill>
@@ -19241,7 +19241,7 @@
               </a:rPr>
               <a:t>Assainissement</a:t>
             </a:r>
-            <a:endParaRPr lang="en-US" sz="1150" dirty="0"/>
+            <a:endParaRPr lang="en-US" sz="1300" dirty="0"/>
           </a:p>
         </p:txBody>
       </p:sp>
@@ -19329,7 +19329,7 @@
               <a:buNone/>
             </a:pPr>
             <a:r>
-              <a:rPr lang="en-US" sz="1150" b="1" dirty="0">
+              <a:rPr lang="en-US" sz="1300" b="1" dirty="0">
                 <a:solidFill>
                   <a:srgbClr val="0F172A"/>
                 </a:solidFill>
@@ -19339,7 +19339,7 @@
               </a:rPr>
               <a:t>Eau</a:t>
             </a:r>
-            <a:endParaRPr lang="en-US" sz="1150" dirty="0"/>
+            <a:endParaRPr lang="en-US" sz="1300" dirty="0"/>
           </a:p>
         </p:txBody>
       </p:sp>
@@ -19427,7 +19427,7 @@
               <a:buNone/>
             </a:pPr>
             <a:r>
-              <a:rPr lang="en-US" sz="1150" b="1" dirty="0">
+              <a:rPr lang="en-US" sz="1300" b="1" dirty="0">
                 <a:solidFill>
                   <a:srgbClr val="0F172A"/>
                 </a:solidFill>
@@ -19437,7 +19437,7 @@
               </a:rPr>
               <a:t>Logement</a:t>
             </a:r>
-            <a:endParaRPr lang="en-US" sz="1150" dirty="0"/>
+            <a:endParaRPr lang="en-US" sz="1300" dirty="0"/>
           </a:p>
         </p:txBody>
       </p:sp>
@@ -19525,7 +19525,7 @@
               <a:buNone/>
             </a:pPr>
             <a:r>
-              <a:rPr lang="en-US" sz="1150" b="1" dirty="0">
+              <a:rPr lang="en-US" sz="1300" b="1" dirty="0">
                 <a:solidFill>
                   <a:srgbClr val="0F172A"/>
                 </a:solidFill>
@@ -19535,7 +19535,7 @@
               </a:rPr>
               <a:t>Nutrition</a:t>
             </a:r>
-            <a:endParaRPr lang="en-US" sz="1150" dirty="0"/>
+            <a:endParaRPr lang="en-US" sz="1300" dirty="0"/>
           </a:p>
         </p:txBody>
       </p:sp>
@@ -19623,7 +19623,7 @@
               <a:buNone/>
             </a:pPr>
             <a:r>
-              <a:rPr lang="en-US" sz="1150" b="1" dirty="0">
+              <a:rPr lang="en-US" sz="1300" b="1" dirty="0">
                 <a:solidFill>
                   <a:srgbClr val="0F172A"/>
                 </a:solidFill>
@@ -19633,7 +19633,7 @@
               </a:rPr>
               <a:t>Santé</a:t>
             </a:r>
-            <a:endParaRPr lang="en-US" sz="1150" dirty="0"/>
+            <a:endParaRPr lang="en-US" sz="1300" dirty="0"/>
           </a:p>
         </p:txBody>
       </p:sp>
@@ -19721,7 +19721,7 @@
               <a:buNone/>
             </a:pPr>
             <a:r>
-              <a:rPr lang="en-US" sz="1150" b="1" dirty="0">
+              <a:rPr lang="en-US" sz="1300" b="1" dirty="0">
                 <a:solidFill>
                   <a:srgbClr val="0F172A"/>
                 </a:solidFill>
@@ -19731,7 +19731,7 @@
               </a:rPr>
               <a:t>Protection</a:t>
             </a:r>
-            <a:endParaRPr lang="en-US" sz="1150" dirty="0"/>
+            <a:endParaRPr lang="en-US" sz="1300" dirty="0"/>
           </a:p>
         </p:txBody>
       </p:sp>
@@ -19819,7 +19819,7 @@
               <a:buNone/>
             </a:pPr>
             <a:r>
-              <a:rPr lang="en-US" sz="1150" b="1" dirty="0">
+              <a:rPr lang="en-US" sz="1300" b="1" dirty="0">
                 <a:solidFill>
                   <a:srgbClr val="0F172A"/>
                 </a:solidFill>
@@ -19829,7 +19829,7 @@
               </a:rPr>
               <a:t>Éducation</a:t>
             </a:r>
-            <a:endParaRPr lang="en-US" sz="1150" dirty="0"/>
+            <a:endParaRPr lang="en-US" sz="1300" dirty="0"/>
           </a:p>
         </p:txBody>
       </p:sp>
@@ -19900,7 +19900,7 @@
               <a:buNone/>
             </a:pPr>
             <a:r>
-              <a:rPr lang="en-US" sz="1200" dirty="0">
+              <a:rPr lang="en-US" sz="1350" dirty="0">
                 <a:solidFill>
                   <a:srgbClr val="475569"/>
                 </a:solidFill>
@@ -19910,7 +19910,7 @@
               </a:rPr>
               <a:t>Intra-dimension, l'enfant est privé s'il l'est dans au moins un indicateur de la dimension.</a:t>
             </a:r>
-            <a:endParaRPr lang="en-US" sz="1200" dirty="0"/>
+            <a:endParaRPr lang="en-US" sz="1350" dirty="0"/>
           </a:p>
           <a:p>
             <a:pPr indent="0" marL="0">
@@ -19920,7 +19920,7 @@
               <a:buNone/>
             </a:pPr>
             <a:r>
-              <a:rPr lang="en-US" sz="1200" dirty="0">
+              <a:rPr lang="en-US" sz="1350" dirty="0">
                 <a:solidFill>
                   <a:srgbClr val="475569"/>
                 </a:solidFill>
@@ -19930,7 +19930,7 @@
               </a:rPr>
               <a:t>Inter-dimensions, il est pauvre s'il cumule au moins quatre des sept dimensions.</a:t>
             </a:r>
-            <a:endParaRPr lang="en-US" sz="1200" dirty="0"/>
+            <a:endParaRPr lang="en-US" sz="1350" dirty="0"/>
           </a:p>
         </p:txBody>
       </p:sp>
@@ -19998,7 +19998,7 @@
               <a:buNone/>
             </a:pPr>
             <a:r>
-              <a:rPr lang="en-US" sz="1250" b="1" dirty="0">
+              <a:rPr lang="en-US" sz="1400" b="1" dirty="0">
                 <a:solidFill>
                   <a:srgbClr val="0F172A"/>
                 </a:solidFill>
@@ -20008,7 +20008,7 @@
               </a:rPr>
               <a:t>0 à 4 ans</a:t>
             </a:r>
-            <a:endParaRPr lang="en-US" sz="1250" dirty="0"/>
+            <a:endParaRPr lang="en-US" sz="1400" dirty="0"/>
           </a:p>
         </p:txBody>
       </p:sp>
@@ -20037,7 +20037,7 @@
               <a:buNone/>
             </a:pPr>
             <a:r>
-              <a:rPr lang="en-US" sz="1150" dirty="0">
+              <a:rPr lang="en-US" sz="1300" dirty="0">
                 <a:solidFill>
                   <a:srgbClr val="475569"/>
                 </a:solidFill>
@@ -20047,7 +20047,7 @@
               </a:rPr>
               <a:t>11 indicateurs</a:t>
             </a:r>
-            <a:endParaRPr lang="en-US" sz="1150" dirty="0"/>
+            <a:endParaRPr lang="en-US" sz="1300" dirty="0"/>
           </a:p>
         </p:txBody>
       </p:sp>
@@ -20076,7 +20076,7 @@
               <a:buNone/>
             </a:pPr>
             <a:r>
-              <a:rPr lang="en-US" sz="1250" b="1" dirty="0">
+              <a:rPr lang="en-US" sz="1400" b="1" dirty="0">
                 <a:solidFill>
                   <a:srgbClr val="0F172A"/>
                 </a:solidFill>
@@ -20086,7 +20086,7 @@
               </a:rPr>
               <a:t>5 à 14 ans</a:t>
             </a:r>
-            <a:endParaRPr lang="en-US" sz="1250" dirty="0"/>
+            <a:endParaRPr lang="en-US" sz="1400" dirty="0"/>
           </a:p>
         </p:txBody>
       </p:sp>
@@ -20115,7 +20115,7 @@
               <a:buNone/>
             </a:pPr>
             <a:r>
-              <a:rPr lang="en-US" sz="1150" dirty="0">
+              <a:rPr lang="en-US" sz="1300" dirty="0">
                 <a:solidFill>
                   <a:srgbClr val="475569"/>
                 </a:solidFill>
@@ -20125,7 +20125,7 @@
               </a:rPr>
               <a:t>13 indicateurs</a:t>
             </a:r>
-            <a:endParaRPr lang="en-US" sz="1150" dirty="0"/>
+            <a:endParaRPr lang="en-US" sz="1300" dirty="0"/>
           </a:p>
         </p:txBody>
       </p:sp>
@@ -20154,7 +20154,7 @@
               <a:buNone/>
             </a:pPr>
             <a:r>
-              <a:rPr lang="en-US" sz="1250" b="1" dirty="0">
+              <a:rPr lang="en-US" sz="1400" b="1" dirty="0">
                 <a:solidFill>
                   <a:srgbClr val="0F172A"/>
                 </a:solidFill>
@@ -20164,7 +20164,7 @@
               </a:rPr>
               <a:t>15 à 17 ans</a:t>
             </a:r>
-            <a:endParaRPr lang="en-US" sz="1250" dirty="0"/>
+            <a:endParaRPr lang="en-US" sz="1400" dirty="0"/>
           </a:p>
         </p:txBody>
       </p:sp>
@@ -20193,7 +20193,7 @@
               <a:buNone/>
             </a:pPr>
             <a:r>
-              <a:rPr lang="en-US" sz="1150" dirty="0">
+              <a:rPr lang="en-US" sz="1300" dirty="0">
                 <a:solidFill>
                   <a:srgbClr val="475569"/>
                 </a:solidFill>
@@ -20203,7 +20203,7 @@
               </a:rPr>
               <a:t>11 indicateurs</a:t>
             </a:r>
-            <a:endParaRPr lang="en-US" sz="1150" dirty="0"/>
+            <a:endParaRPr lang="en-US" sz="1300" dirty="0"/>
           </a:p>
         </p:txBody>
       </p:sp>
@@ -20235,7 +20235,7 @@
               <a:buNone/>
             </a:pPr>
             <a:r>
-              <a:rPr lang="en-US" sz="1100" dirty="0">
+              <a:rPr lang="en-US" sz="1300" dirty="0">
                 <a:solidFill>
                   <a:srgbClr val="475569"/>
                 </a:solidFill>
@@ -20245,7 +20245,7 @@
               </a:rPr>
               <a:t>L'illettrisme remplace chez les adolescents les indicateurs propres aux 0 à 4 ans.</a:t>
             </a:r>
-            <a:endParaRPr lang="en-US" sz="1100" dirty="0"/>
+            <a:endParaRPr lang="en-US" sz="1300" dirty="0"/>
           </a:p>
         </p:txBody>
       </p:sp>
@@ -20274,7 +20274,7 @@
               <a:buNone/>
             </a:pPr>
             <a:r>
-              <a:rPr lang="en-US" sz="900" dirty="0">
+              <a:rPr lang="en-US" sz="1000" dirty="0">
                 <a:solidFill>
                   <a:srgbClr val="94A3B8"/>
                 </a:solidFill>
@@ -20284,7 +20284,7 @@
               </a:rPr>
               <a:t>Matrice complète des indicateurs et des seuils en annexe du mémoire.</a:t>
             </a:r>
-            <a:endParaRPr lang="en-US" sz="900" dirty="0"/>
+            <a:endParaRPr lang="en-US" sz="1000" dirty="0"/>
           </a:p>
         </p:txBody>
       </p:sp>
@@ -20313,7 +20313,7 @@
               <a:buNone/>
             </a:pPr>
             <a:r>
-              <a:rPr lang="en-US" sz="950" dirty="0">
+              <a:rPr lang="en-US" sz="1000" dirty="0">
                 <a:solidFill>
                   <a:srgbClr val="94A3B8"/>
                 </a:solidFill>
@@ -20323,7 +20323,7 @@
               </a:rPr>
               <a:t>7</a:t>
             </a:r>
-            <a:endParaRPr lang="en-US" sz="950" dirty="0"/>
+            <a:endParaRPr lang="en-US" sz="1000" dirty="0"/>
           </a:p>
         </p:txBody>
       </p:sp>
@@ -20408,7 +20408,7 @@
               <a:buNone/>
             </a:pPr>
             <a:r>
-              <a:rPr lang="en-US" sz="2700" b="1" dirty="0">
+              <a:rPr lang="en-US" sz="3000" b="1" dirty="0">
                 <a:solidFill>
                   <a:srgbClr val="312E81"/>
                 </a:solidFill>
@@ -20418,7 +20418,7 @@
               </a:rPr>
               <a:t>Données et définition du traitement</a:t>
             </a:r>
-            <a:endParaRPr lang="en-US" sz="2700" dirty="0"/>
+            <a:endParaRPr lang="en-US" sz="3000" dirty="0"/>
           </a:p>
         </p:txBody>
       </p:sp>
@@ -20450,7 +20450,7 @@
               <a:buNone/>
             </a:pPr>
             <a:r>
-              <a:rPr lang="en-US" sz="1300" dirty="0">
+              <a:rPr lang="en-US" sz="1400" dirty="0">
                 <a:solidFill>
                   <a:srgbClr val="475569"/>
                 </a:solidFill>
@@ -20460,7 +20460,7 @@
               </a:rPr>
               <a:t>Deux vagues de l'EHCVM, un panel d'enfants suivis individuellement d'une vague à l'autre.</a:t>
             </a:r>
-            <a:endParaRPr lang="en-US" sz="1300" dirty="0"/>
+            <a:endParaRPr lang="en-US" sz="1400" dirty="0"/>
           </a:p>
         </p:txBody>
       </p:sp>
@@ -20512,7 +20512,7 @@
         <p:spPr>
           <a:xfrm>
             <a:off x="658368" y="2445512"/>
-            <a:ext cx="2606040" cy="384048"/>
+            <a:ext cx="2606040" cy="566928"/>
           </a:xfrm>
           <a:prstGeom prst="rect">
             <a:avLst/>
@@ -20531,7 +20531,7 @@
               <a:buNone/>
             </a:pPr>
             <a:r>
-              <a:rPr lang="en-US" sz="1050" dirty="0">
+              <a:rPr lang="en-US" sz="1200" dirty="0">
                 <a:solidFill>
                   <a:srgbClr val="475569"/>
                 </a:solidFill>
@@ -20541,7 +20541,7 @@
               </a:rPr>
               <a:t>ménages enquêtés</a:t>
             </a:r>
-            <a:endParaRPr lang="en-US" sz="1050" dirty="0"/>
+            <a:endParaRPr lang="en-US" sz="1200" dirty="0"/>
           </a:p>
           <a:p>
             <a:pPr algn="ctr" indent="0" marL="0">
@@ -20551,7 +20551,7 @@
               <a:buNone/>
             </a:pPr>
             <a:r>
-              <a:rPr lang="en-US" sz="1050" dirty="0">
+              <a:rPr lang="en-US" sz="1200" dirty="0">
                 <a:solidFill>
                   <a:srgbClr val="475569"/>
                 </a:solidFill>
@@ -20561,7 +20561,7 @@
               </a:rPr>
               <a:t>aux deux vagues</a:t>
             </a:r>
-            <a:endParaRPr lang="en-US" sz="1050" dirty="0"/>
+            <a:endParaRPr lang="en-US" sz="1200" dirty="0"/>
           </a:p>
         </p:txBody>
       </p:sp>
@@ -20613,7 +20613,7 @@
         <p:spPr>
           <a:xfrm>
             <a:off x="3410712" y="2445512"/>
-            <a:ext cx="2606040" cy="384048"/>
+            <a:ext cx="2606040" cy="566928"/>
           </a:xfrm>
           <a:prstGeom prst="rect">
             <a:avLst/>
@@ -20632,7 +20632,7 @@
               <a:buNone/>
             </a:pPr>
             <a:r>
-              <a:rPr lang="en-US" sz="1050" dirty="0">
+              <a:rPr lang="en-US" sz="1200" dirty="0">
                 <a:solidFill>
                   <a:srgbClr val="475569"/>
                 </a:solidFill>
@@ -20642,7 +20642,7 @@
               </a:rPr>
               <a:t>enfants suivis</a:t>
             </a:r>
-            <a:endParaRPr lang="en-US" sz="1050" dirty="0"/>
+            <a:endParaRPr lang="en-US" sz="1200" dirty="0"/>
           </a:p>
           <a:p>
             <a:pPr algn="ctr" indent="0" marL="0">
@@ -20652,7 +20652,7 @@
               <a:buNone/>
             </a:pPr>
             <a:r>
-              <a:rPr lang="en-US" sz="1050" dirty="0">
+              <a:rPr lang="en-US" sz="1200" dirty="0">
                 <a:solidFill>
                   <a:srgbClr val="475569"/>
                 </a:solidFill>
@@ -20662,7 +20662,7 @@
               </a:rPr>
               <a:t>individuellement</a:t>
             </a:r>
-            <a:endParaRPr lang="en-US" sz="1050" dirty="0"/>
+            <a:endParaRPr lang="en-US" sz="1200" dirty="0"/>
           </a:p>
         </p:txBody>
       </p:sp>
@@ -20714,7 +20714,7 @@
         <p:spPr>
           <a:xfrm>
             <a:off x="6163056" y="2445512"/>
-            <a:ext cx="2606040" cy="384048"/>
+            <a:ext cx="2606040" cy="566928"/>
           </a:xfrm>
           <a:prstGeom prst="rect">
             <a:avLst/>
@@ -20733,7 +20733,7 @@
               <a:buNone/>
             </a:pPr>
             <a:r>
-              <a:rPr lang="en-US" sz="1050" dirty="0">
+              <a:rPr lang="en-US" sz="1200" dirty="0">
                 <a:solidFill>
                   <a:srgbClr val="475569"/>
                 </a:solidFill>
@@ -20743,7 +20743,7 @@
               </a:rPr>
               <a:t>enfants d'un ménage</a:t>
             </a:r>
-            <a:endParaRPr lang="en-US" sz="1050" dirty="0"/>
+            <a:endParaRPr lang="en-US" sz="1200" dirty="0"/>
           </a:p>
           <a:p>
             <a:pPr algn="ctr" indent="0" marL="0">
@@ -20753,7 +20753,7 @@
               <a:buNone/>
             </a:pPr>
             <a:r>
-              <a:rPr lang="en-US" sz="1050" dirty="0">
+              <a:rPr lang="en-US" sz="1200" dirty="0">
                 <a:solidFill>
                   <a:srgbClr val="475569"/>
                 </a:solidFill>
@@ -20763,7 +20763,7 @@
               </a:rPr>
               <a:t>bénéficiaire en 2018</a:t>
             </a:r>
-            <a:endParaRPr lang="en-US" sz="1050" dirty="0"/>
+            <a:endParaRPr lang="en-US" sz="1200" dirty="0"/>
           </a:p>
         </p:txBody>
       </p:sp>
@@ -20815,7 +20815,7 @@
         <p:spPr>
           <a:xfrm>
             <a:off x="8915400" y="2445512"/>
-            <a:ext cx="2606040" cy="384048"/>
+            <a:ext cx="2606040" cy="566928"/>
           </a:xfrm>
           <a:prstGeom prst="rect">
             <a:avLst/>
@@ -20834,7 +20834,7 @@
               <a:buNone/>
             </a:pPr>
             <a:r>
-              <a:rPr lang="en-US" sz="1050" dirty="0">
+              <a:rPr lang="en-US" sz="1200" dirty="0">
                 <a:solidFill>
                   <a:srgbClr val="475569"/>
                 </a:solidFill>
@@ -20844,7 +20844,7 @@
               </a:rPr>
               <a:t>part des enfants</a:t>
             </a:r>
-            <a:endParaRPr lang="en-US" sz="1050" dirty="0"/>
+            <a:endParaRPr lang="en-US" sz="1200" dirty="0"/>
           </a:p>
           <a:p>
             <a:pPr algn="ctr" indent="0" marL="0">
@@ -20854,7 +20854,7 @@
               <a:buNone/>
             </a:pPr>
             <a:r>
-              <a:rPr lang="en-US" sz="1050" dirty="0">
+              <a:rPr lang="en-US" sz="1200" dirty="0">
                 <a:solidFill>
                   <a:srgbClr val="475569"/>
                 </a:solidFill>
@@ -20864,7 +20864,7 @@
               </a:rPr>
               <a:t>traités</a:t>
             </a:r>
-            <a:endParaRPr lang="en-US" sz="1050" dirty="0"/>
+            <a:endParaRPr lang="en-US" sz="1200" dirty="0"/>
           </a:p>
         </p:txBody>
       </p:sp>
@@ -20971,8 +20971,8 @@
         </p:nvSpPr>
         <p:spPr>
           <a:xfrm>
-            <a:off x="960120" y="4709160"/>
-            <a:ext cx="4800600" cy="960120"/>
+            <a:off x="960120" y="4663440"/>
+            <a:ext cx="4937760" cy="1097280"/>
           </a:xfrm>
           <a:prstGeom prst="rect">
             <a:avLst/>
@@ -20991,7 +20991,7 @@
               <a:buNone/>
             </a:pPr>
             <a:r>
-              <a:rPr lang="en-US" sz="1200" dirty="0">
+              <a:rPr lang="en-US" sz="1350" dirty="0">
                 <a:solidFill>
                   <a:srgbClr val="475569"/>
                 </a:solidFill>
@@ -20999,9 +20999,9 @@
                 <a:ea typeface="Calibri" pitchFamily="34" charset="-122"/>
                 <a:cs typeface="Calibri" pitchFamily="34" charset="-120"/>
               </a:rPr>
-              <a:t>L'enfant dont le ménage a reçu, en 2018, un transfert d'un expéditeur résidant hors du Sénégal et ayant déjà vécu dans le ménage. Le statut est figé à la période de base : il ne peut pas être affecté par l'évolution ultérieure des privations.</a:t>
-            </a:r>
-            <a:endParaRPr lang="en-US" sz="1200" dirty="0"/>
+              <a:t>L'enfant dont le ménage a reçu, en 2018, un transfert d'un expéditeur vivant hors du Sénégal et ayant déjà vécu dans le ménage. Le statut, figé en 2018, ne peut pas dépendre de l'évolution des privations.</a:t>
+            </a:r>
+            <a:endParaRPr lang="en-US" sz="1350" dirty="0"/>
           </a:p>
         </p:txBody>
       </p:sp>
@@ -21125,7 +21125,7 @@
               <a:buNone/>
             </a:pPr>
             <a:r>
-              <a:rPr lang="en-US" sz="1100" dirty="0">
+              <a:rPr lang="en-US" sz="1300" dirty="0">
                 <a:solidFill>
                   <a:srgbClr val="475569"/>
                 </a:solidFill>
@@ -21135,7 +21135,7 @@
               </a:rPr>
               <a:t>Soutien courant</a:t>
             </a:r>
-            <a:endParaRPr lang="en-US" sz="1100" dirty="0"/>
+            <a:endParaRPr lang="en-US" sz="1300" dirty="0"/>
           </a:p>
         </p:txBody>
       </p:sp>
@@ -21186,7 +21186,7 @@
               <a:buNone/>
             </a:pPr>
             <a:r>
-              <a:rPr lang="en-US" sz="1100" b="1" dirty="0">
+              <a:rPr lang="en-US" sz="1300" b="1" dirty="0">
                 <a:solidFill>
                   <a:srgbClr val="0F172A"/>
                 </a:solidFill>
@@ -21196,7 +21196,7 @@
               </a:rPr>
               <a:t>68,5 %</a:t>
             </a:r>
-            <a:endParaRPr lang="en-US" sz="1100" dirty="0"/>
+            <a:endParaRPr lang="en-US" sz="1300" dirty="0"/>
           </a:p>
         </p:txBody>
       </p:sp>
@@ -21225,7 +21225,7 @@
               <a:buNone/>
             </a:pPr>
             <a:r>
-              <a:rPr lang="en-US" sz="1100" dirty="0">
+              <a:rPr lang="en-US" sz="1300" dirty="0">
                 <a:solidFill>
                   <a:srgbClr val="475569"/>
                 </a:solidFill>
@@ -21235,7 +21235,7 @@
               </a:rPr>
               <a:t>Fêtes et évènements</a:t>
             </a:r>
-            <a:endParaRPr lang="en-US" sz="1100" dirty="0"/>
+            <a:endParaRPr lang="en-US" sz="1300" dirty="0"/>
           </a:p>
         </p:txBody>
       </p:sp>
@@ -21286,7 +21286,7 @@
               <a:buNone/>
             </a:pPr>
             <a:r>
-              <a:rPr lang="en-US" sz="1100" b="1" dirty="0">
+              <a:rPr lang="en-US" sz="1300" b="1" dirty="0">
                 <a:solidFill>
                   <a:srgbClr val="0F172A"/>
                 </a:solidFill>
@@ -21296,7 +21296,7 @@
               </a:rPr>
               <a:t>9,3 %</a:t>
             </a:r>
-            <a:endParaRPr lang="en-US" sz="1100" dirty="0"/>
+            <a:endParaRPr lang="en-US" sz="1300" dirty="0"/>
           </a:p>
         </p:txBody>
       </p:sp>
@@ -21325,7 +21325,7 @@
               <a:buNone/>
             </a:pPr>
             <a:r>
-              <a:rPr lang="en-US" sz="1100" dirty="0">
+              <a:rPr lang="en-US" sz="1300" dirty="0">
                 <a:solidFill>
                   <a:srgbClr val="475569"/>
                 </a:solidFill>
@@ -21335,7 +21335,7 @@
               </a:rPr>
               <a:t>Santé</a:t>
             </a:r>
-            <a:endParaRPr lang="en-US" sz="1100" dirty="0"/>
+            <a:endParaRPr lang="en-US" sz="1300" dirty="0"/>
           </a:p>
         </p:txBody>
       </p:sp>
@@ -21386,7 +21386,7 @@
               <a:buNone/>
             </a:pPr>
             <a:r>
-              <a:rPr lang="en-US" sz="1100" b="1" dirty="0">
+              <a:rPr lang="en-US" sz="1300" b="1" dirty="0">
                 <a:solidFill>
                   <a:srgbClr val="0F172A"/>
                 </a:solidFill>
@@ -21396,7 +21396,7 @@
               </a:rPr>
               <a:t>6,5 %</a:t>
             </a:r>
-            <a:endParaRPr lang="en-US" sz="1100" dirty="0"/>
+            <a:endParaRPr lang="en-US" sz="1300" dirty="0"/>
           </a:p>
         </p:txBody>
       </p:sp>
@@ -21425,7 +21425,7 @@
               <a:buNone/>
             </a:pPr>
             <a:r>
-              <a:rPr lang="en-US" sz="1100" dirty="0">
+              <a:rPr lang="en-US" sz="1300" dirty="0">
                 <a:solidFill>
                   <a:srgbClr val="475569"/>
                 </a:solidFill>
@@ -21435,7 +21435,7 @@
               </a:rPr>
               <a:t>Scolarité</a:t>
             </a:r>
-            <a:endParaRPr lang="en-US" sz="1100" dirty="0"/>
+            <a:endParaRPr lang="en-US" sz="1300" dirty="0"/>
           </a:p>
         </p:txBody>
       </p:sp>
@@ -21486,7 +21486,7 @@
               <a:buNone/>
             </a:pPr>
             <a:r>
-              <a:rPr lang="en-US" sz="1100" b="1" dirty="0">
+              <a:rPr lang="en-US" sz="1300" b="1" dirty="0">
                 <a:solidFill>
                   <a:srgbClr val="0F172A"/>
                 </a:solidFill>
@@ -21496,7 +21496,7 @@
               </a:rPr>
               <a:t>3,7 %</a:t>
             </a:r>
-            <a:endParaRPr lang="en-US" sz="1100" dirty="0"/>
+            <a:endParaRPr lang="en-US" sz="1300" dirty="0"/>
           </a:p>
         </p:txBody>
       </p:sp>
@@ -21525,7 +21525,7 @@
               <a:buNone/>
             </a:pPr>
             <a:r>
-              <a:rPr lang="en-US" sz="900" dirty="0">
+              <a:rPr lang="en-US" sz="1000" dirty="0">
                 <a:solidFill>
                   <a:srgbClr val="94A3B8"/>
                 </a:solidFill>
@@ -21535,7 +21535,7 @@
               </a:rPr>
               <a:t>Source : calcul de l'auteur, EHCVM I (2018-2019) et EHCVM II (2021-2022).</a:t>
             </a:r>
-            <a:endParaRPr lang="en-US" sz="900" dirty="0"/>
+            <a:endParaRPr lang="en-US" sz="1000" dirty="0"/>
           </a:p>
         </p:txBody>
       </p:sp>
@@ -21564,7 +21564,7 @@
               <a:buNone/>
             </a:pPr>
             <a:r>
-              <a:rPr lang="en-US" sz="950" dirty="0">
+              <a:rPr lang="en-US" sz="1000" dirty="0">
                 <a:solidFill>
                   <a:srgbClr val="94A3B8"/>
                 </a:solidFill>
@@ -21574,7 +21574,7 @@
               </a:rPr>
               <a:t>8</a:t>
             </a:r>
-            <a:endParaRPr lang="en-US" sz="950" dirty="0"/>
+            <a:endParaRPr lang="en-US" sz="1000" dirty="0"/>
           </a:p>
         </p:txBody>
       </p:sp>
@@ -21659,7 +21659,7 @@
               <a:buNone/>
             </a:pPr>
             <a:r>
-              <a:rPr lang="en-US" sz="2700" b="1" dirty="0">
+              <a:rPr lang="en-US" sz="3000" b="1" dirty="0">
                 <a:solidFill>
                   <a:srgbClr val="312E81"/>
                 </a:solidFill>
@@ -21669,7 +21669,7 @@
               </a:rPr>
               <a:t>Stratégie d'identification</a:t>
             </a:r>
-            <a:endParaRPr lang="en-US" sz="2700" dirty="0"/>
+            <a:endParaRPr lang="en-US" sz="3000" dirty="0"/>
           </a:p>
         </p:txBody>
       </p:sp>
@@ -21701,7 +21701,7 @@
               <a:buNone/>
             </a:pPr>
             <a:r>
-              <a:rPr lang="en-US" sz="1300" dirty="0">
+              <a:rPr lang="en-US" sz="1400" dirty="0">
                 <a:solidFill>
                   <a:srgbClr val="475569"/>
                 </a:solidFill>
@@ -21709,9 +21709,9 @@
                 <a:ea typeface="Calibri" pitchFamily="34" charset="-122"/>
                 <a:cs typeface="Calibri" pitchFamily="34" charset="-120"/>
               </a:rPr>
-              <a:t>Les ménages bénéficiaires diffèrent des autres : une comparaison directe attribuerait aux transferts des écarts préexistants.</a:t>
-            </a:r>
-            <a:endParaRPr lang="en-US" sz="1300" dirty="0"/>
+              <a:t>Les ménages bénéficiaires diffèrent des autres avant même le premier franc reçu.</a:t>
+            </a:r>
+            <a:endParaRPr lang="en-US" sz="1400" dirty="0"/>
           </a:p>
         </p:txBody>
       </p:sp>
@@ -21877,7 +21877,7 @@
               <a:buNone/>
             </a:pPr>
             <a:r>
-              <a:rPr lang="en-US" sz="1150" dirty="0">
+              <a:rPr lang="en-US" sz="1300" dirty="0">
                 <a:solidFill>
                   <a:srgbClr val="475569"/>
                 </a:solidFill>
@@ -21885,9 +21885,9 @@
                 <a:ea typeface="Calibri" pitchFamily="34" charset="-122"/>
                 <a:cs typeface="Calibri" pitchFamily="34" charset="-120"/>
               </a:rPr>
-              <a:t>Un logit estime, pour chaque enfant, la probabilité de vivre dans un ménage bénéficiaire, à partir des caractéristiques du ménage à la période de base.</a:t>
-            </a:r>
-            <a:endParaRPr lang="en-US" sz="1150" dirty="0"/>
+              <a:t>Un logit donne à chaque enfant sa probabilité d'être dans un ménage bénéficiaire en 2018.</a:t>
+            </a:r>
+            <a:endParaRPr lang="en-US" sz="1300" dirty="0"/>
           </a:p>
         </p:txBody>
       </p:sp>
@@ -22053,7 +22053,7 @@
               <a:buNone/>
             </a:pPr>
             <a:r>
-              <a:rPr lang="en-US" sz="1150" dirty="0">
+              <a:rPr lang="en-US" sz="1300" dirty="0">
                 <a:solidFill>
                   <a:srgbClr val="475569"/>
                 </a:solidFill>
@@ -22061,9 +22061,9 @@
                 <a:ea typeface="Calibri" pitchFamily="34" charset="-122"/>
                 <a:cs typeface="Calibri" pitchFamily="34" charset="-120"/>
               </a:rPr>
-              <a:t>Chaque enfant traité est comparé à des enfants témoins de score voisin, donc de genre, d'âge et de profil de ménage comparables.</a:t>
-            </a:r>
-            <a:endParaRPr lang="en-US" sz="1150" dirty="0"/>
+              <a:t>Chaque enfant traité est comparé à des témoins de score, d'âge et de profil voisins.</a:t>
+            </a:r>
+            <a:endParaRPr lang="en-US" sz="1300" dirty="0"/>
           </a:p>
         </p:txBody>
       </p:sp>
@@ -22229,7 +22229,7 @@
               <a:buNone/>
             </a:pPr>
             <a:r>
-              <a:rPr lang="en-US" sz="1150" dirty="0">
+              <a:rPr lang="en-US" sz="1300" dirty="0">
                 <a:solidFill>
                   <a:srgbClr val="475569"/>
                 </a:solidFill>
@@ -22237,9 +22237,9 @@
                 <a:ea typeface="Calibri" pitchFamily="34" charset="-122"/>
                 <a:cs typeface="Calibri" pitchFamily="34" charset="-120"/>
               </a:rPr>
-              <a:t>L'écart de trajectoire entre 2018 et 2021 élimine ce qui, dans les différences restantes, est inobservable mais stable dans le temps.</a:t>
-            </a:r>
-            <a:endParaRPr lang="en-US" sz="1150" dirty="0"/>
+              <a:t>L'écart de trajectoire 2018-2021 élimine ce qui est inobservable mais stable.</a:t>
+            </a:r>
+            <a:endParaRPr lang="en-US" sz="1300" dirty="0"/>
           </a:p>
         </p:txBody>
       </p:sp>
@@ -22293,7 +22293,7 @@
               <a:buNone/>
             </a:pPr>
             <a:r>
-              <a:rPr lang="en-US" sz="1300" dirty="0">
+              <a:rPr lang="en-US" sz="1400" dirty="0">
                 <a:solidFill>
                   <a:srgbClr val="FFFFFF"/>
                 </a:solidFill>
@@ -22301,9 +22301,9 @@
                 <a:ea typeface="Calibri" pitchFamily="34" charset="-122"/>
                 <a:cs typeface="Calibri" pitchFamily="34" charset="-120"/>
               </a:rPr>
-              <a:t>L'estimateur retenu, PSM-double différence (Heckman et al., 1997, 1998), corrige simultanément la sélection sur les caractéristiques observables et les effets fixes inobservables.</a:t>
-            </a:r>
-            <a:endParaRPr lang="en-US" sz="1300" dirty="0"/>
+              <a:t>PSM-double différence (Heckman et al., 1997) : sélection observable et effets fixes corrigés ensemble.</a:t>
+            </a:r>
+            <a:endParaRPr lang="en-US" sz="1400" dirty="0"/>
           </a:p>
         </p:txBody>
       </p:sp>
@@ -22332,7 +22332,7 @@
               <a:buNone/>
             </a:pPr>
             <a:r>
-              <a:rPr lang="en-US" sz="950" dirty="0">
+              <a:rPr lang="en-US" sz="1000" dirty="0">
                 <a:solidFill>
                   <a:srgbClr val="94A3B8"/>
                 </a:solidFill>
@@ -22342,7 +22342,7 @@
               </a:rPr>
               <a:t>9</a:t>
             </a:r>
-            <a:endParaRPr lang="en-US" sz="950" dirty="0"/>
+            <a:endParaRPr lang="en-US" sz="1000" dirty="0"/>
           </a:p>
         </p:txBody>
       </p:sp>
